--- a/career-management-final-project/ניהול קריירה - התמודדות עם חוסר ודאות תעסוקתי - מצגת.pptx
+++ b/career-management-final-project/ניהול קריירה - התמודדות עם חוסר ודאות תעסוקתי - מצגת.pptx
@@ -3388,7 +3388,7 @@
                 <a:ea typeface="Arial" pitchFamily="34" charset="-122"/>
                 <a:cs typeface="Arial" pitchFamily="34" charset="-120"/>
               </a:rPr>
-              <a:t>המאמר המשלים של לי, הואנג ואשפורד (2018) מוסיף: העוצמה משתנה בין תרבויות ומדינות, ובעולם העבודה החדש חוסר ביטחון הוא מצב כרוני, לא אירוע.</a:t>
+              <a:t>המאמר המשלים של לי ואחרים (Lee et al., 2018) מוסיף: העוצמה משתנה בין תרבויות ומדינות, ובעולם העבודה החדש חוסר ביטחון הוא מצב כרוני, לא אירוע.</a:t>
             </a:r>
             <a:endParaRPr lang="he-IL" sz="1400" dirty="0"/>
           </a:p>
@@ -4000,7 +4000,7 @@
                 <a:ea typeface="Arial" pitchFamily="34" charset="-122"/>
                 <a:cs typeface="Arial" pitchFamily="34" charset="-120"/>
               </a:rPr>
-              <a:t>המאמר צודק שחוסר ביטחון הוא בעיקר גורם לחץ מזיק. אבל לאור "ממשבר להזדמנות" והתרבות הישראלית של אלתור, אנחנו מאמינים שמידה של חוסר ודאות יכולה להיות מנוע לצמיחה – בתנאי שיש משאבים. בלי משאבים חוסר ודאות משתק; עם משאבים הוא מניע.</a:t>
+              <a:t>המאמר צודק שחוסר ביטחון הוא בעיקר גורם לחץ מזיק. אבל לאור "ממשבר להזדמנות" (דבדבני דקל, 2026ב) והתרבות הישראלית של אלתור, אנחנו מאמינים שמידה של חוסר ודאות יכולה להיות מנוע לצמיחה – בתנאי שיש משאבים. בלי משאבים חוסר ודאות משתק; עם משאבים הוא מניע.</a:t>
             </a:r>
             <a:endParaRPr lang="he-IL" sz="1450" dirty="0"/>
           </a:p>
@@ -5761,7 +5761,7 @@
                 <a:ea typeface="Arial" pitchFamily="34" charset="-122"/>
                 <a:cs typeface="Arial" pitchFamily="34" charset="-120"/>
               </a:rPr>
-              <a:t>מתחבר ל"שלושת סלי הכלים" מהקורס: רשת אנשים = תמיכה, זהות מקצועית = פחות איום איכותני, למידה = יכולת תעסוקה</a:t>
+              <a:t>מתחבר ל"שלושת סלי הכלים" מהקורס (דבדבני דקל, 2026א): רשת אנשים = תמיכה, זהות מקצועית = פחות איום איכותני, למידה = יכולת תעסוקה</a:t>
             </a:r>
             <a:endParaRPr lang="he-IL" sz="1350" dirty="0"/>
           </a:p>
@@ -7662,8 +7662,8 @@
         </p:nvSpPr>
         <p:spPr>
           <a:xfrm>
-            <a:off x="548640" y="1234440"/>
-            <a:ext cx="11091672" cy="4206240"/>
+            <a:off x="548640" y="1188720"/>
+            <a:ext cx="11091672" cy="3931920"/>
           </a:xfrm>
           <a:prstGeom prst="rect">
             <a:avLst/>
@@ -7682,7 +7682,7 @@
               <a:buNone/>
             </a:pPr>
             <a:r>
-              <a:rPr lang="en-US" sz="1050" dirty="0">
+              <a:rPr lang="en-US" sz="1000" dirty="0">
                 <a:solidFill>
                   <a:srgbClr val="1F2937"/>
                 </a:solidFill>
@@ -7692,7 +7692,7 @@
               </a:rPr>
               <a:t>Ashford, S. J., Lee, C., &amp; Bobko, P. (1989). Content, causes, and consequences of job insecurity: A theory-based measure and substantive test. Academy of Management Journal, 32(4), 803–829.</a:t>
             </a:r>
-            <a:endParaRPr lang="en-US" sz="1050" dirty="0"/>
+            <a:endParaRPr lang="en-US" sz="1000" dirty="0"/>
           </a:p>
           <a:p>
             <a:pPr algn="l" indent="0" marL="0">
@@ -7702,7 +7702,7 @@
               <a:buNone/>
             </a:pPr>
             <a:r>
-              <a:rPr lang="en-US" sz="1050" dirty="0">
+              <a:rPr lang="en-US" sz="1000" dirty="0">
                 <a:solidFill>
                   <a:srgbClr val="1F2937"/>
                 </a:solidFill>
@@ -7712,7 +7712,7 @@
               </a:rPr>
               <a:t>Hellgren, J., Sverke, M., &amp; Isaksson, K. (1999). A two-dimensional approach to job insecurity: Consequences for employee attitudes and well-being. European Journal of Work and Organizational Psychology, 8(2), 179–195.</a:t>
             </a:r>
-            <a:endParaRPr lang="en-US" sz="1050" dirty="0"/>
+            <a:endParaRPr lang="en-US" sz="1000" dirty="0"/>
           </a:p>
           <a:p>
             <a:pPr algn="l" indent="0" marL="0">
@@ -7722,7 +7722,7 @@
               <a:buNone/>
             </a:pPr>
             <a:r>
-              <a:rPr lang="en-US" sz="1050" dirty="0">
+              <a:rPr lang="en-US" sz="1000" dirty="0">
                 <a:solidFill>
                   <a:srgbClr val="1F2937"/>
                 </a:solidFill>
@@ -7732,7 +7732,7 @@
               </a:rPr>
               <a:t>Hobfoll, S. E. (1989). Conservation of resources: A new attempt at conceptualizing stress. American Psychologist, 44(3), 513–524.</a:t>
             </a:r>
-            <a:endParaRPr lang="en-US" sz="1050" dirty="0"/>
+            <a:endParaRPr lang="en-US" sz="1000" dirty="0"/>
           </a:p>
           <a:p>
             <a:pPr algn="l" indent="0" marL="0">
@@ -7742,7 +7742,7 @@
               <a:buNone/>
             </a:pPr>
             <a:r>
-              <a:rPr lang="en-US" sz="1050" dirty="0">
+              <a:rPr lang="en-US" sz="1000" dirty="0">
                 <a:solidFill>
                   <a:srgbClr val="1F2937"/>
                 </a:solidFill>
@@ -7752,7 +7752,7 @@
               </a:rPr>
               <a:t>Hone, L. (2019). 3 secrets of resilient people [Video]. TED Conferences. https://www.ted.com/talks/lucy_hone_the_three_secrets_of_resilient_people</a:t>
             </a:r>
-            <a:endParaRPr lang="en-US" sz="1050" dirty="0"/>
+            <a:endParaRPr lang="en-US" sz="1000" dirty="0"/>
           </a:p>
           <a:p>
             <a:pPr algn="l" indent="0" marL="0">
@@ -7762,7 +7762,7 @@
               <a:buNone/>
             </a:pPr>
             <a:r>
-              <a:rPr lang="en-US" sz="1050" dirty="0">
+              <a:rPr lang="en-US" sz="1000" dirty="0">
                 <a:solidFill>
                   <a:srgbClr val="1F2937"/>
                 </a:solidFill>
@@ -7772,7 +7772,7 @@
               </a:rPr>
               <a:t>Jiang, L., &amp; Lavaysse, L. M. (2018). Cognitive and affective job insecurity: A meta-analysis and a primary study. Journal of Management, 44(6), 2307–2342. https://doi.org/10.1177/0149206318773853</a:t>
             </a:r>
-            <a:endParaRPr lang="en-US" sz="1050" dirty="0"/>
+            <a:endParaRPr lang="en-US" sz="1000" dirty="0"/>
           </a:p>
           <a:p>
             <a:pPr algn="l" indent="0" marL="0">
@@ -7782,7 +7782,7 @@
               <a:buNone/>
             </a:pPr>
             <a:r>
-              <a:rPr lang="en-US" sz="1050" dirty="0">
+              <a:rPr lang="en-US" sz="1000" dirty="0">
                 <a:solidFill>
                   <a:srgbClr val="1F2937"/>
                 </a:solidFill>
@@ -7792,7 +7792,7 @@
               </a:rPr>
               <a:t>Lazarus, R. S., &amp; Folkman, S. (1984). Stress, appraisal, and coping. Springer.</a:t>
             </a:r>
-            <a:endParaRPr lang="en-US" sz="1050" dirty="0"/>
+            <a:endParaRPr lang="en-US" sz="1000" dirty="0"/>
           </a:p>
           <a:p>
             <a:pPr algn="l" indent="0" marL="0">
@@ -7802,7 +7802,7 @@
               <a:buNone/>
             </a:pPr>
             <a:r>
-              <a:rPr lang="en-US" sz="1050" dirty="0">
+              <a:rPr lang="en-US" sz="1000" dirty="0">
                 <a:solidFill>
                   <a:srgbClr val="1F2937"/>
                 </a:solidFill>
@@ -7812,7 +7812,7 @@
               </a:rPr>
               <a:t>Lee, C., Huang, G.-H., &amp; Ashford, S. J. (2018). Job insecurity and the changing workplace: Recent developments and the future trends in job insecurity research. Annual Review of Organizational Psychology and Organizational Behavior, 5, 335–359. https://doi.org/10.1146/annurev-orgpsych-032117-104651</a:t>
             </a:r>
-            <a:endParaRPr lang="en-US" sz="1050" dirty="0"/>
+            <a:endParaRPr lang="en-US" sz="1000" dirty="0"/>
           </a:p>
           <a:p>
             <a:pPr algn="l" indent="0" marL="0">
@@ -7822,7 +7822,7 @@
               <a:buNone/>
             </a:pPr>
             <a:r>
-              <a:rPr lang="en-US" sz="1050" dirty="0">
+              <a:rPr lang="en-US" sz="1000" dirty="0">
                 <a:solidFill>
                   <a:srgbClr val="1F2937"/>
                 </a:solidFill>
@@ -7832,7 +7832,7 @@
               </a:rPr>
               <a:t>Russo, M., Shteigman, A., &amp; Carmeli, A. (2016). Workplace and family support and work–life balance: Implications for individual psychological availability and energy at work. The Journal of Positive Psychology, 11(2), 173–188.</a:t>
             </a:r>
-            <a:endParaRPr lang="en-US" sz="1050" dirty="0"/>
+            <a:endParaRPr lang="en-US" sz="1000" dirty="0"/>
           </a:p>
           <a:p>
             <a:pPr algn="l" indent="0" marL="0">
@@ -7842,7 +7842,7 @@
               <a:buNone/>
             </a:pPr>
             <a:r>
-              <a:rPr lang="en-US" sz="1050" dirty="0">
+              <a:rPr lang="en-US" sz="1000" dirty="0">
                 <a:solidFill>
                   <a:srgbClr val="1F2937"/>
                 </a:solidFill>
@@ -7852,7 +7852,7 @@
               </a:rPr>
               <a:t>Schein, E. H. (1996). Career anchors revisited: Implications for career development in the 21st century. Academy of Management Executive, 10(4), 80–88.</a:t>
             </a:r>
-            <a:endParaRPr lang="en-US" sz="1050" dirty="0"/>
+            <a:endParaRPr lang="en-US" sz="1000" dirty="0"/>
           </a:p>
           <a:p>
             <a:pPr algn="l" indent="0" marL="0">
@@ -7862,7 +7862,7 @@
               <a:buNone/>
             </a:pPr>
             <a:r>
-              <a:rPr lang="en-US" sz="1050" dirty="0">
+              <a:rPr lang="en-US" sz="1000" dirty="0">
                 <a:solidFill>
                   <a:srgbClr val="1F2937"/>
                 </a:solidFill>
@@ -7872,7 +7872,7 @@
               </a:rPr>
               <a:t>Shoss, M. K. (2017). Job insecurity: An integrative review and agenda for future research. Journal of Management, 43(6), 1911–1939. https://doi.org/10.1177/0149206317691574</a:t>
             </a:r>
-            <a:endParaRPr lang="en-US" sz="1050" dirty="0"/>
+            <a:endParaRPr lang="en-US" sz="1000" dirty="0"/>
           </a:p>
         </p:txBody>
       </p:sp>
@@ -7884,8 +7884,8 @@
         </p:nvSpPr>
         <p:spPr>
           <a:xfrm>
-            <a:off x="548640" y="5486400"/>
-            <a:ext cx="11091672" cy="868680"/>
+            <a:off x="548640" y="5120640"/>
+            <a:ext cx="11091672" cy="1280160"/>
           </a:xfrm>
           <a:prstGeom prst="rect">
             <a:avLst/>
@@ -7918,6 +7918,9 @@
           </a:p>
           <a:p>
             <a:pPr algn="r" indent="0" marL="0">
+              <a:spcAft>
+                <a:spcPts val="500"/>
+              </a:spcAft>
               <a:buNone/>
             </a:pPr>
             <a:r>
@@ -7929,7 +7932,44 @@
                 <a:ea typeface="Arial" pitchFamily="34" charset="-122"/>
                 <a:cs typeface="Arial" pitchFamily="34" charset="-120"/>
               </a:rPr>
-              <a:t>TheMarker (2026, 21 ביוני). הקשיים של מנהלי הייטק ב-2026: גיוס עובדים מתאימים – והתייעלות AI.</a:t>
+              <a:t>דבדבני דקל, מ' (2026א). מחזון ורעיון למציאות ממשית [מצגת הרצאה]. ניהול קריירה בארגונים, הקריה האקדמית אונו.</a:t>
+            </a:r>
+            <a:endParaRPr lang="he-IL" sz="1050" dirty="0"/>
+          </a:p>
+          <a:p>
+            <a:pPr algn="r" indent="0" marL="0">
+              <a:spcAft>
+                <a:spcPts val="500"/>
+              </a:spcAft>
+              <a:buNone/>
+            </a:pPr>
+            <a:r>
+              <a:rPr lang="he-IL" altLang="en-US" sz="1050" dirty="0">
+                <a:solidFill>
+                  <a:srgbClr val="1F2937"/>
+                </a:solidFill>
+                <a:latin typeface="Arial" pitchFamily="34" charset="0"/>
+                <a:ea typeface="Arial" pitchFamily="34" charset="-122"/>
+                <a:cs typeface="Arial" pitchFamily="34" charset="-120"/>
+              </a:rPr>
+              <a:t>דבדבני דקל, מ' (2026ב). עסקים בצל הקורונה: ממשבר להזדמנות, איך עושים את זה? [מצגת הרצאה]. ניהול קריירה בארגונים, הקריה האקדמית אונו.</a:t>
+            </a:r>
+            <a:endParaRPr lang="he-IL" sz="1050" dirty="0"/>
+          </a:p>
+          <a:p>
+            <a:pPr algn="r" indent="0" marL="0">
+              <a:buNone/>
+            </a:pPr>
+            <a:r>
+              <a:rPr lang="he-IL" altLang="en-US" sz="1050" dirty="0">
+                <a:solidFill>
+                  <a:srgbClr val="1F2937"/>
+                </a:solidFill>
+                <a:latin typeface="Arial" pitchFamily="34" charset="0"/>
+                <a:ea typeface="Arial" pitchFamily="34" charset="-122"/>
+                <a:cs typeface="Arial" pitchFamily="34" charset="-120"/>
+              </a:rPr>
+              <a:t>הקשיים של מנהלי הייטק ב-2026: גיוס עובדים מתאימים והתייעלות AI. (2026, 21 ביוני). TheMarker.</a:t>
             </a:r>
             <a:endParaRPr lang="he-IL" sz="1050" dirty="0"/>
           </a:p>
@@ -10759,7 +10799,7 @@
                 <a:ea typeface="Arial" pitchFamily="34" charset="-122"/>
                 <a:cs typeface="Arial" pitchFamily="34" charset="-120"/>
               </a:rPr>
-              <a:t>גלי פיטורים ו"התייעלות AI" בראש סדר היום של מנהלים ב-2026 (TheMarker, 21.6.2026)</a:t>
+              <a:t>גלי פיטורים ו"התייעלות AI" בראש סדר היום של מנהלים ב-2026 ("הקשיים של מנהלי הייטק", 2026)</a:t>
             </a:r>
             <a:endParaRPr lang="he-IL" sz="1250" dirty="0"/>
           </a:p>
@@ -11723,7 +11763,7 @@
                 <a:ea typeface="Arial" pitchFamily="34" charset="-122"/>
                 <a:cs typeface="Arial" pitchFamily="34" charset="-120"/>
               </a:rPr>
-              <a:t>Lee, C., Huang, G.-H., &amp; Ashford, S. J. (2018). Job insecurity and the changing workplace. Annual Review of Organizational Psychology and Organizational Behavior, 5, 335–359.</a:t>
+              <a:t>Lee, C., Huang, G.-H., &amp; Ashford, S. J. (2018). Job insecurity and the changing workplace. Annual Review of Organizational Psychology and Organizational Behavior, 5, 335-359.</a:t>
             </a:r>
             <a:endParaRPr lang="en-US" sz="1250" dirty="0"/>
           </a:p>

--- a/career-management-final-project/ניהול קריירה - התמודדות עם חוסר ודאות תעסוקתי - מצגת.pptx
+++ b/career-management-final-project/ניהול קריירה - התמודדות עם חוסר ודאות תעסוקתי - מצגת.pptx
@@ -721,7 +721,7 @@
           <a:p>
             <a:r>
               <a:rPr lang="en-US" dirty="0"/>
-              <a:t>פתיחה (30 שניות): שלום לכולם, אנחנו [שמות]. הנושא שלנו הוא התמודדות עם חוסר ודאות תעסוקתי – נושא שנוגע כמעט לכל אחד בחדר, בין אם בגלל הבינה המלאכותית, המצב בהייטק, המילואים או פשוט ההתחלה של הקריירה.</a:t>
+              <a:t>פתיחה (30 שניות): שלום לכולם, אנחנו [שמות]. הנושא שלנו הוא התמודדות עם חוסר ודאות תעסוקתי. השאלה שנשאל היום: כשאנחנו מפחדים לאבד את העבודה, זה עושה אותנו טובים יותר או גרוע יותר בניהול הקריירה שלנו? מטא-אנליזה של 237 מחקרים נותנת תשובה.</a:t>
             </a:r>
             <a:endParaRPr lang="en-US" dirty="0"/>
           </a:p>
@@ -809,7 +809,7 @@
           <a:p>
             <a:r>
               <a:rPr lang="en-US" dirty="0"/>
-              <a:t>מטא-אנליזה = מחקר שמאחד סטטיסטית מאות מחקרים. 535 מדגמים, 51 מתוך 56 תוצאות. הממצא החשוב לנו: הרגש מתווך – ולכן עבודה על הדאגה חשובה לא פחות מעבודה על המצב.</a:t>
+              <a:t>זה הלב של המסר. הממצאים מראים מעגל: איום, הגנה על משאבים, פחות השקעה בעצמי, ואז פחות משאבים לאיום הבא. הדרך היחידה לצאת היא לשבור את המעגל מראש.</a:t>
             </a:r>
             <a:endParaRPr lang="en-US" dirty="0"/>
           </a:p>
@@ -897,7 +897,7 @@
           <a:p>
             <a:r>
               <a:rPr lang="en-US" dirty="0"/>
-              <a:t>להגיד את הביקורת בקול: המאמר לא מכיר את המציאות הישראלית של 2026. ועם זאת, המסגרת שלו מחזיקה מעמד מצוין – זו בדיוק הסיבה שהשתמשנו בה כדי לבנות כלי.</a:t>
+              <a:t>להגיד את הביקורת בקול. ועדיין, זה המאמר שהכי שינה את הדרך שבה אנחנו חושבים על הקריירה שלנו.</a:t>
             </a:r>
             <a:endParaRPr lang="en-US" dirty="0"/>
           </a:p>
@@ -985,7 +985,7 @@
           <a:p>
             <a:r>
               <a:rPr lang="en-US" dirty="0"/>
-              <a:t>להקרין כ-90 שניות (מומלץ מהדקה ~9:30, שבה הון מציגה את שלושת העקרונות; לבדוק את הטיים-קוד מראש). לחבר כל עיקרון לרכיב במודל: קבלת האיום, מיקוד בשליטה, ויסות רגשי. חלופה: Jon Youshaei &amp; Michelle Weise – "How do you prepare for jobs that don't exist yet?" (TED).</a:t>
+              <a:t>להקרין כ-90 שניות (לבדוק את הטיים-קוד מראש). לחבר את העיקרון השלישי לממצא: הסתרת ידע וחיפוש עבודה בלבד הן תגובות ש"פוגעות בי" בטווח הארוך; פיתוח מיומנויות "עוזר לי".</a:t>
             </a:r>
             <a:endParaRPr lang="en-US" dirty="0"/>
           </a:p>
@@ -1073,7 +1073,7 @@
           <a:p>
             <a:r>
               <a:rPr lang="en-US" dirty="0"/>
-              <a:t>זה הכלי שאנחנו משאירים לכיתה. כל שורה = משתנה ממתן מהמאמר שהפכנו לפעולה. השורה הרביעית היא הבחירה המודעת במנגנון הפרואקטיבי.</a:t>
+              <a:t>זה הכלי שאנחנו משאירים לכיתה. שלב 2 הוא הלב: לשבור את המעגל על ידי השקעה בפיתוח מיומנויות לפני שהאיום מדלדל את היכולת לעשות זאת.</a:t>
             </a:r>
             <a:endParaRPr lang="en-US" dirty="0"/>
           </a:p>
@@ -1161,7 +1161,7 @@
           <a:p>
             <a:r>
               <a:rPr lang="en-US" dirty="0"/>
-              <a:t>לחלק כרטיסים מודפסים (או להשאיר את השקופית). 2 דקות. אחר כך לשמוע 2–3 זוגות. לחבר את התשובות למודל: "שימו לב שרובכם קפצתם ישר לפעולה – זה המנגנון הפרואקטיבי. מי חשב קודם על הכרית הכלכלית?"</a:t>
+              <a:t>לחלק כרטיסים מודפסים (או להשאיר את השקופית). 2 דקות. אחר כך לשמוע 2 עד 3 זוגות. לחבר למאמר: "שימו לב כמה מכם קפצו ישר לחיפוש עבודה. זו בדיוק תגובת ה"הלאה" שהמטא-אנליזה מצאה. מי חשב על מה ללמוד?"</a:t>
             </a:r>
             <a:endParaRPr lang="en-US" dirty="0"/>
           </a:p>
@@ -1249,7 +1249,7 @@
           <a:p>
             <a:r>
               <a:rPr lang="en-US" dirty="0"/>
-              <a:t>לחזור לתוצאות הסקר מהפתיחה: "מי שסימן 1–2: המאמר אומר שזה לא גזירת גורל. מי שסימן 5: יופי, אבל האיום האיכותני קיים גם אצלכם". לסיים במסר ולפתוח לשאלות.</a:t>
+              <a:t>לחזור לתוצאות הסקר מהפתיחה: "מי שסימן 1 או 2: המאמר אומר שהתגובה הטבעית שלכם תהיה לברוח. עצרו רגע ותשאלו מה ללמוד. מי שסימן 5: יופי, זה הזמן להשקיע, כי עכשיו יש לכם משאבים". לסיים במסר ולפתוח לשאלות.</a:t>
             </a:r>
             <a:endParaRPr lang="en-US" dirty="0"/>
           </a:p>
@@ -1425,7 +1425,7 @@
           <a:p>
             <a:r>
               <a:rPr lang="en-US" dirty="0"/>
-              <a:t>מעבר מהיר על המבנה. להדגיש שיש סרטון והפעלה – כדי שהכיתה תישאר ערנית.</a:t>
+              <a:t>מעבר מהיר על המבנה. להדגיש שיש סרטון והפעלה.</a:t>
             </a:r>
             <a:endParaRPr lang="en-US" dirty="0"/>
           </a:p>
@@ -1513,7 +1513,7 @@
           <a:p>
             <a:r>
               <a:rPr lang="en-US" dirty="0"/>
-              <a:t>להריץ סקר מנטימטר (או הרמת ידיים). לצלם מסך של התוצאות. לומר: "שימו לב לפיזור – זה בדיוק מה שהמאמר מסביר: אותו שוק, אותה כיתה, תחושות שונות לגמרי".</a:t>
+              <a:t>להריץ סקר מנטימטר (או הרמת ידיים). לצלם מסך של התוצאות. לומר: "שימו לב לפיזור. אותו שוק, אותה כיתה, תחושות שונות לגמרי".</a:t>
             </a:r>
             <a:endParaRPr lang="en-US" dirty="0"/>
           </a:p>
@@ -1601,7 +1601,7 @@
           <a:p>
             <a:r>
               <a:rPr lang="en-US" dirty="0"/>
-              <a:t>כתבת עיתון: להציג את הכותרת של TheMarker (21.6.2026) – "הקשיים של מנהלי הייטק ב-2026: גיוס עובדים מתאימים – והתייעלות AI". נתון בנק ישראל: כחמישית מהמועסקים במקצועות תחליפיים. המסר: חוסר ביטחון הוא לא רק "האם אפוטר" אלא "האם התפקיד שלי ישתנה".</a:t>
+              <a:t>כתבת עיתון: להציג את הכותרת של TheMarker (21.6.2026). נתון בנק ישראל: כחמישית מהמועסקים במקצועות תחליפיים. המסר: חוסר ביטחון הוא לא רק "האם אפוטר" אלא "האם התפקיד שלי ישתנה".</a:t>
             </a:r>
             <a:endParaRPr lang="en-US" dirty="0"/>
           </a:p>
@@ -1689,7 +1689,7 @@
           <a:p>
             <a:r>
               <a:rPr lang="en-US" dirty="0"/>
-              <a:t>להציג את המאמר במשפט: זו לא סקירה של מחקר אחד אלא "מפה" של כל התחום. מינדי שוס היא חוקרת בפסיכולוגיה ארגונית מאוניברסיטת סנטרל פלורידה. בהגשה בשלשה – להרחיב על המאמר של לי, הואנג ואשפורד: סקירה גלובלית ובין-תרבותית, מדגישה את עולם העבודה המשתנה.</a:t>
+              <a:t>להציג את המאמר במשפט: זו לא סקירה של מחקר אחד אלא איחוד סטטיסטי של 237 מחקרים. מגנוס סברקה ויוהני הלגרן מאוניברסיטת סטוקהולם חוקרים את הנושא כבר 30 שנה. בהגשה בשלשה: להרחיב על המאמר של צ'ונג ואחרים בשקופית 9.</a:t>
             </a:r>
             <a:endParaRPr lang="en-US" dirty="0"/>
           </a:p>
@@ -1777,7 +1777,7 @@
           <a:p>
             <a:r>
               <a:rPr lang="en-US" dirty="0"/>
-              <a:t>ההגדרה בארבעה רכיבים: תפיסה, איום, המשכיות/יציבות, המשרה הנוכחית. הטבלה: כמותי לעומת איכותני, קוגניטיבי לעומת רגשי. להדגיש: בעידן ה-AI האיום האיכותני חשוב לא פחות.</a:t>
+              <a:t>שתי תחזיות מנוגדות. האינטואיציה של רוב האנשים היא תחזית א: "פחד מחדד". התיאוריה חוזה את ב. עכשיו נראה מה 237 מחקרים אומרים.</a:t>
             </a:r>
             <a:endParaRPr lang="en-US" dirty="0"/>
           </a:p>
@@ -1865,7 +1865,7 @@
           <a:p>
             <a:r>
               <a:rPr lang="en-US" dirty="0"/>
-              <a:t>לקרוא את התרשים מימין לשמאל: גורמים בשלוש רמות יוצרים תחושת חוסר ביטחון; היא מובילה לתוצאות דרך ארבעה מנגנונים; והפס הצהוב למטה – המשתנים הממתנים – מסביר למה אצל אחד זה משתק ואצל אחר זה מניע.</a:t>
+              <a:t>לקרוא: מימין, כל מה שקשור להתקדמות למעלה יורד עם חוסר הביטחון. משמאל, כל מה שקשור לבריחה והגנה עולה. לשים לב להסתרת ידע: תגובה רציונלית של עובד שחושב שהידע שלו הוא מה שמגן עליו, והרסנית לארגון.</a:t>
             </a:r>
             <a:endParaRPr lang="en-US" dirty="0"/>
           </a:p>
@@ -1953,7 +1953,7 @@
           <a:p>
             <a:r>
               <a:rPr lang="en-US" dirty="0"/>
-              <a:t>דוגמה מהחיים: בזמן צמצומים, עמית עובד עד מאוחר, לא מתלונן – ובמקביל מראיין בחברות אחרות. זה לא סתירה, זה שני מנגנונים שפועלים במקביל. למנהלים: מאמץ מוגבר בתקופת אי-ודאות הוא לא בהכרח מחויבות – לפעמים זה פחד.</a:t>
+              <a:t>מטא-אנליזה = מחקר שמאחד סטטיסטית מחקרים רבים. להסביר בקצרה חתך לעומת אורך: במחקר חתך מודדים הכול באותו רגע, ואז קשרים נראים חזקים יותר. זו כנות של המחברים שאהבנו.</a:t>
             </a:r>
             <a:endParaRPr lang="en-US" dirty="0"/>
           </a:p>
@@ -2041,7 +2041,7 @@
           <a:p>
             <a:r>
               <a:rPr lang="en-US" dirty="0"/>
-              <a:t>כאן נמצאת הבשורה של המאמר לניהול קריירה: על מאפייני האיום השליטה שלנו מוגבלת, אבל על שתי הפגיעויות – כלכלית ופסיכולוגית – אפשר לעבוד כבר עכשיו, בתור סטודנטים.</a:t>
+              <a:t>המאמר הזה מסביר מאיפה מגיע חוסר הביטחון של 2026 ומה ממתן אותו. לחבר לסקר הפתיחה: מי שסימן 1 או 2, ייתכן שזו בדיוק המודעות לבינה מלאכותית. בהגשה בזוג אפשר לקצר שקופית זו לחצי דקה.</a:t>
             </a:r>
             <a:endParaRPr lang="en-US" dirty="0"/>
           </a:p>
@@ -2575,7 +2575,7 @@
                 <a:ea typeface="Arial" pitchFamily="34" charset="-122"/>
                 <a:cs typeface="Arial" pitchFamily="34" charset="-120"/>
               </a:rPr>
-              <a:t>איך מנהלים קריירה כשהוודאות היחידה היא חוסר הוודאות?</a:t>
+              <a:t>הלאה או למעלה? מה חוסר ביטחון תעסוקתי עושה לקריירה שלנו</a:t>
             </a:r>
             <a:endParaRPr lang="he-IL" sz="2200" dirty="0"/>
           </a:p>
@@ -2589,8 +2589,8 @@
         </p:nvSpPr>
         <p:spPr>
           <a:xfrm>
-            <a:off x="731520" y="3520440"/>
-            <a:ext cx="10698480" cy="640080"/>
+            <a:off x="731520" y="3474720"/>
+            <a:ext cx="10698480" cy="731520"/>
           </a:xfrm>
           <a:prstGeom prst="rect">
             <a:avLst/>
@@ -2606,7 +2606,7 @@
               <a:buNone/>
             </a:pPr>
             <a:r>
-              <a:rPr lang="en-US" sz="1300" dirty="0">
+              <a:rPr lang="en-US" sz="1200" dirty="0">
                 <a:solidFill>
                   <a:srgbClr val="CAD3E5"/>
                 </a:solidFill>
@@ -2614,9 +2614,9 @@
                 <a:ea typeface="Arial" pitchFamily="34" charset="-122"/>
                 <a:cs typeface="Arial" pitchFamily="34" charset="-120"/>
               </a:rPr>
-              <a:t>Shoss, M. K. (2017). Job insecurity: An integrative review and agenda for future research. Journal of Management, 43(6), 1911–1939.</a:t>
-            </a:r>
-            <a:endParaRPr lang="en-US" sz="1300" dirty="0"/>
+              <a:t>Låstad, L., Pienaar, J., Näswall, K., Richter, A., Hellgren, J., &amp; Sverke, M. (2025). Moving on up now? A meta-analysis of the associations between job insecurity and career-related outcomes. Scandinavian Journal of Work and Organizational Psychology, 10(1), Article 2.</a:t>
+            </a:r>
+            <a:endParaRPr lang="en-US" sz="1200" dirty="0"/>
           </a:p>
         </p:txBody>
       </p:sp>
@@ -2907,7 +2907,7 @@
               <a:buNone/>
             </a:pPr>
             <a:r>
-              <a:rPr lang="he-IL" altLang="en-US" sz="3200" b="1" dirty="0">
+              <a:rPr lang="he-IL" altLang="en-US" sz="3000" b="1" dirty="0">
                 <a:solidFill>
                   <a:srgbClr val="14213D"/>
                 </a:solidFill>
@@ -2915,9 +2915,9 @@
                 <a:ea typeface="Arial" pitchFamily="34" charset="-122"/>
                 <a:cs typeface="Arial" pitchFamily="34" charset="-120"/>
               </a:rPr>
-              <a:t>מה אומרים המספרים? (Jiang &amp; Lavaysse, 2018)</a:t>
-            </a:r>
-            <a:endParaRPr lang="he-IL" sz="3200" dirty="0"/>
+              <a:t>התובנה המרכזית: מעגל קסמים</a:t>
+            </a:r>
+            <a:endParaRPr lang="he-IL" sz="3000" dirty="0"/>
           </a:p>
         </p:txBody>
       </p:sp>
@@ -2929,20 +2929,20 @@
         </p:nvSpPr>
         <p:spPr>
           <a:xfrm>
-            <a:off x="8074152" y="1371600"/>
-            <a:ext cx="3566160" cy="2377440"/>
+            <a:off x="8595360" y="1463040"/>
+            <a:ext cx="3063240" cy="1417320"/>
           </a:xfrm>
           <a:prstGeom prst="roundRect">
             <a:avLst>
-              <a:gd name="adj" fmla="val 4615"/>
+              <a:gd name="adj" fmla="val 7742"/>
             </a:avLst>
           </a:prstGeom>
           <a:solidFill>
-            <a:srgbClr val="FFFFFF"/>
+            <a:srgbClr val="E76F51"/>
           </a:solidFill>
           <a:ln w="12700">
             <a:solidFill>
-              <a:srgbClr val="FFFFFF"/>
+              <a:srgbClr val="E76F51"/>
             </a:solidFill>
             <a:prstDash val="solid"/>
           </a:ln>
@@ -2963,8 +2963,8 @@
         </p:nvSpPr>
         <p:spPr>
           <a:xfrm>
-            <a:off x="8257032" y="1600200"/>
-            <a:ext cx="3200400" cy="1005840"/>
+            <a:off x="8778240" y="1572768"/>
+            <a:ext cx="2697480" cy="731520"/>
           </a:xfrm>
           <a:prstGeom prst="rect">
             <a:avLst/>
@@ -2980,17 +2980,17 @@
               <a:buNone/>
             </a:pPr>
             <a:r>
-              <a:rPr lang="he-IL" altLang="en-US" sz="4800" b="1" dirty="0">
-                <a:solidFill>
-                  <a:srgbClr val="E76F51"/>
-                </a:solidFill>
-                <a:latin typeface="Arial" pitchFamily="34" charset="0"/>
-                <a:ea typeface="Arial" pitchFamily="34" charset="-122"/>
-                <a:cs typeface="Arial" pitchFamily="34" charset="-120"/>
-              </a:rPr>
-              <a:t>535</a:t>
-            </a:r>
-            <a:endParaRPr lang="he-IL" sz="4800" dirty="0"/>
+              <a:rPr lang="he-IL" altLang="en-US" sz="1450" b="1" dirty="0">
+                <a:solidFill>
+                  <a:srgbClr val="FFFFFF"/>
+                </a:solidFill>
+                <a:latin typeface="Arial" pitchFamily="34" charset="0"/>
+                <a:ea typeface="Arial" pitchFamily="34" charset="-122"/>
+                <a:cs typeface="Arial" pitchFamily="34" charset="-120"/>
+              </a:rPr>
+              <a:t>חוסר ביטחון תעסוקתי</a:t>
+            </a:r>
+            <a:endParaRPr lang="he-IL" sz="1450" dirty="0"/>
           </a:p>
         </p:txBody>
       </p:sp>
@@ -3002,8 +3002,8 @@
         </p:nvSpPr>
         <p:spPr>
           <a:xfrm>
-            <a:off x="8348472" y="2651760"/>
-            <a:ext cx="3017520" cy="1005840"/>
+            <a:off x="8778240" y="2304288"/>
+            <a:ext cx="2697480" cy="502920"/>
           </a:xfrm>
           <a:prstGeom prst="rect">
             <a:avLst/>
@@ -3019,17 +3019,17 @@
               <a:buNone/>
             </a:pPr>
             <a:r>
-              <a:rPr lang="he-IL" altLang="en-US" sz="1400" dirty="0">
-                <a:solidFill>
-                  <a:srgbClr val="1F2937"/>
-                </a:solidFill>
-                <a:latin typeface="Arial" pitchFamily="34" charset="0"/>
-                <a:ea typeface="Arial" pitchFamily="34" charset="-122"/>
-                <a:cs typeface="Arial" pitchFamily="34" charset="-120"/>
-              </a:rPr>
-              <a:t>מדגמים בלתי תלויים במטא-אנליזה</a:t>
-            </a:r>
-            <a:endParaRPr lang="he-IL" sz="1400" dirty="0"/>
+              <a:rPr lang="he-IL" altLang="en-US" sz="1150" dirty="0">
+                <a:solidFill>
+                  <a:srgbClr val="F3F4F6"/>
+                </a:solidFill>
+                <a:latin typeface="Arial" pitchFamily="34" charset="0"/>
+                <a:ea typeface="Arial" pitchFamily="34" charset="-122"/>
+                <a:cs typeface="Arial" pitchFamily="34" charset="-120"/>
+              </a:rPr>
+              <a:t>האיום על המשרה</a:t>
+            </a:r>
+            <a:endParaRPr lang="he-IL" sz="1150" dirty="0"/>
           </a:p>
         </p:txBody>
       </p:sp>
@@ -3041,20 +3041,20 @@
         </p:nvSpPr>
         <p:spPr>
           <a:xfrm>
-            <a:off x="4311396" y="1371600"/>
-            <a:ext cx="3566160" cy="2377440"/>
+            <a:off x="4572000" y="3246120"/>
+            <a:ext cx="3063240" cy="1417320"/>
           </a:xfrm>
           <a:prstGeom prst="roundRect">
             <a:avLst>
-              <a:gd name="adj" fmla="val 4615"/>
+              <a:gd name="adj" fmla="val 7742"/>
             </a:avLst>
           </a:prstGeom>
           <a:solidFill>
-            <a:srgbClr val="FFFFFF"/>
+            <a:srgbClr val="D9822B"/>
           </a:solidFill>
           <a:ln w="12700">
             <a:solidFill>
-              <a:srgbClr val="FFFFFF"/>
+              <a:srgbClr val="D9822B"/>
             </a:solidFill>
             <a:prstDash val="solid"/>
           </a:ln>
@@ -3075,8 +3075,8 @@
         </p:nvSpPr>
         <p:spPr>
           <a:xfrm>
-            <a:off x="4494276" y="1600200"/>
-            <a:ext cx="3200400" cy="1005840"/>
+            <a:off x="4754880" y="3355848"/>
+            <a:ext cx="2697480" cy="731520"/>
           </a:xfrm>
           <a:prstGeom prst="rect">
             <a:avLst/>
@@ -3092,17 +3092,17 @@
               <a:buNone/>
             </a:pPr>
             <a:r>
-              <a:rPr lang="he-IL" altLang="en-US" sz="4800" b="1" dirty="0">
-                <a:solidFill>
-                  <a:srgbClr val="E76F51"/>
-                </a:solidFill>
-                <a:latin typeface="Arial" pitchFamily="34" charset="0"/>
-                <a:ea typeface="Arial" pitchFamily="34" charset="-122"/>
-                <a:cs typeface="Arial" pitchFamily="34" charset="-120"/>
-              </a:rPr>
-              <a:t>51 / 56</a:t>
-            </a:r>
-            <a:endParaRPr lang="he-IL" sz="4800" dirty="0"/>
+              <a:rPr lang="he-IL" altLang="en-US" sz="1450" b="1" dirty="0">
+                <a:solidFill>
+                  <a:srgbClr val="FFFFFF"/>
+                </a:solidFill>
+                <a:latin typeface="Arial" pitchFamily="34" charset="0"/>
+                <a:ea typeface="Arial" pitchFamily="34" charset="-122"/>
+                <a:cs typeface="Arial" pitchFamily="34" charset="-120"/>
+              </a:rPr>
+              <a:t>פחות פיתוח מיומנויות, פחות יכולת תעסוקה</a:t>
+            </a:r>
+            <a:endParaRPr lang="he-IL" sz="1450" dirty="0"/>
           </a:p>
         </p:txBody>
       </p:sp>
@@ -3114,8 +3114,8 @@
         </p:nvSpPr>
         <p:spPr>
           <a:xfrm>
-            <a:off x="4585716" y="2651760"/>
-            <a:ext cx="3017520" cy="1005840"/>
+            <a:off x="4754880" y="4087368"/>
+            <a:ext cx="2697480" cy="502920"/>
           </a:xfrm>
           <a:prstGeom prst="rect">
             <a:avLst/>
@@ -3131,17 +3131,17 @@
               <a:buNone/>
             </a:pPr>
             <a:r>
-              <a:rPr lang="he-IL" altLang="en-US" sz="1400" dirty="0">
-                <a:solidFill>
-                  <a:srgbClr val="1F2937"/>
-                </a:solidFill>
-                <a:latin typeface="Arial" pitchFamily="34" charset="0"/>
-                <a:ea typeface="Arial" pitchFamily="34" charset="-122"/>
-                <a:cs typeface="Arial" pitchFamily="34" charset="-120"/>
-              </a:rPr>
-              <a:t>תוצאות שנמצאו קשורות באופן מובהק לחוסר ביטחון תעסוקתי</a:t>
-            </a:r>
-            <a:endParaRPr lang="he-IL" sz="1400" dirty="0"/>
+              <a:rPr lang="he-IL" altLang="en-US" sz="1150" dirty="0">
+                <a:solidFill>
+                  <a:srgbClr val="F3F4F6"/>
+                </a:solidFill>
+                <a:latin typeface="Arial" pitchFamily="34" charset="0"/>
+                <a:ea typeface="Arial" pitchFamily="34" charset="-122"/>
+                <a:cs typeface="Arial" pitchFamily="34" charset="-120"/>
+              </a:rPr>
+              <a:t>מגנים על מה שנשאר במקום להשקיע</a:t>
+            </a:r>
+            <a:endParaRPr lang="he-IL" sz="1150" dirty="0"/>
           </a:p>
         </p:txBody>
       </p:sp>
@@ -3153,12 +3153,12 @@
         </p:nvSpPr>
         <p:spPr>
           <a:xfrm>
-            <a:off x="548640" y="1371600"/>
-            <a:ext cx="3566160" cy="2377440"/>
+            <a:off x="548640" y="1463040"/>
+            <a:ext cx="3063240" cy="1417320"/>
           </a:xfrm>
           <a:prstGeom prst="roundRect">
             <a:avLst>
-              <a:gd name="adj" fmla="val 4615"/>
+              <a:gd name="adj" fmla="val 7742"/>
             </a:avLst>
           </a:prstGeom>
           <a:solidFill>
@@ -3187,8 +3187,8 @@
         </p:nvSpPr>
         <p:spPr>
           <a:xfrm>
-            <a:off x="731520" y="1600200"/>
-            <a:ext cx="3200400" cy="1005840"/>
+            <a:off x="731520" y="1572768"/>
+            <a:ext cx="2697480" cy="731520"/>
           </a:xfrm>
           <a:prstGeom prst="rect">
             <a:avLst/>
@@ -3204,17 +3204,17 @@
               <a:buNone/>
             </a:pPr>
             <a:r>
-              <a:rPr lang="he-IL" altLang="en-US" sz="3400" b="1" dirty="0">
-                <a:solidFill>
-                  <a:srgbClr val="FCA311"/>
-                </a:solidFill>
-                <a:latin typeface="Arial" pitchFamily="34" charset="0"/>
-                <a:ea typeface="Arial" pitchFamily="34" charset="-122"/>
-                <a:cs typeface="Arial" pitchFamily="34" charset="-120"/>
-              </a:rPr>
-              <a:t>רגש &gt; מחשבה</a:t>
-            </a:r>
-            <a:endParaRPr lang="he-IL" sz="3400" dirty="0"/>
+              <a:rPr lang="he-IL" altLang="en-US" sz="1450" b="1" dirty="0">
+                <a:solidFill>
+                  <a:srgbClr val="FFFFFF"/>
+                </a:solidFill>
+                <a:latin typeface="Arial" pitchFamily="34" charset="0"/>
+                <a:ea typeface="Arial" pitchFamily="34" charset="-122"/>
+                <a:cs typeface="Arial" pitchFamily="34" charset="-120"/>
+              </a:rPr>
+              <a:t>פחות משאבים להתמודד עם האיום הבא</a:t>
+            </a:r>
+            <a:endParaRPr lang="he-IL" sz="1450" dirty="0"/>
           </a:p>
         </p:txBody>
       </p:sp>
@@ -3226,8 +3226,8 @@
         </p:nvSpPr>
         <p:spPr>
           <a:xfrm>
-            <a:off x="822960" y="2651760"/>
-            <a:ext cx="3017520" cy="1005840"/>
+            <a:off x="731520" y="2304288"/>
+            <a:ext cx="2697480" cy="502920"/>
           </a:xfrm>
           <a:prstGeom prst="rect">
             <a:avLst/>
@@ -3243,17 +3243,17 @@
               <a:buNone/>
             </a:pPr>
             <a:r>
-              <a:rPr lang="he-IL" altLang="en-US" sz="1400" dirty="0">
-                <a:solidFill>
-                  <a:srgbClr val="FFFFFF"/>
-                </a:solidFill>
-                <a:latin typeface="Arial" pitchFamily="34" charset="0"/>
-                <a:ea typeface="Arial" pitchFamily="34" charset="-122"/>
-                <a:cs typeface="Arial" pitchFamily="34" charset="-120"/>
-              </a:rPr>
-              <a:t>הרכיב הרגשי (דאגה) קשור חזק יותר לתוצאות מהרכיב הקוגניטיבי – ומתווך אותו</a:t>
-            </a:r>
-            <a:endParaRPr lang="he-IL" sz="1400" dirty="0"/>
+              <a:rPr lang="he-IL" altLang="en-US" sz="1150" dirty="0">
+                <a:solidFill>
+                  <a:srgbClr val="F3F4F6"/>
+                </a:solidFill>
+                <a:latin typeface="Arial" pitchFamily="34" charset="0"/>
+                <a:ea typeface="Arial" pitchFamily="34" charset="-122"/>
+                <a:cs typeface="Arial" pitchFamily="34" charset="-120"/>
+              </a:rPr>
+              <a:t>ספירלת אובדן (Hobfoll, 1989)</a:t>
+            </a:r>
+            <a:endParaRPr lang="he-IL" sz="1150" dirty="0"/>
           </a:p>
         </p:txBody>
       </p:sp>
@@ -3264,21 +3264,135 @@
           <p:nvPr/>
         </p:nvSpPr>
         <p:spPr>
-          <a:xfrm>
-            <a:off x="548640" y="3977640"/>
-            <a:ext cx="11091672" cy="2286000"/>
-          </a:xfrm>
-          <a:prstGeom prst="roundRect">
-            <a:avLst>
-              <a:gd name="adj" fmla="val 4800"/>
-            </a:avLst>
+          <a:xfrm rot="1800000">
+            <a:off x="7726680" y="2697480"/>
+            <a:ext cx="777240" cy="548640"/>
+          </a:xfrm>
+          <a:prstGeom prst="leftArrow">
+            <a:avLst/>
           </a:prstGeom>
           <a:solidFill>
-            <a:srgbClr val="F4F6FA"/>
+            <a:srgbClr val="FCA311"/>
           </a:solidFill>
           <a:ln w="12700">
             <a:solidFill>
-              <a:srgbClr val="F4F6FA"/>
+              <a:srgbClr val="FCA311"/>
+            </a:solidFill>
+            <a:prstDash val="solid"/>
+          </a:ln>
+        </p:spPr>
+      </p:sp>
+      <p:sp>
+        <p:nvSpPr>
+          <p:cNvPr id="13" name="Shape 11"/>
+          <p:cNvSpPr/>
+          <p:nvPr/>
+        </p:nvSpPr>
+        <p:spPr>
+          <a:xfrm rot="-1800000">
+            <a:off x="3657600" y="2697480"/>
+            <a:ext cx="777240" cy="548640"/>
+          </a:xfrm>
+          <a:prstGeom prst="leftArrow">
+            <a:avLst/>
+          </a:prstGeom>
+          <a:solidFill>
+            <a:srgbClr val="FCA311"/>
+          </a:solidFill>
+          <a:ln w="12700">
+            <a:solidFill>
+              <a:srgbClr val="FCA311"/>
+            </a:solidFill>
+            <a:prstDash val="solid"/>
+          </a:ln>
+        </p:spPr>
+      </p:sp>
+      <p:sp>
+        <p:nvSpPr>
+          <p:cNvPr id="14" name="Shape 12"/>
+          <p:cNvSpPr/>
+          <p:nvPr/>
+        </p:nvSpPr>
+        <p:spPr>
+          <a:xfrm>
+            <a:off x="5669280" y="1783080"/>
+            <a:ext cx="868680" cy="548640"/>
+          </a:xfrm>
+          <a:prstGeom prst="rightArrow">
+            <a:avLst/>
+          </a:prstGeom>
+          <a:solidFill>
+            <a:srgbClr val="FCA311"/>
+          </a:solidFill>
+          <a:ln w="12700">
+            <a:solidFill>
+              <a:srgbClr val="FCA311"/>
+            </a:solidFill>
+            <a:prstDash val="solid"/>
+          </a:ln>
+        </p:spPr>
+      </p:sp>
+      <p:sp>
+        <p:nvSpPr>
+          <p:cNvPr id="15" name="Text 13"/>
+          <p:cNvSpPr txBox="1"/>
+          <p:nvPr/>
+        </p:nvSpPr>
+        <p:spPr>
+          <a:xfrm>
+            <a:off x="3931920" y="1234440"/>
+            <a:ext cx="4297680" cy="457200"/>
+          </a:xfrm>
+          <a:prstGeom prst="rect">
+            <a:avLst/>
+          </a:prstGeom>
+          <a:noFill/>
+          <a:ln/>
+        </p:spPr>
+        <p:txBody>
+          <a:bodyPr wrap="square" lIns="0" tIns="0" rIns="0" bIns="0" rtlCol="0" anchor="t"/>
+          <a:lstStyle/>
+          <a:p>
+            <a:pPr rtl="1" algn="ctr" indent="0" marL="0">
+              <a:buNone/>
+            </a:pPr>
+            <a:r>
+              <a:rPr lang="he-IL" altLang="en-US" sz="1200" dirty="0">
+                <a:solidFill>
+                  <a:srgbClr val="6B7280"/>
+                </a:solidFill>
+                <a:latin typeface="Arial" pitchFamily="34" charset="0"/>
+                <a:ea typeface="Arial" pitchFamily="34" charset="-122"/>
+                <a:cs typeface="Arial" pitchFamily="34" charset="-120"/>
+              </a:rPr>
+              <a:t>חוזר להתחלה</a:t>
+            </a:r>
+            <a:endParaRPr lang="he-IL" sz="1200" dirty="0"/>
+          </a:p>
+        </p:txBody>
+      </p:sp>
+      <p:sp>
+        <p:nvSpPr>
+          <p:cNvPr id="16" name="Shape 14"/>
+          <p:cNvSpPr/>
+          <p:nvPr/>
+        </p:nvSpPr>
+        <p:spPr>
+          <a:xfrm>
+            <a:off x="548640" y="4892040"/>
+            <a:ext cx="11091672" cy="1371600"/>
+          </a:xfrm>
+          <a:prstGeom prst="roundRect">
+            <a:avLst>
+              <a:gd name="adj" fmla="val 8000"/>
+            </a:avLst>
+          </a:prstGeom>
+          <a:solidFill>
+            <a:srgbClr val="FFF4DE"/>
+          </a:solidFill>
+          <a:ln w="12700">
+            <a:solidFill>
+              <a:srgbClr val="FFF4DE"/>
             </a:solidFill>
             <a:prstDash val="solid"/>
           </a:ln>
@@ -3293,131 +3407,46 @@
       </p:sp>
       <p:sp>
         <p:nvSpPr>
-          <p:cNvPr id="13" name="Text 11"/>
-          <p:cNvSpPr txBox="1"/>
-          <p:nvPr/>
-        </p:nvSpPr>
-        <p:spPr>
-          <a:xfrm>
-            <a:off x="822960" y="4069080"/>
-            <a:ext cx="10515600" cy="411480"/>
-          </a:xfrm>
-          <a:prstGeom prst="rect">
-            <a:avLst/>
-          </a:prstGeom>
-          <a:noFill/>
-          <a:ln/>
-        </p:spPr>
-        <p:txBody>
-          <a:bodyPr wrap="square" lIns="0" tIns="0" rIns="0" bIns="0" rtlCol="0" anchor="t"/>
+          <p:cNvPr id="17" name="Text 15"/>
+          <p:cNvSpPr txBox="1"/>
+          <p:nvPr/>
+        </p:nvSpPr>
+        <p:spPr>
+          <a:xfrm>
+            <a:off x="822960" y="4983480"/>
+            <a:ext cx="10515600" cy="1188720"/>
+          </a:xfrm>
+          <a:prstGeom prst="rect">
+            <a:avLst/>
+          </a:prstGeom>
+          <a:noFill/>
+          <a:ln/>
+        </p:spPr>
+        <p:txBody>
+          <a:bodyPr wrap="square" lIns="0" tIns="0" rIns="0" bIns="0" rtlCol="0" anchor="ctr"/>
           <a:lstStyle/>
           <a:p>
             <a:pPr rtl="1" algn="r" indent="0" marL="0">
               <a:buNone/>
             </a:pPr>
             <a:r>
-              <a:rPr lang="he-IL" altLang="en-US" sz="1700" b="1" dirty="0">
-                <a:solidFill>
-                  <a:srgbClr val="2A9D8F"/>
-                </a:solidFill>
-                <a:latin typeface="Arial" pitchFamily="34" charset="0"/>
-                <a:ea typeface="Arial" pitchFamily="34" charset="-122"/>
-                <a:cs typeface="Arial" pitchFamily="34" charset="-120"/>
-              </a:rPr>
-              <a:t>המשמעות לניהול קריירה</a:t>
-            </a:r>
-            <a:endParaRPr lang="he-IL" sz="1700" dirty="0"/>
-          </a:p>
-        </p:txBody>
-      </p:sp>
-      <p:sp>
-        <p:nvSpPr>
-          <p:cNvPr id="14" name="Text 12"/>
-          <p:cNvSpPr txBox="1"/>
-          <p:nvPr/>
-        </p:nvSpPr>
-        <p:spPr>
-          <a:xfrm>
-            <a:off x="822960" y="4526280"/>
-            <a:ext cx="10515600" cy="1691640"/>
-          </a:xfrm>
-          <a:prstGeom prst="rect">
-            <a:avLst/>
-          </a:prstGeom>
-          <a:noFill/>
-          <a:ln/>
-        </p:spPr>
-        <p:txBody>
-          <a:bodyPr wrap="square" lIns="0" tIns="0" rIns="0" bIns="0" rtlCol="0" anchor="t"/>
-          <a:lstStyle/>
-          <a:p>
-            <a:pPr algn="r" marL="342900" indent="-342900">
-              <a:spcAft>
-                <a:spcPts val="600"/>
-              </a:spcAft>
-              <a:buSzPct val="100000"/>
-              <a:buChar char="•"/>
-            </a:pPr>
-            <a:r>
-              <a:rPr lang="he-IL" altLang="en-US" sz="1400" dirty="0">
-                <a:solidFill>
-                  <a:srgbClr val="1F2937"/>
-                </a:solidFill>
-                <a:latin typeface="Arial" pitchFamily="34" charset="0"/>
-                <a:ea typeface="Arial" pitchFamily="34" charset="-122"/>
-                <a:cs typeface="Arial" pitchFamily="34" charset="-120"/>
-              </a:rPr>
-              <a:t>לא המחשבה "ייתכן שאפוטר" פוגעת – אלא הדאגה שהיא מעוררת. שם נמצא המנוף: ויסות רגשי, תמיכה ומסגור מחדש.</a:t>
-            </a:r>
-            <a:endParaRPr lang="he-IL" sz="1400" dirty="0"/>
-          </a:p>
-          <a:p>
-            <a:pPr algn="r" marL="342900" indent="-342900">
-              <a:spcAft>
-                <a:spcPts val="600"/>
-              </a:spcAft>
-              <a:buSzPct val="100000"/>
-              <a:buChar char="•"/>
-            </a:pPr>
-            <a:r>
-              <a:rPr lang="he-IL" altLang="en-US" sz="1400" dirty="0">
-                <a:solidFill>
-                  <a:srgbClr val="1F2937"/>
-                </a:solidFill>
-                <a:latin typeface="Arial" pitchFamily="34" charset="0"/>
-                <a:ea typeface="Arial" pitchFamily="34" charset="-122"/>
-                <a:cs typeface="Arial" pitchFamily="34" charset="-120"/>
-              </a:rPr>
-              <a:t>המאמר המשלים של לי ואחרים (Lee et al., 2018) מוסיף: העוצמה משתנה בין תרבויות ומדינות, ובעולם העבודה החדש חוסר ביטחון הוא מצב כרוני, לא אירוע.</a:t>
-            </a:r>
-            <a:endParaRPr lang="he-IL" sz="1400" dirty="0"/>
-          </a:p>
-          <a:p>
-            <a:pPr algn="r" marL="342900" indent="-342900">
-              <a:spcAft>
-                <a:spcPts val="600"/>
-              </a:spcAft>
-              <a:buSzPct val="100000"/>
-              <a:buChar char="•"/>
-            </a:pPr>
-            <a:r>
-              <a:rPr lang="he-IL" altLang="en-US" sz="1400" dirty="0">
-                <a:solidFill>
-                  <a:srgbClr val="1F2937"/>
-                </a:solidFill>
-                <a:latin typeface="Arial" pitchFamily="34" charset="0"/>
-                <a:ea typeface="Arial" pitchFamily="34" charset="-122"/>
-                <a:cs typeface="Arial" pitchFamily="34" charset="-120"/>
-              </a:rPr>
-              <a:t>מסקנה: "לא לפחד" זו לא עצה. "לבנות כרית שתאפשר לפעול" – כן.</a:t>
-            </a:r>
-            <a:endParaRPr lang="he-IL" sz="1400" dirty="0"/>
-          </a:p>
-        </p:txBody>
-      </p:sp>
-      <p:sp>
-        <p:nvSpPr>
-          <p:cNvPr id="15" name="Text 13"/>
+              <a:rPr lang="he-IL" altLang="en-US" sz="1500" b="1" dirty="0">
+                <a:solidFill>
+                  <a:srgbClr val="14213D"/>
+                </a:solidFill>
+                <a:latin typeface="Arial" pitchFamily="34" charset="0"/>
+                <a:ea typeface="Arial" pitchFamily="34" charset="-122"/>
+                <a:cs typeface="Arial" pitchFamily="34" charset="-120"/>
+              </a:rPr>
+              <a:t>חוסר ביטחון מקטין בדיוק את המשאבים שמגנים מפניו (Låstad et al., 2025). לכן ההשקעה בעצמי צריכה לקרות דווקא כשהיא נראית הכי פחות דחופה: בתקופות של יציבות, לפני שהאיום מגיע.</a:t>
+            </a:r>
+            <a:endParaRPr lang="he-IL" sz="1500" dirty="0"/>
+          </a:p>
+        </p:txBody>
+      </p:sp>
+      <p:sp>
+        <p:nvSpPr>
+          <p:cNvPr id="18" name="Text 16"/>
           <p:cNvSpPr txBox="1"/>
           <p:nvPr/>
         </p:nvSpPr>
@@ -3456,7 +3485,7 @@
       </p:sp>
       <p:sp>
         <p:nvSpPr>
-          <p:cNvPr id="16" name="Text 14"/>
+          <p:cNvPr id="19" name="Text 17"/>
           <p:cNvSpPr txBox="1"/>
           <p:nvPr/>
         </p:nvSpPr>
@@ -3543,7 +3572,7 @@
               <a:buNone/>
             </a:pPr>
             <a:r>
-              <a:rPr lang="he-IL" altLang="en-US" sz="3200" b="1" dirty="0">
+              <a:rPr lang="he-IL" altLang="en-US" sz="3000" b="1" dirty="0">
                 <a:solidFill>
                   <a:srgbClr val="14213D"/>
                 </a:solidFill>
@@ -3553,7 +3582,7 @@
               </a:rPr>
               <a:t>תובנות, ביקורת ודעה אישית</a:t>
             </a:r>
-            <a:endParaRPr lang="he-IL" sz="3200" dirty="0"/>
+            <a:endParaRPr lang="he-IL" sz="3000" dirty="0"/>
           </a:p>
         </p:txBody>
       </p:sp>
@@ -3653,13 +3682,13 @@
           <a:p>
             <a:pPr algn="r" marL="342900" indent="-342900">
               <a:spcAft>
-                <a:spcPts val="600"/>
+                <a:spcPts val="500"/>
               </a:spcAft>
               <a:buSzPct val="100000"/>
               <a:buChar char="•"/>
             </a:pPr>
             <a:r>
-              <a:rPr lang="he-IL" altLang="en-US" sz="1350" dirty="0">
+              <a:rPr lang="he-IL" altLang="en-US" sz="1300" dirty="0">
                 <a:solidFill>
                   <a:srgbClr val="1F2937"/>
                 </a:solidFill>
@@ -3667,20 +3696,20 @@
                 <a:ea typeface="Arial" pitchFamily="34" charset="-122"/>
                 <a:cs typeface="Arial" pitchFamily="34" charset="-120"/>
               </a:rPr>
-              <a:t>בהירות: מתחושה אמורפית לרכיבים שאפשר לעבוד איתם</a:t>
-            </a:r>
-            <a:endParaRPr lang="he-IL" sz="1350" dirty="0"/>
+              <a:t>תשובה מבוססת 237 מחקרים לשאלה שכולנו שואלים: האם הפחד מחדד? לא.</a:t>
+            </a:r>
+            <a:endParaRPr lang="he-IL" sz="1300" dirty="0"/>
           </a:p>
           <a:p>
             <a:pPr algn="r" marL="342900" indent="-342900">
               <a:spcAft>
-                <a:spcPts val="600"/>
+                <a:spcPts val="500"/>
               </a:spcAft>
               <a:buSzPct val="100000"/>
               <a:buChar char="•"/>
             </a:pPr>
             <a:r>
-              <a:rPr lang="he-IL" altLang="en-US" sz="1350" dirty="0">
+              <a:rPr lang="he-IL" altLang="en-US" sz="1300" dirty="0">
                 <a:solidFill>
                   <a:srgbClr val="1F2937"/>
                 </a:solidFill>
@@ -3688,20 +3717,20 @@
                 <a:ea typeface="Arial" pitchFamily="34" charset="-122"/>
                 <a:cs typeface="Arial" pitchFamily="34" charset="-120"/>
               </a:rPr>
-              <a:t>ארבעת המנגנונים הסבירו לנו התנהגויות שראינו בבית ובעבודה</a:t>
-            </a:r>
-            <a:endParaRPr lang="he-IL" sz="1350" dirty="0"/>
+              <a:t>הכותרת מכניסה את כל המאמר לשלוש מילים</a:t>
+            </a:r>
+            <a:endParaRPr lang="he-IL" sz="1300" dirty="0"/>
           </a:p>
           <a:p>
             <a:pPr algn="r" marL="342900" indent="-342900">
               <a:spcAft>
-                <a:spcPts val="600"/>
+                <a:spcPts val="500"/>
               </a:spcAft>
               <a:buSzPct val="100000"/>
               <a:buChar char="•"/>
             </a:pPr>
             <a:r>
-              <a:rPr lang="he-IL" altLang="en-US" sz="1350" dirty="0">
+              <a:rPr lang="he-IL" altLang="en-US" sz="1300" dirty="0">
                 <a:solidFill>
                   <a:srgbClr val="1F2937"/>
                 </a:solidFill>
@@ -3709,9 +3738,30 @@
                 <a:ea typeface="Arial" pitchFamily="34" charset="-122"/>
                 <a:cs typeface="Arial" pitchFamily="34" charset="-120"/>
               </a:rPr>
-              <a:t>"רשימת מכולת" של דברים שאפשר לעשות כבר כסטודנטים</a:t>
-            </a:r>
-            <a:endParaRPr lang="he-IL" sz="1350" dirty="0"/>
+              <a:t>כנות לגבי המגבלות של מחקרי חתך</a:t>
+            </a:r>
+            <a:endParaRPr lang="he-IL" sz="1300" dirty="0"/>
+          </a:p>
+          <a:p>
+            <a:pPr algn="r" marL="342900" indent="-342900">
+              <a:spcAft>
+                <a:spcPts val="500"/>
+              </a:spcAft>
+              <a:buSzPct val="100000"/>
+              <a:buChar char="•"/>
+            </a:pPr>
+            <a:r>
+              <a:rPr lang="he-IL" altLang="en-US" sz="1300" dirty="0">
+                <a:solidFill>
+                  <a:srgbClr val="1F2937"/>
+                </a:solidFill>
+                <a:latin typeface="Arial" pitchFamily="34" charset="0"/>
+                <a:ea typeface="Arial" pitchFamily="34" charset="-122"/>
+                <a:cs typeface="Arial" pitchFamily="34" charset="-120"/>
+              </a:rPr>
+              <a:t>זמין לכולם בחינם, אפשר לשלוח לחבר</a:t>
+            </a:r>
+            <a:endParaRPr lang="he-IL" sz="1300" dirty="0"/>
           </a:p>
         </p:txBody>
       </p:sp>
@@ -3811,13 +3861,13 @@
           <a:p>
             <a:pPr algn="r" marL="342900" indent="-342900">
               <a:spcAft>
-                <a:spcPts val="600"/>
+                <a:spcPts val="500"/>
               </a:spcAft>
               <a:buSzPct val="100000"/>
               <a:buChar char="•"/>
             </a:pPr>
             <a:r>
-              <a:rPr lang="he-IL" altLang="en-US" sz="1350" dirty="0">
+              <a:rPr lang="he-IL" altLang="en-US" sz="1300" dirty="0">
                 <a:solidFill>
                   <a:srgbClr val="1F2937"/>
                 </a:solidFill>
@@ -3825,20 +3875,20 @@
                 <a:ea typeface="Arial" pitchFamily="34" charset="-122"/>
                 <a:cs typeface="Arial" pitchFamily="34" charset="-120"/>
               </a:rPr>
-              <a:t>תיאורטי – בלי "מה עושים עם זה" (בנינו לבד)</a:t>
-            </a:r>
-            <a:endParaRPr lang="he-IL" sz="1350" dirty="0"/>
+              <a:t>מכמת אבל לא אומר מה לעשות. את "מפת החוסן" בנינו לבד</a:t>
+            </a:r>
+            <a:endParaRPr lang="he-IL" sz="1300" dirty="0"/>
           </a:p>
           <a:p>
             <a:pPr algn="r" marL="342900" indent="-342900">
               <a:spcAft>
-                <a:spcPts val="600"/>
+                <a:spcPts val="500"/>
               </a:spcAft>
               <a:buSzPct val="100000"/>
               <a:buChar char="•"/>
             </a:pPr>
             <a:r>
-              <a:rPr lang="he-IL" altLang="en-US" sz="1350" dirty="0">
+              <a:rPr lang="he-IL" altLang="en-US" sz="1300" dirty="0">
                 <a:solidFill>
                   <a:srgbClr val="1F2937"/>
                 </a:solidFill>
@@ -3846,20 +3896,20 @@
                 <a:ea typeface="Arial" pitchFamily="34" charset="-122"/>
                 <a:cs typeface="Arial" pitchFamily="34" charset="-120"/>
               </a:rPr>
-              <a:t>נכתב לפני הקורונה ולפני הבינה המלאכותית היוצרת</a:t>
-            </a:r>
-            <a:endParaRPr lang="he-IL" sz="1350" dirty="0"/>
+              <a:t>לא מבחין בין איום כמותי לאיכותני, וזו ההבחנה של עידן הבינה המלאכותית</a:t>
+            </a:r>
+            <a:endParaRPr lang="he-IL" sz="1300" dirty="0"/>
           </a:p>
           <a:p>
             <a:pPr algn="r" marL="342900" indent="-342900">
               <a:spcAft>
-                <a:spcPts val="600"/>
+                <a:spcPts val="500"/>
               </a:spcAft>
               <a:buSzPct val="100000"/>
               <a:buChar char="•"/>
             </a:pPr>
             <a:r>
-              <a:rPr lang="he-IL" altLang="en-US" sz="1350" dirty="0">
+              <a:rPr lang="he-IL" altLang="en-US" sz="1300" dirty="0">
                 <a:solidFill>
                   <a:srgbClr val="1F2937"/>
                 </a:solidFill>
@@ -3867,30 +3917,9 @@
                 <a:ea typeface="Arial" pitchFamily="34" charset="-122"/>
                 <a:cs typeface="Arial" pitchFamily="34" charset="-120"/>
               </a:rPr>
-              <a:t>לא מתייחס לאיום שמקורו מחוץ לארגון – מילואים, מלחמה</a:t>
-            </a:r>
-            <a:endParaRPr lang="he-IL" sz="1350" dirty="0"/>
-          </a:p>
-          <a:p>
-            <a:pPr algn="r" marL="342900" indent="-342900">
-              <a:spcAft>
-                <a:spcPts val="600"/>
-              </a:spcAft>
-              <a:buSzPct val="100000"/>
-              <a:buChar char="•"/>
-            </a:pPr>
-            <a:r>
-              <a:rPr lang="he-IL" altLang="en-US" sz="1350" dirty="0">
-                <a:solidFill>
-                  <a:srgbClr val="1F2937"/>
-                </a:solidFill>
-                <a:latin typeface="Arial" pitchFamily="34" charset="0"/>
-                <a:ea typeface="Arial" pitchFamily="34" charset="-122"/>
-                <a:cs typeface="Arial" pitchFamily="34" charset="-120"/>
-              </a:rPr>
-              <a:t>נשען בעיקר על מחקרים מערביים</a:t>
-            </a:r>
-            <a:endParaRPr lang="he-IL" sz="1350" dirty="0"/>
+              <a:t>אין הקשר כמו הישראלי: מלחמה ומילואים, לא רק הארגון</a:t>
+            </a:r>
+            <a:endParaRPr lang="he-IL" sz="1300" dirty="0"/>
           </a:p>
         </p:txBody>
       </p:sp>
@@ -4000,7 +4029,7 @@
                 <a:ea typeface="Arial" pitchFamily="34" charset="-122"/>
                 <a:cs typeface="Arial" pitchFamily="34" charset="-120"/>
               </a:rPr>
-              <a:t>המאמר צודק שחוסר ביטחון הוא בעיקר גורם לחץ מזיק. אבל לאור "ממשבר להזדמנות" (דבדבני דקל, 2026ב) והתרבות הישראלית של אלתור, אנחנו מאמינים שמידה של חוסר ודאות יכולה להיות מנוע לצמיחה – בתנאי שיש משאבים. בלי משאבים חוסר ודאות משתק; עם משאבים הוא מניע.</a:t>
+              <a:t>הממצאים מאתגרים את "ממשבר להזדמנות" (דבדבני דקל, 2026ב) ובה בעת מחדדים אותו: משבר הופך להזדמנות רק אצל מי שיש לו משאבים לנצל אותה. בלי משאבים, האיום מייצר בריחה והסתרה. לכן המסר שלנו הוא לא "אל תפחדו", אלא "בנו את הכרית לפני שתצטרכו אותה".</a:t>
             </a:r>
             <a:endParaRPr lang="he-IL" sz="1450" dirty="0"/>
           </a:p>
@@ -4141,7 +4170,7 @@
               <a:buNone/>
             </a:pPr>
             <a:r>
-              <a:rPr lang="he-IL" altLang="en-US" sz="3200" b="1" dirty="0">
+              <a:rPr lang="he-IL" altLang="en-US" sz="3000" b="1" dirty="0">
                 <a:solidFill>
                   <a:srgbClr val="FFFFFF"/>
                 </a:solidFill>
@@ -4149,9 +4178,9 @@
                 <a:ea typeface="Arial" pitchFamily="34" charset="-122"/>
                 <a:cs typeface="Arial" pitchFamily="34" charset="-120"/>
               </a:rPr>
-              <a:t>סרטון: "3 הסודות של אנשים חסינים" – Lucy Hone, TED</a:t>
-            </a:r>
-            <a:endParaRPr lang="he-IL" sz="3200" dirty="0"/>
+              <a:t>סרטון: "3 הסודות של אנשים חסינים", Lucy Hone, TED</a:t>
+            </a:r>
+            <a:endParaRPr lang="he-IL" sz="3000" dirty="0"/>
           </a:p>
         </p:txBody>
       </p:sp>
@@ -4370,7 +4399,7 @@
                 <a:ea typeface="Arial" pitchFamily="34" charset="-122"/>
                 <a:cs typeface="Arial" pitchFamily="34" charset="-120"/>
               </a:rPr>
-              <a:t>"דברים רעים קורים" – קבלת חוסר הוודאות כחלק מהחיים (מאפייני האיום)</a:t>
+              <a:t>"דברים רעים קורים": קבלת חוסר הוודאות כחלק מהחיים</a:t>
             </a:r>
             <a:endParaRPr lang="he-IL" sz="1450" dirty="0"/>
           </a:p>
@@ -4391,7 +4420,7 @@
                 <a:ea typeface="Arial" pitchFamily="34" charset="-122"/>
                 <a:cs typeface="Arial" pitchFamily="34" charset="-120"/>
               </a:rPr>
-              <a:t>לבחור במה להתמקד – מה בשליטתי (הערכה קוגניטיבית)</a:t>
+              <a:t>לבחור במה להתמקד: מה בשליטתי</a:t>
             </a:r>
             <a:endParaRPr lang="he-IL" sz="1450" dirty="0"/>
           </a:p>
@@ -4412,7 +4441,7 @@
                 <a:ea typeface="Arial" pitchFamily="34" charset="-122"/>
                 <a:cs typeface="Arial" pitchFamily="34" charset="-120"/>
               </a:rPr>
-              <a:t>"האם זה עוזר לי או פוגע בי?" – ויסות הרכיב הרגשי</a:t>
+              <a:t>"האם זה עוזר לי או פוגע בי?": האם התגובה שלי היא בריחה והסתרה, או התפתחות</a:t>
             </a:r>
             <a:endParaRPr lang="he-IL" sz="1450" dirty="0"/>
           </a:p>
@@ -4619,7 +4648,7 @@
               <a:buNone/>
             </a:pPr>
             <a:r>
-              <a:rPr lang="he-IL" altLang="en-US" sz="3200" b="1" dirty="0">
+              <a:rPr lang="he-IL" altLang="en-US" sz="3000" b="1" dirty="0">
                 <a:solidFill>
                   <a:srgbClr val="14213D"/>
                 </a:solidFill>
@@ -4627,9 +4656,9 @@
                 <a:ea typeface="Arial" pitchFamily="34" charset="-122"/>
                 <a:cs typeface="Arial" pitchFamily="34" charset="-120"/>
               </a:rPr>
-              <a:t>יישום: "מפת החוסן התעסוקתי" – הכלי שבנינו מהמאמר</a:t>
-            </a:r>
-            <a:endParaRPr lang="he-IL" sz="3200" dirty="0"/>
+              <a:t>יישום: "מפת החוסן התעסוקתי", הכלי שבנינו מהמאמרים</a:t>
+            </a:r>
+            <a:endParaRPr lang="he-IL" sz="3000" dirty="0"/>
           </a:p>
         </p:txBody>
       </p:sp>
@@ -4876,7 +4905,7 @@
                         <a:buNone/>
                       </a:pPr>
                       <a:r>
-                        <a:rPr lang="en-US" sz="1250" dirty="0">
+                        <a:rPr lang="en-US" sz="1200" dirty="0">
                           <a:solidFill>
                             <a:srgbClr val="1F2937"/>
                           </a:solidFill>
@@ -4884,9 +4913,9 @@
                           <a:ea typeface="Arial" pitchFamily="34" charset="-122"/>
                           <a:cs typeface="Arial" pitchFamily="34" charset="-120"/>
                         </a:rPr>
-                        <a:t>להחליף שמועות במידע: שיחה עם המנהל, מעקב אחר החברה והענף; להבחין בין איום כמותי לאיכותני</a:t>
+                        <a:t>להחליף שמועות במידע: שיחה עם המנהל, מעקב אחר החברה והענף; למפות אילו חלקים בתפקיד הבינה המלאכותית משנה</a:t>
                       </a:r>
-                      <a:endParaRPr lang="en-US" sz="1250" dirty="0">
+                      <a:endParaRPr lang="en-US" sz="1200" dirty="0">
                         <a:latin typeface="Arial" charset="0"/>
                         <a:ea typeface="Arial" charset="0"/>
                         <a:cs typeface="Arial" charset="0"/>
@@ -4944,7 +4973,7 @@
                         <a:buNone/>
                       </a:pPr>
                       <a:r>
-                        <a:rPr lang="en-US" sz="1250" dirty="0">
+                        <a:rPr lang="en-US" sz="1200" dirty="0">
                           <a:solidFill>
                             <a:srgbClr val="1F2937"/>
                           </a:solidFill>
@@ -4952,9 +4981,9 @@
                           <a:ea typeface="Arial" pitchFamily="34" charset="-122"/>
                           <a:cs typeface="Arial" pitchFamily="34" charset="-120"/>
                         </a:rPr>
-                        <a:t>מה ההסתברות? מה החומרה? מתי? מה בשליטתי?</a:t>
+                        <a:t>מה ההסתברות? האיום כמותי (המשרה) או איכותני (התוכן)? מה בשליטתי?</a:t>
                       </a:r>
-                      <a:endParaRPr lang="en-US" sz="1250" dirty="0">
+                      <a:endParaRPr lang="en-US" sz="1200" dirty="0">
                         <a:latin typeface="Arial" charset="0"/>
                         <a:ea typeface="Arial" charset="0"/>
                         <a:cs typeface="Arial" charset="0"/>
@@ -5012,7 +5041,7 @@
                         <a:buNone/>
                       </a:pPr>
                       <a:r>
-                        <a:rPr lang="en-US" sz="1250" b="1" dirty="0">
+                        <a:rPr lang="en-US" sz="1200" b="1" dirty="0">
                           <a:solidFill>
                             <a:srgbClr val="E76F51"/>
                           </a:solidFill>
@@ -5022,7 +5051,7 @@
                         </a:rPr>
                         <a:t>1. הערכת האיום</a:t>
                       </a:r>
-                      <a:endParaRPr lang="en-US" sz="1250" dirty="0">
+                      <a:endParaRPr lang="en-US" sz="1200" dirty="0">
                         <a:latin typeface="Arial" charset="0"/>
                         <a:ea typeface="Arial" charset="0"/>
                         <a:cs typeface="Arial" charset="0"/>
@@ -5082,7 +5111,7 @@
                         <a:buNone/>
                       </a:pPr>
                       <a:r>
-                        <a:rPr lang="en-US" sz="1250" dirty="0">
+                        <a:rPr lang="en-US" sz="1200" dirty="0">
                           <a:solidFill>
                             <a:srgbClr val="1F2937"/>
                           </a:solidFill>
@@ -5090,9 +5119,9 @@
                           <a:ea typeface="Arial" pitchFamily="34" charset="-122"/>
                           <a:cs typeface="Arial" pitchFamily="34" charset="-120"/>
                         </a:rPr>
-                        <a:t>קרן חירום 3–6 חודשים; מקור הכנסה משלים; קו"ח ולינקדאין מעודכנים כל חצי שנה; מיומנויות AI</a:t>
+                        <a:t>יעד למידה שנתי אחד וזמן שבועי קבוע; מיומנויות AI בתחום העיסוק; קו"ח ופרופיל מעודכנים כל חצי שנה</a:t>
                       </a:r>
-                      <a:endParaRPr lang="en-US" sz="1250" dirty="0">
+                      <a:endParaRPr lang="en-US" sz="1200" dirty="0">
                         <a:latin typeface="Arial" charset="0"/>
                         <a:ea typeface="Arial" charset="0"/>
                         <a:cs typeface="Arial" charset="0"/>
@@ -5150,7 +5179,7 @@
                         <a:buNone/>
                       </a:pPr>
                       <a:r>
-                        <a:rPr lang="en-US" sz="1250" dirty="0">
+                        <a:rPr lang="en-US" sz="1200" dirty="0">
                           <a:solidFill>
                             <a:srgbClr val="1F2937"/>
                           </a:solidFill>
@@ -5158,9 +5187,9 @@
                           <a:ea typeface="Arial" pitchFamily="34" charset="-122"/>
                           <a:cs typeface="Arial" pitchFamily="34" charset="-120"/>
                         </a:rPr>
-                        <a:t>כמה חודשים אחזיק מעמד? כמה קל למצוא עבודה דומה?</a:t>
+                        <a:t>מה למדתי בשנה האחרונה? אילו מיומנויות מבוקשות חסרות לי?</a:t>
                       </a:r>
-                      <a:endParaRPr lang="en-US" sz="1250" dirty="0">
+                      <a:endParaRPr lang="en-US" sz="1200" dirty="0">
                         <a:latin typeface="Arial" charset="0"/>
                         <a:ea typeface="Arial" charset="0"/>
                         <a:cs typeface="Arial" charset="0"/>
@@ -5218,7 +5247,7 @@
                         <a:buNone/>
                       </a:pPr>
                       <a:r>
-                        <a:rPr lang="en-US" sz="1250" b="1" dirty="0">
+                        <a:rPr lang="en-US" sz="1200" b="1" dirty="0">
                           <a:solidFill>
                             <a:srgbClr val="D9822B"/>
                           </a:solidFill>
@@ -5226,9 +5255,9 @@
                           <a:ea typeface="Arial" pitchFamily="34" charset="-122"/>
                           <a:cs typeface="Arial" pitchFamily="34" charset="-120"/>
                         </a:rPr>
-                        <a:t>2. הקטנת פגיעוּת כלכלית</a:t>
+                        <a:t>2. שבירת המעגל: פיתוח מיומנויות</a:t>
                       </a:r>
-                      <a:endParaRPr lang="en-US" sz="1250" dirty="0">
+                      <a:endParaRPr lang="en-US" sz="1200" dirty="0">
                         <a:latin typeface="Arial" charset="0"/>
                         <a:ea typeface="Arial" charset="0"/>
                         <a:cs typeface="Arial" charset="0"/>
@@ -5288,7 +5317,7 @@
                         <a:buNone/>
                       </a:pPr>
                       <a:r>
-                        <a:rPr lang="en-US" sz="1250" dirty="0">
+                        <a:rPr lang="en-US" sz="1200" dirty="0">
                           <a:solidFill>
                             <a:srgbClr val="1F2937"/>
                           </a:solidFill>
@@ -5296,9 +5325,9 @@
                           <a:ea typeface="Arial" pitchFamily="34" charset="-122"/>
                           <a:cs typeface="Arial" pitchFamily="34" charset="-120"/>
                         </a:rPr>
-                        <a:t>זהות מקצועית שלא תלויה בארגון; רשת תמיכה ומנטור; מסגור מחדש ("זה לא מגדיר אותי"); שגרה וספורט</a:t>
+                        <a:t>זהות מקצועית שלא תלויה בארגון; קרן חירום 3 עד 6 חודשים; רשת תמיכה ומנטור</a:t>
                       </a:r>
-                      <a:endParaRPr lang="en-US" sz="1250" dirty="0">
+                      <a:endParaRPr lang="en-US" sz="1200" dirty="0">
                         <a:latin typeface="Arial" charset="0"/>
                         <a:ea typeface="Arial" charset="0"/>
                         <a:cs typeface="Arial" charset="0"/>
@@ -5356,7 +5385,7 @@
                         <a:buNone/>
                       </a:pPr>
                       <a:r>
-                        <a:rPr lang="en-US" sz="1250" dirty="0">
+                        <a:rPr lang="en-US" sz="1200" dirty="0">
                           <a:solidFill>
                             <a:srgbClr val="1F2937"/>
                           </a:solidFill>
@@ -5364,9 +5393,9 @@
                           <a:ea typeface="Arial" pitchFamily="34" charset="-122"/>
                           <a:cs typeface="Arial" pitchFamily="34" charset="-120"/>
                         </a:rPr>
-                        <a:t>עד כמה הזהות שלי = התפקיד? למי אפנה? איך אני מגיב/ה ללחץ?</a:t>
+                        <a:t>עד כמה הזהות שלי = התפקיד? כמה זמן אחזיק מעמד? למי אפנה?</a:t>
                       </a:r>
-                      <a:endParaRPr lang="en-US" sz="1250" dirty="0">
+                      <a:endParaRPr lang="en-US" sz="1200" dirty="0">
                         <a:latin typeface="Arial" charset="0"/>
                         <a:ea typeface="Arial" charset="0"/>
                         <a:cs typeface="Arial" charset="0"/>
@@ -5424,7 +5453,7 @@
                         <a:buNone/>
                       </a:pPr>
                       <a:r>
-                        <a:rPr lang="en-US" sz="1250" b="1" dirty="0">
+                        <a:rPr lang="en-US" sz="1200" b="1" dirty="0">
                           <a:solidFill>
                             <a:srgbClr val="2A9D8F"/>
                           </a:solidFill>
@@ -5432,9 +5461,9 @@
                           <a:ea typeface="Arial" pitchFamily="34" charset="-122"/>
                           <a:cs typeface="Arial" pitchFamily="34" charset="-120"/>
                         </a:rPr>
-                        <a:t>3. הקטנת פגיעוּת פסיכולוגית</a:t>
+                        <a:t>3. בניית חוסן קריירה</a:t>
                       </a:r>
-                      <a:endParaRPr lang="en-US" sz="1250" dirty="0">
+                      <a:endParaRPr lang="en-US" sz="1200" dirty="0">
                         <a:latin typeface="Arial" charset="0"/>
                         <a:ea typeface="Arial" charset="0"/>
                         <a:cs typeface="Arial" charset="0"/>
@@ -5494,7 +5523,7 @@
                         <a:buNone/>
                       </a:pPr>
                       <a:r>
-                        <a:rPr lang="en-US" sz="1250" dirty="0">
+                        <a:rPr lang="en-US" sz="1200" dirty="0">
                           <a:solidFill>
                             <a:srgbClr val="1F2937"/>
                           </a:solidFill>
@@ -5502,9 +5531,9 @@
                           <a:ea typeface="Arial" pitchFamily="34" charset="-122"/>
                           <a:cs typeface="Arial" pitchFamily="34" charset="-120"/>
                         </a:rPr>
-                        <a:t>זמן שבועי קבוע ללמידה ולנטוורקינג; יעד למידה שנתי; תוכנית ב' לפני שצריך אותה</a:t>
+                        <a:t>לשתף ידע במקום להסתיר (בונה מוניטין ורשת); לחפש עבודה רק אחרי שמיפיתי מה אני רוצה לפתח, לא רק ממה אני בורח</a:t>
                       </a:r>
-                      <a:endParaRPr lang="en-US" sz="1250" dirty="0">
+                      <a:endParaRPr lang="en-US" sz="1200" dirty="0">
                         <a:latin typeface="Arial" charset="0"/>
                         <a:ea typeface="Arial" charset="0"/>
                         <a:cs typeface="Arial" charset="0"/>
@@ -5562,7 +5591,7 @@
                         <a:buNone/>
                       </a:pPr>
                       <a:r>
-                        <a:rPr lang="en-US" sz="1250" dirty="0">
+                        <a:rPr lang="en-US" sz="1200" dirty="0">
                           <a:solidFill>
                             <a:srgbClr val="1F2937"/>
                           </a:solidFill>
@@ -5570,9 +5599,9 @@
                           <a:ea typeface="Arial" pitchFamily="34" charset="-122"/>
                           <a:cs typeface="Arial" pitchFamily="34" charset="-120"/>
                         </a:rPr>
-                        <a:t>אני "מתכופף/ת" או פועל/ת?</a:t>
+                        <a:t>אני בורח (חיפוש בלבד), מסתיר (שומר ידע) או מתפתח?</a:t>
                       </a:r>
-                      <a:endParaRPr lang="en-US" sz="1250" dirty="0">
+                      <a:endParaRPr lang="en-US" sz="1200" dirty="0">
                         <a:latin typeface="Arial" charset="0"/>
                         <a:ea typeface="Arial" charset="0"/>
                         <a:cs typeface="Arial" charset="0"/>
@@ -5630,7 +5659,7 @@
                         <a:buNone/>
                       </a:pPr>
                       <a:r>
-                        <a:rPr lang="en-US" sz="1250" b="1" dirty="0">
+                        <a:rPr lang="en-US" sz="1200" b="1" dirty="0">
                           <a:solidFill>
                             <a:srgbClr val="14213D"/>
                           </a:solidFill>
@@ -5638,9 +5667,9 @@
                           <a:ea typeface="Arial" pitchFamily="34" charset="-122"/>
                           <a:cs typeface="Arial" pitchFamily="34" charset="-120"/>
                         </a:rPr>
-                        <a:t>4. בחירת המנגנון: פרואקטיביות</a:t>
+                        <a:t>4. בחירת התגובה</a:t>
                       </a:r>
-                      <a:endParaRPr lang="en-US" sz="1250" dirty="0">
+                      <a:endParaRPr lang="en-US" sz="1200" dirty="0">
                         <a:latin typeface="Arial" charset="0"/>
                         <a:ea typeface="Arial" charset="0"/>
                         <a:cs typeface="Arial" charset="0"/>
@@ -5761,7 +5790,7 @@
                 <a:ea typeface="Arial" pitchFamily="34" charset="-122"/>
                 <a:cs typeface="Arial" pitchFamily="34" charset="-120"/>
               </a:rPr>
-              <a:t>מתחבר ל"שלושת סלי הכלים" מהקורס (דבדבני דקל, 2026א): רשת אנשים = תמיכה, זהות מקצועית = פחות איום איכותני, למידה = יכולת תעסוקה</a:t>
+              <a:t>מתחבר ל"שלושת סלי הכלים" מהקורס (דבדבני דקל, 2026א): התפתחות = שלב 2, זהות מקצועית ורשת אנשים = שלב 3</a:t>
             </a:r>
             <a:endParaRPr lang="he-IL" sz="1350" dirty="0"/>
           </a:p>
@@ -5902,7 +5931,7 @@
               <a:buNone/>
             </a:pPr>
             <a:r>
-              <a:rPr lang="he-IL" altLang="en-US" sz="3200" b="1" dirty="0">
+              <a:rPr lang="he-IL" altLang="en-US" sz="3000" b="1" dirty="0">
                 <a:solidFill>
                   <a:srgbClr val="14213D"/>
                 </a:solidFill>
@@ -5910,9 +5939,9 @@
                 <a:ea typeface="Arial" pitchFamily="34" charset="-122"/>
                 <a:cs typeface="Arial" pitchFamily="34" charset="-120"/>
               </a:rPr>
-              <a:t>הפעלה (2 דקות בזוגות): קיבלתם תרחיש – מלאו את המפה</a:t>
-            </a:r>
-            <a:endParaRPr lang="he-IL" sz="3200" dirty="0"/>
+              <a:t>הפעלה (2 דקות בזוגות): קיבלתם תרחיש, מלאו את המפה</a:t>
+            </a:r>
+            <a:endParaRPr lang="he-IL" sz="3000" dirty="0"/>
           </a:p>
         </p:txBody>
       </p:sp>
@@ -6188,7 +6217,7 @@
                 <a:ea typeface="Arial" pitchFamily="34" charset="-122"/>
                 <a:cs typeface="Arial" pitchFamily="34" charset="-120"/>
               </a:rPr>
-              <a:t>הארגון הודיע שמערכת AI תטפל ב-60% מהפניות. התפקיד נשאר – התוכן משתנה. איך תגיבו?</a:t>
+              <a:t>הארגון הודיע שמערכת AI תטפל ב-60% מהפניות. התפקיד נשאר, התוכן משתנה. איך תגיבו?</a:t>
             </a:r>
             <a:endParaRPr lang="he-IL" sz="1350" dirty="0"/>
           </a:p>
@@ -6400,7 +6429,7 @@
                 <a:ea typeface="Arial" pitchFamily="34" charset="-122"/>
                 <a:cs typeface="Arial" pitchFamily="34" charset="-120"/>
               </a:rPr>
-              <a:t>שלוש שאלות – 40 שניות לכל אחת:</a:t>
+              <a:t>שלוש שאלות, 40 שניות לכל אחת:</a:t>
             </a:r>
             <a:endParaRPr lang="he-IL" sz="1700" dirty="0"/>
           </a:p>
@@ -6503,7 +6532,7 @@
                 <a:ea typeface="Arial" pitchFamily="34" charset="-122"/>
                 <a:cs typeface="Arial" pitchFamily="34" charset="-120"/>
               </a:rPr>
-              <a:t>מה האיום בפועל – כמותי או איכותני? ומה בשליטתי?</a:t>
+              <a:t>מה האיום בפועל, כמותי או איכותני? ומה בשליטתי?</a:t>
             </a:r>
             <a:endParaRPr lang="he-IL" sz="1500" dirty="0"/>
           </a:p>
@@ -6606,7 +6635,7 @@
                 <a:ea typeface="Arial" pitchFamily="34" charset="-122"/>
                 <a:cs typeface="Arial" pitchFamily="34" charset="-120"/>
               </a:rPr>
-              <a:t>איזו פגיעוּת (כלכלית / פסיכולוגית) הכי מטרידה אותי?</a:t>
+              <a:t>התגובה הראשונה שלי: בריחה, הסתרה או התפתחות?</a:t>
             </a:r>
             <a:endParaRPr lang="he-IL" sz="1500" dirty="0"/>
           </a:p>
@@ -6709,7 +6738,7 @@
                 <a:ea typeface="Arial" pitchFamily="34" charset="-122"/>
                 <a:cs typeface="Arial" pitchFamily="34" charset="-120"/>
               </a:rPr>
-              <a:t>איזו פעולה פרואקטיבית אחת אעשה כבר השבוע?</a:t>
+              <a:t>איזו פעולה אחת של פיתוח מיומנויות אעשה כבר השבוע?</a:t>
             </a:r>
             <a:endParaRPr lang="he-IL" sz="1500" dirty="0"/>
           </a:p>
@@ -6914,7 +6943,7 @@
               <a:buNone/>
             </a:pPr>
             <a:r>
-              <a:rPr lang="he-IL" altLang="en-US" sz="3400" b="1" dirty="0">
+              <a:rPr lang="he-IL" altLang="en-US" sz="3200" b="1" dirty="0">
                 <a:solidFill>
                   <a:srgbClr val="FFFFFF"/>
                 </a:solidFill>
@@ -6922,16 +6951,16 @@
                 <a:ea typeface="Arial" pitchFamily="34" charset="-122"/>
                 <a:cs typeface="Arial" pitchFamily="34" charset="-120"/>
               </a:rPr>
-              <a:t>את האיום לא תמיד אפשר למנוע.</a:t>
-            </a:r>
-            <a:endParaRPr lang="he-IL" sz="3400" dirty="0"/>
+              <a:t>הפחד לא יעשה אותנו טובים יותר.</a:t>
+            </a:r>
+            <a:endParaRPr lang="he-IL" sz="3200" dirty="0"/>
           </a:p>
           <a:p>
             <a:pPr rtl="1" algn="r" indent="0" marL="0">
               <a:buNone/>
             </a:pPr>
             <a:r>
-              <a:rPr lang="he-IL" altLang="en-US" sz="3400" b="1" dirty="0">
+              <a:rPr lang="he-IL" altLang="en-US" sz="3200" b="1" dirty="0">
                 <a:solidFill>
                   <a:srgbClr val="FFFFFF"/>
                 </a:solidFill>
@@ -6939,9 +6968,9 @@
                 <a:ea typeface="Arial" pitchFamily="34" charset="-122"/>
                 <a:cs typeface="Arial" pitchFamily="34" charset="-120"/>
               </a:rPr>
-              <a:t>את הכרית שתאפשר לנו לפעול – אפשר לבנות.</a:t>
-            </a:r>
-            <a:endParaRPr lang="he-IL" sz="3400" dirty="0"/>
+              <a:t>את הכרית שמאפשרת להתפתח תחת איום בונים לפני שצריכים אותה.</a:t>
+            </a:r>
+            <a:endParaRPr lang="he-IL" sz="3200" dirty="0"/>
           </a:p>
         </p:txBody>
       </p:sp>
@@ -7076,7 +7105,7 @@
                 <a:ea typeface="Arial" pitchFamily="34" charset="-122"/>
                 <a:cs typeface="Arial" pitchFamily="34" charset="-120"/>
               </a:rPr>
-              <a:t>חוסר ביטחון = פרשנות</a:t>
+              <a:t>הלאה, לא למעלה</a:t>
             </a:r>
             <a:endParaRPr lang="he-IL" sz="1700" dirty="0"/>
           </a:p>
@@ -7107,7 +7136,7 @@
               <a:buNone/>
             </a:pPr>
             <a:r>
-              <a:rPr lang="he-IL" altLang="en-US" sz="1350" dirty="0">
+              <a:rPr lang="he-IL" altLang="en-US" sz="1300" dirty="0">
                 <a:solidFill>
                   <a:srgbClr val="FFFFFF"/>
                 </a:solidFill>
@@ -7115,9 +7144,9 @@
                 <a:ea typeface="Arial" pitchFamily="34" charset="-122"/>
                 <a:cs typeface="Arial" pitchFamily="34" charset="-120"/>
               </a:rPr>
-              <a:t>איום נתפס, רב-ממדי. מידע במקום שמועות, וגם האיום האיכותני נחשב</a:t>
-            </a:r>
-            <a:endParaRPr lang="he-IL" sz="1350" dirty="0"/>
+              <a:t>237 מחקרים: חוסר ביטחון מגביר בריחה והסתרת ידע, ומקטין פיתוח מיומנויות ויכולת תעסוקה</a:t>
+            </a:r>
+            <a:endParaRPr lang="he-IL" sz="1300" dirty="0"/>
           </a:p>
         </p:txBody>
       </p:sp>
@@ -7252,7 +7281,7 @@
                 <a:ea typeface="Arial" pitchFamily="34" charset="-122"/>
                 <a:cs typeface="Arial" pitchFamily="34" charset="-120"/>
               </a:rPr>
-              <a:t>4 מנגנונים, בחירה אחת</a:t>
+              <a:t>מעגל קסמים</a:t>
             </a:r>
             <a:endParaRPr lang="he-IL" sz="1700" dirty="0"/>
           </a:p>
@@ -7283,7 +7312,7 @@
               <a:buNone/>
             </a:pPr>
             <a:r>
-              <a:rPr lang="he-IL" altLang="en-US" sz="1350" dirty="0">
+              <a:rPr lang="he-IL" altLang="en-US" sz="1300" dirty="0">
                 <a:solidFill>
                   <a:srgbClr val="FFFFFF"/>
                 </a:solidFill>
@@ -7291,9 +7320,9 @@
                 <a:ea typeface="Arial" pitchFamily="34" charset="-122"/>
                 <a:cs typeface="Arial" pitchFamily="34" charset="-120"/>
               </a:rPr>
-              <a:t>לחץ ושימור משרה שוחקים; פרואקטיביות דורשת משאבים – אז בונים אותם מראש</a:t>
-            </a:r>
-            <a:endParaRPr lang="he-IL" sz="1350" dirty="0"/>
+              <a:t>האיום מדלדל בדיוק את המשאבים שמגנים מפניו. שוברים אותו מראש: יעד למידה שנתי, מיומנויות AI, קרן חירום</a:t>
+            </a:r>
+            <a:endParaRPr lang="he-IL" sz="1300" dirty="0"/>
           </a:p>
         </p:txBody>
       </p:sp>
@@ -7428,7 +7457,7 @@
                 <a:ea typeface="Arial" pitchFamily="34" charset="-122"/>
                 <a:cs typeface="Arial" pitchFamily="34" charset="-120"/>
               </a:rPr>
-              <a:t>הרגש הוא המנוף</a:t>
+              <a:t>חוסן קריירה</a:t>
             </a:r>
             <a:endParaRPr lang="he-IL" sz="1700" dirty="0"/>
           </a:p>
@@ -7459,7 +7488,7 @@
               <a:buNone/>
             </a:pPr>
             <a:r>
-              <a:rPr lang="he-IL" altLang="en-US" sz="1350" dirty="0">
+              <a:rPr lang="he-IL" altLang="en-US" sz="1300" dirty="0">
                 <a:solidFill>
                   <a:srgbClr val="FFFFFF"/>
                 </a:solidFill>
@@ -7467,9 +7496,9 @@
                 <a:ea typeface="Arial" pitchFamily="34" charset="-122"/>
                 <a:cs typeface="Arial" pitchFamily="34" charset="-120"/>
               </a:rPr>
-              <a:t>הדאגה מתווכת את הנזק: תמיכה, מסגור מחדש וזהות שלא תלויה בתפקיד</a:t>
-            </a:r>
-            <a:endParaRPr lang="he-IL" sz="1350" dirty="0"/>
+              <a:t>זהות מקצועית שלא תלויה בארגון, רשת תמיכה ושיתוף ידע מחלישים את הקשר בין האיום לחוסר הביטחון</a:t>
+            </a:r>
+            <a:endParaRPr lang="he-IL" sz="1300" dirty="0"/>
           </a:p>
         </p:txBody>
       </p:sp>
@@ -7640,7 +7669,7 @@
               <a:buNone/>
             </a:pPr>
             <a:r>
-              <a:rPr lang="he-IL" altLang="en-US" sz="3200" b="1" dirty="0">
+              <a:rPr lang="he-IL" altLang="en-US" sz="3000" b="1" dirty="0">
                 <a:solidFill>
                   <a:srgbClr val="14213D"/>
                 </a:solidFill>
@@ -7650,7 +7679,7 @@
               </a:rPr>
               <a:t>רשימת מקורות (APA)</a:t>
             </a:r>
-            <a:endParaRPr lang="he-IL" sz="3200" dirty="0"/>
+            <a:endParaRPr lang="he-IL" sz="3000" dirty="0"/>
           </a:p>
         </p:txBody>
       </p:sp>
@@ -7663,7 +7692,7 @@
         <p:spPr>
           <a:xfrm>
             <a:off x="548640" y="1188720"/>
-            <a:ext cx="11091672" cy="3931920"/>
+            <a:ext cx="11091672" cy="3108960"/>
           </a:xfrm>
           <a:prstGeom prst="rect">
             <a:avLst/>
@@ -7677,12 +7706,12 @@
           <a:p>
             <a:pPr algn="l" indent="0" marL="0">
               <a:spcAft>
-                <a:spcPts val="500"/>
+                <a:spcPts val="600"/>
               </a:spcAft>
               <a:buNone/>
             </a:pPr>
             <a:r>
-              <a:rPr lang="en-US" sz="1000" dirty="0">
+              <a:rPr lang="en-US" sz="1100" dirty="0">
                 <a:solidFill>
                   <a:srgbClr val="1F2937"/>
                 </a:solidFill>
@@ -7690,19 +7719,19 @@
                 <a:ea typeface="Arial" pitchFamily="34" charset="-122"/>
                 <a:cs typeface="Arial" pitchFamily="34" charset="-120"/>
               </a:rPr>
-              <a:t>Ashford, S. J., Lee, C., &amp; Bobko, P. (1989). Content, causes, and consequences of job insecurity: A theory-based measure and substantive test. Academy of Management Journal, 32(4), 803–829.</a:t>
-            </a:r>
-            <a:endParaRPr lang="en-US" sz="1000" dirty="0"/>
+              <a:t>Chung, Y. W., Im, S., Kim, J. E., &amp; Yun, J. K. (2025). Artificial intelligence awareness, career resilience, job insecurity and behavioural outcomes. Australian Journal of Psychology, 77(1), Article 2559910. https://doi.org/10.1080/00049530.2025.2559910</a:t>
+            </a:r>
+            <a:endParaRPr lang="en-US" sz="1100" dirty="0"/>
           </a:p>
           <a:p>
             <a:pPr algn="l" indent="0" marL="0">
               <a:spcAft>
-                <a:spcPts val="500"/>
+                <a:spcPts val="600"/>
               </a:spcAft>
               <a:buNone/>
             </a:pPr>
             <a:r>
-              <a:rPr lang="en-US" sz="1000" dirty="0">
+              <a:rPr lang="en-US" sz="1100" dirty="0">
                 <a:solidFill>
                   <a:srgbClr val="1F2937"/>
                 </a:solidFill>
@@ -7710,19 +7739,19 @@
                 <a:ea typeface="Arial" pitchFamily="34" charset="-122"/>
                 <a:cs typeface="Arial" pitchFamily="34" charset="-120"/>
               </a:rPr>
-              <a:t>Hellgren, J., Sverke, M., &amp; Isaksson, K. (1999). A two-dimensional approach to job insecurity: Consequences for employee attitudes and well-being. European Journal of Work and Organizational Psychology, 8(2), 179–195.</a:t>
-            </a:r>
-            <a:endParaRPr lang="en-US" sz="1000" dirty="0"/>
+              <a:t>Hobfoll, S. E. (1989). Conservation of resources: A new attempt at conceptualizing stress. American Psychologist, 44(3), 513-524.</a:t>
+            </a:r>
+            <a:endParaRPr lang="en-US" sz="1100" dirty="0"/>
           </a:p>
           <a:p>
             <a:pPr algn="l" indent="0" marL="0">
               <a:spcAft>
-                <a:spcPts val="500"/>
+                <a:spcPts val="600"/>
               </a:spcAft>
               <a:buNone/>
             </a:pPr>
             <a:r>
-              <a:rPr lang="en-US" sz="1000" dirty="0">
+              <a:rPr lang="en-US" sz="1100" dirty="0">
                 <a:solidFill>
                   <a:srgbClr val="1F2937"/>
                 </a:solidFill>
@@ -7730,19 +7759,19 @@
                 <a:ea typeface="Arial" pitchFamily="34" charset="-122"/>
                 <a:cs typeface="Arial" pitchFamily="34" charset="-120"/>
               </a:rPr>
-              <a:t>Hobfoll, S. E. (1989). Conservation of resources: A new attempt at conceptualizing stress. American Psychologist, 44(3), 513–524.</a:t>
-            </a:r>
-            <a:endParaRPr lang="en-US" sz="1000" dirty="0"/>
+              <a:t>Hone, L. (2019). 3 secrets of resilient people [Video]. TED Conferences. https://www.ted.com/talks/lucy_hone_the_three_secrets_of_resilient_people</a:t>
+            </a:r>
+            <a:endParaRPr lang="en-US" sz="1100" dirty="0"/>
           </a:p>
           <a:p>
             <a:pPr algn="l" indent="0" marL="0">
               <a:spcAft>
-                <a:spcPts val="500"/>
+                <a:spcPts val="600"/>
               </a:spcAft>
               <a:buNone/>
             </a:pPr>
             <a:r>
-              <a:rPr lang="en-US" sz="1000" dirty="0">
+              <a:rPr lang="en-US" sz="1100" dirty="0">
                 <a:solidFill>
                   <a:srgbClr val="1F2937"/>
                 </a:solidFill>
@@ -7750,19 +7779,19 @@
                 <a:ea typeface="Arial" pitchFamily="34" charset="-122"/>
                 <a:cs typeface="Arial" pitchFamily="34" charset="-120"/>
               </a:rPr>
-              <a:t>Hone, L. (2019). 3 secrets of resilient people [Video]. TED Conferences. https://www.ted.com/talks/lucy_hone_the_three_secrets_of_resilient_people</a:t>
-            </a:r>
-            <a:endParaRPr lang="en-US" sz="1000" dirty="0"/>
+              <a:t>Låstad, L., Pienaar, J., Näswall, K., Richter, A., Hellgren, J., &amp; Sverke, M. (2025). Moving on up now? A meta-analysis of the associations between job insecurity and career-related outcomes. Scandinavian Journal of Work and Organizational Psychology, 10(1), Article 2. https://doi.org/10.16993/sjwop.275</a:t>
+            </a:r>
+            <a:endParaRPr lang="en-US" sz="1100" dirty="0"/>
           </a:p>
           <a:p>
             <a:pPr algn="l" indent="0" marL="0">
               <a:spcAft>
-                <a:spcPts val="500"/>
+                <a:spcPts val="600"/>
               </a:spcAft>
               <a:buNone/>
             </a:pPr>
             <a:r>
-              <a:rPr lang="en-US" sz="1000" dirty="0">
+              <a:rPr lang="en-US" sz="1100" dirty="0">
                 <a:solidFill>
                   <a:srgbClr val="1F2937"/>
                 </a:solidFill>
@@ -7770,19 +7799,19 @@
                 <a:ea typeface="Arial" pitchFamily="34" charset="-122"/>
                 <a:cs typeface="Arial" pitchFamily="34" charset="-120"/>
               </a:rPr>
-              <a:t>Jiang, L., &amp; Lavaysse, L. M. (2018). Cognitive and affective job insecurity: A meta-analysis and a primary study. Journal of Management, 44(6), 2307–2342. https://doi.org/10.1177/0149206318773853</a:t>
-            </a:r>
-            <a:endParaRPr lang="en-US" sz="1000" dirty="0"/>
+              <a:t>Shoss, M. K. (2017). Job insecurity: An integrative review and agenda for future research. Journal of Management, 43(6), 1911-1939. https://doi.org/10.1177/0149206317691574</a:t>
+            </a:r>
+            <a:endParaRPr lang="en-US" sz="1100" dirty="0"/>
           </a:p>
           <a:p>
             <a:pPr algn="l" indent="0" marL="0">
               <a:spcAft>
-                <a:spcPts val="500"/>
+                <a:spcPts val="600"/>
               </a:spcAft>
               <a:buNone/>
             </a:pPr>
             <a:r>
-              <a:rPr lang="en-US" sz="1000" dirty="0">
+              <a:rPr lang="en-US" sz="1100" dirty="0">
                 <a:solidFill>
                   <a:srgbClr val="1F2937"/>
                 </a:solidFill>
@@ -7790,89 +7819,9 @@
                 <a:ea typeface="Arial" pitchFamily="34" charset="-122"/>
                 <a:cs typeface="Arial" pitchFamily="34" charset="-120"/>
               </a:rPr>
-              <a:t>Lazarus, R. S., &amp; Folkman, S. (1984). Stress, appraisal, and coping. Springer.</a:t>
-            </a:r>
-            <a:endParaRPr lang="en-US" sz="1000" dirty="0"/>
-          </a:p>
-          <a:p>
-            <a:pPr algn="l" indent="0" marL="0">
-              <a:spcAft>
-                <a:spcPts val="500"/>
-              </a:spcAft>
-              <a:buNone/>
-            </a:pPr>
-            <a:r>
-              <a:rPr lang="en-US" sz="1000" dirty="0">
-                <a:solidFill>
-                  <a:srgbClr val="1F2937"/>
-                </a:solidFill>
-                <a:latin typeface="Arial" pitchFamily="34" charset="0"/>
-                <a:ea typeface="Arial" pitchFamily="34" charset="-122"/>
-                <a:cs typeface="Arial" pitchFamily="34" charset="-120"/>
-              </a:rPr>
-              <a:t>Lee, C., Huang, G.-H., &amp; Ashford, S. J. (2018). Job insecurity and the changing workplace: Recent developments and the future trends in job insecurity research. Annual Review of Organizational Psychology and Organizational Behavior, 5, 335–359. https://doi.org/10.1146/annurev-orgpsych-032117-104651</a:t>
-            </a:r>
-            <a:endParaRPr lang="en-US" sz="1000" dirty="0"/>
-          </a:p>
-          <a:p>
-            <a:pPr algn="l" indent="0" marL="0">
-              <a:spcAft>
-                <a:spcPts val="500"/>
-              </a:spcAft>
-              <a:buNone/>
-            </a:pPr>
-            <a:r>
-              <a:rPr lang="en-US" sz="1000" dirty="0">
-                <a:solidFill>
-                  <a:srgbClr val="1F2937"/>
-                </a:solidFill>
-                <a:latin typeface="Arial" pitchFamily="34" charset="0"/>
-                <a:ea typeface="Arial" pitchFamily="34" charset="-122"/>
-                <a:cs typeface="Arial" pitchFamily="34" charset="-120"/>
-              </a:rPr>
-              <a:t>Russo, M., Shteigman, A., &amp; Carmeli, A. (2016). Workplace and family support and work–life balance: Implications for individual psychological availability and energy at work. The Journal of Positive Psychology, 11(2), 173–188.</a:t>
-            </a:r>
-            <a:endParaRPr lang="en-US" sz="1000" dirty="0"/>
-          </a:p>
-          <a:p>
-            <a:pPr algn="l" indent="0" marL="0">
-              <a:spcAft>
-                <a:spcPts val="500"/>
-              </a:spcAft>
-              <a:buNone/>
-            </a:pPr>
-            <a:r>
-              <a:rPr lang="en-US" sz="1000" dirty="0">
-                <a:solidFill>
-                  <a:srgbClr val="1F2937"/>
-                </a:solidFill>
-                <a:latin typeface="Arial" pitchFamily="34" charset="0"/>
-                <a:ea typeface="Arial" pitchFamily="34" charset="-122"/>
-                <a:cs typeface="Arial" pitchFamily="34" charset="-120"/>
-              </a:rPr>
-              <a:t>Schein, E. H. (1996). Career anchors revisited: Implications for career development in the 21st century. Academy of Management Executive, 10(4), 80–88.</a:t>
-            </a:r>
-            <a:endParaRPr lang="en-US" sz="1000" dirty="0"/>
-          </a:p>
-          <a:p>
-            <a:pPr algn="l" indent="0" marL="0">
-              <a:spcAft>
-                <a:spcPts val="500"/>
-              </a:spcAft>
-              <a:buNone/>
-            </a:pPr>
-            <a:r>
-              <a:rPr lang="en-US" sz="1000" dirty="0">
-                <a:solidFill>
-                  <a:srgbClr val="1F2937"/>
-                </a:solidFill>
-                <a:latin typeface="Arial" pitchFamily="34" charset="0"/>
-                <a:ea typeface="Arial" pitchFamily="34" charset="-122"/>
-                <a:cs typeface="Arial" pitchFamily="34" charset="-120"/>
-              </a:rPr>
-              <a:t>Shoss, M. K. (2017). Job insecurity: An integrative review and agenda for future research. Journal of Management, 43(6), 1911–1939. https://doi.org/10.1177/0149206317691574</a:t>
-            </a:r>
-            <a:endParaRPr lang="en-US" sz="1000" dirty="0"/>
+              <a:t>Sverke, M., Hellgren, J., &amp; Näswall, K. (2002). No security: A meta-analysis and review of job insecurity and its consequences. Journal of Occupational Health Psychology, 7(3), 242-264.</a:t>
+            </a:r>
+            <a:endParaRPr lang="en-US" sz="1100" dirty="0"/>
           </a:p>
         </p:txBody>
       </p:sp>
@@ -7884,8 +7833,8 @@
         </p:nvSpPr>
         <p:spPr>
           <a:xfrm>
-            <a:off x="548640" y="5120640"/>
-            <a:ext cx="11091672" cy="1280160"/>
+            <a:off x="548640" y="4480560"/>
+            <a:ext cx="11091672" cy="1828800"/>
           </a:xfrm>
           <a:prstGeom prst="rect">
             <a:avLst/>
@@ -7904,7 +7853,7 @@
               <a:buNone/>
             </a:pPr>
             <a:r>
-              <a:rPr lang="he-IL" altLang="en-US" sz="1050" dirty="0">
+              <a:rPr lang="he-IL" altLang="en-US" sz="1100" dirty="0">
                 <a:solidFill>
                   <a:srgbClr val="1F2937"/>
                 </a:solidFill>
@@ -7912,9 +7861,9 @@
                 <a:ea typeface="Arial" pitchFamily="34" charset="-122"/>
                 <a:cs typeface="Arial" pitchFamily="34" charset="-120"/>
               </a:rPr>
-              <a:t>בנק ישראל (2025). ההשפעה הצפויה של בינה מלאכותית יוצרת על העובדים: השלכות על המדיניות בשוק העבודה (תיבה מתוך דוח בנק ישראל לשנת 2024). https://www.boi.org.il/publications/pressreleases/11-3-25/</a:t>
-            </a:r>
-            <a:endParaRPr lang="he-IL" sz="1050" dirty="0"/>
+              <a:t>בנק ישראל. (2025, 11 במרץ). ההשפעה הצפויה של בינה מלאכותית יוצרת על העובדים: השלכות על המדיניות בשוק העבודה [תיבה מתוך דוח בנק ישראל לשנת 2024]. https://www.boi.org.il/publications/pressreleases/11-3-25/</a:t>
+            </a:r>
+            <a:endParaRPr lang="he-IL" sz="1100" dirty="0"/>
           </a:p>
           <a:p>
             <a:pPr algn="r" indent="0" marL="0">
@@ -7924,7 +7873,7 @@
               <a:buNone/>
             </a:pPr>
             <a:r>
-              <a:rPr lang="he-IL" altLang="en-US" sz="1050" dirty="0">
+              <a:rPr lang="he-IL" altLang="en-US" sz="1100" dirty="0">
                 <a:solidFill>
                   <a:srgbClr val="1F2937"/>
                 </a:solidFill>
@@ -7934,7 +7883,7 @@
               </a:rPr>
               <a:t>דבדבני דקל, מ' (2026א). מחזון ורעיון למציאות ממשית [מצגת הרצאה]. ניהול קריירה בארגונים, הקריה האקדמית אונו.</a:t>
             </a:r>
-            <a:endParaRPr lang="he-IL" sz="1050" dirty="0"/>
+            <a:endParaRPr lang="he-IL" sz="1100" dirty="0"/>
           </a:p>
           <a:p>
             <a:pPr algn="r" indent="0" marL="0">
@@ -7944,7 +7893,7 @@
               <a:buNone/>
             </a:pPr>
             <a:r>
-              <a:rPr lang="he-IL" altLang="en-US" sz="1050" dirty="0">
+              <a:rPr lang="he-IL" altLang="en-US" sz="1100" dirty="0">
                 <a:solidFill>
                   <a:srgbClr val="1F2937"/>
                 </a:solidFill>
@@ -7954,14 +7903,14 @@
               </a:rPr>
               <a:t>דבדבני דקל, מ' (2026ב). עסקים בצל הקורונה: ממשבר להזדמנות, איך עושים את זה? [מצגת הרצאה]. ניהול קריירה בארגונים, הקריה האקדמית אונו.</a:t>
             </a:r>
-            <a:endParaRPr lang="he-IL" sz="1050" dirty="0"/>
+            <a:endParaRPr lang="he-IL" sz="1100" dirty="0"/>
           </a:p>
           <a:p>
             <a:pPr algn="r" indent="0" marL="0">
               <a:buNone/>
             </a:pPr>
             <a:r>
-              <a:rPr lang="he-IL" altLang="en-US" sz="1050" dirty="0">
+              <a:rPr lang="he-IL" altLang="en-US" sz="1100" dirty="0">
                 <a:solidFill>
                   <a:srgbClr val="1F2937"/>
                 </a:solidFill>
@@ -7971,7 +7920,7 @@
               </a:rPr>
               <a:t>הקשיים של מנהלי הייטק ב-2026: גיוס עובדים מתאימים והתייעלות AI. (2026, 21 ביוני). TheMarker.</a:t>
             </a:r>
-            <a:endParaRPr lang="he-IL" sz="1050" dirty="0"/>
+            <a:endParaRPr lang="he-IL" sz="1100" dirty="0"/>
           </a:p>
         </p:txBody>
       </p:sp>
@@ -8103,7 +8052,7 @@
               <a:buNone/>
             </a:pPr>
             <a:r>
-              <a:rPr lang="he-IL" altLang="en-US" sz="3200" b="1" dirty="0">
+              <a:rPr lang="he-IL" altLang="en-US" sz="3000" b="1" dirty="0">
                 <a:solidFill>
                   <a:srgbClr val="14213D"/>
                 </a:solidFill>
@@ -8113,7 +8062,7 @@
               </a:rPr>
               <a:t>מה נעשה ב-10 הדקות הקרובות?</a:t>
             </a:r>
-            <a:endParaRPr lang="he-IL" sz="3200" dirty="0"/>
+            <a:endParaRPr lang="he-IL" sz="3000" dirty="0"/>
           </a:p>
         </p:txBody>
       </p:sp>
@@ -8240,7 +8189,7 @@
               <a:buNone/>
             </a:pPr>
             <a:r>
-              <a:rPr lang="he-IL" altLang="en-US" sz="2000" b="1" dirty="0">
+              <a:rPr lang="he-IL" altLang="en-US" sz="1800" b="1" dirty="0">
                 <a:solidFill>
                   <a:srgbClr val="14213D"/>
                 </a:solidFill>
@@ -8250,7 +8199,7 @@
               </a:rPr>
               <a:t>סקר פתיחה</a:t>
             </a:r>
-            <a:endParaRPr lang="he-IL" sz="2000" dirty="0"/>
+            <a:endParaRPr lang="he-IL" sz="1800" dirty="0"/>
           </a:p>
         </p:txBody>
       </p:sp>
@@ -8455,7 +8404,7 @@
               <a:buNone/>
             </a:pPr>
             <a:r>
-              <a:rPr lang="he-IL" altLang="en-US" sz="2000" b="1" dirty="0">
+              <a:rPr lang="he-IL" altLang="en-US" sz="1800" b="1" dirty="0">
                 <a:solidFill>
                   <a:srgbClr val="14213D"/>
                 </a:solidFill>
@@ -8465,7 +8414,7 @@
               </a:rPr>
               <a:t>למה עכשיו</a:t>
             </a:r>
-            <a:endParaRPr lang="he-IL" sz="2000" dirty="0"/>
+            <a:endParaRPr lang="he-IL" sz="1800" dirty="0"/>
           </a:p>
         </p:txBody>
       </p:sp>
@@ -8670,7 +8619,7 @@
               <a:buNone/>
             </a:pPr>
             <a:r>
-              <a:rPr lang="he-IL" altLang="en-US" sz="2000" b="1" dirty="0">
+              <a:rPr lang="he-IL" altLang="en-US" sz="1800" b="1" dirty="0">
                 <a:solidFill>
                   <a:srgbClr val="14213D"/>
                 </a:solidFill>
@@ -8680,7 +8629,7 @@
               </a:rPr>
               <a:t>המאמר</a:t>
             </a:r>
-            <a:endParaRPr lang="he-IL" sz="2000" dirty="0"/>
+            <a:endParaRPr lang="he-IL" sz="1800" dirty="0"/>
           </a:p>
         </p:txBody>
       </p:sp>
@@ -8717,7 +8666,7 @@
                 <a:ea typeface="Arial" pitchFamily="34" charset="-122"/>
                 <a:cs typeface="Arial" pitchFamily="34" charset="-120"/>
               </a:rPr>
-              <a:t>הגדרה, 4 מנגנונים, משתנים ממתנים</a:t>
+              <a:t>השאלה, השיטה, 8 התוצאות</a:t>
             </a:r>
             <a:endParaRPr lang="he-IL" sz="1500" dirty="0"/>
           </a:p>
@@ -8885,7 +8834,7 @@
               <a:buNone/>
             </a:pPr>
             <a:r>
-              <a:rPr lang="he-IL" altLang="en-US" sz="2000" b="1" dirty="0">
+              <a:rPr lang="he-IL" altLang="en-US" sz="1800" b="1" dirty="0">
                 <a:solidFill>
                   <a:srgbClr val="14213D"/>
                 </a:solidFill>
@@ -8893,9 +8842,9 @@
                 <a:ea typeface="Arial" pitchFamily="34" charset="-122"/>
                 <a:cs typeface="Arial" pitchFamily="34" charset="-120"/>
               </a:rPr>
-              <a:t>ראיות ותובנות</a:t>
-            </a:r>
-            <a:endParaRPr lang="he-IL" sz="2000" dirty="0"/>
+              <a:t>מאמר משלים ותובנות</a:t>
+            </a:r>
+            <a:endParaRPr lang="he-IL" sz="1800" dirty="0"/>
           </a:p>
         </p:txBody>
       </p:sp>
@@ -8932,7 +8881,7 @@
                 <a:ea typeface="Arial" pitchFamily="34" charset="-122"/>
                 <a:cs typeface="Arial" pitchFamily="34" charset="-120"/>
               </a:rPr>
-              <a:t>מטא-אנליזה ודעה אישית</a:t>
+              <a:t>בינה מלאכותית וחוסן קריירה</a:t>
             </a:r>
             <a:endParaRPr lang="he-IL" sz="1500" dirty="0"/>
           </a:p>
@@ -9100,7 +9049,7 @@
               <a:buNone/>
             </a:pPr>
             <a:r>
-              <a:rPr lang="he-IL" altLang="en-US" sz="2000" b="1" dirty="0">
+              <a:rPr lang="he-IL" altLang="en-US" sz="1800" b="1" dirty="0">
                 <a:solidFill>
                   <a:srgbClr val="14213D"/>
                 </a:solidFill>
@@ -9110,7 +9059,7 @@
               </a:rPr>
               <a:t>סרטון + הפעלה</a:t>
             </a:r>
-            <a:endParaRPr lang="he-IL" sz="2000" dirty="0"/>
+            <a:endParaRPr lang="he-IL" sz="1800" dirty="0"/>
           </a:p>
         </p:txBody>
       </p:sp>
@@ -9315,7 +9264,7 @@
               <a:buNone/>
             </a:pPr>
             <a:r>
-              <a:rPr lang="he-IL" altLang="en-US" sz="2000" b="1" dirty="0">
+              <a:rPr lang="he-IL" altLang="en-US" sz="1800" b="1" dirty="0">
                 <a:solidFill>
                   <a:srgbClr val="14213D"/>
                 </a:solidFill>
@@ -9325,7 +9274,7 @@
               </a:rPr>
               <a:t>סיכום</a:t>
             </a:r>
-            <a:endParaRPr lang="he-IL" sz="2000" dirty="0"/>
+            <a:endParaRPr lang="he-IL" sz="1800" dirty="0"/>
           </a:p>
         </p:txBody>
       </p:sp>
@@ -9542,7 +9491,7 @@
               <a:buNone/>
             </a:pPr>
             <a:r>
-              <a:rPr lang="he-IL" altLang="en-US" sz="3200" b="1" dirty="0">
+              <a:rPr lang="he-IL" altLang="en-US" sz="3000" b="1" dirty="0">
                 <a:solidFill>
                   <a:srgbClr val="14213D"/>
                 </a:solidFill>
@@ -9552,7 +9501,7 @@
               </a:rPr>
               <a:t>סקר פתיחה</a:t>
             </a:r>
-            <a:endParaRPr lang="he-IL" sz="3200" dirty="0"/>
+            <a:endParaRPr lang="he-IL" sz="3000" dirty="0"/>
           </a:p>
         </p:txBody>
       </p:sp>
@@ -9589,7 +9538,7 @@
                 <a:ea typeface="Arial" pitchFamily="34" charset="-122"/>
                 <a:cs typeface="Arial" pitchFamily="34" charset="-120"/>
               </a:rPr>
-              <a:t>בסולם 1–5: עד כמה אתם בטוחים שתהיו באותו תפקיד (או באותו מסלול) בעוד שנתיים?</a:t>
+              <a:t>בסולם 1 עד 5: עד כמה אתם בטוחים שתהיו באותו תפקיד (או באותו מסלול) בעוד שנתיים?</a:t>
             </a:r>
             <a:endParaRPr lang="he-IL" sz="2600" dirty="0"/>
           </a:p>
@@ -10177,7 +10126,7 @@
                 <a:ea typeface="Arial" pitchFamily="34" charset="-122"/>
                 <a:cs typeface="Arial" pitchFamily="34" charset="-120"/>
               </a:rPr>
-              <a:t>הצבעה ב-Mentimeter / הרמת ידיים. התוצאות יוצגו על המסך – ונחזור אליהן בסוף.</a:t>
+              <a:t>הצבעה ב-Mentimeter או הרמת ידיים. התוצאות יוצגו על המסך ונחזור אליהן בסוף.</a:t>
             </a:r>
             <a:endParaRPr lang="he-IL" sz="1700" dirty="0"/>
           </a:p>
@@ -10311,7 +10260,7 @@
               <a:buNone/>
             </a:pPr>
             <a:r>
-              <a:rPr lang="he-IL" altLang="en-US" sz="3200" b="1" dirty="0">
+              <a:rPr lang="he-IL" altLang="en-US" sz="3000" b="1" dirty="0">
                 <a:solidFill>
                   <a:srgbClr val="14213D"/>
                 </a:solidFill>
@@ -10321,7 +10270,7 @@
               </a:rPr>
               <a:t>למה דווקא עכשיו?</a:t>
             </a:r>
-            <a:endParaRPr lang="he-IL" sz="3200" dirty="0"/>
+            <a:endParaRPr lang="he-IL" sz="3000" dirty="0"/>
           </a:p>
         </p:txBody>
       </p:sp>
@@ -10623,7 +10572,7 @@
                 <a:ea typeface="Arial" pitchFamily="34" charset="-122"/>
                 <a:cs typeface="Arial" pitchFamily="34" charset="-120"/>
               </a:rPr>
-              <a:t>משנה את תוכן התפקיד גם כשהמשרה נשמרת – "איום איכותני"</a:t>
+              <a:t>משנה את תוכן התפקיד גם כשהמשרה נשמרת. עצם המודעות לה מייצרת חוסר ביטחון (Chung et al., 2025)</a:t>
             </a:r>
             <a:endParaRPr lang="he-IL" sz="1250" dirty="0"/>
           </a:p>
@@ -10975,7 +10924,7 @@
                 <a:ea typeface="Arial" pitchFamily="34" charset="-122"/>
                 <a:cs typeface="Arial" pitchFamily="34" charset="-120"/>
               </a:rPr>
-              <a:t>חוסר ודאות שמקורו מחוץ לארגון – ממד ישראלי ייחודי</a:t>
+              <a:t>חוסר ודאות שמקורו מחוץ לארגון. ממד ישראלי ייחודי</a:t>
             </a:r>
             <a:endParaRPr lang="he-IL" sz="1250" dirty="0"/>
           </a:p>
@@ -11151,7 +11100,7 @@
                 <a:ea typeface="Arial" pitchFamily="34" charset="-122"/>
                 <a:cs typeface="Arial" pitchFamily="34" charset="-120"/>
               </a:rPr>
-              <a:t>פרילנס, חוזים זמניים, גיג – חוסר ביטחון הופך ממצב חריג למצב כרוני</a:t>
+              <a:t>פרילנס, חוזים זמניים, גיג. חוסר ביטחון הופך ממצב חריג למצב כרוני</a:t>
             </a:r>
             <a:endParaRPr lang="he-IL" sz="1250" dirty="0"/>
           </a:p>
@@ -11285,7 +11234,7 @@
               <a:buNone/>
             </a:pPr>
             <a:r>
-              <a:rPr lang="he-IL" altLang="en-US" sz="3200" b="1" dirty="0">
+              <a:rPr lang="he-IL" altLang="en-US" sz="3000" b="1" dirty="0">
                 <a:solidFill>
                   <a:srgbClr val="14213D"/>
                 </a:solidFill>
@@ -11295,7 +11244,7 @@
               </a:rPr>
               <a:t>המאמר שבחרנו</a:t>
             </a:r>
-            <a:endParaRPr lang="he-IL" sz="3200" dirty="0"/>
+            <a:endParaRPr lang="he-IL" sz="3000" dirty="0"/>
           </a:p>
         </p:txBody>
       </p:sp>
@@ -11308,11 +11257,11 @@
         <p:spPr>
           <a:xfrm>
             <a:off x="4846320" y="1325880"/>
-            <a:ext cx="6793992" cy="3017520"/>
+            <a:ext cx="6793992" cy="3108960"/>
           </a:xfrm>
           <a:prstGeom prst="roundRect">
             <a:avLst>
-              <a:gd name="adj" fmla="val 3636"/>
+              <a:gd name="adj" fmla="val 3529"/>
             </a:avLst>
           </a:prstGeom>
           <a:solidFill>
@@ -11342,7 +11291,7 @@
         <p:spPr>
           <a:xfrm>
             <a:off x="5074920" y="1463040"/>
-            <a:ext cx="6355080" cy="868680"/>
+            <a:ext cx="6355080" cy="914400"/>
           </a:xfrm>
           <a:prstGeom prst="rect">
             <a:avLst/>
@@ -11358,7 +11307,7 @@
               <a:buNone/>
             </a:pPr>
             <a:r>
-              <a:rPr lang="en-US" sz="2000" b="1" dirty="0">
+              <a:rPr lang="en-US" sz="1900" b="1" dirty="0">
                 <a:solidFill>
                   <a:srgbClr val="FFFFFF"/>
                 </a:solidFill>
@@ -11366,9 +11315,9 @@
                 <a:ea typeface="Arial" pitchFamily="34" charset="-122"/>
                 <a:cs typeface="Arial" pitchFamily="34" charset="-120"/>
               </a:rPr>
-              <a:t>Job Insecurity: An Integrative Review and Agenda for Future Research</a:t>
-            </a:r>
-            <a:endParaRPr lang="en-US" sz="2000" dirty="0"/>
+              <a:t>Moving on Up Now? A Meta-Analysis of the Associations Between Job Insecurity and Career-Related Outcomes</a:t>
+            </a:r>
+            <a:endParaRPr lang="en-US" sz="1900" dirty="0"/>
           </a:p>
         </p:txBody>
       </p:sp>
@@ -11380,24 +11329,24 @@
         </p:nvSpPr>
         <p:spPr>
           <a:xfrm>
-            <a:off x="5074920" y="2377440"/>
-            <a:ext cx="6355080" cy="365760"/>
-          </a:xfrm>
-          <a:prstGeom prst="rect">
-            <a:avLst/>
-          </a:prstGeom>
-          <a:noFill/>
-          <a:ln/>
-        </p:spPr>
-        <p:txBody>
-          <a:bodyPr wrap="square" lIns="0" tIns="0" rIns="0" bIns="0" rtlCol="0" anchor="ctr"/>
+            <a:off x="5074920" y="2423160"/>
+            <a:ext cx="6355080" cy="457200"/>
+          </a:xfrm>
+          <a:prstGeom prst="rect">
+            <a:avLst/>
+          </a:prstGeom>
+          <a:noFill/>
+          <a:ln/>
+        </p:spPr>
+        <p:txBody>
+          <a:bodyPr wrap="square" lIns="0" tIns="0" rIns="0" bIns="0" rtlCol="0" anchor="t"/>
           <a:lstStyle/>
           <a:p>
             <a:pPr algn="r" indent="0" marL="0">
               <a:buNone/>
             </a:pPr>
             <a:r>
-              <a:rPr lang="en-US" sz="1300" dirty="0">
+              <a:rPr lang="en-US" sz="1200" dirty="0">
                 <a:solidFill>
                   <a:srgbClr val="FCA311"/>
                 </a:solidFill>
@@ -11405,9 +11354,9 @@
                 <a:ea typeface="Arial" pitchFamily="34" charset="-122"/>
                 <a:cs typeface="Arial" pitchFamily="34" charset="-120"/>
               </a:rPr>
-              <a:t>Mindy K. Shoss  |  Journal of Management, 43(6), 1911–1939  |  2017</a:t>
-            </a:r>
-            <a:endParaRPr lang="en-US" sz="1300" dirty="0"/>
+              <a:t>Låstad, Pienaar, Näswall, Richter, Hellgren &amp; Sverke  |  Scandinavian Journal of Work and Organizational Psychology, 10(1)  |  2025</a:t>
+            </a:r>
+            <a:endParaRPr lang="en-US" sz="1200" dirty="0"/>
           </a:p>
         </p:txBody>
       </p:sp>
@@ -11419,7 +11368,7 @@
         </p:nvSpPr>
         <p:spPr>
           <a:xfrm>
-            <a:off x="5074920" y="2788920"/>
+            <a:off x="5074920" y="2926080"/>
             <a:ext cx="6355080" cy="1463040"/>
           </a:xfrm>
           <a:prstGeom prst="rect">
@@ -11440,7 +11389,7 @@
               <a:buChar char="•"/>
             </a:pPr>
             <a:r>
-              <a:rPr lang="he-IL" altLang="en-US" sz="1350" dirty="0">
+              <a:rPr lang="he-IL" altLang="en-US" sz="1300" dirty="0">
                 <a:solidFill>
                   <a:srgbClr val="E5EAF3"/>
                 </a:solidFill>
@@ -11448,9 +11397,9 @@
                 <a:ea typeface="Arial" pitchFamily="34" charset="-122"/>
                 <a:cs typeface="Arial" pitchFamily="34" charset="-120"/>
               </a:rPr>
-              <a:t>סקירה אינטגרטיבית – מסנתזת עשרות שנות מחקר מניהול, פסיכולוגיה, סוציולוגיה וכלכלה</a:t>
-            </a:r>
-            <a:endParaRPr lang="he-IL" sz="1350" dirty="0"/>
+              <a:t>מטא-אנליזה: איחוד סטטיסטי של 237 מחקרים ראשוניים</a:t>
+            </a:r>
+            <a:endParaRPr lang="he-IL" sz="1300" dirty="0"/>
           </a:p>
           <a:p>
             <a:pPr algn="r" marL="342900" indent="-342900">
@@ -11461,7 +11410,7 @@
               <a:buChar char="•"/>
             </a:pPr>
             <a:r>
-              <a:rPr lang="he-IL" altLang="en-US" sz="1350" dirty="0">
+              <a:rPr lang="he-IL" altLang="en-US" sz="1300" dirty="0">
                 <a:solidFill>
                   <a:srgbClr val="E5EAF3"/>
                 </a:solidFill>
@@ -11469,9 +11418,9 @@
                 <a:ea typeface="Arial" pitchFamily="34" charset="-122"/>
                 <a:cs typeface="Arial" pitchFamily="34" charset="-120"/>
               </a:rPr>
-              <a:t>כתב עת שפיט מהמובילים בעולם בתחום הניהול; המאמר מצוטט מאות פעמים</a:t>
-            </a:r>
-            <a:endParaRPr lang="he-IL" sz="1350" dirty="0"/>
+              <a:t>כתב עת שפיט, גישה פתוחה מלאה (Open Access), הוצאת אוניברסיטת סטוקהולם</a:t>
+            </a:r>
+            <a:endParaRPr lang="he-IL" sz="1300" dirty="0"/>
           </a:p>
           <a:p>
             <a:pPr algn="r" marL="342900" indent="-342900">
@@ -11482,7 +11431,7 @@
               <a:buChar char="•"/>
             </a:pPr>
             <a:r>
-              <a:rPr lang="he-IL" altLang="en-US" sz="1350" dirty="0">
+              <a:rPr lang="he-IL" altLang="en-US" sz="1300" dirty="0">
                 <a:solidFill>
                   <a:srgbClr val="E5EAF3"/>
                 </a:solidFill>
@@ -11490,9 +11439,9 @@
                 <a:ea typeface="Arial" pitchFamily="34" charset="-122"/>
                 <a:cs typeface="Arial" pitchFamily="34" charset="-120"/>
               </a:rPr>
-              <a:t>מטרה: הגדרה ברורה + מסגרת מושגית אחת + אג'נדה למחקר</a:t>
-            </a:r>
-            <a:endParaRPr lang="he-IL" sz="1350" dirty="0"/>
+              <a:t>המחברים: קבוצת המחקר המובילה בעולם בנושא, שפרסמה את המטא-אנליזה הראשונה בתחום ב-2002</a:t>
+            </a:r>
+            <a:endParaRPr lang="he-IL" sz="1300" dirty="0"/>
           </a:p>
         </p:txBody>
       </p:sp>
@@ -11505,11 +11454,11 @@
         <p:spPr>
           <a:xfrm>
             <a:off x="548640" y="1325880"/>
-            <a:ext cx="4023360" cy="3017520"/>
+            <a:ext cx="4023360" cy="3108960"/>
           </a:xfrm>
           <a:prstGeom prst="roundRect">
             <a:avLst>
-              <a:gd name="adj" fmla="val 3636"/>
+              <a:gd name="adj" fmla="val 3529"/>
             </a:avLst>
           </a:prstGeom>
           <a:solidFill>
@@ -11578,7 +11527,7 @@
         <p:spPr>
           <a:xfrm>
             <a:off x="777240" y="1965960"/>
-            <a:ext cx="3566160" cy="2286000"/>
+            <a:ext cx="3566160" cy="2377440"/>
           </a:xfrm>
           <a:prstGeom prst="rect">
             <a:avLst/>
@@ -11598,7 +11547,7 @@
               <a:buChar char="•"/>
             </a:pPr>
             <a:r>
-              <a:rPr lang="he-IL" altLang="en-US" sz="1350" dirty="0">
+              <a:rPr lang="he-IL" altLang="en-US" sz="1300" dirty="0">
                 <a:solidFill>
                   <a:srgbClr val="1F2937"/>
                 </a:solidFill>
@@ -11606,9 +11555,9 @@
                 <a:ea typeface="Arial" pitchFamily="34" charset="-122"/>
                 <a:cs typeface="Arial" pitchFamily="34" charset="-120"/>
               </a:rPr>
-              <a:t>עונה על השאלה "למה אנשים שונים מגיבים אחרת לאותו איום"</a:t>
-            </a:r>
-            <a:endParaRPr lang="he-IL" sz="1350" dirty="0"/>
+              <a:t>עונה על השאלה שכולנו שואלים: האם הפחד יעשה אותנו טובים יותר?</a:t>
+            </a:r>
+            <a:endParaRPr lang="he-IL" sz="1300" dirty="0"/>
           </a:p>
           <a:p>
             <a:pPr algn="r" marL="342900" indent="-342900">
@@ -11619,7 +11568,7 @@
               <a:buChar char="•"/>
             </a:pPr>
             <a:r>
-              <a:rPr lang="he-IL" altLang="en-US" sz="1350" dirty="0">
+              <a:rPr lang="he-IL" altLang="en-US" sz="1300" dirty="0">
                 <a:solidFill>
                   <a:srgbClr val="1F2937"/>
                 </a:solidFill>
@@ -11627,9 +11576,9 @@
                 <a:ea typeface="Arial" pitchFamily="34" charset="-122"/>
                 <a:cs typeface="Arial" pitchFamily="34" charset="-120"/>
               </a:rPr>
-              <a:t>נותן שפה משותפת – מהתחושה האמורפית לרכיבים שאפשר לעבוד איתם</a:t>
-            </a:r>
-            <a:endParaRPr lang="he-IL" sz="1350" dirty="0"/>
+              <a:t>הראשון שבודק מה חוסר ביטחון עושה לקריירה עצמה, לא רק לבריאות</a:t>
+            </a:r>
+            <a:endParaRPr lang="he-IL" sz="1300" dirty="0"/>
           </a:p>
           <a:p>
             <a:pPr algn="r" marL="342900" indent="-342900">
@@ -11640,7 +11589,7 @@
               <a:buChar char="•"/>
             </a:pPr>
             <a:r>
-              <a:rPr lang="he-IL" altLang="en-US" sz="1350" dirty="0">
+              <a:rPr lang="he-IL" altLang="en-US" sz="1300" dirty="0">
                 <a:solidFill>
                   <a:srgbClr val="1F2937"/>
                 </a:solidFill>
@@ -11648,9 +11597,9 @@
                 <a:ea typeface="Arial" pitchFamily="34" charset="-122"/>
                 <a:cs typeface="Arial" pitchFamily="34" charset="-120"/>
               </a:rPr>
-              <a:t>מתחבר ל"שלושת סלי הכלים" ול"ממשבר להזדמנות" מהקורס</a:t>
-            </a:r>
-            <a:endParaRPr lang="he-IL" sz="1350" dirty="0"/>
+              <a:t>זמין לכולם בחינם. אפשר לשלוח לחבר שמפחד מפיטורים</a:t>
+            </a:r>
+            <a:endParaRPr lang="he-IL" sz="1300" dirty="0"/>
           </a:p>
         </p:txBody>
       </p:sp>
@@ -11662,12 +11611,12 @@
         </p:nvSpPr>
         <p:spPr>
           <a:xfrm>
-            <a:off x="548640" y="4572000"/>
-            <a:ext cx="11091672" cy="1691640"/>
+            <a:off x="548640" y="4663440"/>
+            <a:ext cx="11091672" cy="1600200"/>
           </a:xfrm>
           <a:prstGeom prst="roundRect">
             <a:avLst>
-              <a:gd name="adj" fmla="val 6486"/>
+              <a:gd name="adj" fmla="val 6857"/>
             </a:avLst>
           </a:prstGeom>
           <a:solidFill>
@@ -11696,7 +11645,7 @@
         </p:nvSpPr>
         <p:spPr>
           <a:xfrm>
-            <a:off x="777240" y="4663440"/>
+            <a:off x="777240" y="4754880"/>
             <a:ext cx="10607040" cy="411480"/>
           </a:xfrm>
           <a:prstGeom prst="rect">
@@ -11713,7 +11662,7 @@
               <a:buNone/>
             </a:pPr>
             <a:r>
-              <a:rPr lang="he-IL" altLang="en-US" sz="1600" b="1" dirty="0">
+              <a:rPr lang="he-IL" altLang="en-US" sz="1500" b="1" dirty="0">
                 <a:solidFill>
                   <a:srgbClr val="2A9D8F"/>
                 </a:solidFill>
@@ -11721,9 +11670,9 @@
                 <a:ea typeface="Arial" pitchFamily="34" charset="-122"/>
                 <a:cs typeface="Arial" pitchFamily="34" charset="-120"/>
               </a:rPr>
-              <a:t>מאמר משלים וראיות תומכות</a:t>
-            </a:r>
-            <a:endParaRPr lang="he-IL" sz="1600" dirty="0"/>
+              <a:t>מאמר משלים (גם הוא 2025, גישה פתוחה) והמסגרת התיאורטית</a:t>
+            </a:r>
+            <a:endParaRPr lang="he-IL" sz="1500" dirty="0"/>
           </a:p>
         </p:txBody>
       </p:sp>
@@ -11735,8 +11684,8 @@
         </p:nvSpPr>
         <p:spPr>
           <a:xfrm>
-            <a:off x="777240" y="5074920"/>
-            <a:ext cx="10607040" cy="1097280"/>
+            <a:off x="777240" y="5166360"/>
+            <a:ext cx="10607040" cy="1005840"/>
           </a:xfrm>
           <a:prstGeom prst="rect">
             <a:avLst/>
@@ -11755,7 +11704,7 @@
               <a:buNone/>
             </a:pPr>
             <a:r>
-              <a:rPr lang="en-US" sz="1250" dirty="0">
+              <a:rPr lang="en-US" sz="1200" dirty="0">
                 <a:solidFill>
                   <a:srgbClr val="1F2937"/>
                 </a:solidFill>
@@ -11763,9 +11712,9 @@
                 <a:ea typeface="Arial" pitchFamily="34" charset="-122"/>
                 <a:cs typeface="Arial" pitchFamily="34" charset="-120"/>
               </a:rPr>
-              <a:t>Lee, C., Huang, G.-H., &amp; Ashford, S. J. (2018). Job insecurity and the changing workplace. Annual Review of Organizational Psychology and Organizational Behavior, 5, 335-359.</a:t>
-            </a:r>
-            <a:endParaRPr lang="en-US" sz="1250" dirty="0"/>
+              <a:t>Chung, Y. W., Im, S., Kim, J. E., &amp; Yun, J. K. (2025). Artificial intelligence awareness, career resilience, job insecurity and behavioural outcomes. Australian Journal of Psychology, 77(1), Article 2559910.</a:t>
+            </a:r>
+            <a:endParaRPr lang="en-US" sz="1200" dirty="0"/>
           </a:p>
           <a:p>
             <a:pPr algn="r" indent="0" marL="0">
@@ -11775,7 +11724,7 @@
               <a:buNone/>
             </a:pPr>
             <a:r>
-              <a:rPr lang="en-US" sz="1250" dirty="0">
+              <a:rPr lang="en-US" sz="1200" dirty="0">
                 <a:solidFill>
                   <a:srgbClr val="1F2937"/>
                 </a:solidFill>
@@ -11783,9 +11732,9 @@
                 <a:ea typeface="Arial" pitchFamily="34" charset="-122"/>
                 <a:cs typeface="Arial" pitchFamily="34" charset="-120"/>
               </a:rPr>
-              <a:t>Jiang, L., &amp; Lavaysse, L. M. (2018). Cognitive and affective job insecurity: A meta-analysis and a primary study. Journal of Management, 44(6), 2307–2342.</a:t>
-            </a:r>
-            <a:endParaRPr lang="en-US" sz="1250" dirty="0"/>
+              <a:t>Shoss, M. K. (2017). Job insecurity: An integrative review and agenda for future research. Journal of Management, 43(6), 1911-1939.</a:t>
+            </a:r>
+            <a:endParaRPr lang="en-US" sz="1200" dirty="0"/>
           </a:p>
         </p:txBody>
       </p:sp>
@@ -11917,7 +11866,7 @@
               <a:buNone/>
             </a:pPr>
             <a:r>
-              <a:rPr lang="he-IL" altLang="en-US" sz="3200" b="1" dirty="0">
+              <a:rPr lang="he-IL" altLang="en-US" sz="3000" b="1" dirty="0">
                 <a:solidFill>
                   <a:srgbClr val="14213D"/>
                 </a:solidFill>
@@ -11925,9 +11874,9 @@
                 <a:ea typeface="Arial" pitchFamily="34" charset="-122"/>
                 <a:cs typeface="Arial" pitchFamily="34" charset="-120"/>
               </a:rPr>
-              <a:t>מה זה בכלל חוסר ביטחון תעסוקתי?</a:t>
-            </a:r>
-            <a:endParaRPr lang="he-IL" sz="3200" dirty="0"/>
+              <a:t>השאלה: כשמפחדים לאבד את העבודה, מתקדמים למעלה או בורחים הלאה?</a:t>
+            </a:r>
+            <a:endParaRPr lang="he-IL" sz="3000" dirty="0"/>
           </a:p>
         </p:txBody>
       </p:sp>
@@ -11940,11 +11889,11 @@
         <p:spPr>
           <a:xfrm>
             <a:off x="548640" y="1280160"/>
-            <a:ext cx="11091672" cy="1143000"/>
+            <a:ext cx="11091672" cy="1097280"/>
           </a:xfrm>
           <a:prstGeom prst="roundRect">
             <a:avLst>
-              <a:gd name="adj" fmla="val 9600"/>
+              <a:gd name="adj" fmla="val 10000"/>
             </a:avLst>
           </a:prstGeom>
           <a:solidFill>
@@ -11974,7 +11923,7 @@
         <p:spPr>
           <a:xfrm>
             <a:off x="822960" y="1371600"/>
-            <a:ext cx="10515600" cy="548640"/>
+            <a:ext cx="10515600" cy="914400"/>
           </a:xfrm>
           <a:prstGeom prst="rect">
             <a:avLst/>
@@ -11990,7 +11939,7 @@
               <a:buNone/>
             </a:pPr>
             <a:r>
-              <a:rPr lang="he-IL" altLang="en-US" sz="2200" b="1" dirty="0">
+              <a:rPr lang="he-IL" altLang="en-US" sz="1600" dirty="0">
                 <a:solidFill>
                   <a:srgbClr val="FFFFFF"/>
                 </a:solidFill>
@@ -11998,836 +11947,34 @@
                 <a:ea typeface="Arial" pitchFamily="34" charset="-122"/>
                 <a:cs typeface="Arial" pitchFamily="34" charset="-120"/>
               </a:rPr>
-              <a:t>"איום נתפס על ההמשכיות והיציבות של התעסוקה כפי שהיא נחווית כיום"</a:t>
-            </a:r>
-            <a:endParaRPr lang="he-IL" sz="2200" dirty="0"/>
-          </a:p>
-        </p:txBody>
-      </p:sp>
-      <p:sp>
-        <p:nvSpPr>
-          <p:cNvPr id="5" name="Text 3"/>
-          <p:cNvSpPr txBox="1"/>
-          <p:nvPr/>
-        </p:nvSpPr>
-        <p:spPr>
-          <a:xfrm>
-            <a:off x="822960" y="1920240"/>
-            <a:ext cx="10515600" cy="411480"/>
-          </a:xfrm>
-          <a:prstGeom prst="rect">
-            <a:avLst/>
-          </a:prstGeom>
-          <a:noFill/>
-          <a:ln/>
-        </p:spPr>
-        <p:txBody>
-          <a:bodyPr wrap="square" lIns="0" tIns="0" rIns="0" bIns="0" rtlCol="0" anchor="ctr"/>
-          <a:lstStyle/>
-          <a:p>
-            <a:pPr algn="r" indent="0" marL="0">
-              <a:buNone/>
-            </a:pPr>
-            <a:r>
-              <a:rPr lang="en-US" sz="1300" i="1" dirty="0">
-                <a:solidFill>
-                  <a:srgbClr val="FCA311"/>
-                </a:solidFill>
-                <a:latin typeface="Arial" pitchFamily="34" charset="0"/>
-                <a:ea typeface="Arial" pitchFamily="34" charset="-122"/>
-                <a:cs typeface="Arial" pitchFamily="34" charset="-120"/>
-              </a:rPr>
-              <a:t>“a perceived threat to the continuity and stability of employment as it is currently experienced” (Shoss, 2017)</a:t>
-            </a:r>
-            <a:endParaRPr lang="en-US" sz="1300" dirty="0"/>
-          </a:p>
-        </p:txBody>
-      </p:sp>
-      <p:sp>
-        <p:nvSpPr>
-          <p:cNvPr id="6" name="Shape 4"/>
+              <a:t>חוסר ביטחון תעסוקתי = איום נתפס על ההמשכיות ועל היציבות של התעסוקה הנוכחית (Shoss, 2017). סובייקטיבי, מכוון לעתיד, כמותי או איכותני.</a:t>
+            </a:r>
+            <a:endParaRPr lang="he-IL" sz="1600" dirty="0"/>
+          </a:p>
+        </p:txBody>
+      </p:sp>
+      <p:sp>
+        <p:nvSpPr>
+          <p:cNvPr id="5" name="Shape 3"/>
           <p:cNvSpPr/>
           <p:nvPr/>
         </p:nvSpPr>
         <p:spPr>
           <a:xfrm>
-            <a:off x="11109960" y="2788920"/>
-            <a:ext cx="457200" cy="457200"/>
-          </a:xfrm>
-          <a:prstGeom prst="ellipse">
-            <a:avLst/>
+            <a:off x="6245352" y="2651760"/>
+            <a:ext cx="5394960" cy="2468880"/>
+          </a:xfrm>
+          <a:prstGeom prst="roundRect">
+            <a:avLst>
+              <a:gd name="adj" fmla="val 4444"/>
+            </a:avLst>
           </a:prstGeom>
           <a:solidFill>
-            <a:srgbClr val="FCA311"/>
+            <a:srgbClr val="FFFFFF"/>
           </a:solidFill>
           <a:ln w="12700">
             <a:solidFill>
-              <a:srgbClr val="FCA311"/>
-            </a:solidFill>
-            <a:prstDash val="solid"/>
-          </a:ln>
-        </p:spPr>
-      </p:sp>
-      <p:sp>
-        <p:nvSpPr>
-          <p:cNvPr id="7" name="Text 5"/>
-          <p:cNvSpPr txBox="1"/>
-          <p:nvPr/>
-        </p:nvSpPr>
-        <p:spPr>
-          <a:xfrm>
-            <a:off x="11109960" y="2788920"/>
-            <a:ext cx="457200" cy="457200"/>
-          </a:xfrm>
-          <a:prstGeom prst="rect">
-            <a:avLst/>
-          </a:prstGeom>
-          <a:noFill/>
-          <a:ln/>
-        </p:spPr>
-        <p:txBody>
-          <a:bodyPr wrap="square" lIns="0" tIns="0" rIns="0" bIns="0" rtlCol="0" anchor="ctr"/>
-          <a:lstStyle/>
-          <a:p>
-            <a:pPr algn="ctr" indent="0" marL="0">
-              <a:buNone/>
-            </a:pPr>
-            <a:r>
-              <a:rPr lang="en-US" sz="1500" b="1" dirty="0">
-                <a:solidFill>
-                  <a:srgbClr val="14213D"/>
-                </a:solidFill>
-                <a:latin typeface="Arial" pitchFamily="34" charset="0"/>
-                <a:ea typeface="Arial" pitchFamily="34" charset="-122"/>
-                <a:cs typeface="Arial" pitchFamily="34" charset="-120"/>
-              </a:rPr>
-              <a:t>1</a:t>
-            </a:r>
-            <a:endParaRPr lang="en-US" sz="1500" dirty="0"/>
-          </a:p>
-        </p:txBody>
-      </p:sp>
-      <p:sp>
-        <p:nvSpPr>
-          <p:cNvPr id="8" name="Text 6"/>
-          <p:cNvSpPr txBox="1"/>
-          <p:nvPr/>
-        </p:nvSpPr>
-        <p:spPr>
-          <a:xfrm>
-            <a:off x="6949440" y="2697480"/>
-            <a:ext cx="4023360" cy="365760"/>
-          </a:xfrm>
-          <a:prstGeom prst="rect">
-            <a:avLst/>
-          </a:prstGeom>
-          <a:noFill/>
-          <a:ln/>
-        </p:spPr>
-        <p:txBody>
-          <a:bodyPr wrap="square" lIns="0" tIns="0" rIns="0" bIns="0" rtlCol="0" anchor="t"/>
-          <a:lstStyle/>
-          <a:p>
-            <a:pPr rtl="1" algn="r" indent="0" marL="0">
-              <a:buNone/>
-            </a:pPr>
-            <a:r>
-              <a:rPr lang="he-IL" altLang="en-US" sz="1600" b="1" dirty="0">
-                <a:solidFill>
-                  <a:srgbClr val="14213D"/>
-                </a:solidFill>
-                <a:latin typeface="Arial" pitchFamily="34" charset="0"/>
-                <a:ea typeface="Arial" pitchFamily="34" charset="-122"/>
-                <a:cs typeface="Arial" pitchFamily="34" charset="-120"/>
-              </a:rPr>
-              <a:t>תפיסה</a:t>
-            </a:r>
-            <a:endParaRPr lang="he-IL" sz="1600" dirty="0"/>
-          </a:p>
-        </p:txBody>
-      </p:sp>
-      <p:sp>
-        <p:nvSpPr>
-          <p:cNvPr id="9" name="Text 7"/>
-          <p:cNvSpPr txBox="1"/>
-          <p:nvPr/>
-        </p:nvSpPr>
-        <p:spPr>
-          <a:xfrm>
-            <a:off x="6949440" y="3063240"/>
-            <a:ext cx="4023360" cy="457200"/>
-          </a:xfrm>
-          <a:prstGeom prst="rect">
-            <a:avLst/>
-          </a:prstGeom>
-          <a:noFill/>
-          <a:ln/>
-        </p:spPr>
-        <p:txBody>
-          <a:bodyPr wrap="square" lIns="0" tIns="0" rIns="0" bIns="0" rtlCol="0" anchor="t"/>
-          <a:lstStyle/>
-          <a:p>
-            <a:pPr rtl="1" algn="r" indent="0" marL="0">
-              <a:buNone/>
-            </a:pPr>
-            <a:r>
-              <a:rPr lang="he-IL" altLang="en-US" sz="1250" dirty="0">
-                <a:solidFill>
-                  <a:srgbClr val="1F2937"/>
-                </a:solidFill>
-                <a:latin typeface="Arial" pitchFamily="34" charset="0"/>
-                <a:ea typeface="Arial" pitchFamily="34" charset="-122"/>
-                <a:cs typeface="Arial" pitchFamily="34" charset="-120"/>
-              </a:rPr>
-              <a:t>סובייקטיבי – שני עובדים, אותו חוזה, תחושה שונה</a:t>
-            </a:r>
-            <a:endParaRPr lang="he-IL" sz="1250" dirty="0"/>
-          </a:p>
-        </p:txBody>
-      </p:sp>
-      <p:sp>
-        <p:nvSpPr>
-          <p:cNvPr id="10" name="Shape 8"/>
-          <p:cNvSpPr/>
-          <p:nvPr/>
-        </p:nvSpPr>
-        <p:spPr>
-          <a:xfrm>
-            <a:off x="11109960" y="3703320"/>
-            <a:ext cx="457200" cy="457200"/>
-          </a:xfrm>
-          <a:prstGeom prst="ellipse">
-            <a:avLst/>
-          </a:prstGeom>
-          <a:solidFill>
-            <a:srgbClr val="FCA311"/>
-          </a:solidFill>
-          <a:ln w="12700">
-            <a:solidFill>
-              <a:srgbClr val="FCA311"/>
-            </a:solidFill>
-            <a:prstDash val="solid"/>
-          </a:ln>
-        </p:spPr>
-      </p:sp>
-      <p:sp>
-        <p:nvSpPr>
-          <p:cNvPr id="11" name="Text 9"/>
-          <p:cNvSpPr txBox="1"/>
-          <p:nvPr/>
-        </p:nvSpPr>
-        <p:spPr>
-          <a:xfrm>
-            <a:off x="11109960" y="3703320"/>
-            <a:ext cx="457200" cy="457200"/>
-          </a:xfrm>
-          <a:prstGeom prst="rect">
-            <a:avLst/>
-          </a:prstGeom>
-          <a:noFill/>
-          <a:ln/>
-        </p:spPr>
-        <p:txBody>
-          <a:bodyPr wrap="square" lIns="0" tIns="0" rIns="0" bIns="0" rtlCol="0" anchor="ctr"/>
-          <a:lstStyle/>
-          <a:p>
-            <a:pPr algn="ctr" indent="0" marL="0">
-              <a:buNone/>
-            </a:pPr>
-            <a:r>
-              <a:rPr lang="en-US" sz="1500" b="1" dirty="0">
-                <a:solidFill>
-                  <a:srgbClr val="14213D"/>
-                </a:solidFill>
-                <a:latin typeface="Arial" pitchFamily="34" charset="0"/>
-                <a:ea typeface="Arial" pitchFamily="34" charset="-122"/>
-                <a:cs typeface="Arial" pitchFamily="34" charset="-120"/>
-              </a:rPr>
-              <a:t>2</a:t>
-            </a:r>
-            <a:endParaRPr lang="en-US" sz="1500" dirty="0"/>
-          </a:p>
-        </p:txBody>
-      </p:sp>
-      <p:sp>
-        <p:nvSpPr>
-          <p:cNvPr id="12" name="Text 10"/>
-          <p:cNvSpPr txBox="1"/>
-          <p:nvPr/>
-        </p:nvSpPr>
-        <p:spPr>
-          <a:xfrm>
-            <a:off x="6949440" y="3611880"/>
-            <a:ext cx="4023360" cy="365760"/>
-          </a:xfrm>
-          <a:prstGeom prst="rect">
-            <a:avLst/>
-          </a:prstGeom>
-          <a:noFill/>
-          <a:ln/>
-        </p:spPr>
-        <p:txBody>
-          <a:bodyPr wrap="square" lIns="0" tIns="0" rIns="0" bIns="0" rtlCol="0" anchor="t"/>
-          <a:lstStyle/>
-          <a:p>
-            <a:pPr rtl="1" algn="r" indent="0" marL="0">
-              <a:buNone/>
-            </a:pPr>
-            <a:r>
-              <a:rPr lang="he-IL" altLang="en-US" sz="1600" b="1" dirty="0">
-                <a:solidFill>
-                  <a:srgbClr val="14213D"/>
-                </a:solidFill>
-                <a:latin typeface="Arial" pitchFamily="34" charset="0"/>
-                <a:ea typeface="Arial" pitchFamily="34" charset="-122"/>
-                <a:cs typeface="Arial" pitchFamily="34" charset="-120"/>
-              </a:rPr>
-              <a:t>איום</a:t>
-            </a:r>
-            <a:endParaRPr lang="he-IL" sz="1600" dirty="0"/>
-          </a:p>
-        </p:txBody>
-      </p:sp>
-      <p:sp>
-        <p:nvSpPr>
-          <p:cNvPr id="13" name="Text 11"/>
-          <p:cNvSpPr txBox="1"/>
-          <p:nvPr/>
-        </p:nvSpPr>
-        <p:spPr>
-          <a:xfrm>
-            <a:off x="6949440" y="3977640"/>
-            <a:ext cx="4023360" cy="457200"/>
-          </a:xfrm>
-          <a:prstGeom prst="rect">
-            <a:avLst/>
-          </a:prstGeom>
-          <a:noFill/>
-          <a:ln/>
-        </p:spPr>
-        <p:txBody>
-          <a:bodyPr wrap="square" lIns="0" tIns="0" rIns="0" bIns="0" rtlCol="0" anchor="t"/>
-          <a:lstStyle/>
-          <a:p>
-            <a:pPr rtl="1" algn="r" indent="0" marL="0">
-              <a:buNone/>
-            </a:pPr>
-            <a:r>
-              <a:rPr lang="he-IL" altLang="en-US" sz="1250" dirty="0">
-                <a:solidFill>
-                  <a:srgbClr val="1F2937"/>
-                </a:solidFill>
-                <a:latin typeface="Arial" pitchFamily="34" charset="0"/>
-                <a:ea typeface="Arial" pitchFamily="34" charset="-122"/>
-                <a:cs typeface="Arial" pitchFamily="34" charset="-120"/>
-              </a:rPr>
-              <a:t>מכוון לעתיד – זה "לפני", לא אחרי</a:t>
-            </a:r>
-            <a:endParaRPr lang="he-IL" sz="1250" dirty="0"/>
-          </a:p>
-        </p:txBody>
-      </p:sp>
-      <p:sp>
-        <p:nvSpPr>
-          <p:cNvPr id="14" name="Shape 12"/>
-          <p:cNvSpPr/>
-          <p:nvPr/>
-        </p:nvSpPr>
-        <p:spPr>
-          <a:xfrm>
-            <a:off x="11109960" y="4617720"/>
-            <a:ext cx="457200" cy="457200"/>
-          </a:xfrm>
-          <a:prstGeom prst="ellipse">
-            <a:avLst/>
-          </a:prstGeom>
-          <a:solidFill>
-            <a:srgbClr val="FCA311"/>
-          </a:solidFill>
-          <a:ln w="12700">
-            <a:solidFill>
-              <a:srgbClr val="FCA311"/>
-            </a:solidFill>
-            <a:prstDash val="solid"/>
-          </a:ln>
-        </p:spPr>
-      </p:sp>
-      <p:sp>
-        <p:nvSpPr>
-          <p:cNvPr id="15" name="Text 13"/>
-          <p:cNvSpPr txBox="1"/>
-          <p:nvPr/>
-        </p:nvSpPr>
-        <p:spPr>
-          <a:xfrm>
-            <a:off x="11109960" y="4617720"/>
-            <a:ext cx="457200" cy="457200"/>
-          </a:xfrm>
-          <a:prstGeom prst="rect">
-            <a:avLst/>
-          </a:prstGeom>
-          <a:noFill/>
-          <a:ln/>
-        </p:spPr>
-        <p:txBody>
-          <a:bodyPr wrap="square" lIns="0" tIns="0" rIns="0" bIns="0" rtlCol="0" anchor="ctr"/>
-          <a:lstStyle/>
-          <a:p>
-            <a:pPr algn="ctr" indent="0" marL="0">
-              <a:buNone/>
-            </a:pPr>
-            <a:r>
-              <a:rPr lang="en-US" sz="1500" b="1" dirty="0">
-                <a:solidFill>
-                  <a:srgbClr val="14213D"/>
-                </a:solidFill>
-                <a:latin typeface="Arial" pitchFamily="34" charset="0"/>
-                <a:ea typeface="Arial" pitchFamily="34" charset="-122"/>
-                <a:cs typeface="Arial" pitchFamily="34" charset="-120"/>
-              </a:rPr>
-              <a:t>3</a:t>
-            </a:r>
-            <a:endParaRPr lang="en-US" sz="1500" dirty="0"/>
-          </a:p>
-        </p:txBody>
-      </p:sp>
-      <p:sp>
-        <p:nvSpPr>
-          <p:cNvPr id="16" name="Text 14"/>
-          <p:cNvSpPr txBox="1"/>
-          <p:nvPr/>
-        </p:nvSpPr>
-        <p:spPr>
-          <a:xfrm>
-            <a:off x="6949440" y="4526280"/>
-            <a:ext cx="4023360" cy="365760"/>
-          </a:xfrm>
-          <a:prstGeom prst="rect">
-            <a:avLst/>
-          </a:prstGeom>
-          <a:noFill/>
-          <a:ln/>
-        </p:spPr>
-        <p:txBody>
-          <a:bodyPr wrap="square" lIns="0" tIns="0" rIns="0" bIns="0" rtlCol="0" anchor="t"/>
-          <a:lstStyle/>
-          <a:p>
-            <a:pPr rtl="1" algn="r" indent="0" marL="0">
-              <a:buNone/>
-            </a:pPr>
-            <a:r>
-              <a:rPr lang="he-IL" altLang="en-US" sz="1600" b="1" dirty="0">
-                <a:solidFill>
-                  <a:srgbClr val="14213D"/>
-                </a:solidFill>
-                <a:latin typeface="Arial" pitchFamily="34" charset="0"/>
-                <a:ea typeface="Arial" pitchFamily="34" charset="-122"/>
-                <a:cs typeface="Arial" pitchFamily="34" charset="-120"/>
-              </a:rPr>
-              <a:t>המשכיות ויציבות</a:t>
-            </a:r>
-            <a:endParaRPr lang="he-IL" sz="1600" dirty="0"/>
-          </a:p>
-        </p:txBody>
-      </p:sp>
-      <p:sp>
-        <p:nvSpPr>
-          <p:cNvPr id="17" name="Text 15"/>
-          <p:cNvSpPr txBox="1"/>
-          <p:nvPr/>
-        </p:nvSpPr>
-        <p:spPr>
-          <a:xfrm>
-            <a:off x="6949440" y="4892040"/>
-            <a:ext cx="4023360" cy="457200"/>
-          </a:xfrm>
-          <a:prstGeom prst="rect">
-            <a:avLst/>
-          </a:prstGeom>
-          <a:noFill/>
-          <a:ln/>
-        </p:spPr>
-        <p:txBody>
-          <a:bodyPr wrap="square" lIns="0" tIns="0" rIns="0" bIns="0" rtlCol="0" anchor="t"/>
-          <a:lstStyle/>
-          <a:p>
-            <a:pPr rtl="1" algn="r" indent="0" marL="0">
-              <a:buNone/>
-            </a:pPr>
-            <a:r>
-              <a:rPr lang="he-IL" altLang="en-US" sz="1250" dirty="0">
-                <a:solidFill>
-                  <a:srgbClr val="1F2937"/>
-                </a:solidFill>
-                <a:latin typeface="Arial" pitchFamily="34" charset="0"/>
-                <a:ea typeface="Arial" pitchFamily="34" charset="-122"/>
-                <a:cs typeface="Arial" pitchFamily="34" charset="-120"/>
-              </a:rPr>
-              <a:t>המשרה עצמה – או מאפייניה</a:t>
-            </a:r>
-            <a:endParaRPr lang="he-IL" sz="1250" dirty="0"/>
-          </a:p>
-        </p:txBody>
-      </p:sp>
-      <p:sp>
-        <p:nvSpPr>
-          <p:cNvPr id="18" name="Shape 16"/>
-          <p:cNvSpPr/>
-          <p:nvPr/>
-        </p:nvSpPr>
-        <p:spPr>
-          <a:xfrm>
-            <a:off x="11109960" y="5532120"/>
-            <a:ext cx="457200" cy="457200"/>
-          </a:xfrm>
-          <a:prstGeom prst="ellipse">
-            <a:avLst/>
-          </a:prstGeom>
-          <a:solidFill>
-            <a:srgbClr val="FCA311"/>
-          </a:solidFill>
-          <a:ln w="12700">
-            <a:solidFill>
-              <a:srgbClr val="FCA311"/>
-            </a:solidFill>
-            <a:prstDash val="solid"/>
-          </a:ln>
-        </p:spPr>
-      </p:sp>
-      <p:sp>
-        <p:nvSpPr>
-          <p:cNvPr id="19" name="Text 17"/>
-          <p:cNvSpPr txBox="1"/>
-          <p:nvPr/>
-        </p:nvSpPr>
-        <p:spPr>
-          <a:xfrm>
-            <a:off x="11109960" y="5532120"/>
-            <a:ext cx="457200" cy="457200"/>
-          </a:xfrm>
-          <a:prstGeom prst="rect">
-            <a:avLst/>
-          </a:prstGeom>
-          <a:noFill/>
-          <a:ln/>
-        </p:spPr>
-        <p:txBody>
-          <a:bodyPr wrap="square" lIns="0" tIns="0" rIns="0" bIns="0" rtlCol="0" anchor="ctr"/>
-          <a:lstStyle/>
-          <a:p>
-            <a:pPr algn="ctr" indent="0" marL="0">
-              <a:buNone/>
-            </a:pPr>
-            <a:r>
-              <a:rPr lang="en-US" sz="1500" b="1" dirty="0">
-                <a:solidFill>
-                  <a:srgbClr val="14213D"/>
-                </a:solidFill>
-                <a:latin typeface="Arial" pitchFamily="34" charset="0"/>
-                <a:ea typeface="Arial" pitchFamily="34" charset="-122"/>
-                <a:cs typeface="Arial" pitchFamily="34" charset="-120"/>
-              </a:rPr>
-              <a:t>4</a:t>
-            </a:r>
-            <a:endParaRPr lang="en-US" sz="1500" dirty="0"/>
-          </a:p>
-        </p:txBody>
-      </p:sp>
-      <p:sp>
-        <p:nvSpPr>
-          <p:cNvPr id="20" name="Text 18"/>
-          <p:cNvSpPr txBox="1"/>
-          <p:nvPr/>
-        </p:nvSpPr>
-        <p:spPr>
-          <a:xfrm>
-            <a:off x="6949440" y="5440680"/>
-            <a:ext cx="4023360" cy="365760"/>
-          </a:xfrm>
-          <a:prstGeom prst="rect">
-            <a:avLst/>
-          </a:prstGeom>
-          <a:noFill/>
-          <a:ln/>
-        </p:spPr>
-        <p:txBody>
-          <a:bodyPr wrap="square" lIns="0" tIns="0" rIns="0" bIns="0" rtlCol="0" anchor="t"/>
-          <a:lstStyle/>
-          <a:p>
-            <a:pPr rtl="1" algn="r" indent="0" marL="0">
-              <a:buNone/>
-            </a:pPr>
-            <a:r>
-              <a:rPr lang="he-IL" altLang="en-US" sz="1600" b="1" dirty="0">
-                <a:solidFill>
-                  <a:srgbClr val="14213D"/>
-                </a:solidFill>
-                <a:latin typeface="Arial" pitchFamily="34" charset="0"/>
-                <a:ea typeface="Arial" pitchFamily="34" charset="-122"/>
-                <a:cs typeface="Arial" pitchFamily="34" charset="-120"/>
-              </a:rPr>
-              <a:t>כפי שנחווית כיום</a:t>
-            </a:r>
-            <a:endParaRPr lang="he-IL" sz="1600" dirty="0"/>
-          </a:p>
-        </p:txBody>
-      </p:sp>
-      <p:sp>
-        <p:nvSpPr>
-          <p:cNvPr id="21" name="Text 19"/>
-          <p:cNvSpPr txBox="1"/>
-          <p:nvPr/>
-        </p:nvSpPr>
-        <p:spPr>
-          <a:xfrm>
-            <a:off x="6949440" y="5806440"/>
-            <a:ext cx="4023360" cy="457200"/>
-          </a:xfrm>
-          <a:prstGeom prst="rect">
-            <a:avLst/>
-          </a:prstGeom>
-          <a:noFill/>
-          <a:ln/>
-        </p:spPr>
-        <p:txBody>
-          <a:bodyPr wrap="square" lIns="0" tIns="0" rIns="0" bIns="0" rtlCol="0" anchor="t"/>
-          <a:lstStyle/>
-          <a:p>
-            <a:pPr rtl="1" algn="r" indent="0" marL="0">
-              <a:buNone/>
-            </a:pPr>
-            <a:r>
-              <a:rPr lang="he-IL" altLang="en-US" sz="1250" dirty="0">
-                <a:solidFill>
-                  <a:srgbClr val="1F2937"/>
-                </a:solidFill>
-                <a:latin typeface="Arial" pitchFamily="34" charset="0"/>
-                <a:ea typeface="Arial" pitchFamily="34" charset="-122"/>
-                <a:cs typeface="Arial" pitchFamily="34" charset="-120"/>
-              </a:rPr>
-              <a:t>המשרה הנוכחית, לא חרדה כללית</a:t>
-            </a:r>
-            <a:endParaRPr lang="he-IL" sz="1250" dirty="0"/>
-          </a:p>
-        </p:txBody>
-      </p:sp>
-      <p:sp>
-        <p:nvSpPr>
-          <p:cNvPr id="22" name="Text 20"/>
-          <p:cNvSpPr txBox="1"/>
-          <p:nvPr/>
-        </p:nvSpPr>
-        <p:spPr>
-          <a:xfrm>
-            <a:off x="548640" y="2606040"/>
-            <a:ext cx="5852160" cy="365760"/>
-          </a:xfrm>
-          <a:prstGeom prst="rect">
-            <a:avLst/>
-          </a:prstGeom>
-          <a:noFill/>
-          <a:ln/>
-        </p:spPr>
-        <p:txBody>
-          <a:bodyPr wrap="square" lIns="0" tIns="0" rIns="0" bIns="0" rtlCol="0" anchor="t"/>
-          <a:lstStyle/>
-          <a:p>
-            <a:pPr rtl="1" algn="r" indent="0" marL="0">
-              <a:buNone/>
-            </a:pPr>
-            <a:r>
-              <a:rPr lang="he-IL" altLang="en-US" sz="1500" b="1" dirty="0">
-                <a:solidFill>
-                  <a:srgbClr val="2A9D8F"/>
-                </a:solidFill>
-                <a:latin typeface="Arial" pitchFamily="34" charset="0"/>
-                <a:ea typeface="Arial" pitchFamily="34" charset="-122"/>
-                <a:cs typeface="Arial" pitchFamily="34" charset="-120"/>
-              </a:rPr>
-              <a:t>מוקדי האיום (Threat Foci)</a:t>
-            </a:r>
-            <a:endParaRPr lang="he-IL" sz="1500" dirty="0"/>
-          </a:p>
-        </p:txBody>
-      </p:sp>
-      <p:sp>
-        <p:nvSpPr>
-          <p:cNvPr id="23" name="Text 21"/>
-          <p:cNvSpPr txBox="1"/>
-          <p:nvPr/>
-        </p:nvSpPr>
-        <p:spPr>
-          <a:xfrm>
-            <a:off x="3794760" y="3017520"/>
-            <a:ext cx="2331720" cy="365760"/>
-          </a:xfrm>
-          <a:prstGeom prst="rect">
-            <a:avLst/>
-          </a:prstGeom>
-          <a:noFill/>
-          <a:ln/>
-        </p:spPr>
-        <p:txBody>
-          <a:bodyPr wrap="square" lIns="0" tIns="0" rIns="0" bIns="0" rtlCol="0" anchor="t"/>
-          <a:lstStyle/>
-          <a:p>
-            <a:pPr rtl="1" algn="ctr" indent="0" marL="0">
-              <a:buNone/>
-            </a:pPr>
-            <a:r>
-              <a:rPr lang="he-IL" altLang="en-US" sz="1150" b="1" dirty="0">
-                <a:solidFill>
-                  <a:srgbClr val="6B7280"/>
-                </a:solidFill>
-                <a:latin typeface="Arial" pitchFamily="34" charset="0"/>
-                <a:ea typeface="Arial" pitchFamily="34" charset="-122"/>
-                <a:cs typeface="Arial" pitchFamily="34" charset="-120"/>
-              </a:rPr>
-              <a:t>קוגניטיבי – "עד כמה זה סביר?"</a:t>
-            </a:r>
-            <a:endParaRPr lang="he-IL" sz="1150" dirty="0"/>
-          </a:p>
-        </p:txBody>
-      </p:sp>
-      <p:sp>
-        <p:nvSpPr>
-          <p:cNvPr id="24" name="Text 22"/>
-          <p:cNvSpPr txBox="1"/>
-          <p:nvPr/>
-        </p:nvSpPr>
-        <p:spPr>
-          <a:xfrm>
-            <a:off x="1371600" y="3017520"/>
-            <a:ext cx="2331720" cy="365760"/>
-          </a:xfrm>
-          <a:prstGeom prst="rect">
-            <a:avLst/>
-          </a:prstGeom>
-          <a:noFill/>
-          <a:ln/>
-        </p:spPr>
-        <p:txBody>
-          <a:bodyPr wrap="square" lIns="0" tIns="0" rIns="0" bIns="0" rtlCol="0" anchor="t"/>
-          <a:lstStyle/>
-          <a:p>
-            <a:pPr rtl="1" algn="ctr" indent="0" marL="0">
-              <a:buNone/>
-            </a:pPr>
-            <a:r>
-              <a:rPr lang="he-IL" altLang="en-US" sz="1150" b="1" dirty="0">
-                <a:solidFill>
-                  <a:srgbClr val="6B7280"/>
-                </a:solidFill>
-                <a:latin typeface="Arial" pitchFamily="34" charset="0"/>
-                <a:ea typeface="Arial" pitchFamily="34" charset="-122"/>
-                <a:cs typeface="Arial" pitchFamily="34" charset="-120"/>
-              </a:rPr>
-              <a:t>רגשי – "עד כמה זה מדאיג?"</a:t>
-            </a:r>
-            <a:endParaRPr lang="he-IL" sz="1150" dirty="0"/>
-          </a:p>
-        </p:txBody>
-      </p:sp>
-      <p:sp>
-        <p:nvSpPr>
-          <p:cNvPr id="25" name="Text 23"/>
-          <p:cNvSpPr txBox="1"/>
-          <p:nvPr/>
-        </p:nvSpPr>
-        <p:spPr>
-          <a:xfrm>
-            <a:off x="548640" y="3429000"/>
-            <a:ext cx="777240" cy="1325880"/>
-          </a:xfrm>
-          <a:prstGeom prst="rect">
-            <a:avLst/>
-          </a:prstGeom>
-          <a:noFill/>
-          <a:ln/>
-        </p:spPr>
-        <p:txBody>
-          <a:bodyPr wrap="square" lIns="0" tIns="0" rIns="0" bIns="0" rtlCol="0" anchor="ctr"/>
-          <a:lstStyle/>
-          <a:p>
-            <a:pPr rtl="1" algn="ctr" indent="0" marL="0">
-              <a:buNone/>
-            </a:pPr>
-            <a:r>
-              <a:rPr lang="he-IL" altLang="en-US" sz="1150" b="1" dirty="0">
-                <a:solidFill>
-                  <a:srgbClr val="6B7280"/>
-                </a:solidFill>
-                <a:latin typeface="Arial" pitchFamily="34" charset="0"/>
-                <a:ea typeface="Arial" pitchFamily="34" charset="-122"/>
-                <a:cs typeface="Arial" pitchFamily="34" charset="-120"/>
-              </a:rPr>
-              <a:t>כמותי – אובדן המשרה</a:t>
-            </a:r>
-            <a:endParaRPr lang="he-IL" sz="1150" dirty="0"/>
-          </a:p>
-        </p:txBody>
-      </p:sp>
-      <p:sp>
-        <p:nvSpPr>
-          <p:cNvPr id="26" name="Text 24"/>
-          <p:cNvSpPr txBox="1"/>
-          <p:nvPr/>
-        </p:nvSpPr>
-        <p:spPr>
-          <a:xfrm>
-            <a:off x="548640" y="4846320"/>
-            <a:ext cx="777240" cy="1325880"/>
-          </a:xfrm>
-          <a:prstGeom prst="rect">
-            <a:avLst/>
-          </a:prstGeom>
-          <a:noFill/>
-          <a:ln/>
-        </p:spPr>
-        <p:txBody>
-          <a:bodyPr wrap="square" lIns="0" tIns="0" rIns="0" bIns="0" rtlCol="0" anchor="ctr"/>
-          <a:lstStyle/>
-          <a:p>
-            <a:pPr rtl="1" algn="ctr" indent="0" marL="0">
-              <a:buNone/>
-            </a:pPr>
-            <a:r>
-              <a:rPr lang="he-IL" altLang="en-US" sz="1150" b="1" dirty="0">
-                <a:solidFill>
-                  <a:srgbClr val="6B7280"/>
-                </a:solidFill>
-                <a:latin typeface="Arial" pitchFamily="34" charset="0"/>
-                <a:ea typeface="Arial" pitchFamily="34" charset="-122"/>
-                <a:cs typeface="Arial" pitchFamily="34" charset="-120"/>
-              </a:rPr>
-              <a:t>איכותני – אובדן מאפיינים</a:t>
-            </a:r>
-            <a:endParaRPr lang="he-IL" sz="1150" dirty="0"/>
-          </a:p>
-        </p:txBody>
-      </p:sp>
-      <p:sp>
-        <p:nvSpPr>
-          <p:cNvPr id="27" name="Shape 25"/>
-          <p:cNvSpPr/>
-          <p:nvPr/>
-        </p:nvSpPr>
-        <p:spPr>
-          <a:xfrm>
-            <a:off x="3794760" y="3429000"/>
-            <a:ext cx="2331720" cy="1325880"/>
-          </a:xfrm>
-          <a:prstGeom prst="roundRect">
-            <a:avLst>
-              <a:gd name="adj" fmla="val 8276"/>
-            </a:avLst>
-          </a:prstGeom>
-          <a:solidFill>
-            <a:srgbClr val="FDE2DC"/>
-          </a:solidFill>
-          <a:ln w="12700">
-            <a:solidFill>
-              <a:srgbClr val="FDE2DC"/>
+              <a:srgbClr val="FFFFFF"/>
             </a:solidFill>
             <a:prstDash val="solid"/>
           </a:ln>
@@ -12842,65 +11989,168 @@
       </p:sp>
       <p:sp>
         <p:nvSpPr>
-          <p:cNvPr id="28" name="Text 26"/>
-          <p:cNvSpPr txBox="1"/>
-          <p:nvPr/>
-        </p:nvSpPr>
-        <p:spPr>
-          <a:xfrm>
-            <a:off x="3931920" y="3520440"/>
-            <a:ext cx="2057400" cy="1143000"/>
-          </a:xfrm>
-          <a:prstGeom prst="rect">
-            <a:avLst/>
-          </a:prstGeom>
-          <a:noFill/>
-          <a:ln/>
-        </p:spPr>
-        <p:txBody>
-          <a:bodyPr wrap="square" lIns="0" tIns="0" rIns="0" bIns="0" rtlCol="0" anchor="ctr"/>
-          <a:lstStyle/>
-          <a:p>
-            <a:pPr rtl="1" algn="ctr" indent="0" marL="0">
-              <a:buNone/>
-            </a:pPr>
-            <a:r>
-              <a:rPr lang="he-IL" altLang="en-US" sz="1300" dirty="0">
-                <a:solidFill>
-                  <a:srgbClr val="1F2937"/>
-                </a:solidFill>
-                <a:latin typeface="Arial" pitchFamily="34" charset="0"/>
-                <a:ea typeface="Arial" pitchFamily="34" charset="-122"/>
-                <a:cs typeface="Arial" pitchFamily="34" charset="-120"/>
-              </a:rPr>
-              <a:t>"יש סיכוי שיפטרו אותי"</a:t>
-            </a:r>
-            <a:endParaRPr lang="he-IL" sz="1300" dirty="0"/>
-          </a:p>
-        </p:txBody>
-      </p:sp>
-      <p:sp>
-        <p:nvSpPr>
-          <p:cNvPr id="29" name="Shape 27"/>
+          <p:cNvPr id="6" name="Shape 4"/>
           <p:cNvSpPr/>
           <p:nvPr/>
         </p:nvSpPr>
         <p:spPr>
           <a:xfrm>
-            <a:off x="1371600" y="3429000"/>
-            <a:ext cx="2331720" cy="1325880"/>
-          </a:xfrm>
-          <a:prstGeom prst="roundRect">
-            <a:avLst>
-              <a:gd name="adj" fmla="val 8276"/>
-            </a:avLst>
+            <a:off x="10725912" y="2926080"/>
+            <a:ext cx="640080" cy="640080"/>
+          </a:xfrm>
+          <a:prstGeom prst="ellipse">
+            <a:avLst/>
           </a:prstGeom>
           <a:solidFill>
-            <a:srgbClr val="F9C9BF"/>
+            <a:srgbClr val="2A9D8F"/>
           </a:solidFill>
           <a:ln w="12700">
             <a:solidFill>
-              <a:srgbClr val="F9C9BF"/>
+              <a:srgbClr val="2A9D8F"/>
+            </a:solidFill>
+            <a:prstDash val="solid"/>
+          </a:ln>
+        </p:spPr>
+      </p:sp>
+      <p:sp>
+        <p:nvSpPr>
+          <p:cNvPr id="7" name="Text 5"/>
+          <p:cNvSpPr txBox="1"/>
+          <p:nvPr/>
+        </p:nvSpPr>
+        <p:spPr>
+          <a:xfrm>
+            <a:off x="10725912" y="2926080"/>
+            <a:ext cx="640080" cy="640080"/>
+          </a:xfrm>
+          <a:prstGeom prst="rect">
+            <a:avLst/>
+          </a:prstGeom>
+          <a:noFill/>
+          <a:ln/>
+        </p:spPr>
+        <p:txBody>
+          <a:bodyPr wrap="square" lIns="0" tIns="0" rIns="0" bIns="0" rtlCol="0" anchor="ctr"/>
+          <a:lstStyle/>
+          <a:p>
+            <a:pPr algn="ctr" indent="0" marL="0">
+              <a:buNone/>
+            </a:pPr>
+            <a:r>
+              <a:rPr lang="en-US" sz="2200" b="1" dirty="0">
+                <a:solidFill>
+                  <a:srgbClr val="FFFFFF"/>
+                </a:solidFill>
+                <a:latin typeface="Arial" pitchFamily="34" charset="0"/>
+                <a:ea typeface="Arial" pitchFamily="34" charset="-122"/>
+                <a:cs typeface="Arial" pitchFamily="34" charset="-120"/>
+              </a:rPr>
+              <a:t>⬆</a:t>
+            </a:r>
+            <a:endParaRPr lang="en-US" sz="2200" dirty="0"/>
+          </a:p>
+        </p:txBody>
+      </p:sp>
+      <p:sp>
+        <p:nvSpPr>
+          <p:cNvPr id="8" name="Text 6"/>
+          <p:cNvSpPr txBox="1"/>
+          <p:nvPr/>
+        </p:nvSpPr>
+        <p:spPr>
+          <a:xfrm>
+            <a:off x="6519672" y="2926080"/>
+            <a:ext cx="4023360" cy="640080"/>
+          </a:xfrm>
+          <a:prstGeom prst="rect">
+            <a:avLst/>
+          </a:prstGeom>
+          <a:noFill/>
+          <a:ln/>
+        </p:spPr>
+        <p:txBody>
+          <a:bodyPr wrap="square" lIns="0" tIns="0" rIns="0" bIns="0" rtlCol="0" anchor="ctr"/>
+          <a:lstStyle/>
+          <a:p>
+            <a:pPr rtl="1" algn="r" indent="0" marL="0">
+              <a:buNone/>
+            </a:pPr>
+            <a:r>
+              <a:rPr lang="he-IL" altLang="en-US" sz="1700" b="1" dirty="0">
+                <a:solidFill>
+                  <a:srgbClr val="2A9D8F"/>
+                </a:solidFill>
+                <a:latin typeface="Arial" pitchFamily="34" charset="0"/>
+                <a:ea typeface="Arial" pitchFamily="34" charset="-122"/>
+                <a:cs typeface="Arial" pitchFamily="34" charset="-120"/>
+              </a:rPr>
+              <a:t>תחזית א: "למעלה" (Moving Up)</a:t>
+            </a:r>
+            <a:endParaRPr lang="he-IL" sz="1700" dirty="0"/>
+          </a:p>
+        </p:txBody>
+      </p:sp>
+      <p:sp>
+        <p:nvSpPr>
+          <p:cNvPr id="9" name="Text 7"/>
+          <p:cNvSpPr txBox="1"/>
+          <p:nvPr/>
+        </p:nvSpPr>
+        <p:spPr>
+          <a:xfrm>
+            <a:off x="6519672" y="3703320"/>
+            <a:ext cx="4846320" cy="1325880"/>
+          </a:xfrm>
+          <a:prstGeom prst="rect">
+            <a:avLst/>
+          </a:prstGeom>
+          <a:noFill/>
+          <a:ln/>
+        </p:spPr>
+        <p:txBody>
+          <a:bodyPr wrap="square" lIns="0" tIns="0" rIns="0" bIns="0" rtlCol="0" anchor="t"/>
+          <a:lstStyle/>
+          <a:p>
+            <a:pPr rtl="1" algn="r" indent="0" marL="0">
+              <a:buNone/>
+            </a:pPr>
+            <a:r>
+              <a:rPr lang="he-IL" altLang="en-US" sz="1350" dirty="0">
+                <a:solidFill>
+                  <a:srgbClr val="1F2937"/>
+                </a:solidFill>
+                <a:latin typeface="Arial" pitchFamily="34" charset="0"/>
+                <a:ea typeface="Arial" pitchFamily="34" charset="-122"/>
+                <a:cs typeface="Arial" pitchFamily="34" charset="-120"/>
+              </a:rPr>
+              <a:t>האיום מדרבן: לומדים מיומנויות חדשות, מחזקים יכולת תעסוקה, מנצלים הזדמנויות. זו ההתמודדות הפרואקטיבית במסגרת של Shoss (2017).</a:t>
+            </a:r>
+            <a:endParaRPr lang="he-IL" sz="1350" dirty="0"/>
+          </a:p>
+        </p:txBody>
+      </p:sp>
+      <p:sp>
+        <p:nvSpPr>
+          <p:cNvPr id="10" name="Shape 8"/>
+          <p:cNvSpPr/>
+          <p:nvPr/>
+        </p:nvSpPr>
+        <p:spPr>
+          <a:xfrm>
+            <a:off x="548640" y="2651760"/>
+            <a:ext cx="5394960" cy="2468880"/>
+          </a:xfrm>
+          <a:prstGeom prst="roundRect">
+            <a:avLst>
+              <a:gd name="adj" fmla="val 4444"/>
+            </a:avLst>
+          </a:prstGeom>
+          <a:solidFill>
+            <a:srgbClr val="FFFFFF"/>
+          </a:solidFill>
+          <a:ln w="12700">
+            <a:solidFill>
+              <a:srgbClr val="FFFFFF"/>
             </a:solidFill>
             <a:prstDash val="solid"/>
           </a:ln>
@@ -12915,65 +12165,168 @@
       </p:sp>
       <p:sp>
         <p:nvSpPr>
-          <p:cNvPr id="30" name="Text 28"/>
-          <p:cNvSpPr txBox="1"/>
-          <p:nvPr/>
-        </p:nvSpPr>
-        <p:spPr>
-          <a:xfrm>
-            <a:off x="1508760" y="3520440"/>
-            <a:ext cx="2057400" cy="1143000"/>
-          </a:xfrm>
-          <a:prstGeom prst="rect">
-            <a:avLst/>
-          </a:prstGeom>
-          <a:noFill/>
-          <a:ln/>
-        </p:spPr>
-        <p:txBody>
-          <a:bodyPr wrap="square" lIns="0" tIns="0" rIns="0" bIns="0" rtlCol="0" anchor="ctr"/>
-          <a:lstStyle/>
-          <a:p>
-            <a:pPr rtl="1" algn="ctr" indent="0" marL="0">
-              <a:buNone/>
-            </a:pPr>
-            <a:r>
-              <a:rPr lang="he-IL" altLang="en-US" sz="1300" dirty="0">
-                <a:solidFill>
-                  <a:srgbClr val="1F2937"/>
-                </a:solidFill>
-                <a:latin typeface="Arial" pitchFamily="34" charset="0"/>
-                <a:ea typeface="Arial" pitchFamily="34" charset="-122"/>
-                <a:cs typeface="Arial" pitchFamily="34" charset="-120"/>
-              </a:rPr>
-              <a:t>"אני דואג/ת ולא ישן/ה בלילה"</a:t>
-            </a:r>
-            <a:endParaRPr lang="he-IL" sz="1300" dirty="0"/>
-          </a:p>
-        </p:txBody>
-      </p:sp>
-      <p:sp>
-        <p:nvSpPr>
-          <p:cNvPr id="31" name="Shape 29"/>
+          <p:cNvPr id="11" name="Shape 9"/>
           <p:cNvSpPr/>
           <p:nvPr/>
         </p:nvSpPr>
         <p:spPr>
           <a:xfrm>
-            <a:off x="3794760" y="4846320"/>
-            <a:ext cx="2331720" cy="1325880"/>
-          </a:xfrm>
-          <a:prstGeom prst="roundRect">
-            <a:avLst>
-              <a:gd name="adj" fmla="val 8276"/>
-            </a:avLst>
+            <a:off x="5029200" y="2926080"/>
+            <a:ext cx="640080" cy="640080"/>
+          </a:xfrm>
+          <a:prstGeom prst="ellipse">
+            <a:avLst/>
           </a:prstGeom>
           <a:solidFill>
-            <a:srgbClr val="FFF1D6"/>
+            <a:srgbClr val="E76F51"/>
           </a:solidFill>
           <a:ln w="12700">
             <a:solidFill>
-              <a:srgbClr val="FFF1D6"/>
+              <a:srgbClr val="E76F51"/>
+            </a:solidFill>
+            <a:prstDash val="solid"/>
+          </a:ln>
+        </p:spPr>
+      </p:sp>
+      <p:sp>
+        <p:nvSpPr>
+          <p:cNvPr id="12" name="Text 10"/>
+          <p:cNvSpPr txBox="1"/>
+          <p:nvPr/>
+        </p:nvSpPr>
+        <p:spPr>
+          <a:xfrm>
+            <a:off x="5029200" y="2926080"/>
+            <a:ext cx="640080" cy="640080"/>
+          </a:xfrm>
+          <a:prstGeom prst="rect">
+            <a:avLst/>
+          </a:prstGeom>
+          <a:noFill/>
+          <a:ln/>
+        </p:spPr>
+        <p:txBody>
+          <a:bodyPr wrap="square" lIns="0" tIns="0" rIns="0" bIns="0" rtlCol="0" anchor="ctr"/>
+          <a:lstStyle/>
+          <a:p>
+            <a:pPr algn="ctr" indent="0" marL="0">
+              <a:buNone/>
+            </a:pPr>
+            <a:r>
+              <a:rPr lang="en-US" sz="2200" b="1" dirty="0">
+                <a:solidFill>
+                  <a:srgbClr val="FFFFFF"/>
+                </a:solidFill>
+                <a:latin typeface="Arial" pitchFamily="34" charset="0"/>
+                <a:ea typeface="Arial" pitchFamily="34" charset="-122"/>
+                <a:cs typeface="Arial" pitchFamily="34" charset="-120"/>
+              </a:rPr>
+              <a:t>➡</a:t>
+            </a:r>
+            <a:endParaRPr lang="en-US" sz="2200" dirty="0"/>
+          </a:p>
+        </p:txBody>
+      </p:sp>
+      <p:sp>
+        <p:nvSpPr>
+          <p:cNvPr id="13" name="Text 11"/>
+          <p:cNvSpPr txBox="1"/>
+          <p:nvPr/>
+        </p:nvSpPr>
+        <p:spPr>
+          <a:xfrm>
+            <a:off x="822960" y="2926080"/>
+            <a:ext cx="4023360" cy="640080"/>
+          </a:xfrm>
+          <a:prstGeom prst="rect">
+            <a:avLst/>
+          </a:prstGeom>
+          <a:noFill/>
+          <a:ln/>
+        </p:spPr>
+        <p:txBody>
+          <a:bodyPr wrap="square" lIns="0" tIns="0" rIns="0" bIns="0" rtlCol="0" anchor="ctr"/>
+          <a:lstStyle/>
+          <a:p>
+            <a:pPr rtl="1" algn="r" indent="0" marL="0">
+              <a:buNone/>
+            </a:pPr>
+            <a:r>
+              <a:rPr lang="he-IL" altLang="en-US" sz="1700" b="1" dirty="0">
+                <a:solidFill>
+                  <a:srgbClr val="E76F51"/>
+                </a:solidFill>
+                <a:latin typeface="Arial" pitchFamily="34" charset="0"/>
+                <a:ea typeface="Arial" pitchFamily="34" charset="-122"/>
+                <a:cs typeface="Arial" pitchFamily="34" charset="-120"/>
+              </a:rPr>
+              <a:t>תחזית ב: "הלאה" (Moving On)</a:t>
+            </a:r>
+            <a:endParaRPr lang="he-IL" sz="1700" dirty="0"/>
+          </a:p>
+        </p:txBody>
+      </p:sp>
+      <p:sp>
+        <p:nvSpPr>
+          <p:cNvPr id="14" name="Text 12"/>
+          <p:cNvSpPr txBox="1"/>
+          <p:nvPr/>
+        </p:nvSpPr>
+        <p:spPr>
+          <a:xfrm>
+            <a:off x="822960" y="3703320"/>
+            <a:ext cx="4846320" cy="1325880"/>
+          </a:xfrm>
+          <a:prstGeom prst="rect">
+            <a:avLst/>
+          </a:prstGeom>
+          <a:noFill/>
+          <a:ln/>
+        </p:spPr>
+        <p:txBody>
+          <a:bodyPr wrap="square" lIns="0" tIns="0" rIns="0" bIns="0" rtlCol="0" anchor="t"/>
+          <a:lstStyle/>
+          <a:p>
+            <a:pPr rtl="1" algn="r" indent="0" marL="0">
+              <a:buNone/>
+            </a:pPr>
+            <a:r>
+              <a:rPr lang="he-IL" altLang="en-US" sz="1350" dirty="0">
+                <a:solidFill>
+                  <a:srgbClr val="1F2937"/>
+                </a:solidFill>
+                <a:latin typeface="Arial" pitchFamily="34" charset="0"/>
+                <a:ea typeface="Arial" pitchFamily="34" charset="-122"/>
+                <a:cs typeface="Arial" pitchFamily="34" charset="-120"/>
+              </a:rPr>
+              <a:t>האיום מדלדל משאבים: לפי תיאוריית שימור המשאבים (Hobfoll, 1989) מגנים על מה שנשאר במקום להשקיע. בורחים, מסתירים ידע, לא מתפתחים.</a:t>
+            </a:r>
+            <a:endParaRPr lang="he-IL" sz="1350" dirty="0"/>
+          </a:p>
+        </p:txBody>
+      </p:sp>
+      <p:sp>
+        <p:nvSpPr>
+          <p:cNvPr id="15" name="Shape 13"/>
+          <p:cNvSpPr/>
+          <p:nvPr/>
+        </p:nvSpPr>
+        <p:spPr>
+          <a:xfrm>
+            <a:off x="548640" y="5349240"/>
+            <a:ext cx="11091672" cy="868680"/>
+          </a:xfrm>
+          <a:prstGeom prst="roundRect">
+            <a:avLst>
+              <a:gd name="adj" fmla="val 12632"/>
+            </a:avLst>
+          </a:prstGeom>
+          <a:solidFill>
+            <a:srgbClr val="FFF4DE"/>
+          </a:solidFill>
+          <a:ln w="12700">
+            <a:solidFill>
+              <a:srgbClr val="FFF4DE"/>
             </a:solidFill>
             <a:prstDash val="solid"/>
           </a:ln>
@@ -12988,14 +12341,14 @@
       </p:sp>
       <p:sp>
         <p:nvSpPr>
-          <p:cNvPr id="32" name="Text 30"/>
-          <p:cNvSpPr txBox="1"/>
-          <p:nvPr/>
-        </p:nvSpPr>
-        <p:spPr>
-          <a:xfrm>
-            <a:off x="3931920" y="4937760"/>
-            <a:ext cx="2057400" cy="1143000"/>
+          <p:cNvPr id="16" name="Text 14"/>
+          <p:cNvSpPr txBox="1"/>
+          <p:nvPr/>
+        </p:nvSpPr>
+        <p:spPr>
+          <a:xfrm>
+            <a:off x="822960" y="5394960"/>
+            <a:ext cx="10515600" cy="777240"/>
           </a:xfrm>
           <a:prstGeom prst="rect">
             <a:avLst/>
@@ -13007,100 +12360,27 @@
           <a:bodyPr wrap="square" lIns="0" tIns="0" rIns="0" bIns="0" rtlCol="0" anchor="ctr"/>
           <a:lstStyle/>
           <a:p>
-            <a:pPr rtl="1" algn="ctr" indent="0" marL="0">
-              <a:buNone/>
-            </a:pPr>
-            <a:r>
-              <a:rPr lang="he-IL" altLang="en-US" sz="1300" dirty="0">
-                <a:solidFill>
-                  <a:srgbClr val="1F2937"/>
-                </a:solidFill>
-                <a:latin typeface="Arial" pitchFamily="34" charset="0"/>
-                <a:ea typeface="Arial" pitchFamily="34" charset="-122"/>
-                <a:cs typeface="Arial" pitchFamily="34" charset="-120"/>
-              </a:rPr>
-              <a:t>"התפקיד יישאר אבל ה-AI ישנה אותו"</a:t>
-            </a:r>
-            <a:endParaRPr lang="he-IL" sz="1300" dirty="0"/>
-          </a:p>
-        </p:txBody>
-      </p:sp>
-      <p:sp>
-        <p:nvSpPr>
-          <p:cNvPr id="33" name="Shape 31"/>
-          <p:cNvSpPr/>
-          <p:nvPr/>
-        </p:nvSpPr>
-        <p:spPr>
-          <a:xfrm>
-            <a:off x="1371600" y="4846320"/>
-            <a:ext cx="2331720" cy="1325880"/>
-          </a:xfrm>
-          <a:prstGeom prst="roundRect">
-            <a:avLst>
-              <a:gd name="adj" fmla="val 8276"/>
-            </a:avLst>
-          </a:prstGeom>
-          <a:solidFill>
-            <a:srgbClr val="FFE4B3"/>
-          </a:solidFill>
-          <a:ln w="12700">
-            <a:solidFill>
-              <a:srgbClr val="FFE4B3"/>
-            </a:solidFill>
-            <a:prstDash val="solid"/>
-          </a:ln>
-          <a:effectLst>
-            <a:outerShdw sx="100000" sy="100000" kx="0" ky="0" algn="bl" rotWithShape="0" blurRad="50800" dist="25400" dir="5400000">
-              <a:srgbClr val="000000">
-                <a:alpha val="12000"/>
-              </a:srgbClr>
-            </a:outerShdw>
-          </a:effectLst>
-        </p:spPr>
-      </p:sp>
-      <p:sp>
-        <p:nvSpPr>
-          <p:cNvPr id="34" name="Text 32"/>
-          <p:cNvSpPr txBox="1"/>
-          <p:nvPr/>
-        </p:nvSpPr>
-        <p:spPr>
-          <a:xfrm>
-            <a:off x="1508760" y="4937760"/>
-            <a:ext cx="2057400" cy="1143000"/>
-          </a:xfrm>
-          <a:prstGeom prst="rect">
-            <a:avLst/>
-          </a:prstGeom>
-          <a:noFill/>
-          <a:ln/>
-        </p:spPr>
-        <p:txBody>
-          <a:bodyPr wrap="square" lIns="0" tIns="0" rIns="0" bIns="0" rtlCol="0" anchor="ctr"/>
-          <a:lstStyle/>
-          <a:p>
-            <a:pPr rtl="1" algn="ctr" indent="0" marL="0">
-              <a:buNone/>
-            </a:pPr>
-            <a:r>
-              <a:rPr lang="he-IL" altLang="en-US" sz="1300" dirty="0">
-                <a:solidFill>
-                  <a:srgbClr val="1F2937"/>
-                </a:solidFill>
-                <a:latin typeface="Arial" pitchFamily="34" charset="0"/>
-                <a:ea typeface="Arial" pitchFamily="34" charset="-122"/>
-                <a:cs typeface="Arial" pitchFamily="34" charset="-120"/>
-              </a:rPr>
-              <a:t>"אני חושש/ת שאאבד את מה שאני אוהב/ת בעבודה"</a:t>
-            </a:r>
-            <a:endParaRPr lang="he-IL" sz="1300" dirty="0"/>
-          </a:p>
-        </p:txBody>
-      </p:sp>
-      <p:sp>
-        <p:nvSpPr>
-          <p:cNvPr id="35" name="Text 33"/>
+            <a:pPr rtl="1" algn="r" indent="0" marL="0">
+              <a:buNone/>
+            </a:pPr>
+            <a:r>
+              <a:rPr lang="he-IL" altLang="en-US" sz="1500" b="1" dirty="0">
+                <a:solidFill>
+                  <a:srgbClr val="14213D"/>
+                </a:solidFill>
+                <a:latin typeface="Arial" pitchFamily="34" charset="0"/>
+                <a:ea typeface="Arial" pitchFamily="34" charset="-122"/>
+                <a:cs typeface="Arial" pitchFamily="34" charset="-120"/>
+              </a:rPr>
+              <a:t>המטא-אנליזה נועדה להכריע: על בסיס כלל הראיות, איזו תגובה שכיחה יותר בפועל? (Låstad et al., 2025)</a:t>
+            </a:r>
+            <a:endParaRPr lang="he-IL" sz="1500" dirty="0"/>
+          </a:p>
+        </p:txBody>
+      </p:sp>
+      <p:sp>
+        <p:nvSpPr>
+          <p:cNvPr id="17" name="Text 15"/>
           <p:cNvSpPr txBox="1"/>
           <p:nvPr/>
         </p:nvSpPr>
@@ -13139,7 +12419,7 @@
       </p:sp>
       <p:sp>
         <p:nvSpPr>
-          <p:cNvPr id="36" name="Text 34"/>
+          <p:cNvPr id="18" name="Text 16"/>
           <p:cNvSpPr txBox="1"/>
           <p:nvPr/>
         </p:nvSpPr>
@@ -13226,7 +12506,7 @@
               <a:buNone/>
             </a:pPr>
             <a:r>
-              <a:rPr lang="he-IL" altLang="en-US" sz="3200" b="1" dirty="0">
+              <a:rPr lang="he-IL" altLang="en-US" sz="3000" b="1" dirty="0">
                 <a:solidFill>
                   <a:srgbClr val="14213D"/>
                 </a:solidFill>
@@ -13234,73 +12514,176 @@
                 <a:ea typeface="Arial" pitchFamily="34" charset="-122"/>
                 <a:cs typeface="Arial" pitchFamily="34" charset="-120"/>
               </a:rPr>
-              <a:t>המודל של Shoss (2017): מאיפה זה מגיע ולאן זה מוביל</a:t>
-            </a:r>
-            <a:endParaRPr lang="he-IL" sz="3200" dirty="0"/>
-          </a:p>
-        </p:txBody>
-      </p:sp>
-      <p:sp>
-        <p:nvSpPr>
-          <p:cNvPr id="3" name="Text 1"/>
-          <p:cNvSpPr txBox="1"/>
-          <p:nvPr/>
-        </p:nvSpPr>
-        <p:spPr>
-          <a:xfrm>
-            <a:off x="8503920" y="1280160"/>
-            <a:ext cx="3136392" cy="365760"/>
-          </a:xfrm>
-          <a:prstGeom prst="rect">
-            <a:avLst/>
-          </a:prstGeom>
-          <a:noFill/>
-          <a:ln/>
-        </p:spPr>
-        <p:txBody>
-          <a:bodyPr wrap="square" lIns="0" tIns="0" rIns="0" bIns="0" rtlCol="0" anchor="t"/>
-          <a:lstStyle/>
-          <a:p>
-            <a:pPr rtl="1" algn="ctr" indent="0" marL="0">
-              <a:buNone/>
-            </a:pPr>
-            <a:r>
-              <a:rPr lang="he-IL" altLang="en-US" sz="1500" b="1" dirty="0">
-                <a:solidFill>
-                  <a:srgbClr val="2A9D8F"/>
-                </a:solidFill>
-                <a:latin typeface="Arial" pitchFamily="34" charset="0"/>
-                <a:ea typeface="Arial" pitchFamily="34" charset="-122"/>
-                <a:cs typeface="Arial" pitchFamily="34" charset="-120"/>
-              </a:rPr>
-              <a:t>הגורמים</a:t>
-            </a:r>
-            <a:endParaRPr lang="he-IL" sz="1500" dirty="0"/>
-          </a:p>
-        </p:txBody>
-      </p:sp>
-      <p:sp>
-        <p:nvSpPr>
-          <p:cNvPr id="4" name="Shape 2"/>
+              <a:t>הממצאים: 8 תוצאות קריירה, כיוון אחד ברור</a:t>
+            </a:r>
+            <a:endParaRPr lang="he-IL" sz="3000" dirty="0"/>
+          </a:p>
+        </p:txBody>
+      </p:sp>
+      <p:sp>
+        <p:nvSpPr>
+          <p:cNvPr id="3" name="Shape 1"/>
           <p:cNvSpPr/>
           <p:nvPr/>
         </p:nvSpPr>
         <p:spPr>
           <a:xfrm>
-            <a:off x="8503920" y="1691640"/>
-            <a:ext cx="3136392" cy="1005840"/>
-          </a:xfrm>
-          <a:prstGeom prst="roundRect">
-            <a:avLst>
-              <a:gd name="adj" fmla="val 10909"/>
-            </a:avLst>
+            <a:off x="4937760" y="2011680"/>
+            <a:ext cx="2331720" cy="2011680"/>
+          </a:xfrm>
+          <a:prstGeom prst="ellipse">
+            <a:avLst/>
           </a:prstGeom>
           <a:solidFill>
-            <a:srgbClr val="EEF2F8"/>
+            <a:srgbClr val="14213D"/>
           </a:solidFill>
           <a:ln w="12700">
             <a:solidFill>
-              <a:srgbClr val="EEF2F8"/>
+              <a:srgbClr val="14213D"/>
+            </a:solidFill>
+            <a:prstDash val="solid"/>
+          </a:ln>
+        </p:spPr>
+      </p:sp>
+      <p:sp>
+        <p:nvSpPr>
+          <p:cNvPr id="4" name="Text 2"/>
+          <p:cNvSpPr txBox="1"/>
+          <p:nvPr/>
+        </p:nvSpPr>
+        <p:spPr>
+          <a:xfrm>
+            <a:off x="5029200" y="2286000"/>
+            <a:ext cx="2148840" cy="822960"/>
+          </a:xfrm>
+          <a:prstGeom prst="rect">
+            <a:avLst/>
+          </a:prstGeom>
+          <a:noFill/>
+          <a:ln/>
+        </p:spPr>
+        <p:txBody>
+          <a:bodyPr wrap="square" lIns="0" tIns="0" rIns="0" bIns="0" rtlCol="0" anchor="ctr"/>
+          <a:lstStyle/>
+          <a:p>
+            <a:pPr rtl="1" algn="ctr" indent="0" marL="0">
+              <a:buNone/>
+            </a:pPr>
+            <a:r>
+              <a:rPr lang="he-IL" altLang="en-US" sz="1700" b="1" dirty="0">
+                <a:solidFill>
+                  <a:srgbClr val="FFFFFF"/>
+                </a:solidFill>
+                <a:latin typeface="Arial" pitchFamily="34" charset="0"/>
+                <a:ea typeface="Arial" pitchFamily="34" charset="-122"/>
+                <a:cs typeface="Arial" pitchFamily="34" charset="-120"/>
+              </a:rPr>
+              <a:t>חוסר ביטחון תעסוקתי</a:t>
+            </a:r>
+            <a:endParaRPr lang="he-IL" sz="1700" dirty="0"/>
+          </a:p>
+        </p:txBody>
+      </p:sp>
+      <p:sp>
+        <p:nvSpPr>
+          <p:cNvPr id="5" name="Text 3"/>
+          <p:cNvSpPr txBox="1"/>
+          <p:nvPr/>
+        </p:nvSpPr>
+        <p:spPr>
+          <a:xfrm>
+            <a:off x="5029200" y="3108960"/>
+            <a:ext cx="2148840" cy="457200"/>
+          </a:xfrm>
+          <a:prstGeom prst="rect">
+            <a:avLst/>
+          </a:prstGeom>
+          <a:noFill/>
+          <a:ln/>
+        </p:spPr>
+        <p:txBody>
+          <a:bodyPr wrap="square" lIns="0" tIns="0" rIns="0" bIns="0" rtlCol="0" anchor="ctr"/>
+          <a:lstStyle/>
+          <a:p>
+            <a:pPr rtl="1" algn="ctr" indent="0" marL="0">
+              <a:buNone/>
+            </a:pPr>
+            <a:r>
+              <a:rPr lang="he-IL" altLang="en-US" sz="1200" dirty="0">
+                <a:solidFill>
+                  <a:srgbClr val="FCA311"/>
+                </a:solidFill>
+                <a:latin typeface="Arial" pitchFamily="34" charset="0"/>
+                <a:ea typeface="Arial" pitchFamily="34" charset="-122"/>
+                <a:cs typeface="Arial" pitchFamily="34" charset="-120"/>
+              </a:rPr>
+              <a:t>237 מחקרים</a:t>
+            </a:r>
+            <a:endParaRPr lang="he-IL" sz="1200" dirty="0"/>
+          </a:p>
+        </p:txBody>
+      </p:sp>
+      <p:sp>
+        <p:nvSpPr>
+          <p:cNvPr id="6" name="Text 4"/>
+          <p:cNvSpPr txBox="1"/>
+          <p:nvPr/>
+        </p:nvSpPr>
+        <p:spPr>
+          <a:xfrm>
+            <a:off x="8138160" y="1234440"/>
+            <a:ext cx="3502152" cy="411480"/>
+          </a:xfrm>
+          <a:prstGeom prst="rect">
+            <a:avLst/>
+          </a:prstGeom>
+          <a:noFill/>
+          <a:ln/>
+        </p:spPr>
+        <p:txBody>
+          <a:bodyPr wrap="square" lIns="0" tIns="0" rIns="0" bIns="0" rtlCol="0" anchor="t"/>
+          <a:lstStyle/>
+          <a:p>
+            <a:pPr rtl="1" algn="ctr" indent="0" marL="0">
+              <a:buNone/>
+            </a:pPr>
+            <a:r>
+              <a:rPr lang="he-IL" altLang="en-US" sz="1600" b="1" dirty="0">
+                <a:solidFill>
+                  <a:srgbClr val="E76F51"/>
+                </a:solidFill>
+                <a:latin typeface="Arial" pitchFamily="34" charset="0"/>
+                <a:ea typeface="Arial" pitchFamily="34" charset="-122"/>
+                <a:cs typeface="Arial" pitchFamily="34" charset="-120"/>
+              </a:rPr>
+              <a:t>"למעלה" יורד ⬇</a:t>
+            </a:r>
+            <a:endParaRPr lang="he-IL" sz="1600" dirty="0"/>
+          </a:p>
+        </p:txBody>
+      </p:sp>
+      <p:sp>
+        <p:nvSpPr>
+          <p:cNvPr id="7" name="Shape 5"/>
+          <p:cNvSpPr/>
+          <p:nvPr/>
+        </p:nvSpPr>
+        <p:spPr>
+          <a:xfrm>
+            <a:off x="8138160" y="1737360"/>
+            <a:ext cx="3502152" cy="777240"/>
+          </a:xfrm>
+          <a:prstGeom prst="roundRect">
+            <a:avLst>
+              <a:gd name="adj" fmla="val 14118"/>
+            </a:avLst>
+          </a:prstGeom>
+          <a:solidFill>
+            <a:srgbClr val="FDECEA"/>
+          </a:solidFill>
+          <a:ln w="12700">
+            <a:solidFill>
+              <a:srgbClr val="FDECEA"/>
             </a:solidFill>
             <a:prstDash val="solid"/>
           </a:ln>
@@ -13315,30 +12698,69 @@
       </p:sp>
       <p:sp>
         <p:nvSpPr>
-          <p:cNvPr id="5" name="Text 3"/>
-          <p:cNvSpPr txBox="1"/>
-          <p:nvPr/>
-        </p:nvSpPr>
-        <p:spPr>
-          <a:xfrm>
-            <a:off x="8641080" y="1764792"/>
-            <a:ext cx="2862072" cy="365760"/>
-          </a:xfrm>
-          <a:prstGeom prst="rect">
-            <a:avLst/>
-          </a:prstGeom>
-          <a:noFill/>
-          <a:ln/>
-        </p:spPr>
-        <p:txBody>
-          <a:bodyPr wrap="square" lIns="0" tIns="0" rIns="0" bIns="0" rtlCol="0" anchor="t"/>
+          <p:cNvPr id="8" name="Text 6"/>
+          <p:cNvSpPr txBox="1"/>
+          <p:nvPr/>
+        </p:nvSpPr>
+        <p:spPr>
+          <a:xfrm>
+            <a:off x="10954512" y="1892808"/>
+            <a:ext cx="457200" cy="457200"/>
+          </a:xfrm>
+          <a:prstGeom prst="rect">
+            <a:avLst/>
+          </a:prstGeom>
+          <a:noFill/>
+          <a:ln/>
+        </p:spPr>
+        <p:txBody>
+          <a:bodyPr wrap="square" lIns="0" tIns="0" rIns="0" bIns="0" rtlCol="0" anchor="ctr"/>
+          <a:lstStyle/>
+          <a:p>
+            <a:pPr algn="ctr" indent="0" marL="0">
+              <a:buNone/>
+            </a:pPr>
+            <a:r>
+              <a:rPr lang="en-US" sz="2400" b="1" dirty="0">
+                <a:solidFill>
+                  <a:srgbClr val="E76F51"/>
+                </a:solidFill>
+                <a:latin typeface="Arial" pitchFamily="34" charset="0"/>
+                <a:ea typeface="Arial" pitchFamily="34" charset="-122"/>
+                <a:cs typeface="Arial" pitchFamily="34" charset="-120"/>
+              </a:rPr>
+              <a:t>−</a:t>
+            </a:r>
+            <a:endParaRPr lang="en-US" sz="2400" dirty="0"/>
+          </a:p>
+        </p:txBody>
+      </p:sp>
+      <p:sp>
+        <p:nvSpPr>
+          <p:cNvPr id="9" name="Text 7"/>
+          <p:cNvSpPr txBox="1"/>
+          <p:nvPr/>
+        </p:nvSpPr>
+        <p:spPr>
+          <a:xfrm>
+            <a:off x="8321040" y="1828800"/>
+            <a:ext cx="2587752" cy="594360"/>
+          </a:xfrm>
+          <a:prstGeom prst="rect">
+            <a:avLst/>
+          </a:prstGeom>
+          <a:noFill/>
+          <a:ln/>
+        </p:spPr>
+        <p:txBody>
+          <a:bodyPr wrap="square" lIns="0" tIns="0" rIns="0" bIns="0" rtlCol="0" anchor="ctr"/>
           <a:lstStyle/>
           <a:p>
             <a:pPr rtl="1" algn="r" indent="0" marL="0">
               <a:buNone/>
             </a:pPr>
             <a:r>
-              <a:rPr lang="he-IL" altLang="en-US" sz="1500" b="1" dirty="0">
+              <a:rPr lang="he-IL" altLang="en-US" sz="1400" b="1" dirty="0">
                 <a:solidFill>
                   <a:srgbClr val="14213D"/>
                 </a:solidFill>
@@ -13346,73 +12768,34 @@
                 <a:ea typeface="Arial" pitchFamily="34" charset="-122"/>
                 <a:cs typeface="Arial" pitchFamily="34" charset="-120"/>
               </a:rPr>
-              <a:t>מאקרו</a:t>
-            </a:r>
-            <a:endParaRPr lang="he-IL" sz="1500" dirty="0"/>
-          </a:p>
-        </p:txBody>
-      </p:sp>
-      <p:sp>
-        <p:nvSpPr>
-          <p:cNvPr id="6" name="Text 4"/>
-          <p:cNvSpPr txBox="1"/>
-          <p:nvPr/>
-        </p:nvSpPr>
-        <p:spPr>
-          <a:xfrm>
-            <a:off x="8641080" y="2130552"/>
-            <a:ext cx="2862072" cy="502920"/>
-          </a:xfrm>
-          <a:prstGeom prst="rect">
-            <a:avLst/>
-          </a:prstGeom>
-          <a:noFill/>
-          <a:ln/>
-        </p:spPr>
-        <p:txBody>
-          <a:bodyPr wrap="square" lIns="0" tIns="0" rIns="0" bIns="0" rtlCol="0" anchor="t"/>
-          <a:lstStyle/>
-          <a:p>
-            <a:pPr rtl="1" algn="r" indent="0" marL="0">
-              <a:buNone/>
-            </a:pPr>
-            <a:r>
-              <a:rPr lang="he-IL" altLang="en-US" sz="1150" dirty="0">
-                <a:solidFill>
-                  <a:srgbClr val="1F2937"/>
-                </a:solidFill>
-                <a:latin typeface="Arial" pitchFamily="34" charset="0"/>
-                <a:ea typeface="Arial" pitchFamily="34" charset="-122"/>
-                <a:cs typeface="Arial" pitchFamily="34" charset="-120"/>
-              </a:rPr>
-              <a:t>מיתון, טכנולוגיה, מלחמה</a:t>
-            </a:r>
-            <a:endParaRPr lang="he-IL" sz="1150" dirty="0"/>
-          </a:p>
-        </p:txBody>
-      </p:sp>
-      <p:sp>
-        <p:nvSpPr>
-          <p:cNvPr id="7" name="Shape 5"/>
+              <a:t>שביעות רצון מהקריירה</a:t>
+            </a:r>
+            <a:endParaRPr lang="he-IL" sz="1400" dirty="0"/>
+          </a:p>
+        </p:txBody>
+      </p:sp>
+      <p:sp>
+        <p:nvSpPr>
+          <p:cNvPr id="10" name="Shape 8"/>
           <p:cNvSpPr/>
           <p:nvPr/>
         </p:nvSpPr>
         <p:spPr>
           <a:xfrm>
-            <a:off x="8503920" y="2834640"/>
-            <a:ext cx="3136392" cy="1005840"/>
+            <a:off x="8138160" y="2670048"/>
+            <a:ext cx="3502152" cy="777240"/>
           </a:xfrm>
           <a:prstGeom prst="roundRect">
             <a:avLst>
-              <a:gd name="adj" fmla="val 10909"/>
+              <a:gd name="adj" fmla="val 14118"/>
             </a:avLst>
           </a:prstGeom>
           <a:solidFill>
-            <a:srgbClr val="EEF2F8"/>
+            <a:srgbClr val="FDECEA"/>
           </a:solidFill>
           <a:ln w="12700">
             <a:solidFill>
-              <a:srgbClr val="EEF2F8"/>
+              <a:srgbClr val="FDECEA"/>
             </a:solidFill>
             <a:prstDash val="solid"/>
           </a:ln>
@@ -13427,30 +12810,69 @@
       </p:sp>
       <p:sp>
         <p:nvSpPr>
-          <p:cNvPr id="8" name="Text 6"/>
-          <p:cNvSpPr txBox="1"/>
-          <p:nvPr/>
-        </p:nvSpPr>
-        <p:spPr>
-          <a:xfrm>
-            <a:off x="8641080" y="2907792"/>
-            <a:ext cx="2862072" cy="365760"/>
-          </a:xfrm>
-          <a:prstGeom prst="rect">
-            <a:avLst/>
-          </a:prstGeom>
-          <a:noFill/>
-          <a:ln/>
-        </p:spPr>
-        <p:txBody>
-          <a:bodyPr wrap="square" lIns="0" tIns="0" rIns="0" bIns="0" rtlCol="0" anchor="t"/>
+          <p:cNvPr id="11" name="Text 9"/>
+          <p:cNvSpPr txBox="1"/>
+          <p:nvPr/>
+        </p:nvSpPr>
+        <p:spPr>
+          <a:xfrm>
+            <a:off x="10954512" y="2825496"/>
+            <a:ext cx="457200" cy="457200"/>
+          </a:xfrm>
+          <a:prstGeom prst="rect">
+            <a:avLst/>
+          </a:prstGeom>
+          <a:noFill/>
+          <a:ln/>
+        </p:spPr>
+        <p:txBody>
+          <a:bodyPr wrap="square" lIns="0" tIns="0" rIns="0" bIns="0" rtlCol="0" anchor="ctr"/>
+          <a:lstStyle/>
+          <a:p>
+            <a:pPr algn="ctr" indent="0" marL="0">
+              <a:buNone/>
+            </a:pPr>
+            <a:r>
+              <a:rPr lang="en-US" sz="2400" b="1" dirty="0">
+                <a:solidFill>
+                  <a:srgbClr val="E76F51"/>
+                </a:solidFill>
+                <a:latin typeface="Arial" pitchFamily="34" charset="0"/>
+                <a:ea typeface="Arial" pitchFamily="34" charset="-122"/>
+                <a:cs typeface="Arial" pitchFamily="34" charset="-120"/>
+              </a:rPr>
+              <a:t>−</a:t>
+            </a:r>
+            <a:endParaRPr lang="en-US" sz="2400" dirty="0"/>
+          </a:p>
+        </p:txBody>
+      </p:sp>
+      <p:sp>
+        <p:nvSpPr>
+          <p:cNvPr id="12" name="Text 10"/>
+          <p:cNvSpPr txBox="1"/>
+          <p:nvPr/>
+        </p:nvSpPr>
+        <p:spPr>
+          <a:xfrm>
+            <a:off x="8321040" y="2761488"/>
+            <a:ext cx="2587752" cy="594360"/>
+          </a:xfrm>
+          <a:prstGeom prst="rect">
+            <a:avLst/>
+          </a:prstGeom>
+          <a:noFill/>
+          <a:ln/>
+        </p:spPr>
+        <p:txBody>
+          <a:bodyPr wrap="square" lIns="0" tIns="0" rIns="0" bIns="0" rtlCol="0" anchor="ctr"/>
           <a:lstStyle/>
           <a:p>
             <a:pPr rtl="1" algn="r" indent="0" marL="0">
               <a:buNone/>
             </a:pPr>
             <a:r>
-              <a:rPr lang="he-IL" altLang="en-US" sz="1500" b="1" dirty="0">
+              <a:rPr lang="he-IL" altLang="en-US" sz="1400" b="1" dirty="0">
                 <a:solidFill>
                   <a:srgbClr val="14213D"/>
                 </a:solidFill>
@@ -13458,73 +12880,34 @@
                 <a:ea typeface="Arial" pitchFamily="34" charset="-122"/>
                 <a:cs typeface="Arial" pitchFamily="34" charset="-120"/>
               </a:rPr>
-              <a:t>ארגוני</a:t>
-            </a:r>
-            <a:endParaRPr lang="he-IL" sz="1500" dirty="0"/>
-          </a:p>
-        </p:txBody>
-      </p:sp>
-      <p:sp>
-        <p:nvSpPr>
-          <p:cNvPr id="9" name="Text 7"/>
-          <p:cNvSpPr txBox="1"/>
-          <p:nvPr/>
-        </p:nvSpPr>
-        <p:spPr>
-          <a:xfrm>
-            <a:off x="8641080" y="3273552"/>
-            <a:ext cx="2862072" cy="502920"/>
-          </a:xfrm>
-          <a:prstGeom prst="rect">
-            <a:avLst/>
-          </a:prstGeom>
-          <a:noFill/>
-          <a:ln/>
-        </p:spPr>
-        <p:txBody>
-          <a:bodyPr wrap="square" lIns="0" tIns="0" rIns="0" bIns="0" rtlCol="0" anchor="t"/>
-          <a:lstStyle/>
-          <a:p>
-            <a:pPr rtl="1" algn="r" indent="0" marL="0">
-              <a:buNone/>
-            </a:pPr>
-            <a:r>
-              <a:rPr lang="he-IL" altLang="en-US" sz="1150" dirty="0">
-                <a:solidFill>
-                  <a:srgbClr val="1F2937"/>
-                </a:solidFill>
-                <a:latin typeface="Arial" pitchFamily="34" charset="0"/>
-                <a:ea typeface="Arial" pitchFamily="34" charset="-122"/>
-                <a:cs typeface="Arial" pitchFamily="34" charset="-120"/>
-              </a:rPr>
-              <a:t>צמצומים, מיזוגים, חוזים זמניים, תקשורת לקויה</a:t>
-            </a:r>
-            <a:endParaRPr lang="he-IL" sz="1150" dirty="0"/>
-          </a:p>
-        </p:txBody>
-      </p:sp>
-      <p:sp>
-        <p:nvSpPr>
-          <p:cNvPr id="10" name="Shape 8"/>
+              <a:t>הזדמנויות קריירה נתפסות</a:t>
+            </a:r>
+            <a:endParaRPr lang="he-IL" sz="1400" dirty="0"/>
+          </a:p>
+        </p:txBody>
+      </p:sp>
+      <p:sp>
+        <p:nvSpPr>
+          <p:cNvPr id="13" name="Shape 11"/>
           <p:cNvSpPr/>
           <p:nvPr/>
         </p:nvSpPr>
         <p:spPr>
           <a:xfrm>
-            <a:off x="8503920" y="3977640"/>
-            <a:ext cx="3136392" cy="1005840"/>
+            <a:off x="8138160" y="3602736"/>
+            <a:ext cx="3502152" cy="777240"/>
           </a:xfrm>
           <a:prstGeom prst="roundRect">
             <a:avLst>
-              <a:gd name="adj" fmla="val 10909"/>
+              <a:gd name="adj" fmla="val 14118"/>
             </a:avLst>
           </a:prstGeom>
           <a:solidFill>
-            <a:srgbClr val="EEF2F8"/>
+            <a:srgbClr val="FDECEA"/>
           </a:solidFill>
           <a:ln w="12700">
             <a:solidFill>
-              <a:srgbClr val="EEF2F8"/>
+              <a:srgbClr val="FDECEA"/>
             </a:solidFill>
             <a:prstDash val="solid"/>
           </a:ln>
@@ -13539,30 +12922,69 @@
       </p:sp>
       <p:sp>
         <p:nvSpPr>
-          <p:cNvPr id="11" name="Text 9"/>
-          <p:cNvSpPr txBox="1"/>
-          <p:nvPr/>
-        </p:nvSpPr>
-        <p:spPr>
-          <a:xfrm>
-            <a:off x="8641080" y="4050792"/>
-            <a:ext cx="2862072" cy="365760"/>
-          </a:xfrm>
-          <a:prstGeom prst="rect">
-            <a:avLst/>
-          </a:prstGeom>
-          <a:noFill/>
-          <a:ln/>
-        </p:spPr>
-        <p:txBody>
-          <a:bodyPr wrap="square" lIns="0" tIns="0" rIns="0" bIns="0" rtlCol="0" anchor="t"/>
+          <p:cNvPr id="14" name="Text 12"/>
+          <p:cNvSpPr txBox="1"/>
+          <p:nvPr/>
+        </p:nvSpPr>
+        <p:spPr>
+          <a:xfrm>
+            <a:off x="10954512" y="3758184"/>
+            <a:ext cx="457200" cy="457200"/>
+          </a:xfrm>
+          <a:prstGeom prst="rect">
+            <a:avLst/>
+          </a:prstGeom>
+          <a:noFill/>
+          <a:ln/>
+        </p:spPr>
+        <p:txBody>
+          <a:bodyPr wrap="square" lIns="0" tIns="0" rIns="0" bIns="0" rtlCol="0" anchor="ctr"/>
+          <a:lstStyle/>
+          <a:p>
+            <a:pPr algn="ctr" indent="0" marL="0">
+              <a:buNone/>
+            </a:pPr>
+            <a:r>
+              <a:rPr lang="en-US" sz="2400" b="1" dirty="0">
+                <a:solidFill>
+                  <a:srgbClr val="E76F51"/>
+                </a:solidFill>
+                <a:latin typeface="Arial" pitchFamily="34" charset="0"/>
+                <a:ea typeface="Arial" pitchFamily="34" charset="-122"/>
+                <a:cs typeface="Arial" pitchFamily="34" charset="-120"/>
+              </a:rPr>
+              <a:t>−</a:t>
+            </a:r>
+            <a:endParaRPr lang="en-US" sz="2400" dirty="0"/>
+          </a:p>
+        </p:txBody>
+      </p:sp>
+      <p:sp>
+        <p:nvSpPr>
+          <p:cNvPr id="15" name="Text 13"/>
+          <p:cNvSpPr txBox="1"/>
+          <p:nvPr/>
+        </p:nvSpPr>
+        <p:spPr>
+          <a:xfrm>
+            <a:off x="8321040" y="3694176"/>
+            <a:ext cx="2587752" cy="594360"/>
+          </a:xfrm>
+          <a:prstGeom prst="rect">
+            <a:avLst/>
+          </a:prstGeom>
+          <a:noFill/>
+          <a:ln/>
+        </p:spPr>
+        <p:txBody>
+          <a:bodyPr wrap="square" lIns="0" tIns="0" rIns="0" bIns="0" rtlCol="0" anchor="ctr"/>
           <a:lstStyle/>
           <a:p>
             <a:pPr rtl="1" algn="r" indent="0" marL="0">
               <a:buNone/>
             </a:pPr>
             <a:r>
-              <a:rPr lang="he-IL" altLang="en-US" sz="1500" b="1" dirty="0">
+              <a:rPr lang="he-IL" altLang="en-US" sz="1400" b="1" dirty="0">
                 <a:solidFill>
                   <a:srgbClr val="14213D"/>
                 </a:solidFill>
@@ -13570,282 +12992,34 @@
                 <a:ea typeface="Arial" pitchFamily="34" charset="-122"/>
                 <a:cs typeface="Arial" pitchFamily="34" charset="-120"/>
               </a:rPr>
-              <a:t>אישי</a:t>
-            </a:r>
-            <a:endParaRPr lang="he-IL" sz="1500" dirty="0"/>
-          </a:p>
-        </p:txBody>
-      </p:sp>
-      <p:sp>
-        <p:nvSpPr>
-          <p:cNvPr id="12" name="Text 10"/>
-          <p:cNvSpPr txBox="1"/>
-          <p:nvPr/>
-        </p:nvSpPr>
-        <p:spPr>
-          <a:xfrm>
-            <a:off x="8641080" y="4416552"/>
-            <a:ext cx="2862072" cy="502920"/>
-          </a:xfrm>
-          <a:prstGeom prst="rect">
-            <a:avLst/>
-          </a:prstGeom>
-          <a:noFill/>
-          <a:ln/>
-        </p:spPr>
-        <p:txBody>
-          <a:bodyPr wrap="square" lIns="0" tIns="0" rIns="0" bIns="0" rtlCol="0" anchor="t"/>
-          <a:lstStyle/>
-          <a:p>
-            <a:pPr rtl="1" algn="r" indent="0" marL="0">
-              <a:buNone/>
-            </a:pPr>
-            <a:r>
-              <a:rPr lang="he-IL" altLang="en-US" sz="1150" dirty="0">
-                <a:solidFill>
-                  <a:srgbClr val="1F2937"/>
-                </a:solidFill>
-                <a:latin typeface="Arial" pitchFamily="34" charset="0"/>
-                <a:ea typeface="Arial" pitchFamily="34" charset="-122"/>
-                <a:cs typeface="Arial" pitchFamily="34" charset="-120"/>
-              </a:rPr>
-              <a:t>אישיות, ותק, השכלה, יכולת תעסוקה</a:t>
-            </a:r>
-            <a:endParaRPr lang="he-IL" sz="1150" dirty="0"/>
-          </a:p>
-        </p:txBody>
-      </p:sp>
-      <p:sp>
-        <p:nvSpPr>
-          <p:cNvPr id="13" name="Shape 11"/>
+              <a:t>יכולת תעסוקה נתפסת</a:t>
+            </a:r>
+            <a:endParaRPr lang="he-IL" sz="1400" dirty="0"/>
+          </a:p>
+        </p:txBody>
+      </p:sp>
+      <p:sp>
+        <p:nvSpPr>
+          <p:cNvPr id="16" name="Shape 14"/>
           <p:cNvSpPr/>
           <p:nvPr/>
         </p:nvSpPr>
         <p:spPr>
           <a:xfrm>
-            <a:off x="7635240" y="2926080"/>
-            <a:ext cx="777240" cy="548640"/>
-          </a:xfrm>
-          <a:prstGeom prst="leftArrow">
-            <a:avLst/>
+            <a:off x="8138160" y="4535424"/>
+            <a:ext cx="3502152" cy="777240"/>
+          </a:xfrm>
+          <a:prstGeom prst="roundRect">
+            <a:avLst>
+              <a:gd name="adj" fmla="val 14118"/>
+            </a:avLst>
           </a:prstGeom>
           <a:solidFill>
-            <a:srgbClr val="FCA311"/>
+            <a:srgbClr val="FDECEA"/>
           </a:solidFill>
           <a:ln w="12700">
             <a:solidFill>
-              <a:srgbClr val="FCA311"/>
-            </a:solidFill>
-            <a:prstDash val="solid"/>
-          </a:ln>
-        </p:spPr>
-      </p:sp>
-      <p:sp>
-        <p:nvSpPr>
-          <p:cNvPr id="14" name="Shape 12"/>
-          <p:cNvSpPr/>
-          <p:nvPr/>
-        </p:nvSpPr>
-        <p:spPr>
-          <a:xfrm>
-            <a:off x="5074920" y="2148840"/>
-            <a:ext cx="2468880" cy="2103120"/>
-          </a:xfrm>
-          <a:prstGeom prst="ellipse">
-            <a:avLst/>
-          </a:prstGeom>
-          <a:solidFill>
-            <a:srgbClr val="14213D"/>
-          </a:solidFill>
-          <a:ln w="12700">
-            <a:solidFill>
-              <a:srgbClr val="14213D"/>
-            </a:solidFill>
-            <a:prstDash val="solid"/>
-          </a:ln>
-        </p:spPr>
-      </p:sp>
-      <p:sp>
-        <p:nvSpPr>
-          <p:cNvPr id="15" name="Text 13"/>
-          <p:cNvSpPr txBox="1"/>
-          <p:nvPr/>
-        </p:nvSpPr>
-        <p:spPr>
-          <a:xfrm>
-            <a:off x="5166360" y="2331720"/>
-            <a:ext cx="2286000" cy="914400"/>
-          </a:xfrm>
-          <a:prstGeom prst="rect">
-            <a:avLst/>
-          </a:prstGeom>
-          <a:noFill/>
-          <a:ln/>
-        </p:spPr>
-        <p:txBody>
-          <a:bodyPr wrap="square" lIns="0" tIns="0" rIns="0" bIns="0" rtlCol="0" anchor="ctr"/>
-          <a:lstStyle/>
-          <a:p>
-            <a:pPr rtl="1" algn="ctr" indent="0" marL="0">
-              <a:buNone/>
-            </a:pPr>
-            <a:r>
-              <a:rPr lang="he-IL" altLang="en-US" sz="1800" b="1" dirty="0">
-                <a:solidFill>
-                  <a:srgbClr val="FFFFFF"/>
-                </a:solidFill>
-                <a:latin typeface="Arial" pitchFamily="34" charset="0"/>
-                <a:ea typeface="Arial" pitchFamily="34" charset="-122"/>
-                <a:cs typeface="Arial" pitchFamily="34" charset="-120"/>
-              </a:rPr>
-              <a:t>חוסר ביטחון תעסוקתי</a:t>
-            </a:r>
-            <a:endParaRPr lang="he-IL" sz="1800" dirty="0"/>
-          </a:p>
-        </p:txBody>
-      </p:sp>
-      <p:sp>
-        <p:nvSpPr>
-          <p:cNvPr id="16" name="Text 14"/>
-          <p:cNvSpPr txBox="1"/>
-          <p:nvPr/>
-        </p:nvSpPr>
-        <p:spPr>
-          <a:xfrm>
-            <a:off x="5166360" y="3200400"/>
-            <a:ext cx="2286000" cy="822960"/>
-          </a:xfrm>
-          <a:prstGeom prst="rect">
-            <a:avLst/>
-          </a:prstGeom>
-          <a:noFill/>
-          <a:ln/>
-        </p:spPr>
-        <p:txBody>
-          <a:bodyPr wrap="square" lIns="0" tIns="0" rIns="0" bIns="0" rtlCol="0" anchor="ctr"/>
-          <a:lstStyle/>
-          <a:p>
-            <a:pPr rtl="1" algn="ctr" indent="0" marL="0">
-              <a:buNone/>
-            </a:pPr>
-            <a:r>
-              <a:rPr lang="he-IL" altLang="en-US" sz="1100" dirty="0">
-                <a:solidFill>
-                  <a:srgbClr val="FCA311"/>
-                </a:solidFill>
-                <a:latin typeface="Arial" pitchFamily="34" charset="0"/>
-                <a:ea typeface="Arial" pitchFamily="34" charset="-122"/>
-                <a:cs typeface="Arial" pitchFamily="34" charset="-120"/>
-              </a:rPr>
-              <a:t>כמותי / איכותני</a:t>
-            </a:r>
-            <a:endParaRPr lang="he-IL" sz="1100" dirty="0"/>
-          </a:p>
-          <a:p>
-            <a:pPr rtl="1" algn="ctr" indent="0" marL="0">
-              <a:buNone/>
-            </a:pPr>
-            <a:r>
-              <a:rPr lang="he-IL" altLang="en-US" sz="1100" dirty="0">
-                <a:solidFill>
-                  <a:srgbClr val="FCA311"/>
-                </a:solidFill>
-                <a:latin typeface="Arial" pitchFamily="34" charset="0"/>
-                <a:ea typeface="Arial" pitchFamily="34" charset="-122"/>
-                <a:cs typeface="Arial" pitchFamily="34" charset="-120"/>
-              </a:rPr>
-              <a:t>קוגניטיבי / רגשי</a:t>
-            </a:r>
-            <a:endParaRPr lang="he-IL" sz="1100" dirty="0"/>
-          </a:p>
-        </p:txBody>
-      </p:sp>
-      <p:sp>
-        <p:nvSpPr>
-          <p:cNvPr id="17" name="Shape 15"/>
-          <p:cNvSpPr/>
-          <p:nvPr/>
-        </p:nvSpPr>
-        <p:spPr>
-          <a:xfrm>
-            <a:off x="4206240" y="2926080"/>
-            <a:ext cx="777240" cy="548640"/>
-          </a:xfrm>
-          <a:prstGeom prst="leftArrow">
-            <a:avLst/>
-          </a:prstGeom>
-          <a:solidFill>
-            <a:srgbClr val="FCA311"/>
-          </a:solidFill>
-          <a:ln w="12700">
-            <a:solidFill>
-              <a:srgbClr val="FCA311"/>
-            </a:solidFill>
-            <a:prstDash val="solid"/>
-          </a:ln>
-        </p:spPr>
-      </p:sp>
-      <p:sp>
-        <p:nvSpPr>
-          <p:cNvPr id="18" name="Text 16"/>
-          <p:cNvSpPr txBox="1"/>
-          <p:nvPr/>
-        </p:nvSpPr>
-        <p:spPr>
-          <a:xfrm>
-            <a:off x="548640" y="1280160"/>
-            <a:ext cx="3566160" cy="365760"/>
-          </a:xfrm>
-          <a:prstGeom prst="rect">
-            <a:avLst/>
-          </a:prstGeom>
-          <a:noFill/>
-          <a:ln/>
-        </p:spPr>
-        <p:txBody>
-          <a:bodyPr wrap="square" lIns="0" tIns="0" rIns="0" bIns="0" rtlCol="0" anchor="t"/>
-          <a:lstStyle/>
-          <a:p>
-            <a:pPr rtl="1" algn="ctr" indent="0" marL="0">
-              <a:buNone/>
-            </a:pPr>
-            <a:r>
-              <a:rPr lang="he-IL" altLang="en-US" sz="1500" b="1" dirty="0">
-                <a:solidFill>
-                  <a:srgbClr val="2A9D8F"/>
-                </a:solidFill>
-                <a:latin typeface="Arial" pitchFamily="34" charset="0"/>
-                <a:ea typeface="Arial" pitchFamily="34" charset="-122"/>
-                <a:cs typeface="Arial" pitchFamily="34" charset="-120"/>
-              </a:rPr>
-              <a:t>4 מנגנונים → תוצאות</a:t>
-            </a:r>
-            <a:endParaRPr lang="he-IL" sz="1500" dirty="0"/>
-          </a:p>
-        </p:txBody>
-      </p:sp>
-      <p:sp>
-        <p:nvSpPr>
-          <p:cNvPr id="19" name="Shape 17"/>
-          <p:cNvSpPr/>
-          <p:nvPr/>
-        </p:nvSpPr>
-        <p:spPr>
-          <a:xfrm>
-            <a:off x="548640" y="1691640"/>
-            <a:ext cx="3566160" cy="749808"/>
-          </a:xfrm>
-          <a:prstGeom prst="roundRect">
-            <a:avLst>
-              <a:gd name="adj" fmla="val 14634"/>
-            </a:avLst>
-          </a:prstGeom>
-          <a:solidFill>
-            <a:srgbClr val="EEF2F8"/>
-          </a:solidFill>
-          <a:ln w="12700">
-            <a:solidFill>
-              <a:srgbClr val="EEF2F8"/>
+              <a:srgbClr val="FDECEA"/>
             </a:solidFill>
             <a:prstDash val="solid"/>
           </a:ln>
@@ -13860,16 +13034,94 @@
       </p:sp>
       <p:sp>
         <p:nvSpPr>
-          <p:cNvPr id="20" name="Shape 18"/>
+          <p:cNvPr id="17" name="Text 15"/>
+          <p:cNvSpPr txBox="1"/>
+          <p:nvPr/>
+        </p:nvSpPr>
+        <p:spPr>
+          <a:xfrm>
+            <a:off x="10954512" y="4690872"/>
+            <a:ext cx="457200" cy="457200"/>
+          </a:xfrm>
+          <a:prstGeom prst="rect">
+            <a:avLst/>
+          </a:prstGeom>
+          <a:noFill/>
+          <a:ln/>
+        </p:spPr>
+        <p:txBody>
+          <a:bodyPr wrap="square" lIns="0" tIns="0" rIns="0" bIns="0" rtlCol="0" anchor="ctr"/>
+          <a:lstStyle/>
+          <a:p>
+            <a:pPr algn="ctr" indent="0" marL="0">
+              <a:buNone/>
+            </a:pPr>
+            <a:r>
+              <a:rPr lang="en-US" sz="2400" b="1" dirty="0">
+                <a:solidFill>
+                  <a:srgbClr val="E76F51"/>
+                </a:solidFill>
+                <a:latin typeface="Arial" pitchFamily="34" charset="0"/>
+                <a:ea typeface="Arial" pitchFamily="34" charset="-122"/>
+                <a:cs typeface="Arial" pitchFamily="34" charset="-120"/>
+              </a:rPr>
+              <a:t>−</a:t>
+            </a:r>
+            <a:endParaRPr lang="en-US" sz="2400" dirty="0"/>
+          </a:p>
+        </p:txBody>
+      </p:sp>
+      <p:sp>
+        <p:nvSpPr>
+          <p:cNvPr id="18" name="Text 16"/>
+          <p:cNvSpPr txBox="1"/>
+          <p:nvPr/>
+        </p:nvSpPr>
+        <p:spPr>
+          <a:xfrm>
+            <a:off x="8321040" y="4626864"/>
+            <a:ext cx="2587752" cy="594360"/>
+          </a:xfrm>
+          <a:prstGeom prst="rect">
+            <a:avLst/>
+          </a:prstGeom>
+          <a:noFill/>
+          <a:ln/>
+        </p:spPr>
+        <p:txBody>
+          <a:bodyPr wrap="square" lIns="0" tIns="0" rIns="0" bIns="0" rtlCol="0" anchor="ctr"/>
+          <a:lstStyle/>
+          <a:p>
+            <a:pPr rtl="1" algn="r" indent="0" marL="0">
+              <a:buNone/>
+            </a:pPr>
+            <a:r>
+              <a:rPr lang="he-IL" altLang="en-US" sz="1400" b="1" dirty="0">
+                <a:solidFill>
+                  <a:srgbClr val="14213D"/>
+                </a:solidFill>
+                <a:latin typeface="Arial" pitchFamily="34" charset="0"/>
+                <a:ea typeface="Arial" pitchFamily="34" charset="-122"/>
+                <a:cs typeface="Arial" pitchFamily="34" charset="-120"/>
+              </a:rPr>
+              <a:t>פיתוח מיומנויות פרואקטיבי</a:t>
+            </a:r>
+            <a:endParaRPr lang="he-IL" sz="1400" dirty="0"/>
+          </a:p>
+        </p:txBody>
+      </p:sp>
+      <p:sp>
+        <p:nvSpPr>
+          <p:cNvPr id="19" name="Shape 17"/>
           <p:cNvSpPr/>
           <p:nvPr/>
         </p:nvSpPr>
         <p:spPr>
           <a:xfrm>
-            <a:off x="3657600" y="1883664"/>
-            <a:ext cx="365760" cy="365760"/>
-          </a:xfrm>
-          <a:prstGeom prst="ellipse">
+            <a:off x="7315200" y="2743200"/>
+            <a:ext cx="777240" cy="548640"/>
+          </a:xfrm>
+          <a:prstGeom prst="rightArrow">
             <a:avLst/>
           </a:prstGeom>
           <a:solidFill>
@@ -13885,14 +13137,14 @@
       </p:sp>
       <p:sp>
         <p:nvSpPr>
-          <p:cNvPr id="21" name="Text 19"/>
-          <p:cNvSpPr txBox="1"/>
-          <p:nvPr/>
-        </p:nvSpPr>
-        <p:spPr>
-          <a:xfrm>
-            <a:off x="685800" y="1746504"/>
-            <a:ext cx="2880360" cy="347472"/>
+          <p:cNvPr id="20" name="Text 18"/>
+          <p:cNvSpPr txBox="1"/>
+          <p:nvPr/>
+        </p:nvSpPr>
+        <p:spPr>
+          <a:xfrm>
+            <a:off x="548640" y="1234440"/>
+            <a:ext cx="3502152" cy="411480"/>
           </a:xfrm>
           <a:prstGeom prst="rect">
             <a:avLst/>
@@ -13904,85 +13156,46 @@
           <a:bodyPr wrap="square" lIns="0" tIns="0" rIns="0" bIns="0" rtlCol="0" anchor="t"/>
           <a:lstStyle/>
           <a:p>
-            <a:pPr rtl="1" algn="r" indent="0" marL="0">
-              <a:buNone/>
-            </a:pPr>
-            <a:r>
-              <a:rPr lang="he-IL" altLang="en-US" sz="1400" b="1" dirty="0">
-                <a:solidFill>
-                  <a:srgbClr val="14213D"/>
-                </a:solidFill>
-                <a:latin typeface="Arial" pitchFamily="34" charset="0"/>
-                <a:ea typeface="Arial" pitchFamily="34" charset="-122"/>
-                <a:cs typeface="Arial" pitchFamily="34" charset="-120"/>
-              </a:rPr>
-              <a:t>לחץ</a:t>
-            </a:r>
-            <a:endParaRPr lang="he-IL" sz="1400" dirty="0"/>
-          </a:p>
-        </p:txBody>
-      </p:sp>
-      <p:sp>
-        <p:nvSpPr>
-          <p:cNvPr id="22" name="Text 20"/>
-          <p:cNvSpPr txBox="1"/>
-          <p:nvPr/>
-        </p:nvSpPr>
-        <p:spPr>
-          <a:xfrm>
-            <a:off x="685800" y="2075688"/>
-            <a:ext cx="2880360" cy="329184"/>
-          </a:xfrm>
-          <a:prstGeom prst="rect">
-            <a:avLst/>
-          </a:prstGeom>
-          <a:noFill/>
-          <a:ln/>
-        </p:spPr>
-        <p:txBody>
-          <a:bodyPr wrap="square" lIns="0" tIns="0" rIns="0" bIns="0" rtlCol="0" anchor="t"/>
-          <a:lstStyle/>
-          <a:p>
-            <a:pPr rtl="1" algn="r" indent="0" marL="0">
-              <a:buNone/>
-            </a:pPr>
-            <a:r>
-              <a:rPr lang="he-IL" altLang="en-US" sz="1100" dirty="0">
-                <a:solidFill>
-                  <a:srgbClr val="1F2937"/>
-                </a:solidFill>
-                <a:latin typeface="Arial" pitchFamily="34" charset="0"/>
-                <a:ea typeface="Arial" pitchFamily="34" charset="-122"/>
-                <a:cs typeface="Arial" pitchFamily="34" charset="-120"/>
-              </a:rPr>
-              <a:t>שחיקה, בריאות, משפחה</a:t>
-            </a:r>
-            <a:endParaRPr lang="he-IL" sz="1100" dirty="0"/>
-          </a:p>
-        </p:txBody>
-      </p:sp>
-      <p:sp>
-        <p:nvSpPr>
-          <p:cNvPr id="23" name="Shape 21"/>
+            <a:pPr rtl="1" algn="ctr" indent="0" marL="0">
+              <a:buNone/>
+            </a:pPr>
+            <a:r>
+              <a:rPr lang="he-IL" altLang="en-US" sz="1600" b="1" dirty="0">
+                <a:solidFill>
+                  <a:srgbClr val="D9822B"/>
+                </a:solidFill>
+                <a:latin typeface="Arial" pitchFamily="34" charset="0"/>
+                <a:ea typeface="Arial" pitchFamily="34" charset="-122"/>
+                <a:cs typeface="Arial" pitchFamily="34" charset="-120"/>
+              </a:rPr>
+              <a:t>"הלאה" עולה ⬆</a:t>
+            </a:r>
+            <a:endParaRPr lang="he-IL" sz="1600" dirty="0"/>
+          </a:p>
+        </p:txBody>
+      </p:sp>
+      <p:sp>
+        <p:nvSpPr>
+          <p:cNvPr id="21" name="Shape 19"/>
           <p:cNvSpPr/>
           <p:nvPr/>
         </p:nvSpPr>
         <p:spPr>
           <a:xfrm>
-            <a:off x="548640" y="2560320"/>
-            <a:ext cx="3566160" cy="749808"/>
+            <a:off x="548640" y="1737360"/>
+            <a:ext cx="3502152" cy="777240"/>
           </a:xfrm>
           <a:prstGeom prst="roundRect">
             <a:avLst>
-              <a:gd name="adj" fmla="val 14634"/>
+              <a:gd name="adj" fmla="val 14118"/>
             </a:avLst>
           </a:prstGeom>
           <a:solidFill>
-            <a:srgbClr val="EEF2F8"/>
+            <a:srgbClr val="FFF1D6"/>
           </a:solidFill>
           <a:ln w="12700">
             <a:solidFill>
-              <a:srgbClr val="EEF2F8"/>
+              <a:srgbClr val="FFF1D6"/>
             </a:solidFill>
             <a:prstDash val="solid"/>
           </a:ln>
@@ -13997,129 +13210,104 @@
       </p:sp>
       <p:sp>
         <p:nvSpPr>
+          <p:cNvPr id="22" name="Text 20"/>
+          <p:cNvSpPr txBox="1"/>
+          <p:nvPr/>
+        </p:nvSpPr>
+        <p:spPr>
+          <a:xfrm>
+            <a:off x="3364992" y="1892808"/>
+            <a:ext cx="457200" cy="457200"/>
+          </a:xfrm>
+          <a:prstGeom prst="rect">
+            <a:avLst/>
+          </a:prstGeom>
+          <a:noFill/>
+          <a:ln/>
+        </p:spPr>
+        <p:txBody>
+          <a:bodyPr wrap="square" lIns="0" tIns="0" rIns="0" bIns="0" rtlCol="0" anchor="ctr"/>
+          <a:lstStyle/>
+          <a:p>
+            <a:pPr algn="ctr" indent="0" marL="0">
+              <a:buNone/>
+            </a:pPr>
+            <a:r>
+              <a:rPr lang="en-US" sz="2400" b="1" dirty="0">
+                <a:solidFill>
+                  <a:srgbClr val="D9822B"/>
+                </a:solidFill>
+                <a:latin typeface="Arial" pitchFamily="34" charset="0"/>
+                <a:ea typeface="Arial" pitchFamily="34" charset="-122"/>
+                <a:cs typeface="Arial" pitchFamily="34" charset="-120"/>
+              </a:rPr>
+              <a:t>+</a:t>
+            </a:r>
+            <a:endParaRPr lang="en-US" sz="2400" dirty="0"/>
+          </a:p>
+        </p:txBody>
+      </p:sp>
+      <p:sp>
+        <p:nvSpPr>
+          <p:cNvPr id="23" name="Text 21"/>
+          <p:cNvSpPr txBox="1"/>
+          <p:nvPr/>
+        </p:nvSpPr>
+        <p:spPr>
+          <a:xfrm>
+            <a:off x="731520" y="1828800"/>
+            <a:ext cx="2587752" cy="594360"/>
+          </a:xfrm>
+          <a:prstGeom prst="rect">
+            <a:avLst/>
+          </a:prstGeom>
+          <a:noFill/>
+          <a:ln/>
+        </p:spPr>
+        <p:txBody>
+          <a:bodyPr wrap="square" lIns="0" tIns="0" rIns="0" bIns="0" rtlCol="0" anchor="ctr"/>
+          <a:lstStyle/>
+          <a:p>
+            <a:pPr rtl="1" algn="r" indent="0" marL="0">
+              <a:buNone/>
+            </a:pPr>
+            <a:r>
+              <a:rPr lang="he-IL" altLang="en-US" sz="1400" b="1" dirty="0">
+                <a:solidFill>
+                  <a:srgbClr val="14213D"/>
+                </a:solidFill>
+                <a:latin typeface="Arial" pitchFamily="34" charset="0"/>
+                <a:ea typeface="Arial" pitchFamily="34" charset="-122"/>
+                <a:cs typeface="Arial" pitchFamily="34" charset="-120"/>
+              </a:rPr>
+              <a:t>כוונת עזיבה של הארגון</a:t>
+            </a:r>
+            <a:endParaRPr lang="he-IL" sz="1400" dirty="0"/>
+          </a:p>
+        </p:txBody>
+      </p:sp>
+      <p:sp>
+        <p:nvSpPr>
           <p:cNvPr id="24" name="Shape 22"/>
           <p:cNvSpPr/>
           <p:nvPr/>
         </p:nvSpPr>
         <p:spPr>
           <a:xfrm>
-            <a:off x="3657600" y="2752344"/>
-            <a:ext cx="365760" cy="365760"/>
-          </a:xfrm>
-          <a:prstGeom prst="ellipse">
-            <a:avLst/>
+            <a:off x="548640" y="2670048"/>
+            <a:ext cx="3502152" cy="777240"/>
+          </a:xfrm>
+          <a:prstGeom prst="roundRect">
+            <a:avLst>
+              <a:gd name="adj" fmla="val 14118"/>
+            </a:avLst>
           </a:prstGeom>
           <a:solidFill>
-            <a:srgbClr val="E76F51"/>
+            <a:srgbClr val="FFF1D6"/>
           </a:solidFill>
           <a:ln w="12700">
             <a:solidFill>
-              <a:srgbClr val="E76F51"/>
-            </a:solidFill>
-            <a:prstDash val="solid"/>
-          </a:ln>
-        </p:spPr>
-      </p:sp>
-      <p:sp>
-        <p:nvSpPr>
-          <p:cNvPr id="25" name="Text 23"/>
-          <p:cNvSpPr txBox="1"/>
-          <p:nvPr/>
-        </p:nvSpPr>
-        <p:spPr>
-          <a:xfrm>
-            <a:off x="685800" y="2615184"/>
-            <a:ext cx="2880360" cy="347472"/>
-          </a:xfrm>
-          <a:prstGeom prst="rect">
-            <a:avLst/>
-          </a:prstGeom>
-          <a:noFill/>
-          <a:ln/>
-        </p:spPr>
-        <p:txBody>
-          <a:bodyPr wrap="square" lIns="0" tIns="0" rIns="0" bIns="0" rtlCol="0" anchor="t"/>
-          <a:lstStyle/>
-          <a:p>
-            <a:pPr rtl="1" algn="r" indent="0" marL="0">
-              <a:buNone/>
-            </a:pPr>
-            <a:r>
-              <a:rPr lang="he-IL" altLang="en-US" sz="1400" b="1" dirty="0">
-                <a:solidFill>
-                  <a:srgbClr val="14213D"/>
-                </a:solidFill>
-                <a:latin typeface="Arial" pitchFamily="34" charset="0"/>
-                <a:ea typeface="Arial" pitchFamily="34" charset="-122"/>
-                <a:cs typeface="Arial" pitchFamily="34" charset="-120"/>
-              </a:rPr>
-              <a:t>חליפין חברתי</a:t>
-            </a:r>
-            <a:endParaRPr lang="he-IL" sz="1400" dirty="0"/>
-          </a:p>
-        </p:txBody>
-      </p:sp>
-      <p:sp>
-        <p:nvSpPr>
-          <p:cNvPr id="26" name="Text 24"/>
-          <p:cNvSpPr txBox="1"/>
-          <p:nvPr/>
-        </p:nvSpPr>
-        <p:spPr>
-          <a:xfrm>
-            <a:off x="685800" y="2944368"/>
-            <a:ext cx="2880360" cy="329184"/>
-          </a:xfrm>
-          <a:prstGeom prst="rect">
-            <a:avLst/>
-          </a:prstGeom>
-          <a:noFill/>
-          <a:ln/>
-        </p:spPr>
-        <p:txBody>
-          <a:bodyPr wrap="square" lIns="0" tIns="0" rIns="0" bIns="0" rtlCol="0" anchor="t"/>
-          <a:lstStyle/>
-          <a:p>
-            <a:pPr rtl="1" algn="r" indent="0" marL="0">
-              <a:buNone/>
-            </a:pPr>
-            <a:r>
-              <a:rPr lang="he-IL" altLang="en-US" sz="1100" dirty="0">
-                <a:solidFill>
-                  <a:srgbClr val="1F2937"/>
-                </a:solidFill>
-                <a:latin typeface="Arial" pitchFamily="34" charset="0"/>
-                <a:ea typeface="Arial" pitchFamily="34" charset="-122"/>
-                <a:cs typeface="Arial" pitchFamily="34" charset="-120"/>
-              </a:rPr>
-              <a:t>ירידה במחויבות ובאמון</a:t>
-            </a:r>
-            <a:endParaRPr lang="he-IL" sz="1100" dirty="0"/>
-          </a:p>
-        </p:txBody>
-      </p:sp>
-      <p:sp>
-        <p:nvSpPr>
-          <p:cNvPr id="27" name="Shape 25"/>
-          <p:cNvSpPr/>
-          <p:nvPr/>
-        </p:nvSpPr>
-        <p:spPr>
-          <a:xfrm>
-            <a:off x="548640" y="3429000"/>
-            <a:ext cx="3566160" cy="749808"/>
-          </a:xfrm>
-          <a:prstGeom prst="roundRect">
-            <a:avLst>
-              <a:gd name="adj" fmla="val 14634"/>
-            </a:avLst>
-          </a:prstGeom>
-          <a:solidFill>
-            <a:srgbClr val="EEF2F8"/>
-          </a:solidFill>
-          <a:ln w="12700">
-            <a:solidFill>
-              <a:srgbClr val="EEF2F8"/>
+              <a:srgbClr val="FFF1D6"/>
             </a:solidFill>
             <a:prstDash val="solid"/>
           </a:ln>
@@ -14134,129 +13322,104 @@
       </p:sp>
       <p:sp>
         <p:nvSpPr>
-          <p:cNvPr id="28" name="Shape 26"/>
+          <p:cNvPr id="25" name="Text 23"/>
+          <p:cNvSpPr txBox="1"/>
+          <p:nvPr/>
+        </p:nvSpPr>
+        <p:spPr>
+          <a:xfrm>
+            <a:off x="3364992" y="2825496"/>
+            <a:ext cx="457200" cy="457200"/>
+          </a:xfrm>
+          <a:prstGeom prst="rect">
+            <a:avLst/>
+          </a:prstGeom>
+          <a:noFill/>
+          <a:ln/>
+        </p:spPr>
+        <p:txBody>
+          <a:bodyPr wrap="square" lIns="0" tIns="0" rIns="0" bIns="0" rtlCol="0" anchor="ctr"/>
+          <a:lstStyle/>
+          <a:p>
+            <a:pPr algn="ctr" indent="0" marL="0">
+              <a:buNone/>
+            </a:pPr>
+            <a:r>
+              <a:rPr lang="en-US" sz="2400" b="1" dirty="0">
+                <a:solidFill>
+                  <a:srgbClr val="D9822B"/>
+                </a:solidFill>
+                <a:latin typeface="Arial" pitchFamily="34" charset="0"/>
+                <a:ea typeface="Arial" pitchFamily="34" charset="-122"/>
+                <a:cs typeface="Arial" pitchFamily="34" charset="-120"/>
+              </a:rPr>
+              <a:t>+</a:t>
+            </a:r>
+            <a:endParaRPr lang="en-US" sz="2400" dirty="0"/>
+          </a:p>
+        </p:txBody>
+      </p:sp>
+      <p:sp>
+        <p:nvSpPr>
+          <p:cNvPr id="26" name="Text 24"/>
+          <p:cNvSpPr txBox="1"/>
+          <p:nvPr/>
+        </p:nvSpPr>
+        <p:spPr>
+          <a:xfrm>
+            <a:off x="731520" y="2761488"/>
+            <a:ext cx="2587752" cy="594360"/>
+          </a:xfrm>
+          <a:prstGeom prst="rect">
+            <a:avLst/>
+          </a:prstGeom>
+          <a:noFill/>
+          <a:ln/>
+        </p:spPr>
+        <p:txBody>
+          <a:bodyPr wrap="square" lIns="0" tIns="0" rIns="0" bIns="0" rtlCol="0" anchor="ctr"/>
+          <a:lstStyle/>
+          <a:p>
+            <a:pPr rtl="1" algn="r" indent="0" marL="0">
+              <a:buNone/>
+            </a:pPr>
+            <a:r>
+              <a:rPr lang="he-IL" altLang="en-US" sz="1400" b="1" dirty="0">
+                <a:solidFill>
+                  <a:srgbClr val="14213D"/>
+                </a:solidFill>
+                <a:latin typeface="Arial" pitchFamily="34" charset="0"/>
+                <a:ea typeface="Arial" pitchFamily="34" charset="-122"/>
+                <a:cs typeface="Arial" pitchFamily="34" charset="-120"/>
+              </a:rPr>
+              <a:t>כוונת עזיבה של המקצוע</a:t>
+            </a:r>
+            <a:endParaRPr lang="he-IL" sz="1400" dirty="0"/>
+          </a:p>
+        </p:txBody>
+      </p:sp>
+      <p:sp>
+        <p:nvSpPr>
+          <p:cNvPr id="27" name="Shape 25"/>
           <p:cNvSpPr/>
           <p:nvPr/>
         </p:nvSpPr>
         <p:spPr>
           <a:xfrm>
-            <a:off x="3657600" y="3621024"/>
-            <a:ext cx="365760" cy="365760"/>
-          </a:xfrm>
-          <a:prstGeom prst="ellipse">
-            <a:avLst/>
+            <a:off x="548640" y="3602736"/>
+            <a:ext cx="3502152" cy="777240"/>
+          </a:xfrm>
+          <a:prstGeom prst="roundRect">
+            <a:avLst>
+              <a:gd name="adj" fmla="val 14118"/>
+            </a:avLst>
           </a:prstGeom>
           <a:solidFill>
-            <a:srgbClr val="FCA311"/>
+            <a:srgbClr val="FFF1D6"/>
           </a:solidFill>
           <a:ln w="12700">
             <a:solidFill>
-              <a:srgbClr val="FCA311"/>
-            </a:solidFill>
-            <a:prstDash val="solid"/>
-          </a:ln>
-        </p:spPr>
-      </p:sp>
-      <p:sp>
-        <p:nvSpPr>
-          <p:cNvPr id="29" name="Text 27"/>
-          <p:cNvSpPr txBox="1"/>
-          <p:nvPr/>
-        </p:nvSpPr>
-        <p:spPr>
-          <a:xfrm>
-            <a:off x="685800" y="3483864"/>
-            <a:ext cx="2880360" cy="347472"/>
-          </a:xfrm>
-          <a:prstGeom prst="rect">
-            <a:avLst/>
-          </a:prstGeom>
-          <a:noFill/>
-          <a:ln/>
-        </p:spPr>
-        <p:txBody>
-          <a:bodyPr wrap="square" lIns="0" tIns="0" rIns="0" bIns="0" rtlCol="0" anchor="t"/>
-          <a:lstStyle/>
-          <a:p>
-            <a:pPr rtl="1" algn="r" indent="0" marL="0">
-              <a:buNone/>
-            </a:pPr>
-            <a:r>
-              <a:rPr lang="he-IL" altLang="en-US" sz="1400" b="1" dirty="0">
-                <a:solidFill>
-                  <a:srgbClr val="14213D"/>
-                </a:solidFill>
-                <a:latin typeface="Arial" pitchFamily="34" charset="0"/>
-                <a:ea typeface="Arial" pitchFamily="34" charset="-122"/>
-                <a:cs typeface="Arial" pitchFamily="34" charset="-120"/>
-              </a:rPr>
-              <a:t>שימור המשרה</a:t>
-            </a:r>
-            <a:endParaRPr lang="he-IL" sz="1400" dirty="0"/>
-          </a:p>
-        </p:txBody>
-      </p:sp>
-      <p:sp>
-        <p:nvSpPr>
-          <p:cNvPr id="30" name="Text 28"/>
-          <p:cNvSpPr txBox="1"/>
-          <p:nvPr/>
-        </p:nvSpPr>
-        <p:spPr>
-          <a:xfrm>
-            <a:off x="685800" y="3813048"/>
-            <a:ext cx="2880360" cy="329184"/>
-          </a:xfrm>
-          <a:prstGeom prst="rect">
-            <a:avLst/>
-          </a:prstGeom>
-          <a:noFill/>
-          <a:ln/>
-        </p:spPr>
-        <p:txBody>
-          <a:bodyPr wrap="square" lIns="0" tIns="0" rIns="0" bIns="0" rtlCol="0" anchor="t"/>
-          <a:lstStyle/>
-          <a:p>
-            <a:pPr rtl="1" algn="r" indent="0" marL="0">
-              <a:buNone/>
-            </a:pPr>
-            <a:r>
-              <a:rPr lang="he-IL" altLang="en-US" sz="1100" dirty="0">
-                <a:solidFill>
-                  <a:srgbClr val="1F2937"/>
-                </a:solidFill>
-                <a:latin typeface="Arial" pitchFamily="34" charset="0"/>
-                <a:ea typeface="Arial" pitchFamily="34" charset="-122"/>
-                <a:cs typeface="Arial" pitchFamily="34" charset="-120"/>
-              </a:rPr>
-              <a:t>"להתכופף" – מאמץ ושתיקה</a:t>
-            </a:r>
-            <a:endParaRPr lang="he-IL" sz="1100" dirty="0"/>
-          </a:p>
-        </p:txBody>
-      </p:sp>
-      <p:sp>
-        <p:nvSpPr>
-          <p:cNvPr id="31" name="Shape 29"/>
-          <p:cNvSpPr/>
-          <p:nvPr/>
-        </p:nvSpPr>
-        <p:spPr>
-          <a:xfrm>
-            <a:off x="548640" y="4297680"/>
-            <a:ext cx="3566160" cy="749808"/>
-          </a:xfrm>
-          <a:prstGeom prst="roundRect">
-            <a:avLst>
-              <a:gd name="adj" fmla="val 14634"/>
-            </a:avLst>
-          </a:prstGeom>
-          <a:solidFill>
-            <a:srgbClr val="EEF2F8"/>
-          </a:solidFill>
-          <a:ln w="12700">
-            <a:solidFill>
-              <a:srgbClr val="EEF2F8"/>
+              <a:srgbClr val="FFF1D6"/>
             </a:solidFill>
             <a:prstDash val="solid"/>
           </a:ln>
@@ -14271,48 +13434,174 @@
       </p:sp>
       <p:sp>
         <p:nvSpPr>
-          <p:cNvPr id="32" name="Shape 30"/>
+          <p:cNvPr id="28" name="Text 26"/>
+          <p:cNvSpPr txBox="1"/>
+          <p:nvPr/>
+        </p:nvSpPr>
+        <p:spPr>
+          <a:xfrm>
+            <a:off x="3364992" y="3758184"/>
+            <a:ext cx="457200" cy="457200"/>
+          </a:xfrm>
+          <a:prstGeom prst="rect">
+            <a:avLst/>
+          </a:prstGeom>
+          <a:noFill/>
+          <a:ln/>
+        </p:spPr>
+        <p:txBody>
+          <a:bodyPr wrap="square" lIns="0" tIns="0" rIns="0" bIns="0" rtlCol="0" anchor="ctr"/>
+          <a:lstStyle/>
+          <a:p>
+            <a:pPr algn="ctr" indent="0" marL="0">
+              <a:buNone/>
+            </a:pPr>
+            <a:r>
+              <a:rPr lang="en-US" sz="2400" b="1" dirty="0">
+                <a:solidFill>
+                  <a:srgbClr val="D9822B"/>
+                </a:solidFill>
+                <a:latin typeface="Arial" pitchFamily="34" charset="0"/>
+                <a:ea typeface="Arial" pitchFamily="34" charset="-122"/>
+                <a:cs typeface="Arial" pitchFamily="34" charset="-120"/>
+              </a:rPr>
+              <a:t>+</a:t>
+            </a:r>
+            <a:endParaRPr lang="en-US" sz="2400" dirty="0"/>
+          </a:p>
+        </p:txBody>
+      </p:sp>
+      <p:sp>
+        <p:nvSpPr>
+          <p:cNvPr id="29" name="Text 27"/>
+          <p:cNvSpPr txBox="1"/>
+          <p:nvPr/>
+        </p:nvSpPr>
+        <p:spPr>
+          <a:xfrm>
+            <a:off x="731520" y="3694176"/>
+            <a:ext cx="2587752" cy="594360"/>
+          </a:xfrm>
+          <a:prstGeom prst="rect">
+            <a:avLst/>
+          </a:prstGeom>
+          <a:noFill/>
+          <a:ln/>
+        </p:spPr>
+        <p:txBody>
+          <a:bodyPr wrap="square" lIns="0" tIns="0" rIns="0" bIns="0" rtlCol="0" anchor="ctr"/>
+          <a:lstStyle/>
+          <a:p>
+            <a:pPr rtl="1" algn="r" indent="0" marL="0">
+              <a:buNone/>
+            </a:pPr>
+            <a:r>
+              <a:rPr lang="he-IL" altLang="en-US" sz="1400" b="1" dirty="0">
+                <a:solidFill>
+                  <a:srgbClr val="14213D"/>
+                </a:solidFill>
+                <a:latin typeface="Arial" pitchFamily="34" charset="0"/>
+                <a:ea typeface="Arial" pitchFamily="34" charset="-122"/>
+                <a:cs typeface="Arial" pitchFamily="34" charset="-120"/>
+              </a:rPr>
+              <a:t>חיפוש עבודה</a:t>
+            </a:r>
+            <a:endParaRPr lang="he-IL" sz="1400" dirty="0"/>
+          </a:p>
+        </p:txBody>
+      </p:sp>
+      <p:sp>
+        <p:nvSpPr>
+          <p:cNvPr id="30" name="Shape 28"/>
           <p:cNvSpPr/>
           <p:nvPr/>
         </p:nvSpPr>
         <p:spPr>
           <a:xfrm>
-            <a:off x="3657600" y="4489704"/>
-            <a:ext cx="365760" cy="365760"/>
-          </a:xfrm>
-          <a:prstGeom prst="ellipse">
-            <a:avLst/>
+            <a:off x="548640" y="4535424"/>
+            <a:ext cx="3502152" cy="777240"/>
+          </a:xfrm>
+          <a:prstGeom prst="roundRect">
+            <a:avLst>
+              <a:gd name="adj" fmla="val 14118"/>
+            </a:avLst>
           </a:prstGeom>
           <a:solidFill>
-            <a:srgbClr val="2A9D8F"/>
+            <a:srgbClr val="FFF1D6"/>
           </a:solidFill>
           <a:ln w="12700">
             <a:solidFill>
-              <a:srgbClr val="2A9D8F"/>
+              <a:srgbClr val="FFF1D6"/>
             </a:solidFill>
             <a:prstDash val="solid"/>
           </a:ln>
-        </p:spPr>
-      </p:sp>
-      <p:sp>
-        <p:nvSpPr>
-          <p:cNvPr id="33" name="Text 31"/>
-          <p:cNvSpPr txBox="1"/>
-          <p:nvPr/>
-        </p:nvSpPr>
-        <p:spPr>
-          <a:xfrm>
-            <a:off x="685800" y="4352544"/>
-            <a:ext cx="2880360" cy="347472"/>
-          </a:xfrm>
-          <a:prstGeom prst="rect">
-            <a:avLst/>
-          </a:prstGeom>
-          <a:noFill/>
-          <a:ln/>
-        </p:spPr>
-        <p:txBody>
-          <a:bodyPr wrap="square" lIns="0" tIns="0" rIns="0" bIns="0" rtlCol="0" anchor="t"/>
+          <a:effectLst>
+            <a:outerShdw sx="100000" sy="100000" kx="0" ky="0" algn="bl" rotWithShape="0" blurRad="50800" dist="25400" dir="5400000">
+              <a:srgbClr val="000000">
+                <a:alpha val="12000"/>
+              </a:srgbClr>
+            </a:outerShdw>
+          </a:effectLst>
+        </p:spPr>
+      </p:sp>
+      <p:sp>
+        <p:nvSpPr>
+          <p:cNvPr id="31" name="Text 29"/>
+          <p:cNvSpPr txBox="1"/>
+          <p:nvPr/>
+        </p:nvSpPr>
+        <p:spPr>
+          <a:xfrm>
+            <a:off x="3364992" y="4690872"/>
+            <a:ext cx="457200" cy="457200"/>
+          </a:xfrm>
+          <a:prstGeom prst="rect">
+            <a:avLst/>
+          </a:prstGeom>
+          <a:noFill/>
+          <a:ln/>
+        </p:spPr>
+        <p:txBody>
+          <a:bodyPr wrap="square" lIns="0" tIns="0" rIns="0" bIns="0" rtlCol="0" anchor="ctr"/>
+          <a:lstStyle/>
+          <a:p>
+            <a:pPr algn="ctr" indent="0" marL="0">
+              <a:buNone/>
+            </a:pPr>
+            <a:r>
+              <a:rPr lang="en-US" sz="2400" b="1" dirty="0">
+                <a:solidFill>
+                  <a:srgbClr val="D9822B"/>
+                </a:solidFill>
+                <a:latin typeface="Arial" pitchFamily="34" charset="0"/>
+                <a:ea typeface="Arial" pitchFamily="34" charset="-122"/>
+                <a:cs typeface="Arial" pitchFamily="34" charset="-120"/>
+              </a:rPr>
+              <a:t>+</a:t>
+            </a:r>
+            <a:endParaRPr lang="en-US" sz="2400" dirty="0"/>
+          </a:p>
+        </p:txBody>
+      </p:sp>
+      <p:sp>
+        <p:nvSpPr>
+          <p:cNvPr id="32" name="Text 30"/>
+          <p:cNvSpPr txBox="1"/>
+          <p:nvPr/>
+        </p:nvSpPr>
+        <p:spPr>
+          <a:xfrm>
+            <a:off x="731520" y="4626864"/>
+            <a:ext cx="2587752" cy="594360"/>
+          </a:xfrm>
+          <a:prstGeom prst="rect">
+            <a:avLst/>
+          </a:prstGeom>
+          <a:noFill/>
+          <a:ln/>
+        </p:spPr>
+        <p:txBody>
+          <a:bodyPr wrap="square" lIns="0" tIns="0" rIns="0" bIns="0" rtlCol="0" anchor="ctr"/>
           <a:lstStyle/>
           <a:p>
             <a:pPr rtl="1" algn="r" indent="0" marL="0">
@@ -14327,7 +13616,7 @@
                 <a:ea typeface="Arial" pitchFamily="34" charset="-122"/>
                 <a:cs typeface="Arial" pitchFamily="34" charset="-120"/>
               </a:rPr>
-              <a:t>התמודדות פרואקטיבית</a:t>
+              <a:t>הסתרת ידע מעמיתים</a:t>
             </a:r>
             <a:endParaRPr lang="he-IL" sz="1400" dirty="0"/>
           </a:p>
@@ -14335,57 +13624,43 @@
       </p:sp>
       <p:sp>
         <p:nvSpPr>
-          <p:cNvPr id="34" name="Text 32"/>
-          <p:cNvSpPr txBox="1"/>
-          <p:nvPr/>
-        </p:nvSpPr>
-        <p:spPr>
-          <a:xfrm>
-            <a:off x="685800" y="4681728"/>
-            <a:ext cx="2880360" cy="329184"/>
-          </a:xfrm>
-          <a:prstGeom prst="rect">
-            <a:avLst/>
-          </a:prstGeom>
-          <a:noFill/>
-          <a:ln/>
-        </p:spPr>
-        <p:txBody>
-          <a:bodyPr wrap="square" lIns="0" tIns="0" rIns="0" bIns="0" rtlCol="0" anchor="t"/>
-          <a:lstStyle/>
-          <a:p>
-            <a:pPr rtl="1" algn="r" indent="0" marL="0">
-              <a:buNone/>
-            </a:pPr>
-            <a:r>
-              <a:rPr lang="he-IL" altLang="en-US" sz="1100" dirty="0">
-                <a:solidFill>
-                  <a:srgbClr val="1F2937"/>
-                </a:solidFill>
-                <a:latin typeface="Arial" pitchFamily="34" charset="0"/>
-                <a:ea typeface="Arial" pitchFamily="34" charset="-122"/>
-                <a:cs typeface="Arial" pitchFamily="34" charset="-120"/>
-              </a:rPr>
-              <a:t>למידה, נטוורקינג, תוכנית ב'</a:t>
-            </a:r>
-            <a:endParaRPr lang="he-IL" sz="1100" dirty="0"/>
-          </a:p>
-        </p:txBody>
-      </p:sp>
-      <p:sp>
-        <p:nvSpPr>
-          <p:cNvPr id="35" name="Shape 33"/>
+          <p:cNvPr id="33" name="Shape 31"/>
           <p:cNvSpPr/>
           <p:nvPr/>
         </p:nvSpPr>
         <p:spPr>
           <a:xfrm>
-            <a:off x="548640" y="5257800"/>
-            <a:ext cx="11091672" cy="1005840"/>
+            <a:off x="4114800" y="2743200"/>
+            <a:ext cx="777240" cy="548640"/>
+          </a:xfrm>
+          <a:prstGeom prst="leftArrow">
+            <a:avLst/>
+          </a:prstGeom>
+          <a:solidFill>
+            <a:srgbClr val="D9822B"/>
+          </a:solidFill>
+          <a:ln w="12700">
+            <a:solidFill>
+              <a:srgbClr val="D9822B"/>
+            </a:solidFill>
+            <a:prstDash val="solid"/>
+          </a:ln>
+        </p:spPr>
+      </p:sp>
+      <p:sp>
+        <p:nvSpPr>
+          <p:cNvPr id="34" name="Shape 32"/>
+          <p:cNvSpPr/>
+          <p:nvPr/>
+        </p:nvSpPr>
+        <p:spPr>
+          <a:xfrm>
+            <a:off x="548640" y="5532120"/>
+            <a:ext cx="11091672" cy="731520"/>
           </a:xfrm>
           <a:prstGeom prst="roundRect">
             <a:avLst>
-              <a:gd name="adj" fmla="val 10909"/>
+              <a:gd name="adj" fmla="val 15000"/>
             </a:avLst>
           </a:prstGeom>
           <a:solidFill>
@@ -14408,85 +13683,46 @@
       </p:sp>
       <p:sp>
         <p:nvSpPr>
+          <p:cNvPr id="35" name="Text 33"/>
+          <p:cNvSpPr txBox="1"/>
+          <p:nvPr/>
+        </p:nvSpPr>
+        <p:spPr>
+          <a:xfrm>
+            <a:off x="822960" y="5577840"/>
+            <a:ext cx="10515600" cy="640080"/>
+          </a:xfrm>
+          <a:prstGeom prst="rect">
+            <a:avLst/>
+          </a:prstGeom>
+          <a:noFill/>
+          <a:ln/>
+        </p:spPr>
+        <p:txBody>
+          <a:bodyPr wrap="square" lIns="0" tIns="0" rIns="0" bIns="0" rtlCol="0" anchor="ctr"/>
+          <a:lstStyle/>
+          <a:p>
+            <a:pPr rtl="1" algn="r" indent="0" marL="0">
+              <a:buNone/>
+            </a:pPr>
+            <a:r>
+              <a:rPr lang="he-IL" altLang="en-US" sz="1500" b="1" dirty="0">
+                <a:solidFill>
+                  <a:srgbClr val="14213D"/>
+                </a:solidFill>
+                <a:latin typeface="Arial" pitchFamily="34" charset="0"/>
+                <a:ea typeface="Arial" pitchFamily="34" charset="-122"/>
+                <a:cs typeface="Arial" pitchFamily="34" charset="-120"/>
+              </a:rPr>
+              <a:t>התשובה: הלאה, לא למעלה. הפחד גורם לברוח ולהסתיר, לא להתפתח (Låstad et al., 2025)</a:t>
+            </a:r>
+            <a:endParaRPr lang="he-IL" sz="1500" dirty="0"/>
+          </a:p>
+        </p:txBody>
+      </p:sp>
+      <p:sp>
+        <p:nvSpPr>
           <p:cNvPr id="36" name="Text 34"/>
-          <p:cNvSpPr txBox="1"/>
-          <p:nvPr/>
-        </p:nvSpPr>
-        <p:spPr>
-          <a:xfrm>
-            <a:off x="822960" y="5303520"/>
-            <a:ext cx="10515600" cy="365760"/>
-          </a:xfrm>
-          <a:prstGeom prst="rect">
-            <a:avLst/>
-          </a:prstGeom>
-          <a:noFill/>
-          <a:ln/>
-        </p:spPr>
-        <p:txBody>
-          <a:bodyPr wrap="square" lIns="0" tIns="0" rIns="0" bIns="0" rtlCol="0" anchor="t"/>
-          <a:lstStyle/>
-          <a:p>
-            <a:pPr rtl="1" algn="r" indent="0" marL="0">
-              <a:buNone/>
-            </a:pPr>
-            <a:r>
-              <a:rPr lang="he-IL" altLang="en-US" sz="1400" b="1" dirty="0">
-                <a:solidFill>
-                  <a:srgbClr val="14213D"/>
-                </a:solidFill>
-                <a:latin typeface="Arial" pitchFamily="34" charset="0"/>
-                <a:ea typeface="Arial" pitchFamily="34" charset="-122"/>
-                <a:cs typeface="Arial" pitchFamily="34" charset="-120"/>
-              </a:rPr>
-              <a:t>משתנים ממתנים – מה קובע את עוצמת התגובה?</a:t>
-            </a:r>
-            <a:endParaRPr lang="he-IL" sz="1400" dirty="0"/>
-          </a:p>
-        </p:txBody>
-      </p:sp>
-      <p:sp>
-        <p:nvSpPr>
-          <p:cNvPr id="37" name="Text 35"/>
-          <p:cNvSpPr txBox="1"/>
-          <p:nvPr/>
-        </p:nvSpPr>
-        <p:spPr>
-          <a:xfrm>
-            <a:off x="822960" y="5669280"/>
-            <a:ext cx="10515600" cy="502920"/>
-          </a:xfrm>
-          <a:prstGeom prst="rect">
-            <a:avLst/>
-          </a:prstGeom>
-          <a:noFill/>
-          <a:ln/>
-        </p:spPr>
-        <p:txBody>
-          <a:bodyPr wrap="square" lIns="0" tIns="0" rIns="0" bIns="0" rtlCol="0" anchor="t"/>
-          <a:lstStyle/>
-          <a:p>
-            <a:pPr rtl="1" algn="r" indent="0" marL="0">
-              <a:buNone/>
-            </a:pPr>
-            <a:r>
-              <a:rPr lang="he-IL" altLang="en-US" sz="1300" dirty="0">
-                <a:solidFill>
-                  <a:srgbClr val="1F2937"/>
-                </a:solidFill>
-                <a:latin typeface="Arial" pitchFamily="34" charset="0"/>
-                <a:ea typeface="Arial" pitchFamily="34" charset="-122"/>
-                <a:cs typeface="Arial" pitchFamily="34" charset="-120"/>
-              </a:rPr>
-              <a:t>מאפייני האיום (הסתברות, חומרה, שליטה)   •   פגיעוּת כלכלית (כרית, תלות, יכולת תעסוקה)   •   פגיעוּת פסיכולוגית (מסוגלות, תמיכה, זהות)</a:t>
-            </a:r>
-            <a:endParaRPr lang="he-IL" sz="1300" dirty="0"/>
-          </a:p>
-        </p:txBody>
-      </p:sp>
-      <p:sp>
-        <p:nvSpPr>
-          <p:cNvPr id="38" name="Text 36"/>
           <p:cNvSpPr txBox="1"/>
           <p:nvPr/>
         </p:nvSpPr>
@@ -14525,7 +13761,7 @@
       </p:sp>
       <p:sp>
         <p:nvSpPr>
-          <p:cNvPr id="39" name="Text 37"/>
+          <p:cNvPr id="37" name="Text 35"/>
           <p:cNvSpPr txBox="1"/>
           <p:nvPr/>
         </p:nvSpPr>
@@ -14612,7 +13848,7 @@
               <a:buNone/>
             </a:pPr>
             <a:r>
-              <a:rPr lang="he-IL" altLang="en-US" sz="3200" b="1" dirty="0">
+              <a:rPr lang="he-IL" altLang="en-US" sz="3000" b="1" dirty="0">
                 <a:solidFill>
                   <a:srgbClr val="14213D"/>
                 </a:solidFill>
@@ -14620,9 +13856,9 @@
                 <a:ea typeface="Arial" pitchFamily="34" charset="-122"/>
                 <a:cs typeface="Arial" pitchFamily="34" charset="-120"/>
               </a:rPr>
-              <a:t>ארבעת המנגנונים: למה אותו עובד גם "מתכופף" וגם שולח קורות חיים?</a:t>
-            </a:r>
-            <a:endParaRPr lang="he-IL" sz="3200" dirty="0"/>
+              <a:t>איך בדקו? ומה משנה את עוצמת הקשר?</a:t>
+            </a:r>
+            <a:endParaRPr lang="he-IL" sz="3000" dirty="0"/>
           </a:p>
         </p:txBody>
       </p:sp>
@@ -14634,12 +13870,12 @@
         </p:nvSpPr>
         <p:spPr>
           <a:xfrm>
-            <a:off x="8988552" y="1371600"/>
-            <a:ext cx="2651760" cy="3840480"/>
+            <a:off x="8074152" y="1371600"/>
+            <a:ext cx="3566160" cy="2103120"/>
           </a:xfrm>
           <a:prstGeom prst="roundRect">
             <a:avLst>
-              <a:gd name="adj" fmla="val 4138"/>
+              <a:gd name="adj" fmla="val 5217"/>
             </a:avLst>
           </a:prstGeom>
           <a:solidFill>
@@ -14662,199 +13898,96 @@
       </p:sp>
       <p:sp>
         <p:nvSpPr>
-          <p:cNvPr id="4" name="Shape 2"/>
+          <p:cNvPr id="4" name="Text 2"/>
+          <p:cNvSpPr txBox="1"/>
+          <p:nvPr/>
+        </p:nvSpPr>
+        <p:spPr>
+          <a:xfrm>
+            <a:off x="8257032" y="1554480"/>
+            <a:ext cx="3200400" cy="914400"/>
+          </a:xfrm>
+          <a:prstGeom prst="rect">
+            <a:avLst/>
+          </a:prstGeom>
+          <a:noFill/>
+          <a:ln/>
+        </p:spPr>
+        <p:txBody>
+          <a:bodyPr wrap="square" lIns="0" tIns="0" rIns="0" bIns="0" rtlCol="0" anchor="ctr"/>
+          <a:lstStyle/>
+          <a:p>
+            <a:pPr rtl="1" algn="ctr" indent="0" marL="0">
+              <a:buNone/>
+            </a:pPr>
+            <a:r>
+              <a:rPr lang="he-IL" altLang="en-US" sz="4800" b="1" dirty="0">
+                <a:solidFill>
+                  <a:srgbClr val="E76F51"/>
+                </a:solidFill>
+                <a:latin typeface="Arial" pitchFamily="34" charset="0"/>
+                <a:ea typeface="Arial" pitchFamily="34" charset="-122"/>
+                <a:cs typeface="Arial" pitchFamily="34" charset="-120"/>
+              </a:rPr>
+              <a:t>237</a:t>
+            </a:r>
+            <a:endParaRPr lang="he-IL" sz="4800" dirty="0"/>
+          </a:p>
+        </p:txBody>
+      </p:sp>
+      <p:sp>
+        <p:nvSpPr>
+          <p:cNvPr id="5" name="Text 3"/>
+          <p:cNvSpPr txBox="1"/>
+          <p:nvPr/>
+        </p:nvSpPr>
+        <p:spPr>
+          <a:xfrm>
+            <a:off x="8348472" y="2514600"/>
+            <a:ext cx="3017520" cy="868680"/>
+          </a:xfrm>
+          <a:prstGeom prst="rect">
+            <a:avLst/>
+          </a:prstGeom>
+          <a:noFill/>
+          <a:ln/>
+        </p:spPr>
+        <p:txBody>
+          <a:bodyPr wrap="square" lIns="0" tIns="0" rIns="0" bIns="0" rtlCol="0" anchor="t"/>
+          <a:lstStyle/>
+          <a:p>
+            <a:pPr rtl="1" algn="ctr" indent="0" marL="0">
+              <a:buNone/>
+            </a:pPr>
+            <a:r>
+              <a:rPr lang="he-IL" altLang="en-US" sz="1400" dirty="0">
+                <a:solidFill>
+                  <a:srgbClr val="1F2937"/>
+                </a:solidFill>
+                <a:latin typeface="Arial" pitchFamily="34" charset="0"/>
+                <a:ea typeface="Arial" pitchFamily="34" charset="-122"/>
+                <a:cs typeface="Arial" pitchFamily="34" charset="-120"/>
+              </a:rPr>
+              <a:t>מחקרים ראשוניים קודדו ואוחדו סטטיסטית</a:t>
+            </a:r>
+            <a:endParaRPr lang="he-IL" sz="1400" dirty="0"/>
+          </a:p>
+        </p:txBody>
+      </p:sp>
+      <p:sp>
+        <p:nvSpPr>
+          <p:cNvPr id="6" name="Shape 4"/>
           <p:cNvSpPr/>
           <p:nvPr/>
         </p:nvSpPr>
         <p:spPr>
           <a:xfrm>
-            <a:off x="9948672" y="1645920"/>
-            <a:ext cx="731520" cy="731520"/>
-          </a:xfrm>
-          <a:prstGeom prst="ellipse">
-            <a:avLst/>
-          </a:prstGeom>
-          <a:solidFill>
-            <a:srgbClr val="E76F51"/>
-          </a:solidFill>
-          <a:ln w="12700">
-            <a:solidFill>
-              <a:srgbClr val="E76F51"/>
-            </a:solidFill>
-            <a:prstDash val="solid"/>
-          </a:ln>
-        </p:spPr>
-      </p:sp>
-      <p:sp>
-        <p:nvSpPr>
-          <p:cNvPr id="5" name="Text 3"/>
-          <p:cNvSpPr txBox="1"/>
-          <p:nvPr/>
-        </p:nvSpPr>
-        <p:spPr>
-          <a:xfrm>
-            <a:off x="9948672" y="1645920"/>
-            <a:ext cx="731520" cy="731520"/>
-          </a:xfrm>
-          <a:prstGeom prst="rect">
-            <a:avLst/>
-          </a:prstGeom>
-          <a:noFill/>
-          <a:ln/>
-        </p:spPr>
-        <p:txBody>
-          <a:bodyPr wrap="square" lIns="0" tIns="0" rIns="0" bIns="0" rtlCol="0" anchor="ctr"/>
-          <a:lstStyle/>
-          <a:p>
-            <a:pPr algn="ctr" indent="0" marL="0">
-              <a:buNone/>
-            </a:pPr>
-            <a:r>
-              <a:rPr lang="en-US" sz="2600" b="1" dirty="0">
-                <a:solidFill>
-                  <a:srgbClr val="FFFFFF"/>
-                </a:solidFill>
-                <a:latin typeface="Arial" pitchFamily="34" charset="0"/>
-                <a:ea typeface="Arial" pitchFamily="34" charset="-122"/>
-                <a:cs typeface="Arial" pitchFamily="34" charset="-120"/>
-              </a:rPr>
-              <a:t>1</a:t>
-            </a:r>
-            <a:endParaRPr lang="en-US" sz="2600" dirty="0"/>
-          </a:p>
-        </p:txBody>
-      </p:sp>
-      <p:sp>
-        <p:nvSpPr>
-          <p:cNvPr id="6" name="Text 4"/>
-          <p:cNvSpPr txBox="1"/>
-          <p:nvPr/>
-        </p:nvSpPr>
-        <p:spPr>
-          <a:xfrm>
-            <a:off x="9125712" y="2514600"/>
-            <a:ext cx="2377440" cy="457200"/>
-          </a:xfrm>
-          <a:prstGeom prst="rect">
-            <a:avLst/>
-          </a:prstGeom>
-          <a:noFill/>
-          <a:ln/>
-        </p:spPr>
-        <p:txBody>
-          <a:bodyPr wrap="square" lIns="0" tIns="0" rIns="0" bIns="0" rtlCol="0" anchor="ctr"/>
-          <a:lstStyle/>
-          <a:p>
-            <a:pPr rtl="1" algn="ctr" indent="0" marL="0">
-              <a:buNone/>
-            </a:pPr>
-            <a:r>
-              <a:rPr lang="he-IL" altLang="en-US" sz="1500" b="1" dirty="0">
-                <a:solidFill>
-                  <a:srgbClr val="14213D"/>
-                </a:solidFill>
-                <a:latin typeface="Arial" pitchFamily="34" charset="0"/>
-                <a:ea typeface="Arial" pitchFamily="34" charset="-122"/>
-                <a:cs typeface="Arial" pitchFamily="34" charset="-120"/>
-              </a:rPr>
-              <a:t>לחץ</a:t>
-            </a:r>
-            <a:endParaRPr lang="he-IL" sz="1500" dirty="0"/>
-          </a:p>
-        </p:txBody>
-      </p:sp>
-      <p:sp>
-        <p:nvSpPr>
-          <p:cNvPr id="7" name="Text 5"/>
-          <p:cNvSpPr txBox="1"/>
-          <p:nvPr/>
-        </p:nvSpPr>
-        <p:spPr>
-          <a:xfrm>
-            <a:off x="9171432" y="2999232"/>
-            <a:ext cx="2286000" cy="320040"/>
-          </a:xfrm>
-          <a:prstGeom prst="rect">
-            <a:avLst/>
-          </a:prstGeom>
-          <a:noFill/>
-          <a:ln/>
-        </p:spPr>
-        <p:txBody>
-          <a:bodyPr wrap="square" lIns="0" tIns="0" rIns="0" bIns="0" rtlCol="0" anchor="ctr"/>
-          <a:lstStyle/>
-          <a:p>
-            <a:pPr algn="ctr" indent="0" marL="0">
-              <a:buNone/>
-            </a:pPr>
-            <a:r>
-              <a:rPr lang="en-US" sz="1200" i="1" dirty="0">
-                <a:solidFill>
-                  <a:srgbClr val="6B7280"/>
-                </a:solidFill>
-                <a:latin typeface="Arial" pitchFamily="34" charset="0"/>
-                <a:ea typeface="Arial" pitchFamily="34" charset="-122"/>
-                <a:cs typeface="Arial" pitchFamily="34" charset="-120"/>
-              </a:rPr>
-              <a:t>Stress</a:t>
-            </a:r>
-            <a:endParaRPr lang="en-US" sz="1200" dirty="0"/>
-          </a:p>
-        </p:txBody>
-      </p:sp>
-      <p:sp>
-        <p:nvSpPr>
-          <p:cNvPr id="8" name="Text 6"/>
-          <p:cNvSpPr txBox="1"/>
-          <p:nvPr/>
-        </p:nvSpPr>
-        <p:spPr>
-          <a:xfrm>
-            <a:off x="9171432" y="3383280"/>
-            <a:ext cx="2286000" cy="1737360"/>
-          </a:xfrm>
-          <a:prstGeom prst="rect">
-            <a:avLst/>
-          </a:prstGeom>
-          <a:noFill/>
-          <a:ln/>
-        </p:spPr>
-        <p:txBody>
-          <a:bodyPr wrap="square" lIns="0" tIns="0" rIns="0" bIns="0" rtlCol="0" anchor="t"/>
-          <a:lstStyle/>
-          <a:p>
-            <a:pPr rtl="1" algn="r" indent="0" marL="0">
-              <a:buNone/>
-            </a:pPr>
-            <a:r>
-              <a:rPr lang="he-IL" altLang="en-US" sz="1250" dirty="0">
-                <a:solidFill>
-                  <a:srgbClr val="1F2937"/>
-                </a:solidFill>
-                <a:latin typeface="Arial" pitchFamily="34" charset="0"/>
-                <a:ea typeface="Arial" pitchFamily="34" charset="-122"/>
-                <a:cs typeface="Arial" pitchFamily="34" charset="-120"/>
-              </a:rPr>
-              <a:t>האיום הצפוי מדלדל משאבים (הכנסה, מעמד, זהות) עוד לפני שמשהו קרה → מתח, שחיקה, בעיות שינה, השלכות על המשפחה</a:t>
-            </a:r>
-            <a:endParaRPr lang="he-IL" sz="1250" dirty="0"/>
-          </a:p>
-        </p:txBody>
-      </p:sp>
-      <p:sp>
-        <p:nvSpPr>
-          <p:cNvPr id="9" name="Shape 7"/>
-          <p:cNvSpPr/>
-          <p:nvPr/>
-        </p:nvSpPr>
-        <p:spPr>
-          <a:xfrm>
-            <a:off x="6172200" y="1371600"/>
-            <a:ext cx="2651760" cy="3840480"/>
+            <a:off x="4311396" y="1371600"/>
+            <a:ext cx="3566160" cy="2103120"/>
           </a:xfrm>
           <a:prstGeom prst="roundRect">
             <a:avLst>
-              <a:gd name="adj" fmla="val 4138"/>
+              <a:gd name="adj" fmla="val 5217"/>
             </a:avLst>
           </a:prstGeom>
           <a:solidFill>
@@ -14877,199 +14010,96 @@
       </p:sp>
       <p:sp>
         <p:nvSpPr>
-          <p:cNvPr id="10" name="Shape 8"/>
+          <p:cNvPr id="7" name="Text 5"/>
+          <p:cNvSpPr txBox="1"/>
+          <p:nvPr/>
+        </p:nvSpPr>
+        <p:spPr>
+          <a:xfrm>
+            <a:off x="4494276" y="1554480"/>
+            <a:ext cx="3200400" cy="914400"/>
+          </a:xfrm>
+          <a:prstGeom prst="rect">
+            <a:avLst/>
+          </a:prstGeom>
+          <a:noFill/>
+          <a:ln/>
+        </p:spPr>
+        <p:txBody>
+          <a:bodyPr wrap="square" lIns="0" tIns="0" rIns="0" bIns="0" rtlCol="0" anchor="ctr"/>
+          <a:lstStyle/>
+          <a:p>
+            <a:pPr rtl="1" algn="ctr" indent="0" marL="0">
+              <a:buNone/>
+            </a:pPr>
+            <a:r>
+              <a:rPr lang="he-IL" altLang="en-US" sz="4800" b="1" dirty="0">
+                <a:solidFill>
+                  <a:srgbClr val="E76F51"/>
+                </a:solidFill>
+                <a:latin typeface="Arial" pitchFamily="34" charset="0"/>
+                <a:ea typeface="Arial" pitchFamily="34" charset="-122"/>
+                <a:cs typeface="Arial" pitchFamily="34" charset="-120"/>
+              </a:rPr>
+              <a:t>8</a:t>
+            </a:r>
+            <a:endParaRPr lang="he-IL" sz="4800" dirty="0"/>
+          </a:p>
+        </p:txBody>
+      </p:sp>
+      <p:sp>
+        <p:nvSpPr>
+          <p:cNvPr id="8" name="Text 6"/>
+          <p:cNvSpPr txBox="1"/>
+          <p:nvPr/>
+        </p:nvSpPr>
+        <p:spPr>
+          <a:xfrm>
+            <a:off x="4585716" y="2514600"/>
+            <a:ext cx="3017520" cy="868680"/>
+          </a:xfrm>
+          <a:prstGeom prst="rect">
+            <a:avLst/>
+          </a:prstGeom>
+          <a:noFill/>
+          <a:ln/>
+        </p:spPr>
+        <p:txBody>
+          <a:bodyPr wrap="square" lIns="0" tIns="0" rIns="0" bIns="0" rtlCol="0" anchor="t"/>
+          <a:lstStyle/>
+          <a:p>
+            <a:pPr rtl="1" algn="ctr" indent="0" marL="0">
+              <a:buNone/>
+            </a:pPr>
+            <a:r>
+              <a:rPr lang="he-IL" altLang="en-US" sz="1400" dirty="0">
+                <a:solidFill>
+                  <a:srgbClr val="1F2937"/>
+                </a:solidFill>
+                <a:latin typeface="Arial" pitchFamily="34" charset="0"/>
+                <a:ea typeface="Arial" pitchFamily="34" charset="-122"/>
+                <a:cs typeface="Arial" pitchFamily="34" charset="-120"/>
+              </a:rPr>
+              <a:t>תוצאות קריירה בשלוש קבוצות: עמדות, התנהגויות, כוונות</a:t>
+            </a:r>
+            <a:endParaRPr lang="he-IL" sz="1400" dirty="0"/>
+          </a:p>
+        </p:txBody>
+      </p:sp>
+      <p:sp>
+        <p:nvSpPr>
+          <p:cNvPr id="9" name="Shape 7"/>
           <p:cNvSpPr/>
           <p:nvPr/>
         </p:nvSpPr>
         <p:spPr>
           <a:xfrm>
-            <a:off x="7132320" y="1645920"/>
-            <a:ext cx="731520" cy="731520"/>
-          </a:xfrm>
-          <a:prstGeom prst="ellipse">
-            <a:avLst/>
-          </a:prstGeom>
-          <a:solidFill>
-            <a:srgbClr val="E76F51"/>
-          </a:solidFill>
-          <a:ln w="12700">
-            <a:solidFill>
-              <a:srgbClr val="E76F51"/>
-            </a:solidFill>
-            <a:prstDash val="solid"/>
-          </a:ln>
-        </p:spPr>
-      </p:sp>
-      <p:sp>
-        <p:nvSpPr>
-          <p:cNvPr id="11" name="Text 9"/>
-          <p:cNvSpPr txBox="1"/>
-          <p:nvPr/>
-        </p:nvSpPr>
-        <p:spPr>
-          <a:xfrm>
-            <a:off x="7132320" y="1645920"/>
-            <a:ext cx="731520" cy="731520"/>
-          </a:xfrm>
-          <a:prstGeom prst="rect">
-            <a:avLst/>
-          </a:prstGeom>
-          <a:noFill/>
-          <a:ln/>
-        </p:spPr>
-        <p:txBody>
-          <a:bodyPr wrap="square" lIns="0" tIns="0" rIns="0" bIns="0" rtlCol="0" anchor="ctr"/>
-          <a:lstStyle/>
-          <a:p>
-            <a:pPr algn="ctr" indent="0" marL="0">
-              <a:buNone/>
-            </a:pPr>
-            <a:r>
-              <a:rPr lang="en-US" sz="2600" b="1" dirty="0">
-                <a:solidFill>
-                  <a:srgbClr val="FFFFFF"/>
-                </a:solidFill>
-                <a:latin typeface="Arial" pitchFamily="34" charset="0"/>
-                <a:ea typeface="Arial" pitchFamily="34" charset="-122"/>
-                <a:cs typeface="Arial" pitchFamily="34" charset="-120"/>
-              </a:rPr>
-              <a:t>2</a:t>
-            </a:r>
-            <a:endParaRPr lang="en-US" sz="2600" dirty="0"/>
-          </a:p>
-        </p:txBody>
-      </p:sp>
-      <p:sp>
-        <p:nvSpPr>
-          <p:cNvPr id="12" name="Text 10"/>
-          <p:cNvSpPr txBox="1"/>
-          <p:nvPr/>
-        </p:nvSpPr>
-        <p:spPr>
-          <a:xfrm>
-            <a:off x="6309360" y="2514600"/>
-            <a:ext cx="2377440" cy="457200"/>
-          </a:xfrm>
-          <a:prstGeom prst="rect">
-            <a:avLst/>
-          </a:prstGeom>
-          <a:noFill/>
-          <a:ln/>
-        </p:spPr>
-        <p:txBody>
-          <a:bodyPr wrap="square" lIns="0" tIns="0" rIns="0" bIns="0" rtlCol="0" anchor="ctr"/>
-          <a:lstStyle/>
-          <a:p>
-            <a:pPr rtl="1" algn="ctr" indent="0" marL="0">
-              <a:buNone/>
-            </a:pPr>
-            <a:r>
-              <a:rPr lang="he-IL" altLang="en-US" sz="1500" b="1" dirty="0">
-                <a:solidFill>
-                  <a:srgbClr val="14213D"/>
-                </a:solidFill>
-                <a:latin typeface="Arial" pitchFamily="34" charset="0"/>
-                <a:ea typeface="Arial" pitchFamily="34" charset="-122"/>
-                <a:cs typeface="Arial" pitchFamily="34" charset="-120"/>
-              </a:rPr>
-              <a:t>חליפין חברתי</a:t>
-            </a:r>
-            <a:endParaRPr lang="he-IL" sz="1500" dirty="0"/>
-          </a:p>
-        </p:txBody>
-      </p:sp>
-      <p:sp>
-        <p:nvSpPr>
-          <p:cNvPr id="13" name="Text 11"/>
-          <p:cNvSpPr txBox="1"/>
-          <p:nvPr/>
-        </p:nvSpPr>
-        <p:spPr>
-          <a:xfrm>
-            <a:off x="6355080" y="2999232"/>
-            <a:ext cx="2286000" cy="320040"/>
-          </a:xfrm>
-          <a:prstGeom prst="rect">
-            <a:avLst/>
-          </a:prstGeom>
-          <a:noFill/>
-          <a:ln/>
-        </p:spPr>
-        <p:txBody>
-          <a:bodyPr wrap="square" lIns="0" tIns="0" rIns="0" bIns="0" rtlCol="0" anchor="ctr"/>
-          <a:lstStyle/>
-          <a:p>
-            <a:pPr algn="ctr" indent="0" marL="0">
-              <a:buNone/>
-            </a:pPr>
-            <a:r>
-              <a:rPr lang="en-US" sz="1200" i="1" dirty="0">
-                <a:solidFill>
-                  <a:srgbClr val="6B7280"/>
-                </a:solidFill>
-                <a:latin typeface="Arial" pitchFamily="34" charset="0"/>
-                <a:ea typeface="Arial" pitchFamily="34" charset="-122"/>
-                <a:cs typeface="Arial" pitchFamily="34" charset="-120"/>
-              </a:rPr>
-              <a:t>Social Exchange</a:t>
-            </a:r>
-            <a:endParaRPr lang="en-US" sz="1200" dirty="0"/>
-          </a:p>
-        </p:txBody>
-      </p:sp>
-      <p:sp>
-        <p:nvSpPr>
-          <p:cNvPr id="14" name="Text 12"/>
-          <p:cNvSpPr txBox="1"/>
-          <p:nvPr/>
-        </p:nvSpPr>
-        <p:spPr>
-          <a:xfrm>
-            <a:off x="6355080" y="3383280"/>
-            <a:ext cx="2286000" cy="1737360"/>
-          </a:xfrm>
-          <a:prstGeom prst="rect">
-            <a:avLst/>
-          </a:prstGeom>
-          <a:noFill/>
-          <a:ln/>
-        </p:spPr>
-        <p:txBody>
-          <a:bodyPr wrap="square" lIns="0" tIns="0" rIns="0" bIns="0" rtlCol="0" anchor="t"/>
-          <a:lstStyle/>
-          <a:p>
-            <a:pPr rtl="1" algn="r" indent="0" marL="0">
-              <a:buNone/>
-            </a:pPr>
-            <a:r>
-              <a:rPr lang="he-IL" altLang="en-US" sz="1250" dirty="0">
-                <a:solidFill>
-                  <a:srgbClr val="1F2937"/>
-                </a:solidFill>
-                <a:latin typeface="Arial" pitchFamily="34" charset="0"/>
-                <a:ea typeface="Arial" pitchFamily="34" charset="-122"/>
-                <a:cs typeface="Arial" pitchFamily="34" charset="-120"/>
-              </a:rPr>
-              <a:t>"אני נותן נאמנות, הארגון אמור לתת ביטחון" – הפרת החוזה הפסיכולוגי → פחות מחויבות, אמון ועזרה לעמיתים</a:t>
-            </a:r>
-            <a:endParaRPr lang="he-IL" sz="1250" dirty="0"/>
-          </a:p>
-        </p:txBody>
-      </p:sp>
-      <p:sp>
-        <p:nvSpPr>
-          <p:cNvPr id="15" name="Shape 13"/>
-          <p:cNvSpPr/>
-          <p:nvPr/>
-        </p:nvSpPr>
-        <p:spPr>
-          <a:xfrm>
-            <a:off x="3355848" y="1371600"/>
-            <a:ext cx="2651760" cy="3840480"/>
+            <a:off x="548640" y="1371600"/>
+            <a:ext cx="3566160" cy="2103120"/>
           </a:xfrm>
           <a:prstGeom prst="roundRect">
             <a:avLst>
-              <a:gd name="adj" fmla="val 4138"/>
+              <a:gd name="adj" fmla="val 5217"/>
             </a:avLst>
           </a:prstGeom>
           <a:solidFill>
@@ -15092,207 +14122,104 @@
       </p:sp>
       <p:sp>
         <p:nvSpPr>
-          <p:cNvPr id="16" name="Shape 14"/>
+          <p:cNvPr id="10" name="Text 8"/>
+          <p:cNvSpPr txBox="1"/>
+          <p:nvPr/>
+        </p:nvSpPr>
+        <p:spPr>
+          <a:xfrm>
+            <a:off x="731520" y="1554480"/>
+            <a:ext cx="3200400" cy="914400"/>
+          </a:xfrm>
+          <a:prstGeom prst="rect">
+            <a:avLst/>
+          </a:prstGeom>
+          <a:noFill/>
+          <a:ln/>
+        </p:spPr>
+        <p:txBody>
+          <a:bodyPr wrap="square" lIns="0" tIns="0" rIns="0" bIns="0" rtlCol="0" anchor="ctr"/>
+          <a:lstStyle/>
+          <a:p>
+            <a:pPr rtl="1" algn="ctr" indent="0" marL="0">
+              <a:buNone/>
+            </a:pPr>
+            <a:r>
+              <a:rPr lang="he-IL" altLang="en-US" sz="4800" b="1" dirty="0">
+                <a:solidFill>
+                  <a:srgbClr val="E76F51"/>
+                </a:solidFill>
+                <a:latin typeface="Arial" pitchFamily="34" charset="0"/>
+                <a:ea typeface="Arial" pitchFamily="34" charset="-122"/>
+                <a:cs typeface="Arial" pitchFamily="34" charset="-120"/>
+              </a:rPr>
+              <a:t>2</a:t>
+            </a:r>
+            <a:endParaRPr lang="he-IL" sz="4800" dirty="0"/>
+          </a:p>
+        </p:txBody>
+      </p:sp>
+      <p:sp>
+        <p:nvSpPr>
+          <p:cNvPr id="11" name="Text 9"/>
+          <p:cNvSpPr txBox="1"/>
+          <p:nvPr/>
+        </p:nvSpPr>
+        <p:spPr>
+          <a:xfrm>
+            <a:off x="822960" y="2514600"/>
+            <a:ext cx="3017520" cy="868680"/>
+          </a:xfrm>
+          <a:prstGeom prst="rect">
+            <a:avLst/>
+          </a:prstGeom>
+          <a:noFill/>
+          <a:ln/>
+        </p:spPr>
+        <p:txBody>
+          <a:bodyPr wrap="square" lIns="0" tIns="0" rIns="0" bIns="0" rtlCol="0" anchor="t"/>
+          <a:lstStyle/>
+          <a:p>
+            <a:pPr rtl="1" algn="ctr" indent="0" marL="0">
+              <a:buNone/>
+            </a:pPr>
+            <a:r>
+              <a:rPr lang="he-IL" altLang="en-US" sz="1400" dirty="0">
+                <a:solidFill>
+                  <a:srgbClr val="1F2937"/>
+                </a:solidFill>
+                <a:latin typeface="Arial" pitchFamily="34" charset="0"/>
+                <a:ea typeface="Arial" pitchFamily="34" charset="-122"/>
+                <a:cs typeface="Arial" pitchFamily="34" charset="-120"/>
+              </a:rPr>
+              <a:t>ממתנים מתודולוגיים: מערך המחקר וסוג המדד</a:t>
+            </a:r>
+            <a:endParaRPr lang="he-IL" sz="1400" dirty="0"/>
+          </a:p>
+        </p:txBody>
+      </p:sp>
+      <p:sp>
+        <p:nvSpPr>
+          <p:cNvPr id="12" name="Shape 10"/>
           <p:cNvSpPr/>
           <p:nvPr/>
         </p:nvSpPr>
         <p:spPr>
           <a:xfrm>
-            <a:off x="4315968" y="1645920"/>
-            <a:ext cx="731520" cy="731520"/>
-          </a:xfrm>
-          <a:prstGeom prst="ellipse">
-            <a:avLst/>
+            <a:off x="6199632" y="3749040"/>
+            <a:ext cx="5440680" cy="1600200"/>
+          </a:xfrm>
+          <a:prstGeom prst="roundRect">
+            <a:avLst>
+              <a:gd name="adj" fmla="val 6857"/>
+            </a:avLst>
           </a:prstGeom>
           <a:solidFill>
-            <a:srgbClr val="FCA311"/>
+            <a:srgbClr val="F4F6FA"/>
           </a:solidFill>
           <a:ln w="12700">
             <a:solidFill>
-              <a:srgbClr val="FCA311"/>
-            </a:solidFill>
-            <a:prstDash val="solid"/>
-          </a:ln>
-        </p:spPr>
-      </p:sp>
-      <p:sp>
-        <p:nvSpPr>
-          <p:cNvPr id="17" name="Text 15"/>
-          <p:cNvSpPr txBox="1"/>
-          <p:nvPr/>
-        </p:nvSpPr>
-        <p:spPr>
-          <a:xfrm>
-            <a:off x="4315968" y="1645920"/>
-            <a:ext cx="731520" cy="731520"/>
-          </a:xfrm>
-          <a:prstGeom prst="rect">
-            <a:avLst/>
-          </a:prstGeom>
-          <a:noFill/>
-          <a:ln/>
-        </p:spPr>
-        <p:txBody>
-          <a:bodyPr wrap="square" lIns="0" tIns="0" rIns="0" bIns="0" rtlCol="0" anchor="ctr"/>
-          <a:lstStyle/>
-          <a:p>
-            <a:pPr algn="ctr" indent="0" marL="0">
-              <a:buNone/>
-            </a:pPr>
-            <a:r>
-              <a:rPr lang="en-US" sz="2600" b="1" dirty="0">
-                <a:solidFill>
-                  <a:srgbClr val="FFFFFF"/>
-                </a:solidFill>
-                <a:latin typeface="Arial" pitchFamily="34" charset="0"/>
-                <a:ea typeface="Arial" pitchFamily="34" charset="-122"/>
-                <a:cs typeface="Arial" pitchFamily="34" charset="-120"/>
-              </a:rPr>
-              <a:t>3</a:t>
-            </a:r>
-            <a:endParaRPr lang="en-US" sz="2600" dirty="0"/>
-          </a:p>
-        </p:txBody>
-      </p:sp>
-      <p:sp>
-        <p:nvSpPr>
-          <p:cNvPr id="18" name="Text 16"/>
-          <p:cNvSpPr txBox="1"/>
-          <p:nvPr/>
-        </p:nvSpPr>
-        <p:spPr>
-          <a:xfrm>
-            <a:off x="3493008" y="2514600"/>
-            <a:ext cx="2377440" cy="457200"/>
-          </a:xfrm>
-          <a:prstGeom prst="rect">
-            <a:avLst/>
-          </a:prstGeom>
-          <a:noFill/>
-          <a:ln/>
-        </p:spPr>
-        <p:txBody>
-          <a:bodyPr wrap="square" lIns="0" tIns="0" rIns="0" bIns="0" rtlCol="0" anchor="ctr"/>
-          <a:lstStyle/>
-          <a:p>
-            <a:pPr rtl="1" algn="ctr" indent="0" marL="0">
-              <a:buNone/>
-            </a:pPr>
-            <a:r>
-              <a:rPr lang="he-IL" altLang="en-US" sz="1500" b="1" dirty="0">
-                <a:solidFill>
-                  <a:srgbClr val="14213D"/>
-                </a:solidFill>
-                <a:latin typeface="Arial" pitchFamily="34" charset="0"/>
-                <a:ea typeface="Arial" pitchFamily="34" charset="-122"/>
-                <a:cs typeface="Arial" pitchFamily="34" charset="-120"/>
-              </a:rPr>
-              <a:t>שימור המשרה</a:t>
-            </a:r>
-            <a:endParaRPr lang="he-IL" sz="1500" dirty="0"/>
-          </a:p>
-        </p:txBody>
-      </p:sp>
-      <p:sp>
-        <p:nvSpPr>
-          <p:cNvPr id="19" name="Text 17"/>
-          <p:cNvSpPr txBox="1"/>
-          <p:nvPr/>
-        </p:nvSpPr>
-        <p:spPr>
-          <a:xfrm>
-            <a:off x="3538728" y="2999232"/>
-            <a:ext cx="2286000" cy="320040"/>
-          </a:xfrm>
-          <a:prstGeom prst="rect">
-            <a:avLst/>
-          </a:prstGeom>
-          <a:noFill/>
-          <a:ln/>
-        </p:spPr>
-        <p:txBody>
-          <a:bodyPr wrap="square" lIns="0" tIns="0" rIns="0" bIns="0" rtlCol="0" anchor="ctr"/>
-          <a:lstStyle/>
-          <a:p>
-            <a:pPr algn="ctr" indent="0" marL="0">
-              <a:buNone/>
-            </a:pPr>
-            <a:r>
-              <a:rPr lang="en-US" sz="1200" i="1" dirty="0">
-                <a:solidFill>
-                  <a:srgbClr val="6B7280"/>
-                </a:solidFill>
-                <a:latin typeface="Arial" pitchFamily="34" charset="0"/>
-                <a:ea typeface="Arial" pitchFamily="34" charset="-122"/>
-                <a:cs typeface="Arial" pitchFamily="34" charset="-120"/>
-              </a:rPr>
-              <a:t>Job Preservation</a:t>
-            </a:r>
-            <a:endParaRPr lang="en-US" sz="1200" dirty="0"/>
-          </a:p>
-        </p:txBody>
-      </p:sp>
-      <p:sp>
-        <p:nvSpPr>
-          <p:cNvPr id="20" name="Text 18"/>
-          <p:cNvSpPr txBox="1"/>
-          <p:nvPr/>
-        </p:nvSpPr>
-        <p:spPr>
-          <a:xfrm>
-            <a:off x="3538728" y="3383280"/>
-            <a:ext cx="2286000" cy="1737360"/>
-          </a:xfrm>
-          <a:prstGeom prst="rect">
-            <a:avLst/>
-          </a:prstGeom>
-          <a:noFill/>
-          <a:ln/>
-        </p:spPr>
-        <p:txBody>
-          <a:bodyPr wrap="square" lIns="0" tIns="0" rIns="0" bIns="0" rtlCol="0" anchor="t"/>
-          <a:lstStyle/>
-          <a:p>
-            <a:pPr rtl="1" algn="r" indent="0" marL="0">
-              <a:buNone/>
-            </a:pPr>
-            <a:r>
-              <a:rPr lang="he-IL" altLang="en-US" sz="1250" dirty="0">
-                <a:solidFill>
-                  <a:srgbClr val="1F2937"/>
-                </a:solidFill>
-                <a:latin typeface="Arial" pitchFamily="34" charset="0"/>
-                <a:ea typeface="Arial" pitchFamily="34" charset="-122"/>
-                <a:cs typeface="Arial" pitchFamily="34" charset="-120"/>
-              </a:rPr>
-              <a:t>עובדים קשה יותר, שותקים, מגיעים חולים, מנהלים רושם – המשרה נשמרת בטווח הקצר, במחיר בריאותי</a:t>
-            </a:r>
-            <a:endParaRPr lang="he-IL" sz="1250" dirty="0"/>
-          </a:p>
-        </p:txBody>
-      </p:sp>
-      <p:sp>
-        <p:nvSpPr>
-          <p:cNvPr id="21" name="Shape 19"/>
-          <p:cNvSpPr/>
-          <p:nvPr/>
-        </p:nvSpPr>
-        <p:spPr>
-          <a:xfrm>
-            <a:off x="539496" y="1371600"/>
-            <a:ext cx="2651760" cy="3840480"/>
-          </a:xfrm>
-          <a:prstGeom prst="roundRect">
-            <a:avLst>
-              <a:gd name="adj" fmla="val 4138"/>
-            </a:avLst>
-          </a:prstGeom>
-          <a:solidFill>
-            <a:srgbClr val="FFFFFF"/>
-          </a:solidFill>
-          <a:ln w="12700">
-            <a:solidFill>
-              <a:srgbClr val="FFFFFF"/>
+              <a:srgbClr val="F4F6FA"/>
             </a:solidFill>
             <a:prstDash val="solid"/>
           </a:ln>
@@ -15307,14 +14234,14 @@
       </p:sp>
       <p:sp>
         <p:nvSpPr>
-          <p:cNvPr id="22" name="Shape 20"/>
+          <p:cNvPr id="13" name="Shape 11"/>
           <p:cNvSpPr/>
           <p:nvPr/>
         </p:nvSpPr>
         <p:spPr>
           <a:xfrm>
-            <a:off x="1499616" y="1645920"/>
-            <a:ext cx="731520" cy="731520"/>
+            <a:off x="11000232" y="3977640"/>
+            <a:ext cx="365760" cy="365760"/>
           </a:xfrm>
           <a:prstGeom prst="ellipse">
             <a:avLst/>
@@ -15332,14 +14259,14 @@
       </p:sp>
       <p:sp>
         <p:nvSpPr>
-          <p:cNvPr id="23" name="Text 21"/>
-          <p:cNvSpPr txBox="1"/>
-          <p:nvPr/>
-        </p:nvSpPr>
-        <p:spPr>
-          <a:xfrm>
-            <a:off x="1499616" y="1645920"/>
-            <a:ext cx="731520" cy="731520"/>
+          <p:cNvPr id="14" name="Text 12"/>
+          <p:cNvSpPr txBox="1"/>
+          <p:nvPr/>
+        </p:nvSpPr>
+        <p:spPr>
+          <a:xfrm>
+            <a:off x="6473952" y="3931920"/>
+            <a:ext cx="4343400" cy="457200"/>
           </a:xfrm>
           <a:prstGeom prst="rect">
             <a:avLst/>
@@ -15351,50 +14278,11 @@
           <a:bodyPr wrap="square" lIns="0" tIns="0" rIns="0" bIns="0" rtlCol="0" anchor="ctr"/>
           <a:lstStyle/>
           <a:p>
-            <a:pPr algn="ctr" indent="0" marL="0">
-              <a:buNone/>
-            </a:pPr>
-            <a:r>
-              <a:rPr lang="en-US" sz="2600" b="1" dirty="0">
-                <a:solidFill>
-                  <a:srgbClr val="FFFFFF"/>
-                </a:solidFill>
-                <a:latin typeface="Arial" pitchFamily="34" charset="0"/>
-                <a:ea typeface="Arial" pitchFamily="34" charset="-122"/>
-                <a:cs typeface="Arial" pitchFamily="34" charset="-120"/>
-              </a:rPr>
-              <a:t>4</a:t>
-            </a:r>
-            <a:endParaRPr lang="en-US" sz="2600" dirty="0"/>
-          </a:p>
-        </p:txBody>
-      </p:sp>
-      <p:sp>
-        <p:nvSpPr>
-          <p:cNvPr id="24" name="Text 22"/>
-          <p:cNvSpPr txBox="1"/>
-          <p:nvPr/>
-        </p:nvSpPr>
-        <p:spPr>
-          <a:xfrm>
-            <a:off x="676656" y="2514600"/>
-            <a:ext cx="2377440" cy="457200"/>
-          </a:xfrm>
-          <a:prstGeom prst="rect">
-            <a:avLst/>
-          </a:prstGeom>
-          <a:noFill/>
-          <a:ln/>
-        </p:spPr>
-        <p:txBody>
-          <a:bodyPr wrap="square" lIns="0" tIns="0" rIns="0" bIns="0" rtlCol="0" anchor="ctr"/>
-          <a:lstStyle/>
-          <a:p>
-            <a:pPr rtl="1" algn="ctr" indent="0" marL="0">
-              <a:buNone/>
-            </a:pPr>
-            <a:r>
-              <a:rPr lang="he-IL" altLang="en-US" sz="1500" b="1" dirty="0">
+            <a:pPr rtl="1" algn="r" indent="0" marL="0">
+              <a:buNone/>
+            </a:pPr>
+            <a:r>
+              <a:rPr lang="he-IL" altLang="en-US" sz="1600" b="1" dirty="0">
                 <a:solidFill>
                   <a:srgbClr val="14213D"/>
                 </a:solidFill>
@@ -15402,61 +14290,22 @@
                 <a:ea typeface="Arial" pitchFamily="34" charset="-122"/>
                 <a:cs typeface="Arial" pitchFamily="34" charset="-120"/>
               </a:rPr>
-              <a:t>התמודדות פרואקטיבית</a:t>
-            </a:r>
-            <a:endParaRPr lang="he-IL" sz="1500" dirty="0"/>
-          </a:p>
-        </p:txBody>
-      </p:sp>
-      <p:sp>
-        <p:nvSpPr>
-          <p:cNvPr id="25" name="Text 23"/>
-          <p:cNvSpPr txBox="1"/>
-          <p:nvPr/>
-        </p:nvSpPr>
-        <p:spPr>
-          <a:xfrm>
-            <a:off x="722376" y="2999232"/>
-            <a:ext cx="2286000" cy="320040"/>
-          </a:xfrm>
-          <a:prstGeom prst="rect">
-            <a:avLst/>
-          </a:prstGeom>
-          <a:noFill/>
-          <a:ln/>
-        </p:spPr>
-        <p:txBody>
-          <a:bodyPr wrap="square" lIns="0" tIns="0" rIns="0" bIns="0" rtlCol="0" anchor="ctr"/>
-          <a:lstStyle/>
-          <a:p>
-            <a:pPr algn="ctr" indent="0" marL="0">
-              <a:buNone/>
-            </a:pPr>
-            <a:r>
-              <a:rPr lang="en-US" sz="1200" i="1" dirty="0">
-                <a:solidFill>
-                  <a:srgbClr val="6B7280"/>
-                </a:solidFill>
-                <a:latin typeface="Arial" pitchFamily="34" charset="0"/>
-                <a:ea typeface="Arial" pitchFamily="34" charset="-122"/>
-                <a:cs typeface="Arial" pitchFamily="34" charset="-120"/>
-              </a:rPr>
-              <a:t>Proactive Coping</a:t>
-            </a:r>
-            <a:endParaRPr lang="en-US" sz="1200" dirty="0"/>
-          </a:p>
-        </p:txBody>
-      </p:sp>
-      <p:sp>
-        <p:nvSpPr>
-          <p:cNvPr id="26" name="Text 24"/>
-          <p:cNvSpPr txBox="1"/>
-          <p:nvPr/>
-        </p:nvSpPr>
-        <p:spPr>
-          <a:xfrm>
-            <a:off x="722376" y="3383280"/>
-            <a:ext cx="2286000" cy="1737360"/>
+              <a:t>מערך המחקר</a:t>
+            </a:r>
+            <a:endParaRPr lang="he-IL" sz="1600" dirty="0"/>
+          </a:p>
+        </p:txBody>
+      </p:sp>
+      <p:sp>
+        <p:nvSpPr>
+          <p:cNvPr id="15" name="Text 13"/>
+          <p:cNvSpPr txBox="1"/>
+          <p:nvPr/>
+        </p:nvSpPr>
+        <p:spPr>
+          <a:xfrm>
+            <a:off x="6473952" y="4434840"/>
+            <a:ext cx="4892040" cy="868680"/>
           </a:xfrm>
           <a:prstGeom prst="rect">
             <a:avLst/>
@@ -15472,7 +14321,7 @@
               <a:buNone/>
             </a:pPr>
             <a:r>
-              <a:rPr lang="he-IL" altLang="en-US" sz="1250" dirty="0">
+              <a:rPr lang="he-IL" altLang="en-US" sz="1300" dirty="0">
                 <a:solidFill>
                   <a:srgbClr val="1F2937"/>
                 </a:solidFill>
@@ -15480,26 +14329,163 @@
                 <a:ea typeface="Arial" pitchFamily="34" charset="-122"/>
                 <a:cs typeface="Arial" pitchFamily="34" charset="-120"/>
               </a:rPr>
-              <a:t>חיפוש עבודה, למידה, רשת קשרים, תוכנית ב' – המנגנון הבריא, אבל דורש משאבים שהלחץ מדלדל</a:t>
-            </a:r>
-            <a:endParaRPr lang="he-IL" sz="1250" dirty="0"/>
-          </a:p>
-        </p:txBody>
-      </p:sp>
-      <p:sp>
-        <p:nvSpPr>
-          <p:cNvPr id="27" name="Shape 25"/>
+              <a:t>הקשרים חזקים יותר במחקרי חתך מאשר במחקרי אורך. כלומר: הקשר אמיתי, אבל כנראה קטן יותר ממה שמחקר בודד מראה.</a:t>
+            </a:r>
+            <a:endParaRPr lang="he-IL" sz="1300" dirty="0"/>
+          </a:p>
+        </p:txBody>
+      </p:sp>
+      <p:sp>
+        <p:nvSpPr>
+          <p:cNvPr id="16" name="Shape 14"/>
           <p:cNvSpPr/>
           <p:nvPr/>
         </p:nvSpPr>
         <p:spPr>
           <a:xfrm>
-            <a:off x="548640" y="5440680"/>
-            <a:ext cx="11091672" cy="822960"/>
+            <a:off x="548640" y="3749040"/>
+            <a:ext cx="5440680" cy="1600200"/>
           </a:xfrm>
           <a:prstGeom prst="roundRect">
             <a:avLst>
-              <a:gd name="adj" fmla="val 13333"/>
+              <a:gd name="adj" fmla="val 6857"/>
+            </a:avLst>
+          </a:prstGeom>
+          <a:solidFill>
+            <a:srgbClr val="F4F6FA"/>
+          </a:solidFill>
+          <a:ln w="12700">
+            <a:solidFill>
+              <a:srgbClr val="F4F6FA"/>
+            </a:solidFill>
+            <a:prstDash val="solid"/>
+          </a:ln>
+          <a:effectLst>
+            <a:outerShdw sx="100000" sy="100000" kx="0" ky="0" algn="bl" rotWithShape="0" blurRad="50800" dist="25400" dir="5400000">
+              <a:srgbClr val="000000">
+                <a:alpha val="12000"/>
+              </a:srgbClr>
+            </a:outerShdw>
+          </a:effectLst>
+        </p:spPr>
+      </p:sp>
+      <p:sp>
+        <p:nvSpPr>
+          <p:cNvPr id="17" name="Shape 15"/>
+          <p:cNvSpPr/>
+          <p:nvPr/>
+        </p:nvSpPr>
+        <p:spPr>
+          <a:xfrm>
+            <a:off x="5349240" y="3977640"/>
+            <a:ext cx="365760" cy="365760"/>
+          </a:xfrm>
+          <a:prstGeom prst="ellipse">
+            <a:avLst/>
+          </a:prstGeom>
+          <a:solidFill>
+            <a:srgbClr val="D9822B"/>
+          </a:solidFill>
+          <a:ln w="12700">
+            <a:solidFill>
+              <a:srgbClr val="D9822B"/>
+            </a:solidFill>
+            <a:prstDash val="solid"/>
+          </a:ln>
+        </p:spPr>
+      </p:sp>
+      <p:sp>
+        <p:nvSpPr>
+          <p:cNvPr id="18" name="Text 16"/>
+          <p:cNvSpPr txBox="1"/>
+          <p:nvPr/>
+        </p:nvSpPr>
+        <p:spPr>
+          <a:xfrm>
+            <a:off x="822960" y="3931920"/>
+            <a:ext cx="4343400" cy="457200"/>
+          </a:xfrm>
+          <a:prstGeom prst="rect">
+            <a:avLst/>
+          </a:prstGeom>
+          <a:noFill/>
+          <a:ln/>
+        </p:spPr>
+        <p:txBody>
+          <a:bodyPr wrap="square" lIns="0" tIns="0" rIns="0" bIns="0" rtlCol="0" anchor="ctr"/>
+          <a:lstStyle/>
+          <a:p>
+            <a:pPr rtl="1" algn="r" indent="0" marL="0">
+              <a:buNone/>
+            </a:pPr>
+            <a:r>
+              <a:rPr lang="he-IL" altLang="en-US" sz="1600" b="1" dirty="0">
+                <a:solidFill>
+                  <a:srgbClr val="14213D"/>
+                </a:solidFill>
+                <a:latin typeface="Arial" pitchFamily="34" charset="0"/>
+                <a:ea typeface="Arial" pitchFamily="34" charset="-122"/>
+                <a:cs typeface="Arial" pitchFamily="34" charset="-120"/>
+              </a:rPr>
+              <a:t>סוג המדד</a:t>
+            </a:r>
+            <a:endParaRPr lang="he-IL" sz="1600" dirty="0"/>
+          </a:p>
+        </p:txBody>
+      </p:sp>
+      <p:sp>
+        <p:nvSpPr>
+          <p:cNvPr id="19" name="Text 17"/>
+          <p:cNvSpPr txBox="1"/>
+          <p:nvPr/>
+        </p:nvSpPr>
+        <p:spPr>
+          <a:xfrm>
+            <a:off x="822960" y="4434840"/>
+            <a:ext cx="4892040" cy="868680"/>
+          </a:xfrm>
+          <a:prstGeom prst="rect">
+            <a:avLst/>
+          </a:prstGeom>
+          <a:noFill/>
+          <a:ln/>
+        </p:spPr>
+        <p:txBody>
+          <a:bodyPr wrap="square" lIns="0" tIns="0" rIns="0" bIns="0" rtlCol="0" anchor="t"/>
+          <a:lstStyle/>
+          <a:p>
+            <a:pPr rtl="1" algn="r" indent="0" marL="0">
+              <a:buNone/>
+            </a:pPr>
+            <a:r>
+              <a:rPr lang="he-IL" altLang="en-US" sz="1300" dirty="0">
+                <a:solidFill>
+                  <a:srgbClr val="1F2937"/>
+                </a:solidFill>
+                <a:latin typeface="Arial" pitchFamily="34" charset="0"/>
+                <a:ea typeface="Arial" pitchFamily="34" charset="-122"/>
+                <a:cs typeface="Arial" pitchFamily="34" charset="-120"/>
+              </a:rPr>
+              <a:t>קוגניטיבי ("כמה זה סביר"), רגשי ("כמה זה מדאיג") או משולב: השפעה מעורבת, לא אחידה בין התוצאות.</a:t>
+            </a:r>
+            <a:endParaRPr lang="he-IL" sz="1300" dirty="0"/>
+          </a:p>
+        </p:txBody>
+      </p:sp>
+      <p:sp>
+        <p:nvSpPr>
+          <p:cNvPr id="20" name="Shape 18"/>
+          <p:cNvSpPr/>
+          <p:nvPr/>
+        </p:nvSpPr>
+        <p:spPr>
+          <a:xfrm>
+            <a:off x="548640" y="5532120"/>
+            <a:ext cx="11091672" cy="731520"/>
+          </a:xfrm>
+          <a:prstGeom prst="roundRect">
+            <a:avLst>
+              <a:gd name="adj" fmla="val 15000"/>
             </a:avLst>
           </a:prstGeom>
           <a:solidFill>
@@ -15522,14 +14508,14 @@
       </p:sp>
       <p:sp>
         <p:nvSpPr>
-          <p:cNvPr id="28" name="Text 26"/>
-          <p:cNvSpPr txBox="1"/>
-          <p:nvPr/>
-        </p:nvSpPr>
-        <p:spPr>
-          <a:xfrm>
-            <a:off x="822960" y="5486400"/>
-            <a:ext cx="10515600" cy="731520"/>
+          <p:cNvPr id="21" name="Text 19"/>
+          <p:cNvSpPr txBox="1"/>
+          <p:nvPr/>
+        </p:nvSpPr>
+        <p:spPr>
+          <a:xfrm>
+            <a:off x="822960" y="5577840"/>
+            <a:ext cx="10515600" cy="640080"/>
           </a:xfrm>
           <a:prstGeom prst="rect">
             <a:avLst/>
@@ -15545,23 +14531,23 @@
               <a:buNone/>
             </a:pPr>
             <a:r>
-              <a:rPr lang="he-IL" altLang="en-US" sz="1400" b="1" dirty="0">
-                <a:solidFill>
-                  <a:srgbClr val="14213D"/>
-                </a:solidFill>
-                <a:latin typeface="Arial" pitchFamily="34" charset="0"/>
-                <a:ea typeface="Arial" pitchFamily="34" charset="-122"/>
-                <a:cs typeface="Arial" pitchFamily="34" charset="-120"/>
-              </a:rPr>
-              <a:t>המתח המובנה: הלחץ (1) גוזל בדיוק את המשאבים שהפרואקטיביות (4) צריכה. לכן המטרה בניהול קריירה: לבנות מראש את המשאבים שיאפשרו לבחור ב-4.</a:t>
-            </a:r>
-            <a:endParaRPr lang="he-IL" sz="1400" dirty="0"/>
-          </a:p>
-        </p:txBody>
-      </p:sp>
-      <p:sp>
-        <p:nvSpPr>
-          <p:cNvPr id="29" name="Text 27"/>
+              <a:rPr lang="he-IL" altLang="en-US" sz="1300" dirty="0">
+                <a:solidFill>
+                  <a:srgbClr val="1F2937"/>
+                </a:solidFill>
+                <a:latin typeface="Arial" pitchFamily="34" charset="0"/>
+                <a:ea typeface="Arial" pitchFamily="34" charset="-122"/>
+                <a:cs typeface="Arial" pitchFamily="34" charset="-120"/>
+              </a:rPr>
+              <a:t>מגבלות שהמחברים עצמם מציינים: מתאמים ולא סיבתיות, דיווח עצמי, הטיית פרסום אפשרית, מדגמים בעיקר מערביים ואסייתיים</a:t>
+            </a:r>
+            <a:endParaRPr lang="he-IL" sz="1300" dirty="0"/>
+          </a:p>
+        </p:txBody>
+      </p:sp>
+      <p:sp>
+        <p:nvSpPr>
+          <p:cNvPr id="22" name="Text 20"/>
           <p:cNvSpPr txBox="1"/>
           <p:nvPr/>
         </p:nvSpPr>
@@ -15600,7 +14586,7 @@
       </p:sp>
       <p:sp>
         <p:nvSpPr>
-          <p:cNvPr id="30" name="Text 28"/>
+          <p:cNvPr id="23" name="Text 21"/>
           <p:cNvSpPr txBox="1"/>
           <p:nvPr/>
         </p:nvSpPr>
@@ -15687,7 +14673,7 @@
               <a:buNone/>
             </a:pPr>
             <a:r>
-              <a:rPr lang="he-IL" altLang="en-US" sz="3200" b="1" dirty="0">
+              <a:rPr lang="he-IL" altLang="en-US" sz="3000" b="1" dirty="0">
                 <a:solidFill>
                   <a:srgbClr val="14213D"/>
                 </a:solidFill>
@@ -15695,34 +14681,73 @@
                 <a:ea typeface="Arial" pitchFamily="34" charset="-122"/>
                 <a:cs typeface="Arial" pitchFamily="34" charset="-120"/>
               </a:rPr>
-              <a:t>למה לא כולם מגיבים אותו דבר? שלושת המשתנים הממתנים</a:t>
-            </a:r>
-            <a:endParaRPr lang="he-IL" sz="3200" dirty="0"/>
-          </a:p>
-        </p:txBody>
-      </p:sp>
-      <p:sp>
-        <p:nvSpPr>
-          <p:cNvPr id="3" name="Shape 1"/>
+              <a:t>המאמר המשלים: הבינה המלאכותית, חוסר הביטחון וחוסן הקריירה</a:t>
+            </a:r>
+            <a:endParaRPr lang="he-IL" sz="3000" dirty="0"/>
+          </a:p>
+        </p:txBody>
+      </p:sp>
+      <p:sp>
+        <p:nvSpPr>
+          <p:cNvPr id="3" name="Text 1"/>
+          <p:cNvSpPr txBox="1"/>
+          <p:nvPr/>
+        </p:nvSpPr>
+        <p:spPr>
+          <a:xfrm>
+            <a:off x="548640" y="1143000"/>
+            <a:ext cx="11091672" cy="365760"/>
+          </a:xfrm>
+          <a:prstGeom prst="rect">
+            <a:avLst/>
+          </a:prstGeom>
+          <a:noFill/>
+          <a:ln/>
+        </p:spPr>
+        <p:txBody>
+          <a:bodyPr wrap="square" lIns="0" tIns="0" rIns="0" bIns="0" rtlCol="0" anchor="t"/>
+          <a:lstStyle/>
+          <a:p>
+            <a:pPr algn="r" indent="0" marL="0">
+              <a:buNone/>
+            </a:pPr>
+            <a:r>
+              <a:rPr lang="en-US" sz="1300" i="1" dirty="0">
+                <a:solidFill>
+                  <a:srgbClr val="6B7280"/>
+                </a:solidFill>
+                <a:latin typeface="Arial" pitchFamily="34" charset="0"/>
+                <a:ea typeface="Arial" pitchFamily="34" charset="-122"/>
+                <a:cs typeface="Arial" pitchFamily="34" charset="-120"/>
+              </a:rPr>
+              <a:t>Chung, Im, Kim &amp; Yun (2025), Australian Journal of Psychology, Open Access</a:t>
+            </a:r>
+            <a:endParaRPr lang="en-US" sz="1300" dirty="0"/>
+          </a:p>
+        </p:txBody>
+      </p:sp>
+      <p:sp>
+        <p:nvSpPr>
+          <p:cNvPr id="4" name="Shape 2"/>
           <p:cNvSpPr/>
           <p:nvPr/>
         </p:nvSpPr>
         <p:spPr>
           <a:xfrm>
-            <a:off x="8074152" y="1371600"/>
-            <a:ext cx="3566160" cy="3886200"/>
+            <a:off x="8531352" y="1783080"/>
+            <a:ext cx="3108960" cy="1463040"/>
           </a:xfrm>
           <a:prstGeom prst="roundRect">
             <a:avLst>
-              <a:gd name="adj" fmla="val 3077"/>
+              <a:gd name="adj" fmla="val 7500"/>
             </a:avLst>
           </a:prstGeom>
           <a:solidFill>
-            <a:srgbClr val="FFFFFF"/>
+            <a:srgbClr val="14213D"/>
           </a:solidFill>
           <a:ln w="12700">
             <a:solidFill>
-              <a:srgbClr val="FFFFFF"/>
+              <a:srgbClr val="14213D"/>
             </a:solidFill>
             <a:prstDash val="solid"/>
           </a:ln>
@@ -15737,18 +14762,121 @@
       </p:sp>
       <p:sp>
         <p:nvSpPr>
-          <p:cNvPr id="4" name="Shape 2"/>
+          <p:cNvPr id="5" name="Text 3"/>
+          <p:cNvSpPr txBox="1"/>
+          <p:nvPr/>
+        </p:nvSpPr>
+        <p:spPr>
+          <a:xfrm>
+            <a:off x="8714232" y="1920240"/>
+            <a:ext cx="2743200" cy="548640"/>
+          </a:xfrm>
+          <a:prstGeom prst="rect">
+            <a:avLst/>
+          </a:prstGeom>
+          <a:noFill/>
+          <a:ln/>
+        </p:spPr>
+        <p:txBody>
+          <a:bodyPr wrap="square" lIns="0" tIns="0" rIns="0" bIns="0" rtlCol="0" anchor="ctr"/>
+          <a:lstStyle/>
+          <a:p>
+            <a:pPr rtl="1" algn="ctr" indent="0" marL="0">
+              <a:buNone/>
+            </a:pPr>
+            <a:r>
+              <a:rPr lang="he-IL" altLang="en-US" sz="1600" b="1" dirty="0">
+                <a:solidFill>
+                  <a:srgbClr val="FFFFFF"/>
+                </a:solidFill>
+                <a:latin typeface="Arial" pitchFamily="34" charset="0"/>
+                <a:ea typeface="Arial" pitchFamily="34" charset="-122"/>
+                <a:cs typeface="Arial" pitchFamily="34" charset="-120"/>
+              </a:rPr>
+              <a:t>מודעות לבינה מלאכותית</a:t>
+            </a:r>
+            <a:endParaRPr lang="he-IL" sz="1600" dirty="0"/>
+          </a:p>
+        </p:txBody>
+      </p:sp>
+      <p:sp>
+        <p:nvSpPr>
+          <p:cNvPr id="6" name="Text 4"/>
+          <p:cNvSpPr txBox="1"/>
+          <p:nvPr/>
+        </p:nvSpPr>
+        <p:spPr>
+          <a:xfrm>
+            <a:off x="8714232" y="2514600"/>
+            <a:ext cx="2743200" cy="640080"/>
+          </a:xfrm>
+          <a:prstGeom prst="rect">
+            <a:avLst/>
+          </a:prstGeom>
+          <a:noFill/>
+          <a:ln/>
+        </p:spPr>
+        <p:txBody>
+          <a:bodyPr wrap="square" lIns="0" tIns="0" rIns="0" bIns="0" rtlCol="0" anchor="t"/>
+          <a:lstStyle/>
+          <a:p>
+            <a:pPr rtl="1" algn="ctr" indent="0" marL="0">
+              <a:buNone/>
+            </a:pPr>
+            <a:r>
+              <a:rPr lang="he-IL" altLang="en-US" sz="1200" dirty="0">
+                <a:solidFill>
+                  <a:srgbClr val="F3F4F6"/>
+                </a:solidFill>
+                <a:latin typeface="Arial" pitchFamily="34" charset="0"/>
+                <a:ea typeface="Arial" pitchFamily="34" charset="-122"/>
+                <a:cs typeface="Arial" pitchFamily="34" charset="-120"/>
+              </a:rPr>
+              <a:t>"הטכנולוגיה עלולה להחליף אותי או לשנות את התפקיד"</a:t>
+            </a:r>
+            <a:endParaRPr lang="he-IL" sz="1200" dirty="0"/>
+          </a:p>
+        </p:txBody>
+      </p:sp>
+      <p:sp>
+        <p:nvSpPr>
+          <p:cNvPr id="7" name="Shape 5"/>
           <p:cNvSpPr/>
           <p:nvPr/>
         </p:nvSpPr>
         <p:spPr>
           <a:xfrm>
-            <a:off x="8302752" y="1600200"/>
-            <a:ext cx="3108960" cy="868680"/>
+            <a:off x="7772400" y="2240280"/>
+            <a:ext cx="640080" cy="548640"/>
+          </a:xfrm>
+          <a:prstGeom prst="leftArrow">
+            <a:avLst/>
+          </a:prstGeom>
+          <a:solidFill>
+            <a:srgbClr val="FCA311"/>
+          </a:solidFill>
+          <a:ln w="12700">
+            <a:solidFill>
+              <a:srgbClr val="FCA311"/>
+            </a:solidFill>
+            <a:prstDash val="solid"/>
+          </a:ln>
+        </p:spPr>
+      </p:sp>
+      <p:sp>
+        <p:nvSpPr>
+          <p:cNvPr id="8" name="Shape 6"/>
+          <p:cNvSpPr/>
+          <p:nvPr/>
+        </p:nvSpPr>
+        <p:spPr>
+          <a:xfrm>
+            <a:off x="4553712" y="1783080"/>
+            <a:ext cx="3108960" cy="1463040"/>
           </a:xfrm>
           <a:prstGeom prst="roundRect">
             <a:avLst>
-              <a:gd name="adj" fmla="val 10526"/>
+              <a:gd name="adj" fmla="val 7500"/>
             </a:avLst>
           </a:prstGeom>
           <a:solidFill>
@@ -15757,217 +14885,6 @@
           <a:ln w="12700">
             <a:solidFill>
               <a:srgbClr val="E76F51"/>
-            </a:solidFill>
-            <a:prstDash val="solid"/>
-          </a:ln>
-        </p:spPr>
-      </p:sp>
-      <p:sp>
-        <p:nvSpPr>
-          <p:cNvPr id="5" name="Text 3"/>
-          <p:cNvSpPr txBox="1"/>
-          <p:nvPr/>
-        </p:nvSpPr>
-        <p:spPr>
-          <a:xfrm>
-            <a:off x="8394192" y="1627632"/>
-            <a:ext cx="2926080" cy="457200"/>
-          </a:xfrm>
-          <a:prstGeom prst="rect">
-            <a:avLst/>
-          </a:prstGeom>
-          <a:noFill/>
-          <a:ln/>
-        </p:spPr>
-        <p:txBody>
-          <a:bodyPr wrap="square" lIns="0" tIns="0" rIns="0" bIns="0" rtlCol="0" anchor="ctr"/>
-          <a:lstStyle/>
-          <a:p>
-            <a:pPr rtl="1" algn="ctr" indent="0" marL="0">
-              <a:buNone/>
-            </a:pPr>
-            <a:r>
-              <a:rPr lang="he-IL" altLang="en-US" sz="1800" b="1" dirty="0">
-                <a:solidFill>
-                  <a:srgbClr val="FFFFFF"/>
-                </a:solidFill>
-                <a:latin typeface="Arial" pitchFamily="34" charset="0"/>
-                <a:ea typeface="Arial" pitchFamily="34" charset="-122"/>
-                <a:cs typeface="Arial" pitchFamily="34" charset="-120"/>
-              </a:rPr>
-              <a:t>מאפייני האיום</a:t>
-            </a:r>
-            <a:endParaRPr lang="he-IL" sz="1800" dirty="0"/>
-          </a:p>
-        </p:txBody>
-      </p:sp>
-      <p:sp>
-        <p:nvSpPr>
-          <p:cNvPr id="6" name="Text 4"/>
-          <p:cNvSpPr txBox="1"/>
-          <p:nvPr/>
-        </p:nvSpPr>
-        <p:spPr>
-          <a:xfrm>
-            <a:off x="8394192" y="2057400"/>
-            <a:ext cx="2926080" cy="365760"/>
-          </a:xfrm>
-          <a:prstGeom prst="rect">
-            <a:avLst/>
-          </a:prstGeom>
-          <a:noFill/>
-          <a:ln/>
-        </p:spPr>
-        <p:txBody>
-          <a:bodyPr wrap="square" lIns="0" tIns="0" rIns="0" bIns="0" rtlCol="0" anchor="ctr"/>
-          <a:lstStyle/>
-          <a:p>
-            <a:pPr algn="ctr" indent="0" marL="0">
-              <a:buNone/>
-            </a:pPr>
-            <a:r>
-              <a:rPr lang="en-US" sz="1150" i="1" dirty="0">
-                <a:solidFill>
-                  <a:srgbClr val="FFFFFF"/>
-                </a:solidFill>
-                <a:latin typeface="Arial" pitchFamily="34" charset="0"/>
-                <a:ea typeface="Arial" pitchFamily="34" charset="-122"/>
-                <a:cs typeface="Arial" pitchFamily="34" charset="-120"/>
-              </a:rPr>
-              <a:t>Threat Features</a:t>
-            </a:r>
-            <a:endParaRPr lang="en-US" sz="1150" dirty="0"/>
-          </a:p>
-        </p:txBody>
-      </p:sp>
-      <p:sp>
-        <p:nvSpPr>
-          <p:cNvPr id="7" name="Text 5"/>
-          <p:cNvSpPr txBox="1"/>
-          <p:nvPr/>
-        </p:nvSpPr>
-        <p:spPr>
-          <a:xfrm>
-            <a:off x="8348472" y="2697480"/>
-            <a:ext cx="3017520" cy="2468880"/>
-          </a:xfrm>
-          <a:prstGeom prst="rect">
-            <a:avLst/>
-          </a:prstGeom>
-          <a:noFill/>
-          <a:ln/>
-        </p:spPr>
-        <p:txBody>
-          <a:bodyPr wrap="square" lIns="0" tIns="0" rIns="0" bIns="0" rtlCol="0" anchor="t"/>
-          <a:lstStyle/>
-          <a:p>
-            <a:pPr algn="r" marL="342900" indent="-342900">
-              <a:spcAft>
-                <a:spcPts val="800"/>
-              </a:spcAft>
-              <a:buSzPct val="100000"/>
-              <a:buChar char="•"/>
-            </a:pPr>
-            <a:r>
-              <a:rPr lang="he-IL" altLang="en-US" sz="1350" dirty="0">
-                <a:solidFill>
-                  <a:srgbClr val="1F2937"/>
-                </a:solidFill>
-                <a:latin typeface="Arial" pitchFamily="34" charset="0"/>
-                <a:ea typeface="Arial" pitchFamily="34" charset="-122"/>
-                <a:cs typeface="Arial" pitchFamily="34" charset="-120"/>
-              </a:rPr>
-              <a:t>הסתברות – כמה זה באמת סביר?</a:t>
-            </a:r>
-            <a:endParaRPr lang="he-IL" sz="1350" dirty="0"/>
-          </a:p>
-          <a:p>
-            <a:pPr algn="r" marL="342900" indent="-342900">
-              <a:spcAft>
-                <a:spcPts val="800"/>
-              </a:spcAft>
-              <a:buSzPct val="100000"/>
-              <a:buChar char="•"/>
-            </a:pPr>
-            <a:r>
-              <a:rPr lang="he-IL" altLang="en-US" sz="1350" dirty="0">
-                <a:solidFill>
-                  <a:srgbClr val="1F2937"/>
-                </a:solidFill>
-                <a:latin typeface="Arial" pitchFamily="34" charset="0"/>
-                <a:ea typeface="Arial" pitchFamily="34" charset="-122"/>
-                <a:cs typeface="Arial" pitchFamily="34" charset="-120"/>
-              </a:rPr>
-              <a:t>חומרה – מה אאבד?</a:t>
-            </a:r>
-            <a:endParaRPr lang="he-IL" sz="1350" dirty="0"/>
-          </a:p>
-          <a:p>
-            <a:pPr algn="r" marL="342900" indent="-342900">
-              <a:spcAft>
-                <a:spcPts val="800"/>
-              </a:spcAft>
-              <a:buSzPct val="100000"/>
-              <a:buChar char="•"/>
-            </a:pPr>
-            <a:r>
-              <a:rPr lang="he-IL" altLang="en-US" sz="1350" dirty="0">
-                <a:solidFill>
-                  <a:srgbClr val="1F2937"/>
-                </a:solidFill>
-                <a:latin typeface="Arial" pitchFamily="34" charset="0"/>
-                <a:ea typeface="Arial" pitchFamily="34" charset="-122"/>
-                <a:cs typeface="Arial" pitchFamily="34" charset="-120"/>
-              </a:rPr>
-              <a:t>מיידיות ומשך – מתי, ולכמה זמן?</a:t>
-            </a:r>
-            <a:endParaRPr lang="he-IL" sz="1350" dirty="0"/>
-          </a:p>
-          <a:p>
-            <a:pPr algn="r" marL="342900" indent="-342900">
-              <a:spcAft>
-                <a:spcPts val="800"/>
-              </a:spcAft>
-              <a:buSzPct val="100000"/>
-              <a:buChar char="•"/>
-            </a:pPr>
-            <a:r>
-              <a:rPr lang="he-IL" altLang="en-US" sz="1350" dirty="0">
-                <a:solidFill>
-                  <a:srgbClr val="1F2937"/>
-                </a:solidFill>
-                <a:latin typeface="Arial" pitchFamily="34" charset="0"/>
-                <a:ea typeface="Arial" pitchFamily="34" charset="-122"/>
-                <a:cs typeface="Arial" pitchFamily="34" charset="-120"/>
-              </a:rPr>
-              <a:t>שליטה – מה תלוי בי?</a:t>
-            </a:r>
-            <a:endParaRPr lang="he-IL" sz="1350" dirty="0"/>
-          </a:p>
-        </p:txBody>
-      </p:sp>
-      <p:sp>
-        <p:nvSpPr>
-          <p:cNvPr id="8" name="Shape 6"/>
-          <p:cNvSpPr/>
-          <p:nvPr/>
-        </p:nvSpPr>
-        <p:spPr>
-          <a:xfrm>
-            <a:off x="4311396" y="1371600"/>
-            <a:ext cx="3566160" cy="3886200"/>
-          </a:xfrm>
-          <a:prstGeom prst="roundRect">
-            <a:avLst>
-              <a:gd name="adj" fmla="val 3077"/>
-            </a:avLst>
-          </a:prstGeom>
-          <a:solidFill>
-            <a:srgbClr val="FFFFFF"/>
-          </a:solidFill>
-          <a:ln w="12700">
-            <a:solidFill>
-              <a:srgbClr val="FFFFFF"/>
             </a:solidFill>
             <a:prstDash val="solid"/>
           </a:ln>
@@ -15982,26 +14899,102 @@
       </p:sp>
       <p:sp>
         <p:nvSpPr>
-          <p:cNvPr id="9" name="Shape 7"/>
+          <p:cNvPr id="9" name="Text 7"/>
+          <p:cNvSpPr txBox="1"/>
+          <p:nvPr/>
+        </p:nvSpPr>
+        <p:spPr>
+          <a:xfrm>
+            <a:off x="4736592" y="1920240"/>
+            <a:ext cx="2743200" cy="548640"/>
+          </a:xfrm>
+          <a:prstGeom prst="rect">
+            <a:avLst/>
+          </a:prstGeom>
+          <a:noFill/>
+          <a:ln/>
+        </p:spPr>
+        <p:txBody>
+          <a:bodyPr wrap="square" lIns="0" tIns="0" rIns="0" bIns="0" rtlCol="0" anchor="ctr"/>
+          <a:lstStyle/>
+          <a:p>
+            <a:pPr rtl="1" algn="ctr" indent="0" marL="0">
+              <a:buNone/>
+            </a:pPr>
+            <a:r>
+              <a:rPr lang="he-IL" altLang="en-US" sz="1600" b="1" dirty="0">
+                <a:solidFill>
+                  <a:srgbClr val="FFFFFF"/>
+                </a:solidFill>
+                <a:latin typeface="Arial" pitchFamily="34" charset="0"/>
+                <a:ea typeface="Arial" pitchFamily="34" charset="-122"/>
+                <a:cs typeface="Arial" pitchFamily="34" charset="-120"/>
+              </a:rPr>
+              <a:t>חוסר ביטחון תעסוקתי</a:t>
+            </a:r>
+            <a:endParaRPr lang="he-IL" sz="1600" dirty="0"/>
+          </a:p>
+        </p:txBody>
+      </p:sp>
+      <p:sp>
+        <p:nvSpPr>
+          <p:cNvPr id="10" name="Text 8"/>
+          <p:cNvSpPr txBox="1"/>
+          <p:nvPr/>
+        </p:nvSpPr>
+        <p:spPr>
+          <a:xfrm>
+            <a:off x="4736592" y="2514600"/>
+            <a:ext cx="2743200" cy="640080"/>
+          </a:xfrm>
+          <a:prstGeom prst="rect">
+            <a:avLst/>
+          </a:prstGeom>
+          <a:noFill/>
+          <a:ln/>
+        </p:spPr>
+        <p:txBody>
+          <a:bodyPr wrap="square" lIns="0" tIns="0" rIns="0" bIns="0" rtlCol="0" anchor="t"/>
+          <a:lstStyle/>
+          <a:p>
+            <a:pPr rtl="1" algn="ctr" indent="0" marL="0">
+              <a:buNone/>
+            </a:pPr>
+            <a:r>
+              <a:rPr lang="he-IL" altLang="en-US" sz="1200" dirty="0">
+                <a:solidFill>
+                  <a:srgbClr val="F3F4F6"/>
+                </a:solidFill>
+                <a:latin typeface="Arial" pitchFamily="34" charset="0"/>
+                <a:ea typeface="Arial" pitchFamily="34" charset="-122"/>
+                <a:cs typeface="Arial" pitchFamily="34" charset="-120"/>
+              </a:rPr>
+              <a:t>המתווך</a:t>
+            </a:r>
+            <a:endParaRPr lang="he-IL" sz="1200" dirty="0"/>
+          </a:p>
+        </p:txBody>
+      </p:sp>
+      <p:sp>
+        <p:nvSpPr>
+          <p:cNvPr id="11" name="Shape 9"/>
           <p:cNvSpPr/>
           <p:nvPr/>
         </p:nvSpPr>
         <p:spPr>
           <a:xfrm>
-            <a:off x="4539996" y="1600200"/>
-            <a:ext cx="3108960" cy="868680"/>
-          </a:xfrm>
-          <a:prstGeom prst="roundRect">
-            <a:avLst>
-              <a:gd name="adj" fmla="val 10526"/>
-            </a:avLst>
+            <a:off x="3794760" y="2240280"/>
+            <a:ext cx="640080" cy="548640"/>
+          </a:xfrm>
+          <a:prstGeom prst="leftArrow">
+            <a:avLst/>
           </a:prstGeom>
           <a:solidFill>
-            <a:srgbClr val="F4A261"/>
+            <a:srgbClr val="FCA311"/>
           </a:solidFill>
           <a:ln w="12700">
             <a:solidFill>
-              <a:srgbClr val="F4A261"/>
+              <a:srgbClr val="FCA311"/>
             </a:solidFill>
             <a:prstDash val="solid"/>
           </a:ln>
@@ -16009,210 +15002,26 @@
       </p:sp>
       <p:sp>
         <p:nvSpPr>
-          <p:cNvPr id="10" name="Text 8"/>
-          <p:cNvSpPr txBox="1"/>
-          <p:nvPr/>
-        </p:nvSpPr>
-        <p:spPr>
-          <a:xfrm>
-            <a:off x="4631436" y="1627632"/>
-            <a:ext cx="2926080" cy="457200"/>
-          </a:xfrm>
-          <a:prstGeom prst="rect">
-            <a:avLst/>
-          </a:prstGeom>
-          <a:noFill/>
-          <a:ln/>
-        </p:spPr>
-        <p:txBody>
-          <a:bodyPr wrap="square" lIns="0" tIns="0" rIns="0" bIns="0" rtlCol="0" anchor="ctr"/>
-          <a:lstStyle/>
-          <a:p>
-            <a:pPr rtl="1" algn="ctr" indent="0" marL="0">
-              <a:buNone/>
-            </a:pPr>
-            <a:r>
-              <a:rPr lang="he-IL" altLang="en-US" sz="1800" b="1" dirty="0">
-                <a:solidFill>
-                  <a:srgbClr val="FFFFFF"/>
-                </a:solidFill>
-                <a:latin typeface="Arial" pitchFamily="34" charset="0"/>
-                <a:ea typeface="Arial" pitchFamily="34" charset="-122"/>
-                <a:cs typeface="Arial" pitchFamily="34" charset="-120"/>
-              </a:rPr>
-              <a:t>פגיעוּת כלכלית</a:t>
-            </a:r>
-            <a:endParaRPr lang="he-IL" sz="1800" dirty="0"/>
-          </a:p>
-        </p:txBody>
-      </p:sp>
-      <p:sp>
-        <p:nvSpPr>
-          <p:cNvPr id="11" name="Text 9"/>
-          <p:cNvSpPr txBox="1"/>
-          <p:nvPr/>
-        </p:nvSpPr>
-        <p:spPr>
-          <a:xfrm>
-            <a:off x="4631436" y="2057400"/>
-            <a:ext cx="2926080" cy="365760"/>
-          </a:xfrm>
-          <a:prstGeom prst="rect">
-            <a:avLst/>
-          </a:prstGeom>
-          <a:noFill/>
-          <a:ln/>
-        </p:spPr>
-        <p:txBody>
-          <a:bodyPr wrap="square" lIns="0" tIns="0" rIns="0" bIns="0" rtlCol="0" anchor="ctr"/>
-          <a:lstStyle/>
-          <a:p>
-            <a:pPr algn="ctr" indent="0" marL="0">
-              <a:buNone/>
-            </a:pPr>
-            <a:r>
-              <a:rPr lang="en-US" sz="1150" i="1" dirty="0">
-                <a:solidFill>
-                  <a:srgbClr val="FFFFFF"/>
-                </a:solidFill>
-                <a:latin typeface="Arial" pitchFamily="34" charset="0"/>
-                <a:ea typeface="Arial" pitchFamily="34" charset="-122"/>
-                <a:cs typeface="Arial" pitchFamily="34" charset="-120"/>
-              </a:rPr>
-              <a:t>Economic Vulnerabilities</a:t>
-            </a:r>
-            <a:endParaRPr lang="en-US" sz="1150" dirty="0"/>
-          </a:p>
-        </p:txBody>
-      </p:sp>
-      <p:sp>
-        <p:nvSpPr>
-          <p:cNvPr id="12" name="Text 10"/>
-          <p:cNvSpPr txBox="1"/>
-          <p:nvPr/>
-        </p:nvSpPr>
-        <p:spPr>
-          <a:xfrm>
-            <a:off x="4585716" y="2697480"/>
-            <a:ext cx="3017520" cy="2468880"/>
-          </a:xfrm>
-          <a:prstGeom prst="rect">
-            <a:avLst/>
-          </a:prstGeom>
-          <a:noFill/>
-          <a:ln/>
-        </p:spPr>
-        <p:txBody>
-          <a:bodyPr wrap="square" lIns="0" tIns="0" rIns="0" bIns="0" rtlCol="0" anchor="t"/>
-          <a:lstStyle/>
-          <a:p>
-            <a:pPr algn="r" marL="342900" indent="-342900">
-              <a:spcAft>
-                <a:spcPts val="800"/>
-              </a:spcAft>
-              <a:buSzPct val="100000"/>
-              <a:buChar char="•"/>
-            </a:pPr>
-            <a:r>
-              <a:rPr lang="he-IL" altLang="en-US" sz="1350" dirty="0">
-                <a:solidFill>
-                  <a:srgbClr val="1F2937"/>
-                </a:solidFill>
-                <a:latin typeface="Arial" pitchFamily="34" charset="0"/>
-                <a:ea typeface="Arial" pitchFamily="34" charset="-122"/>
-                <a:cs typeface="Arial" pitchFamily="34" charset="-120"/>
-              </a:rPr>
-              <a:t>תלות בהכנסה מהמשרה</a:t>
-            </a:r>
-            <a:endParaRPr lang="he-IL" sz="1350" dirty="0"/>
-          </a:p>
-          <a:p>
-            <a:pPr algn="r" marL="342900" indent="-342900">
-              <a:spcAft>
-                <a:spcPts val="800"/>
-              </a:spcAft>
-              <a:buSzPct val="100000"/>
-              <a:buChar char="•"/>
-            </a:pPr>
-            <a:r>
-              <a:rPr lang="he-IL" altLang="en-US" sz="1350" dirty="0">
-                <a:solidFill>
-                  <a:srgbClr val="1F2937"/>
-                </a:solidFill>
-                <a:latin typeface="Arial" pitchFamily="34" charset="0"/>
-                <a:ea typeface="Arial" pitchFamily="34" charset="-122"/>
-                <a:cs typeface="Arial" pitchFamily="34" charset="-120"/>
-              </a:rPr>
-              <a:t>חובות והתחייבויות משפחתיות</a:t>
-            </a:r>
-            <a:endParaRPr lang="he-IL" sz="1350" dirty="0"/>
-          </a:p>
-          <a:p>
-            <a:pPr algn="r" marL="342900" indent="-342900">
-              <a:spcAft>
-                <a:spcPts val="800"/>
-              </a:spcAft>
-              <a:buSzPct val="100000"/>
-              <a:buChar char="•"/>
-            </a:pPr>
-            <a:r>
-              <a:rPr lang="he-IL" altLang="en-US" sz="1350" dirty="0">
-                <a:solidFill>
-                  <a:srgbClr val="1F2937"/>
-                </a:solidFill>
-                <a:latin typeface="Arial" pitchFamily="34" charset="0"/>
-                <a:ea typeface="Arial" pitchFamily="34" charset="-122"/>
-                <a:cs typeface="Arial" pitchFamily="34" charset="-120"/>
-              </a:rPr>
-              <a:t>יכולת תעסוקה (Employability)</a:t>
-            </a:r>
-            <a:endParaRPr lang="he-IL" sz="1350" dirty="0"/>
-          </a:p>
-          <a:p>
-            <a:pPr algn="r" marL="342900" indent="-342900">
-              <a:spcAft>
-                <a:spcPts val="800"/>
-              </a:spcAft>
-              <a:buSzPct val="100000"/>
-              <a:buChar char="•"/>
-            </a:pPr>
-            <a:r>
-              <a:rPr lang="he-IL" altLang="en-US" sz="1350" dirty="0">
-                <a:solidFill>
-                  <a:srgbClr val="1F2937"/>
-                </a:solidFill>
-                <a:latin typeface="Arial" pitchFamily="34" charset="0"/>
-                <a:ea typeface="Arial" pitchFamily="34" charset="-122"/>
-                <a:cs typeface="Arial" pitchFamily="34" charset="-120"/>
-              </a:rPr>
-              <a:t>מצב שוק העבודה ורשת ביטחון</a:t>
-            </a:r>
-            <a:endParaRPr lang="he-IL" sz="1350" dirty="0"/>
-          </a:p>
-        </p:txBody>
-      </p:sp>
-      <p:sp>
-        <p:nvSpPr>
-          <p:cNvPr id="13" name="Shape 11"/>
+          <p:cNvPr id="12" name="Shape 10"/>
           <p:cNvSpPr/>
           <p:nvPr/>
         </p:nvSpPr>
         <p:spPr>
           <a:xfrm>
-            <a:off x="548640" y="1371600"/>
-            <a:ext cx="3566160" cy="3886200"/>
+            <a:off x="576072" y="1783080"/>
+            <a:ext cx="3108960" cy="1463040"/>
           </a:xfrm>
           <a:prstGeom prst="roundRect">
             <a:avLst>
-              <a:gd name="adj" fmla="val 3077"/>
+              <a:gd name="adj" fmla="val 7500"/>
             </a:avLst>
           </a:prstGeom>
           <a:solidFill>
-            <a:srgbClr val="FFFFFF"/>
+            <a:srgbClr val="D9822B"/>
           </a:solidFill>
           <a:ln w="12700">
             <a:solidFill>
-              <a:srgbClr val="FFFFFF"/>
+              <a:srgbClr val="D9822B"/>
             </a:solidFill>
             <a:prstDash val="solid"/>
           </a:ln>
@@ -16227,14 +15036,92 @@
       </p:sp>
       <p:sp>
         <p:nvSpPr>
-          <p:cNvPr id="14" name="Shape 12"/>
+          <p:cNvPr id="13" name="Text 11"/>
+          <p:cNvSpPr txBox="1"/>
+          <p:nvPr/>
+        </p:nvSpPr>
+        <p:spPr>
+          <a:xfrm>
+            <a:off x="758952" y="1920240"/>
+            <a:ext cx="2743200" cy="548640"/>
+          </a:xfrm>
+          <a:prstGeom prst="rect">
+            <a:avLst/>
+          </a:prstGeom>
+          <a:noFill/>
+          <a:ln/>
+        </p:spPr>
+        <p:txBody>
+          <a:bodyPr wrap="square" lIns="0" tIns="0" rIns="0" bIns="0" rtlCol="0" anchor="ctr"/>
+          <a:lstStyle/>
+          <a:p>
+            <a:pPr rtl="1" algn="ctr" indent="0" marL="0">
+              <a:buNone/>
+            </a:pPr>
+            <a:r>
+              <a:rPr lang="he-IL" altLang="en-US" sz="1600" b="1" dirty="0">
+                <a:solidFill>
+                  <a:srgbClr val="FFFFFF"/>
+                </a:solidFill>
+                <a:latin typeface="Arial" pitchFamily="34" charset="0"/>
+                <a:ea typeface="Arial" pitchFamily="34" charset="-122"/>
+                <a:cs typeface="Arial" pitchFamily="34" charset="-120"/>
+              </a:rPr>
+              <a:t>תוצאות</a:t>
+            </a:r>
+            <a:endParaRPr lang="he-IL" sz="1600" dirty="0"/>
+          </a:p>
+        </p:txBody>
+      </p:sp>
+      <p:sp>
+        <p:nvSpPr>
+          <p:cNvPr id="14" name="Text 12"/>
+          <p:cNvSpPr txBox="1"/>
+          <p:nvPr/>
+        </p:nvSpPr>
+        <p:spPr>
+          <a:xfrm>
+            <a:off x="758952" y="2514600"/>
+            <a:ext cx="2743200" cy="640080"/>
+          </a:xfrm>
+          <a:prstGeom prst="rect">
+            <a:avLst/>
+          </a:prstGeom>
+          <a:noFill/>
+          <a:ln/>
+        </p:spPr>
+        <p:txBody>
+          <a:bodyPr wrap="square" lIns="0" tIns="0" rIns="0" bIns="0" rtlCol="0" anchor="t"/>
+          <a:lstStyle/>
+          <a:p>
+            <a:pPr rtl="1" algn="ctr" indent="0" marL="0">
+              <a:buNone/>
+            </a:pPr>
+            <a:r>
+              <a:rPr lang="he-IL" altLang="en-US" sz="1200" dirty="0">
+                <a:solidFill>
+                  <a:srgbClr val="F3F4F6"/>
+                </a:solidFill>
+                <a:latin typeface="Arial" pitchFamily="34" charset="0"/>
+                <a:ea typeface="Arial" pitchFamily="34" charset="-122"/>
+                <a:cs typeface="Arial" pitchFamily="34" charset="-120"/>
+              </a:rPr>
+              <a:t>ירידה בביצועי משימה, עלייה בהתנהגות סוטה</a:t>
+            </a:r>
+            <a:endParaRPr lang="he-IL" sz="1200" dirty="0"/>
+          </a:p>
+        </p:txBody>
+      </p:sp>
+      <p:sp>
+        <p:nvSpPr>
+          <p:cNvPr id="15" name="Shape 13"/>
           <p:cNvSpPr/>
           <p:nvPr/>
         </p:nvSpPr>
         <p:spPr>
           <a:xfrm>
-            <a:off x="777240" y="1600200"/>
-            <a:ext cx="3108960" cy="868680"/>
+            <a:off x="6400800" y="3703320"/>
+            <a:ext cx="3840480" cy="868680"/>
           </a:xfrm>
           <a:prstGeom prst="roundRect">
             <a:avLst>
@@ -16254,14 +15141,14 @@
       </p:sp>
       <p:sp>
         <p:nvSpPr>
-          <p:cNvPr id="15" name="Text 13"/>
-          <p:cNvSpPr txBox="1"/>
-          <p:nvPr/>
-        </p:nvSpPr>
-        <p:spPr>
-          <a:xfrm>
-            <a:off x="868680" y="1627632"/>
-            <a:ext cx="2926080" cy="457200"/>
+          <p:cNvPr id="16" name="Text 14"/>
+          <p:cNvSpPr txBox="1"/>
+          <p:nvPr/>
+        </p:nvSpPr>
+        <p:spPr>
+          <a:xfrm>
+            <a:off x="6492240" y="3703320"/>
+            <a:ext cx="3657600" cy="868680"/>
           </a:xfrm>
           <a:prstGeom prst="rect">
             <a:avLst/>
@@ -16277,7 +15164,7 @@
               <a:buNone/>
             </a:pPr>
             <a:r>
-              <a:rPr lang="he-IL" altLang="en-US" sz="1800" b="1" dirty="0">
+              <a:rPr lang="he-IL" altLang="en-US" sz="1600" b="1" dirty="0">
                 <a:solidFill>
                   <a:srgbClr val="FFFFFF"/>
                 </a:solidFill>
@@ -16285,156 +15172,36 @@
                 <a:ea typeface="Arial" pitchFamily="34" charset="-122"/>
                 <a:cs typeface="Arial" pitchFamily="34" charset="-120"/>
               </a:rPr>
-              <a:t>פגיעוּת פסיכולוגית</a:t>
-            </a:r>
-            <a:endParaRPr lang="he-IL" sz="1800" dirty="0"/>
-          </a:p>
-        </p:txBody>
-      </p:sp>
-      <p:sp>
-        <p:nvSpPr>
-          <p:cNvPr id="16" name="Text 14"/>
-          <p:cNvSpPr txBox="1"/>
-          <p:nvPr/>
-        </p:nvSpPr>
-        <p:spPr>
-          <a:xfrm>
-            <a:off x="868680" y="2057400"/>
-            <a:ext cx="2926080" cy="365760"/>
-          </a:xfrm>
-          <a:prstGeom prst="rect">
-            <a:avLst/>
-          </a:prstGeom>
-          <a:noFill/>
-          <a:ln/>
-        </p:spPr>
-        <p:txBody>
-          <a:bodyPr wrap="square" lIns="0" tIns="0" rIns="0" bIns="0" rtlCol="0" anchor="ctr"/>
-          <a:lstStyle/>
-          <a:p>
-            <a:pPr algn="ctr" indent="0" marL="0">
-              <a:buNone/>
-            </a:pPr>
-            <a:r>
-              <a:rPr lang="en-US" sz="1150" i="1" dirty="0">
-                <a:solidFill>
-                  <a:srgbClr val="FFFFFF"/>
-                </a:solidFill>
-                <a:latin typeface="Arial" pitchFamily="34" charset="0"/>
-                <a:ea typeface="Arial" pitchFamily="34" charset="-122"/>
-                <a:cs typeface="Arial" pitchFamily="34" charset="-120"/>
-              </a:rPr>
-              <a:t>Psychological Vulnerabilities</a:t>
-            </a:r>
-            <a:endParaRPr lang="en-US" sz="1150" dirty="0"/>
-          </a:p>
-        </p:txBody>
-      </p:sp>
-      <p:sp>
-        <p:nvSpPr>
-          <p:cNvPr id="17" name="Text 15"/>
-          <p:cNvSpPr txBox="1"/>
-          <p:nvPr/>
-        </p:nvSpPr>
-        <p:spPr>
-          <a:xfrm>
-            <a:off x="822960" y="2697480"/>
-            <a:ext cx="3017520" cy="2468880"/>
-          </a:xfrm>
-          <a:prstGeom prst="rect">
-            <a:avLst/>
-          </a:prstGeom>
-          <a:noFill/>
-          <a:ln/>
-        </p:spPr>
-        <p:txBody>
-          <a:bodyPr wrap="square" lIns="0" tIns="0" rIns="0" bIns="0" rtlCol="0" anchor="t"/>
-          <a:lstStyle/>
-          <a:p>
-            <a:pPr algn="r" marL="342900" indent="-342900">
-              <a:spcAft>
-                <a:spcPts val="800"/>
-              </a:spcAft>
-              <a:buSzPct val="100000"/>
-              <a:buChar char="•"/>
-            </a:pPr>
-            <a:r>
-              <a:rPr lang="he-IL" altLang="en-US" sz="1350" dirty="0">
-                <a:solidFill>
-                  <a:srgbClr val="1F2937"/>
-                </a:solidFill>
-                <a:latin typeface="Arial" pitchFamily="34" charset="0"/>
-                <a:ea typeface="Arial" pitchFamily="34" charset="-122"/>
-                <a:cs typeface="Arial" pitchFamily="34" charset="-120"/>
-              </a:rPr>
-              <a:t>מסוגלות עצמית וסגנון התמודדות</a:t>
-            </a:r>
-            <a:endParaRPr lang="he-IL" sz="1350" dirty="0"/>
-          </a:p>
-          <a:p>
-            <a:pPr algn="r" marL="342900" indent="-342900">
-              <a:spcAft>
-                <a:spcPts val="800"/>
-              </a:spcAft>
-              <a:buSzPct val="100000"/>
-              <a:buChar char="•"/>
-            </a:pPr>
-            <a:r>
-              <a:rPr lang="he-IL" altLang="en-US" sz="1350" dirty="0">
-                <a:solidFill>
-                  <a:srgbClr val="1F2937"/>
-                </a:solidFill>
-                <a:latin typeface="Arial" pitchFamily="34" charset="0"/>
-                <a:ea typeface="Arial" pitchFamily="34" charset="-122"/>
-                <a:cs typeface="Arial" pitchFamily="34" charset="-120"/>
-              </a:rPr>
-              <a:t>עד כמה הזהות שלי = התפקיד</a:t>
-            </a:r>
-            <a:endParaRPr lang="he-IL" sz="1350" dirty="0"/>
-          </a:p>
-          <a:p>
-            <a:pPr algn="r" marL="342900" indent="-342900">
-              <a:spcAft>
-                <a:spcPts val="800"/>
-              </a:spcAft>
-              <a:buSzPct val="100000"/>
-              <a:buChar char="•"/>
-            </a:pPr>
-            <a:r>
-              <a:rPr lang="he-IL" altLang="en-US" sz="1350" dirty="0">
-                <a:solidFill>
-                  <a:srgbClr val="1F2937"/>
-                </a:solidFill>
-                <a:latin typeface="Arial" pitchFamily="34" charset="0"/>
-                <a:ea typeface="Arial" pitchFamily="34" charset="-122"/>
-                <a:cs typeface="Arial" pitchFamily="34" charset="-120"/>
-              </a:rPr>
-              <a:t>עוגן קריירה של ביטחון (Schein)</a:t>
-            </a:r>
-            <a:endParaRPr lang="he-IL" sz="1350" dirty="0"/>
-          </a:p>
-          <a:p>
-            <a:pPr algn="r" marL="342900" indent="-342900">
-              <a:spcAft>
-                <a:spcPts val="800"/>
-              </a:spcAft>
-              <a:buSzPct val="100000"/>
-              <a:buChar char="•"/>
-            </a:pPr>
-            <a:r>
-              <a:rPr lang="he-IL" altLang="en-US" sz="1350" dirty="0">
-                <a:solidFill>
-                  <a:srgbClr val="1F2937"/>
-                </a:solidFill>
-                <a:latin typeface="Arial" pitchFamily="34" charset="0"/>
-                <a:ea typeface="Arial" pitchFamily="34" charset="-122"/>
-                <a:cs typeface="Arial" pitchFamily="34" charset="-120"/>
-              </a:rPr>
-              <a:t>תמיכה חברתית ומשפחתית</a:t>
-            </a:r>
-            <a:endParaRPr lang="he-IL" sz="1350" dirty="0"/>
-          </a:p>
-        </p:txBody>
+              <a:t>חוסן קריירה: מחליש את הקשר</a:t>
+            </a:r>
+            <a:endParaRPr lang="he-IL" sz="1600" dirty="0"/>
+          </a:p>
+        </p:txBody>
+      </p:sp>
+      <p:sp>
+        <p:nvSpPr>
+          <p:cNvPr id="17" name="Shape 15"/>
+          <p:cNvSpPr/>
+          <p:nvPr/>
+        </p:nvSpPr>
+        <p:spPr>
+          <a:xfrm>
+            <a:off x="8092440" y="3291840"/>
+            <a:ext cx="457200" cy="411480"/>
+          </a:xfrm>
+          <a:prstGeom prst="upArrow">
+            <a:avLst/>
+          </a:prstGeom>
+          <a:solidFill>
+            <a:srgbClr val="2A9D8F"/>
+          </a:solidFill>
+          <a:ln w="12700">
+            <a:solidFill>
+              <a:srgbClr val="2A9D8F"/>
+            </a:solidFill>
+            <a:prstDash val="solid"/>
+          </a:ln>
+        </p:spPr>
       </p:sp>
       <p:sp>
         <p:nvSpPr>
@@ -16444,12 +15211,12 @@
         </p:nvSpPr>
         <p:spPr>
           <a:xfrm>
-            <a:off x="548640" y="5440680"/>
-            <a:ext cx="11091672" cy="822960"/>
+            <a:off x="548640" y="4800600"/>
+            <a:ext cx="11091672" cy="1463040"/>
           </a:xfrm>
           <a:prstGeom prst="roundRect">
             <a:avLst>
-              <a:gd name="adj" fmla="val 13333"/>
+              <a:gd name="adj" fmla="val 7500"/>
             </a:avLst>
           </a:prstGeom>
           <a:solidFill>
@@ -16478,34 +15245,80 @@
         </p:nvSpPr>
         <p:spPr>
           <a:xfrm>
-            <a:off x="822960" y="5486400"/>
-            <a:ext cx="10515600" cy="731520"/>
-          </a:xfrm>
-          <a:prstGeom prst="rect">
-            <a:avLst/>
-          </a:prstGeom>
-          <a:noFill/>
-          <a:ln/>
-        </p:spPr>
-        <p:txBody>
-          <a:bodyPr wrap="square" lIns="0" tIns="0" rIns="0" bIns="0" rtlCol="0" anchor="ctr"/>
-          <a:lstStyle/>
-          <a:p>
-            <a:pPr rtl="1" algn="r" indent="0" marL="0">
-              <a:buNone/>
-            </a:pPr>
-            <a:r>
-              <a:rPr lang="he-IL" altLang="en-US" sz="1500" b="1" dirty="0">
-                <a:solidFill>
-                  <a:srgbClr val="2A9D8F"/>
-                </a:solidFill>
-                <a:latin typeface="Arial" pitchFamily="34" charset="0"/>
-                <a:ea typeface="Arial" pitchFamily="34" charset="-122"/>
-                <a:cs typeface="Arial" pitchFamily="34" charset="-120"/>
-              </a:rPr>
-              <a:t>החדשות הטובות: רוב המשתנים האלה ניתנים לפיתוח מראש. זה הגשר בין המאמר לבין ניהול קריירה.</a:t>
-            </a:r>
-            <a:endParaRPr lang="he-IL" sz="1500" dirty="0"/>
+            <a:off x="822960" y="4892040"/>
+            <a:ext cx="10515600" cy="1325880"/>
+          </a:xfrm>
+          <a:prstGeom prst="rect">
+            <a:avLst/>
+          </a:prstGeom>
+          <a:noFill/>
+          <a:ln/>
+        </p:spPr>
+        <p:txBody>
+          <a:bodyPr wrap="square" lIns="0" tIns="0" rIns="0" bIns="0" rtlCol="0" anchor="t"/>
+          <a:lstStyle/>
+          <a:p>
+            <a:pPr algn="r" marL="342900" indent="-342900">
+              <a:spcAft>
+                <a:spcPts val="400"/>
+              </a:spcAft>
+              <a:buSzPct val="100000"/>
+              <a:buChar char="•"/>
+            </a:pPr>
+            <a:r>
+              <a:rPr lang="he-IL" altLang="en-US" sz="1350" dirty="0">
+                <a:solidFill>
+                  <a:srgbClr val="1F2937"/>
+                </a:solidFill>
+                <a:latin typeface="Arial" pitchFamily="34" charset="0"/>
+                <a:ea typeface="Arial" pitchFamily="34" charset="-122"/>
+                <a:cs typeface="Arial" pitchFamily="34" charset="-120"/>
+              </a:rPr>
+              <a:t>מחקר אורך בשלוש נקודות זמן בקרב עובדי משרד במשרה מלאה בדרום קוריאה</a:t>
+            </a:r>
+            <a:endParaRPr lang="he-IL" sz="1350" dirty="0"/>
+          </a:p>
+          <a:p>
+            <a:pPr algn="r" marL="342900" indent="-342900">
+              <a:spcAft>
+                <a:spcPts val="400"/>
+              </a:spcAft>
+              <a:buSzPct val="100000"/>
+              <a:buChar char="•"/>
+            </a:pPr>
+            <a:r>
+              <a:rPr lang="he-IL" altLang="en-US" sz="1350" dirty="0">
+                <a:solidFill>
+                  <a:srgbClr val="1F2937"/>
+                </a:solidFill>
+                <a:latin typeface="Arial" pitchFamily="34" charset="0"/>
+                <a:ea typeface="Arial" pitchFamily="34" charset="-122"/>
+                <a:cs typeface="Arial" pitchFamily="34" charset="-120"/>
+              </a:rPr>
+              <a:t>עצם המודעות לבינה מלאכותית, עוד לפני שינוי בפועל, מספיקה כדי לייצר חוסר ביטחון</a:t>
+            </a:r>
+            <a:endParaRPr lang="he-IL" sz="1350" dirty="0"/>
+          </a:p>
+          <a:p>
+            <a:pPr algn="r" marL="342900" indent="-342900">
+              <a:spcAft>
+                <a:spcPts val="400"/>
+              </a:spcAft>
+              <a:buSzPct val="100000"/>
+              <a:buChar char="•"/>
+            </a:pPr>
+            <a:r>
+              <a:rPr lang="he-IL" altLang="en-US" sz="1350" dirty="0">
+                <a:solidFill>
+                  <a:srgbClr val="1F2937"/>
+                </a:solidFill>
+                <a:latin typeface="Arial" pitchFamily="34" charset="0"/>
+                <a:ea typeface="Arial" pitchFamily="34" charset="-122"/>
+                <a:cs typeface="Arial" pitchFamily="34" charset="-120"/>
+              </a:rPr>
+              <a:t>החדשות הטובות: אצל בעלי חוסן קריירה גבוה הקשר חלש יותר. חוסן אפשר לבנות</a:t>
+            </a:r>
+            <a:endParaRPr lang="he-IL" sz="1350" dirty="0"/>
           </a:p>
         </p:txBody>
       </p:sp>

--- a/career-management-final-project/ניהול קריירה - התמודדות עם חוסר ודאות תעסוקתי - מצגת.pptx
+++ b/career-management-final-project/ניהול קריירה - התמודדות עם חוסר ודאות תעסוקתי - מצגת.pptx
@@ -326,6 +326,377 @@
 </c:chartSpace>
 </file>
 
+<file path=ppt/charts/chart2.xml><?xml version="1.0" encoding="utf-8"?>
+<c:chartSpace xmlns:c="http://schemas.openxmlformats.org/drawingml/2006/chart" xmlns:a="http://schemas.openxmlformats.org/drawingml/2006/main" xmlns:r="http://schemas.openxmlformats.org/officeDocument/2006/relationships">
+  <c:date1904 val="0"/>
+  <c:roundedCorners val="1"/>
+  <c:chart>
+    <c:title>
+      <c:tx>
+        <c:rich>
+          <a:bodyPr/>
+          <a:lstStyle/>
+          <a:p>
+            <a:pPr>
+              <a:defRPr sz="1200" b="0" i="0" u="none" strike="noStrike">
+                <a:solidFill>
+                  <a:srgbClr val="14213D"/>
+                </a:solidFill>
+                <a:latin typeface="Arial"/>
+              </a:defRPr>
+            </a:pPr>
+            <a:r>
+              <a:rPr sz="1200" b="0" i="0" u="none" strike="noStrike">
+                <a:solidFill>
+                  <a:srgbClr val="14213D"/>
+                </a:solidFill>
+                <a:latin typeface="Arial"/>
+              </a:rPr>
+              <a:t>מקדם ניבוי מתוקנן (β) של רכיבי תחושת הקוהרנטיות בגל 2</a:t>
+            </a:r>
+          </a:p>
+        </c:rich>
+      </c:tx>
+      <c:layout/>
+      <c:overlay val="0"/>
+    </c:title>
+    <c:autoTitleDeleted val="0"/>
+    <c:plotArea>
+      <c:layout/>
+      <c:barChart>
+        <c:barDir val="col"/>
+        <c:grouping val="clustered"/>
+        <c:varyColors val="0"/>
+        <c:ser>
+          <c:idx val="0"/>
+          <c:order val="0"/>
+          <c:tx>
+            <c:strRef>
+              <c:f>Sheet1!$B$1</c:f>
+              <c:strCache>
+                <c:ptCount val="1"/>
+                <c:pt idx="0">
+                  <c:v>עיצוב לצרכי התקרבות</c:v>
+                </c:pt>
+              </c:strCache>
+            </c:strRef>
+          </c:tx>
+          <c:spPr>
+            <a:solidFill>
+              <a:srgbClr val="2A9D8F"/>
+            </a:solidFill>
+            <a:effectLst/>
+          </c:spPr>
+          <c:invertIfNegative val="0"/>
+          <c:dLbls>
+            <c:numFmt formatCode="0.000" sourceLinked="0"/>
+            <c:txPr>
+              <a:bodyPr/>
+              <a:lstStyle/>
+              <a:p>
+                <a:pPr>
+                  <a:defRPr b="0" i="0" strike="noStrike" sz="1000" u="none">
+                    <a:solidFill>
+                      <a:srgbClr val="1F2937"/>
+                    </a:solidFill>
+                    <a:latin typeface="Arial"/>
+                  </a:defRPr>
+                </a:pPr>
+              </a:p>
+            </c:txPr>
+            <c:showLegendKey val="0"/>
+            <c:showVal val="1"/>
+            <c:showCatName val="0"/>
+            <c:showSerName val="0"/>
+            <c:showPercent val="0"/>
+            <c:showBubbleSize val="0"/>
+            <c:showLeaderLines val="0"/>
+          </c:dLbls>
+          <c:cat>
+            <c:multiLvlStrRef>
+              <c:f>Sheet1!$A$2:$A$4</c:f>
+              <c:multiLvlStrCache>
+                <c:ptCount val="3"/>
+                <c:lvl>
+                  <c:pt idx="0">
+                    <c:v>מובנות</c:v>
+                  </c:pt>
+                  <c:pt idx="1">
+                    <c:v>ניהוליות</c:v>
+                  </c:pt>
+                  <c:pt idx="2">
+                    <c:v>משמעותיות</c:v>
+                  </c:pt>
+                </c:lvl>
+              </c:multiLvlStrCache>
+            </c:multiLvlStrRef>
+          </c:cat>
+          <c:val>
+            <c:numRef>
+              <c:f>Sheet1!$B$2:$B$4</c:f>
+              <c:numCache>
+                <c:formatCode>General</c:formatCode>
+                <c:ptCount val="3"/>
+                <c:pt idx="0">
+                  <c:v>0.142</c:v>
+                </c:pt>
+                <c:pt idx="1">
+                  <c:v>0.137</c:v>
+                </c:pt>
+                <c:pt idx="2">
+                  <c:v>0.166</c:v>
+                </c:pt>
+              </c:numCache>
+            </c:numRef>
+          </c:val>
+        </c:ser>
+        <c:ser>
+          <c:idx val="1"/>
+          <c:order val="1"/>
+          <c:tx>
+            <c:strRef>
+              <c:f>Sheet1!$C$1</c:f>
+              <c:strCache>
+                <c:ptCount val="1"/>
+                <c:pt idx="0">
+                  <c:v>עיצוב לצרכי הימנעות</c:v>
+                </c:pt>
+              </c:strCache>
+            </c:strRef>
+          </c:tx>
+          <c:spPr>
+            <a:solidFill>
+              <a:srgbClr val="B0B7C3"/>
+            </a:solidFill>
+            <a:effectLst/>
+          </c:spPr>
+          <c:invertIfNegative val="0"/>
+          <c:dLbls>
+            <c:numFmt formatCode="0.000" sourceLinked="0"/>
+            <c:txPr>
+              <a:bodyPr/>
+              <a:lstStyle/>
+              <a:p>
+                <a:pPr>
+                  <a:defRPr b="0" i="0" strike="noStrike" sz="1000" u="none">
+                    <a:solidFill>
+                      <a:srgbClr val="1F2937"/>
+                    </a:solidFill>
+                    <a:latin typeface="Arial"/>
+                  </a:defRPr>
+                </a:pPr>
+              </a:p>
+            </c:txPr>
+            <c:showLegendKey val="0"/>
+            <c:showVal val="1"/>
+            <c:showCatName val="0"/>
+            <c:showSerName val="0"/>
+            <c:showPercent val="0"/>
+            <c:showBubbleSize val="0"/>
+            <c:showLeaderLines val="0"/>
+          </c:dLbls>
+          <c:cat>
+            <c:multiLvlStrRef>
+              <c:f>Sheet1!$A$2:$A$4</c:f>
+              <c:multiLvlStrCache>
+                <c:ptCount val="3"/>
+                <c:lvl>
+                  <c:pt idx="0">
+                    <c:v>מובנות</c:v>
+                  </c:pt>
+                  <c:pt idx="1">
+                    <c:v>ניהוליות</c:v>
+                  </c:pt>
+                  <c:pt idx="2">
+                    <c:v>משמעותיות</c:v>
+                  </c:pt>
+                </c:lvl>
+              </c:multiLvlStrCache>
+            </c:multiLvlStrRef>
+          </c:cat>
+          <c:val>
+            <c:numRef>
+              <c:f>Sheet1!$C$2:$C$4</c:f>
+              <c:numCache>
+                <c:formatCode>General</c:formatCode>
+                <c:ptCount val="3"/>
+                <c:pt idx="0">
+                  <c:v>0.077</c:v>
+                </c:pt>
+                <c:pt idx="1">
+                  <c:v>0.09</c:v>
+                </c:pt>
+                <c:pt idx="2">
+                  <c:v>0.027</c:v>
+                </c:pt>
+              </c:numCache>
+            </c:numRef>
+          </c:val>
+        </c:ser>
+        <c:dLbls>
+          <c:numFmt formatCode="0.000" sourceLinked="0"/>
+          <c:txPr>
+            <a:bodyPr/>
+            <a:lstStyle/>
+            <a:p>
+              <a:pPr>
+                <a:defRPr b="0" i="0" strike="noStrike" sz="1000" u="none">
+                  <a:solidFill>
+                    <a:srgbClr val="1F2937"/>
+                  </a:solidFill>
+                  <a:latin typeface="Arial"/>
+                </a:defRPr>
+              </a:pPr>
+            </a:p>
+          </c:txPr>
+          <c:showLegendKey val="0"/>
+          <c:showVal val="1"/>
+          <c:showCatName val="0"/>
+          <c:showSerName val="0"/>
+          <c:showPercent val="0"/>
+          <c:showBubbleSize val="0"/>
+          <c:showLeaderLines val="0"/>
+        </c:dLbls>
+        <c:gapWidth val="150"/>
+        <c:overlap val="0"/>
+        <c:axId val="2094734554"/>
+        <c:axId val="2094734552"/>
+        <c:axId val="2094734556"/>
+      </c:barChart>
+      <c:catAx>
+        <c:axId val="2094734554"/>
+        <c:scaling>
+          <c:orientation val="minMax"/>
+        </c:scaling>
+        <c:delete val="0"/>
+        <c:axPos val="b"/>
+        <c:numFmt formatCode="General" sourceLinked="1"/>
+        <c:majorTickMark val="out"/>
+        <c:minorTickMark val="none"/>
+        <c:tickLblPos val="low"/>
+        <c:spPr>
+          <a:ln w="12700" cap="flat">
+            <a:solidFill>
+              <a:srgbClr val="888888"/>
+            </a:solidFill>
+            <a:prstDash val="solid"/>
+            <a:round/>
+          </a:ln>
+        </c:spPr>
+        <c:txPr>
+          <a:bodyPr/>
+          <a:lstStyle/>
+          <a:p>
+            <a:pPr>
+              <a:defRPr sz="1100" b="0" i="0" u="none" strike="noStrike">
+                <a:solidFill>
+                  <a:srgbClr val="1F2937"/>
+                </a:solidFill>
+                <a:latin typeface="Arial"/>
+              </a:defRPr>
+            </a:pPr>
+            <a:endParaRPr lang="en-US"/>
+          </a:p>
+        </c:txPr>
+        <c:crossAx val="2094734552"/>
+        <c:crosses val="autoZero"/>
+        <c:auto val="1"/>
+        <c:lblAlgn val="ctr"/>
+        <c:noMultiLvlLbl val="1"/>
+      </c:catAx>
+      <c:valAx>
+        <c:axId val="2094734552"/>
+        <c:scaling>
+          <c:orientation val="minMax"/>
+          <c:max val="0.2"/>
+          <c:min val="0"/>
+        </c:scaling>
+        <c:delete val="0"/>
+        <c:axPos val="l"/>
+        <c:majorGridlines>
+          <c:spPr>
+            <a:ln w="6350" cap="flat">
+              <a:solidFill>
+                <a:srgbClr val="E5E7EB"/>
+              </a:solidFill>
+              <a:prstDash val="solid"/>
+              <a:round/>
+            </a:ln>
+          </c:spPr>
+        </c:majorGridlines>
+        <c:numFmt formatCode="General" sourceLinked="0"/>
+        <c:majorTickMark val="out"/>
+        <c:minorTickMark val="none"/>
+        <c:tickLblPos val="nextTo"/>
+        <c:spPr>
+          <a:ln w="12700" cap="flat">
+            <a:solidFill>
+              <a:srgbClr val="888888"/>
+            </a:solidFill>
+            <a:prstDash val="solid"/>
+            <a:round/>
+          </a:ln>
+        </c:spPr>
+        <c:txPr>
+          <a:bodyPr/>
+          <a:lstStyle/>
+          <a:p>
+            <a:pPr>
+              <a:defRPr sz="900" b="0" i="0" u="none" strike="noStrike">
+                <a:solidFill>
+                  <a:srgbClr val="6B7280"/>
+                </a:solidFill>
+                <a:latin typeface="Arial"/>
+              </a:defRPr>
+            </a:pPr>
+            <a:endParaRPr lang="en-US"/>
+          </a:p>
+        </c:txPr>
+        <c:crossAx val="2094734554"/>
+        <c:crosses val="autoZero"/>
+        <c:crossBetween val="between"/>
+      </c:valAx>
+      <c:spPr>
+        <a:noFill/>
+        <a:ln>
+          <a:noFill/>
+        </a:ln>
+        <a:effectLst/>
+      </c:spPr>
+    </c:plotArea>
+    <c:legend>
+      <c:legendPos val="b"/>
+      <c:overlay val="0"/>
+      <c:txPr>
+        <a:bodyPr/>
+        <a:lstStyle/>
+        <a:p>
+          <a:pPr>
+            <a:defRPr sz="1000">
+              <a:latin typeface="Arial"/>
+              <a:cs typeface="Arial"/>
+            </a:defRPr>
+          </a:pPr>
+          <a:endParaRPr lang="en-US"/>
+        </a:p>
+      </c:txPr>
+    </c:legend>
+    <c:plotVisOnly val="1"/>
+    <c:dispBlanksAs val="span"/>
+  </c:chart>
+  <c:spPr>
+    <a:noFill/>
+    <a:ln>
+      <a:noFill/>
+    </a:ln>
+    <a:effectLst/>
+  </c:spPr>
+  <c:externalData r:id="rId1">
+    <c:autoUpdate val="0"/>
+  </c:externalData>
+</c:chartSpace>
+</file>
+
 <file path=ppt/notesMasters/notesMaster1.xml><?xml version="1.0" encoding="utf-8"?>
 <p:notesMaster xmlns:a="http://schemas.openxmlformats.org/drawingml/2006/main" xmlns:r="http://schemas.openxmlformats.org/officeDocument/2006/relationships" xmlns:p="http://schemas.openxmlformats.org/presentationml/2006/main">
   <p:cSld>
@@ -721,7 +1092,7 @@
           <a:p>
             <a:r>
               <a:rPr lang="en-US" dirty="0"/>
-              <a:t>פתיחה (30 שניות): שלום לכולם, אנחנו [שמות]. הנושא שלנו הוא התמודדות עם חוסר ודאות תעסוקתי. השאלה שנשאל היום: כשאנחנו מפחדים לאבד את העבודה, זה עושה אותנו טובים יותר או גרוע יותר בניהול הקריירה שלנו? מטא-אנליזה של 237 מחקרים נותנת תשובה.</a:t>
+              <a:t>פתיחה (30 שניות): שלום לכולם, אנחנו [שמות]. הנושא שלנו הוא התמודדות עם חוסר ודאות תעסוקתי. במקום לשאול מה אי-הוודאות עושה לנו, נשאל מה אנחנו יכולים לעשות לה: מחקר אורך מ-2026 על 924 עובדים נותן תשובה מפתיעה בפשטותה.</a:t>
             </a:r>
             <a:endParaRPr lang="en-US" dirty="0"/>
           </a:p>
@@ -809,7 +1180,7 @@
           <a:p>
             <a:r>
               <a:rPr lang="en-US" dirty="0"/>
-              <a:t>זה הלב של המסר. הממצאים מראים מעגל: איום, הגנה על משאבים, פחות השקעה בעצמי, ואז פחות משאבים לאיום הבא. הדרך היחידה לצאת היא לשבור את המעגל מראש.</a:t>
+              <a:t>זה הלב של המסר. הספירלה עובדת לשני הכיוונים: משאבים מולידים יוזמה שמולידה משאבים. אבל בלי משאבים, האיום משתק. לכן העצה "תעצבו את התפקיד" נכונה, אבל צריך לתת אותה לפני שהאיום מגיע.</a:t>
             </a:r>
             <a:endParaRPr lang="en-US" dirty="0"/>
           </a:p>
@@ -897,7 +1268,7 @@
           <a:p>
             <a:r>
               <a:rPr lang="en-US" dirty="0"/>
-              <a:t>להגיד את הביקורת בקול. ועדיין, זה המאמר שהכי שינה את הדרך שבה אנחנו חושבים על הקריירה שלנו.</a:t>
+              <a:t>להגיד את הביקורת בקול. ועדיין, זה המאמר שנתן לנו הכי הרבה מה לעשות מחר בבוקר.</a:t>
             </a:r>
             <a:endParaRPr lang="en-US" dirty="0"/>
           </a:p>
@@ -985,7 +1356,7 @@
           <a:p>
             <a:r>
               <a:rPr lang="en-US" dirty="0"/>
-              <a:t>להקרין כ-90 שניות (לבדוק את הטיים-קוד מראש). לחבר את העיקרון השלישי לממצא: הסתרת ידע וחיפוש עבודה בלבד הן תגובות ש"פוגעות בי" בטווח הארוך; פיתוח מיומנויות "עוזר לי".</a:t>
+              <a:t>להקרין כ-90 שניות (לבדוק את הטיים-קוד מראש). לחבר: "לבחור במה להתמקד" זה בדיוק לעצב את התפקיד סביב מה שבשליטתי.</a:t>
             </a:r>
             <a:endParaRPr lang="en-US" dirty="0"/>
           </a:p>
@@ -1073,7 +1444,7 @@
           <a:p>
             <a:r>
               <a:rPr lang="en-US" dirty="0"/>
-              <a:t>זה הכלי שאנחנו משאירים לכיתה. שלב 2 הוא הלב: לשבור את המעגל על ידי השקעה בפיתוח מיומנויות לפני שהאיום מדלדל את היכולת לעשות זאת.</a:t>
+              <a:t>זה הכלי שאנחנו משאירים לכיתה. ארבעה צרכים, שאלה אחת לכל צורך, ופעולות שאפשר לעשות גם במשרה סטודנטיאלית. ניתוק והרפיה חשובים להתאוששות, אבל לפי המאמר לא משנים את תפיסת העבודה.</a:t>
             </a:r>
             <a:endParaRPr lang="en-US" dirty="0"/>
           </a:p>
@@ -1161,7 +1532,7 @@
           <a:p>
             <a:r>
               <a:rPr lang="en-US" dirty="0"/>
-              <a:t>לחלק כרטיסים מודפסים (או להשאיר את השקופית). 2 דקות. אחר כך לשמוע 2 עד 3 זוגות. לחבר למאמר: "שימו לב כמה מכם קפצו ישר לחיפוש עבודה. זו בדיוק תגובת ה"הלאה" שהמטא-אנליזה מצאה. מי חשב על מה ללמוד?"</a:t>
+              <a:t>לחלק כרטיסיות מודפסות או להשאיר את השקופית. אחרי השיתוף לחבר לממצא: "פעולות כאלה, לפי המאמר, מנבאות עלייה בבהירות, בשליטה ובמשמעות חצי שנה מאוחר יותר. ושימו לב: אף אחד לא בחר 'לנוח יותר'. זה נכון, וזה גם מה שהמאמר מצא".</a:t>
             </a:r>
             <a:endParaRPr lang="en-US" dirty="0"/>
           </a:p>
@@ -1249,7 +1620,7 @@
           <a:p>
             <a:r>
               <a:rPr lang="en-US" dirty="0"/>
-              <a:t>לחזור לתוצאות הסקר מהפתיחה: "מי שסימן 1 או 2: המאמר אומר שהתגובה הטבעית שלכם תהיה לברוח. עצרו רגע ותשאלו מה ללמוד. מי שסימן 5: יופי, זה הזמן להשקיע, כי עכשיו יש לכם משאבים". לסיים במסר ולפתוח לשאלות.</a:t>
+              <a:t>לחזור לתוצאות הסקר מהפתיחה: "מי שסימן נמוך בשאלה 1 או 2: המאמר אומר שזה לא גזירת גורל, ושהפעולה שכתבתם עכשיו היא בדיוק הדרך לשנות את זה". לסיים במסר ולפתוח לשאלות.</a:t>
             </a:r>
             <a:endParaRPr lang="en-US" dirty="0"/>
           </a:p>
@@ -1513,7 +1884,7 @@
           <a:p>
             <a:r>
               <a:rPr lang="en-US" dirty="0"/>
-              <a:t>להריץ סקר מנטימטר (או הרמת ידיים). לצלם מסך של התוצאות. לומר: "שימו לב לפיזור. אותו שוק, אותה כיתה, תחושות שונות לגמרי".</a:t>
+              <a:t>להריץ סקר מנטימטר או הרמת ידיים לכל שאלה. לא להסביר עדיין את המושג, רק לומר שנחזור לזה. לצלם מסך של התוצאות.</a:t>
             </a:r>
             <a:endParaRPr lang="en-US" dirty="0"/>
           </a:p>
@@ -1601,7 +1972,7 @@
           <a:p>
             <a:r>
               <a:rPr lang="en-US" dirty="0"/>
-              <a:t>כתבת עיתון: להציג את הכותרת של TheMarker (21.6.2026). נתון בנק ישראל: כחמישית מהמועסקים במקצועות תחליפיים. המסר: חוסר ביטחון הוא לא רק "האם אפוטר" אלא "האם התפקיד שלי ישתנה".</a:t>
+              <a:t>כתבת עיתון: להציג את הכותרת של TheMarker (21.6.2026). נתון בנק ישראל: כחמישית מהמועסקים במקצועות תחליפיים. המסר: הארגון לא יכול להבטיח ודאות. השאלה היא מה נשאר בידיים שלנו.</a:t>
             </a:r>
             <a:endParaRPr lang="en-US" dirty="0"/>
           </a:p>
@@ -1689,7 +2060,7 @@
           <a:p>
             <a:r>
               <a:rPr lang="en-US" dirty="0"/>
-              <a:t>להציג את המאמר במשפט: זו לא סקירה של מחקר אחד אלא איחוד סטטיסטי של 237 מחקרים. מגנוס סברקה ויוהני הלגרן מאוניברסיטת סטוקהולם חוקרים את הנושא כבר 30 שנה. בהגשה בשלשה: להרחיב על המאמר של צ'ונג ואחרים בשקופית 9.</a:t>
+              <a:t>להציג את המאמר במשפט: מחקר שעקב אחרי כמעט אלף עובדים במשך חצי שנה ובדק אם מה שהם עושים בתפקיד משנה את איך שהם תופסים אותו. בהגשה בשלשה: להרחיב על צ'ונג ואחרים בשקופית 9.</a:t>
             </a:r>
             <a:endParaRPr lang="en-US" dirty="0"/>
           </a:p>
@@ -1777,7 +2148,7 @@
           <a:p>
             <a:r>
               <a:rPr lang="en-US" dirty="0"/>
-              <a:t>שתי תחזיות מנוגדות. האינטואיציה של רוב האנשים היא תחזית א: "פחד מחדד". התיאוריה חוזה את ב. עכשיו נראה מה 237 מחקרים אומרים.</a:t>
+              <a:t>שני מושגים, ואז השאלה: האם הימני (מה שהעובד עושה) משנה את השמאלי (איך העבודה נתפסת)? להזכיר שאנטונובסקי פעל באוניברסיטת בן-גוריון, ושחוסר ודאות הוא במונחים שלו פגיעה במובנות.</a:t>
             </a:r>
             <a:endParaRPr lang="en-US" dirty="0"/>
           </a:p>
@@ -1865,7 +2236,7 @@
           <a:p>
             <a:r>
               <a:rPr lang="en-US" dirty="0"/>
-              <a:t>לקרוא: מימין, כל מה שקשור להתקדמות למעלה יורד עם חוסר הביטחון. משמאל, כל מה שקשור לבריחה והגנה עולה. לשים לב להסתרת ידע: תגובה רציונלית של עובד שחושב שהידע שלו הוא מה שמגן עליו, והרסנית לארגון.</a:t>
+              <a:t>לקרוא מימין לשמאל: מי שעיצב את התפקיד סביב אוטונומיה, מיומנות, משמעות ושייכות, תפס את העבודה חצי שנה אחר כך כברורה יותר, בשליטה יותר ומשמעותית יותר, מעבר ליציבות של המדדים עצמם. מי שרק התנתק ונח: שום שינוי בתפיסה. והקו למטה: המשאבים מזינים את היוזמה.</a:t>
             </a:r>
             <a:endParaRPr lang="en-US" dirty="0"/>
           </a:p>
@@ -1953,7 +2324,7 @@
           <a:p>
             <a:r>
               <a:rPr lang="en-US" dirty="0"/>
-              <a:t>מטא-אנליזה = מחקר שמאחד סטטיסטית מחקרים רבים. להסביר בקצרה חתך לעומת אורך: במחקר חתך מודדים הכול באותו רגע, ואז קשרים נראים חזקים יותר. זו כנות של המחברים שאהבנו.</a:t>
+              <a:t>הגרף: שלוש עמודות ירוקות (התקרבות) מול שלוש אפורות (הימנעות). מקדם 0.14 עד 0.17 נשמע קטן, אבל המדדים האלה יציבים מאוד, ולכן כל שינוי שנשאר אחרי חצי שנה משמעותי. להזכיר בכנות: מתאמים בזמן, לא סיבתיות.</a:t>
             </a:r>
             <a:endParaRPr lang="en-US" dirty="0"/>
           </a:p>
@@ -2041,7 +2412,7 @@
           <a:p>
             <a:r>
               <a:rPr lang="en-US" dirty="0"/>
-              <a:t>המאמר הזה מסביר מאיפה מגיע חוסר הביטחון של 2026 ומה ממתן אותו. לחבר לסקר הפתיחה: מי שסימן 1 או 2, ייתכן שזו בדיוק המודעות לבינה מלאכותית. בהגשה בזוג אפשר לקצר שקופית זו לחצי דקה.</a:t>
+              <a:t>המשלים = האבחנה: מאיפה מגיע חוסר הביטחון של 2026 ומה ממתן אותו. המרכזי = הטיפול: איך בונים את המשאב. בהגשה בזוג אפשר לקצר שקופית זו לחצי דקה.</a:t>
             </a:r>
             <a:endParaRPr lang="en-US" dirty="0"/>
           </a:p>
@@ -2575,7 +2946,7 @@
                 <a:ea typeface="Arial" pitchFamily="34" charset="-122"/>
                 <a:cs typeface="Arial" pitchFamily="34" charset="-120"/>
               </a:rPr>
-              <a:t>הלאה או למעלה? מה חוסר ביטחון תעסוקתי עושה לקריירה שלנו</a:t>
+              <a:t>איך בונים בהירות, שליטה ומשמעות בעבודה כשהסביבה לא יציבה?</a:t>
             </a:r>
             <a:endParaRPr lang="he-IL" sz="2200" dirty="0"/>
           </a:p>
@@ -2614,7 +2985,7 @@
                 <a:ea typeface="Arial" pitchFamily="34" charset="-122"/>
                 <a:cs typeface="Arial" pitchFamily="34" charset="-120"/>
               </a:rPr>
-              <a:t>Låstad, L., Pienaar, J., Näswall, K., Richter, A., Hellgren, J., &amp; Sverke, M. (2025). Moving on up now? A meta-analysis of the associations between job insecurity and career-related outcomes. Scandinavian Journal of Work and Organizational Psychology, 10(1), Article 2.</a:t>
+              <a:t>Cetkovská, K., Bauer, G. F., &amp; Tušl, M. (2026). The role of needs-based job crafting in strengthening work-related sense of coherence: A two-wave panel study. Scandinavian Journal of Work and Organizational Psychology, 11(1), Article 14.</a:t>
             </a:r>
             <a:endParaRPr lang="en-US" sz="1200" dirty="0"/>
           </a:p>
@@ -2915,7 +3286,7 @@
                 <a:ea typeface="Arial" pitchFamily="34" charset="-122"/>
                 <a:cs typeface="Arial" pitchFamily="34" charset="-120"/>
               </a:rPr>
-              <a:t>התובנה המרכזית: מעגל קסמים</a:t>
+              <a:t>התובנה המרכזית: המשאבים קודמים ליוזמה</a:t>
             </a:r>
             <a:endParaRPr lang="he-IL" sz="3000" dirty="0"/>
           </a:p>
@@ -2938,11 +3309,11 @@
             </a:avLst>
           </a:prstGeom>
           <a:solidFill>
-            <a:srgbClr val="E76F51"/>
+            <a:srgbClr val="FCA311"/>
           </a:solidFill>
           <a:ln w="12700">
             <a:solidFill>
-              <a:srgbClr val="E76F51"/>
+              <a:srgbClr val="FCA311"/>
             </a:solidFill>
             <a:prstDash val="solid"/>
           </a:ln>
@@ -2988,7 +3359,7 @@
                 <a:ea typeface="Arial" pitchFamily="34" charset="-122"/>
                 <a:cs typeface="Arial" pitchFamily="34" charset="-120"/>
               </a:rPr>
-              <a:t>חוסר ביטחון תעסוקתי</a:t>
+              <a:t>תחושת ניהוליות</a:t>
             </a:r>
             <a:endParaRPr lang="he-IL" sz="1450" dirty="0"/>
           </a:p>
@@ -3027,7 +3398,7 @@
                 <a:ea typeface="Arial" pitchFamily="34" charset="-122"/>
                 <a:cs typeface="Arial" pitchFamily="34" charset="-120"/>
               </a:rPr>
-              <a:t>האיום על המשרה</a:t>
+              <a:t>"יש לי מספיק משאבים"</a:t>
             </a:r>
             <a:endParaRPr lang="he-IL" sz="1150" dirty="0"/>
           </a:p>
@@ -3050,11 +3421,11 @@
             </a:avLst>
           </a:prstGeom>
           <a:solidFill>
-            <a:srgbClr val="D9822B"/>
+            <a:srgbClr val="2A9D8F"/>
           </a:solidFill>
           <a:ln w="12700">
             <a:solidFill>
-              <a:srgbClr val="D9822B"/>
+              <a:srgbClr val="2A9D8F"/>
             </a:solidFill>
             <a:prstDash val="solid"/>
           </a:ln>
@@ -3100,7 +3471,7 @@
                 <a:ea typeface="Arial" pitchFamily="34" charset="-122"/>
                 <a:cs typeface="Arial" pitchFamily="34" charset="-120"/>
               </a:rPr>
-              <a:t>פחות פיתוח מיומנויות, פחות יכולת תעסוקה</a:t>
+              <a:t>עיצוב תפקיד לצרכי התקרבות</a:t>
             </a:r>
             <a:endParaRPr lang="he-IL" sz="1450" dirty="0"/>
           </a:p>
@@ -3139,7 +3510,7 @@
                 <a:ea typeface="Arial" pitchFamily="34" charset="-122"/>
                 <a:cs typeface="Arial" pitchFamily="34" charset="-120"/>
               </a:rPr>
-              <a:t>מגנים על מה שנשאר במקום להשקיע</a:t>
+              <a:t>β = 0.431: המנבא החזק ביותר במודל</a:t>
             </a:r>
             <a:endParaRPr lang="he-IL" sz="1150" dirty="0"/>
           </a:p>
@@ -3212,7 +3583,7 @@
                 <a:ea typeface="Arial" pitchFamily="34" charset="-122"/>
                 <a:cs typeface="Arial" pitchFamily="34" charset="-120"/>
               </a:rPr>
-              <a:t>פחות משאבים להתמודד עם האיום הבא</a:t>
+              <a:t>בהירות, שליטה ומשמעות</a:t>
             </a:r>
             <a:endParaRPr lang="he-IL" sz="1450" dirty="0"/>
           </a:p>
@@ -3251,7 +3622,7 @@
                 <a:ea typeface="Arial" pitchFamily="34" charset="-122"/>
                 <a:cs typeface="Arial" pitchFamily="34" charset="-120"/>
               </a:rPr>
-              <a:t>ספירלת אובדן (Hobfoll, 1989)</a:t>
+              <a:t>חצי שנה אחר כך</a:t>
             </a:r>
             <a:endParaRPr lang="he-IL" sz="1150" dirty="0"/>
           </a:p>
@@ -3365,7 +3736,7 @@
                 <a:ea typeface="Arial" pitchFamily="34" charset="-122"/>
                 <a:cs typeface="Arial" pitchFamily="34" charset="-120"/>
               </a:rPr>
-              <a:t>חוזר להתחלה</a:t>
+              <a:t>ספירלת רווח: חוזר להתחלה</a:t>
             </a:r>
             <a:endParaRPr lang="he-IL" sz="1200" dirty="0"/>
           </a:p>
@@ -3430,7 +3801,7 @@
               <a:buNone/>
             </a:pPr>
             <a:r>
-              <a:rPr lang="he-IL" altLang="en-US" sz="1500" b="1" dirty="0">
+              <a:rPr lang="he-IL" altLang="en-US" sz="1400" b="1" dirty="0">
                 <a:solidFill>
                   <a:srgbClr val="14213D"/>
                 </a:solidFill>
@@ -3438,9 +3809,9 @@
                 <a:ea typeface="Arial" pitchFamily="34" charset="-122"/>
                 <a:cs typeface="Arial" pitchFamily="34" charset="-120"/>
               </a:rPr>
-              <a:t>חוסר ביטחון מקטין בדיוק את המשאבים שמגנים מפניו (Låstad et al., 2025). לכן ההשקעה בעצמי צריכה לקרות דווקא כשהיא נראית הכי פחות דחופה: בתקופות של יציבות, לפני שהאיום מגיע.</a:t>
-            </a:r>
-            <a:endParaRPr lang="he-IL" sz="1500" dirty="0"/>
+              <a:t>ההיפוך: המטא-אנליזה של לוסטד ואחרים (Låstad et al., 2025) מראה שחוסר ביטחון מקטין יוזמה ופיתוח מיומנויות. מי שמרגיש שאין לו משאבים לא מעצב את תפקידו, אלא מגן על מה שנשאר. לכן בונים ניהוליות בתקופות של יציבות, לא מחכים לאיום.</a:t>
+            </a:r>
+            <a:endParaRPr lang="he-IL" sz="1400" dirty="0"/>
           </a:p>
         </p:txBody>
       </p:sp>
@@ -3696,7 +4067,7 @@
                 <a:ea typeface="Arial" pitchFamily="34" charset="-122"/>
                 <a:cs typeface="Arial" pitchFamily="34" charset="-120"/>
               </a:rPr>
-              <a:t>תשובה מבוססת 237 מחקרים לשאלה שכולנו שואלים: האם הפחד מחדד? לא.</a:t>
+              <a:t>נקודת המבט: מה עוזר, לא רק מה מזיק. רעיון ישראלי מבן-גוריון</a:t>
             </a:r>
             <a:endParaRPr lang="he-IL" sz="1300" dirty="0"/>
           </a:p>
@@ -3717,7 +4088,7 @@
                 <a:ea typeface="Arial" pitchFamily="34" charset="-122"/>
                 <a:cs typeface="Arial" pitchFamily="34" charset="-120"/>
               </a:rPr>
-              <a:t>הכותרת מכניסה את כל המאמר לשלוש מילים</a:t>
+              <a:t>פרקטי: שישה צרכים, שאלות פשוטות, פעולות לשבועיים</a:t>
             </a:r>
             <a:endParaRPr lang="he-IL" sz="1300" dirty="0"/>
           </a:p>
@@ -3738,7 +4109,7 @@
                 <a:ea typeface="Arial" pitchFamily="34" charset="-122"/>
                 <a:cs typeface="Arial" pitchFamily="34" charset="-120"/>
               </a:rPr>
-              <a:t>כנות לגבי המגבלות של מחקרי חתך</a:t>
+              <a:t>כנות: כמעט עמוד שלם על מגבלות, כולל ממצא שקשה להם להסביר</a:t>
             </a:r>
             <a:endParaRPr lang="he-IL" sz="1300" dirty="0"/>
           </a:p>
@@ -3759,7 +4130,7 @@
                 <a:ea typeface="Arial" pitchFamily="34" charset="-122"/>
                 <a:cs typeface="Arial" pitchFamily="34" charset="-120"/>
               </a:rPr>
-              <a:t>זמין לכולם בחינם, אפשר לשלוח לחבר</a:t>
+              <a:t>זמין לכולם בחינם</a:t>
             </a:r>
             <a:endParaRPr lang="he-IL" sz="1300" dirty="0"/>
           </a:p>
@@ -3875,7 +4246,7 @@
                 <a:ea typeface="Arial" pitchFamily="34" charset="-122"/>
                 <a:cs typeface="Arial" pitchFamily="34" charset="-120"/>
               </a:rPr>
-              <a:t>מכמת אבל לא אומר מה לעשות. את "מפת החוסן" בנינו לבד</a:t>
+              <a:t>לא מודד חוסר ביטחון במישרין. את החיבור לנושא בנינו בעצמנו</a:t>
             </a:r>
             <a:endParaRPr lang="he-IL" sz="1300" dirty="0"/>
           </a:p>
@@ -3896,7 +4267,7 @@
                 <a:ea typeface="Arial" pitchFamily="34" charset="-122"/>
                 <a:cs typeface="Arial" pitchFamily="34" charset="-120"/>
               </a:rPr>
-              <a:t>לא מבחין בין איום כמותי לאיכותני, וזו ההבחנה של עידן הבינה המלאכותית</a:t>
+              <a:t>מדגם גרמני-שווייצרי, גיל ממוצע 49, ביטחון סוציאלי גבוה. האם המרחב לעצב תפקיד קיים גם אצלנו?</a:t>
             </a:r>
             <a:endParaRPr lang="he-IL" sz="1300" dirty="0"/>
           </a:p>
@@ -3917,7 +4288,7 @@
                 <a:ea typeface="Arial" pitchFamily="34" charset="-122"/>
                 <a:cs typeface="Arial" pitchFamily="34" charset="-120"/>
               </a:rPr>
-              <a:t>אין הקשר כמו הישראלי: מלחמה ומילואים, לא רק הארגון</a:t>
+              <a:t>שכירים בתפקיד קיים בלבד. לא מחפשי עבודה, לא עצמאים</a:t>
             </a:r>
             <a:endParaRPr lang="he-IL" sz="1300" dirty="0"/>
           </a:p>
@@ -4029,7 +4400,7 @@
                 <a:ea typeface="Arial" pitchFamily="34" charset="-122"/>
                 <a:cs typeface="Arial" pitchFamily="34" charset="-120"/>
               </a:rPr>
-              <a:t>הממצאים מאתגרים את "ממשבר להזדמנות" (דבדבני דקל, 2026ב) ובה בעת מחדדים אותו: משבר הופך להזדמנות רק אצל מי שיש לו משאבים לנצל אותה. בלי משאבים, האיום מייצר בריחה והסתרה. לכן המסר שלנו הוא לא "אל תפחדו", אלא "בנו את הכרית לפני שתצטרכו אותה".</a:t>
+              <a:t>המאמר משלים את "ממשבר להזדמנות" (דבדבני דקל, 2026ב): משבר לא הופך להזדמנות מעצמו, אלא כשמישהו מעצב אותו כך. אבל המסר צריך להיות כפול: לעצב את התפקיד עכשיו, כשעוד יש משאבים, ולזכור שמי שמרגיש שאין לו משאבים צריך קודם תמיכה ולא עצות.</a:t>
             </a:r>
             <a:endParaRPr lang="he-IL" sz="1450" dirty="0"/>
           </a:p>
@@ -4420,7 +4791,7 @@
                 <a:ea typeface="Arial" pitchFamily="34" charset="-122"/>
                 <a:cs typeface="Arial" pitchFamily="34" charset="-120"/>
               </a:rPr>
-              <a:t>לבחור במה להתמקד: מה בשליטתי</a:t>
+              <a:t>לבחור במה להתמקד: מה בשליטתי. זו המובנות והניהוליות</a:t>
             </a:r>
             <a:endParaRPr lang="he-IL" sz="1450" dirty="0"/>
           </a:p>
@@ -4441,7 +4812,7 @@
                 <a:ea typeface="Arial" pitchFamily="34" charset="-122"/>
                 <a:cs typeface="Arial" pitchFamily="34" charset="-120"/>
               </a:rPr>
-              <a:t>"האם זה עוזר לי או פוגע בי?": האם התגובה שלי היא בריחה והסתרה, או התפתחות</a:t>
+              <a:t>"האם זה עוזר לי או פוגע בי?": האם אני מעצב את המצב או רק שורד אותו</a:t>
             </a:r>
             <a:endParaRPr lang="he-IL" sz="1450" dirty="0"/>
           </a:p>
@@ -4656,7 +5027,7 @@
                 <a:ea typeface="Arial" pitchFamily="34" charset="-122"/>
                 <a:cs typeface="Arial" pitchFamily="34" charset="-120"/>
               </a:rPr>
-              <a:t>יישום: "מפת החוסן התעסוקתי", הכלי שבנינו מהמאמרים</a:t>
+              <a:t>יישום: תוכנית עיצוב תפקיד אישית לפי ארבעת צרכי ההתקרבות</a:t>
             </a:r>
             <a:endParaRPr lang="he-IL" sz="3000" dirty="0"/>
           </a:p>
@@ -4685,9 +5056,9 @@
             <a:tbl>
               <a:tblPr/>
               <a:tblGrid>
-                <a:gridCol w="5120640"/>
-                <a:gridCol w="3291840"/>
-                <a:gridCol w="2679192"/>
+                <a:gridCol w="5394960"/>
+                <a:gridCol w="3566160"/>
+                <a:gridCol w="2130552"/>
               </a:tblGrid>
               <a:tr h="457200">
                 <a:tc>
@@ -4707,7 +5078,7 @@
                           <a:ea typeface="Arial" pitchFamily="34" charset="-122"/>
                           <a:cs typeface="Arial" pitchFamily="34" charset="-120"/>
                         </a:rPr>
-                        <a:t>פעולות מומלצות</a:t>
+                        <a:t>דוגמאות לפעולה בשבועיים הקרובים</a:t>
                       </a:r>
                       <a:endParaRPr lang="en-US" sz="1400" dirty="0">
                         <a:latin typeface="Arial" charset="0"/>
@@ -4775,7 +5146,7 @@
                           <a:ea typeface="Arial" pitchFamily="34" charset="-122"/>
                           <a:cs typeface="Arial" pitchFamily="34" charset="-120"/>
                         </a:rPr>
-                        <a:t>שאלות מנחות</a:t>
+                        <a:t>שאלה מנחה</a:t>
                       </a:r>
                       <a:endParaRPr lang="en-US" sz="1400" dirty="0">
                         <a:latin typeface="Arial" charset="0"/>
@@ -4843,7 +5214,7 @@
                           <a:ea typeface="Arial" pitchFamily="34" charset="-122"/>
                           <a:cs typeface="Arial" pitchFamily="34" charset="-120"/>
                         </a:rPr>
-                        <a:t>שלב</a:t>
+                        <a:t>הצורך</a:t>
                       </a:r>
                       <a:endParaRPr lang="en-US" sz="1400" dirty="0">
                         <a:latin typeface="Arial" charset="0"/>
@@ -4913,7 +5284,7 @@
                           <a:ea typeface="Arial" pitchFamily="34" charset="-122"/>
                           <a:cs typeface="Arial" pitchFamily="34" charset="-120"/>
                         </a:rPr>
-                        <a:t>להחליף שמועות במידע: שיחה עם המנהל, מעקב אחר החברה והענף; למפות אילו חלקים בתפקיד הבינה המלאכותית משנה</a:t>
+                        <a:t>לקבוע את סדר המשימות של הבוקר; להציע דרך משלי למשימה חוזרת; שעה קבועה ללא הפרעות</a:t>
                       </a:r>
                       <a:endParaRPr lang="en-US" sz="1200" dirty="0">
                         <a:latin typeface="Arial" charset="0"/>
@@ -4981,7 +5352,7 @@
                           <a:ea typeface="Arial" pitchFamily="34" charset="-122"/>
                           <a:cs typeface="Arial" pitchFamily="34" charset="-120"/>
                         </a:rPr>
-                        <a:t>מה ההסתברות? האיום כמותי (המשרה) או איכותני (התוכן)? מה בשליטתי?</a:t>
+                        <a:t>באילו החלטות קטנות אני יכול לבחור בעצמי?</a:t>
                       </a:r>
                       <a:endParaRPr lang="en-US" sz="1200" dirty="0">
                         <a:latin typeface="Arial" charset="0"/>
@@ -5043,13 +5414,13 @@
                       <a:r>
                         <a:rPr lang="en-US" sz="1200" b="1" dirty="0">
                           <a:solidFill>
-                            <a:srgbClr val="E76F51"/>
+                            <a:srgbClr val="2A9D8F"/>
                           </a:solidFill>
                           <a:latin typeface="Arial" pitchFamily="34" charset="0"/>
                           <a:ea typeface="Arial" pitchFamily="34" charset="-122"/>
                           <a:cs typeface="Arial" pitchFamily="34" charset="-120"/>
                         </a:rPr>
-                        <a:t>1. הערכת האיום</a:t>
+                        <a:t>אוטונומיה</a:t>
                       </a:r>
                       <a:endParaRPr lang="en-US" sz="1200" dirty="0">
                         <a:latin typeface="Arial" charset="0"/>
@@ -5119,7 +5490,7 @@
                           <a:ea typeface="Arial" pitchFamily="34" charset="-122"/>
                           <a:cs typeface="Arial" pitchFamily="34" charset="-120"/>
                         </a:rPr>
-                        <a:t>יעד למידה שנתי אחד וזמן שבועי קבוע; מיומנויות AI בתחום העיסוק; קו"ח ופרופיל מעודכנים כל חצי שנה</a:t>
+                        <a:t>משימה אחת מעט מעבר ליכולת; כלי בינה מלאכותית אחד בתחום; לתעד בסוף השבוע דבר אחד שלמדתי</a:t>
                       </a:r>
                       <a:endParaRPr lang="en-US" sz="1200" dirty="0">
                         <a:latin typeface="Arial" charset="0"/>
@@ -5187,7 +5558,7 @@
                           <a:ea typeface="Arial" pitchFamily="34" charset="-122"/>
                           <a:cs typeface="Arial" pitchFamily="34" charset="-120"/>
                         </a:rPr>
-                        <a:t>מה למדתי בשנה האחרונה? אילו מיומנויות מבוקשות חסרות לי?</a:t>
+                        <a:t>איזה אתגר בגובה הנכון יגרום לי להרגיש שאני מתקדם?</a:t>
                       </a:r>
                       <a:endParaRPr lang="en-US" sz="1200" dirty="0">
                         <a:latin typeface="Arial" charset="0"/>
@@ -5249,13 +5620,13 @@
                       <a:r>
                         <a:rPr lang="en-US" sz="1200" b="1" dirty="0">
                           <a:solidFill>
-                            <a:srgbClr val="D9822B"/>
+                            <a:srgbClr val="FCA311"/>
                           </a:solidFill>
                           <a:latin typeface="Arial" pitchFamily="34" charset="0"/>
                           <a:ea typeface="Arial" pitchFamily="34" charset="-122"/>
                           <a:cs typeface="Arial" pitchFamily="34" charset="-120"/>
                         </a:rPr>
-                        <a:t>2. שבירת המעגל: פיתוח מיומנויות</a:t>
+                        <a:t>מיומנות</a:t>
                       </a:r>
                       <a:endParaRPr lang="en-US" sz="1200" dirty="0">
                         <a:latin typeface="Arial" charset="0"/>
@@ -5325,7 +5696,7 @@
                           <a:ea typeface="Arial" pitchFamily="34" charset="-122"/>
                           <a:cs typeface="Arial" pitchFamily="34" charset="-120"/>
                         </a:rPr>
-                        <a:t>זהות מקצועית שלא תלויה בארגון; קרן חירום 3 עד 6 חודשים; רשת תמיכה ומנטור</a:t>
+                        <a:t>לזהות למי העבודה שלי עוזרת ולדבר איתו; לנסח במשפט למה התפקיד חשוב; להתנדב למשימה שמתחברת לערכים</a:t>
                       </a:r>
                       <a:endParaRPr lang="en-US" sz="1200" dirty="0">
                         <a:latin typeface="Arial" charset="0"/>
@@ -5393,7 +5764,7 @@
                           <a:ea typeface="Arial" pitchFamily="34" charset="-122"/>
                           <a:cs typeface="Arial" pitchFamily="34" charset="-120"/>
                         </a:rPr>
-                        <a:t>עד כמה הזהות שלי = התפקיד? כמה זמן אחזיק מעמד? למי אפנה?</a:t>
+                        <a:t>איזה חלק בעבודה מתחבר למה שחשוב לי, ואיך מגדילים אותו?</a:t>
                       </a:r>
                       <a:endParaRPr lang="en-US" sz="1200" dirty="0">
                         <a:latin typeface="Arial" charset="0"/>
@@ -5455,13 +5826,13 @@
                       <a:r>
                         <a:rPr lang="en-US" sz="1200" b="1" dirty="0">
                           <a:solidFill>
-                            <a:srgbClr val="2A9D8F"/>
+                            <a:srgbClr val="E76F51"/>
                           </a:solidFill>
                           <a:latin typeface="Arial" pitchFamily="34" charset="0"/>
                           <a:ea typeface="Arial" pitchFamily="34" charset="-122"/>
                           <a:cs typeface="Arial" pitchFamily="34" charset="-120"/>
                         </a:rPr>
-                        <a:t>3. בניית חוסן קריירה</a:t>
+                        <a:t>משמעות</a:t>
                       </a:r>
                       <a:endParaRPr lang="en-US" sz="1200" dirty="0">
                         <a:latin typeface="Arial" charset="0"/>
@@ -5531,7 +5902,7 @@
                           <a:ea typeface="Arial" pitchFamily="34" charset="-122"/>
                           <a:cs typeface="Arial" pitchFamily="34" charset="-120"/>
                         </a:rPr>
-                        <a:t>לשתף ידע במקום להסתיר (בונה מוניטין ורשת); לחפש עבודה רק אחרי שמיפיתי מה אני רוצה לפתח, לא רק ממה אני בורח</a:t>
+                        <a:t>הפסקת קפה קבועה עם עמית; להציע עזרה לפני שמבקשים; להצטרף לפרויקט חוצה מחלקות</a:t>
                       </a:r>
                       <a:endParaRPr lang="en-US" sz="1200" dirty="0">
                         <a:latin typeface="Arial" charset="0"/>
@@ -5599,7 +5970,7 @@
                           <a:ea typeface="Arial" pitchFamily="34" charset="-122"/>
                           <a:cs typeface="Arial" pitchFamily="34" charset="-120"/>
                         </a:rPr>
-                        <a:t>אני בורח (חיפוש בלבד), מסתיר (שומר ידע) או מתפתח?</a:t>
+                        <a:t>עם מי בעבודה אני רוצה קשר אמיתי יותר?</a:t>
                       </a:r>
                       <a:endParaRPr lang="en-US" sz="1200" dirty="0">
                         <a:latin typeface="Arial" charset="0"/>
@@ -5667,7 +6038,7 @@
                           <a:ea typeface="Arial" pitchFamily="34" charset="-122"/>
                           <a:cs typeface="Arial" pitchFamily="34" charset="-120"/>
                         </a:rPr>
-                        <a:t>4. בחירת התגובה</a:t>
+                        <a:t>שייכות</a:t>
                       </a:r>
                       <a:endParaRPr lang="en-US" sz="1200" dirty="0">
                         <a:latin typeface="Arial" charset="0"/>
@@ -5782,7 +6153,7 @@
               <a:buNone/>
             </a:pPr>
             <a:r>
-              <a:rPr lang="he-IL" altLang="en-US" sz="1350" b="1" dirty="0">
+              <a:rPr lang="he-IL" altLang="en-US" sz="1300" b="1" dirty="0">
                 <a:solidFill>
                   <a:srgbClr val="14213D"/>
                 </a:solidFill>
@@ -5790,9 +6161,9 @@
                 <a:ea typeface="Arial" pitchFamily="34" charset="-122"/>
                 <a:cs typeface="Arial" pitchFamily="34" charset="-120"/>
               </a:rPr>
-              <a:t>מתחבר ל"שלושת סלי הכלים" מהקורס (דבדבני דקל, 2026א): התפתחות = שלב 2, זהות מקצועית ורשת אנשים = שלב 3</a:t>
-            </a:r>
-            <a:endParaRPr lang="he-IL" sz="1350" dirty="0"/>
+              <a:t>מתחבר ל"שלושת סלי הכלים" מהקורס (דבדבני דקל, 2026א): רשת אנשים = שייכות, התפתחות = מיומנות, זהות מקצועית = משמעות. המאמר מוסיף אוטונומיה וראיה אמפירית</a:t>
+            </a:r>
+            <a:endParaRPr lang="he-IL" sz="1300" dirty="0"/>
           </a:p>
         </p:txBody>
       </p:sp>
@@ -5939,7 +6310,7 @@
                 <a:ea typeface="Arial" pitchFamily="34" charset="-122"/>
                 <a:cs typeface="Arial" pitchFamily="34" charset="-120"/>
               </a:rPr>
-              <a:t>הפעלה (2 דקות בזוגות): קיבלתם תרחיש, מלאו את המפה</a:t>
+              <a:t>הפעלה (2 דקות): צורך אחד, פעולה אחת, מועד אחד</a:t>
             </a:r>
             <a:endParaRPr lang="he-IL" sz="3000" dirty="0"/>
           </a:p>
@@ -5953,12 +6324,12 @@
         </p:nvSpPr>
         <p:spPr>
           <a:xfrm>
-            <a:off x="8074152" y="1371600"/>
-            <a:ext cx="3566160" cy="2331720"/>
+            <a:off x="8988552" y="1371600"/>
+            <a:ext cx="2651760" cy="2377440"/>
           </a:xfrm>
           <a:prstGeom prst="roundRect">
             <a:avLst>
-              <a:gd name="adj" fmla="val 4706"/>
+              <a:gd name="adj" fmla="val 4615"/>
             </a:avLst>
           </a:prstGeom>
           <a:solidFill>
@@ -5987,20 +6358,20 @@
         </p:nvSpPr>
         <p:spPr>
           <a:xfrm>
-            <a:off x="8302752" y="1600200"/>
-            <a:ext cx="1463040" cy="457200"/>
+            <a:off x="9217152" y="1600200"/>
+            <a:ext cx="2194560" cy="502920"/>
           </a:xfrm>
           <a:prstGeom prst="roundRect">
             <a:avLst>
-              <a:gd name="adj" fmla="val 20000"/>
+              <a:gd name="adj" fmla="val 18182"/>
             </a:avLst>
           </a:prstGeom>
           <a:solidFill>
-            <a:srgbClr val="E76F51"/>
+            <a:srgbClr val="2A9D8F"/>
           </a:solidFill>
           <a:ln w="12700">
             <a:solidFill>
-              <a:srgbClr val="E76F51"/>
+              <a:srgbClr val="2A9D8F"/>
             </a:solidFill>
             <a:prstDash val="solid"/>
           </a:ln>
@@ -6014,8 +6385,8 @@
         </p:nvSpPr>
         <p:spPr>
           <a:xfrm>
-            <a:off x="8302752" y="1600200"/>
-            <a:ext cx="1463040" cy="457200"/>
+            <a:off x="9217152" y="1600200"/>
+            <a:ext cx="2194560" cy="502920"/>
           </a:xfrm>
           <a:prstGeom prst="rect">
             <a:avLst/>
@@ -6031,7 +6402,7 @@
               <a:buNone/>
             </a:pPr>
             <a:r>
-              <a:rPr lang="he-IL" altLang="en-US" sz="1400" b="1" dirty="0">
+              <a:rPr lang="he-IL" altLang="en-US" sz="1500" b="1" dirty="0">
                 <a:solidFill>
                   <a:srgbClr val="FFFFFF"/>
                 </a:solidFill>
@@ -6039,9 +6410,9 @@
                 <a:ea typeface="Arial" pitchFamily="34" charset="-122"/>
                 <a:cs typeface="Arial" pitchFamily="34" charset="-120"/>
               </a:rPr>
-              <a:t>תרחיש א</a:t>
-            </a:r>
-            <a:endParaRPr lang="he-IL" sz="1400" dirty="0"/>
+              <a:t>אוטונומיה</a:t>
+            </a:r>
+            <a:endParaRPr lang="he-IL" sz="1500" dirty="0"/>
           </a:p>
         </p:txBody>
       </p:sp>
@@ -6053,8 +6424,8 @@
         </p:nvSpPr>
         <p:spPr>
           <a:xfrm>
-            <a:off x="8302752" y="2240280"/>
-            <a:ext cx="3108960" cy="1371600"/>
+            <a:off x="9217152" y="2286000"/>
+            <a:ext cx="2194560" cy="1371600"/>
           </a:xfrm>
           <a:prstGeom prst="rect">
             <a:avLst/>
@@ -6070,7 +6441,7 @@
               <a:buNone/>
             </a:pPr>
             <a:r>
-              <a:rPr lang="he-IL" altLang="en-US" sz="1350" dirty="0">
+              <a:rPr lang="he-IL" altLang="en-US" sz="1300" dirty="0">
                 <a:solidFill>
                   <a:srgbClr val="1F2937"/>
                 </a:solidFill>
@@ -6078,9 +6449,9 @@
                 <a:ea typeface="Arial" pitchFamily="34" charset="-122"/>
                 <a:cs typeface="Arial" pitchFamily="34" charset="-120"/>
               </a:rPr>
-              <a:t>מייל מהמנכ"ל: "התייעלות של 15% ברבעון הקרוב". אין פרטים נוספים. מה תעשו השבוע?</a:t>
-            </a:r>
-            <a:endParaRPr lang="he-IL" sz="1350" dirty="0"/>
+              <a:t>איזו החלטה קטנה בעבודה או בלימודים אני לוקח לידיים כבר השבוע?</a:t>
+            </a:r>
+            <a:endParaRPr lang="he-IL" sz="1300" dirty="0"/>
           </a:p>
         </p:txBody>
       </p:sp>
@@ -6092,12 +6463,12 @@
         </p:nvSpPr>
         <p:spPr>
           <a:xfrm>
-            <a:off x="4311396" y="1371600"/>
-            <a:ext cx="3566160" cy="2331720"/>
+            <a:off x="6172200" y="1371600"/>
+            <a:ext cx="2651760" cy="2377440"/>
           </a:xfrm>
           <a:prstGeom prst="roundRect">
             <a:avLst>
-              <a:gd name="adj" fmla="val 4706"/>
+              <a:gd name="adj" fmla="val 4615"/>
             </a:avLst>
           </a:prstGeom>
           <a:solidFill>
@@ -6126,20 +6497,20 @@
         </p:nvSpPr>
         <p:spPr>
           <a:xfrm>
-            <a:off x="4539996" y="1600200"/>
-            <a:ext cx="1463040" cy="457200"/>
+            <a:off x="6400800" y="1600200"/>
+            <a:ext cx="2194560" cy="502920"/>
           </a:xfrm>
           <a:prstGeom prst="roundRect">
             <a:avLst>
-              <a:gd name="adj" fmla="val 20000"/>
+              <a:gd name="adj" fmla="val 18182"/>
             </a:avLst>
           </a:prstGeom>
           <a:solidFill>
-            <a:srgbClr val="D9822B"/>
+            <a:srgbClr val="FCA311"/>
           </a:solidFill>
           <a:ln w="12700">
             <a:solidFill>
-              <a:srgbClr val="D9822B"/>
+              <a:srgbClr val="FCA311"/>
             </a:solidFill>
             <a:prstDash val="solid"/>
           </a:ln>
@@ -6153,8 +6524,8 @@
         </p:nvSpPr>
         <p:spPr>
           <a:xfrm>
-            <a:off x="4539996" y="1600200"/>
-            <a:ext cx="1463040" cy="457200"/>
+            <a:off x="6400800" y="1600200"/>
+            <a:ext cx="2194560" cy="502920"/>
           </a:xfrm>
           <a:prstGeom prst="rect">
             <a:avLst/>
@@ -6170,7 +6541,7 @@
               <a:buNone/>
             </a:pPr>
             <a:r>
-              <a:rPr lang="he-IL" altLang="en-US" sz="1400" b="1" dirty="0">
+              <a:rPr lang="he-IL" altLang="en-US" sz="1500" b="1" dirty="0">
                 <a:solidFill>
                   <a:srgbClr val="FFFFFF"/>
                 </a:solidFill>
@@ -6178,9 +6549,9 @@
                 <a:ea typeface="Arial" pitchFamily="34" charset="-122"/>
                 <a:cs typeface="Arial" pitchFamily="34" charset="-120"/>
               </a:rPr>
-              <a:t>תרחיש ב</a:t>
-            </a:r>
-            <a:endParaRPr lang="he-IL" sz="1400" dirty="0"/>
+              <a:t>מיומנות</a:t>
+            </a:r>
+            <a:endParaRPr lang="he-IL" sz="1500" dirty="0"/>
           </a:p>
         </p:txBody>
       </p:sp>
@@ -6192,8 +6563,8 @@
         </p:nvSpPr>
         <p:spPr>
           <a:xfrm>
-            <a:off x="4539996" y="2240280"/>
-            <a:ext cx="3108960" cy="1371600"/>
+            <a:off x="6400800" y="2286000"/>
+            <a:ext cx="2194560" cy="1371600"/>
           </a:xfrm>
           <a:prstGeom prst="rect">
             <a:avLst/>
@@ -6209,7 +6580,7 @@
               <a:buNone/>
             </a:pPr>
             <a:r>
-              <a:rPr lang="he-IL" altLang="en-US" sz="1350" dirty="0">
+              <a:rPr lang="he-IL" altLang="en-US" sz="1300" dirty="0">
                 <a:solidFill>
                   <a:srgbClr val="1F2937"/>
                 </a:solidFill>
@@ -6217,9 +6588,9 @@
                 <a:ea typeface="Arial" pitchFamily="34" charset="-122"/>
                 <a:cs typeface="Arial" pitchFamily="34" charset="-120"/>
               </a:rPr>
-              <a:t>הארגון הודיע שמערכת AI תטפל ב-60% מהפניות. התפקיד נשאר, התוכן משתנה. איך תגיבו?</a:t>
-            </a:r>
-            <a:endParaRPr lang="he-IL" sz="1350" dirty="0"/>
+              <a:t>איזה אתגר אחד, מעט מעבר ליכולת הנוכחית, אני לוקח על עצמי בשבועיים הקרובים?</a:t>
+            </a:r>
+            <a:endParaRPr lang="he-IL" sz="1300" dirty="0"/>
           </a:p>
         </p:txBody>
       </p:sp>
@@ -6231,12 +6602,12 @@
         </p:nvSpPr>
         <p:spPr>
           <a:xfrm>
-            <a:off x="548640" y="1371600"/>
-            <a:ext cx="3566160" cy="2331720"/>
+            <a:off x="3355848" y="1371600"/>
+            <a:ext cx="2651760" cy="2377440"/>
           </a:xfrm>
           <a:prstGeom prst="roundRect">
             <a:avLst>
-              <a:gd name="adj" fmla="val 4706"/>
+              <a:gd name="adj" fmla="val 4615"/>
             </a:avLst>
           </a:prstGeom>
           <a:solidFill>
@@ -6265,20 +6636,20 @@
         </p:nvSpPr>
         <p:spPr>
           <a:xfrm>
-            <a:off x="777240" y="1600200"/>
-            <a:ext cx="1463040" cy="457200"/>
+            <a:off x="3584448" y="1600200"/>
+            <a:ext cx="2194560" cy="502920"/>
           </a:xfrm>
           <a:prstGeom prst="roundRect">
             <a:avLst>
-              <a:gd name="adj" fmla="val 20000"/>
+              <a:gd name="adj" fmla="val 18182"/>
             </a:avLst>
           </a:prstGeom>
           <a:solidFill>
-            <a:srgbClr val="2A9D8F"/>
+            <a:srgbClr val="E76F51"/>
           </a:solidFill>
           <a:ln w="12700">
             <a:solidFill>
-              <a:srgbClr val="2A9D8F"/>
+              <a:srgbClr val="E76F51"/>
             </a:solidFill>
             <a:prstDash val="solid"/>
           </a:ln>
@@ -6292,8 +6663,8 @@
         </p:nvSpPr>
         <p:spPr>
           <a:xfrm>
-            <a:off x="777240" y="1600200"/>
-            <a:ext cx="1463040" cy="457200"/>
+            <a:off x="3584448" y="1600200"/>
+            <a:ext cx="2194560" cy="502920"/>
           </a:xfrm>
           <a:prstGeom prst="rect">
             <a:avLst/>
@@ -6309,7 +6680,7 @@
               <a:buNone/>
             </a:pPr>
             <a:r>
-              <a:rPr lang="he-IL" altLang="en-US" sz="1400" b="1" dirty="0">
+              <a:rPr lang="he-IL" altLang="en-US" sz="1500" b="1" dirty="0">
                 <a:solidFill>
                   <a:srgbClr val="FFFFFF"/>
                 </a:solidFill>
@@ -6317,9 +6688,9 @@
                 <a:ea typeface="Arial" pitchFamily="34" charset="-122"/>
                 <a:cs typeface="Arial" pitchFamily="34" charset="-120"/>
               </a:rPr>
-              <a:t>תרחיש ג</a:t>
-            </a:r>
-            <a:endParaRPr lang="he-IL" sz="1400" dirty="0"/>
+              <a:t>משמעות</a:t>
+            </a:r>
+            <a:endParaRPr lang="he-IL" sz="1500" dirty="0"/>
           </a:p>
         </p:txBody>
       </p:sp>
@@ -6331,8 +6702,8 @@
         </p:nvSpPr>
         <p:spPr>
           <a:xfrm>
-            <a:off x="777240" y="2240280"/>
-            <a:ext cx="3108960" cy="1371600"/>
+            <a:off x="3584448" y="2286000"/>
+            <a:ext cx="2194560" cy="1371600"/>
           </a:xfrm>
           <a:prstGeom prst="rect">
             <a:avLst/>
@@ -6348,7 +6719,7 @@
               <a:buNone/>
             </a:pPr>
             <a:r>
-              <a:rPr lang="he-IL" altLang="en-US" sz="1350" dirty="0">
+              <a:rPr lang="he-IL" altLang="en-US" sz="1300" dirty="0">
                 <a:solidFill>
                   <a:srgbClr val="1F2937"/>
                 </a:solidFill>
@@ -6356,9 +6727,9 @@
                 <a:ea typeface="Arial" pitchFamily="34" charset="-122"/>
                 <a:cs typeface="Arial" pitchFamily="34" charset="-120"/>
               </a:rPr>
-              <a:t>אתם עצמאיים. הלקוח הגדול (40% מההכנסה) מקפיא פרויקטים "עד שהמצב יתבהר". מה הצעד הראשון?</a:t>
-            </a:r>
-            <a:endParaRPr lang="he-IL" sz="1350" dirty="0"/>
+              <a:t>למי העבודה שלי עוזרת, ומתי בפעם האחרונה דיברתי איתו?</a:t>
+            </a:r>
+            <a:endParaRPr lang="he-IL" sz="1300" dirty="0"/>
           </a:p>
         </p:txBody>
       </p:sp>
@@ -6370,12 +6741,151 @@
         </p:nvSpPr>
         <p:spPr>
           <a:xfrm>
-            <a:off x="548640" y="3931920"/>
-            <a:ext cx="11091672" cy="2331720"/>
+            <a:off x="539496" y="1371600"/>
+            <a:ext cx="2651760" cy="2377440"/>
           </a:xfrm>
           <a:prstGeom prst="roundRect">
             <a:avLst>
-              <a:gd name="adj" fmla="val 4706"/>
+              <a:gd name="adj" fmla="val 4615"/>
+            </a:avLst>
+          </a:prstGeom>
+          <a:solidFill>
+            <a:srgbClr val="FFFFFF"/>
+          </a:solidFill>
+          <a:ln w="12700">
+            <a:solidFill>
+              <a:srgbClr val="FFFFFF"/>
+            </a:solidFill>
+            <a:prstDash val="solid"/>
+          </a:ln>
+          <a:effectLst>
+            <a:outerShdw sx="100000" sy="100000" kx="0" ky="0" algn="bl" rotWithShape="0" blurRad="50800" dist="25400" dir="5400000">
+              <a:srgbClr val="000000">
+                <a:alpha val="12000"/>
+              </a:srgbClr>
+            </a:outerShdw>
+          </a:effectLst>
+        </p:spPr>
+      </p:sp>
+      <p:sp>
+        <p:nvSpPr>
+          <p:cNvPr id="16" name="Shape 14"/>
+          <p:cNvSpPr/>
+          <p:nvPr/>
+        </p:nvSpPr>
+        <p:spPr>
+          <a:xfrm>
+            <a:off x="768096" y="1600200"/>
+            <a:ext cx="2194560" cy="502920"/>
+          </a:xfrm>
+          <a:prstGeom prst="roundRect">
+            <a:avLst>
+              <a:gd name="adj" fmla="val 18182"/>
+            </a:avLst>
+          </a:prstGeom>
+          <a:solidFill>
+            <a:srgbClr val="14213D"/>
+          </a:solidFill>
+          <a:ln w="12700">
+            <a:solidFill>
+              <a:srgbClr val="14213D"/>
+            </a:solidFill>
+            <a:prstDash val="solid"/>
+          </a:ln>
+        </p:spPr>
+      </p:sp>
+      <p:sp>
+        <p:nvSpPr>
+          <p:cNvPr id="17" name="Text 15"/>
+          <p:cNvSpPr txBox="1"/>
+          <p:nvPr/>
+        </p:nvSpPr>
+        <p:spPr>
+          <a:xfrm>
+            <a:off x="768096" y="1600200"/>
+            <a:ext cx="2194560" cy="502920"/>
+          </a:xfrm>
+          <a:prstGeom prst="rect">
+            <a:avLst/>
+          </a:prstGeom>
+          <a:noFill/>
+          <a:ln/>
+        </p:spPr>
+        <p:txBody>
+          <a:bodyPr wrap="square" lIns="0" tIns="0" rIns="0" bIns="0" rtlCol="0" anchor="ctr"/>
+          <a:lstStyle/>
+          <a:p>
+            <a:pPr rtl="1" algn="ctr" indent="0" marL="0">
+              <a:buNone/>
+            </a:pPr>
+            <a:r>
+              <a:rPr lang="he-IL" altLang="en-US" sz="1500" b="1" dirty="0">
+                <a:solidFill>
+                  <a:srgbClr val="FFFFFF"/>
+                </a:solidFill>
+                <a:latin typeface="Arial" pitchFamily="34" charset="0"/>
+                <a:ea typeface="Arial" pitchFamily="34" charset="-122"/>
+                <a:cs typeface="Arial" pitchFamily="34" charset="-120"/>
+              </a:rPr>
+              <a:t>שייכות</a:t>
+            </a:r>
+            <a:endParaRPr lang="he-IL" sz="1500" dirty="0"/>
+          </a:p>
+        </p:txBody>
+      </p:sp>
+      <p:sp>
+        <p:nvSpPr>
+          <p:cNvPr id="18" name="Text 16"/>
+          <p:cNvSpPr txBox="1"/>
+          <p:nvPr/>
+        </p:nvSpPr>
+        <p:spPr>
+          <a:xfrm>
+            <a:off x="768096" y="2286000"/>
+            <a:ext cx="2194560" cy="1371600"/>
+          </a:xfrm>
+          <a:prstGeom prst="rect">
+            <a:avLst/>
+          </a:prstGeom>
+          <a:noFill/>
+          <a:ln/>
+        </p:spPr>
+        <p:txBody>
+          <a:bodyPr wrap="square" lIns="0" tIns="0" rIns="0" bIns="0" rtlCol="0" anchor="t"/>
+          <a:lstStyle/>
+          <a:p>
+            <a:pPr rtl="1" algn="r" indent="0" marL="0">
+              <a:buNone/>
+            </a:pPr>
+            <a:r>
+              <a:rPr lang="he-IL" altLang="en-US" sz="1300" dirty="0">
+                <a:solidFill>
+                  <a:srgbClr val="1F2937"/>
+                </a:solidFill>
+                <a:latin typeface="Arial" pitchFamily="34" charset="0"/>
+                <a:ea typeface="Arial" pitchFamily="34" charset="-122"/>
+                <a:cs typeface="Arial" pitchFamily="34" charset="-120"/>
+              </a:rPr>
+              <a:t>עם מי בעבודה אני רוצה קשר אמיתי יותר, ומה הצעד הראשון?</a:t>
+            </a:r>
+            <a:endParaRPr lang="he-IL" sz="1300" dirty="0"/>
+          </a:p>
+        </p:txBody>
+      </p:sp>
+      <p:sp>
+        <p:nvSpPr>
+          <p:cNvPr id="19" name="Shape 17"/>
+          <p:cNvSpPr/>
+          <p:nvPr/>
+        </p:nvSpPr>
+        <p:spPr>
+          <a:xfrm>
+            <a:off x="548640" y="3977640"/>
+            <a:ext cx="11091672" cy="2286000"/>
+          </a:xfrm>
+          <a:prstGeom prst="roundRect">
+            <a:avLst>
+              <a:gd name="adj" fmla="val 4800"/>
             </a:avLst>
           </a:prstGeom>
           <a:solidFill>
@@ -6398,13 +6908,13 @@
       </p:sp>
       <p:sp>
         <p:nvSpPr>
-          <p:cNvPr id="16" name="Text 14"/>
-          <p:cNvSpPr txBox="1"/>
-          <p:nvPr/>
-        </p:nvSpPr>
-        <p:spPr>
-          <a:xfrm>
-            <a:off x="822960" y="4023360"/>
+          <p:cNvPr id="20" name="Text 18"/>
+          <p:cNvSpPr txBox="1"/>
+          <p:nvPr/>
+        </p:nvSpPr>
+        <p:spPr>
+          <a:xfrm>
+            <a:off x="822960" y="4069080"/>
             <a:ext cx="10515600" cy="411480"/>
           </a:xfrm>
           <a:prstGeom prst="rect">
@@ -6429,7 +6939,7 @@
                 <a:ea typeface="Arial" pitchFamily="34" charset="-122"/>
                 <a:cs typeface="Arial" pitchFamily="34" charset="-120"/>
               </a:rPr>
-              <a:t>שלוש שאלות, 40 שניות לכל אחת:</a:t>
+              <a:t>שלושה שלבים:</a:t>
             </a:r>
             <a:endParaRPr lang="he-IL" sz="1700" dirty="0"/>
           </a:p>
@@ -6437,13 +6947,13 @@
       </p:sp>
       <p:sp>
         <p:nvSpPr>
-          <p:cNvPr id="17" name="Shape 15"/>
+          <p:cNvPr id="21" name="Shape 19"/>
           <p:cNvSpPr/>
           <p:nvPr/>
         </p:nvSpPr>
         <p:spPr>
           <a:xfrm>
-            <a:off x="10835640" y="4572000"/>
+            <a:off x="10835640" y="4617720"/>
             <a:ext cx="411480" cy="411480"/>
           </a:xfrm>
           <a:prstGeom prst="ellipse">
@@ -6462,13 +6972,13 @@
       </p:sp>
       <p:sp>
         <p:nvSpPr>
-          <p:cNvPr id="18" name="Text 16"/>
-          <p:cNvSpPr txBox="1"/>
-          <p:nvPr/>
-        </p:nvSpPr>
-        <p:spPr>
-          <a:xfrm>
-            <a:off x="10835640" y="4572000"/>
+          <p:cNvPr id="22" name="Text 20"/>
+          <p:cNvSpPr txBox="1"/>
+          <p:nvPr/>
+        </p:nvSpPr>
+        <p:spPr>
+          <a:xfrm>
+            <a:off x="10835640" y="4617720"/>
             <a:ext cx="411480" cy="411480"/>
           </a:xfrm>
           <a:prstGeom prst="rect">
@@ -6501,13 +7011,13 @@
       </p:sp>
       <p:sp>
         <p:nvSpPr>
-          <p:cNvPr id="19" name="Text 17"/>
-          <p:cNvSpPr txBox="1"/>
-          <p:nvPr/>
-        </p:nvSpPr>
-        <p:spPr>
-          <a:xfrm>
-            <a:off x="822960" y="4526280"/>
+          <p:cNvPr id="23" name="Text 21"/>
+          <p:cNvSpPr txBox="1"/>
+          <p:nvPr/>
+        </p:nvSpPr>
+        <p:spPr>
+          <a:xfrm>
+            <a:off x="822960" y="4572000"/>
             <a:ext cx="9875520" cy="502920"/>
           </a:xfrm>
           <a:prstGeom prst="rect">
@@ -6532,7 +7042,7 @@
                 <a:ea typeface="Arial" pitchFamily="34" charset="-122"/>
                 <a:cs typeface="Arial" pitchFamily="34" charset="-120"/>
               </a:rPr>
-              <a:t>מה האיום בפועל, כמותי או איכותני? ומה בשליטתי?</a:t>
+              <a:t>בוחרים כרטיסייה אחת (30 שניות)</a:t>
             </a:r>
             <a:endParaRPr lang="he-IL" sz="1500" dirty="0"/>
           </a:p>
@@ -6540,13 +7050,13 @@
       </p:sp>
       <p:sp>
         <p:nvSpPr>
-          <p:cNvPr id="20" name="Shape 18"/>
+          <p:cNvPr id="24" name="Shape 22"/>
           <p:cNvSpPr/>
           <p:nvPr/>
         </p:nvSpPr>
         <p:spPr>
           <a:xfrm>
-            <a:off x="10835640" y="5120640"/>
+            <a:off x="10835640" y="5166360"/>
             <a:ext cx="411480" cy="411480"/>
           </a:xfrm>
           <a:prstGeom prst="ellipse">
@@ -6565,13 +7075,13 @@
       </p:sp>
       <p:sp>
         <p:nvSpPr>
-          <p:cNvPr id="21" name="Text 19"/>
-          <p:cNvSpPr txBox="1"/>
-          <p:nvPr/>
-        </p:nvSpPr>
-        <p:spPr>
-          <a:xfrm>
-            <a:off x="10835640" y="5120640"/>
+          <p:cNvPr id="25" name="Text 23"/>
+          <p:cNvSpPr txBox="1"/>
+          <p:nvPr/>
+        </p:nvSpPr>
+        <p:spPr>
+          <a:xfrm>
+            <a:off x="10835640" y="5166360"/>
             <a:ext cx="411480" cy="411480"/>
           </a:xfrm>
           <a:prstGeom prst="rect">
@@ -6604,13 +7114,13 @@
       </p:sp>
       <p:sp>
         <p:nvSpPr>
-          <p:cNvPr id="22" name="Text 20"/>
-          <p:cNvSpPr txBox="1"/>
-          <p:nvPr/>
-        </p:nvSpPr>
-        <p:spPr>
-          <a:xfrm>
-            <a:off x="822960" y="5074920"/>
+          <p:cNvPr id="26" name="Text 24"/>
+          <p:cNvSpPr txBox="1"/>
+          <p:nvPr/>
+        </p:nvSpPr>
+        <p:spPr>
+          <a:xfrm>
+            <a:off x="822960" y="5120640"/>
             <a:ext cx="9875520" cy="502920"/>
           </a:xfrm>
           <a:prstGeom prst="rect">
@@ -6635,7 +7145,7 @@
                 <a:ea typeface="Arial" pitchFamily="34" charset="-122"/>
                 <a:cs typeface="Arial" pitchFamily="34" charset="-120"/>
               </a:rPr>
-              <a:t>התגובה הראשונה שלי: בריחה, הסתרה או התפתחות?</a:t>
+              <a:t>כותבים פעולה אחת קונקרטית ומועד לביצועה (60 שניות)</a:t>
             </a:r>
             <a:endParaRPr lang="he-IL" sz="1500" dirty="0"/>
           </a:p>
@@ -6643,13 +7153,13 @@
       </p:sp>
       <p:sp>
         <p:nvSpPr>
-          <p:cNvPr id="23" name="Shape 21"/>
+          <p:cNvPr id="27" name="Shape 25"/>
           <p:cNvSpPr/>
           <p:nvPr/>
         </p:nvSpPr>
         <p:spPr>
           <a:xfrm>
-            <a:off x="10835640" y="5669280"/>
+            <a:off x="10835640" y="5715000"/>
             <a:ext cx="411480" cy="411480"/>
           </a:xfrm>
           <a:prstGeom prst="ellipse">
@@ -6668,13 +7178,13 @@
       </p:sp>
       <p:sp>
         <p:nvSpPr>
-          <p:cNvPr id="24" name="Text 22"/>
-          <p:cNvSpPr txBox="1"/>
-          <p:nvPr/>
-        </p:nvSpPr>
-        <p:spPr>
-          <a:xfrm>
-            <a:off x="10835640" y="5669280"/>
+          <p:cNvPr id="28" name="Text 26"/>
+          <p:cNvSpPr txBox="1"/>
+          <p:nvPr/>
+        </p:nvSpPr>
+        <p:spPr>
+          <a:xfrm>
+            <a:off x="10835640" y="5715000"/>
             <a:ext cx="411480" cy="411480"/>
           </a:xfrm>
           <a:prstGeom prst="rect">
@@ -6707,13 +7217,13 @@
       </p:sp>
       <p:sp>
         <p:nvSpPr>
-          <p:cNvPr id="25" name="Text 23"/>
-          <p:cNvSpPr txBox="1"/>
-          <p:nvPr/>
-        </p:nvSpPr>
-        <p:spPr>
-          <a:xfrm>
-            <a:off x="822960" y="5623560"/>
+          <p:cNvPr id="29" name="Text 27"/>
+          <p:cNvSpPr txBox="1"/>
+          <p:nvPr/>
+        </p:nvSpPr>
+        <p:spPr>
+          <a:xfrm>
+            <a:off x="822960" y="5669280"/>
             <a:ext cx="9875520" cy="502920"/>
           </a:xfrm>
           <a:prstGeom prst="rect">
@@ -6738,7 +7248,7 @@
                 <a:ea typeface="Arial" pitchFamily="34" charset="-122"/>
                 <a:cs typeface="Arial" pitchFamily="34" charset="-120"/>
               </a:rPr>
-              <a:t>איזו פעולה אחת של פיתוח מיומנויות אעשה כבר השבוע?</a:t>
+              <a:t>משתפים את השכן במשפט אחד (30 שניות). נשמע 2 עד 3 דוגמאות מהכיתה</a:t>
             </a:r>
             <a:endParaRPr lang="he-IL" sz="1500" dirty="0"/>
           </a:p>
@@ -6746,7 +7256,7 @@
       </p:sp>
       <p:sp>
         <p:nvSpPr>
-          <p:cNvPr id="26" name="Text 24"/>
+          <p:cNvPr id="30" name="Text 28"/>
           <p:cNvSpPr txBox="1"/>
           <p:nvPr/>
         </p:nvSpPr>
@@ -6785,7 +7295,7 @@
       </p:sp>
       <p:sp>
         <p:nvSpPr>
-          <p:cNvPr id="27" name="Text 25"/>
+          <p:cNvPr id="31" name="Text 29"/>
           <p:cNvSpPr txBox="1"/>
           <p:nvPr/>
         </p:nvSpPr>
@@ -6951,7 +7461,7 @@
                 <a:ea typeface="Arial" pitchFamily="34" charset="-122"/>
                 <a:cs typeface="Arial" pitchFamily="34" charset="-120"/>
               </a:rPr>
-              <a:t>הפחד לא יעשה אותנו טובים יותר.</a:t>
+              <a:t>את חוסר הוודאות לא תמיד אפשר למנוע.</a:t>
             </a:r>
             <a:endParaRPr lang="he-IL" sz="3200" dirty="0"/>
           </a:p>
@@ -6968,7 +7478,7 @@
                 <a:ea typeface="Arial" pitchFamily="34" charset="-122"/>
                 <a:cs typeface="Arial" pitchFamily="34" charset="-120"/>
               </a:rPr>
-              <a:t>את הכרית שמאפשרת להתפתח תחת איום בונים לפני שצריכים אותה.</a:t>
+              <a:t>את הבהירות, השליטה והמשמעות בתוך התפקיד אפשר לבנות.</a:t>
             </a:r>
             <a:endParaRPr lang="he-IL" sz="3200" dirty="0"/>
           </a:p>
@@ -7097,7 +7607,7 @@
               <a:buNone/>
             </a:pPr>
             <a:r>
-              <a:rPr lang="he-IL" altLang="en-US" sz="1700" b="1" dirty="0">
+              <a:rPr lang="he-IL" altLang="en-US" sz="1600" b="1" dirty="0">
                 <a:solidFill>
                   <a:srgbClr val="FCA311"/>
                 </a:solidFill>
@@ -7105,9 +7615,9 @@
                 <a:ea typeface="Arial" pitchFamily="34" charset="-122"/>
                 <a:cs typeface="Arial" pitchFamily="34" charset="-120"/>
               </a:rPr>
-              <a:t>הלאה, לא למעלה</a:t>
-            </a:r>
-            <a:endParaRPr lang="he-IL" sz="1700" dirty="0"/>
+              <a:t>מה שעושים משנה</a:t>
+            </a:r>
+            <a:endParaRPr lang="he-IL" sz="1600" dirty="0"/>
           </a:p>
         </p:txBody>
       </p:sp>
@@ -7144,7 +7654,7 @@
                 <a:ea typeface="Arial" pitchFamily="34" charset="-122"/>
                 <a:cs typeface="Arial" pitchFamily="34" charset="-120"/>
               </a:rPr>
-              <a:t>237 מחקרים: חוסר ביטחון מגביר בריחה והסתרת ידע, ומקטין פיתוח מיומנויות ויכולת תעסוקה</a:t>
+              <a:t>924 עובדים: עיצוב תפקיד לצרכי התקרבות ניבא עבודה מובנת, בשליטה ומשמעותית יותר חצי שנה אחר כך</a:t>
             </a:r>
             <a:endParaRPr lang="he-IL" sz="1300" dirty="0"/>
           </a:p>
@@ -7273,7 +7783,7 @@
               <a:buNone/>
             </a:pPr>
             <a:r>
-              <a:rPr lang="he-IL" altLang="en-US" sz="1700" b="1" dirty="0">
+              <a:rPr lang="he-IL" altLang="en-US" sz="1600" b="1" dirty="0">
                 <a:solidFill>
                   <a:srgbClr val="FCA311"/>
                 </a:solidFill>
@@ -7281,9 +7791,9 @@
                 <a:ea typeface="Arial" pitchFamily="34" charset="-122"/>
                 <a:cs typeface="Arial" pitchFamily="34" charset="-120"/>
               </a:rPr>
-              <a:t>מעגל קסמים</a:t>
-            </a:r>
-            <a:endParaRPr lang="he-IL" sz="1700" dirty="0"/>
+              <a:t>להתקרב, לא רק להימנע</a:t>
+            </a:r>
+            <a:endParaRPr lang="he-IL" sz="1600" dirty="0"/>
           </a:p>
         </p:txBody>
       </p:sp>
@@ -7320,7 +7830,7 @@
                 <a:ea typeface="Arial" pitchFamily="34" charset="-122"/>
                 <a:cs typeface="Arial" pitchFamily="34" charset="-120"/>
               </a:rPr>
-              <a:t>האיום מדלדל בדיוק את המשאבים שמגנים מפניו. שוברים אותו מראש: יעד למידה שנתי, מיומנויות AI, קרן חירום</a:t>
+              <a:t>לנוח ולהתנתק חשוב להתאוששות, אבל לא משנה איך העבודה נתפסת</a:t>
             </a:r>
             <a:endParaRPr lang="he-IL" sz="1300" dirty="0"/>
           </a:p>
@@ -7449,7 +7959,7 @@
               <a:buNone/>
             </a:pPr>
             <a:r>
-              <a:rPr lang="he-IL" altLang="en-US" sz="1700" b="1" dirty="0">
+              <a:rPr lang="he-IL" altLang="en-US" sz="1600" b="1" dirty="0">
                 <a:solidFill>
                   <a:srgbClr val="FCA311"/>
                 </a:solidFill>
@@ -7457,9 +7967,9 @@
                 <a:ea typeface="Arial" pitchFamily="34" charset="-122"/>
                 <a:cs typeface="Arial" pitchFamily="34" charset="-120"/>
               </a:rPr>
-              <a:t>חוסן קריירה</a:t>
-            </a:r>
-            <a:endParaRPr lang="he-IL" sz="1700" dirty="0"/>
+              <a:t>המשאבים קודמים ליוזמה</a:t>
+            </a:r>
+            <a:endParaRPr lang="he-IL" sz="1600" dirty="0"/>
           </a:p>
         </p:txBody>
       </p:sp>
@@ -7496,7 +8006,7 @@
                 <a:ea typeface="Arial" pitchFamily="34" charset="-122"/>
                 <a:cs typeface="Arial" pitchFamily="34" charset="-120"/>
               </a:rPr>
-              <a:t>זהות מקצועית שלא תלויה בארגון, רשת תמיכה ושיתוף ידע מחלישים את הקשר בין האיום לחוסר הביטחון</a:t>
+              <a:t>ניהוליות מנבאת עיצוב תפקיד. בונים אותה עכשיו, לפני שהאיום מדלדל אותה</a:t>
             </a:r>
             <a:endParaRPr lang="he-IL" sz="1300" dirty="0"/>
           </a:p>
@@ -7692,7 +8202,7 @@
         <p:spPr>
           <a:xfrm>
             <a:off x="548640" y="1188720"/>
-            <a:ext cx="11091672" cy="3108960"/>
+            <a:ext cx="11091672" cy="2926080"/>
           </a:xfrm>
           <a:prstGeom prst="rect">
             <a:avLst/>
@@ -7719,7 +8229,7 @@
                 <a:ea typeface="Arial" pitchFamily="34" charset="-122"/>
                 <a:cs typeface="Arial" pitchFamily="34" charset="-120"/>
               </a:rPr>
-              <a:t>Chung, Y. W., Im, S., Kim, J. E., &amp; Yun, J. K. (2025). Artificial intelligence awareness, career resilience, job insecurity and behavioural outcomes. Australian Journal of Psychology, 77(1), Article 2559910. https://doi.org/10.1080/00049530.2025.2559910</a:t>
+              <a:t>Antonovsky, A. (1987). Unraveling the mystery of health: How people manage stress and stay well. Jossey-Bass.</a:t>
             </a:r>
             <a:endParaRPr lang="en-US" sz="1100" dirty="0"/>
           </a:p>
@@ -7739,7 +8249,7 @@
                 <a:ea typeface="Arial" pitchFamily="34" charset="-122"/>
                 <a:cs typeface="Arial" pitchFamily="34" charset="-120"/>
               </a:rPr>
-              <a:t>Hobfoll, S. E. (1989). Conservation of resources: A new attempt at conceptualizing stress. American Psychologist, 44(3), 513-524.</a:t>
+              <a:t>Cetkovská, K., Bauer, G. F., &amp; Tušl, M. (2026). The role of needs-based job crafting in strengthening work-related sense of coherence: A two-wave panel study. Scandinavian Journal of Work and Organizational Psychology, 11(1), Article 14. https://doi.org/10.16993/sjwop.389</a:t>
             </a:r>
             <a:endParaRPr lang="en-US" sz="1100" dirty="0"/>
           </a:p>
@@ -7759,7 +8269,7 @@
                 <a:ea typeface="Arial" pitchFamily="34" charset="-122"/>
                 <a:cs typeface="Arial" pitchFamily="34" charset="-120"/>
               </a:rPr>
-              <a:t>Hone, L. (2019). 3 secrets of resilient people [Video]. TED Conferences. https://www.ted.com/talks/lucy_hone_the_three_secrets_of_resilient_people</a:t>
+              <a:t>Chung, Y. W., Im, S., Kim, J. E., &amp; Yun, J. K. (2025). Artificial intelligence awareness, career resilience, job insecurity and behavioural outcomes. Australian Journal of Psychology, 77(1), Article 2559910. https://doi.org/10.1080/00049530.2025.2559910</a:t>
             </a:r>
             <a:endParaRPr lang="en-US" sz="1100" dirty="0"/>
           </a:p>
@@ -7779,7 +8289,7 @@
                 <a:ea typeface="Arial" pitchFamily="34" charset="-122"/>
                 <a:cs typeface="Arial" pitchFamily="34" charset="-120"/>
               </a:rPr>
-              <a:t>Låstad, L., Pienaar, J., Näswall, K., Richter, A., Hellgren, J., &amp; Sverke, M. (2025). Moving on up now? A meta-analysis of the associations between job insecurity and career-related outcomes. Scandinavian Journal of Work and Organizational Psychology, 10(1), Article 2. https://doi.org/10.16993/sjwop.275</a:t>
+              <a:t>Hone, L. (2019). 3 secrets of resilient people [Video]. TED Conferences. https://www.ted.com/talks/lucy_hone_the_three_secrets_of_resilient_people</a:t>
             </a:r>
             <a:endParaRPr lang="en-US" sz="1100" dirty="0"/>
           </a:p>
@@ -7799,30 +8309,10 @@
                 <a:ea typeface="Arial" pitchFamily="34" charset="-122"/>
                 <a:cs typeface="Arial" pitchFamily="34" charset="-120"/>
               </a:rPr>
-              <a:t>Shoss, M. K. (2017). Job insecurity: An integrative review and agenda for future research. Journal of Management, 43(6), 1911-1939. https://doi.org/10.1177/0149206317691574</a:t>
+              <a:t>Låstad, L., Pienaar, J., Näswall, K., Richter, A., Hellgren, J., &amp; Sverke, M. (2025). Moving on up now? A meta-analysis of the associations between job insecurity and career-related outcomes. Scandinavian Journal of Work and Organizational Psychology, 10(1), Article 2. https://doi.org/10.16993/sjwop.275</a:t>
             </a:r>
             <a:endParaRPr lang="en-US" sz="1100" dirty="0"/>
           </a:p>
-          <a:p>
-            <a:pPr algn="l" indent="0" marL="0">
-              <a:spcAft>
-                <a:spcPts val="600"/>
-              </a:spcAft>
-              <a:buNone/>
-            </a:pPr>
-            <a:r>
-              <a:rPr lang="en-US" sz="1100" dirty="0">
-                <a:solidFill>
-                  <a:srgbClr val="1F2937"/>
-                </a:solidFill>
-                <a:latin typeface="Arial" pitchFamily="34" charset="0"/>
-                <a:ea typeface="Arial" pitchFamily="34" charset="-122"/>
-                <a:cs typeface="Arial" pitchFamily="34" charset="-120"/>
-              </a:rPr>
-              <a:t>Sverke, M., Hellgren, J., &amp; Näswall, K. (2002). No security: A meta-analysis and review of job insecurity and its consequences. Journal of Occupational Health Psychology, 7(3), 242-264.</a:t>
-            </a:r>
-            <a:endParaRPr lang="en-US" sz="1100" dirty="0"/>
-          </a:p>
         </p:txBody>
       </p:sp>
       <p:sp>
@@ -7833,8 +8323,8 @@
         </p:nvSpPr>
         <p:spPr>
           <a:xfrm>
-            <a:off x="548640" y="4480560"/>
-            <a:ext cx="11091672" cy="1828800"/>
+            <a:off x="548640" y="4297680"/>
+            <a:ext cx="11091672" cy="2011680"/>
           </a:xfrm>
           <a:prstGeom prst="rect">
             <a:avLst/>
@@ -8236,7 +8726,7 @@
                 <a:ea typeface="Arial" pitchFamily="34" charset="-122"/>
                 <a:cs typeface="Arial" pitchFamily="34" charset="-120"/>
               </a:rPr>
-              <a:t>כמה בטוחים אתם בעצם?</a:t>
+              <a:t>ברור? בשליטה? משמעותי?</a:t>
             </a:r>
             <a:endParaRPr lang="he-IL" sz="1500" dirty="0"/>
           </a:p>
@@ -8666,7 +9156,7 @@
                 <a:ea typeface="Arial" pitchFamily="34" charset="-122"/>
                 <a:cs typeface="Arial" pitchFamily="34" charset="-120"/>
               </a:rPr>
-              <a:t>השאלה, השיטה, 8 התוצאות</a:t>
+              <a:t>סלוטוגנזה, 6 צרכים, 924 עובדים</a:t>
             </a:r>
             <a:endParaRPr lang="he-IL" sz="1500" dirty="0"/>
           </a:p>
@@ -9096,7 +9586,7 @@
                 <a:ea typeface="Arial" pitchFamily="34" charset="-122"/>
                 <a:cs typeface="Arial" pitchFamily="34" charset="-120"/>
               </a:rPr>
-              <a:t>TED וכרטיסי תרחיש</a:t>
+              <a:t>TED וצורך אחד, פעולה אחת</a:t>
             </a:r>
             <a:endParaRPr lang="he-IL" sz="1500" dirty="0"/>
           </a:p>
@@ -9499,7 +9989,7 @@
                 <a:ea typeface="Arial" pitchFamily="34" charset="-122"/>
                 <a:cs typeface="Arial" pitchFamily="34" charset="-120"/>
               </a:rPr>
-              <a:t>סקר פתיחה</a:t>
+              <a:t>סקר פתיחה: איך מרגישה לכם העבודה (או הלימודים) עכשיו?</a:t>
             </a:r>
             <a:endParaRPr lang="he-IL" sz="3000" dirty="0"/>
           </a:p>
@@ -9513,34 +10003,34 @@
         </p:nvSpPr>
         <p:spPr>
           <a:xfrm>
-            <a:off x="548640" y="1371600"/>
-            <a:ext cx="11091672" cy="1005840"/>
-          </a:xfrm>
-          <a:prstGeom prst="rect">
-            <a:avLst/>
-          </a:prstGeom>
-          <a:noFill/>
-          <a:ln/>
-        </p:spPr>
-        <p:txBody>
-          <a:bodyPr wrap="square" lIns="0" tIns="0" rIns="0" bIns="0" rtlCol="0" anchor="ctr"/>
+            <a:off x="548640" y="1234440"/>
+            <a:ext cx="11091672" cy="457200"/>
+          </a:xfrm>
+          <a:prstGeom prst="rect">
+            <a:avLst/>
+          </a:prstGeom>
+          <a:noFill/>
+          <a:ln/>
+        </p:spPr>
+        <p:txBody>
+          <a:bodyPr wrap="square" lIns="0" tIns="0" rIns="0" bIns="0" rtlCol="0" anchor="t"/>
           <a:lstStyle/>
           <a:p>
             <a:pPr rtl="1" algn="r" indent="0" marL="0">
               <a:buNone/>
             </a:pPr>
             <a:r>
-              <a:rPr lang="he-IL" altLang="en-US" sz="2600" b="1" dirty="0">
-                <a:solidFill>
-                  <a:srgbClr val="14213D"/>
-                </a:solidFill>
-                <a:latin typeface="Arial" pitchFamily="34" charset="0"/>
-                <a:ea typeface="Arial" pitchFamily="34" charset="-122"/>
-                <a:cs typeface="Arial" pitchFamily="34" charset="-120"/>
-              </a:rPr>
-              <a:t>בסולם 1 עד 5: עד כמה אתם בטוחים שתהיו באותו תפקיד (או באותו מסלול) בעוד שנתיים?</a:t>
-            </a:r>
-            <a:endParaRPr lang="he-IL" sz="2600" dirty="0"/>
+              <a:rPr lang="he-IL" altLang="en-US" sz="1800" dirty="0">
+                <a:solidFill>
+                  <a:srgbClr val="6B7280"/>
+                </a:solidFill>
+                <a:latin typeface="Arial" pitchFamily="34" charset="0"/>
+                <a:ea typeface="Arial" pitchFamily="34" charset="-122"/>
+                <a:cs typeface="Arial" pitchFamily="34" charset="-120"/>
+              </a:rPr>
+              <a:t>בסולם 1 עד 5, שלוש שאלות:</a:t>
+            </a:r>
+            <a:endParaRPr lang="he-IL" sz="1800" dirty="0"/>
           </a:p>
         </p:txBody>
       </p:sp>
@@ -9552,527 +10042,12 @@
         </p:nvSpPr>
         <p:spPr>
           <a:xfrm>
-            <a:off x="9249156" y="2743200"/>
-            <a:ext cx="1371600" cy="1371600"/>
-          </a:xfrm>
-          <a:prstGeom prst="ellipse">
-            <a:avLst/>
-          </a:prstGeom>
-          <a:solidFill>
-            <a:srgbClr val="E76F51"/>
-          </a:solidFill>
-          <a:ln w="12700">
-            <a:solidFill>
-              <a:srgbClr val="E76F51"/>
-            </a:solidFill>
-            <a:prstDash val="solid"/>
-          </a:ln>
-        </p:spPr>
-      </p:sp>
-      <p:sp>
-        <p:nvSpPr>
-          <p:cNvPr id="5" name="Text 3"/>
-          <p:cNvSpPr txBox="1"/>
-          <p:nvPr/>
-        </p:nvSpPr>
-        <p:spPr>
-          <a:xfrm>
-            <a:off x="9249156" y="2743200"/>
-            <a:ext cx="1371600" cy="1371600"/>
-          </a:xfrm>
-          <a:prstGeom prst="rect">
-            <a:avLst/>
-          </a:prstGeom>
-          <a:noFill/>
-          <a:ln/>
-        </p:spPr>
-        <p:txBody>
-          <a:bodyPr wrap="square" lIns="0" tIns="0" rIns="0" bIns="0" rtlCol="0" anchor="ctr"/>
-          <a:lstStyle/>
-          <a:p>
-            <a:pPr algn="ctr" indent="0" marL="0">
-              <a:buNone/>
-            </a:pPr>
-            <a:r>
-              <a:rPr lang="en-US" sz="4000" b="1" dirty="0">
-                <a:solidFill>
-                  <a:srgbClr val="FFFFFF"/>
-                </a:solidFill>
-                <a:latin typeface="Arial" pitchFamily="34" charset="0"/>
-                <a:ea typeface="Arial" pitchFamily="34" charset="-122"/>
-                <a:cs typeface="Arial" pitchFamily="34" charset="-120"/>
-              </a:rPr>
-              <a:t>1</a:t>
-            </a:r>
-            <a:endParaRPr lang="en-US" sz="4000" dirty="0"/>
-          </a:p>
-        </p:txBody>
-      </p:sp>
-      <p:sp>
-        <p:nvSpPr>
-          <p:cNvPr id="6" name="Text 4"/>
-          <p:cNvSpPr txBox="1"/>
-          <p:nvPr/>
-        </p:nvSpPr>
-        <p:spPr>
-          <a:xfrm>
-            <a:off x="8974836" y="4251960"/>
-            <a:ext cx="1920240" cy="548640"/>
-          </a:xfrm>
-          <a:prstGeom prst="rect">
-            <a:avLst/>
-          </a:prstGeom>
-          <a:noFill/>
-          <a:ln/>
-        </p:spPr>
-        <p:txBody>
-          <a:bodyPr wrap="square" lIns="0" tIns="0" rIns="0" bIns="0" rtlCol="0" anchor="t"/>
-          <a:lstStyle/>
-          <a:p>
-            <a:pPr rtl="1" algn="ctr" indent="0" marL="0">
-              <a:buNone/>
-            </a:pPr>
-            <a:r>
-              <a:rPr lang="he-IL" altLang="en-US" sz="1400" dirty="0">
-                <a:solidFill>
-                  <a:srgbClr val="1F2937"/>
-                </a:solidFill>
-                <a:latin typeface="Arial" pitchFamily="34" charset="0"/>
-                <a:ea typeface="Arial" pitchFamily="34" charset="-122"/>
-                <a:cs typeface="Arial" pitchFamily="34" charset="-120"/>
-              </a:rPr>
-              <a:t>בכלל לא בטוח/ה</a:t>
-            </a:r>
-            <a:endParaRPr lang="he-IL" sz="1400" dirty="0"/>
-          </a:p>
-        </p:txBody>
-      </p:sp>
-      <p:sp>
-        <p:nvSpPr>
-          <p:cNvPr id="7" name="Shape 5"/>
-          <p:cNvSpPr/>
-          <p:nvPr/>
-        </p:nvSpPr>
-        <p:spPr>
-          <a:xfrm>
-            <a:off x="7328916" y="2743200"/>
-            <a:ext cx="1371600" cy="1371600"/>
-          </a:xfrm>
-          <a:prstGeom prst="ellipse">
-            <a:avLst/>
-          </a:prstGeom>
-          <a:solidFill>
-            <a:srgbClr val="F4A261"/>
-          </a:solidFill>
-          <a:ln w="12700">
-            <a:solidFill>
-              <a:srgbClr val="F4A261"/>
-            </a:solidFill>
-            <a:prstDash val="solid"/>
-          </a:ln>
-        </p:spPr>
-      </p:sp>
-      <p:sp>
-        <p:nvSpPr>
-          <p:cNvPr id="8" name="Text 6"/>
-          <p:cNvSpPr txBox="1"/>
-          <p:nvPr/>
-        </p:nvSpPr>
-        <p:spPr>
-          <a:xfrm>
-            <a:off x="7328916" y="2743200"/>
-            <a:ext cx="1371600" cy="1371600"/>
-          </a:xfrm>
-          <a:prstGeom prst="rect">
-            <a:avLst/>
-          </a:prstGeom>
-          <a:noFill/>
-          <a:ln/>
-        </p:spPr>
-        <p:txBody>
-          <a:bodyPr wrap="square" lIns="0" tIns="0" rIns="0" bIns="0" rtlCol="0" anchor="ctr"/>
-          <a:lstStyle/>
-          <a:p>
-            <a:pPr algn="ctr" indent="0" marL="0">
-              <a:buNone/>
-            </a:pPr>
-            <a:r>
-              <a:rPr lang="en-US" sz="4000" b="1" dirty="0">
-                <a:solidFill>
-                  <a:srgbClr val="FFFFFF"/>
-                </a:solidFill>
-                <a:latin typeface="Arial" pitchFamily="34" charset="0"/>
-                <a:ea typeface="Arial" pitchFamily="34" charset="-122"/>
-                <a:cs typeface="Arial" pitchFamily="34" charset="-120"/>
-              </a:rPr>
-              <a:t>2</a:t>
-            </a:r>
-            <a:endParaRPr lang="en-US" sz="4000" dirty="0"/>
-          </a:p>
-        </p:txBody>
-      </p:sp>
-      <p:sp>
-        <p:nvSpPr>
-          <p:cNvPr id="9" name="Text 7"/>
-          <p:cNvSpPr txBox="1"/>
-          <p:nvPr/>
-        </p:nvSpPr>
-        <p:spPr>
-          <a:xfrm>
-            <a:off x="7054596" y="4251960"/>
-            <a:ext cx="1920240" cy="548640"/>
-          </a:xfrm>
-          <a:prstGeom prst="rect">
-            <a:avLst/>
-          </a:prstGeom>
-          <a:noFill/>
-          <a:ln/>
-        </p:spPr>
-        <p:txBody>
-          <a:bodyPr wrap="square" lIns="0" tIns="0" rIns="0" bIns="0" rtlCol="0" anchor="t"/>
-          <a:lstStyle/>
-          <a:p>
-            <a:pPr rtl="1" algn="ctr" indent="0" marL="0">
-              <a:buNone/>
-            </a:pPr>
-            <a:r>
-              <a:rPr lang="he-IL" altLang="en-US" sz="1400" dirty="0">
-                <a:solidFill>
-                  <a:srgbClr val="1F2937"/>
-                </a:solidFill>
-                <a:latin typeface="Arial" pitchFamily="34" charset="0"/>
-                <a:ea typeface="Arial" pitchFamily="34" charset="-122"/>
-                <a:cs typeface="Arial" pitchFamily="34" charset="-120"/>
-              </a:rPr>
-              <a:t>לא כל כך</a:t>
-            </a:r>
-            <a:endParaRPr lang="he-IL" sz="1400" dirty="0"/>
-          </a:p>
-        </p:txBody>
-      </p:sp>
-      <p:sp>
-        <p:nvSpPr>
-          <p:cNvPr id="10" name="Shape 8"/>
-          <p:cNvSpPr/>
-          <p:nvPr/>
-        </p:nvSpPr>
-        <p:spPr>
-          <a:xfrm>
-            <a:off x="5408676" y="2743200"/>
-            <a:ext cx="1371600" cy="1371600"/>
-          </a:xfrm>
-          <a:prstGeom prst="ellipse">
-            <a:avLst/>
-          </a:prstGeom>
-          <a:solidFill>
-            <a:srgbClr val="E9C46A"/>
-          </a:solidFill>
-          <a:ln w="12700">
-            <a:solidFill>
-              <a:srgbClr val="E9C46A"/>
-            </a:solidFill>
-            <a:prstDash val="solid"/>
-          </a:ln>
-        </p:spPr>
-      </p:sp>
-      <p:sp>
-        <p:nvSpPr>
-          <p:cNvPr id="11" name="Text 9"/>
-          <p:cNvSpPr txBox="1"/>
-          <p:nvPr/>
-        </p:nvSpPr>
-        <p:spPr>
-          <a:xfrm>
-            <a:off x="5408676" y="2743200"/>
-            <a:ext cx="1371600" cy="1371600"/>
-          </a:xfrm>
-          <a:prstGeom prst="rect">
-            <a:avLst/>
-          </a:prstGeom>
-          <a:noFill/>
-          <a:ln/>
-        </p:spPr>
-        <p:txBody>
-          <a:bodyPr wrap="square" lIns="0" tIns="0" rIns="0" bIns="0" rtlCol="0" anchor="ctr"/>
-          <a:lstStyle/>
-          <a:p>
-            <a:pPr algn="ctr" indent="0" marL="0">
-              <a:buNone/>
-            </a:pPr>
-            <a:r>
-              <a:rPr lang="en-US" sz="4000" b="1" dirty="0">
-                <a:solidFill>
-                  <a:srgbClr val="FFFFFF"/>
-                </a:solidFill>
-                <a:latin typeface="Arial" pitchFamily="34" charset="0"/>
-                <a:ea typeface="Arial" pitchFamily="34" charset="-122"/>
-                <a:cs typeface="Arial" pitchFamily="34" charset="-120"/>
-              </a:rPr>
-              <a:t>3</a:t>
-            </a:r>
-            <a:endParaRPr lang="en-US" sz="4000" dirty="0"/>
-          </a:p>
-        </p:txBody>
-      </p:sp>
-      <p:sp>
-        <p:nvSpPr>
-          <p:cNvPr id="12" name="Text 10"/>
-          <p:cNvSpPr txBox="1"/>
-          <p:nvPr/>
-        </p:nvSpPr>
-        <p:spPr>
-          <a:xfrm>
-            <a:off x="5134356" y="4251960"/>
-            <a:ext cx="1920240" cy="548640"/>
-          </a:xfrm>
-          <a:prstGeom prst="rect">
-            <a:avLst/>
-          </a:prstGeom>
-          <a:noFill/>
-          <a:ln/>
-        </p:spPr>
-        <p:txBody>
-          <a:bodyPr wrap="square" lIns="0" tIns="0" rIns="0" bIns="0" rtlCol="0" anchor="t"/>
-          <a:lstStyle/>
-          <a:p>
-            <a:pPr rtl="1" algn="ctr" indent="0" marL="0">
-              <a:buNone/>
-            </a:pPr>
-            <a:r>
-              <a:rPr lang="he-IL" altLang="en-US" sz="1400" dirty="0">
-                <a:solidFill>
-                  <a:srgbClr val="1F2937"/>
-                </a:solidFill>
-                <a:latin typeface="Arial" pitchFamily="34" charset="0"/>
-                <a:ea typeface="Arial" pitchFamily="34" charset="-122"/>
-                <a:cs typeface="Arial" pitchFamily="34" charset="-120"/>
-              </a:rPr>
-              <a:t>ככה-ככה</a:t>
-            </a:r>
-            <a:endParaRPr lang="he-IL" sz="1400" dirty="0"/>
-          </a:p>
-        </p:txBody>
-      </p:sp>
-      <p:sp>
-        <p:nvSpPr>
-          <p:cNvPr id="13" name="Shape 11"/>
-          <p:cNvSpPr/>
-          <p:nvPr/>
-        </p:nvSpPr>
-        <p:spPr>
-          <a:xfrm>
-            <a:off x="3488436" y="2743200"/>
-            <a:ext cx="1371600" cy="1371600"/>
-          </a:xfrm>
-          <a:prstGeom prst="ellipse">
-            <a:avLst/>
-          </a:prstGeom>
-          <a:solidFill>
-            <a:srgbClr val="8AB17D"/>
-          </a:solidFill>
-          <a:ln w="12700">
-            <a:solidFill>
-              <a:srgbClr val="8AB17D"/>
-            </a:solidFill>
-            <a:prstDash val="solid"/>
-          </a:ln>
-        </p:spPr>
-      </p:sp>
-      <p:sp>
-        <p:nvSpPr>
-          <p:cNvPr id="14" name="Text 12"/>
-          <p:cNvSpPr txBox="1"/>
-          <p:nvPr/>
-        </p:nvSpPr>
-        <p:spPr>
-          <a:xfrm>
-            <a:off x="3488436" y="2743200"/>
-            <a:ext cx="1371600" cy="1371600"/>
-          </a:xfrm>
-          <a:prstGeom prst="rect">
-            <a:avLst/>
-          </a:prstGeom>
-          <a:noFill/>
-          <a:ln/>
-        </p:spPr>
-        <p:txBody>
-          <a:bodyPr wrap="square" lIns="0" tIns="0" rIns="0" bIns="0" rtlCol="0" anchor="ctr"/>
-          <a:lstStyle/>
-          <a:p>
-            <a:pPr algn="ctr" indent="0" marL="0">
-              <a:buNone/>
-            </a:pPr>
-            <a:r>
-              <a:rPr lang="en-US" sz="4000" b="1" dirty="0">
-                <a:solidFill>
-                  <a:srgbClr val="FFFFFF"/>
-                </a:solidFill>
-                <a:latin typeface="Arial" pitchFamily="34" charset="0"/>
-                <a:ea typeface="Arial" pitchFamily="34" charset="-122"/>
-                <a:cs typeface="Arial" pitchFamily="34" charset="-120"/>
-              </a:rPr>
-              <a:t>4</a:t>
-            </a:r>
-            <a:endParaRPr lang="en-US" sz="4000" dirty="0"/>
-          </a:p>
-        </p:txBody>
-      </p:sp>
-      <p:sp>
-        <p:nvSpPr>
-          <p:cNvPr id="15" name="Text 13"/>
-          <p:cNvSpPr txBox="1"/>
-          <p:nvPr/>
-        </p:nvSpPr>
-        <p:spPr>
-          <a:xfrm>
-            <a:off x="3214116" y="4251960"/>
-            <a:ext cx="1920240" cy="548640"/>
-          </a:xfrm>
-          <a:prstGeom prst="rect">
-            <a:avLst/>
-          </a:prstGeom>
-          <a:noFill/>
-          <a:ln/>
-        </p:spPr>
-        <p:txBody>
-          <a:bodyPr wrap="square" lIns="0" tIns="0" rIns="0" bIns="0" rtlCol="0" anchor="t"/>
-          <a:lstStyle/>
-          <a:p>
-            <a:pPr rtl="1" algn="ctr" indent="0" marL="0">
-              <a:buNone/>
-            </a:pPr>
-            <a:r>
-              <a:rPr lang="he-IL" altLang="en-US" sz="1400" dirty="0">
-                <a:solidFill>
-                  <a:srgbClr val="1F2937"/>
-                </a:solidFill>
-                <a:latin typeface="Arial" pitchFamily="34" charset="0"/>
-                <a:ea typeface="Arial" pitchFamily="34" charset="-122"/>
-                <a:cs typeface="Arial" pitchFamily="34" charset="-120"/>
-              </a:rPr>
-              <a:t>די בטוח/ה</a:t>
-            </a:r>
-            <a:endParaRPr lang="he-IL" sz="1400" dirty="0"/>
-          </a:p>
-        </p:txBody>
-      </p:sp>
-      <p:sp>
-        <p:nvSpPr>
-          <p:cNvPr id="16" name="Shape 14"/>
-          <p:cNvSpPr/>
-          <p:nvPr/>
-        </p:nvSpPr>
-        <p:spPr>
-          <a:xfrm>
-            <a:off x="1568196" y="2743200"/>
-            <a:ext cx="1371600" cy="1371600"/>
-          </a:xfrm>
-          <a:prstGeom prst="ellipse">
-            <a:avLst/>
-          </a:prstGeom>
-          <a:solidFill>
-            <a:srgbClr val="2A9D8F"/>
-          </a:solidFill>
-          <a:ln w="12700">
-            <a:solidFill>
-              <a:srgbClr val="2A9D8F"/>
-            </a:solidFill>
-            <a:prstDash val="solid"/>
-          </a:ln>
-        </p:spPr>
-      </p:sp>
-      <p:sp>
-        <p:nvSpPr>
-          <p:cNvPr id="17" name="Text 15"/>
-          <p:cNvSpPr txBox="1"/>
-          <p:nvPr/>
-        </p:nvSpPr>
-        <p:spPr>
-          <a:xfrm>
-            <a:off x="1568196" y="2743200"/>
-            <a:ext cx="1371600" cy="1371600"/>
-          </a:xfrm>
-          <a:prstGeom prst="rect">
-            <a:avLst/>
-          </a:prstGeom>
-          <a:noFill/>
-          <a:ln/>
-        </p:spPr>
-        <p:txBody>
-          <a:bodyPr wrap="square" lIns="0" tIns="0" rIns="0" bIns="0" rtlCol="0" anchor="ctr"/>
-          <a:lstStyle/>
-          <a:p>
-            <a:pPr algn="ctr" indent="0" marL="0">
-              <a:buNone/>
-            </a:pPr>
-            <a:r>
-              <a:rPr lang="en-US" sz="4000" b="1" dirty="0">
-                <a:solidFill>
-                  <a:srgbClr val="FFFFFF"/>
-                </a:solidFill>
-                <a:latin typeface="Arial" pitchFamily="34" charset="0"/>
-                <a:ea typeface="Arial" pitchFamily="34" charset="-122"/>
-                <a:cs typeface="Arial" pitchFamily="34" charset="-120"/>
-              </a:rPr>
-              <a:t>5</a:t>
-            </a:r>
-            <a:endParaRPr lang="en-US" sz="4000" dirty="0"/>
-          </a:p>
-        </p:txBody>
-      </p:sp>
-      <p:sp>
-        <p:nvSpPr>
-          <p:cNvPr id="18" name="Text 16"/>
-          <p:cNvSpPr txBox="1"/>
-          <p:nvPr/>
-        </p:nvSpPr>
-        <p:spPr>
-          <a:xfrm>
-            <a:off x="1293876" y="4251960"/>
-            <a:ext cx="1920240" cy="548640"/>
-          </a:xfrm>
-          <a:prstGeom prst="rect">
-            <a:avLst/>
-          </a:prstGeom>
-          <a:noFill/>
-          <a:ln/>
-        </p:spPr>
-        <p:txBody>
-          <a:bodyPr wrap="square" lIns="0" tIns="0" rIns="0" bIns="0" rtlCol="0" anchor="t"/>
-          <a:lstStyle/>
-          <a:p>
-            <a:pPr rtl="1" algn="ctr" indent="0" marL="0">
-              <a:buNone/>
-            </a:pPr>
-            <a:r>
-              <a:rPr lang="he-IL" altLang="en-US" sz="1400" dirty="0">
-                <a:solidFill>
-                  <a:srgbClr val="1F2937"/>
-                </a:solidFill>
-                <a:latin typeface="Arial" pitchFamily="34" charset="0"/>
-                <a:ea typeface="Arial" pitchFamily="34" charset="-122"/>
-                <a:cs typeface="Arial" pitchFamily="34" charset="-120"/>
-              </a:rPr>
-              <a:t>בטוח/ה מאוד</a:t>
-            </a:r>
-            <a:endParaRPr lang="he-IL" sz="1400" dirty="0"/>
-          </a:p>
-        </p:txBody>
-      </p:sp>
-      <p:sp>
-        <p:nvSpPr>
-          <p:cNvPr id="19" name="Shape 17"/>
-          <p:cNvSpPr/>
-          <p:nvPr/>
-        </p:nvSpPr>
-        <p:spPr>
-          <a:xfrm>
-            <a:off x="548640" y="5120640"/>
-            <a:ext cx="11091672" cy="1097280"/>
+            <a:off x="8074152" y="1828800"/>
+            <a:ext cx="3566160" cy="2926080"/>
           </a:xfrm>
           <a:prstGeom prst="roundRect">
             <a:avLst>
-              <a:gd name="adj" fmla="val 10000"/>
+              <a:gd name="adj" fmla="val 3750"/>
             </a:avLst>
           </a:prstGeom>
           <a:solidFill>
@@ -10095,6 +10070,534 @@
       </p:sp>
       <p:sp>
         <p:nvSpPr>
+          <p:cNvPr id="5" name="Shape 3"/>
+          <p:cNvSpPr/>
+          <p:nvPr/>
+        </p:nvSpPr>
+        <p:spPr>
+          <a:xfrm>
+            <a:off x="9354312" y="2103120"/>
+            <a:ext cx="1005840" cy="1005840"/>
+          </a:xfrm>
+          <a:prstGeom prst="ellipse">
+            <a:avLst/>
+          </a:prstGeom>
+          <a:solidFill>
+            <a:srgbClr val="2A9D8F"/>
+          </a:solidFill>
+          <a:ln w="12700">
+            <a:solidFill>
+              <a:srgbClr val="2A9D8F"/>
+            </a:solidFill>
+            <a:prstDash val="solid"/>
+          </a:ln>
+        </p:spPr>
+      </p:sp>
+      <p:sp>
+        <p:nvSpPr>
+          <p:cNvPr id="6" name="Text 4"/>
+          <p:cNvSpPr txBox="1"/>
+          <p:nvPr/>
+        </p:nvSpPr>
+        <p:spPr>
+          <a:xfrm>
+            <a:off x="9354312" y="2103120"/>
+            <a:ext cx="1005840" cy="1005840"/>
+          </a:xfrm>
+          <a:prstGeom prst="rect">
+            <a:avLst/>
+          </a:prstGeom>
+          <a:noFill/>
+          <a:ln/>
+        </p:spPr>
+        <p:txBody>
+          <a:bodyPr wrap="square" lIns="0" tIns="0" rIns="0" bIns="0" rtlCol="0" anchor="ctr"/>
+          <a:lstStyle/>
+          <a:p>
+            <a:pPr algn="ctr" indent="0" marL="0">
+              <a:buNone/>
+            </a:pPr>
+            <a:r>
+              <a:rPr lang="en-US" sz="3600" b="1" dirty="0">
+                <a:solidFill>
+                  <a:srgbClr val="FFFFFF"/>
+                </a:solidFill>
+                <a:latin typeface="Arial" pitchFamily="34" charset="0"/>
+                <a:ea typeface="Arial" pitchFamily="34" charset="-122"/>
+                <a:cs typeface="Arial" pitchFamily="34" charset="-120"/>
+              </a:rPr>
+              <a:t>1</a:t>
+            </a:r>
+            <a:endParaRPr lang="en-US" sz="3600" dirty="0"/>
+          </a:p>
+        </p:txBody>
+      </p:sp>
+      <p:sp>
+        <p:nvSpPr>
+          <p:cNvPr id="7" name="Text 5"/>
+          <p:cNvSpPr txBox="1"/>
+          <p:nvPr/>
+        </p:nvSpPr>
+        <p:spPr>
+          <a:xfrm>
+            <a:off x="8348472" y="3291840"/>
+            <a:ext cx="3017520" cy="822960"/>
+          </a:xfrm>
+          <a:prstGeom prst="rect">
+            <a:avLst/>
+          </a:prstGeom>
+          <a:noFill/>
+          <a:ln/>
+        </p:spPr>
+        <p:txBody>
+          <a:bodyPr wrap="square" lIns="0" tIns="0" rIns="0" bIns="0" rtlCol="0" anchor="ctr"/>
+          <a:lstStyle/>
+          <a:p>
+            <a:pPr rtl="1" algn="ctr" indent="0" marL="0">
+              <a:buNone/>
+            </a:pPr>
+            <a:r>
+              <a:rPr lang="he-IL" altLang="en-US" sz="2000" b="1" dirty="0">
+                <a:solidFill>
+                  <a:srgbClr val="14213D"/>
+                </a:solidFill>
+                <a:latin typeface="Arial" pitchFamily="34" charset="0"/>
+                <a:ea typeface="Arial" pitchFamily="34" charset="-122"/>
+                <a:cs typeface="Arial" pitchFamily="34" charset="-120"/>
+              </a:rPr>
+              <a:t>ברור וצפוי?</a:t>
+            </a:r>
+            <a:endParaRPr lang="he-IL" sz="2000" dirty="0"/>
+          </a:p>
+        </p:txBody>
+      </p:sp>
+      <p:sp>
+        <p:nvSpPr>
+          <p:cNvPr id="8" name="Text 6"/>
+          <p:cNvSpPr txBox="1"/>
+          <p:nvPr/>
+        </p:nvSpPr>
+        <p:spPr>
+          <a:xfrm>
+            <a:off x="8348472" y="4160520"/>
+            <a:ext cx="3017520" cy="411480"/>
+          </a:xfrm>
+          <a:prstGeom prst="rect">
+            <a:avLst/>
+          </a:prstGeom>
+          <a:noFill/>
+          <a:ln/>
+        </p:spPr>
+        <p:txBody>
+          <a:bodyPr wrap="square" lIns="0" tIns="0" rIns="0" bIns="0" rtlCol="0" anchor="t"/>
+          <a:lstStyle/>
+          <a:p>
+            <a:pPr rtl="1" algn="ctr" indent="0" marL="0">
+              <a:buNone/>
+            </a:pPr>
+            <a:r>
+              <a:rPr lang="he-IL" altLang="en-US" sz="1400" b="1" dirty="0">
+                <a:solidFill>
+                  <a:srgbClr val="2A9D8F"/>
+                </a:solidFill>
+                <a:latin typeface="Arial" pitchFamily="34" charset="0"/>
+                <a:ea typeface="Arial" pitchFamily="34" charset="-122"/>
+                <a:cs typeface="Arial" pitchFamily="34" charset="-120"/>
+              </a:rPr>
+              <a:t>מובנות</a:t>
+            </a:r>
+            <a:endParaRPr lang="he-IL" sz="1400" dirty="0"/>
+          </a:p>
+        </p:txBody>
+      </p:sp>
+      <p:sp>
+        <p:nvSpPr>
+          <p:cNvPr id="9" name="Shape 7"/>
+          <p:cNvSpPr/>
+          <p:nvPr/>
+        </p:nvSpPr>
+        <p:spPr>
+          <a:xfrm>
+            <a:off x="4311396" y="1828800"/>
+            <a:ext cx="3566160" cy="2926080"/>
+          </a:xfrm>
+          <a:prstGeom prst="roundRect">
+            <a:avLst>
+              <a:gd name="adj" fmla="val 3750"/>
+            </a:avLst>
+          </a:prstGeom>
+          <a:solidFill>
+            <a:srgbClr val="FFFFFF"/>
+          </a:solidFill>
+          <a:ln w="12700">
+            <a:solidFill>
+              <a:srgbClr val="FFFFFF"/>
+            </a:solidFill>
+            <a:prstDash val="solid"/>
+          </a:ln>
+          <a:effectLst>
+            <a:outerShdw sx="100000" sy="100000" kx="0" ky="0" algn="bl" rotWithShape="0" blurRad="50800" dist="25400" dir="5400000">
+              <a:srgbClr val="000000">
+                <a:alpha val="12000"/>
+              </a:srgbClr>
+            </a:outerShdw>
+          </a:effectLst>
+        </p:spPr>
+      </p:sp>
+      <p:sp>
+        <p:nvSpPr>
+          <p:cNvPr id="10" name="Shape 8"/>
+          <p:cNvSpPr/>
+          <p:nvPr/>
+        </p:nvSpPr>
+        <p:spPr>
+          <a:xfrm>
+            <a:off x="5591556" y="2103120"/>
+            <a:ext cx="1005840" cy="1005840"/>
+          </a:xfrm>
+          <a:prstGeom prst="ellipse">
+            <a:avLst/>
+          </a:prstGeom>
+          <a:solidFill>
+            <a:srgbClr val="FCA311"/>
+          </a:solidFill>
+          <a:ln w="12700">
+            <a:solidFill>
+              <a:srgbClr val="FCA311"/>
+            </a:solidFill>
+            <a:prstDash val="solid"/>
+          </a:ln>
+        </p:spPr>
+      </p:sp>
+      <p:sp>
+        <p:nvSpPr>
+          <p:cNvPr id="11" name="Text 9"/>
+          <p:cNvSpPr txBox="1"/>
+          <p:nvPr/>
+        </p:nvSpPr>
+        <p:spPr>
+          <a:xfrm>
+            <a:off x="5591556" y="2103120"/>
+            <a:ext cx="1005840" cy="1005840"/>
+          </a:xfrm>
+          <a:prstGeom prst="rect">
+            <a:avLst/>
+          </a:prstGeom>
+          <a:noFill/>
+          <a:ln/>
+        </p:spPr>
+        <p:txBody>
+          <a:bodyPr wrap="square" lIns="0" tIns="0" rIns="0" bIns="0" rtlCol="0" anchor="ctr"/>
+          <a:lstStyle/>
+          <a:p>
+            <a:pPr algn="ctr" indent="0" marL="0">
+              <a:buNone/>
+            </a:pPr>
+            <a:r>
+              <a:rPr lang="en-US" sz="3600" b="1" dirty="0">
+                <a:solidFill>
+                  <a:srgbClr val="FFFFFF"/>
+                </a:solidFill>
+                <a:latin typeface="Arial" pitchFamily="34" charset="0"/>
+                <a:ea typeface="Arial" pitchFamily="34" charset="-122"/>
+                <a:cs typeface="Arial" pitchFamily="34" charset="-120"/>
+              </a:rPr>
+              <a:t>2</a:t>
+            </a:r>
+            <a:endParaRPr lang="en-US" sz="3600" dirty="0"/>
+          </a:p>
+        </p:txBody>
+      </p:sp>
+      <p:sp>
+        <p:nvSpPr>
+          <p:cNvPr id="12" name="Text 10"/>
+          <p:cNvSpPr txBox="1"/>
+          <p:nvPr/>
+        </p:nvSpPr>
+        <p:spPr>
+          <a:xfrm>
+            <a:off x="4585716" y="3291840"/>
+            <a:ext cx="3017520" cy="822960"/>
+          </a:xfrm>
+          <a:prstGeom prst="rect">
+            <a:avLst/>
+          </a:prstGeom>
+          <a:noFill/>
+          <a:ln/>
+        </p:spPr>
+        <p:txBody>
+          <a:bodyPr wrap="square" lIns="0" tIns="0" rIns="0" bIns="0" rtlCol="0" anchor="ctr"/>
+          <a:lstStyle/>
+          <a:p>
+            <a:pPr rtl="1" algn="ctr" indent="0" marL="0">
+              <a:buNone/>
+            </a:pPr>
+            <a:r>
+              <a:rPr lang="he-IL" altLang="en-US" sz="2000" b="1" dirty="0">
+                <a:solidFill>
+                  <a:srgbClr val="14213D"/>
+                </a:solidFill>
+                <a:latin typeface="Arial" pitchFamily="34" charset="0"/>
+                <a:ea typeface="Arial" pitchFamily="34" charset="-122"/>
+                <a:cs typeface="Arial" pitchFamily="34" charset="-120"/>
+              </a:rPr>
+              <a:t>יש לי מספיק זמן, כלים ותמיכה?</a:t>
+            </a:r>
+            <a:endParaRPr lang="he-IL" sz="2000" dirty="0"/>
+          </a:p>
+        </p:txBody>
+      </p:sp>
+      <p:sp>
+        <p:nvSpPr>
+          <p:cNvPr id="13" name="Text 11"/>
+          <p:cNvSpPr txBox="1"/>
+          <p:nvPr/>
+        </p:nvSpPr>
+        <p:spPr>
+          <a:xfrm>
+            <a:off x="4585716" y="4160520"/>
+            <a:ext cx="3017520" cy="411480"/>
+          </a:xfrm>
+          <a:prstGeom prst="rect">
+            <a:avLst/>
+          </a:prstGeom>
+          <a:noFill/>
+          <a:ln/>
+        </p:spPr>
+        <p:txBody>
+          <a:bodyPr wrap="square" lIns="0" tIns="0" rIns="0" bIns="0" rtlCol="0" anchor="t"/>
+          <a:lstStyle/>
+          <a:p>
+            <a:pPr rtl="1" algn="ctr" indent="0" marL="0">
+              <a:buNone/>
+            </a:pPr>
+            <a:r>
+              <a:rPr lang="he-IL" altLang="en-US" sz="1400" b="1" dirty="0">
+                <a:solidFill>
+                  <a:srgbClr val="FCA311"/>
+                </a:solidFill>
+                <a:latin typeface="Arial" pitchFamily="34" charset="0"/>
+                <a:ea typeface="Arial" pitchFamily="34" charset="-122"/>
+                <a:cs typeface="Arial" pitchFamily="34" charset="-120"/>
+              </a:rPr>
+              <a:t>ניהוליות</a:t>
+            </a:r>
+            <a:endParaRPr lang="he-IL" sz="1400" dirty="0"/>
+          </a:p>
+        </p:txBody>
+      </p:sp>
+      <p:sp>
+        <p:nvSpPr>
+          <p:cNvPr id="14" name="Shape 12"/>
+          <p:cNvSpPr/>
+          <p:nvPr/>
+        </p:nvSpPr>
+        <p:spPr>
+          <a:xfrm>
+            <a:off x="548640" y="1828800"/>
+            <a:ext cx="3566160" cy="2926080"/>
+          </a:xfrm>
+          <a:prstGeom prst="roundRect">
+            <a:avLst>
+              <a:gd name="adj" fmla="val 3750"/>
+            </a:avLst>
+          </a:prstGeom>
+          <a:solidFill>
+            <a:srgbClr val="FFFFFF"/>
+          </a:solidFill>
+          <a:ln w="12700">
+            <a:solidFill>
+              <a:srgbClr val="FFFFFF"/>
+            </a:solidFill>
+            <a:prstDash val="solid"/>
+          </a:ln>
+          <a:effectLst>
+            <a:outerShdw sx="100000" sy="100000" kx="0" ky="0" algn="bl" rotWithShape="0" blurRad="50800" dist="25400" dir="5400000">
+              <a:srgbClr val="000000">
+                <a:alpha val="12000"/>
+              </a:srgbClr>
+            </a:outerShdw>
+          </a:effectLst>
+        </p:spPr>
+      </p:sp>
+      <p:sp>
+        <p:nvSpPr>
+          <p:cNvPr id="15" name="Shape 13"/>
+          <p:cNvSpPr/>
+          <p:nvPr/>
+        </p:nvSpPr>
+        <p:spPr>
+          <a:xfrm>
+            <a:off x="1828800" y="2103120"/>
+            <a:ext cx="1005840" cy="1005840"/>
+          </a:xfrm>
+          <a:prstGeom prst="ellipse">
+            <a:avLst/>
+          </a:prstGeom>
+          <a:solidFill>
+            <a:srgbClr val="E76F51"/>
+          </a:solidFill>
+          <a:ln w="12700">
+            <a:solidFill>
+              <a:srgbClr val="E76F51"/>
+            </a:solidFill>
+            <a:prstDash val="solid"/>
+          </a:ln>
+        </p:spPr>
+      </p:sp>
+      <p:sp>
+        <p:nvSpPr>
+          <p:cNvPr id="16" name="Text 14"/>
+          <p:cNvSpPr txBox="1"/>
+          <p:nvPr/>
+        </p:nvSpPr>
+        <p:spPr>
+          <a:xfrm>
+            <a:off x="1828800" y="2103120"/>
+            <a:ext cx="1005840" cy="1005840"/>
+          </a:xfrm>
+          <a:prstGeom prst="rect">
+            <a:avLst/>
+          </a:prstGeom>
+          <a:noFill/>
+          <a:ln/>
+        </p:spPr>
+        <p:txBody>
+          <a:bodyPr wrap="square" lIns="0" tIns="0" rIns="0" bIns="0" rtlCol="0" anchor="ctr"/>
+          <a:lstStyle/>
+          <a:p>
+            <a:pPr algn="ctr" indent="0" marL="0">
+              <a:buNone/>
+            </a:pPr>
+            <a:r>
+              <a:rPr lang="en-US" sz="3600" b="1" dirty="0">
+                <a:solidFill>
+                  <a:srgbClr val="FFFFFF"/>
+                </a:solidFill>
+                <a:latin typeface="Arial" pitchFamily="34" charset="0"/>
+                <a:ea typeface="Arial" pitchFamily="34" charset="-122"/>
+                <a:cs typeface="Arial" pitchFamily="34" charset="-120"/>
+              </a:rPr>
+              <a:t>3</a:t>
+            </a:r>
+            <a:endParaRPr lang="en-US" sz="3600" dirty="0"/>
+          </a:p>
+        </p:txBody>
+      </p:sp>
+      <p:sp>
+        <p:nvSpPr>
+          <p:cNvPr id="17" name="Text 15"/>
+          <p:cNvSpPr txBox="1"/>
+          <p:nvPr/>
+        </p:nvSpPr>
+        <p:spPr>
+          <a:xfrm>
+            <a:off x="822960" y="3291840"/>
+            <a:ext cx="3017520" cy="822960"/>
+          </a:xfrm>
+          <a:prstGeom prst="rect">
+            <a:avLst/>
+          </a:prstGeom>
+          <a:noFill/>
+          <a:ln/>
+        </p:spPr>
+        <p:txBody>
+          <a:bodyPr wrap="square" lIns="0" tIns="0" rIns="0" bIns="0" rtlCol="0" anchor="ctr"/>
+          <a:lstStyle/>
+          <a:p>
+            <a:pPr rtl="1" algn="ctr" indent="0" marL="0">
+              <a:buNone/>
+            </a:pPr>
+            <a:r>
+              <a:rPr lang="he-IL" altLang="en-US" sz="2000" b="1" dirty="0">
+                <a:solidFill>
+                  <a:srgbClr val="14213D"/>
+                </a:solidFill>
+                <a:latin typeface="Arial" pitchFamily="34" charset="0"/>
+                <a:ea typeface="Arial" pitchFamily="34" charset="-122"/>
+                <a:cs typeface="Arial" pitchFamily="34" charset="-120"/>
+              </a:rPr>
+              <a:t>שווה את המאמץ?</a:t>
+            </a:r>
+            <a:endParaRPr lang="he-IL" sz="2000" dirty="0"/>
+          </a:p>
+        </p:txBody>
+      </p:sp>
+      <p:sp>
+        <p:nvSpPr>
+          <p:cNvPr id="18" name="Text 16"/>
+          <p:cNvSpPr txBox="1"/>
+          <p:nvPr/>
+        </p:nvSpPr>
+        <p:spPr>
+          <a:xfrm>
+            <a:off x="822960" y="4160520"/>
+            <a:ext cx="3017520" cy="411480"/>
+          </a:xfrm>
+          <a:prstGeom prst="rect">
+            <a:avLst/>
+          </a:prstGeom>
+          <a:noFill/>
+          <a:ln/>
+        </p:spPr>
+        <p:txBody>
+          <a:bodyPr wrap="square" lIns="0" tIns="0" rIns="0" bIns="0" rtlCol="0" anchor="t"/>
+          <a:lstStyle/>
+          <a:p>
+            <a:pPr rtl="1" algn="ctr" indent="0" marL="0">
+              <a:buNone/>
+            </a:pPr>
+            <a:r>
+              <a:rPr lang="he-IL" altLang="en-US" sz="1400" b="1" dirty="0">
+                <a:solidFill>
+                  <a:srgbClr val="E76F51"/>
+                </a:solidFill>
+                <a:latin typeface="Arial" pitchFamily="34" charset="0"/>
+                <a:ea typeface="Arial" pitchFamily="34" charset="-122"/>
+                <a:cs typeface="Arial" pitchFamily="34" charset="-120"/>
+              </a:rPr>
+              <a:t>משמעותיות</a:t>
+            </a:r>
+            <a:endParaRPr lang="he-IL" sz="1400" dirty="0"/>
+          </a:p>
+        </p:txBody>
+      </p:sp>
+      <p:sp>
+        <p:nvSpPr>
+          <p:cNvPr id="19" name="Shape 17"/>
+          <p:cNvSpPr/>
+          <p:nvPr/>
+        </p:nvSpPr>
+        <p:spPr>
+          <a:xfrm>
+            <a:off x="548640" y="5120640"/>
+            <a:ext cx="11091672" cy="1097280"/>
+          </a:xfrm>
+          <a:prstGeom prst="roundRect">
+            <a:avLst>
+              <a:gd name="adj" fmla="val 10000"/>
+            </a:avLst>
+          </a:prstGeom>
+          <a:solidFill>
+            <a:srgbClr val="FFFFFF"/>
+          </a:solidFill>
+          <a:ln w="12700">
+            <a:solidFill>
+              <a:srgbClr val="FFFFFF"/>
+            </a:solidFill>
+            <a:prstDash val="solid"/>
+          </a:ln>
+          <a:effectLst>
+            <a:outerShdw sx="100000" sy="100000" kx="0" ky="0" algn="bl" rotWithShape="0" blurRad="50800" dist="25400" dir="5400000">
+              <a:srgbClr val="000000">
+                <a:alpha val="12000"/>
+              </a:srgbClr>
+            </a:outerShdw>
+          </a:effectLst>
+        </p:spPr>
+      </p:sp>
+      <p:sp>
+        <p:nvSpPr>
           <p:cNvPr id="20" name="Text 18"/>
           <p:cNvSpPr txBox="1"/>
           <p:nvPr/>
@@ -10126,7 +10629,7 @@
                 <a:ea typeface="Arial" pitchFamily="34" charset="-122"/>
                 <a:cs typeface="Arial" pitchFamily="34" charset="-120"/>
               </a:rPr>
-              <a:t>הצבעה ב-Mentimeter או הרמת ידיים. התוצאות יוצגו על המסך ונחזור אליהן בסוף.</a:t>
+              <a:t>הצבעה ב-Mentimeter או הרמת ידיים. אלה שלושת הרכיבים של "תחושת קוהרנטיות בעבודה". נחזור אליהם בסוף.</a:t>
             </a:r>
             <a:endParaRPr lang="he-IL" sz="1700" dirty="0"/>
           </a:p>
@@ -11022,7 +11525,7 @@
                 <a:ea typeface="Arial" pitchFamily="34" charset="-122"/>
                 <a:cs typeface="Arial" pitchFamily="34" charset="-120"/>
               </a:rPr>
-              <a:t>🧩</a:t>
+              <a:t>🧭</a:t>
             </a:r>
             <a:endParaRPr lang="en-US" sz="1800" dirty="0"/>
           </a:p>
@@ -11061,7 +11564,7 @@
                 <a:ea typeface="Arial" pitchFamily="34" charset="-122"/>
                 <a:cs typeface="Arial" pitchFamily="34" charset="-120"/>
               </a:rPr>
-              <a:t>צורות העסקה חדשות</a:t>
+              <a:t>דרישות חדשות</a:t>
             </a:r>
             <a:endParaRPr lang="he-IL" sz="1700" dirty="0"/>
           </a:p>
@@ -11100,7 +11603,7 @@
                 <a:ea typeface="Arial" pitchFamily="34" charset="-122"/>
                 <a:cs typeface="Arial" pitchFamily="34" charset="-120"/>
               </a:rPr>
-              <a:t>פרילנס, חוזים זמניים, גיג. חוסר ביטחון הופך ממצב חריג למצב כרוני</a:t>
+              <a:t>ניהול עצמי, הסתגלות ויוזמה אישית: מה שעולם העבודה הגמיש דורש (Cetkovská et al., 2026)</a:t>
             </a:r>
             <a:endParaRPr lang="he-IL" sz="1250" dirty="0"/>
           </a:p>
@@ -11307,7 +11810,7 @@
               <a:buNone/>
             </a:pPr>
             <a:r>
-              <a:rPr lang="en-US" sz="1900" b="1" dirty="0">
+              <a:rPr lang="en-US" sz="1800" b="1" dirty="0">
                 <a:solidFill>
                   <a:srgbClr val="FFFFFF"/>
                 </a:solidFill>
@@ -11315,9 +11818,9 @@
                 <a:ea typeface="Arial" pitchFamily="34" charset="-122"/>
                 <a:cs typeface="Arial" pitchFamily="34" charset="-120"/>
               </a:rPr>
-              <a:t>Moving on Up Now? A Meta-Analysis of the Associations Between Job Insecurity and Career-Related Outcomes</a:t>
-            </a:r>
-            <a:endParaRPr lang="en-US" sz="1900" dirty="0"/>
+              <a:t>The Role of Needs-Based Job Crafting in Strengthening Work-Related Sense of Coherence: A Two-Wave Panel Study</a:t>
+            </a:r>
+            <a:endParaRPr lang="en-US" sz="1800" dirty="0"/>
           </a:p>
         </p:txBody>
       </p:sp>
@@ -11354,7 +11857,7 @@
                 <a:ea typeface="Arial" pitchFamily="34" charset="-122"/>
                 <a:cs typeface="Arial" pitchFamily="34" charset="-120"/>
               </a:rPr>
-              <a:t>Låstad, Pienaar, Näswall, Richter, Hellgren &amp; Sverke  |  Scandinavian Journal of Work and Organizational Psychology, 10(1)  |  2025</a:t>
+              <a:t>Cetkovská, Bauer &amp; Tušl  |  Scandinavian Journal of Work and Organizational Psychology, 11(1)  |  2026</a:t>
             </a:r>
             <a:endParaRPr lang="en-US" sz="1200" dirty="0"/>
           </a:p>
@@ -11397,7 +11900,7 @@
                 <a:ea typeface="Arial" pitchFamily="34" charset="-122"/>
                 <a:cs typeface="Arial" pitchFamily="34" charset="-120"/>
               </a:rPr>
-              <a:t>מטא-אנליזה: איחוד סטטיסטי של 237 מחקרים ראשוניים</a:t>
+              <a:t>מחקר אורך: 924 עובדים בגרמניה ובשווייץ, שתי מדידות בהפרש של חצי שנה</a:t>
             </a:r>
             <a:endParaRPr lang="he-IL" sz="1300" dirty="0"/>
           </a:p>
@@ -11439,7 +11942,7 @@
                 <a:ea typeface="Arial" pitchFamily="34" charset="-122"/>
                 <a:cs typeface="Arial" pitchFamily="34" charset="-120"/>
               </a:rPr>
-              <a:t>המחברים: קבוצת המחקר המובילה בעולם בנושא, שפרסמה את המטא-אנליזה הראשונה בתחום ב-2002</a:t>
+              <a:t>המחברים: אוניברסיטת קארל בפראג והמרכז לסלוטוגנזה באוניברסיטת ציריך. מימון: הקרן הלאומית השווייצרית למדע</a:t>
             </a:r>
             <a:endParaRPr lang="he-IL" sz="1300" dirty="0"/>
           </a:p>
@@ -11555,7 +12058,7 @@
                 <a:ea typeface="Arial" pitchFamily="34" charset="-122"/>
                 <a:cs typeface="Arial" pitchFamily="34" charset="-120"/>
               </a:rPr>
-              <a:t>עונה על השאלה שכולנו שואלים: האם הפחד יעשה אותנו טובים יותר?</a:t>
+              <a:t>שואל מה עוזר, לא רק מה מזיק</a:t>
             </a:r>
             <a:endParaRPr lang="he-IL" sz="1300" dirty="0"/>
           </a:p>
@@ -11576,7 +12079,7 @@
                 <a:ea typeface="Arial" pitchFamily="34" charset="-122"/>
                 <a:cs typeface="Arial" pitchFamily="34" charset="-120"/>
               </a:rPr>
-              <a:t>הראשון שבודק מה חוסר ביטחון עושה לקריירה עצמה, לא רק לבריאות</a:t>
+              <a:t>נותן כלי שבשליטת העובד, בלי לחכות לארגון</a:t>
             </a:r>
             <a:endParaRPr lang="he-IL" sz="1300" dirty="0"/>
           </a:p>
@@ -11597,7 +12100,7 @@
                 <a:ea typeface="Arial" pitchFamily="34" charset="-122"/>
                 <a:cs typeface="Arial" pitchFamily="34" charset="-120"/>
               </a:rPr>
-              <a:t>זמין לכולם בחינם. אפשר לשלוח לחבר שמפחד מפיטורים</a:t>
+              <a:t>מבוסס על רעיון של חוקר שפעל בישראל: אהרן אנטונובסקי מאוניברסיטת בן-גוריון</a:t>
             </a:r>
             <a:endParaRPr lang="he-IL" sz="1300" dirty="0"/>
           </a:p>
@@ -11670,7 +12173,7 @@
                 <a:ea typeface="Arial" pitchFamily="34" charset="-122"/>
                 <a:cs typeface="Arial" pitchFamily="34" charset="-120"/>
               </a:rPr>
-              <a:t>מאמר משלים (גם הוא 2025, גישה פתוחה) והמסגרת התיאורטית</a:t>
+              <a:t>מאמר משלים (2025, גישה פתוחה) וראיות תומכות</a:t>
             </a:r>
             <a:endParaRPr lang="he-IL" sz="1500" dirty="0"/>
           </a:p>
@@ -11732,7 +12235,7 @@
                 <a:ea typeface="Arial" pitchFamily="34" charset="-122"/>
                 <a:cs typeface="Arial" pitchFamily="34" charset="-120"/>
               </a:rPr>
-              <a:t>Shoss, M. K. (2017). Job insecurity: An integrative review and agenda for future research. Journal of Management, 43(6), 1911-1939.</a:t>
+              <a:t>Låstad, L., et al. (2025). Moving on up now? A meta-analysis of the associations between job insecurity and career-related outcomes. Scandinavian Journal of Work and Organizational Psychology, 10(1), Article 2.</a:t>
             </a:r>
             <a:endParaRPr lang="en-US" sz="1200" dirty="0"/>
           </a:p>
@@ -11874,7 +12377,7 @@
                 <a:ea typeface="Arial" pitchFamily="34" charset="-122"/>
                 <a:cs typeface="Arial" pitchFamily="34" charset="-120"/>
               </a:rPr>
-              <a:t>השאלה: כשמפחדים לאבד את העבודה, מתקדמים למעלה או בורחים הלאה?</a:t>
+              <a:t>שני מושגים: תחושת קוהרנטיות בעבודה ועיצוב תפקיד מבוסס צרכים</a:t>
             </a:r>
             <a:endParaRPr lang="he-IL" sz="3000" dirty="0"/>
           </a:p>
@@ -11888,85 +12391,12 @@
         </p:nvSpPr>
         <p:spPr>
           <a:xfrm>
-            <a:off x="548640" y="1280160"/>
-            <a:ext cx="11091672" cy="1097280"/>
+            <a:off x="6263640" y="1280160"/>
+            <a:ext cx="5376672" cy="4983480"/>
           </a:xfrm>
           <a:prstGeom prst="roundRect">
             <a:avLst>
-              <a:gd name="adj" fmla="val 10000"/>
-            </a:avLst>
-          </a:prstGeom>
-          <a:solidFill>
-            <a:srgbClr val="14213D"/>
-          </a:solidFill>
-          <a:ln w="12700">
-            <a:solidFill>
-              <a:srgbClr val="14213D"/>
-            </a:solidFill>
-            <a:prstDash val="solid"/>
-          </a:ln>
-          <a:effectLst>
-            <a:outerShdw sx="100000" sy="100000" kx="0" ky="0" algn="bl" rotWithShape="0" blurRad="50800" dist="25400" dir="5400000">
-              <a:srgbClr val="000000">
-                <a:alpha val="12000"/>
-              </a:srgbClr>
-            </a:outerShdw>
-          </a:effectLst>
-        </p:spPr>
-      </p:sp>
-      <p:sp>
-        <p:nvSpPr>
-          <p:cNvPr id="4" name="Text 2"/>
-          <p:cNvSpPr txBox="1"/>
-          <p:nvPr/>
-        </p:nvSpPr>
-        <p:spPr>
-          <a:xfrm>
-            <a:off x="822960" y="1371600"/>
-            <a:ext cx="10515600" cy="914400"/>
-          </a:xfrm>
-          <a:prstGeom prst="rect">
-            <a:avLst/>
-          </a:prstGeom>
-          <a:noFill/>
-          <a:ln/>
-        </p:spPr>
-        <p:txBody>
-          <a:bodyPr wrap="square" lIns="0" tIns="0" rIns="0" bIns="0" rtlCol="0" anchor="ctr"/>
-          <a:lstStyle/>
-          <a:p>
-            <a:pPr rtl="1" algn="r" indent="0" marL="0">
-              <a:buNone/>
-            </a:pPr>
-            <a:r>
-              <a:rPr lang="he-IL" altLang="en-US" sz="1600" dirty="0">
-                <a:solidFill>
-                  <a:srgbClr val="FFFFFF"/>
-                </a:solidFill>
-                <a:latin typeface="Arial" pitchFamily="34" charset="0"/>
-                <a:ea typeface="Arial" pitchFamily="34" charset="-122"/>
-                <a:cs typeface="Arial" pitchFamily="34" charset="-120"/>
-              </a:rPr>
-              <a:t>חוסר ביטחון תעסוקתי = איום נתפס על ההמשכיות ועל היציבות של התעסוקה הנוכחית (Shoss, 2017). סובייקטיבי, מכוון לעתיד, כמותי או איכותני.</a:t>
-            </a:r>
-            <a:endParaRPr lang="he-IL" sz="1600" dirty="0"/>
-          </a:p>
-        </p:txBody>
-      </p:sp>
-      <p:sp>
-        <p:nvSpPr>
-          <p:cNvPr id="5" name="Shape 3"/>
-          <p:cNvSpPr/>
-          <p:nvPr/>
-        </p:nvSpPr>
-        <p:spPr>
-          <a:xfrm>
-            <a:off x="6245352" y="2651760"/>
-            <a:ext cx="5394960" cy="2468880"/>
-          </a:xfrm>
-          <a:prstGeom prst="roundRect">
-            <a:avLst>
-              <a:gd name="adj" fmla="val 4444"/>
+              <a:gd name="adj" fmla="val 2202"/>
             </a:avLst>
           </a:prstGeom>
           <a:solidFill>
@@ -11989,14 +12419,126 @@
       </p:sp>
       <p:sp>
         <p:nvSpPr>
+          <p:cNvPr id="4" name="Text 2"/>
+          <p:cNvSpPr txBox="1"/>
+          <p:nvPr/>
+        </p:nvSpPr>
+        <p:spPr>
+          <a:xfrm>
+            <a:off x="6492240" y="1371600"/>
+            <a:ext cx="4937760" cy="457200"/>
+          </a:xfrm>
+          <a:prstGeom prst="rect">
+            <a:avLst/>
+          </a:prstGeom>
+          <a:noFill/>
+          <a:ln/>
+        </p:spPr>
+        <p:txBody>
+          <a:bodyPr wrap="square" lIns="0" tIns="0" rIns="0" bIns="0" rtlCol="0" anchor="t"/>
+          <a:lstStyle/>
+          <a:p>
+            <a:pPr rtl="1" algn="r" indent="0" marL="0">
+              <a:buNone/>
+            </a:pPr>
+            <a:r>
+              <a:rPr lang="he-IL" altLang="en-US" sz="1700" b="1" dirty="0">
+                <a:solidFill>
+                  <a:srgbClr val="14213D"/>
+                </a:solidFill>
+                <a:latin typeface="Arial" pitchFamily="34" charset="0"/>
+                <a:ea typeface="Arial" pitchFamily="34" charset="-122"/>
+                <a:cs typeface="Arial" pitchFamily="34" charset="-120"/>
+              </a:rPr>
+              <a:t>תחושת קוהרנטיות בעבודה (Work-SOC)</a:t>
+            </a:r>
+            <a:endParaRPr lang="he-IL" sz="1700" dirty="0"/>
+          </a:p>
+        </p:txBody>
+      </p:sp>
+      <p:sp>
+        <p:nvSpPr>
+          <p:cNvPr id="5" name="Text 3"/>
+          <p:cNvSpPr txBox="1"/>
+          <p:nvPr/>
+        </p:nvSpPr>
+        <p:spPr>
+          <a:xfrm>
+            <a:off x="6492240" y="1828800"/>
+            <a:ext cx="4937760" cy="640080"/>
+          </a:xfrm>
+          <a:prstGeom prst="rect">
+            <a:avLst/>
+          </a:prstGeom>
+          <a:noFill/>
+          <a:ln/>
+        </p:spPr>
+        <p:txBody>
+          <a:bodyPr wrap="square" lIns="0" tIns="0" rIns="0" bIns="0" rtlCol="0" anchor="t"/>
+          <a:lstStyle/>
+          <a:p>
+            <a:pPr rtl="1" algn="r" indent="0" marL="0">
+              <a:buNone/>
+            </a:pPr>
+            <a:r>
+              <a:rPr lang="he-IL" altLang="en-US" sz="1250" dirty="0">
+                <a:solidFill>
+                  <a:srgbClr val="6B7280"/>
+                </a:solidFill>
+                <a:latin typeface="Arial" pitchFamily="34" charset="0"/>
+                <a:ea typeface="Arial" pitchFamily="34" charset="-122"/>
+                <a:cs typeface="Arial" pitchFamily="34" charset="-120"/>
+              </a:rPr>
+              <a:t>מהגישה הסלוטוגנית של אנטונובסקי (1987): לא "למה חולים" אלא "איך נשארים בריאים למרות הלחץ"</a:t>
+            </a:r>
+            <a:endParaRPr lang="he-IL" sz="1250" dirty="0"/>
+          </a:p>
+        </p:txBody>
+      </p:sp>
+      <p:sp>
+        <p:nvSpPr>
           <p:cNvPr id="6" name="Shape 4"/>
           <p:cNvSpPr/>
           <p:nvPr/>
         </p:nvSpPr>
         <p:spPr>
           <a:xfrm>
-            <a:off x="10725912" y="2926080"/>
-            <a:ext cx="640080" cy="640080"/>
+            <a:off x="6492240" y="2606040"/>
+            <a:ext cx="4937760" cy="1005840"/>
+          </a:xfrm>
+          <a:prstGeom prst="roundRect">
+            <a:avLst>
+              <a:gd name="adj" fmla="val 10909"/>
+            </a:avLst>
+          </a:prstGeom>
+          <a:solidFill>
+            <a:srgbClr val="F4F6FA"/>
+          </a:solidFill>
+          <a:ln w="12700">
+            <a:solidFill>
+              <a:srgbClr val="F4F6FA"/>
+            </a:solidFill>
+            <a:prstDash val="solid"/>
+          </a:ln>
+          <a:effectLst>
+            <a:outerShdw sx="100000" sy="100000" kx="0" ky="0" algn="bl" rotWithShape="0" blurRad="50800" dist="25400" dir="5400000">
+              <a:srgbClr val="000000">
+                <a:alpha val="12000"/>
+              </a:srgbClr>
+            </a:outerShdw>
+          </a:effectLst>
+        </p:spPr>
+      </p:sp>
+      <p:sp>
+        <p:nvSpPr>
+          <p:cNvPr id="7" name="Shape 5"/>
+          <p:cNvSpPr/>
+          <p:nvPr/>
+        </p:nvSpPr>
+        <p:spPr>
+          <a:xfrm>
+            <a:off x="10835640" y="2880360"/>
+            <a:ext cx="457200" cy="457200"/>
           </a:xfrm>
           <a:prstGeom prst="ellipse">
             <a:avLst/>
@@ -12014,79 +12556,40 @@
       </p:sp>
       <p:sp>
         <p:nvSpPr>
-          <p:cNvPr id="7" name="Text 5"/>
-          <p:cNvSpPr txBox="1"/>
-          <p:nvPr/>
-        </p:nvSpPr>
-        <p:spPr>
-          <a:xfrm>
-            <a:off x="10725912" y="2926080"/>
-            <a:ext cx="640080" cy="640080"/>
-          </a:xfrm>
-          <a:prstGeom prst="rect">
-            <a:avLst/>
-          </a:prstGeom>
-          <a:noFill/>
-          <a:ln/>
-        </p:spPr>
-        <p:txBody>
-          <a:bodyPr wrap="square" lIns="0" tIns="0" rIns="0" bIns="0" rtlCol="0" anchor="ctr"/>
-          <a:lstStyle/>
-          <a:p>
-            <a:pPr algn="ctr" indent="0" marL="0">
-              <a:buNone/>
-            </a:pPr>
-            <a:r>
-              <a:rPr lang="en-US" sz="2200" b="1" dirty="0">
-                <a:solidFill>
-                  <a:srgbClr val="FFFFFF"/>
-                </a:solidFill>
-                <a:latin typeface="Arial" pitchFamily="34" charset="0"/>
-                <a:ea typeface="Arial" pitchFamily="34" charset="-122"/>
-                <a:cs typeface="Arial" pitchFamily="34" charset="-120"/>
-              </a:rPr>
-              <a:t>⬆</a:t>
-            </a:r>
-            <a:endParaRPr lang="en-US" sz="2200" dirty="0"/>
-          </a:p>
-        </p:txBody>
-      </p:sp>
-      <p:sp>
-        <p:nvSpPr>
           <p:cNvPr id="8" name="Text 6"/>
           <p:cNvSpPr txBox="1"/>
           <p:nvPr/>
         </p:nvSpPr>
         <p:spPr>
           <a:xfrm>
-            <a:off x="6519672" y="2926080"/>
-            <a:ext cx="4023360" cy="640080"/>
-          </a:xfrm>
-          <a:prstGeom prst="rect">
-            <a:avLst/>
-          </a:prstGeom>
-          <a:noFill/>
-          <a:ln/>
-        </p:spPr>
-        <p:txBody>
-          <a:bodyPr wrap="square" lIns="0" tIns="0" rIns="0" bIns="0" rtlCol="0" anchor="ctr"/>
+            <a:off x="6675120" y="2697480"/>
+            <a:ext cx="4023360" cy="411480"/>
+          </a:xfrm>
+          <a:prstGeom prst="rect">
+            <a:avLst/>
+          </a:prstGeom>
+          <a:noFill/>
+          <a:ln/>
+        </p:spPr>
+        <p:txBody>
+          <a:bodyPr wrap="square" lIns="0" tIns="0" rIns="0" bIns="0" rtlCol="0" anchor="t"/>
           <a:lstStyle/>
           <a:p>
             <a:pPr rtl="1" algn="r" indent="0" marL="0">
               <a:buNone/>
             </a:pPr>
             <a:r>
-              <a:rPr lang="he-IL" altLang="en-US" sz="1700" b="1" dirty="0">
-                <a:solidFill>
-                  <a:srgbClr val="2A9D8F"/>
-                </a:solidFill>
-                <a:latin typeface="Arial" pitchFamily="34" charset="0"/>
-                <a:ea typeface="Arial" pitchFamily="34" charset="-122"/>
-                <a:cs typeface="Arial" pitchFamily="34" charset="-120"/>
-              </a:rPr>
-              <a:t>תחזית א: "למעלה" (Moving Up)</a:t>
-            </a:r>
-            <a:endParaRPr lang="he-IL" sz="1700" dirty="0"/>
+              <a:rPr lang="he-IL" altLang="en-US" sz="1600" b="1" dirty="0">
+                <a:solidFill>
+                  <a:srgbClr val="14213D"/>
+                </a:solidFill>
+                <a:latin typeface="Arial" pitchFamily="34" charset="0"/>
+                <a:ea typeface="Arial" pitchFamily="34" charset="-122"/>
+                <a:cs typeface="Arial" pitchFamily="34" charset="-120"/>
+              </a:rPr>
+              <a:t>מובנות</a:t>
+            </a:r>
+            <a:endParaRPr lang="he-IL" sz="1600" dirty="0"/>
           </a:p>
         </p:txBody>
       </p:sp>
@@ -12098,8 +12601,8 @@
         </p:nvSpPr>
         <p:spPr>
           <a:xfrm>
-            <a:off x="6519672" y="3703320"/>
-            <a:ext cx="4846320" cy="1325880"/>
+            <a:off x="6675120" y="3108960"/>
+            <a:ext cx="4023360" cy="457200"/>
           </a:xfrm>
           <a:prstGeom prst="rect">
             <a:avLst/>
@@ -12115,7 +12618,7 @@
               <a:buNone/>
             </a:pPr>
             <a:r>
-              <a:rPr lang="he-IL" altLang="en-US" sz="1350" dirty="0">
+              <a:rPr lang="he-IL" altLang="en-US" sz="1200" dirty="0">
                 <a:solidFill>
                   <a:srgbClr val="1F2937"/>
                 </a:solidFill>
@@ -12123,9 +12626,9 @@
                 <a:ea typeface="Arial" pitchFamily="34" charset="-122"/>
                 <a:cs typeface="Arial" pitchFamily="34" charset="-120"/>
               </a:rPr>
-              <a:t>האיום מדרבן: לומדים מיומנויות חדשות, מחזקים יכולת תעסוקה, מנצלים הזדמנויות. זו ההתמודדות הפרואקטיבית במסגרת של Shoss (2017).</a:t>
-            </a:r>
-            <a:endParaRPr lang="he-IL" sz="1350" dirty="0"/>
+              <a:t>העבודה מובנית, עקבית וברורה (קוגניטיבי)</a:t>
+            </a:r>
+            <a:endParaRPr lang="he-IL" sz="1200" dirty="0"/>
           </a:p>
         </p:txBody>
       </p:sp>
@@ -12137,12 +12640,286 @@
         </p:nvSpPr>
         <p:spPr>
           <a:xfrm>
-            <a:off x="548640" y="2651760"/>
-            <a:ext cx="5394960" cy="2468880"/>
+            <a:off x="6492240" y="3794760"/>
+            <a:ext cx="4937760" cy="1005840"/>
           </a:xfrm>
           <a:prstGeom prst="roundRect">
             <a:avLst>
-              <a:gd name="adj" fmla="val 4444"/>
+              <a:gd name="adj" fmla="val 10909"/>
+            </a:avLst>
+          </a:prstGeom>
+          <a:solidFill>
+            <a:srgbClr val="F4F6FA"/>
+          </a:solidFill>
+          <a:ln w="12700">
+            <a:solidFill>
+              <a:srgbClr val="F4F6FA"/>
+            </a:solidFill>
+            <a:prstDash val="solid"/>
+          </a:ln>
+          <a:effectLst>
+            <a:outerShdw sx="100000" sy="100000" kx="0" ky="0" algn="bl" rotWithShape="0" blurRad="50800" dist="25400" dir="5400000">
+              <a:srgbClr val="000000">
+                <a:alpha val="12000"/>
+              </a:srgbClr>
+            </a:outerShdw>
+          </a:effectLst>
+        </p:spPr>
+      </p:sp>
+      <p:sp>
+        <p:nvSpPr>
+          <p:cNvPr id="11" name="Shape 9"/>
+          <p:cNvSpPr/>
+          <p:nvPr/>
+        </p:nvSpPr>
+        <p:spPr>
+          <a:xfrm>
+            <a:off x="10835640" y="4069080"/>
+            <a:ext cx="457200" cy="457200"/>
+          </a:xfrm>
+          <a:prstGeom prst="ellipse">
+            <a:avLst/>
+          </a:prstGeom>
+          <a:solidFill>
+            <a:srgbClr val="FCA311"/>
+          </a:solidFill>
+          <a:ln w="12700">
+            <a:solidFill>
+              <a:srgbClr val="FCA311"/>
+            </a:solidFill>
+            <a:prstDash val="solid"/>
+          </a:ln>
+        </p:spPr>
+      </p:sp>
+      <p:sp>
+        <p:nvSpPr>
+          <p:cNvPr id="12" name="Text 10"/>
+          <p:cNvSpPr txBox="1"/>
+          <p:nvPr/>
+        </p:nvSpPr>
+        <p:spPr>
+          <a:xfrm>
+            <a:off x="6675120" y="3886200"/>
+            <a:ext cx="4023360" cy="411480"/>
+          </a:xfrm>
+          <a:prstGeom prst="rect">
+            <a:avLst/>
+          </a:prstGeom>
+          <a:noFill/>
+          <a:ln/>
+        </p:spPr>
+        <p:txBody>
+          <a:bodyPr wrap="square" lIns="0" tIns="0" rIns="0" bIns="0" rtlCol="0" anchor="t"/>
+          <a:lstStyle/>
+          <a:p>
+            <a:pPr rtl="1" algn="r" indent="0" marL="0">
+              <a:buNone/>
+            </a:pPr>
+            <a:r>
+              <a:rPr lang="he-IL" altLang="en-US" sz="1600" b="1" dirty="0">
+                <a:solidFill>
+                  <a:srgbClr val="14213D"/>
+                </a:solidFill>
+                <a:latin typeface="Arial" pitchFamily="34" charset="0"/>
+                <a:ea typeface="Arial" pitchFamily="34" charset="-122"/>
+                <a:cs typeface="Arial" pitchFamily="34" charset="-120"/>
+              </a:rPr>
+              <a:t>ניהוליות</a:t>
+            </a:r>
+            <a:endParaRPr lang="he-IL" sz="1600" dirty="0"/>
+          </a:p>
+        </p:txBody>
+      </p:sp>
+      <p:sp>
+        <p:nvSpPr>
+          <p:cNvPr id="13" name="Text 11"/>
+          <p:cNvSpPr txBox="1"/>
+          <p:nvPr/>
+        </p:nvSpPr>
+        <p:spPr>
+          <a:xfrm>
+            <a:off x="6675120" y="4297680"/>
+            <a:ext cx="4023360" cy="457200"/>
+          </a:xfrm>
+          <a:prstGeom prst="rect">
+            <a:avLst/>
+          </a:prstGeom>
+          <a:noFill/>
+          <a:ln/>
+        </p:spPr>
+        <p:txBody>
+          <a:bodyPr wrap="square" lIns="0" tIns="0" rIns="0" bIns="0" rtlCol="0" anchor="t"/>
+          <a:lstStyle/>
+          <a:p>
+            <a:pPr rtl="1" algn="r" indent="0" marL="0">
+              <a:buNone/>
+            </a:pPr>
+            <a:r>
+              <a:rPr lang="he-IL" altLang="en-US" sz="1200" dirty="0">
+                <a:solidFill>
+                  <a:srgbClr val="1F2937"/>
+                </a:solidFill>
+                <a:latin typeface="Arial" pitchFamily="34" charset="0"/>
+                <a:ea typeface="Arial" pitchFamily="34" charset="-122"/>
+                <a:cs typeface="Arial" pitchFamily="34" charset="-120"/>
+              </a:rPr>
+              <a:t>יש לי משאבים מספיקים לדרישות (התנהגותי)</a:t>
+            </a:r>
+            <a:endParaRPr lang="he-IL" sz="1200" dirty="0"/>
+          </a:p>
+        </p:txBody>
+      </p:sp>
+      <p:sp>
+        <p:nvSpPr>
+          <p:cNvPr id="14" name="Shape 12"/>
+          <p:cNvSpPr/>
+          <p:nvPr/>
+        </p:nvSpPr>
+        <p:spPr>
+          <a:xfrm>
+            <a:off x="6492240" y="4983480"/>
+            <a:ext cx="4937760" cy="1005840"/>
+          </a:xfrm>
+          <a:prstGeom prst="roundRect">
+            <a:avLst>
+              <a:gd name="adj" fmla="val 10909"/>
+            </a:avLst>
+          </a:prstGeom>
+          <a:solidFill>
+            <a:srgbClr val="F4F6FA"/>
+          </a:solidFill>
+          <a:ln w="12700">
+            <a:solidFill>
+              <a:srgbClr val="F4F6FA"/>
+            </a:solidFill>
+            <a:prstDash val="solid"/>
+          </a:ln>
+          <a:effectLst>
+            <a:outerShdw sx="100000" sy="100000" kx="0" ky="0" algn="bl" rotWithShape="0" blurRad="50800" dist="25400" dir="5400000">
+              <a:srgbClr val="000000">
+                <a:alpha val="12000"/>
+              </a:srgbClr>
+            </a:outerShdw>
+          </a:effectLst>
+        </p:spPr>
+      </p:sp>
+      <p:sp>
+        <p:nvSpPr>
+          <p:cNvPr id="15" name="Shape 13"/>
+          <p:cNvSpPr/>
+          <p:nvPr/>
+        </p:nvSpPr>
+        <p:spPr>
+          <a:xfrm>
+            <a:off x="10835640" y="5257800"/>
+            <a:ext cx="457200" cy="457200"/>
+          </a:xfrm>
+          <a:prstGeom prst="ellipse">
+            <a:avLst/>
+          </a:prstGeom>
+          <a:solidFill>
+            <a:srgbClr val="E76F51"/>
+          </a:solidFill>
+          <a:ln w="12700">
+            <a:solidFill>
+              <a:srgbClr val="E76F51"/>
+            </a:solidFill>
+            <a:prstDash val="solid"/>
+          </a:ln>
+        </p:spPr>
+      </p:sp>
+      <p:sp>
+        <p:nvSpPr>
+          <p:cNvPr id="16" name="Text 14"/>
+          <p:cNvSpPr txBox="1"/>
+          <p:nvPr/>
+        </p:nvSpPr>
+        <p:spPr>
+          <a:xfrm>
+            <a:off x="6675120" y="5074920"/>
+            <a:ext cx="4023360" cy="411480"/>
+          </a:xfrm>
+          <a:prstGeom prst="rect">
+            <a:avLst/>
+          </a:prstGeom>
+          <a:noFill/>
+          <a:ln/>
+        </p:spPr>
+        <p:txBody>
+          <a:bodyPr wrap="square" lIns="0" tIns="0" rIns="0" bIns="0" rtlCol="0" anchor="t"/>
+          <a:lstStyle/>
+          <a:p>
+            <a:pPr rtl="1" algn="r" indent="0" marL="0">
+              <a:buNone/>
+            </a:pPr>
+            <a:r>
+              <a:rPr lang="he-IL" altLang="en-US" sz="1600" b="1" dirty="0">
+                <a:solidFill>
+                  <a:srgbClr val="14213D"/>
+                </a:solidFill>
+                <a:latin typeface="Arial" pitchFamily="34" charset="0"/>
+                <a:ea typeface="Arial" pitchFamily="34" charset="-122"/>
+                <a:cs typeface="Arial" pitchFamily="34" charset="-120"/>
+              </a:rPr>
+              <a:t>משמעותיות</a:t>
+            </a:r>
+            <a:endParaRPr lang="he-IL" sz="1600" dirty="0"/>
+          </a:p>
+        </p:txBody>
+      </p:sp>
+      <p:sp>
+        <p:nvSpPr>
+          <p:cNvPr id="17" name="Text 15"/>
+          <p:cNvSpPr txBox="1"/>
+          <p:nvPr/>
+        </p:nvSpPr>
+        <p:spPr>
+          <a:xfrm>
+            <a:off x="6675120" y="5486400"/>
+            <a:ext cx="4023360" cy="457200"/>
+          </a:xfrm>
+          <a:prstGeom prst="rect">
+            <a:avLst/>
+          </a:prstGeom>
+          <a:noFill/>
+          <a:ln/>
+        </p:spPr>
+        <p:txBody>
+          <a:bodyPr wrap="square" lIns="0" tIns="0" rIns="0" bIns="0" rtlCol="0" anchor="t"/>
+          <a:lstStyle/>
+          <a:p>
+            <a:pPr rtl="1" algn="r" indent="0" marL="0">
+              <a:buNone/>
+            </a:pPr>
+            <a:r>
+              <a:rPr lang="he-IL" altLang="en-US" sz="1200" dirty="0">
+                <a:solidFill>
+                  <a:srgbClr val="1F2937"/>
+                </a:solidFill>
+                <a:latin typeface="Arial" pitchFamily="34" charset="0"/>
+                <a:ea typeface="Arial" pitchFamily="34" charset="-122"/>
+                <a:cs typeface="Arial" pitchFamily="34" charset="-120"/>
+              </a:rPr>
+              <a:t>העבודה ראויה למחויבות ולמעורבות (מוטיבציוני)</a:t>
+            </a:r>
+            <a:endParaRPr lang="he-IL" sz="1200" dirty="0"/>
+          </a:p>
+        </p:txBody>
+      </p:sp>
+      <p:sp>
+        <p:nvSpPr>
+          <p:cNvPr id="18" name="Shape 16"/>
+          <p:cNvSpPr/>
+          <p:nvPr/>
+        </p:nvSpPr>
+        <p:spPr>
+          <a:xfrm>
+            <a:off x="548640" y="1280160"/>
+            <a:ext cx="5376672" cy="4983480"/>
+          </a:xfrm>
+          <a:prstGeom prst="roundRect">
+            <a:avLst>
+              <a:gd name="adj" fmla="val 2202"/>
             </a:avLst>
           </a:prstGeom>
           <a:solidFill>
@@ -12165,24 +12942,143 @@
       </p:sp>
       <p:sp>
         <p:nvSpPr>
-          <p:cNvPr id="11" name="Shape 9"/>
+          <p:cNvPr id="19" name="Text 17"/>
+          <p:cNvSpPr txBox="1"/>
+          <p:nvPr/>
+        </p:nvSpPr>
+        <p:spPr>
+          <a:xfrm>
+            <a:off x="777240" y="1371600"/>
+            <a:ext cx="4937760" cy="457200"/>
+          </a:xfrm>
+          <a:prstGeom prst="rect">
+            <a:avLst/>
+          </a:prstGeom>
+          <a:noFill/>
+          <a:ln/>
+        </p:spPr>
+        <p:txBody>
+          <a:bodyPr wrap="square" lIns="0" tIns="0" rIns="0" bIns="0" rtlCol="0" anchor="t"/>
+          <a:lstStyle/>
+          <a:p>
+            <a:pPr rtl="1" algn="r" indent="0" marL="0">
+              <a:buNone/>
+            </a:pPr>
+            <a:r>
+              <a:rPr lang="he-IL" altLang="en-US" sz="1700" b="1" dirty="0">
+                <a:solidFill>
+                  <a:srgbClr val="14213D"/>
+                </a:solidFill>
+                <a:latin typeface="Arial" pitchFamily="34" charset="0"/>
+                <a:ea typeface="Arial" pitchFamily="34" charset="-122"/>
+                <a:cs typeface="Arial" pitchFamily="34" charset="-120"/>
+              </a:rPr>
+              <a:t>עיצוב תפקיד מבוסס צרכים (NJC)</a:t>
+            </a:r>
+            <a:endParaRPr lang="he-IL" sz="1700" dirty="0"/>
+          </a:p>
+        </p:txBody>
+      </p:sp>
+      <p:sp>
+        <p:nvSpPr>
+          <p:cNvPr id="20" name="Text 18"/>
+          <p:cNvSpPr txBox="1"/>
+          <p:nvPr/>
+        </p:nvSpPr>
+        <p:spPr>
+          <a:xfrm>
+            <a:off x="777240" y="1828800"/>
+            <a:ext cx="4937760" cy="640080"/>
+          </a:xfrm>
+          <a:prstGeom prst="rect">
+            <a:avLst/>
+          </a:prstGeom>
+          <a:noFill/>
+          <a:ln/>
+        </p:spPr>
+        <p:txBody>
+          <a:bodyPr wrap="square" lIns="0" tIns="0" rIns="0" bIns="0" rtlCol="0" anchor="t"/>
+          <a:lstStyle/>
+          <a:p>
+            <a:pPr rtl="1" algn="r" indent="0" marL="0">
+              <a:buNone/>
+            </a:pPr>
+            <a:r>
+              <a:rPr lang="he-IL" altLang="en-US" sz="1250" dirty="0">
+                <a:solidFill>
+                  <a:srgbClr val="6B7280"/>
+                </a:solidFill>
+                <a:latin typeface="Arial" pitchFamily="34" charset="0"/>
+                <a:ea typeface="Arial" pitchFamily="34" charset="-122"/>
+                <a:cs typeface="Arial" pitchFamily="34" charset="-120"/>
+              </a:rPr>
+              <a:t>מאמצים יזומים של העובד לספק שישה צרכים פסיכולוגיים בעבודה (DRAMMA)</a:t>
+            </a:r>
+            <a:endParaRPr lang="he-IL" sz="1250" dirty="0"/>
+          </a:p>
+        </p:txBody>
+      </p:sp>
+      <p:sp>
+        <p:nvSpPr>
+          <p:cNvPr id="21" name="Text 19"/>
+          <p:cNvSpPr txBox="1"/>
+          <p:nvPr/>
+        </p:nvSpPr>
+        <p:spPr>
+          <a:xfrm>
+            <a:off x="777240" y="2606040"/>
+            <a:ext cx="4937760" cy="365760"/>
+          </a:xfrm>
+          <a:prstGeom prst="rect">
+            <a:avLst/>
+          </a:prstGeom>
+          <a:noFill/>
+          <a:ln/>
+        </p:spPr>
+        <p:txBody>
+          <a:bodyPr wrap="square" lIns="0" tIns="0" rIns="0" bIns="0" rtlCol="0" anchor="t"/>
+          <a:lstStyle/>
+          <a:p>
+            <a:pPr rtl="1" algn="r" indent="0" marL="0">
+              <a:buNone/>
+            </a:pPr>
+            <a:r>
+              <a:rPr lang="he-IL" altLang="en-US" sz="1300" b="1" dirty="0">
+                <a:solidFill>
+                  <a:srgbClr val="2A9D8F"/>
+                </a:solidFill>
+                <a:latin typeface="Arial" pitchFamily="34" charset="0"/>
+                <a:ea typeface="Arial" pitchFamily="34" charset="-122"/>
+                <a:cs typeface="Arial" pitchFamily="34" charset="-120"/>
+              </a:rPr>
+              <a:t>צרכי התקרבות: לייצר מצבים חיוביים וצמיחה</a:t>
+            </a:r>
+            <a:endParaRPr lang="he-IL" sz="1300" dirty="0"/>
+          </a:p>
+        </p:txBody>
+      </p:sp>
+      <p:sp>
+        <p:nvSpPr>
+          <p:cNvPr id="22" name="Shape 20"/>
           <p:cNvSpPr/>
           <p:nvPr/>
         </p:nvSpPr>
         <p:spPr>
           <a:xfrm>
-            <a:off x="5029200" y="2926080"/>
-            <a:ext cx="640080" cy="640080"/>
-          </a:xfrm>
-          <a:prstGeom prst="ellipse">
-            <a:avLst/>
+            <a:off x="4507992" y="3017520"/>
+            <a:ext cx="1115568" cy="548640"/>
+          </a:xfrm>
+          <a:prstGeom prst="roundRect">
+            <a:avLst>
+              <a:gd name="adj" fmla="val 16667"/>
+            </a:avLst>
           </a:prstGeom>
           <a:solidFill>
-            <a:srgbClr val="E76F51"/>
+            <a:srgbClr val="2A9D8F"/>
           </a:solidFill>
           <a:ln w="12700">
             <a:solidFill>
-              <a:srgbClr val="E76F51"/>
+              <a:srgbClr val="2A9D8F"/>
             </a:solidFill>
             <a:prstDash val="solid"/>
           </a:ln>
@@ -12190,14 +13086,14 @@
       </p:sp>
       <p:sp>
         <p:nvSpPr>
-          <p:cNvPr id="12" name="Text 10"/>
-          <p:cNvSpPr txBox="1"/>
-          <p:nvPr/>
-        </p:nvSpPr>
-        <p:spPr>
-          <a:xfrm>
-            <a:off x="5029200" y="2926080"/>
-            <a:ext cx="640080" cy="640080"/>
+          <p:cNvPr id="23" name="Text 21"/>
+          <p:cNvSpPr txBox="1"/>
+          <p:nvPr/>
+        </p:nvSpPr>
+        <p:spPr>
+          <a:xfrm>
+            <a:off x="4507992" y="3017520"/>
+            <a:ext cx="1115568" cy="548640"/>
           </a:xfrm>
           <a:prstGeom prst="rect">
             <a:avLst/>
@@ -12209,11 +13105,11 @@
           <a:bodyPr wrap="square" lIns="0" tIns="0" rIns="0" bIns="0" rtlCol="0" anchor="ctr"/>
           <a:lstStyle/>
           <a:p>
-            <a:pPr algn="ctr" indent="0" marL="0">
-              <a:buNone/>
-            </a:pPr>
-            <a:r>
-              <a:rPr lang="en-US" sz="2200" b="1" dirty="0">
+            <a:pPr rtl="1" algn="ctr" indent="0" marL="0">
+              <a:buNone/>
+            </a:pPr>
+            <a:r>
+              <a:rPr lang="he-IL" altLang="en-US" sz="1300" b="1" dirty="0">
                 <a:solidFill>
                   <a:srgbClr val="FFFFFF"/>
                 </a:solidFill>
@@ -12221,134 +13117,49 @@
                 <a:ea typeface="Arial" pitchFamily="34" charset="-122"/>
                 <a:cs typeface="Arial" pitchFamily="34" charset="-120"/>
               </a:rPr>
-              <a:t>➡</a:t>
-            </a:r>
-            <a:endParaRPr lang="en-US" sz="2200" dirty="0"/>
-          </a:p>
-        </p:txBody>
-      </p:sp>
-      <p:sp>
-        <p:nvSpPr>
-          <p:cNvPr id="13" name="Text 11"/>
-          <p:cNvSpPr txBox="1"/>
-          <p:nvPr/>
-        </p:nvSpPr>
-        <p:spPr>
-          <a:xfrm>
-            <a:off x="822960" y="2926080"/>
-            <a:ext cx="4023360" cy="640080"/>
-          </a:xfrm>
-          <a:prstGeom prst="rect">
-            <a:avLst/>
-          </a:prstGeom>
-          <a:noFill/>
-          <a:ln/>
-        </p:spPr>
-        <p:txBody>
-          <a:bodyPr wrap="square" lIns="0" tIns="0" rIns="0" bIns="0" rtlCol="0" anchor="ctr"/>
-          <a:lstStyle/>
-          <a:p>
-            <a:pPr rtl="1" algn="r" indent="0" marL="0">
-              <a:buNone/>
-            </a:pPr>
-            <a:r>
-              <a:rPr lang="he-IL" altLang="en-US" sz="1700" b="1" dirty="0">
-                <a:solidFill>
-                  <a:srgbClr val="E76F51"/>
-                </a:solidFill>
-                <a:latin typeface="Arial" pitchFamily="34" charset="0"/>
-                <a:ea typeface="Arial" pitchFamily="34" charset="-122"/>
-                <a:cs typeface="Arial" pitchFamily="34" charset="-120"/>
-              </a:rPr>
-              <a:t>תחזית ב: "הלאה" (Moving On)</a:t>
-            </a:r>
-            <a:endParaRPr lang="he-IL" sz="1700" dirty="0"/>
-          </a:p>
-        </p:txBody>
-      </p:sp>
-      <p:sp>
-        <p:nvSpPr>
-          <p:cNvPr id="14" name="Text 12"/>
-          <p:cNvSpPr txBox="1"/>
-          <p:nvPr/>
-        </p:nvSpPr>
-        <p:spPr>
-          <a:xfrm>
-            <a:off x="822960" y="3703320"/>
-            <a:ext cx="4846320" cy="1325880"/>
-          </a:xfrm>
-          <a:prstGeom prst="rect">
-            <a:avLst/>
-          </a:prstGeom>
-          <a:noFill/>
-          <a:ln/>
-        </p:spPr>
-        <p:txBody>
-          <a:bodyPr wrap="square" lIns="0" tIns="0" rIns="0" bIns="0" rtlCol="0" anchor="t"/>
-          <a:lstStyle/>
-          <a:p>
-            <a:pPr rtl="1" algn="r" indent="0" marL="0">
-              <a:buNone/>
-            </a:pPr>
-            <a:r>
-              <a:rPr lang="he-IL" altLang="en-US" sz="1350" dirty="0">
-                <a:solidFill>
-                  <a:srgbClr val="1F2937"/>
-                </a:solidFill>
-                <a:latin typeface="Arial" pitchFamily="34" charset="0"/>
-                <a:ea typeface="Arial" pitchFamily="34" charset="-122"/>
-                <a:cs typeface="Arial" pitchFamily="34" charset="-120"/>
-              </a:rPr>
-              <a:t>האיום מדלדל משאבים: לפי תיאוריית שימור המשאבים (Hobfoll, 1989) מגנים על מה שנשאר במקום להשקיע. בורחים, מסתירים ידע, לא מתפתחים.</a:t>
-            </a:r>
-            <a:endParaRPr lang="he-IL" sz="1350" dirty="0"/>
-          </a:p>
-        </p:txBody>
-      </p:sp>
-      <p:sp>
-        <p:nvSpPr>
-          <p:cNvPr id="15" name="Shape 13"/>
+              <a:t>אוטונומיה</a:t>
+            </a:r>
+            <a:endParaRPr lang="he-IL" sz="1300" dirty="0"/>
+          </a:p>
+        </p:txBody>
+      </p:sp>
+      <p:sp>
+        <p:nvSpPr>
+          <p:cNvPr id="24" name="Shape 22"/>
           <p:cNvSpPr/>
           <p:nvPr/>
         </p:nvSpPr>
         <p:spPr>
           <a:xfrm>
-            <a:off x="548640" y="5349240"/>
-            <a:ext cx="11091672" cy="868680"/>
+            <a:off x="3300984" y="3017520"/>
+            <a:ext cx="1115568" cy="548640"/>
           </a:xfrm>
           <a:prstGeom prst="roundRect">
             <a:avLst>
-              <a:gd name="adj" fmla="val 12632"/>
+              <a:gd name="adj" fmla="val 16667"/>
             </a:avLst>
           </a:prstGeom>
           <a:solidFill>
-            <a:srgbClr val="FFF4DE"/>
+            <a:srgbClr val="2A9D8F"/>
           </a:solidFill>
           <a:ln w="12700">
             <a:solidFill>
-              <a:srgbClr val="FFF4DE"/>
+              <a:srgbClr val="2A9D8F"/>
             </a:solidFill>
             <a:prstDash val="solid"/>
           </a:ln>
-          <a:effectLst>
-            <a:outerShdw sx="100000" sy="100000" kx="0" ky="0" algn="bl" rotWithShape="0" blurRad="50800" dist="25400" dir="5400000">
-              <a:srgbClr val="000000">
-                <a:alpha val="12000"/>
-              </a:srgbClr>
-            </a:outerShdw>
-          </a:effectLst>
-        </p:spPr>
-      </p:sp>
-      <p:sp>
-        <p:nvSpPr>
-          <p:cNvPr id="16" name="Text 14"/>
-          <p:cNvSpPr txBox="1"/>
-          <p:nvPr/>
-        </p:nvSpPr>
-        <p:spPr>
-          <a:xfrm>
-            <a:off x="822960" y="5394960"/>
-            <a:ext cx="10515600" cy="777240"/>
+        </p:spPr>
+      </p:sp>
+      <p:sp>
+        <p:nvSpPr>
+          <p:cNvPr id="25" name="Text 23"/>
+          <p:cNvSpPr txBox="1"/>
+          <p:nvPr/>
+        </p:nvSpPr>
+        <p:spPr>
+          <a:xfrm>
+            <a:off x="3300984" y="3017520"/>
+            <a:ext cx="1115568" cy="548640"/>
           </a:xfrm>
           <a:prstGeom prst="rect">
             <a:avLst/>
@@ -12360,27 +13171,369 @@
           <a:bodyPr wrap="square" lIns="0" tIns="0" rIns="0" bIns="0" rtlCol="0" anchor="ctr"/>
           <a:lstStyle/>
           <a:p>
+            <a:pPr rtl="1" algn="ctr" indent="0" marL="0">
+              <a:buNone/>
+            </a:pPr>
+            <a:r>
+              <a:rPr lang="he-IL" altLang="en-US" sz="1300" b="1" dirty="0">
+                <a:solidFill>
+                  <a:srgbClr val="FFFFFF"/>
+                </a:solidFill>
+                <a:latin typeface="Arial" pitchFamily="34" charset="0"/>
+                <a:ea typeface="Arial" pitchFamily="34" charset="-122"/>
+                <a:cs typeface="Arial" pitchFamily="34" charset="-120"/>
+              </a:rPr>
+              <a:t>מיומנות</a:t>
+            </a:r>
+            <a:endParaRPr lang="he-IL" sz="1300" dirty="0"/>
+          </a:p>
+        </p:txBody>
+      </p:sp>
+      <p:sp>
+        <p:nvSpPr>
+          <p:cNvPr id="26" name="Shape 24"/>
+          <p:cNvSpPr/>
+          <p:nvPr/>
+        </p:nvSpPr>
+        <p:spPr>
+          <a:xfrm>
+            <a:off x="2093976" y="3017520"/>
+            <a:ext cx="1115568" cy="548640"/>
+          </a:xfrm>
+          <a:prstGeom prst="roundRect">
+            <a:avLst>
+              <a:gd name="adj" fmla="val 16667"/>
+            </a:avLst>
+          </a:prstGeom>
+          <a:solidFill>
+            <a:srgbClr val="2A9D8F"/>
+          </a:solidFill>
+          <a:ln w="12700">
+            <a:solidFill>
+              <a:srgbClr val="2A9D8F"/>
+            </a:solidFill>
+            <a:prstDash val="solid"/>
+          </a:ln>
+        </p:spPr>
+      </p:sp>
+      <p:sp>
+        <p:nvSpPr>
+          <p:cNvPr id="27" name="Text 25"/>
+          <p:cNvSpPr txBox="1"/>
+          <p:nvPr/>
+        </p:nvSpPr>
+        <p:spPr>
+          <a:xfrm>
+            <a:off x="2093976" y="3017520"/>
+            <a:ext cx="1115568" cy="548640"/>
+          </a:xfrm>
+          <a:prstGeom prst="rect">
+            <a:avLst/>
+          </a:prstGeom>
+          <a:noFill/>
+          <a:ln/>
+        </p:spPr>
+        <p:txBody>
+          <a:bodyPr wrap="square" lIns="0" tIns="0" rIns="0" bIns="0" rtlCol="0" anchor="ctr"/>
+          <a:lstStyle/>
+          <a:p>
+            <a:pPr rtl="1" algn="ctr" indent="0" marL="0">
+              <a:buNone/>
+            </a:pPr>
+            <a:r>
+              <a:rPr lang="he-IL" altLang="en-US" sz="1300" b="1" dirty="0">
+                <a:solidFill>
+                  <a:srgbClr val="FFFFFF"/>
+                </a:solidFill>
+                <a:latin typeface="Arial" pitchFamily="34" charset="0"/>
+                <a:ea typeface="Arial" pitchFamily="34" charset="-122"/>
+                <a:cs typeface="Arial" pitchFamily="34" charset="-120"/>
+              </a:rPr>
+              <a:t>משמעות</a:t>
+            </a:r>
+            <a:endParaRPr lang="he-IL" sz="1300" dirty="0"/>
+          </a:p>
+        </p:txBody>
+      </p:sp>
+      <p:sp>
+        <p:nvSpPr>
+          <p:cNvPr id="28" name="Shape 26"/>
+          <p:cNvSpPr/>
+          <p:nvPr/>
+        </p:nvSpPr>
+        <p:spPr>
+          <a:xfrm>
+            <a:off x="886968" y="3017520"/>
+            <a:ext cx="1115568" cy="548640"/>
+          </a:xfrm>
+          <a:prstGeom prst="roundRect">
+            <a:avLst>
+              <a:gd name="adj" fmla="val 16667"/>
+            </a:avLst>
+          </a:prstGeom>
+          <a:solidFill>
+            <a:srgbClr val="2A9D8F"/>
+          </a:solidFill>
+          <a:ln w="12700">
+            <a:solidFill>
+              <a:srgbClr val="2A9D8F"/>
+            </a:solidFill>
+            <a:prstDash val="solid"/>
+          </a:ln>
+        </p:spPr>
+      </p:sp>
+      <p:sp>
+        <p:nvSpPr>
+          <p:cNvPr id="29" name="Text 27"/>
+          <p:cNvSpPr txBox="1"/>
+          <p:nvPr/>
+        </p:nvSpPr>
+        <p:spPr>
+          <a:xfrm>
+            <a:off x="886968" y="3017520"/>
+            <a:ext cx="1115568" cy="548640"/>
+          </a:xfrm>
+          <a:prstGeom prst="rect">
+            <a:avLst/>
+          </a:prstGeom>
+          <a:noFill/>
+          <a:ln/>
+        </p:spPr>
+        <p:txBody>
+          <a:bodyPr wrap="square" lIns="0" tIns="0" rIns="0" bIns="0" rtlCol="0" anchor="ctr"/>
+          <a:lstStyle/>
+          <a:p>
+            <a:pPr rtl="1" algn="ctr" indent="0" marL="0">
+              <a:buNone/>
+            </a:pPr>
+            <a:r>
+              <a:rPr lang="he-IL" altLang="en-US" sz="1300" b="1" dirty="0">
+                <a:solidFill>
+                  <a:srgbClr val="FFFFFF"/>
+                </a:solidFill>
+                <a:latin typeface="Arial" pitchFamily="34" charset="0"/>
+                <a:ea typeface="Arial" pitchFamily="34" charset="-122"/>
+                <a:cs typeface="Arial" pitchFamily="34" charset="-120"/>
+              </a:rPr>
+              <a:t>שייכות</a:t>
+            </a:r>
+            <a:endParaRPr lang="he-IL" sz="1300" dirty="0"/>
+          </a:p>
+        </p:txBody>
+      </p:sp>
+      <p:sp>
+        <p:nvSpPr>
+          <p:cNvPr id="30" name="Text 28"/>
+          <p:cNvSpPr txBox="1"/>
+          <p:nvPr/>
+        </p:nvSpPr>
+        <p:spPr>
+          <a:xfrm>
+            <a:off x="777240" y="3840480"/>
+            <a:ext cx="4937760" cy="365760"/>
+          </a:xfrm>
+          <a:prstGeom prst="rect">
+            <a:avLst/>
+          </a:prstGeom>
+          <a:noFill/>
+          <a:ln/>
+        </p:spPr>
+        <p:txBody>
+          <a:bodyPr wrap="square" lIns="0" tIns="0" rIns="0" bIns="0" rtlCol="0" anchor="t"/>
+          <a:lstStyle/>
+          <a:p>
             <a:pPr rtl="1" algn="r" indent="0" marL="0">
               <a:buNone/>
             </a:pPr>
             <a:r>
-              <a:rPr lang="he-IL" altLang="en-US" sz="1500" b="1" dirty="0">
-                <a:solidFill>
-                  <a:srgbClr val="14213D"/>
-                </a:solidFill>
-                <a:latin typeface="Arial" pitchFamily="34" charset="0"/>
-                <a:ea typeface="Arial" pitchFamily="34" charset="-122"/>
-                <a:cs typeface="Arial" pitchFamily="34" charset="-120"/>
-              </a:rPr>
-              <a:t>המטא-אנליזה נועדה להכריע: על בסיס כלל הראיות, איזו תגובה שכיחה יותר בפועל? (Låstad et al., 2025)</a:t>
-            </a:r>
-            <a:endParaRPr lang="he-IL" sz="1500" dirty="0"/>
-          </a:p>
-        </p:txBody>
-      </p:sp>
-      <p:sp>
-        <p:nvSpPr>
-          <p:cNvPr id="17" name="Text 15"/>
+              <a:rPr lang="he-IL" altLang="en-US" sz="1300" b="1" dirty="0">
+                <a:solidFill>
+                  <a:srgbClr val="D9822B"/>
+                </a:solidFill>
+                <a:latin typeface="Arial" pitchFamily="34" charset="0"/>
+                <a:ea typeface="Arial" pitchFamily="34" charset="-122"/>
+                <a:cs typeface="Arial" pitchFamily="34" charset="-120"/>
+              </a:rPr>
+              <a:t>צרכי הימנעות: להפחית מאמץ ולהשיב אנרגיה</a:t>
+            </a:r>
+            <a:endParaRPr lang="he-IL" sz="1300" dirty="0"/>
+          </a:p>
+        </p:txBody>
+      </p:sp>
+      <p:sp>
+        <p:nvSpPr>
+          <p:cNvPr id="31" name="Shape 29"/>
+          <p:cNvSpPr/>
+          <p:nvPr/>
+        </p:nvSpPr>
+        <p:spPr>
+          <a:xfrm>
+            <a:off x="4507992" y="4251960"/>
+            <a:ext cx="1115568" cy="548640"/>
+          </a:xfrm>
+          <a:prstGeom prst="roundRect">
+            <a:avLst>
+              <a:gd name="adj" fmla="val 16667"/>
+            </a:avLst>
+          </a:prstGeom>
+          <a:solidFill>
+            <a:srgbClr val="D9822B"/>
+          </a:solidFill>
+          <a:ln w="12700">
+            <a:solidFill>
+              <a:srgbClr val="D9822B"/>
+            </a:solidFill>
+            <a:prstDash val="solid"/>
+          </a:ln>
+        </p:spPr>
+      </p:sp>
+      <p:sp>
+        <p:nvSpPr>
+          <p:cNvPr id="32" name="Text 30"/>
+          <p:cNvSpPr txBox="1"/>
+          <p:nvPr/>
+        </p:nvSpPr>
+        <p:spPr>
+          <a:xfrm>
+            <a:off x="4507992" y="4251960"/>
+            <a:ext cx="1115568" cy="548640"/>
+          </a:xfrm>
+          <a:prstGeom prst="rect">
+            <a:avLst/>
+          </a:prstGeom>
+          <a:noFill/>
+          <a:ln/>
+        </p:spPr>
+        <p:txBody>
+          <a:bodyPr wrap="square" lIns="0" tIns="0" rIns="0" bIns="0" rtlCol="0" anchor="ctr"/>
+          <a:lstStyle/>
+          <a:p>
+            <a:pPr rtl="1" algn="ctr" indent="0" marL="0">
+              <a:buNone/>
+            </a:pPr>
+            <a:r>
+              <a:rPr lang="he-IL" altLang="en-US" sz="1300" b="1" dirty="0">
+                <a:solidFill>
+                  <a:srgbClr val="FFFFFF"/>
+                </a:solidFill>
+                <a:latin typeface="Arial" pitchFamily="34" charset="0"/>
+                <a:ea typeface="Arial" pitchFamily="34" charset="-122"/>
+                <a:cs typeface="Arial" pitchFamily="34" charset="-120"/>
+              </a:rPr>
+              <a:t>ניתוק</a:t>
+            </a:r>
+            <a:endParaRPr lang="he-IL" sz="1300" dirty="0"/>
+          </a:p>
+        </p:txBody>
+      </p:sp>
+      <p:sp>
+        <p:nvSpPr>
+          <p:cNvPr id="33" name="Shape 31"/>
+          <p:cNvSpPr/>
+          <p:nvPr/>
+        </p:nvSpPr>
+        <p:spPr>
+          <a:xfrm>
+            <a:off x="3300984" y="4251960"/>
+            <a:ext cx="1115568" cy="548640"/>
+          </a:xfrm>
+          <a:prstGeom prst="roundRect">
+            <a:avLst>
+              <a:gd name="adj" fmla="val 16667"/>
+            </a:avLst>
+          </a:prstGeom>
+          <a:solidFill>
+            <a:srgbClr val="D9822B"/>
+          </a:solidFill>
+          <a:ln w="12700">
+            <a:solidFill>
+              <a:srgbClr val="D9822B"/>
+            </a:solidFill>
+            <a:prstDash val="solid"/>
+          </a:ln>
+        </p:spPr>
+      </p:sp>
+      <p:sp>
+        <p:nvSpPr>
+          <p:cNvPr id="34" name="Text 32"/>
+          <p:cNvSpPr txBox="1"/>
+          <p:nvPr/>
+        </p:nvSpPr>
+        <p:spPr>
+          <a:xfrm>
+            <a:off x="3300984" y="4251960"/>
+            <a:ext cx="1115568" cy="548640"/>
+          </a:xfrm>
+          <a:prstGeom prst="rect">
+            <a:avLst/>
+          </a:prstGeom>
+          <a:noFill/>
+          <a:ln/>
+        </p:spPr>
+        <p:txBody>
+          <a:bodyPr wrap="square" lIns="0" tIns="0" rIns="0" bIns="0" rtlCol="0" anchor="ctr"/>
+          <a:lstStyle/>
+          <a:p>
+            <a:pPr rtl="1" algn="ctr" indent="0" marL="0">
+              <a:buNone/>
+            </a:pPr>
+            <a:r>
+              <a:rPr lang="he-IL" altLang="en-US" sz="1300" b="1" dirty="0">
+                <a:solidFill>
+                  <a:srgbClr val="FFFFFF"/>
+                </a:solidFill>
+                <a:latin typeface="Arial" pitchFamily="34" charset="0"/>
+                <a:ea typeface="Arial" pitchFamily="34" charset="-122"/>
+                <a:cs typeface="Arial" pitchFamily="34" charset="-120"/>
+              </a:rPr>
+              <a:t>הרפיה</a:t>
+            </a:r>
+            <a:endParaRPr lang="he-IL" sz="1300" dirty="0"/>
+          </a:p>
+        </p:txBody>
+      </p:sp>
+      <p:sp>
+        <p:nvSpPr>
+          <p:cNvPr id="35" name="Text 33"/>
+          <p:cNvSpPr txBox="1"/>
+          <p:nvPr/>
+        </p:nvSpPr>
+        <p:spPr>
+          <a:xfrm>
+            <a:off x="777240" y="5029200"/>
+            <a:ext cx="4937760" cy="1097280"/>
+          </a:xfrm>
+          <a:prstGeom prst="rect">
+            <a:avLst/>
+          </a:prstGeom>
+          <a:noFill/>
+          <a:ln/>
+        </p:spPr>
+        <p:txBody>
+          <a:bodyPr wrap="square" lIns="0" tIns="0" rIns="0" bIns="0" rtlCol="0" anchor="t"/>
+          <a:lstStyle/>
+          <a:p>
+            <a:pPr rtl="1" algn="r" indent="0" marL="0">
+              <a:buNone/>
+            </a:pPr>
+            <a:r>
+              <a:rPr lang="he-IL" altLang="en-US" sz="1200" i="1" dirty="0">
+                <a:solidFill>
+                  <a:srgbClr val="1F2937"/>
+                </a:solidFill>
+                <a:latin typeface="Arial" pitchFamily="34" charset="0"/>
+                <a:ea typeface="Arial" pitchFamily="34" charset="-122"/>
+                <a:cs typeface="Arial" pitchFamily="34" charset="-120"/>
+              </a:rPr>
+              <a:t>דוגמה לפריט: "תכננתי את עבודתי כך שאחווה שליטה"; "ארגנתי את עבודתי כך שאשיג תחושת תכלית במה שאני עושה"</a:t>
+            </a:r>
+            <a:endParaRPr lang="he-IL" sz="1200" dirty="0"/>
+          </a:p>
+        </p:txBody>
+      </p:sp>
+      <p:sp>
+        <p:nvSpPr>
+          <p:cNvPr id="36" name="Text 34"/>
           <p:cNvSpPr txBox="1"/>
           <p:nvPr/>
         </p:nvSpPr>
@@ -12419,7 +13572,7 @@
       </p:sp>
       <p:sp>
         <p:nvSpPr>
-          <p:cNvPr id="18" name="Text 16"/>
+          <p:cNvPr id="37" name="Text 35"/>
           <p:cNvSpPr txBox="1"/>
           <p:nvPr/>
         </p:nvSpPr>
@@ -12514,7 +13667,7 @@
                 <a:ea typeface="Arial" pitchFamily="34" charset="-122"/>
                 <a:cs typeface="Arial" pitchFamily="34" charset="-120"/>
               </a:rPr>
-              <a:t>הממצאים: 8 תוצאות קריירה, כיוון אחד ברור</a:t>
+              <a:t>הממצא: מה שאתם עושים בתפקיד משנה איך הוא נתפס חצי שנה אחר כך</a:t>
             </a:r>
             <a:endParaRPr lang="he-IL" sz="3000" dirty="0"/>
           </a:p>
@@ -12528,162 +13681,20 @@
         </p:nvSpPr>
         <p:spPr>
           <a:xfrm>
-            <a:off x="4937760" y="2011680"/>
-            <a:ext cx="2331720" cy="2011680"/>
-          </a:xfrm>
-          <a:prstGeom prst="ellipse">
-            <a:avLst/>
+            <a:off x="8503920" y="2743200"/>
+            <a:ext cx="3136392" cy="1371600"/>
+          </a:xfrm>
+          <a:prstGeom prst="roundRect">
+            <a:avLst>
+              <a:gd name="adj" fmla="val 8000"/>
+            </a:avLst>
           </a:prstGeom>
           <a:solidFill>
-            <a:srgbClr val="14213D"/>
+            <a:srgbClr val="2A9D8F"/>
           </a:solidFill>
           <a:ln w="12700">
             <a:solidFill>
-              <a:srgbClr val="14213D"/>
-            </a:solidFill>
-            <a:prstDash val="solid"/>
-          </a:ln>
-        </p:spPr>
-      </p:sp>
-      <p:sp>
-        <p:nvSpPr>
-          <p:cNvPr id="4" name="Text 2"/>
-          <p:cNvSpPr txBox="1"/>
-          <p:nvPr/>
-        </p:nvSpPr>
-        <p:spPr>
-          <a:xfrm>
-            <a:off x="5029200" y="2286000"/>
-            <a:ext cx="2148840" cy="822960"/>
-          </a:xfrm>
-          <a:prstGeom prst="rect">
-            <a:avLst/>
-          </a:prstGeom>
-          <a:noFill/>
-          <a:ln/>
-        </p:spPr>
-        <p:txBody>
-          <a:bodyPr wrap="square" lIns="0" tIns="0" rIns="0" bIns="0" rtlCol="0" anchor="ctr"/>
-          <a:lstStyle/>
-          <a:p>
-            <a:pPr rtl="1" algn="ctr" indent="0" marL="0">
-              <a:buNone/>
-            </a:pPr>
-            <a:r>
-              <a:rPr lang="he-IL" altLang="en-US" sz="1700" b="1" dirty="0">
-                <a:solidFill>
-                  <a:srgbClr val="FFFFFF"/>
-                </a:solidFill>
-                <a:latin typeface="Arial" pitchFamily="34" charset="0"/>
-                <a:ea typeface="Arial" pitchFamily="34" charset="-122"/>
-                <a:cs typeface="Arial" pitchFamily="34" charset="-120"/>
-              </a:rPr>
-              <a:t>חוסר ביטחון תעסוקתי</a:t>
-            </a:r>
-            <a:endParaRPr lang="he-IL" sz="1700" dirty="0"/>
-          </a:p>
-        </p:txBody>
-      </p:sp>
-      <p:sp>
-        <p:nvSpPr>
-          <p:cNvPr id="5" name="Text 3"/>
-          <p:cNvSpPr txBox="1"/>
-          <p:nvPr/>
-        </p:nvSpPr>
-        <p:spPr>
-          <a:xfrm>
-            <a:off x="5029200" y="3108960"/>
-            <a:ext cx="2148840" cy="457200"/>
-          </a:xfrm>
-          <a:prstGeom prst="rect">
-            <a:avLst/>
-          </a:prstGeom>
-          <a:noFill/>
-          <a:ln/>
-        </p:spPr>
-        <p:txBody>
-          <a:bodyPr wrap="square" lIns="0" tIns="0" rIns="0" bIns="0" rtlCol="0" anchor="ctr"/>
-          <a:lstStyle/>
-          <a:p>
-            <a:pPr rtl="1" algn="ctr" indent="0" marL="0">
-              <a:buNone/>
-            </a:pPr>
-            <a:r>
-              <a:rPr lang="he-IL" altLang="en-US" sz="1200" dirty="0">
-                <a:solidFill>
-                  <a:srgbClr val="FCA311"/>
-                </a:solidFill>
-                <a:latin typeface="Arial" pitchFamily="34" charset="0"/>
-                <a:ea typeface="Arial" pitchFamily="34" charset="-122"/>
-                <a:cs typeface="Arial" pitchFamily="34" charset="-120"/>
-              </a:rPr>
-              <a:t>237 מחקרים</a:t>
-            </a:r>
-            <a:endParaRPr lang="he-IL" sz="1200" dirty="0"/>
-          </a:p>
-        </p:txBody>
-      </p:sp>
-      <p:sp>
-        <p:nvSpPr>
-          <p:cNvPr id="6" name="Text 4"/>
-          <p:cNvSpPr txBox="1"/>
-          <p:nvPr/>
-        </p:nvSpPr>
-        <p:spPr>
-          <a:xfrm>
-            <a:off x="8138160" y="1234440"/>
-            <a:ext cx="3502152" cy="411480"/>
-          </a:xfrm>
-          <a:prstGeom prst="rect">
-            <a:avLst/>
-          </a:prstGeom>
-          <a:noFill/>
-          <a:ln/>
-        </p:spPr>
-        <p:txBody>
-          <a:bodyPr wrap="square" lIns="0" tIns="0" rIns="0" bIns="0" rtlCol="0" anchor="t"/>
-          <a:lstStyle/>
-          <a:p>
-            <a:pPr rtl="1" algn="ctr" indent="0" marL="0">
-              <a:buNone/>
-            </a:pPr>
-            <a:r>
-              <a:rPr lang="he-IL" altLang="en-US" sz="1600" b="1" dirty="0">
-                <a:solidFill>
-                  <a:srgbClr val="E76F51"/>
-                </a:solidFill>
-                <a:latin typeface="Arial" pitchFamily="34" charset="0"/>
-                <a:ea typeface="Arial" pitchFamily="34" charset="-122"/>
-                <a:cs typeface="Arial" pitchFamily="34" charset="-120"/>
-              </a:rPr>
-              <a:t>"למעלה" יורד ⬇</a:t>
-            </a:r>
-            <a:endParaRPr lang="he-IL" sz="1600" dirty="0"/>
-          </a:p>
-        </p:txBody>
-      </p:sp>
-      <p:sp>
-        <p:nvSpPr>
-          <p:cNvPr id="7" name="Shape 5"/>
-          <p:cNvSpPr/>
-          <p:nvPr/>
-        </p:nvSpPr>
-        <p:spPr>
-          <a:xfrm>
-            <a:off x="8138160" y="1737360"/>
-            <a:ext cx="3502152" cy="777240"/>
-          </a:xfrm>
-          <a:prstGeom prst="roundRect">
-            <a:avLst>
-              <a:gd name="adj" fmla="val 14118"/>
-            </a:avLst>
-          </a:prstGeom>
-          <a:solidFill>
-            <a:srgbClr val="FDECEA"/>
-          </a:solidFill>
-          <a:ln w="12700">
-            <a:solidFill>
-              <a:srgbClr val="FDECEA"/>
+              <a:srgbClr val="2A9D8F"/>
             </a:solidFill>
             <a:prstDash val="solid"/>
           </a:ln>
@@ -12698,14 +13709,14 @@
       </p:sp>
       <p:sp>
         <p:nvSpPr>
-          <p:cNvPr id="8" name="Text 6"/>
-          <p:cNvSpPr txBox="1"/>
-          <p:nvPr/>
-        </p:nvSpPr>
-        <p:spPr>
-          <a:xfrm>
-            <a:off x="10954512" y="1892808"/>
-            <a:ext cx="457200" cy="457200"/>
+          <p:cNvPr id="4" name="Text 2"/>
+          <p:cNvSpPr txBox="1"/>
+          <p:nvPr/>
+        </p:nvSpPr>
+        <p:spPr>
+          <a:xfrm>
+            <a:off x="8641080" y="2788920"/>
+            <a:ext cx="2880360" cy="731520"/>
           </a:xfrm>
           <a:prstGeom prst="rect">
             <a:avLst/>
@@ -12717,85 +13728,131 @@
           <a:bodyPr wrap="square" lIns="0" tIns="0" rIns="0" bIns="0" rtlCol="0" anchor="ctr"/>
           <a:lstStyle/>
           <a:p>
-            <a:pPr algn="ctr" indent="0" marL="0">
-              <a:buNone/>
-            </a:pPr>
-            <a:r>
-              <a:rPr lang="en-US" sz="2400" b="1" dirty="0">
-                <a:solidFill>
-                  <a:srgbClr val="E76F51"/>
-                </a:solidFill>
-                <a:latin typeface="Arial" pitchFamily="34" charset="0"/>
-                <a:ea typeface="Arial" pitchFamily="34" charset="-122"/>
-                <a:cs typeface="Arial" pitchFamily="34" charset="-120"/>
-              </a:rPr>
-              <a:t>−</a:t>
-            </a:r>
-            <a:endParaRPr lang="en-US" sz="2400" dirty="0"/>
-          </a:p>
-        </p:txBody>
-      </p:sp>
-      <p:sp>
-        <p:nvSpPr>
-          <p:cNvPr id="9" name="Text 7"/>
-          <p:cNvSpPr txBox="1"/>
-          <p:nvPr/>
-        </p:nvSpPr>
-        <p:spPr>
-          <a:xfrm>
-            <a:off x="8321040" y="1828800"/>
-            <a:ext cx="2587752" cy="594360"/>
-          </a:xfrm>
-          <a:prstGeom prst="rect">
-            <a:avLst/>
-          </a:prstGeom>
-          <a:noFill/>
-          <a:ln/>
-        </p:spPr>
-        <p:txBody>
-          <a:bodyPr wrap="square" lIns="0" tIns="0" rIns="0" bIns="0" rtlCol="0" anchor="ctr"/>
-          <a:lstStyle/>
-          <a:p>
-            <a:pPr rtl="1" algn="r" indent="0" marL="0">
-              <a:buNone/>
-            </a:pPr>
-            <a:r>
-              <a:rPr lang="he-IL" altLang="en-US" sz="1400" b="1" dirty="0">
-                <a:solidFill>
-                  <a:srgbClr val="14213D"/>
-                </a:solidFill>
-                <a:latin typeface="Arial" pitchFamily="34" charset="0"/>
-                <a:ea typeface="Arial" pitchFamily="34" charset="-122"/>
-                <a:cs typeface="Arial" pitchFamily="34" charset="-120"/>
-              </a:rPr>
-              <a:t>שביעות רצון מהקריירה</a:t>
-            </a:r>
-            <a:endParaRPr lang="he-IL" sz="1400" dirty="0"/>
-          </a:p>
-        </p:txBody>
-      </p:sp>
-      <p:sp>
-        <p:nvSpPr>
-          <p:cNvPr id="10" name="Shape 8"/>
+            <a:pPr rtl="1" algn="ctr" indent="0" marL="0">
+              <a:buNone/>
+            </a:pPr>
+            <a:r>
+              <a:rPr lang="he-IL" altLang="en-US" sz="1500" b="1" dirty="0">
+                <a:solidFill>
+                  <a:srgbClr val="FFFFFF"/>
+                </a:solidFill>
+                <a:latin typeface="Arial" pitchFamily="34" charset="0"/>
+                <a:ea typeface="Arial" pitchFamily="34" charset="-122"/>
+                <a:cs typeface="Arial" pitchFamily="34" charset="-120"/>
+              </a:rPr>
+              <a:t>עיצוב תפקיד לצרכי התקרבות</a:t>
+            </a:r>
+            <a:endParaRPr lang="he-IL" sz="1500" dirty="0"/>
+          </a:p>
+        </p:txBody>
+      </p:sp>
+      <p:sp>
+        <p:nvSpPr>
+          <p:cNvPr id="5" name="Text 3"/>
+          <p:cNvSpPr txBox="1"/>
+          <p:nvPr/>
+        </p:nvSpPr>
+        <p:spPr>
+          <a:xfrm>
+            <a:off x="8641080" y="3474720"/>
+            <a:ext cx="2880360" cy="548640"/>
+          </a:xfrm>
+          <a:prstGeom prst="rect">
+            <a:avLst/>
+          </a:prstGeom>
+          <a:noFill/>
+          <a:ln/>
+        </p:spPr>
+        <p:txBody>
+          <a:bodyPr wrap="square" lIns="0" tIns="0" rIns="0" bIns="0" rtlCol="0" anchor="t"/>
+          <a:lstStyle/>
+          <a:p>
+            <a:pPr rtl="1" algn="ctr" indent="0" marL="0">
+              <a:buNone/>
+            </a:pPr>
+            <a:r>
+              <a:rPr lang="he-IL" altLang="en-US" sz="1100" dirty="0">
+                <a:solidFill>
+                  <a:srgbClr val="E5F4F1"/>
+                </a:solidFill>
+                <a:latin typeface="Arial" pitchFamily="34" charset="0"/>
+                <a:ea typeface="Arial" pitchFamily="34" charset="-122"/>
+                <a:cs typeface="Arial" pitchFamily="34" charset="-120"/>
+              </a:rPr>
+              <a:t>אוטונומיה, מיומנות, משמעות, שייכות</a:t>
+            </a:r>
+            <a:endParaRPr lang="he-IL" sz="1100" dirty="0"/>
+          </a:p>
+        </p:txBody>
+      </p:sp>
+      <p:sp>
+        <p:nvSpPr>
+          <p:cNvPr id="6" name="Shape 4"/>
           <p:cNvSpPr/>
           <p:nvPr/>
         </p:nvSpPr>
         <p:spPr>
           <a:xfrm>
-            <a:off x="8138160" y="2670048"/>
-            <a:ext cx="3502152" cy="777240"/>
+            <a:off x="8366760" y="1965960"/>
+            <a:ext cx="0" cy="2926080"/>
+          </a:xfrm>
+          <a:prstGeom prst="line">
+            <a:avLst/>
+          </a:prstGeom>
+          <a:noFill/>
+          <a:ln w="38100">
+            <a:solidFill>
+              <a:srgbClr val="2A9D8F"/>
+            </a:solidFill>
+            <a:prstDash val="solid"/>
+          </a:ln>
+        </p:spPr>
+      </p:sp>
+      <p:sp>
+        <p:nvSpPr>
+          <p:cNvPr id="7" name="Shape 5"/>
+          <p:cNvSpPr/>
+          <p:nvPr/>
+        </p:nvSpPr>
+        <p:spPr>
+          <a:xfrm>
+            <a:off x="8366760" y="3429000"/>
+            <a:ext cx="137160" cy="0"/>
+          </a:xfrm>
+          <a:prstGeom prst="line">
+            <a:avLst/>
+          </a:prstGeom>
+          <a:noFill/>
+          <a:ln w="38100">
+            <a:solidFill>
+              <a:srgbClr val="2A9D8F"/>
+            </a:solidFill>
+            <a:prstDash val="solid"/>
+          </a:ln>
+        </p:spPr>
+      </p:sp>
+      <p:sp>
+        <p:nvSpPr>
+          <p:cNvPr id="8" name="Shape 6"/>
+          <p:cNvSpPr/>
+          <p:nvPr/>
+        </p:nvSpPr>
+        <p:spPr>
+          <a:xfrm>
+            <a:off x="548640" y="1371600"/>
+            <a:ext cx="3108960" cy="1188720"/>
           </a:xfrm>
           <a:prstGeom prst="roundRect">
             <a:avLst>
-              <a:gd name="adj" fmla="val 14118"/>
+              <a:gd name="adj" fmla="val 9231"/>
             </a:avLst>
           </a:prstGeom>
           <a:solidFill>
-            <a:srgbClr val="FDECEA"/>
+            <a:srgbClr val="2A9D8F"/>
           </a:solidFill>
           <a:ln w="12700">
             <a:solidFill>
-              <a:srgbClr val="FDECEA"/>
+              <a:srgbClr val="2A9D8F"/>
             </a:solidFill>
             <a:prstDash val="solid"/>
           </a:ln>
@@ -12810,14 +13867,14 @@
       </p:sp>
       <p:sp>
         <p:nvSpPr>
-          <p:cNvPr id="11" name="Text 9"/>
-          <p:cNvSpPr txBox="1"/>
-          <p:nvPr/>
-        </p:nvSpPr>
-        <p:spPr>
-          <a:xfrm>
-            <a:off x="10954512" y="2825496"/>
-            <a:ext cx="457200" cy="457200"/>
+          <p:cNvPr id="9" name="Text 7"/>
+          <p:cNvSpPr txBox="1"/>
+          <p:nvPr/>
+        </p:nvSpPr>
+        <p:spPr>
+          <a:xfrm>
+            <a:off x="685800" y="1463040"/>
+            <a:ext cx="2834640" cy="548640"/>
           </a:xfrm>
           <a:prstGeom prst="rect">
             <a:avLst/>
@@ -12829,85 +13886,110 @@
           <a:bodyPr wrap="square" lIns="0" tIns="0" rIns="0" bIns="0" rtlCol="0" anchor="ctr"/>
           <a:lstStyle/>
           <a:p>
+            <a:pPr rtl="1" algn="ctr" indent="0" marL="0">
+              <a:buNone/>
+            </a:pPr>
+            <a:r>
+              <a:rPr lang="he-IL" altLang="en-US" sz="1700" b="1" dirty="0">
+                <a:solidFill>
+                  <a:srgbClr val="FFFFFF"/>
+                </a:solidFill>
+                <a:latin typeface="Arial" pitchFamily="34" charset="0"/>
+                <a:ea typeface="Arial" pitchFamily="34" charset="-122"/>
+                <a:cs typeface="Arial" pitchFamily="34" charset="-120"/>
+              </a:rPr>
+              <a:t>מובנות</a:t>
+            </a:r>
+            <a:endParaRPr lang="he-IL" sz="1700" dirty="0"/>
+          </a:p>
+        </p:txBody>
+      </p:sp>
+      <p:sp>
+        <p:nvSpPr>
+          <p:cNvPr id="10" name="Text 8"/>
+          <p:cNvSpPr txBox="1"/>
+          <p:nvPr/>
+        </p:nvSpPr>
+        <p:spPr>
+          <a:xfrm>
+            <a:off x="685800" y="2011680"/>
+            <a:ext cx="2834640" cy="457200"/>
+          </a:xfrm>
+          <a:prstGeom prst="rect">
+            <a:avLst/>
+          </a:prstGeom>
+          <a:noFill/>
+          <a:ln/>
+        </p:spPr>
+        <p:txBody>
+          <a:bodyPr wrap="square" lIns="0" tIns="0" rIns="0" bIns="0" rtlCol="0" anchor="t"/>
+          <a:lstStyle/>
+          <a:p>
             <a:pPr algn="ctr" indent="0" marL="0">
               <a:buNone/>
             </a:pPr>
             <a:r>
-              <a:rPr lang="en-US" sz="2400" b="1" dirty="0">
-                <a:solidFill>
-                  <a:srgbClr val="E76F51"/>
-                </a:solidFill>
-                <a:latin typeface="Arial" pitchFamily="34" charset="0"/>
-                <a:ea typeface="Arial" pitchFamily="34" charset="-122"/>
-                <a:cs typeface="Arial" pitchFamily="34" charset="-120"/>
-              </a:rPr>
-              <a:t>−</a:t>
-            </a:r>
-            <a:endParaRPr lang="en-US" sz="2400" dirty="0"/>
-          </a:p>
-        </p:txBody>
-      </p:sp>
-      <p:sp>
-        <p:nvSpPr>
-          <p:cNvPr id="12" name="Text 10"/>
-          <p:cNvSpPr txBox="1"/>
-          <p:nvPr/>
-        </p:nvSpPr>
-        <p:spPr>
-          <a:xfrm>
-            <a:off x="8321040" y="2761488"/>
-            <a:ext cx="2587752" cy="594360"/>
-          </a:xfrm>
-          <a:prstGeom prst="rect">
-            <a:avLst/>
-          </a:prstGeom>
-          <a:noFill/>
-          <a:ln/>
-        </p:spPr>
-        <p:txBody>
-          <a:bodyPr wrap="square" lIns="0" tIns="0" rIns="0" bIns="0" rtlCol="0" anchor="ctr"/>
-          <a:lstStyle/>
-          <a:p>
-            <a:pPr rtl="1" algn="r" indent="0" marL="0">
-              <a:buNone/>
-            </a:pPr>
-            <a:r>
-              <a:rPr lang="he-IL" altLang="en-US" sz="1400" b="1" dirty="0">
-                <a:solidFill>
-                  <a:srgbClr val="14213D"/>
-                </a:solidFill>
-                <a:latin typeface="Arial" pitchFamily="34" charset="0"/>
-                <a:ea typeface="Arial" pitchFamily="34" charset="-122"/>
-                <a:cs typeface="Arial" pitchFamily="34" charset="-120"/>
-              </a:rPr>
-              <a:t>הזדמנויות קריירה נתפסות</a:t>
-            </a:r>
-            <a:endParaRPr lang="he-IL" sz="1400" dirty="0"/>
-          </a:p>
-        </p:txBody>
-      </p:sp>
-      <p:sp>
-        <p:nvSpPr>
-          <p:cNvPr id="13" name="Shape 11"/>
+              <a:rPr lang="en-US" sz="1400" b="1" dirty="0">
+                <a:solidFill>
+                  <a:srgbClr val="FFFFFF"/>
+                </a:solidFill>
+                <a:latin typeface="Arial" pitchFamily="34" charset="0"/>
+                <a:ea typeface="Arial" pitchFamily="34" charset="-122"/>
+                <a:cs typeface="Arial" pitchFamily="34" charset="-120"/>
+              </a:rPr>
+              <a:t>β = 0.142</a:t>
+            </a:r>
+            <a:endParaRPr lang="en-US" sz="1400" dirty="0"/>
+          </a:p>
+        </p:txBody>
+      </p:sp>
+      <p:sp>
+        <p:nvSpPr>
+          <p:cNvPr id="11" name="Shape 9"/>
           <p:cNvSpPr/>
           <p:nvPr/>
         </p:nvSpPr>
         <p:spPr>
           <a:xfrm>
-            <a:off x="8138160" y="3602736"/>
-            <a:ext cx="3502152" cy="777240"/>
-          </a:xfrm>
-          <a:prstGeom prst="roundRect">
-            <a:avLst>
-              <a:gd name="adj" fmla="val 14118"/>
-            </a:avLst>
+            <a:off x="3840480" y="1737360"/>
+            <a:ext cx="4526280" cy="457200"/>
+          </a:xfrm>
+          <a:prstGeom prst="leftArrow">
+            <a:avLst/>
           </a:prstGeom>
           <a:solidFill>
-            <a:srgbClr val="FDECEA"/>
+            <a:srgbClr val="2A9D8F"/>
           </a:solidFill>
           <a:ln w="12700">
             <a:solidFill>
-              <a:srgbClr val="FDECEA"/>
+              <a:srgbClr val="2A9D8F"/>
+            </a:solidFill>
+            <a:prstDash val="solid"/>
+          </a:ln>
+        </p:spPr>
+      </p:sp>
+      <p:sp>
+        <p:nvSpPr>
+          <p:cNvPr id="12" name="Shape 10"/>
+          <p:cNvSpPr/>
+          <p:nvPr/>
+        </p:nvSpPr>
+        <p:spPr>
+          <a:xfrm>
+            <a:off x="548640" y="2834640"/>
+            <a:ext cx="3108960" cy="1188720"/>
+          </a:xfrm>
+          <a:prstGeom prst="roundRect">
+            <a:avLst>
+              <a:gd name="adj" fmla="val 9231"/>
+            </a:avLst>
+          </a:prstGeom>
+          <a:solidFill>
+            <a:srgbClr val="FCA311"/>
+          </a:solidFill>
+          <a:ln w="12700">
+            <a:solidFill>
+              <a:srgbClr val="FCA311"/>
             </a:solidFill>
             <a:prstDash val="solid"/>
           </a:ln>
@@ -12922,104 +14004,129 @@
       </p:sp>
       <p:sp>
         <p:nvSpPr>
+          <p:cNvPr id="13" name="Text 11"/>
+          <p:cNvSpPr txBox="1"/>
+          <p:nvPr/>
+        </p:nvSpPr>
+        <p:spPr>
+          <a:xfrm>
+            <a:off x="685800" y="2926080"/>
+            <a:ext cx="2834640" cy="548640"/>
+          </a:xfrm>
+          <a:prstGeom prst="rect">
+            <a:avLst/>
+          </a:prstGeom>
+          <a:noFill/>
+          <a:ln/>
+        </p:spPr>
+        <p:txBody>
+          <a:bodyPr wrap="square" lIns="0" tIns="0" rIns="0" bIns="0" rtlCol="0" anchor="ctr"/>
+          <a:lstStyle/>
+          <a:p>
+            <a:pPr rtl="1" algn="ctr" indent="0" marL="0">
+              <a:buNone/>
+            </a:pPr>
+            <a:r>
+              <a:rPr lang="he-IL" altLang="en-US" sz="1700" b="1" dirty="0">
+                <a:solidFill>
+                  <a:srgbClr val="FFFFFF"/>
+                </a:solidFill>
+                <a:latin typeface="Arial" pitchFamily="34" charset="0"/>
+                <a:ea typeface="Arial" pitchFamily="34" charset="-122"/>
+                <a:cs typeface="Arial" pitchFamily="34" charset="-120"/>
+              </a:rPr>
+              <a:t>ניהוליות</a:t>
+            </a:r>
+            <a:endParaRPr lang="he-IL" sz="1700" dirty="0"/>
+          </a:p>
+        </p:txBody>
+      </p:sp>
+      <p:sp>
+        <p:nvSpPr>
           <p:cNvPr id="14" name="Text 12"/>
           <p:cNvSpPr txBox="1"/>
           <p:nvPr/>
         </p:nvSpPr>
         <p:spPr>
           <a:xfrm>
-            <a:off x="10954512" y="3758184"/>
-            <a:ext cx="457200" cy="457200"/>
-          </a:xfrm>
-          <a:prstGeom prst="rect">
-            <a:avLst/>
-          </a:prstGeom>
-          <a:noFill/>
-          <a:ln/>
-        </p:spPr>
-        <p:txBody>
-          <a:bodyPr wrap="square" lIns="0" tIns="0" rIns="0" bIns="0" rtlCol="0" anchor="ctr"/>
+            <a:off x="685800" y="3474720"/>
+            <a:ext cx="2834640" cy="457200"/>
+          </a:xfrm>
+          <a:prstGeom prst="rect">
+            <a:avLst/>
+          </a:prstGeom>
+          <a:noFill/>
+          <a:ln/>
+        </p:spPr>
+        <p:txBody>
+          <a:bodyPr wrap="square" lIns="0" tIns="0" rIns="0" bIns="0" rtlCol="0" anchor="t"/>
           <a:lstStyle/>
           <a:p>
             <a:pPr algn="ctr" indent="0" marL="0">
               <a:buNone/>
             </a:pPr>
             <a:r>
-              <a:rPr lang="en-US" sz="2400" b="1" dirty="0">
-                <a:solidFill>
-                  <a:srgbClr val="E76F51"/>
-                </a:solidFill>
-                <a:latin typeface="Arial" pitchFamily="34" charset="0"/>
-                <a:ea typeface="Arial" pitchFamily="34" charset="-122"/>
-                <a:cs typeface="Arial" pitchFamily="34" charset="-120"/>
-              </a:rPr>
-              <a:t>−</a:t>
-            </a:r>
-            <a:endParaRPr lang="en-US" sz="2400" dirty="0"/>
-          </a:p>
-        </p:txBody>
-      </p:sp>
-      <p:sp>
-        <p:nvSpPr>
-          <p:cNvPr id="15" name="Text 13"/>
-          <p:cNvSpPr txBox="1"/>
-          <p:nvPr/>
-        </p:nvSpPr>
-        <p:spPr>
-          <a:xfrm>
-            <a:off x="8321040" y="3694176"/>
-            <a:ext cx="2587752" cy="594360"/>
-          </a:xfrm>
-          <a:prstGeom prst="rect">
-            <a:avLst/>
-          </a:prstGeom>
-          <a:noFill/>
-          <a:ln/>
-        </p:spPr>
-        <p:txBody>
-          <a:bodyPr wrap="square" lIns="0" tIns="0" rIns="0" bIns="0" rtlCol="0" anchor="ctr"/>
-          <a:lstStyle/>
-          <a:p>
-            <a:pPr rtl="1" algn="r" indent="0" marL="0">
-              <a:buNone/>
-            </a:pPr>
-            <a:r>
-              <a:rPr lang="he-IL" altLang="en-US" sz="1400" b="1" dirty="0">
-                <a:solidFill>
-                  <a:srgbClr val="14213D"/>
-                </a:solidFill>
-                <a:latin typeface="Arial" pitchFamily="34" charset="0"/>
-                <a:ea typeface="Arial" pitchFamily="34" charset="-122"/>
-                <a:cs typeface="Arial" pitchFamily="34" charset="-120"/>
-              </a:rPr>
-              <a:t>יכולת תעסוקה נתפסת</a:t>
-            </a:r>
-            <a:endParaRPr lang="he-IL" sz="1400" dirty="0"/>
-          </a:p>
-        </p:txBody>
-      </p:sp>
-      <p:sp>
-        <p:nvSpPr>
-          <p:cNvPr id="16" name="Shape 14"/>
+              <a:rPr lang="en-US" sz="1400" b="1" dirty="0">
+                <a:solidFill>
+                  <a:srgbClr val="FFFFFF"/>
+                </a:solidFill>
+                <a:latin typeface="Arial" pitchFamily="34" charset="0"/>
+                <a:ea typeface="Arial" pitchFamily="34" charset="-122"/>
+                <a:cs typeface="Arial" pitchFamily="34" charset="-120"/>
+              </a:rPr>
+              <a:t>β = 0.137</a:t>
+            </a:r>
+            <a:endParaRPr lang="en-US" sz="1400" dirty="0"/>
+          </a:p>
+        </p:txBody>
+      </p:sp>
+      <p:sp>
+        <p:nvSpPr>
+          <p:cNvPr id="15" name="Shape 13"/>
           <p:cNvSpPr/>
           <p:nvPr/>
         </p:nvSpPr>
         <p:spPr>
           <a:xfrm>
-            <a:off x="8138160" y="4535424"/>
-            <a:ext cx="3502152" cy="777240"/>
-          </a:xfrm>
-          <a:prstGeom prst="roundRect">
-            <a:avLst>
-              <a:gd name="adj" fmla="val 14118"/>
-            </a:avLst>
+            <a:off x="3840480" y="3200400"/>
+            <a:ext cx="4526280" cy="457200"/>
+          </a:xfrm>
+          <a:prstGeom prst="leftArrow">
+            <a:avLst/>
           </a:prstGeom>
           <a:solidFill>
-            <a:srgbClr val="FDECEA"/>
+            <a:srgbClr val="FCA311"/>
           </a:solidFill>
           <a:ln w="12700">
             <a:solidFill>
-              <a:srgbClr val="FDECEA"/>
+              <a:srgbClr val="FCA311"/>
+            </a:solidFill>
+            <a:prstDash val="solid"/>
+          </a:ln>
+        </p:spPr>
+      </p:sp>
+      <p:sp>
+        <p:nvSpPr>
+          <p:cNvPr id="16" name="Shape 14"/>
+          <p:cNvSpPr/>
+          <p:nvPr/>
+        </p:nvSpPr>
+        <p:spPr>
+          <a:xfrm>
+            <a:off x="548640" y="4297680"/>
+            <a:ext cx="3108960" cy="1188720"/>
+          </a:xfrm>
+          <a:prstGeom prst="roundRect">
+            <a:avLst>
+              <a:gd name="adj" fmla="val 9231"/>
+            </a:avLst>
+          </a:prstGeom>
+          <a:solidFill>
+            <a:srgbClr val="E76F51"/>
+          </a:solidFill>
+          <a:ln w="12700">
+            <a:solidFill>
+              <a:srgbClr val="E76F51"/>
             </a:solidFill>
             <a:prstDash val="solid"/>
           </a:ln>
@@ -13040,8 +14147,8 @@
         </p:nvSpPr>
         <p:spPr>
           <a:xfrm>
-            <a:off x="10954512" y="4690872"/>
-            <a:ext cx="457200" cy="457200"/>
+            <a:off x="685800" y="4389120"/>
+            <a:ext cx="2834640" cy="548640"/>
           </a:xfrm>
           <a:prstGeom prst="rect">
             <a:avLst/>
@@ -13053,60 +14160,60 @@
           <a:bodyPr wrap="square" lIns="0" tIns="0" rIns="0" bIns="0" rtlCol="0" anchor="ctr"/>
           <a:lstStyle/>
           <a:p>
+            <a:pPr rtl="1" algn="ctr" indent="0" marL="0">
+              <a:buNone/>
+            </a:pPr>
+            <a:r>
+              <a:rPr lang="he-IL" altLang="en-US" sz="1700" b="1" dirty="0">
+                <a:solidFill>
+                  <a:srgbClr val="FFFFFF"/>
+                </a:solidFill>
+                <a:latin typeface="Arial" pitchFamily="34" charset="0"/>
+                <a:ea typeface="Arial" pitchFamily="34" charset="-122"/>
+                <a:cs typeface="Arial" pitchFamily="34" charset="-120"/>
+              </a:rPr>
+              <a:t>משמעותיות</a:t>
+            </a:r>
+            <a:endParaRPr lang="he-IL" sz="1700" dirty="0"/>
+          </a:p>
+        </p:txBody>
+      </p:sp>
+      <p:sp>
+        <p:nvSpPr>
+          <p:cNvPr id="18" name="Text 16"/>
+          <p:cNvSpPr txBox="1"/>
+          <p:nvPr/>
+        </p:nvSpPr>
+        <p:spPr>
+          <a:xfrm>
+            <a:off x="685800" y="4937760"/>
+            <a:ext cx="2834640" cy="457200"/>
+          </a:xfrm>
+          <a:prstGeom prst="rect">
+            <a:avLst/>
+          </a:prstGeom>
+          <a:noFill/>
+          <a:ln/>
+        </p:spPr>
+        <p:txBody>
+          <a:bodyPr wrap="square" lIns="0" tIns="0" rIns="0" bIns="0" rtlCol="0" anchor="t"/>
+          <a:lstStyle/>
+          <a:p>
             <a:pPr algn="ctr" indent="0" marL="0">
               <a:buNone/>
             </a:pPr>
             <a:r>
-              <a:rPr lang="en-US" sz="2400" b="1" dirty="0">
-                <a:solidFill>
-                  <a:srgbClr val="E76F51"/>
-                </a:solidFill>
-                <a:latin typeface="Arial" pitchFamily="34" charset="0"/>
-                <a:ea typeface="Arial" pitchFamily="34" charset="-122"/>
-                <a:cs typeface="Arial" pitchFamily="34" charset="-120"/>
-              </a:rPr>
-              <a:t>−</a:t>
-            </a:r>
-            <a:endParaRPr lang="en-US" sz="2400" dirty="0"/>
-          </a:p>
-        </p:txBody>
-      </p:sp>
-      <p:sp>
-        <p:nvSpPr>
-          <p:cNvPr id="18" name="Text 16"/>
-          <p:cNvSpPr txBox="1"/>
-          <p:nvPr/>
-        </p:nvSpPr>
-        <p:spPr>
-          <a:xfrm>
-            <a:off x="8321040" y="4626864"/>
-            <a:ext cx="2587752" cy="594360"/>
-          </a:xfrm>
-          <a:prstGeom prst="rect">
-            <a:avLst/>
-          </a:prstGeom>
-          <a:noFill/>
-          <a:ln/>
-        </p:spPr>
-        <p:txBody>
-          <a:bodyPr wrap="square" lIns="0" tIns="0" rIns="0" bIns="0" rtlCol="0" anchor="ctr"/>
-          <a:lstStyle/>
-          <a:p>
-            <a:pPr rtl="1" algn="r" indent="0" marL="0">
-              <a:buNone/>
-            </a:pPr>
-            <a:r>
-              <a:rPr lang="he-IL" altLang="en-US" sz="1400" b="1" dirty="0">
-                <a:solidFill>
-                  <a:srgbClr val="14213D"/>
-                </a:solidFill>
-                <a:latin typeface="Arial" pitchFamily="34" charset="0"/>
-                <a:ea typeface="Arial" pitchFamily="34" charset="-122"/>
-                <a:cs typeface="Arial" pitchFamily="34" charset="-120"/>
-              </a:rPr>
-              <a:t>פיתוח מיומנויות פרואקטיבי</a:t>
-            </a:r>
-            <a:endParaRPr lang="he-IL" sz="1400" dirty="0"/>
+              <a:rPr lang="en-US" sz="1400" b="1" dirty="0">
+                <a:solidFill>
+                  <a:srgbClr val="FFFFFF"/>
+                </a:solidFill>
+                <a:latin typeface="Arial" pitchFamily="34" charset="0"/>
+                <a:ea typeface="Arial" pitchFamily="34" charset="-122"/>
+                <a:cs typeface="Arial" pitchFamily="34" charset="-120"/>
+              </a:rPr>
+              <a:t>β = 0.166</a:t>
+            </a:r>
+            <a:endParaRPr lang="en-US" sz="1400" dirty="0"/>
           </a:p>
         </p:txBody>
       </p:sp>
@@ -13118,10 +14225,10 @@
         </p:nvSpPr>
         <p:spPr>
           <a:xfrm>
-            <a:off x="7315200" y="2743200"/>
-            <a:ext cx="777240" cy="548640"/>
-          </a:xfrm>
-          <a:prstGeom prst="rightArrow">
+            <a:off x="3840480" y="4663440"/>
+            <a:ext cx="4526280" cy="457200"/>
+          </a:xfrm>
+          <a:prstGeom prst="leftArrow">
             <a:avLst/>
           </a:prstGeom>
           <a:solidFill>
@@ -13143,8 +14250,8 @@
         </p:nvSpPr>
         <p:spPr>
           <a:xfrm>
-            <a:off x="548640" y="1234440"/>
-            <a:ext cx="3502152" cy="411480"/>
+            <a:off x="3840480" y="5074920"/>
+            <a:ext cx="4526280" cy="365760"/>
           </a:xfrm>
           <a:prstGeom prst="rect">
             <a:avLst/>
@@ -13156,500 +14263,27 @@
           <a:bodyPr wrap="square" lIns="0" tIns="0" rIns="0" bIns="0" rtlCol="0" anchor="t"/>
           <a:lstStyle/>
           <a:p>
-            <a:pPr rtl="1" algn="ctr" indent="0" marL="0">
-              <a:buNone/>
-            </a:pPr>
-            <a:r>
-              <a:rPr lang="he-IL" altLang="en-US" sz="1600" b="1" dirty="0">
-                <a:solidFill>
-                  <a:srgbClr val="D9822B"/>
-                </a:solidFill>
-                <a:latin typeface="Arial" pitchFamily="34" charset="0"/>
-                <a:ea typeface="Arial" pitchFamily="34" charset="-122"/>
-                <a:cs typeface="Arial" pitchFamily="34" charset="-120"/>
-              </a:rPr>
-              <a:t>"הלאה" עולה ⬆</a:t>
-            </a:r>
-            <a:endParaRPr lang="he-IL" sz="1600" dirty="0"/>
+            <a:pPr algn="ctr" indent="0" marL="0">
+              <a:buNone/>
+            </a:pPr>
+            <a:r>
+              <a:rPr lang="en-US" sz="1100" i="1" dirty="0">
+                <a:solidFill>
+                  <a:srgbClr val="6B7280"/>
+                </a:solidFill>
+                <a:latin typeface="Arial" pitchFamily="34" charset="0"/>
+                <a:ea typeface="Arial" pitchFamily="34" charset="-122"/>
+                <a:cs typeface="Arial" pitchFamily="34" charset="-120"/>
+              </a:rPr>
+              <a:t>p &lt; .01 בכל שלושת הנתיבים, מעבר ליציבות של 0.61 עד 0.70 של המדדים עצמם</a:t>
+            </a:r>
+            <a:endParaRPr lang="en-US" sz="1100" dirty="0"/>
           </a:p>
         </p:txBody>
       </p:sp>
       <p:sp>
         <p:nvSpPr>
           <p:cNvPr id="21" name="Shape 19"/>
-          <p:cNvSpPr/>
-          <p:nvPr/>
-        </p:nvSpPr>
-        <p:spPr>
-          <a:xfrm>
-            <a:off x="548640" y="1737360"/>
-            <a:ext cx="3502152" cy="777240"/>
-          </a:xfrm>
-          <a:prstGeom prst="roundRect">
-            <a:avLst>
-              <a:gd name="adj" fmla="val 14118"/>
-            </a:avLst>
-          </a:prstGeom>
-          <a:solidFill>
-            <a:srgbClr val="FFF1D6"/>
-          </a:solidFill>
-          <a:ln w="12700">
-            <a:solidFill>
-              <a:srgbClr val="FFF1D6"/>
-            </a:solidFill>
-            <a:prstDash val="solid"/>
-          </a:ln>
-          <a:effectLst>
-            <a:outerShdw sx="100000" sy="100000" kx="0" ky="0" algn="bl" rotWithShape="0" blurRad="50800" dist="25400" dir="5400000">
-              <a:srgbClr val="000000">
-                <a:alpha val="12000"/>
-              </a:srgbClr>
-            </a:outerShdw>
-          </a:effectLst>
-        </p:spPr>
-      </p:sp>
-      <p:sp>
-        <p:nvSpPr>
-          <p:cNvPr id="22" name="Text 20"/>
-          <p:cNvSpPr txBox="1"/>
-          <p:nvPr/>
-        </p:nvSpPr>
-        <p:spPr>
-          <a:xfrm>
-            <a:off x="3364992" y="1892808"/>
-            <a:ext cx="457200" cy="457200"/>
-          </a:xfrm>
-          <a:prstGeom prst="rect">
-            <a:avLst/>
-          </a:prstGeom>
-          <a:noFill/>
-          <a:ln/>
-        </p:spPr>
-        <p:txBody>
-          <a:bodyPr wrap="square" lIns="0" tIns="0" rIns="0" bIns="0" rtlCol="0" anchor="ctr"/>
-          <a:lstStyle/>
-          <a:p>
-            <a:pPr algn="ctr" indent="0" marL="0">
-              <a:buNone/>
-            </a:pPr>
-            <a:r>
-              <a:rPr lang="en-US" sz="2400" b="1" dirty="0">
-                <a:solidFill>
-                  <a:srgbClr val="D9822B"/>
-                </a:solidFill>
-                <a:latin typeface="Arial" pitchFamily="34" charset="0"/>
-                <a:ea typeface="Arial" pitchFamily="34" charset="-122"/>
-                <a:cs typeface="Arial" pitchFamily="34" charset="-120"/>
-              </a:rPr>
-              <a:t>+</a:t>
-            </a:r>
-            <a:endParaRPr lang="en-US" sz="2400" dirty="0"/>
-          </a:p>
-        </p:txBody>
-      </p:sp>
-      <p:sp>
-        <p:nvSpPr>
-          <p:cNvPr id="23" name="Text 21"/>
-          <p:cNvSpPr txBox="1"/>
-          <p:nvPr/>
-        </p:nvSpPr>
-        <p:spPr>
-          <a:xfrm>
-            <a:off x="731520" y="1828800"/>
-            <a:ext cx="2587752" cy="594360"/>
-          </a:xfrm>
-          <a:prstGeom prst="rect">
-            <a:avLst/>
-          </a:prstGeom>
-          <a:noFill/>
-          <a:ln/>
-        </p:spPr>
-        <p:txBody>
-          <a:bodyPr wrap="square" lIns="0" tIns="0" rIns="0" bIns="0" rtlCol="0" anchor="ctr"/>
-          <a:lstStyle/>
-          <a:p>
-            <a:pPr rtl="1" algn="r" indent="0" marL="0">
-              <a:buNone/>
-            </a:pPr>
-            <a:r>
-              <a:rPr lang="he-IL" altLang="en-US" sz="1400" b="1" dirty="0">
-                <a:solidFill>
-                  <a:srgbClr val="14213D"/>
-                </a:solidFill>
-                <a:latin typeface="Arial" pitchFamily="34" charset="0"/>
-                <a:ea typeface="Arial" pitchFamily="34" charset="-122"/>
-                <a:cs typeface="Arial" pitchFamily="34" charset="-120"/>
-              </a:rPr>
-              <a:t>כוונת עזיבה של הארגון</a:t>
-            </a:r>
-            <a:endParaRPr lang="he-IL" sz="1400" dirty="0"/>
-          </a:p>
-        </p:txBody>
-      </p:sp>
-      <p:sp>
-        <p:nvSpPr>
-          <p:cNvPr id="24" name="Shape 22"/>
-          <p:cNvSpPr/>
-          <p:nvPr/>
-        </p:nvSpPr>
-        <p:spPr>
-          <a:xfrm>
-            <a:off x="548640" y="2670048"/>
-            <a:ext cx="3502152" cy="777240"/>
-          </a:xfrm>
-          <a:prstGeom prst="roundRect">
-            <a:avLst>
-              <a:gd name="adj" fmla="val 14118"/>
-            </a:avLst>
-          </a:prstGeom>
-          <a:solidFill>
-            <a:srgbClr val="FFF1D6"/>
-          </a:solidFill>
-          <a:ln w="12700">
-            <a:solidFill>
-              <a:srgbClr val="FFF1D6"/>
-            </a:solidFill>
-            <a:prstDash val="solid"/>
-          </a:ln>
-          <a:effectLst>
-            <a:outerShdw sx="100000" sy="100000" kx="0" ky="0" algn="bl" rotWithShape="0" blurRad="50800" dist="25400" dir="5400000">
-              <a:srgbClr val="000000">
-                <a:alpha val="12000"/>
-              </a:srgbClr>
-            </a:outerShdw>
-          </a:effectLst>
-        </p:spPr>
-      </p:sp>
-      <p:sp>
-        <p:nvSpPr>
-          <p:cNvPr id="25" name="Text 23"/>
-          <p:cNvSpPr txBox="1"/>
-          <p:nvPr/>
-        </p:nvSpPr>
-        <p:spPr>
-          <a:xfrm>
-            <a:off x="3364992" y="2825496"/>
-            <a:ext cx="457200" cy="457200"/>
-          </a:xfrm>
-          <a:prstGeom prst="rect">
-            <a:avLst/>
-          </a:prstGeom>
-          <a:noFill/>
-          <a:ln/>
-        </p:spPr>
-        <p:txBody>
-          <a:bodyPr wrap="square" lIns="0" tIns="0" rIns="0" bIns="0" rtlCol="0" anchor="ctr"/>
-          <a:lstStyle/>
-          <a:p>
-            <a:pPr algn="ctr" indent="0" marL="0">
-              <a:buNone/>
-            </a:pPr>
-            <a:r>
-              <a:rPr lang="en-US" sz="2400" b="1" dirty="0">
-                <a:solidFill>
-                  <a:srgbClr val="D9822B"/>
-                </a:solidFill>
-                <a:latin typeface="Arial" pitchFamily="34" charset="0"/>
-                <a:ea typeface="Arial" pitchFamily="34" charset="-122"/>
-                <a:cs typeface="Arial" pitchFamily="34" charset="-120"/>
-              </a:rPr>
-              <a:t>+</a:t>
-            </a:r>
-            <a:endParaRPr lang="en-US" sz="2400" dirty="0"/>
-          </a:p>
-        </p:txBody>
-      </p:sp>
-      <p:sp>
-        <p:nvSpPr>
-          <p:cNvPr id="26" name="Text 24"/>
-          <p:cNvSpPr txBox="1"/>
-          <p:nvPr/>
-        </p:nvSpPr>
-        <p:spPr>
-          <a:xfrm>
-            <a:off x="731520" y="2761488"/>
-            <a:ext cx="2587752" cy="594360"/>
-          </a:xfrm>
-          <a:prstGeom prst="rect">
-            <a:avLst/>
-          </a:prstGeom>
-          <a:noFill/>
-          <a:ln/>
-        </p:spPr>
-        <p:txBody>
-          <a:bodyPr wrap="square" lIns="0" tIns="0" rIns="0" bIns="0" rtlCol="0" anchor="ctr"/>
-          <a:lstStyle/>
-          <a:p>
-            <a:pPr rtl="1" algn="r" indent="0" marL="0">
-              <a:buNone/>
-            </a:pPr>
-            <a:r>
-              <a:rPr lang="he-IL" altLang="en-US" sz="1400" b="1" dirty="0">
-                <a:solidFill>
-                  <a:srgbClr val="14213D"/>
-                </a:solidFill>
-                <a:latin typeface="Arial" pitchFamily="34" charset="0"/>
-                <a:ea typeface="Arial" pitchFamily="34" charset="-122"/>
-                <a:cs typeface="Arial" pitchFamily="34" charset="-120"/>
-              </a:rPr>
-              <a:t>כוונת עזיבה של המקצוע</a:t>
-            </a:r>
-            <a:endParaRPr lang="he-IL" sz="1400" dirty="0"/>
-          </a:p>
-        </p:txBody>
-      </p:sp>
-      <p:sp>
-        <p:nvSpPr>
-          <p:cNvPr id="27" name="Shape 25"/>
-          <p:cNvSpPr/>
-          <p:nvPr/>
-        </p:nvSpPr>
-        <p:spPr>
-          <a:xfrm>
-            <a:off x="548640" y="3602736"/>
-            <a:ext cx="3502152" cy="777240"/>
-          </a:xfrm>
-          <a:prstGeom prst="roundRect">
-            <a:avLst>
-              <a:gd name="adj" fmla="val 14118"/>
-            </a:avLst>
-          </a:prstGeom>
-          <a:solidFill>
-            <a:srgbClr val="FFF1D6"/>
-          </a:solidFill>
-          <a:ln w="12700">
-            <a:solidFill>
-              <a:srgbClr val="FFF1D6"/>
-            </a:solidFill>
-            <a:prstDash val="solid"/>
-          </a:ln>
-          <a:effectLst>
-            <a:outerShdw sx="100000" sy="100000" kx="0" ky="0" algn="bl" rotWithShape="0" blurRad="50800" dist="25400" dir="5400000">
-              <a:srgbClr val="000000">
-                <a:alpha val="12000"/>
-              </a:srgbClr>
-            </a:outerShdw>
-          </a:effectLst>
-        </p:spPr>
-      </p:sp>
-      <p:sp>
-        <p:nvSpPr>
-          <p:cNvPr id="28" name="Text 26"/>
-          <p:cNvSpPr txBox="1"/>
-          <p:nvPr/>
-        </p:nvSpPr>
-        <p:spPr>
-          <a:xfrm>
-            <a:off x="3364992" y="3758184"/>
-            <a:ext cx="457200" cy="457200"/>
-          </a:xfrm>
-          <a:prstGeom prst="rect">
-            <a:avLst/>
-          </a:prstGeom>
-          <a:noFill/>
-          <a:ln/>
-        </p:spPr>
-        <p:txBody>
-          <a:bodyPr wrap="square" lIns="0" tIns="0" rIns="0" bIns="0" rtlCol="0" anchor="ctr"/>
-          <a:lstStyle/>
-          <a:p>
-            <a:pPr algn="ctr" indent="0" marL="0">
-              <a:buNone/>
-            </a:pPr>
-            <a:r>
-              <a:rPr lang="en-US" sz="2400" b="1" dirty="0">
-                <a:solidFill>
-                  <a:srgbClr val="D9822B"/>
-                </a:solidFill>
-                <a:latin typeface="Arial" pitchFamily="34" charset="0"/>
-                <a:ea typeface="Arial" pitchFamily="34" charset="-122"/>
-                <a:cs typeface="Arial" pitchFamily="34" charset="-120"/>
-              </a:rPr>
-              <a:t>+</a:t>
-            </a:r>
-            <a:endParaRPr lang="en-US" sz="2400" dirty="0"/>
-          </a:p>
-        </p:txBody>
-      </p:sp>
-      <p:sp>
-        <p:nvSpPr>
-          <p:cNvPr id="29" name="Text 27"/>
-          <p:cNvSpPr txBox="1"/>
-          <p:nvPr/>
-        </p:nvSpPr>
-        <p:spPr>
-          <a:xfrm>
-            <a:off x="731520" y="3694176"/>
-            <a:ext cx="2587752" cy="594360"/>
-          </a:xfrm>
-          <a:prstGeom prst="rect">
-            <a:avLst/>
-          </a:prstGeom>
-          <a:noFill/>
-          <a:ln/>
-        </p:spPr>
-        <p:txBody>
-          <a:bodyPr wrap="square" lIns="0" tIns="0" rIns="0" bIns="0" rtlCol="0" anchor="ctr"/>
-          <a:lstStyle/>
-          <a:p>
-            <a:pPr rtl="1" algn="r" indent="0" marL="0">
-              <a:buNone/>
-            </a:pPr>
-            <a:r>
-              <a:rPr lang="he-IL" altLang="en-US" sz="1400" b="1" dirty="0">
-                <a:solidFill>
-                  <a:srgbClr val="14213D"/>
-                </a:solidFill>
-                <a:latin typeface="Arial" pitchFamily="34" charset="0"/>
-                <a:ea typeface="Arial" pitchFamily="34" charset="-122"/>
-                <a:cs typeface="Arial" pitchFamily="34" charset="-120"/>
-              </a:rPr>
-              <a:t>חיפוש עבודה</a:t>
-            </a:r>
-            <a:endParaRPr lang="he-IL" sz="1400" dirty="0"/>
-          </a:p>
-        </p:txBody>
-      </p:sp>
-      <p:sp>
-        <p:nvSpPr>
-          <p:cNvPr id="30" name="Shape 28"/>
-          <p:cNvSpPr/>
-          <p:nvPr/>
-        </p:nvSpPr>
-        <p:spPr>
-          <a:xfrm>
-            <a:off x="548640" y="4535424"/>
-            <a:ext cx="3502152" cy="777240"/>
-          </a:xfrm>
-          <a:prstGeom prst="roundRect">
-            <a:avLst>
-              <a:gd name="adj" fmla="val 14118"/>
-            </a:avLst>
-          </a:prstGeom>
-          <a:solidFill>
-            <a:srgbClr val="FFF1D6"/>
-          </a:solidFill>
-          <a:ln w="12700">
-            <a:solidFill>
-              <a:srgbClr val="FFF1D6"/>
-            </a:solidFill>
-            <a:prstDash val="solid"/>
-          </a:ln>
-          <a:effectLst>
-            <a:outerShdw sx="100000" sy="100000" kx="0" ky="0" algn="bl" rotWithShape="0" blurRad="50800" dist="25400" dir="5400000">
-              <a:srgbClr val="000000">
-                <a:alpha val="12000"/>
-              </a:srgbClr>
-            </a:outerShdw>
-          </a:effectLst>
-        </p:spPr>
-      </p:sp>
-      <p:sp>
-        <p:nvSpPr>
-          <p:cNvPr id="31" name="Text 29"/>
-          <p:cNvSpPr txBox="1"/>
-          <p:nvPr/>
-        </p:nvSpPr>
-        <p:spPr>
-          <a:xfrm>
-            <a:off x="3364992" y="4690872"/>
-            <a:ext cx="457200" cy="457200"/>
-          </a:xfrm>
-          <a:prstGeom prst="rect">
-            <a:avLst/>
-          </a:prstGeom>
-          <a:noFill/>
-          <a:ln/>
-        </p:spPr>
-        <p:txBody>
-          <a:bodyPr wrap="square" lIns="0" tIns="0" rIns="0" bIns="0" rtlCol="0" anchor="ctr"/>
-          <a:lstStyle/>
-          <a:p>
-            <a:pPr algn="ctr" indent="0" marL="0">
-              <a:buNone/>
-            </a:pPr>
-            <a:r>
-              <a:rPr lang="en-US" sz="2400" b="1" dirty="0">
-                <a:solidFill>
-                  <a:srgbClr val="D9822B"/>
-                </a:solidFill>
-                <a:latin typeface="Arial" pitchFamily="34" charset="0"/>
-                <a:ea typeface="Arial" pitchFamily="34" charset="-122"/>
-                <a:cs typeface="Arial" pitchFamily="34" charset="-120"/>
-              </a:rPr>
-              <a:t>+</a:t>
-            </a:r>
-            <a:endParaRPr lang="en-US" sz="2400" dirty="0"/>
-          </a:p>
-        </p:txBody>
-      </p:sp>
-      <p:sp>
-        <p:nvSpPr>
-          <p:cNvPr id="32" name="Text 30"/>
-          <p:cNvSpPr txBox="1"/>
-          <p:nvPr/>
-        </p:nvSpPr>
-        <p:spPr>
-          <a:xfrm>
-            <a:off x="731520" y="4626864"/>
-            <a:ext cx="2587752" cy="594360"/>
-          </a:xfrm>
-          <a:prstGeom prst="rect">
-            <a:avLst/>
-          </a:prstGeom>
-          <a:noFill/>
-          <a:ln/>
-        </p:spPr>
-        <p:txBody>
-          <a:bodyPr wrap="square" lIns="0" tIns="0" rIns="0" bIns="0" rtlCol="0" anchor="ctr"/>
-          <a:lstStyle/>
-          <a:p>
-            <a:pPr rtl="1" algn="r" indent="0" marL="0">
-              <a:buNone/>
-            </a:pPr>
-            <a:r>
-              <a:rPr lang="he-IL" altLang="en-US" sz="1400" b="1" dirty="0">
-                <a:solidFill>
-                  <a:srgbClr val="14213D"/>
-                </a:solidFill>
-                <a:latin typeface="Arial" pitchFamily="34" charset="0"/>
-                <a:ea typeface="Arial" pitchFamily="34" charset="-122"/>
-                <a:cs typeface="Arial" pitchFamily="34" charset="-120"/>
-              </a:rPr>
-              <a:t>הסתרת ידע מעמיתים</a:t>
-            </a:r>
-            <a:endParaRPr lang="he-IL" sz="1400" dirty="0"/>
-          </a:p>
-        </p:txBody>
-      </p:sp>
-      <p:sp>
-        <p:nvSpPr>
-          <p:cNvPr id="33" name="Shape 31"/>
-          <p:cNvSpPr/>
-          <p:nvPr/>
-        </p:nvSpPr>
-        <p:spPr>
-          <a:xfrm>
-            <a:off x="4114800" y="2743200"/>
-            <a:ext cx="777240" cy="548640"/>
-          </a:xfrm>
-          <a:prstGeom prst="leftArrow">
-            <a:avLst/>
-          </a:prstGeom>
-          <a:solidFill>
-            <a:srgbClr val="D9822B"/>
-          </a:solidFill>
-          <a:ln w="12700">
-            <a:solidFill>
-              <a:srgbClr val="D9822B"/>
-            </a:solidFill>
-            <a:prstDash val="solid"/>
-          </a:ln>
-        </p:spPr>
-      </p:sp>
-      <p:sp>
-        <p:nvSpPr>
-          <p:cNvPr id="34" name="Shape 32"/>
           <p:cNvSpPr/>
           <p:nvPr/>
         </p:nvSpPr>
@@ -13683,7 +14317,7 @@
       </p:sp>
       <p:sp>
         <p:nvSpPr>
-          <p:cNvPr id="35" name="Text 33"/>
+          <p:cNvPr id="22" name="Text 20"/>
           <p:cNvSpPr txBox="1"/>
           <p:nvPr/>
         </p:nvSpPr>
@@ -13706,7 +14340,7 @@
               <a:buNone/>
             </a:pPr>
             <a:r>
-              <a:rPr lang="he-IL" altLang="en-US" sz="1500" b="1" dirty="0">
+              <a:rPr lang="he-IL" altLang="en-US" sz="1300" b="1" dirty="0">
                 <a:solidFill>
                   <a:srgbClr val="14213D"/>
                 </a:solidFill>
@@ -13714,15 +14348,15 @@
                 <a:ea typeface="Arial" pitchFamily="34" charset="-122"/>
                 <a:cs typeface="Arial" pitchFamily="34" charset="-120"/>
               </a:rPr>
-              <a:t>התשובה: הלאה, לא למעלה. הפחד גורם לברוח ולהסתיר, לא להתפתח (Låstad et al., 2025)</a:t>
-            </a:r>
-            <a:endParaRPr lang="he-IL" sz="1500" dirty="0"/>
-          </a:p>
-        </p:txBody>
-      </p:sp>
-      <p:sp>
-        <p:nvSpPr>
-          <p:cNvPr id="36" name="Text 34"/>
+              <a:t>עיצוב לצרכי הימנעות (ניתוק, הרפיה): ללא קשר מובהק לאף רכיב. ובכיוון ההפוך: ניהוליות היום מנבאת עיצוב תפקיד בעוד חצי שנה (β = 0.431). ספירלת רווח (Cetkovská et al., 2026)</a:t>
+            </a:r>
+            <a:endParaRPr lang="he-IL" sz="1300" dirty="0"/>
+          </a:p>
+        </p:txBody>
+      </p:sp>
+      <p:sp>
+        <p:nvSpPr>
+          <p:cNvPr id="23" name="Text 21"/>
           <p:cNvSpPr txBox="1"/>
           <p:nvPr/>
         </p:nvSpPr>
@@ -13761,7 +14395,7 @@
       </p:sp>
       <p:sp>
         <p:nvSpPr>
-          <p:cNvPr id="37" name="Text 35"/>
+          <p:cNvPr id="24" name="Text 22"/>
           <p:cNvSpPr txBox="1"/>
           <p:nvPr/>
         </p:nvSpPr>
@@ -13856,7 +14490,7 @@
                 <a:ea typeface="Arial" pitchFamily="34" charset="-122"/>
                 <a:cs typeface="Arial" pitchFamily="34" charset="-120"/>
               </a:rPr>
-              <a:t>איך בדקו? ומה משנה את עוצמת הקשר?</a:t>
+              <a:t>איך בדקו? ומה גודל האפקט?</a:t>
             </a:r>
             <a:endParaRPr lang="he-IL" sz="3000" dirty="0"/>
           </a:p>
@@ -13870,12 +14504,12 @@
         </p:nvSpPr>
         <p:spPr>
           <a:xfrm>
-            <a:off x="8074152" y="1371600"/>
-            <a:ext cx="3566160" cy="2103120"/>
+            <a:off x="8074152" y="1280160"/>
+            <a:ext cx="3566160" cy="1920240"/>
           </a:xfrm>
           <a:prstGeom prst="roundRect">
             <a:avLst>
-              <a:gd name="adj" fmla="val 5217"/>
+              <a:gd name="adj" fmla="val 5714"/>
             </a:avLst>
           </a:prstGeom>
           <a:solidFill>
@@ -13904,8 +14538,8 @@
         </p:nvSpPr>
         <p:spPr>
           <a:xfrm>
-            <a:off x="8257032" y="1554480"/>
-            <a:ext cx="3200400" cy="914400"/>
+            <a:off x="8257032" y="1417320"/>
+            <a:ext cx="3200400" cy="822960"/>
           </a:xfrm>
           <a:prstGeom prst="rect">
             <a:avLst/>
@@ -13921,7 +14555,7 @@
               <a:buNone/>
             </a:pPr>
             <a:r>
-              <a:rPr lang="he-IL" altLang="en-US" sz="4800" b="1" dirty="0">
+              <a:rPr lang="he-IL" altLang="en-US" sz="4000" b="1" dirty="0">
                 <a:solidFill>
                   <a:srgbClr val="E76F51"/>
                 </a:solidFill>
@@ -13929,9 +14563,9 @@
                 <a:ea typeface="Arial" pitchFamily="34" charset="-122"/>
                 <a:cs typeface="Arial" pitchFamily="34" charset="-120"/>
               </a:rPr>
-              <a:t>237</a:t>
-            </a:r>
-            <a:endParaRPr lang="he-IL" sz="4800" dirty="0"/>
+              <a:t>924</a:t>
+            </a:r>
+            <a:endParaRPr lang="he-IL" sz="4000" dirty="0"/>
           </a:p>
         </p:txBody>
       </p:sp>
@@ -13943,7 +14577,7 @@
         </p:nvSpPr>
         <p:spPr>
           <a:xfrm>
-            <a:off x="8348472" y="2514600"/>
+            <a:off x="8348472" y="2286000"/>
             <a:ext cx="3017520" cy="868680"/>
           </a:xfrm>
           <a:prstGeom prst="rect">
@@ -13960,7 +14594,7 @@
               <a:buNone/>
             </a:pPr>
             <a:r>
-              <a:rPr lang="he-IL" altLang="en-US" sz="1400" dirty="0">
+              <a:rPr lang="he-IL" altLang="en-US" sz="1250" dirty="0">
                 <a:solidFill>
                   <a:srgbClr val="1F2937"/>
                 </a:solidFill>
@@ -13968,9 +14602,9 @@
                 <a:ea typeface="Arial" pitchFamily="34" charset="-122"/>
                 <a:cs typeface="Arial" pitchFamily="34" charset="-120"/>
               </a:rPr>
-              <a:t>מחקרים ראשוניים קודדו ואוחדו סטטיסטית</a:t>
-            </a:r>
-            <a:endParaRPr lang="he-IL" sz="1400" dirty="0"/>
+              <a:t>עובדים בגרמניה ובשווייץ, גיל ממוצע 49, מדגם מכסות של האוכלוסייה העובדת</a:t>
+            </a:r>
+            <a:endParaRPr lang="he-IL" sz="1250" dirty="0"/>
           </a:p>
         </p:txBody>
       </p:sp>
@@ -13982,12 +14616,12 @@
         </p:nvSpPr>
         <p:spPr>
           <a:xfrm>
-            <a:off x="4311396" y="1371600"/>
-            <a:ext cx="3566160" cy="2103120"/>
+            <a:off x="4311396" y="1280160"/>
+            <a:ext cx="3566160" cy="1920240"/>
           </a:xfrm>
           <a:prstGeom prst="roundRect">
             <a:avLst>
-              <a:gd name="adj" fmla="val 5217"/>
+              <a:gd name="adj" fmla="val 5714"/>
             </a:avLst>
           </a:prstGeom>
           <a:solidFill>
@@ -14016,8 +14650,8 @@
         </p:nvSpPr>
         <p:spPr>
           <a:xfrm>
-            <a:off x="4494276" y="1554480"/>
-            <a:ext cx="3200400" cy="914400"/>
+            <a:off x="4494276" y="1417320"/>
+            <a:ext cx="3200400" cy="822960"/>
           </a:xfrm>
           <a:prstGeom prst="rect">
             <a:avLst/>
@@ -14033,7 +14667,7 @@
               <a:buNone/>
             </a:pPr>
             <a:r>
-              <a:rPr lang="he-IL" altLang="en-US" sz="4800" b="1" dirty="0">
+              <a:rPr lang="he-IL" altLang="en-US" sz="4000" b="1" dirty="0">
                 <a:solidFill>
                   <a:srgbClr val="E76F51"/>
                 </a:solidFill>
@@ -14041,9 +14675,9 @@
                 <a:ea typeface="Arial" pitchFamily="34" charset="-122"/>
                 <a:cs typeface="Arial" pitchFamily="34" charset="-120"/>
               </a:rPr>
-              <a:t>8</a:t>
-            </a:r>
-            <a:endParaRPr lang="he-IL" sz="4800" dirty="0"/>
+              <a:t>2 × 6</a:t>
+            </a:r>
+            <a:endParaRPr lang="he-IL" sz="4000" dirty="0"/>
           </a:p>
         </p:txBody>
       </p:sp>
@@ -14055,7 +14689,7 @@
         </p:nvSpPr>
         <p:spPr>
           <a:xfrm>
-            <a:off x="4585716" y="2514600"/>
+            <a:off x="4585716" y="2286000"/>
             <a:ext cx="3017520" cy="868680"/>
           </a:xfrm>
           <a:prstGeom prst="rect">
@@ -14072,7 +14706,7 @@
               <a:buNone/>
             </a:pPr>
             <a:r>
-              <a:rPr lang="he-IL" altLang="en-US" sz="1400" dirty="0">
+              <a:rPr lang="he-IL" altLang="en-US" sz="1250" dirty="0">
                 <a:solidFill>
                   <a:srgbClr val="1F2937"/>
                 </a:solidFill>
@@ -14080,9 +14714,9 @@
                 <a:ea typeface="Arial" pitchFamily="34" charset="-122"/>
                 <a:cs typeface="Arial" pitchFamily="34" charset="-120"/>
               </a:rPr>
-              <a:t>תוצאות קריירה בשלוש קבוצות: עמדות, התנהגויות, כוונות</a:t>
-            </a:r>
-            <a:endParaRPr lang="he-IL" sz="1400" dirty="0"/>
+              <a:t>שני גלי מדידה בהפרש של שישה חודשים, 80% השלימו את שניהם</a:t>
+            </a:r>
+            <a:endParaRPr lang="he-IL" sz="1250" dirty="0"/>
           </a:p>
         </p:txBody>
       </p:sp>
@@ -14094,12 +14728,12 @@
         </p:nvSpPr>
         <p:spPr>
           <a:xfrm>
-            <a:off x="548640" y="1371600"/>
-            <a:ext cx="3566160" cy="2103120"/>
+            <a:off x="548640" y="1280160"/>
+            <a:ext cx="3566160" cy="1920240"/>
           </a:xfrm>
           <a:prstGeom prst="roundRect">
             <a:avLst>
-              <a:gd name="adj" fmla="val 5217"/>
+              <a:gd name="adj" fmla="val 5714"/>
             </a:avLst>
           </a:prstGeom>
           <a:solidFill>
@@ -14128,8 +14762,8 @@
         </p:nvSpPr>
         <p:spPr>
           <a:xfrm>
-            <a:off x="731520" y="1554480"/>
-            <a:ext cx="3200400" cy="914400"/>
+            <a:off x="731520" y="1417320"/>
+            <a:ext cx="3200400" cy="822960"/>
           </a:xfrm>
           <a:prstGeom prst="rect">
             <a:avLst/>
@@ -14145,7 +14779,7 @@
               <a:buNone/>
             </a:pPr>
             <a:r>
-              <a:rPr lang="he-IL" altLang="en-US" sz="4800" b="1" dirty="0">
+              <a:rPr lang="he-IL" altLang="en-US" sz="4000" b="1" dirty="0">
                 <a:solidFill>
                   <a:srgbClr val="E76F51"/>
                 </a:solidFill>
@@ -14153,9 +14787,9 @@
                 <a:ea typeface="Arial" pitchFamily="34" charset="-122"/>
                 <a:cs typeface="Arial" pitchFamily="34" charset="-120"/>
               </a:rPr>
-              <a:t>2</a:t>
-            </a:r>
-            <a:endParaRPr lang="he-IL" sz="4800" dirty="0"/>
+              <a:t>9 + 18</a:t>
+            </a:r>
+            <a:endParaRPr lang="he-IL" sz="4000" dirty="0"/>
           </a:p>
         </p:txBody>
       </p:sp>
@@ -14167,7 +14801,7 @@
         </p:nvSpPr>
         <p:spPr>
           <a:xfrm>
-            <a:off x="822960" y="2514600"/>
+            <a:off x="822960" y="2286000"/>
             <a:ext cx="3017520" cy="868680"/>
           </a:xfrm>
           <a:prstGeom prst="rect">
@@ -14184,7 +14818,7 @@
               <a:buNone/>
             </a:pPr>
             <a:r>
-              <a:rPr lang="he-IL" altLang="en-US" sz="1400" dirty="0">
+              <a:rPr lang="he-IL" altLang="en-US" sz="1250" dirty="0">
                 <a:solidFill>
                   <a:srgbClr val="1F2937"/>
                 </a:solidFill>
@@ -14192,9 +14826,9 @@
                 <a:ea typeface="Arial" pitchFamily="34" charset="-122"/>
                 <a:cs typeface="Arial" pitchFamily="34" charset="-120"/>
               </a:rPr>
-              <a:t>ממתנים מתודולוגיים: מערך המחקר וסוג המדד</a:t>
-            </a:r>
-            <a:endParaRPr lang="he-IL" sz="1400" dirty="0"/>
+              <a:t>פריטים: סולם תחושת קוהרנטיות בעבודה וסולם עיצוב תפקיד מבוסס צרכים</a:t>
+            </a:r>
+            <a:endParaRPr lang="he-IL" sz="1250" dirty="0"/>
           </a:p>
         </p:txBody>
       </p:sp>
@@ -14206,12 +14840,62 @@
         </p:nvSpPr>
         <p:spPr>
           <a:xfrm>
-            <a:off x="6199632" y="3749040"/>
-            <a:ext cx="5440680" cy="1600200"/>
+            <a:off x="548640" y="3383280"/>
+            <a:ext cx="6949440" cy="2880360"/>
           </a:xfrm>
           <a:prstGeom prst="roundRect">
             <a:avLst>
-              <a:gd name="adj" fmla="val 6857"/>
+              <a:gd name="adj" fmla="val 3810"/>
+            </a:avLst>
+          </a:prstGeom>
+          <a:solidFill>
+            <a:srgbClr val="FFFFFF"/>
+          </a:solidFill>
+          <a:ln w="12700">
+            <a:solidFill>
+              <a:srgbClr val="FFFFFF"/>
+            </a:solidFill>
+            <a:prstDash val="solid"/>
+          </a:ln>
+          <a:effectLst>
+            <a:outerShdw sx="100000" sy="100000" kx="0" ky="0" algn="bl" rotWithShape="0" blurRad="50800" dist="25400" dir="5400000">
+              <a:srgbClr val="000000">
+                <a:alpha val="12000"/>
+              </a:srgbClr>
+            </a:outerShdw>
+          </a:effectLst>
+        </p:spPr>
+      </p:sp>
+      <p:graphicFrame>
+        <p:nvGraphicFramePr>
+          <p:cNvPr id="13" name="Chart 0" descr=""/>
+          <p:cNvGraphicFramePr/>
+          <p:nvPr/>
+        </p:nvGraphicFramePr>
+        <p:xfrm>
+          <a:off x="731520" y="3474720"/>
+          <a:ext cx="6583680" cy="2697480"/>
+        </p:xfrm>
+        <a:graphic xmlns:a="http://schemas.openxmlformats.org/drawingml/2006/main">
+          <a:graphicData uri="http://schemas.openxmlformats.org/drawingml/2006/chart">
+            <c:chart xmlns:c="http://schemas.openxmlformats.org/drawingml/2006/chart" r:id="rId1"/>
+          </a:graphicData>
+        </a:graphic>
+      </p:graphicFrame>
+      <p:sp>
+        <p:nvSpPr>
+          <p:cNvPr id="14" name="Shape 11"/>
+          <p:cNvSpPr/>
+          <p:nvPr/>
+        </p:nvSpPr>
+        <p:spPr>
+          <a:xfrm>
+            <a:off x="7680960" y="3383280"/>
+            <a:ext cx="3959352" cy="2880360"/>
+          </a:xfrm>
+          <a:prstGeom prst="roundRect">
+            <a:avLst>
+              <a:gd name="adj" fmla="val 3810"/>
             </a:avLst>
           </a:prstGeom>
           <a:solidFill>
@@ -14234,78 +14918,53 @@
       </p:sp>
       <p:sp>
         <p:nvSpPr>
-          <p:cNvPr id="13" name="Shape 11"/>
-          <p:cNvSpPr/>
-          <p:nvPr/>
-        </p:nvSpPr>
-        <p:spPr>
-          <a:xfrm>
-            <a:off x="11000232" y="3977640"/>
-            <a:ext cx="365760" cy="365760"/>
-          </a:xfrm>
-          <a:prstGeom prst="ellipse">
-            <a:avLst/>
-          </a:prstGeom>
-          <a:solidFill>
-            <a:srgbClr val="2A9D8F"/>
-          </a:solidFill>
-          <a:ln w="12700">
-            <a:solidFill>
-              <a:srgbClr val="2A9D8F"/>
-            </a:solidFill>
-            <a:prstDash val="solid"/>
-          </a:ln>
-        </p:spPr>
-      </p:sp>
-      <p:sp>
-        <p:nvSpPr>
-          <p:cNvPr id="14" name="Text 12"/>
-          <p:cNvSpPr txBox="1"/>
-          <p:nvPr/>
-        </p:nvSpPr>
-        <p:spPr>
-          <a:xfrm>
-            <a:off x="6473952" y="3931920"/>
-            <a:ext cx="4343400" cy="457200"/>
-          </a:xfrm>
-          <a:prstGeom prst="rect">
-            <a:avLst/>
-          </a:prstGeom>
-          <a:noFill/>
-          <a:ln/>
-        </p:spPr>
-        <p:txBody>
-          <a:bodyPr wrap="square" lIns="0" tIns="0" rIns="0" bIns="0" rtlCol="0" anchor="ctr"/>
+          <p:cNvPr id="15" name="Text 12"/>
+          <p:cNvSpPr txBox="1"/>
+          <p:nvPr/>
+        </p:nvSpPr>
+        <p:spPr>
+          <a:xfrm>
+            <a:off x="7863840" y="3474720"/>
+            <a:ext cx="3611880" cy="411480"/>
+          </a:xfrm>
+          <a:prstGeom prst="rect">
+            <a:avLst/>
+          </a:prstGeom>
+          <a:noFill/>
+          <a:ln/>
+        </p:spPr>
+        <p:txBody>
+          <a:bodyPr wrap="square" lIns="0" tIns="0" rIns="0" bIns="0" rtlCol="0" anchor="t"/>
           <a:lstStyle/>
           <a:p>
             <a:pPr rtl="1" algn="r" indent="0" marL="0">
               <a:buNone/>
             </a:pPr>
             <a:r>
-              <a:rPr lang="he-IL" altLang="en-US" sz="1600" b="1" dirty="0">
-                <a:solidFill>
-                  <a:srgbClr val="14213D"/>
-                </a:solidFill>
-                <a:latin typeface="Arial" pitchFamily="34" charset="0"/>
-                <a:ea typeface="Arial" pitchFamily="34" charset="-122"/>
-                <a:cs typeface="Arial" pitchFamily="34" charset="-120"/>
-              </a:rPr>
-              <a:t>מערך המחקר</a:t>
-            </a:r>
-            <a:endParaRPr lang="he-IL" sz="1600" dirty="0"/>
-          </a:p>
-        </p:txBody>
-      </p:sp>
-      <p:sp>
-        <p:nvSpPr>
-          <p:cNvPr id="15" name="Text 13"/>
-          <p:cNvSpPr txBox="1"/>
-          <p:nvPr/>
-        </p:nvSpPr>
-        <p:spPr>
-          <a:xfrm>
-            <a:off x="6473952" y="4434840"/>
-            <a:ext cx="4892040" cy="868680"/>
+              <a:rPr lang="he-IL" altLang="en-US" sz="1500" b="1" dirty="0">
+                <a:solidFill>
+                  <a:srgbClr val="2A9D8F"/>
+                </a:solidFill>
+                <a:latin typeface="Arial" pitchFamily="34" charset="0"/>
+                <a:ea typeface="Arial" pitchFamily="34" charset="-122"/>
+                <a:cs typeface="Arial" pitchFamily="34" charset="-120"/>
+              </a:rPr>
+              <a:t>מה זה אומר?</a:t>
+            </a:r>
+            <a:endParaRPr lang="he-IL" sz="1500" dirty="0"/>
+          </a:p>
+        </p:txBody>
+      </p:sp>
+      <p:sp>
+        <p:nvSpPr>
+          <p:cNvPr id="16" name="Text 13"/>
+          <p:cNvSpPr txBox="1"/>
+          <p:nvPr/>
+        </p:nvSpPr>
+        <p:spPr>
+          <a:xfrm>
+            <a:off x="7863840" y="3931920"/>
+            <a:ext cx="3611880" cy="2286000"/>
           </a:xfrm>
           <a:prstGeom prst="rect">
             <a:avLst/>
@@ -14317,11 +14976,15 @@
           <a:bodyPr wrap="square" lIns="0" tIns="0" rIns="0" bIns="0" rtlCol="0" anchor="t"/>
           <a:lstStyle/>
           <a:p>
-            <a:pPr rtl="1" algn="r" indent="0" marL="0">
-              <a:buNone/>
-            </a:pPr>
-            <a:r>
-              <a:rPr lang="he-IL" altLang="en-US" sz="1300" dirty="0">
+            <a:pPr algn="r" marL="342900" indent="-342900">
+              <a:spcAft>
+                <a:spcPts val="500"/>
+              </a:spcAft>
+              <a:buSzPct val="100000"/>
+              <a:buChar char="•"/>
+            </a:pPr>
+            <a:r>
+              <a:rPr lang="he-IL" altLang="en-US" sz="1200" dirty="0">
                 <a:solidFill>
                   <a:srgbClr val="1F2937"/>
                 </a:solidFill>
@@ -14329,136 +14992,20 @@
                 <a:ea typeface="Arial" pitchFamily="34" charset="-122"/>
                 <a:cs typeface="Arial" pitchFamily="34" charset="-120"/>
               </a:rPr>
-              <a:t>הקשרים חזקים יותר במחקרי חתך מאשר במחקרי אורך. כלומר: הקשר אמיתי, אבל כנראה קטן יותר ממה שמחקר בודד מראה.</a:t>
-            </a:r>
-            <a:endParaRPr lang="he-IL" sz="1300" dirty="0"/>
-          </a:p>
-        </p:txBody>
-      </p:sp>
-      <p:sp>
-        <p:nvSpPr>
-          <p:cNvPr id="16" name="Shape 14"/>
-          <p:cNvSpPr/>
-          <p:nvPr/>
-        </p:nvSpPr>
-        <p:spPr>
-          <a:xfrm>
-            <a:off x="548640" y="3749040"/>
-            <a:ext cx="5440680" cy="1600200"/>
-          </a:xfrm>
-          <a:prstGeom prst="roundRect">
-            <a:avLst>
-              <a:gd name="adj" fmla="val 6857"/>
-            </a:avLst>
-          </a:prstGeom>
-          <a:solidFill>
-            <a:srgbClr val="F4F6FA"/>
-          </a:solidFill>
-          <a:ln w="12700">
-            <a:solidFill>
-              <a:srgbClr val="F4F6FA"/>
-            </a:solidFill>
-            <a:prstDash val="solid"/>
-          </a:ln>
-          <a:effectLst>
-            <a:outerShdw sx="100000" sy="100000" kx="0" ky="0" algn="bl" rotWithShape="0" blurRad="50800" dist="25400" dir="5400000">
-              <a:srgbClr val="000000">
-                <a:alpha val="12000"/>
-              </a:srgbClr>
-            </a:outerShdw>
-          </a:effectLst>
-        </p:spPr>
-      </p:sp>
-      <p:sp>
-        <p:nvSpPr>
-          <p:cNvPr id="17" name="Shape 15"/>
-          <p:cNvSpPr/>
-          <p:nvPr/>
-        </p:nvSpPr>
-        <p:spPr>
-          <a:xfrm>
-            <a:off x="5349240" y="3977640"/>
-            <a:ext cx="365760" cy="365760"/>
-          </a:xfrm>
-          <a:prstGeom prst="ellipse">
-            <a:avLst/>
-          </a:prstGeom>
-          <a:solidFill>
-            <a:srgbClr val="D9822B"/>
-          </a:solidFill>
-          <a:ln w="12700">
-            <a:solidFill>
-              <a:srgbClr val="D9822B"/>
-            </a:solidFill>
-            <a:prstDash val="solid"/>
-          </a:ln>
-        </p:spPr>
-      </p:sp>
-      <p:sp>
-        <p:nvSpPr>
-          <p:cNvPr id="18" name="Text 16"/>
-          <p:cNvSpPr txBox="1"/>
-          <p:nvPr/>
-        </p:nvSpPr>
-        <p:spPr>
-          <a:xfrm>
-            <a:off x="822960" y="3931920"/>
-            <a:ext cx="4343400" cy="457200"/>
-          </a:xfrm>
-          <a:prstGeom prst="rect">
-            <a:avLst/>
-          </a:prstGeom>
-          <a:noFill/>
-          <a:ln/>
-        </p:spPr>
-        <p:txBody>
-          <a:bodyPr wrap="square" lIns="0" tIns="0" rIns="0" bIns="0" rtlCol="0" anchor="ctr"/>
-          <a:lstStyle/>
-          <a:p>
-            <a:pPr rtl="1" algn="r" indent="0" marL="0">
-              <a:buNone/>
-            </a:pPr>
-            <a:r>
-              <a:rPr lang="he-IL" altLang="en-US" sz="1600" b="1" dirty="0">
-                <a:solidFill>
-                  <a:srgbClr val="14213D"/>
-                </a:solidFill>
-                <a:latin typeface="Arial" pitchFamily="34" charset="0"/>
-                <a:ea typeface="Arial" pitchFamily="34" charset="-122"/>
-                <a:cs typeface="Arial" pitchFamily="34" charset="-120"/>
-              </a:rPr>
-              <a:t>סוג המדד</a:t>
-            </a:r>
-            <a:endParaRPr lang="he-IL" sz="1600" dirty="0"/>
-          </a:p>
-        </p:txBody>
-      </p:sp>
-      <p:sp>
-        <p:nvSpPr>
-          <p:cNvPr id="19" name="Text 17"/>
-          <p:cNvSpPr txBox="1"/>
-          <p:nvPr/>
-        </p:nvSpPr>
-        <p:spPr>
-          <a:xfrm>
-            <a:off x="822960" y="4434840"/>
-            <a:ext cx="4892040" cy="868680"/>
-          </a:xfrm>
-          <a:prstGeom prst="rect">
-            <a:avLst/>
-          </a:prstGeom>
-          <a:noFill/>
-          <a:ln/>
-        </p:spPr>
-        <p:txBody>
-          <a:bodyPr wrap="square" lIns="0" tIns="0" rIns="0" bIns="0" rtlCol="0" anchor="t"/>
-          <a:lstStyle/>
-          <a:p>
-            <a:pPr rtl="1" algn="r" indent="0" marL="0">
-              <a:buNone/>
-            </a:pPr>
-            <a:r>
-              <a:rPr lang="he-IL" altLang="en-US" sz="1300" dirty="0">
+              <a:t>הירוק מובהק, האפור לא: רק עיצוב לצרכי התקרבות משנה את התפיסה</a:t>
+            </a:r>
+            <a:endParaRPr lang="he-IL" sz="1200" dirty="0"/>
+          </a:p>
+          <a:p>
+            <a:pPr algn="r" marL="342900" indent="-342900">
+              <a:spcAft>
+                <a:spcPts val="500"/>
+              </a:spcAft>
+              <a:buSzPct val="100000"/>
+              <a:buChar char="•"/>
+            </a:pPr>
+            <a:r>
+              <a:rPr lang="he-IL" altLang="en-US" sz="1200" dirty="0">
                 <a:solidFill>
                   <a:srgbClr val="1F2937"/>
                 </a:solidFill>
@@ -14466,72 +15013,20 @@
                 <a:ea typeface="Arial" pitchFamily="34" charset="-122"/>
                 <a:cs typeface="Arial" pitchFamily="34" charset="-120"/>
               </a:rPr>
-              <a:t>קוגניטיבי ("כמה זה סביר"), רגשי ("כמה זה מדאיג") או משולב: השפעה מעורבת, לא אחידה בין התוצאות.</a:t>
-            </a:r>
-            <a:endParaRPr lang="he-IL" sz="1300" dirty="0"/>
-          </a:p>
-        </p:txBody>
-      </p:sp>
-      <p:sp>
-        <p:nvSpPr>
-          <p:cNvPr id="20" name="Shape 18"/>
-          <p:cNvSpPr/>
-          <p:nvPr/>
-        </p:nvSpPr>
-        <p:spPr>
-          <a:xfrm>
-            <a:off x="548640" y="5532120"/>
-            <a:ext cx="11091672" cy="731520"/>
-          </a:xfrm>
-          <a:prstGeom prst="roundRect">
-            <a:avLst>
-              <a:gd name="adj" fmla="val 15000"/>
-            </a:avLst>
-          </a:prstGeom>
-          <a:solidFill>
-            <a:srgbClr val="FFF4DE"/>
-          </a:solidFill>
-          <a:ln w="12700">
-            <a:solidFill>
-              <a:srgbClr val="FFF4DE"/>
-            </a:solidFill>
-            <a:prstDash val="solid"/>
-          </a:ln>
-          <a:effectLst>
-            <a:outerShdw sx="100000" sy="100000" kx="0" ky="0" algn="bl" rotWithShape="0" blurRad="50800" dist="25400" dir="5400000">
-              <a:srgbClr val="000000">
-                <a:alpha val="12000"/>
-              </a:srgbClr>
-            </a:outerShdw>
-          </a:effectLst>
-        </p:spPr>
-      </p:sp>
-      <p:sp>
-        <p:nvSpPr>
-          <p:cNvPr id="21" name="Text 19"/>
-          <p:cNvSpPr txBox="1"/>
-          <p:nvPr/>
-        </p:nvSpPr>
-        <p:spPr>
-          <a:xfrm>
-            <a:off x="822960" y="5577840"/>
-            <a:ext cx="10515600" cy="640080"/>
-          </a:xfrm>
-          <a:prstGeom prst="rect">
-            <a:avLst/>
-          </a:prstGeom>
-          <a:noFill/>
-          <a:ln/>
-        </p:spPr>
-        <p:txBody>
-          <a:bodyPr wrap="square" lIns="0" tIns="0" rIns="0" bIns="0" rtlCol="0" anchor="ctr"/>
-          <a:lstStyle/>
-          <a:p>
-            <a:pPr rtl="1" algn="r" indent="0" marL="0">
-              <a:buNone/>
-            </a:pPr>
-            <a:r>
-              <a:rPr lang="he-IL" altLang="en-US" sz="1300" dirty="0">
+              <a:t>אפקטים בינוניים, אבל מעבר ליציבות גבוהה (0.61 עד 0.70) של המדדים עצמם</a:t>
+            </a:r>
+            <a:endParaRPr lang="he-IL" sz="1200" dirty="0"/>
+          </a:p>
+          <a:p>
+            <a:pPr algn="r" marL="342900" indent="-342900">
+              <a:spcAft>
+                <a:spcPts val="500"/>
+              </a:spcAft>
+              <a:buSzPct val="100000"/>
+              <a:buChar char="•"/>
+            </a:pPr>
+            <a:r>
+              <a:rPr lang="he-IL" altLang="en-US" sz="1200" dirty="0">
                 <a:solidFill>
                   <a:srgbClr val="1F2937"/>
                 </a:solidFill>
@@ -14539,15 +15034,15 @@
                 <a:ea typeface="Arial" pitchFamily="34" charset="-122"/>
                 <a:cs typeface="Arial" pitchFamily="34" charset="-120"/>
               </a:rPr>
-              <a:t>מגבלות שהמחברים עצמם מציינים: מתאמים ולא סיבתיות, דיווח עצמי, הטיית פרסום אפשרית, מדגמים בעיקר מערביים ואסייתיים</a:t>
-            </a:r>
-            <a:endParaRPr lang="he-IL" sz="1300" dirty="0"/>
-          </a:p>
-        </p:txBody>
-      </p:sp>
-      <p:sp>
-        <p:nvSpPr>
-          <p:cNvPr id="22" name="Text 20"/>
+              <a:t>ניתוח פאנל צולב: כיווניות בזמן, לא הוכחת סיבתיות</a:t>
+            </a:r>
+            <a:endParaRPr lang="he-IL" sz="1200" dirty="0"/>
+          </a:p>
+        </p:txBody>
+      </p:sp>
+      <p:sp>
+        <p:nvSpPr>
+          <p:cNvPr id="17" name="Text 14"/>
           <p:cNvSpPr txBox="1"/>
           <p:nvPr/>
         </p:nvSpPr>
@@ -14586,7 +15081,7 @@
       </p:sp>
       <p:sp>
         <p:nvSpPr>
-          <p:cNvPr id="23" name="Text 21"/>
+          <p:cNvPr id="18" name="Text 15"/>
           <p:cNvSpPr txBox="1"/>
           <p:nvPr/>
         </p:nvSpPr>
@@ -15316,7 +15811,7 @@
                 <a:ea typeface="Arial" pitchFamily="34" charset="-122"/>
                 <a:cs typeface="Arial" pitchFamily="34" charset="-120"/>
               </a:rPr>
-              <a:t>החדשות הטובות: אצל בעלי חוסן קריירה גבוה הקשר חלש יותר. חוסן אפשר לבנות</a:t>
+              <a:t>החיבור למאמר שלנו: המשלים מראה את האיום ואת המשאב שממתן אותו. המרכזי מראה איך בונים משאב כזה בפועל</a:t>
             </a:r>
             <a:endParaRPr lang="he-IL" sz="1350" dirty="0"/>
           </a:p>

--- a/career-management-final-project/ניהול קריירה - התמודדות עם חוסר ודאות תעסוקתי - מצגת.pptx
+++ b/career-management-final-project/ניהול קריירה - התמודדות עם חוסר ודאות תעסוקתי - מצגת.pptx
@@ -3809,7 +3809,7 @@
                 <a:ea typeface="Arial" pitchFamily="34" charset="-122"/>
                 <a:cs typeface="Arial" pitchFamily="34" charset="-120"/>
               </a:rPr>
-              <a:t>ההיפוך: המטא-אנליזה של לוסטד ואחרים (Låstad et al., 2025) מראה שחוסר ביטחון מקטין יוזמה ופיתוח מיומנויות. מי שמרגיש שאין לו משאבים לא מעצב את תפקידו, אלא מגן על מה שנשאר. לכן בונים ניהוליות בתקופות של יציבות, לא מחכים לאיום.</a:t>
+              <a:t>ההיפוך: מי שמרגיש שאין לו מספיק משאבים לא מעצב את תפקידו, אלא מגן על מה שנשאר. והמאמר המשלים מראה שהאיום הטכנולוגי פוגע בביצועים דרך חוסר הביטחון (Chung et al., 2025). לכן בונים ניהוליות בתקופות של יציבות, לא מחכים לאיום.</a:t>
             </a:r>
             <a:endParaRPr lang="he-IL" sz="1400" dirty="0"/>
           </a:p>
@@ -8229,7 +8229,7 @@
                 <a:ea typeface="Arial" pitchFamily="34" charset="-122"/>
                 <a:cs typeface="Arial" pitchFamily="34" charset="-120"/>
               </a:rPr>
-              <a:t>Antonovsky, A. (1987). Unraveling the mystery of health: How people manage stress and stay well. Jossey-Bass.</a:t>
+              <a:t>Cetkovská, K., Bauer, G. F., &amp; Tušl, M. (2026). The role of needs-based job crafting in strengthening work-related sense of coherence: A two-wave panel study. Scandinavian Journal of Work and Organizational Psychology, 11(1), Article 14. https://doi.org/10.16993/sjwop.389</a:t>
             </a:r>
             <a:endParaRPr lang="en-US" sz="1100" dirty="0"/>
           </a:p>
@@ -8249,7 +8249,7 @@
                 <a:ea typeface="Arial" pitchFamily="34" charset="-122"/>
                 <a:cs typeface="Arial" pitchFamily="34" charset="-120"/>
               </a:rPr>
-              <a:t>Cetkovská, K., Bauer, G. F., &amp; Tušl, M. (2026). The role of needs-based job crafting in strengthening work-related sense of coherence: A two-wave panel study. Scandinavian Journal of Work and Organizational Psychology, 11(1), Article 14. https://doi.org/10.16993/sjwop.389</a:t>
+              <a:t>Chung, Y. W., Im, S., Kim, J. E., &amp; Yun, J. K. (2025). Artificial intelligence awareness, career resilience, job insecurity and behavioural outcomes. Australian Journal of Psychology, 77(1), Article 2559910. https://doi.org/10.1080/00049530.2025.2559910</a:t>
             </a:r>
             <a:endParaRPr lang="en-US" sz="1100" dirty="0"/>
           </a:p>
@@ -8269,47 +8269,7 @@
                 <a:ea typeface="Arial" pitchFamily="34" charset="-122"/>
                 <a:cs typeface="Arial" pitchFamily="34" charset="-120"/>
               </a:rPr>
-              <a:t>Chung, Y. W., Im, S., Kim, J. E., &amp; Yun, J. K. (2025). Artificial intelligence awareness, career resilience, job insecurity and behavioural outcomes. Australian Journal of Psychology, 77(1), Article 2559910. https://doi.org/10.1080/00049530.2025.2559910</a:t>
-            </a:r>
-            <a:endParaRPr lang="en-US" sz="1100" dirty="0"/>
-          </a:p>
-          <a:p>
-            <a:pPr algn="l" indent="0" marL="0">
-              <a:spcAft>
-                <a:spcPts val="600"/>
-              </a:spcAft>
-              <a:buNone/>
-            </a:pPr>
-            <a:r>
-              <a:rPr lang="en-US" sz="1100" dirty="0">
-                <a:solidFill>
-                  <a:srgbClr val="1F2937"/>
-                </a:solidFill>
-                <a:latin typeface="Arial" pitchFamily="34" charset="0"/>
-                <a:ea typeface="Arial" pitchFamily="34" charset="-122"/>
-                <a:cs typeface="Arial" pitchFamily="34" charset="-120"/>
-              </a:rPr>
               <a:t>Hone, L. (2019). 3 secrets of resilient people [Video]. TED Conferences. https://www.ted.com/talks/lucy_hone_the_three_secrets_of_resilient_people</a:t>
-            </a:r>
-            <a:endParaRPr lang="en-US" sz="1100" dirty="0"/>
-          </a:p>
-          <a:p>
-            <a:pPr algn="l" indent="0" marL="0">
-              <a:spcAft>
-                <a:spcPts val="600"/>
-              </a:spcAft>
-              <a:buNone/>
-            </a:pPr>
-            <a:r>
-              <a:rPr lang="en-US" sz="1100" dirty="0">
-                <a:solidFill>
-                  <a:srgbClr val="1F2937"/>
-                </a:solidFill>
-                <a:latin typeface="Arial" pitchFamily="34" charset="0"/>
-                <a:ea typeface="Arial" pitchFamily="34" charset="-122"/>
-                <a:cs typeface="Arial" pitchFamily="34" charset="-120"/>
-              </a:rPr>
-              <a:t>Låstad, L., Pienaar, J., Näswall, K., Richter, A., Hellgren, J., &amp; Sverke, M. (2025). Moving on up now? A meta-analysis of the associations between job insecurity and career-related outcomes. Scandinavian Journal of Work and Organizational Psychology, 10(1), Article 2. https://doi.org/10.16993/sjwop.275</a:t>
             </a:r>
             <a:endParaRPr lang="en-US" sz="1100" dirty="0"/>
           </a:p>
@@ -8392,6 +8352,26 @@
                 <a:cs typeface="Arial" pitchFamily="34" charset="-120"/>
               </a:rPr>
               <a:t>דבדבני דקל, מ' (2026ב). עסקים בצל הקורונה: ממשבר להזדמנות, איך עושים את זה? [מצגת הרצאה]. ניהול קריירה בארגונים, הקריה האקדמית אונו.</a:t>
+            </a:r>
+            <a:endParaRPr lang="he-IL" sz="1100" dirty="0"/>
+          </a:p>
+          <a:p>
+            <a:pPr algn="r" indent="0" marL="0">
+              <a:spcAft>
+                <a:spcPts val="500"/>
+              </a:spcAft>
+              <a:buNone/>
+            </a:pPr>
+            <a:r>
+              <a:rPr lang="he-IL" altLang="en-US" sz="1100" dirty="0">
+                <a:solidFill>
+                  <a:srgbClr val="1F2937"/>
+                </a:solidFill>
+                <a:latin typeface="Arial" pitchFamily="34" charset="0"/>
+                <a:ea typeface="Arial" pitchFamily="34" charset="-122"/>
+                <a:cs typeface="Arial" pitchFamily="34" charset="-120"/>
+              </a:rPr>
+              <a:t>דבדבני דקל, מ' (2026ג). ניתוח הסרט "השטן לובשת פראדה" לפי תיאוריות קריירה [מצגת הרצאה]. ניהול קריירה בארגונים, הקריה האקדמית אונו.</a:t>
             </a:r>
             <a:endParaRPr lang="he-IL" sz="1100" dirty="0"/>
           </a:p>
@@ -12173,7 +12153,7 @@
                 <a:ea typeface="Arial" pitchFamily="34" charset="-122"/>
                 <a:cs typeface="Arial" pitchFamily="34" charset="-120"/>
               </a:rPr>
-              <a:t>מאמר משלים (2025, גישה פתוחה) וראיות תומכות</a:t>
+              <a:t>מאמר משלים (2025, גישה פתוחה)</a:t>
             </a:r>
             <a:endParaRPr lang="he-IL" sz="1500" dirty="0"/>
           </a:p>
@@ -12216,26 +12196,6 @@
                 <a:cs typeface="Arial" pitchFamily="34" charset="-120"/>
               </a:rPr>
               <a:t>Chung, Y. W., Im, S., Kim, J. E., &amp; Yun, J. K. (2025). Artificial intelligence awareness, career resilience, job insecurity and behavioural outcomes. Australian Journal of Psychology, 77(1), Article 2559910.</a:t>
-            </a:r>
-            <a:endParaRPr lang="en-US" sz="1200" dirty="0"/>
-          </a:p>
-          <a:p>
-            <a:pPr algn="r" indent="0" marL="0">
-              <a:spcAft>
-                <a:spcPts val="600"/>
-              </a:spcAft>
-              <a:buNone/>
-            </a:pPr>
-            <a:r>
-              <a:rPr lang="en-US" sz="1200" dirty="0">
-                <a:solidFill>
-                  <a:srgbClr val="1F2937"/>
-                </a:solidFill>
-                <a:latin typeface="Arial" pitchFamily="34" charset="0"/>
-                <a:ea typeface="Arial" pitchFamily="34" charset="-122"/>
-                <a:cs typeface="Arial" pitchFamily="34" charset="-120"/>
-              </a:rPr>
-              <a:t>Låstad, L., et al. (2025). Moving on up now? A meta-analysis of the associations between job insecurity and career-related outcomes. Scandinavian Journal of Work and Organizational Psychology, 10(1), Article 2.</a:t>
             </a:r>
             <a:endParaRPr lang="en-US" sz="1200" dirty="0"/>
           </a:p>
@@ -12489,7 +12449,7 @@
                 <a:ea typeface="Arial" pitchFamily="34" charset="-122"/>
                 <a:cs typeface="Arial" pitchFamily="34" charset="-120"/>
               </a:rPr>
-              <a:t>מהגישה הסלוטוגנית של אנטונובסקי (1987): לא "למה חולים" אלא "איך נשארים בריאים למרות הלחץ"</a:t>
+              <a:t>מהגישה הסלוטוגנית של אנטונובסקי, כפי שמובאת במאמר: לא "למה חולים" אלא "איך נשארים בריאים למרות הלחץ"</a:t>
             </a:r>
             <a:endParaRPr lang="he-IL" sz="1250" dirty="0"/>
           </a:p>

--- a/career-management-final-project/ניהול קריירה - התמודדות עם חוסר ודאות תעסוקתי - מצגת.pptx
+++ b/career-management-final-project/ניהול קריירה - התמודדות עם חוסר ודאות תעסוקתי - מצגת.pptx
@@ -4400,7 +4400,7 @@
                 <a:ea typeface="Arial" pitchFamily="34" charset="-122"/>
                 <a:cs typeface="Arial" pitchFamily="34" charset="-120"/>
               </a:rPr>
-              <a:t>המאמר משלים את "ממשבר להזדמנות" (דבדבני דקל, 2026ב): משבר לא הופך להזדמנות מעצמו, אלא כשמישהו מעצב אותו כך. אבל המסר צריך להיות כפול: לעצב את התפקיד עכשיו, כשעוד יש משאבים, ולזכור שמי שמרגיש שאין לו משאבים צריך קודם תמיכה ולא עצות.</a:t>
+              <a:t>המאמר משלים את "ממשבר להזדמנות": משבר לא הופך להזדמנות מעצמו, אלא כשמישהו מעצב אותו כך. אבל המסר צריך להיות כפול: לעצב את התפקיד עכשיו, כשעוד יש משאבים, ולזכור שמי שמרגיש שאין לו משאבים צריך קודם תמיכה ולא עצות.</a:t>
             </a:r>
             <a:endParaRPr lang="he-IL" sz="1450" dirty="0"/>
           </a:p>
@@ -6161,7 +6161,7 @@
                 <a:ea typeface="Arial" pitchFamily="34" charset="-122"/>
                 <a:cs typeface="Arial" pitchFamily="34" charset="-120"/>
               </a:rPr>
-              <a:t>מתחבר ל"שלושת סלי הכלים" מהקורס (דבדבני דקל, 2026א): רשת אנשים = שייכות, התפתחות = מיומנות, זהות מקצועית = משמעות. המאמר מוסיף אוטונומיה וראיה אמפירית</a:t>
+              <a:t>מתחבר ל"שלושת סלי הכלים" מהקורס: רשת אנשים = שייכות, התפתחות = מיומנות, זהות מקצועית = משמעות. המאמר מוסיף אוטונומיה וראיה אמפירית</a:t>
             </a:r>
             <a:endParaRPr lang="he-IL" sz="1300" dirty="0"/>
           </a:p>
@@ -8312,66 +8312,6 @@
                 <a:cs typeface="Arial" pitchFamily="34" charset="-120"/>
               </a:rPr>
               <a:t>בנק ישראל. (2025, 11 במרץ). ההשפעה הצפויה של בינה מלאכותית יוצרת על העובדים: השלכות על המדיניות בשוק העבודה [תיבה מתוך דוח בנק ישראל לשנת 2024]. https://www.boi.org.il/publications/pressreleases/11-3-25/</a:t>
-            </a:r>
-            <a:endParaRPr lang="he-IL" sz="1100" dirty="0"/>
-          </a:p>
-          <a:p>
-            <a:pPr algn="r" indent="0" marL="0">
-              <a:spcAft>
-                <a:spcPts val="500"/>
-              </a:spcAft>
-              <a:buNone/>
-            </a:pPr>
-            <a:r>
-              <a:rPr lang="he-IL" altLang="en-US" sz="1100" dirty="0">
-                <a:solidFill>
-                  <a:srgbClr val="1F2937"/>
-                </a:solidFill>
-                <a:latin typeface="Arial" pitchFamily="34" charset="0"/>
-                <a:ea typeface="Arial" pitchFamily="34" charset="-122"/>
-                <a:cs typeface="Arial" pitchFamily="34" charset="-120"/>
-              </a:rPr>
-              <a:t>דבדבני דקל, מ' (2026א). מחזון ורעיון למציאות ממשית [מצגת הרצאה]. ניהול קריירה בארגונים, הקריה האקדמית אונו.</a:t>
-            </a:r>
-            <a:endParaRPr lang="he-IL" sz="1100" dirty="0"/>
-          </a:p>
-          <a:p>
-            <a:pPr algn="r" indent="0" marL="0">
-              <a:spcAft>
-                <a:spcPts val="500"/>
-              </a:spcAft>
-              <a:buNone/>
-            </a:pPr>
-            <a:r>
-              <a:rPr lang="he-IL" altLang="en-US" sz="1100" dirty="0">
-                <a:solidFill>
-                  <a:srgbClr val="1F2937"/>
-                </a:solidFill>
-                <a:latin typeface="Arial" pitchFamily="34" charset="0"/>
-                <a:ea typeface="Arial" pitchFamily="34" charset="-122"/>
-                <a:cs typeface="Arial" pitchFamily="34" charset="-120"/>
-              </a:rPr>
-              <a:t>דבדבני דקל, מ' (2026ב). עסקים בצל הקורונה: ממשבר להזדמנות, איך עושים את זה? [מצגת הרצאה]. ניהול קריירה בארגונים, הקריה האקדמית אונו.</a:t>
-            </a:r>
-            <a:endParaRPr lang="he-IL" sz="1100" dirty="0"/>
-          </a:p>
-          <a:p>
-            <a:pPr algn="r" indent="0" marL="0">
-              <a:spcAft>
-                <a:spcPts val="500"/>
-              </a:spcAft>
-              <a:buNone/>
-            </a:pPr>
-            <a:r>
-              <a:rPr lang="he-IL" altLang="en-US" sz="1100" dirty="0">
-                <a:solidFill>
-                  <a:srgbClr val="1F2937"/>
-                </a:solidFill>
-                <a:latin typeface="Arial" pitchFamily="34" charset="0"/>
-                <a:ea typeface="Arial" pitchFamily="34" charset="-122"/>
-                <a:cs typeface="Arial" pitchFamily="34" charset="-120"/>
-              </a:rPr>
-              <a:t>דבדבני דקל, מ' (2026ג). ניתוח הסרט "השטן לובשת פראדה" לפי תיאוריות קריירה [מצגת הרצאה]. ניהול קריירה בארגונים, הקריה האקדמית אונו.</a:t>
             </a:r>
             <a:endParaRPr lang="he-IL" sz="1100" dirty="0"/>
           </a:p>

--- a/career-management-final-project/ניהול קריירה - התמודדות עם חוסר ודאות תעסוקתי - מצגת.pptx
+++ b/career-management-final-project/ניהול קריירה - התמודדות עם חוסר ודאות תעסוקתי - מצגת.pptx
@@ -21,9 +21,10 @@
     <p:sldId id="269" r:id="rId15"/>
     <p:sldId id="270" r:id="rId16"/>
     <p:sldId id="271" r:id="rId17"/>
+    <p:sldId id="272" r:id="rId18"/>
   </p:sldIdLst>
   <p:notesMasterIdLst>
-    <p:notesMasterId r:id="rId18"/>
+    <p:notesMasterId r:id="rId19"/>
   </p:notesMasterIdLst>
   <p:sldSz cx="12192000" cy="6858000"/>
   <p:notesSz cx="6858000" cy="12192000"/>
@@ -1268,7 +1269,7 @@
           <a:p>
             <a:r>
               <a:rPr lang="en-US" dirty="0"/>
-              <a:t>להגיד את הביקורת בקול. ועדיין, זה המאמר שנתן לנו הכי הרבה מה לעשות מחר בבוקר.</a:t>
+              <a:t>שקופית קצרה: להראות שהמאמר לא מחליף את הקורס אלא נותן לו ראיות. לעצור על שורה אחת בטבלה, למשל הרצברג: המניעים = התקרבות, ההיגייניים = הימנעות.</a:t>
             </a:r>
             <a:endParaRPr lang="en-US" dirty="0"/>
           </a:p>
@@ -1356,7 +1357,7 @@
           <a:p>
             <a:r>
               <a:rPr lang="en-US" dirty="0"/>
-              <a:t>להקרין כ-90 שניות (לבדוק את הטיים-קוד מראש). לחבר: "לבחור במה להתמקד" זה בדיוק לעצב את התפקיד סביב מה שבשליטתי.</a:t>
+              <a:t>להגיד את הביקורת בקול. ועדיין, זה המאמר שנתן לנו הכי הרבה מה לעשות מחר בבוקר.</a:t>
             </a:r>
             <a:endParaRPr lang="en-US" dirty="0"/>
           </a:p>
@@ -1444,7 +1445,7 @@
           <a:p>
             <a:r>
               <a:rPr lang="en-US" dirty="0"/>
-              <a:t>זה הכלי שאנחנו משאירים לכיתה. ארבעה צרכים, שאלה אחת לכל צורך, ופעולות שאפשר לעשות גם במשרה סטודנטיאלית. ניתוק והרפיה חשובים להתאוששות, אבל לפי המאמר לא משנים את תפיסת העבודה.</a:t>
+              <a:t>להקרין כ-90 שניות (לבדוק את הטיים-קוד מראש). לחבר: "לבחור במה להתמקד" זה בדיוק לעצב את התפקיד סביב מה שבשליטתי.</a:t>
             </a:r>
             <a:endParaRPr lang="en-US" dirty="0"/>
           </a:p>
@@ -1532,7 +1533,7 @@
           <a:p>
             <a:r>
               <a:rPr lang="en-US" dirty="0"/>
-              <a:t>לחלק כרטיסיות מודפסות או להשאיר את השקופית. אחרי השיתוף לחבר לממצא: "פעולות כאלה, לפי המאמר, מנבאות עלייה בבהירות, בשליטה ובמשמעות חצי שנה מאוחר יותר. ושימו לב: אף אחד לא בחר 'לנוח יותר'. זה נכון, וזה גם מה שהמאמר מצא".</a:t>
+              <a:t>זה הכלי שאנחנו משאירים לכיתה. ארבעה צרכים, שאלה אחת לכל צורך, ופעולות שאפשר לעשות גם במשרה סטודנטיאלית. ניתוק והרפיה חשובים להתאוששות, אבל לפי המאמר לא משנים את תפיסת העבודה.</a:t>
             </a:r>
             <a:endParaRPr lang="en-US" dirty="0"/>
           </a:p>
@@ -1620,7 +1621,7 @@
           <a:p>
             <a:r>
               <a:rPr lang="en-US" dirty="0"/>
-              <a:t>לחזור לתוצאות הסקר מהפתיחה: "מי שסימן נמוך בשאלה 1 או 2: המאמר אומר שזה לא גזירת גורל, ושהפעולה שכתבתם עכשיו היא בדיוק הדרך לשנות את זה". לסיים במסר ולפתוח לשאלות.</a:t>
+              <a:t>לחלק כרטיסיות מודפסות או להשאיר את השקופית. אחרי השיתוף לחבר לממצא: "פעולות כאלה, לפי המאמר, מנבאות עלייה בבהירות, בשליטה ובמשמעות חצי שנה מאוחר יותר. ושימו לב: אף אחד לא בחר 'לנוח יותר'. זה נכון, וזה גם מה שהמאמר מצא".</a:t>
             </a:r>
             <a:endParaRPr lang="en-US" dirty="0"/>
           </a:p>
@@ -1708,7 +1709,7 @@
           <a:p>
             <a:r>
               <a:rPr lang="en-US" dirty="0"/>
-              <a:t/>
+              <a:t>לחזור לתוצאות הסקר מהפתיחה: "מי שסימן נמוך בשאלה 1 או 2: המאמר אומר שזה לא גזירת גורל, ושהפעולה שכתבתם עכשיו היא בדיוק הדרך לשנות את זה". לסיים במסר ולפתוח לשאלות.</a:t>
             </a:r>
             <a:endParaRPr lang="en-US" dirty="0"/>
           </a:p>
@@ -1732,6 +1733,94 @@
             <a:fld id="{F7021451-1387-4CA6-816F-3879F97B5CBC}" type="slidenum">
               <a:rPr lang="en-US"/>
               <a:t>16</a:t>
+            </a:fld>
+            <a:endParaRPr lang="en-US"/>
+          </a:p>
+        </p:txBody>
+      </p:sp>
+    </p:spTree>
+    <p:extLst>
+      <p:ext uri="{BB962C8B-B14F-4D97-AF65-F5344CB8AC3E}">
+        <p14:creationId xmlns:p14="http://schemas.microsoft.com/office/powerpoint/2010/main" val="1024086991"/>
+      </p:ext>
+    </p:extLst>
+  </p:cSld>
+  <p:clrMapOvr>
+    <a:masterClrMapping/>
+  </p:clrMapOvr>
+</p:notes>
+</file>
+
+<file path=ppt/notesSlides/notesSlide17.xml><?xml version="1.0" encoding="utf-8"?>
+<p:notes xmlns:a="http://schemas.openxmlformats.org/drawingml/2006/main" xmlns:r="http://schemas.openxmlformats.org/officeDocument/2006/relationships" xmlns:p="http://schemas.openxmlformats.org/presentationml/2006/main">
+  <p:cSld>
+    <p:spTree>
+      <p:nvGrpSpPr>
+        <p:cNvPr id="1" name=""/>
+        <p:cNvGrpSpPr/>
+        <p:nvPr/>
+      </p:nvGrpSpPr>
+      <p:grpSpPr>
+        <a:xfrm>
+          <a:off x="0" y="0"/>
+          <a:ext cx="0" cy="0"/>
+          <a:chOff x="0" y="0"/>
+          <a:chExt cx="0" cy="0"/>
+        </a:xfrm>
+      </p:grpSpPr>
+      <p:sp>
+        <p:nvSpPr>
+          <p:cNvPr id="2" name="Slide Image Placeholder 1"/>
+          <p:cNvSpPr>
+            <a:spLocks noGrp="1" noRot="1" noChangeAspect="1"/>
+          </p:cNvSpPr>
+          <p:nvPr>
+            <p:ph type="sldImg"/>
+          </p:nvPr>
+        </p:nvSpPr>
+        <p:spPr/>
+      </p:sp>
+      <p:sp>
+        <p:nvSpPr>
+          <p:cNvPr id="3" name="Notes Placeholder 2"/>
+          <p:cNvSpPr>
+            <a:spLocks noGrp="1"/>
+          </p:cNvSpPr>
+          <p:nvPr>
+            <p:ph type="body" idx="1"/>
+          </p:nvPr>
+        </p:nvSpPr>
+        <p:spPr/>
+        <p:txBody>
+          <a:bodyPr/>
+          <a:lstStyle/>
+          <a:p>
+            <a:r>
+              <a:rPr lang="en-US" dirty="0"/>
+              <a:t/>
+            </a:r>
+            <a:endParaRPr lang="en-US" dirty="0"/>
+          </a:p>
+        </p:txBody>
+      </p:sp>
+      <p:sp>
+        <p:nvSpPr>
+          <p:cNvPr id="4" name="Slide Number Placeholder 3"/>
+          <p:cNvSpPr>
+            <a:spLocks noGrp="1"/>
+          </p:cNvSpPr>
+          <p:nvPr>
+            <p:ph type="sldNum" sz="quarter" idx="10"/>
+          </p:nvPr>
+        </p:nvSpPr>
+        <p:spPr/>
+        <p:txBody>
+          <a:bodyPr/>
+          <a:lstStyle/>
+          <a:p>
+            <a:fld id="{F7021451-1387-4CA6-816F-3879F97B5CBC}" type="slidenum">
+              <a:rPr lang="en-US"/>
+              <a:t>17</a:t>
             </a:fld>
             <a:endParaRPr lang="en-US"/>
           </a:p>
@@ -2818,26 +2907,52 @@
         </p:nvSpPr>
         <p:spPr>
           <a:xfrm>
-            <a:off x="10424160" y="-1920240"/>
-            <a:ext cx="3291840" cy="3291840"/>
-          </a:xfrm>
-          <a:prstGeom prst="ellipse">
-            <a:avLst/>
+            <a:off x="9966960" y="320040"/>
+            <a:ext cx="1691640" cy="1691640"/>
+          </a:xfrm>
+          <a:prstGeom prst="roundRect">
+            <a:avLst>
+              <a:gd name="adj" fmla="val 8108"/>
+            </a:avLst>
           </a:prstGeom>
           <a:solidFill>
-            <a:srgbClr val="FCA311"/>
+            <a:srgbClr val="FFFFFF"/>
           </a:solidFill>
           <a:ln w="12700">
             <a:solidFill>
-              <a:srgbClr val="FCA311"/>
+              <a:srgbClr val="FFFFFF"/>
             </a:solidFill>
             <a:prstDash val="solid"/>
           </a:ln>
         </p:spPr>
       </p:sp>
-      <p:sp>
-        <p:nvSpPr>
-          <p:cNvPr id="4" name="Text 2"/>
+      <p:pic>
+        <p:nvPicPr>
+          <p:cNvPr id="4" name="Image 0" descr="/tmp/claude-0/-home-user-clickwriting-landing/d2627f80-c93a-5206-ba5d-647532b375c9/scratchpad/ono-logo.jpg">    </p:cNvPr>
+          <p:cNvPicPr>
+            <a:picLocks noChangeAspect="1"/>
+          </p:cNvPicPr>
+          <p:nvPr/>
+        </p:nvPicPr>
+        <p:blipFill>
+          <a:blip r:embed="rId1"/>
+          <a:stretch>
+            <a:fillRect/>
+          </a:stretch>
+        </p:blipFill>
+        <p:spPr>
+          <a:xfrm>
+            <a:off x="10058400" y="411480"/>
+            <a:ext cx="1508760" cy="1508760"/>
+          </a:xfrm>
+          <a:prstGeom prst="rect">
+            <a:avLst/>
+          </a:prstGeom>
+        </p:spPr>
+      </p:pic>
+      <p:sp>
+        <p:nvSpPr>
+          <p:cNvPr id="5" name="Text 2"/>
           <p:cNvSpPr txBox="1"/>
           <p:nvPr/>
         </p:nvSpPr>
@@ -2876,7 +2991,7 @@
       </p:sp>
       <p:sp>
         <p:nvSpPr>
-          <p:cNvPr id="5" name="Text 3"/>
+          <p:cNvPr id="6" name="Text 3"/>
           <p:cNvSpPr txBox="1"/>
           <p:nvPr/>
         </p:nvSpPr>
@@ -2915,7 +3030,7 @@
       </p:sp>
       <p:sp>
         <p:nvSpPr>
-          <p:cNvPr id="6" name="Text 4"/>
+          <p:cNvPr id="7" name="Text 4"/>
           <p:cNvSpPr txBox="1"/>
           <p:nvPr/>
         </p:nvSpPr>
@@ -2954,7 +3069,7 @@
       </p:sp>
       <p:sp>
         <p:nvSpPr>
-          <p:cNvPr id="7" name="Text 5"/>
+          <p:cNvPr id="8" name="Text 5"/>
           <p:cNvSpPr txBox="1"/>
           <p:nvPr/>
         </p:nvSpPr>
@@ -2993,7 +3108,7 @@
       </p:sp>
       <p:sp>
         <p:nvSpPr>
-          <p:cNvPr id="8" name="Shape 6"/>
+          <p:cNvPr id="9" name="Shape 6"/>
           <p:cNvSpPr/>
           <p:nvPr/>
         </p:nvSpPr>
@@ -3027,7 +3142,7 @@
       </p:sp>
       <p:sp>
         <p:nvSpPr>
-          <p:cNvPr id="9" name="Text 7"/>
+          <p:cNvPr id="10" name="Text 7"/>
           <p:cNvSpPr txBox="1"/>
           <p:nvPr/>
         </p:nvSpPr>
@@ -3066,7 +3181,7 @@
       </p:sp>
       <p:sp>
         <p:nvSpPr>
-          <p:cNvPr id="10" name="Text 8"/>
+          <p:cNvPr id="11" name="Text 8"/>
           <p:cNvSpPr txBox="1"/>
           <p:nvPr/>
         </p:nvSpPr>
@@ -3148,7 +3263,7 @@
       </p:sp>
       <p:sp>
         <p:nvSpPr>
-          <p:cNvPr id="11" name="Text 9"/>
+          <p:cNvPr id="12" name="Text 9"/>
           <p:cNvSpPr txBox="1"/>
           <p:nvPr/>
         </p:nvSpPr>
@@ -3951,6 +4066,1217 @@
                 <a:ea typeface="Arial" pitchFamily="34" charset="-122"/>
                 <a:cs typeface="Arial" pitchFamily="34" charset="-120"/>
               </a:rPr>
+              <a:t>חיבור לחומר הנלמד בקורס</a:t>
+            </a:r>
+            <a:endParaRPr lang="he-IL" sz="3000" dirty="0"/>
+          </a:p>
+        </p:txBody>
+      </p:sp>
+      <p:graphicFrame>
+        <p:nvGraphicFramePr>
+          <p:cNvPr id="12" name="Table 0"/>
+          <p:cNvGraphicFramePr>
+            <a:graphicFrameLocks noGrp="1"/>
+          </p:cNvGraphicFramePr>
+          <p:nvPr>
+            <p:extLst>
+              <p:ext uri="{D42A27DB-BD31-4B8C-83A1-F6EECF244321}">
+                <p14:modId xmlns:p14="http://schemas.microsoft.com/office/powerpoint/2010/main" val="1579011935"/>
+              </p:ext>
+            </p:extLst>
+          </p:nvPr>
+        </p:nvGraphicFramePr>
+        <p:xfrm>
+          <a:off x="5943600" y="1280160"/>
+          <a:ext cx="5696712" cy="914400"/>
+        </p:xfrm>
+        <a:graphic>
+          <a:graphicData uri="http://schemas.openxmlformats.org/drawingml/2006/table">
+            <a:tbl>
+              <a:tblPr/>
+              <a:tblGrid>
+                <a:gridCol w="2926080"/>
+                <a:gridCol w="2770632"/>
+              </a:tblGrid>
+              <a:tr h="411480">
+                <a:tc>
+                  <a:txBody>
+                    <a:bodyPr/>
+                    <a:lstStyle/>
+                    <a:p>
+                      <a:pPr rtl="1" algn="r" indent="0" marL="0">
+                        <a:buNone/>
+                      </a:pPr>
+                      <a:r>
+                        <a:rPr lang="en-US" sz="1300" b="1" dirty="0">
+                          <a:solidFill>
+                            <a:srgbClr val="FFFFFF"/>
+                          </a:solidFill>
+                          <a:latin typeface="Arial" pitchFamily="34" charset="0"/>
+                          <a:ea typeface="Arial" pitchFamily="34" charset="-122"/>
+                          <a:cs typeface="Arial" pitchFamily="34" charset="-120"/>
+                        </a:rPr>
+                        <a:t>המקבילה במאמר</a:t>
+                      </a:r>
+                      <a:endParaRPr lang="en-US" sz="1300" dirty="0">
+                        <a:latin typeface="Arial" charset="0"/>
+                        <a:ea typeface="Arial" charset="0"/>
+                        <a:cs typeface="Arial" charset="0"/>
+                      </a:endParaRPr>
+                    </a:p>
+                  </a:txBody>
+                  <a:tcPr marL="54864" marR="54864" marT="54864" marB="54864" anchor="ctr">
+                    <a:lnL w="12700" cap="flat" cmpd="sng" algn="ctr">
+                      <a:solidFill>
+                        <a:srgbClr val="D1D5DB"/>
+                      </a:solidFill>
+                      <a:prstDash val="solid"/>
+                      <a:round/>
+                      <a:headEnd type="none" w="med" len="med"/>
+                      <a:tailEnd type="none" w="med" len="med"/>
+                    </a:lnL>
+                    <a:lnR w="12700" cap="flat" cmpd="sng" algn="ctr">
+                      <a:solidFill>
+                        <a:srgbClr val="D1D5DB"/>
+                      </a:solidFill>
+                      <a:prstDash val="solid"/>
+                      <a:round/>
+                      <a:headEnd type="none" w="med" len="med"/>
+                      <a:tailEnd type="none" w="med" len="med"/>
+                    </a:lnR>
+                    <a:lnT w="12700" cap="flat" cmpd="sng" algn="ctr">
+                      <a:solidFill>
+                        <a:srgbClr val="D1D5DB"/>
+                      </a:solidFill>
+                      <a:prstDash val="solid"/>
+                      <a:round/>
+                      <a:headEnd type="none" w="med" len="med"/>
+                      <a:tailEnd type="none" w="med" len="med"/>
+                    </a:lnT>
+                    <a:lnB w="12700" cap="flat" cmpd="sng" algn="ctr">
+                      <a:solidFill>
+                        <a:srgbClr val="D1D5DB"/>
+                      </a:solidFill>
+                      <a:prstDash val="solid"/>
+                      <a:round/>
+                      <a:headEnd type="none" w="med" len="med"/>
+                      <a:tailEnd type="none" w="med" len="med"/>
+                    </a:lnB>
+                    <a:solidFill>
+                      <a:srgbClr val="14213D"/>
+                    </a:solidFill>
+                  </a:tcPr>
+                </a:tc>
+                <a:tc>
+                  <a:txBody>
+                    <a:bodyPr/>
+                    <a:lstStyle/>
+                    <a:p>
+                      <a:pPr rtl="1" algn="r" indent="0" marL="0">
+                        <a:buNone/>
+                      </a:pPr>
+                      <a:r>
+                        <a:rPr lang="en-US" sz="1300" b="1" dirty="0">
+                          <a:solidFill>
+                            <a:srgbClr val="FFFFFF"/>
+                          </a:solidFill>
+                          <a:latin typeface="Arial" pitchFamily="34" charset="0"/>
+                          <a:ea typeface="Arial" pitchFamily="34" charset="-122"/>
+                          <a:cs typeface="Arial" pitchFamily="34" charset="-120"/>
+                        </a:rPr>
+                        <a:t>מושג מהקורס</a:t>
+                      </a:r>
+                      <a:endParaRPr lang="en-US" sz="1300" dirty="0">
+                        <a:latin typeface="Arial" charset="0"/>
+                        <a:ea typeface="Arial" charset="0"/>
+                        <a:cs typeface="Arial" charset="0"/>
+                      </a:endParaRPr>
+                    </a:p>
+                  </a:txBody>
+                  <a:tcPr marL="54864" marR="54864" marT="54864" marB="54864" anchor="ctr">
+                    <a:lnL w="12700" cap="flat" cmpd="sng" algn="ctr">
+                      <a:solidFill>
+                        <a:srgbClr val="D1D5DB"/>
+                      </a:solidFill>
+                      <a:prstDash val="solid"/>
+                      <a:round/>
+                      <a:headEnd type="none" w="med" len="med"/>
+                      <a:tailEnd type="none" w="med" len="med"/>
+                    </a:lnL>
+                    <a:lnR w="12700" cap="flat" cmpd="sng" algn="ctr">
+                      <a:solidFill>
+                        <a:srgbClr val="D1D5DB"/>
+                      </a:solidFill>
+                      <a:prstDash val="solid"/>
+                      <a:round/>
+                      <a:headEnd type="none" w="med" len="med"/>
+                      <a:tailEnd type="none" w="med" len="med"/>
+                    </a:lnR>
+                    <a:lnT w="12700" cap="flat" cmpd="sng" algn="ctr">
+                      <a:solidFill>
+                        <a:srgbClr val="D1D5DB"/>
+                      </a:solidFill>
+                      <a:prstDash val="solid"/>
+                      <a:round/>
+                      <a:headEnd type="none" w="med" len="med"/>
+                      <a:tailEnd type="none" w="med" len="med"/>
+                    </a:lnT>
+                    <a:lnB w="12700" cap="flat" cmpd="sng" algn="ctr">
+                      <a:solidFill>
+                        <a:srgbClr val="D1D5DB"/>
+                      </a:solidFill>
+                      <a:prstDash val="solid"/>
+                      <a:round/>
+                      <a:headEnd type="none" w="med" len="med"/>
+                      <a:tailEnd type="none" w="med" len="med"/>
+                    </a:lnB>
+                    <a:solidFill>
+                      <a:srgbClr val="14213D"/>
+                    </a:solidFill>
+                  </a:tcPr>
+                </a:tc>
+              </a:tr>
+              <a:tr h="685800">
+                <a:tc>
+                  <a:txBody>
+                    <a:bodyPr/>
+                    <a:lstStyle/>
+                    <a:p>
+                      <a:pPr rtl="1" algn="r" indent="0" marL="0">
+                        <a:buNone/>
+                      </a:pPr>
+                      <a:r>
+                        <a:rPr lang="en-US" sz="1150" dirty="0">
+                          <a:solidFill>
+                            <a:srgbClr val="1F2937"/>
+                          </a:solidFill>
+                          <a:latin typeface="Arial" pitchFamily="34" charset="0"/>
+                          <a:ea typeface="Arial" pitchFamily="34" charset="-122"/>
+                          <a:cs typeface="Arial" pitchFamily="34" charset="-120"/>
+                        </a:rPr>
+                        <a:t>שייכות, משמעות, מיומנות: צרכי ההתקרבות שבונים תחושת קוהרנטיות</a:t>
+                      </a:r>
+                      <a:endParaRPr lang="en-US" sz="1150" dirty="0">
+                        <a:latin typeface="Arial" charset="0"/>
+                        <a:ea typeface="Arial" charset="0"/>
+                        <a:cs typeface="Arial" charset="0"/>
+                      </a:endParaRPr>
+                    </a:p>
+                  </a:txBody>
+                  <a:tcPr marL="54864" marR="54864" marT="54864" marB="54864" anchor="ctr">
+                    <a:lnL w="12700" cap="flat" cmpd="sng" algn="ctr">
+                      <a:solidFill>
+                        <a:srgbClr val="D1D5DB"/>
+                      </a:solidFill>
+                      <a:prstDash val="solid"/>
+                      <a:round/>
+                      <a:headEnd type="none" w="med" len="med"/>
+                      <a:tailEnd type="none" w="med" len="med"/>
+                    </a:lnL>
+                    <a:lnR w="12700" cap="flat" cmpd="sng" algn="ctr">
+                      <a:solidFill>
+                        <a:srgbClr val="D1D5DB"/>
+                      </a:solidFill>
+                      <a:prstDash val="solid"/>
+                      <a:round/>
+                      <a:headEnd type="none" w="med" len="med"/>
+                      <a:tailEnd type="none" w="med" len="med"/>
+                    </a:lnR>
+                    <a:lnT w="12700" cap="flat" cmpd="sng" algn="ctr">
+                      <a:solidFill>
+                        <a:srgbClr val="D1D5DB"/>
+                      </a:solidFill>
+                      <a:prstDash val="solid"/>
+                      <a:round/>
+                      <a:headEnd type="none" w="med" len="med"/>
+                      <a:tailEnd type="none" w="med" len="med"/>
+                    </a:lnT>
+                    <a:lnB w="12700" cap="flat" cmpd="sng" algn="ctr">
+                      <a:solidFill>
+                        <a:srgbClr val="D1D5DB"/>
+                      </a:solidFill>
+                      <a:prstDash val="solid"/>
+                      <a:round/>
+                      <a:headEnd type="none" w="med" len="med"/>
+                      <a:tailEnd type="none" w="med" len="med"/>
+                    </a:lnB>
+                    <a:solidFill>
+                      <a:srgbClr val="FFFFFF"/>
+                    </a:solidFill>
+                  </a:tcPr>
+                </a:tc>
+                <a:tc>
+                  <a:txBody>
+                    <a:bodyPr/>
+                    <a:lstStyle/>
+                    <a:p>
+                      <a:pPr rtl="1" algn="r" indent="0" marL="0">
+                        <a:buNone/>
+                      </a:pPr>
+                      <a:r>
+                        <a:rPr lang="en-US" sz="1150" b="1" dirty="0">
+                          <a:solidFill>
+                            <a:srgbClr val="1F2937"/>
+                          </a:solidFill>
+                          <a:latin typeface="Arial" pitchFamily="34" charset="0"/>
+                          <a:ea typeface="Arial" pitchFamily="34" charset="-122"/>
+                          <a:cs typeface="Arial" pitchFamily="34" charset="-120"/>
+                        </a:rPr>
+                        <a:t>שלושת סלי הכלים: רשת אנשים, זהות מקצועית, התפתחות</a:t>
+                      </a:r>
+                      <a:endParaRPr lang="en-US" sz="1150" dirty="0">
+                        <a:latin typeface="Arial" charset="0"/>
+                        <a:ea typeface="Arial" charset="0"/>
+                        <a:cs typeface="Arial" charset="0"/>
+                      </a:endParaRPr>
+                    </a:p>
+                  </a:txBody>
+                  <a:tcPr marL="54864" marR="54864" marT="54864" marB="54864" anchor="ctr">
+                    <a:lnL w="12700" cap="flat" cmpd="sng" algn="ctr">
+                      <a:solidFill>
+                        <a:srgbClr val="D1D5DB"/>
+                      </a:solidFill>
+                      <a:prstDash val="solid"/>
+                      <a:round/>
+                      <a:headEnd type="none" w="med" len="med"/>
+                      <a:tailEnd type="none" w="med" len="med"/>
+                    </a:lnL>
+                    <a:lnR w="12700" cap="flat" cmpd="sng" algn="ctr">
+                      <a:solidFill>
+                        <a:srgbClr val="D1D5DB"/>
+                      </a:solidFill>
+                      <a:prstDash val="solid"/>
+                      <a:round/>
+                      <a:headEnd type="none" w="med" len="med"/>
+                      <a:tailEnd type="none" w="med" len="med"/>
+                    </a:lnR>
+                    <a:lnT w="12700" cap="flat" cmpd="sng" algn="ctr">
+                      <a:solidFill>
+                        <a:srgbClr val="D1D5DB"/>
+                      </a:solidFill>
+                      <a:prstDash val="solid"/>
+                      <a:round/>
+                      <a:headEnd type="none" w="med" len="med"/>
+                      <a:tailEnd type="none" w="med" len="med"/>
+                    </a:lnT>
+                    <a:lnB w="12700" cap="flat" cmpd="sng" algn="ctr">
+                      <a:solidFill>
+                        <a:srgbClr val="D1D5DB"/>
+                      </a:solidFill>
+                      <a:prstDash val="solid"/>
+                      <a:round/>
+                      <a:headEnd type="none" w="med" len="med"/>
+                      <a:tailEnd type="none" w="med" len="med"/>
+                    </a:lnB>
+                    <a:solidFill>
+                      <a:srgbClr val="FFFFFF"/>
+                    </a:solidFill>
+                  </a:tcPr>
+                </a:tc>
+              </a:tr>
+              <a:tr h="685800">
+                <a:tc>
+                  <a:txBody>
+                    <a:bodyPr/>
+                    <a:lstStyle/>
+                    <a:p>
+                      <a:pPr rtl="1" algn="r" indent="0" marL="0">
+                        <a:buNone/>
+                      </a:pPr>
+                      <a:r>
+                        <a:rPr lang="en-US" sz="1150" dirty="0">
+                          <a:solidFill>
+                            <a:srgbClr val="1F2937"/>
+                          </a:solidFill>
+                          <a:latin typeface="Arial" pitchFamily="34" charset="0"/>
+                          <a:ea typeface="Arial" pitchFamily="34" charset="-122"/>
+                          <a:cs typeface="Arial" pitchFamily="34" charset="-120"/>
+                        </a:rPr>
+                        <a:t>צורך המשמעות</a:t>
+                      </a:r>
+                      <a:endParaRPr lang="en-US" sz="1150" dirty="0">
+                        <a:latin typeface="Arial" charset="0"/>
+                        <a:ea typeface="Arial" charset="0"/>
+                        <a:cs typeface="Arial" charset="0"/>
+                      </a:endParaRPr>
+                    </a:p>
+                  </a:txBody>
+                  <a:tcPr marL="54864" marR="54864" marT="54864" marB="54864" anchor="ctr">
+                    <a:lnL w="12700" cap="flat" cmpd="sng" algn="ctr">
+                      <a:solidFill>
+                        <a:srgbClr val="D1D5DB"/>
+                      </a:solidFill>
+                      <a:prstDash val="solid"/>
+                      <a:round/>
+                      <a:headEnd type="none" w="med" len="med"/>
+                      <a:tailEnd type="none" w="med" len="med"/>
+                    </a:lnL>
+                    <a:lnR w="12700" cap="flat" cmpd="sng" algn="ctr">
+                      <a:solidFill>
+                        <a:srgbClr val="D1D5DB"/>
+                      </a:solidFill>
+                      <a:prstDash val="solid"/>
+                      <a:round/>
+                      <a:headEnd type="none" w="med" len="med"/>
+                      <a:tailEnd type="none" w="med" len="med"/>
+                    </a:lnR>
+                    <a:lnT w="12700" cap="flat" cmpd="sng" algn="ctr">
+                      <a:solidFill>
+                        <a:srgbClr val="D1D5DB"/>
+                      </a:solidFill>
+                      <a:prstDash val="solid"/>
+                      <a:round/>
+                      <a:headEnd type="none" w="med" len="med"/>
+                      <a:tailEnd type="none" w="med" len="med"/>
+                    </a:lnT>
+                    <a:lnB w="12700" cap="flat" cmpd="sng" algn="ctr">
+                      <a:solidFill>
+                        <a:srgbClr val="D1D5DB"/>
+                      </a:solidFill>
+                      <a:prstDash val="solid"/>
+                      <a:round/>
+                      <a:headEnd type="none" w="med" len="med"/>
+                      <a:tailEnd type="none" w="med" len="med"/>
+                    </a:lnB>
+                    <a:solidFill>
+                      <a:srgbClr val="FFFFFF"/>
+                    </a:solidFill>
+                  </a:tcPr>
+                </a:tc>
+                <a:tc>
+                  <a:txBody>
+                    <a:bodyPr/>
+                    <a:lstStyle/>
+                    <a:p>
+                      <a:pPr rtl="1" algn="r" indent="0" marL="0">
+                        <a:buNone/>
+                      </a:pPr>
+                      <a:r>
+                        <a:rPr lang="en-US" sz="1150" b="1" dirty="0">
+                          <a:solidFill>
+                            <a:srgbClr val="1F2937"/>
+                          </a:solidFill>
+                          <a:latin typeface="Arial" pitchFamily="34" charset="0"/>
+                          <a:ea typeface="Arial" pitchFamily="34" charset="-122"/>
+                          <a:cs typeface="Arial" pitchFamily="34" charset="-120"/>
+                        </a:rPr>
+                        <a:t>חמש השאלות של הזהות המקצועית: איזה ערך אני מביא, למי הוא נחוץ</a:t>
+                      </a:r>
+                      <a:endParaRPr lang="en-US" sz="1150" dirty="0">
+                        <a:latin typeface="Arial" charset="0"/>
+                        <a:ea typeface="Arial" charset="0"/>
+                        <a:cs typeface="Arial" charset="0"/>
+                      </a:endParaRPr>
+                    </a:p>
+                  </a:txBody>
+                  <a:tcPr marL="54864" marR="54864" marT="54864" marB="54864" anchor="ctr">
+                    <a:lnL w="12700" cap="flat" cmpd="sng" algn="ctr">
+                      <a:solidFill>
+                        <a:srgbClr val="D1D5DB"/>
+                      </a:solidFill>
+                      <a:prstDash val="solid"/>
+                      <a:round/>
+                      <a:headEnd type="none" w="med" len="med"/>
+                      <a:tailEnd type="none" w="med" len="med"/>
+                    </a:lnL>
+                    <a:lnR w="12700" cap="flat" cmpd="sng" algn="ctr">
+                      <a:solidFill>
+                        <a:srgbClr val="D1D5DB"/>
+                      </a:solidFill>
+                      <a:prstDash val="solid"/>
+                      <a:round/>
+                      <a:headEnd type="none" w="med" len="med"/>
+                      <a:tailEnd type="none" w="med" len="med"/>
+                    </a:lnR>
+                    <a:lnT w="12700" cap="flat" cmpd="sng" algn="ctr">
+                      <a:solidFill>
+                        <a:srgbClr val="D1D5DB"/>
+                      </a:solidFill>
+                      <a:prstDash val="solid"/>
+                      <a:round/>
+                      <a:headEnd type="none" w="med" len="med"/>
+                      <a:tailEnd type="none" w="med" len="med"/>
+                    </a:lnT>
+                    <a:lnB w="12700" cap="flat" cmpd="sng" algn="ctr">
+                      <a:solidFill>
+                        <a:srgbClr val="D1D5DB"/>
+                      </a:solidFill>
+                      <a:prstDash val="solid"/>
+                      <a:round/>
+                      <a:headEnd type="none" w="med" len="med"/>
+                      <a:tailEnd type="none" w="med" len="med"/>
+                    </a:lnB>
+                    <a:solidFill>
+                      <a:srgbClr val="FFFFFF"/>
+                    </a:solidFill>
+                  </a:tcPr>
+                </a:tc>
+              </a:tr>
+              <a:tr h="685800">
+                <a:tc>
+                  <a:txBody>
+                    <a:bodyPr/>
+                    <a:lstStyle/>
+                    <a:p>
+                      <a:pPr rtl="1" algn="r" indent="0" marL="0">
+                        <a:buNone/>
+                      </a:pPr>
+                      <a:r>
+                        <a:rPr lang="en-US" sz="1150" dirty="0">
+                          <a:solidFill>
+                            <a:srgbClr val="1F2937"/>
+                          </a:solidFill>
+                          <a:latin typeface="Arial" pitchFamily="34" charset="0"/>
+                          <a:ea typeface="Arial" pitchFamily="34" charset="-122"/>
+                          <a:cs typeface="Arial" pitchFamily="34" charset="-120"/>
+                        </a:rPr>
+                        <a:t>ספירלת הרווח: כל צעד של עיצוב תפקיד מאפשר את הבא</a:t>
+                      </a:r>
+                      <a:endParaRPr lang="en-US" sz="1150" dirty="0">
+                        <a:latin typeface="Arial" charset="0"/>
+                        <a:ea typeface="Arial" charset="0"/>
+                        <a:cs typeface="Arial" charset="0"/>
+                      </a:endParaRPr>
+                    </a:p>
+                  </a:txBody>
+                  <a:tcPr marL="54864" marR="54864" marT="54864" marB="54864" anchor="ctr">
+                    <a:lnL w="12700" cap="flat" cmpd="sng" algn="ctr">
+                      <a:solidFill>
+                        <a:srgbClr val="D1D5DB"/>
+                      </a:solidFill>
+                      <a:prstDash val="solid"/>
+                      <a:round/>
+                      <a:headEnd type="none" w="med" len="med"/>
+                      <a:tailEnd type="none" w="med" len="med"/>
+                    </a:lnL>
+                    <a:lnR w="12700" cap="flat" cmpd="sng" algn="ctr">
+                      <a:solidFill>
+                        <a:srgbClr val="D1D5DB"/>
+                      </a:solidFill>
+                      <a:prstDash val="solid"/>
+                      <a:round/>
+                      <a:headEnd type="none" w="med" len="med"/>
+                      <a:tailEnd type="none" w="med" len="med"/>
+                    </a:lnR>
+                    <a:lnT w="12700" cap="flat" cmpd="sng" algn="ctr">
+                      <a:solidFill>
+                        <a:srgbClr val="D1D5DB"/>
+                      </a:solidFill>
+                      <a:prstDash val="solid"/>
+                      <a:round/>
+                      <a:headEnd type="none" w="med" len="med"/>
+                      <a:tailEnd type="none" w="med" len="med"/>
+                    </a:lnT>
+                    <a:lnB w="12700" cap="flat" cmpd="sng" algn="ctr">
+                      <a:solidFill>
+                        <a:srgbClr val="D1D5DB"/>
+                      </a:solidFill>
+                      <a:prstDash val="solid"/>
+                      <a:round/>
+                      <a:headEnd type="none" w="med" len="med"/>
+                      <a:tailEnd type="none" w="med" len="med"/>
+                    </a:lnB>
+                    <a:solidFill>
+                      <a:srgbClr val="FFFFFF"/>
+                    </a:solidFill>
+                  </a:tcPr>
+                </a:tc>
+                <a:tc>
+                  <a:txBody>
+                    <a:bodyPr/>
+                    <a:lstStyle/>
+                    <a:p>
+                      <a:pPr rtl="1" algn="r" indent="0" marL="0">
+                        <a:buNone/>
+                      </a:pPr>
+                      <a:r>
+                        <a:rPr lang="en-US" sz="1150" b="1" dirty="0">
+                          <a:solidFill>
+                            <a:srgbClr val="1F2937"/>
+                          </a:solidFill>
+                          <a:latin typeface="Arial" pitchFamily="34" charset="0"/>
+                          <a:ea typeface="Arial" pitchFamily="34" charset="-122"/>
+                          <a:cs typeface="Arial" pitchFamily="34" charset="-120"/>
+                        </a:rPr>
+                        <a:t>קריירה רבודה וקיר הטיפוס</a:t>
+                      </a:r>
+                      <a:endParaRPr lang="en-US" sz="1150" dirty="0">
+                        <a:latin typeface="Arial" charset="0"/>
+                        <a:ea typeface="Arial" charset="0"/>
+                        <a:cs typeface="Arial" charset="0"/>
+                      </a:endParaRPr>
+                    </a:p>
+                  </a:txBody>
+                  <a:tcPr marL="54864" marR="54864" marT="54864" marB="54864" anchor="ctr">
+                    <a:lnL w="12700" cap="flat" cmpd="sng" algn="ctr">
+                      <a:solidFill>
+                        <a:srgbClr val="D1D5DB"/>
+                      </a:solidFill>
+                      <a:prstDash val="solid"/>
+                      <a:round/>
+                      <a:headEnd type="none" w="med" len="med"/>
+                      <a:tailEnd type="none" w="med" len="med"/>
+                    </a:lnL>
+                    <a:lnR w="12700" cap="flat" cmpd="sng" algn="ctr">
+                      <a:solidFill>
+                        <a:srgbClr val="D1D5DB"/>
+                      </a:solidFill>
+                      <a:prstDash val="solid"/>
+                      <a:round/>
+                      <a:headEnd type="none" w="med" len="med"/>
+                      <a:tailEnd type="none" w="med" len="med"/>
+                    </a:lnR>
+                    <a:lnT w="12700" cap="flat" cmpd="sng" algn="ctr">
+                      <a:solidFill>
+                        <a:srgbClr val="D1D5DB"/>
+                      </a:solidFill>
+                      <a:prstDash val="solid"/>
+                      <a:round/>
+                      <a:headEnd type="none" w="med" len="med"/>
+                      <a:tailEnd type="none" w="med" len="med"/>
+                    </a:lnT>
+                    <a:lnB w="12700" cap="flat" cmpd="sng" algn="ctr">
+                      <a:solidFill>
+                        <a:srgbClr val="D1D5DB"/>
+                      </a:solidFill>
+                      <a:prstDash val="solid"/>
+                      <a:round/>
+                      <a:headEnd type="none" w="med" len="med"/>
+                      <a:tailEnd type="none" w="med" len="med"/>
+                    </a:lnB>
+                    <a:solidFill>
+                      <a:srgbClr val="FFFFFF"/>
+                    </a:solidFill>
+                  </a:tcPr>
+                </a:tc>
+              </a:tr>
+              <a:tr h="685800">
+                <a:tc>
+                  <a:txBody>
+                    <a:bodyPr/>
+                    <a:lstStyle/>
+                    <a:p>
+                      <a:pPr rtl="1" algn="r" indent="0" marL="0">
+                        <a:buNone/>
+                      </a:pPr>
+                      <a:r>
+                        <a:rPr lang="en-US" sz="1150" dirty="0">
+                          <a:solidFill>
+                            <a:srgbClr val="1F2937"/>
+                          </a:solidFill>
+                          <a:latin typeface="Arial" pitchFamily="34" charset="0"/>
+                          <a:ea typeface="Arial" pitchFamily="34" charset="-122"/>
+                          <a:cs typeface="Arial" pitchFamily="34" charset="-120"/>
+                        </a:rPr>
+                        <a:t>משמעותיות ומיומנות (מניעים) לעומת צרכי הימנעות (היגייניים)</a:t>
+                      </a:r>
+                      <a:endParaRPr lang="en-US" sz="1150" dirty="0">
+                        <a:latin typeface="Arial" charset="0"/>
+                        <a:ea typeface="Arial" charset="0"/>
+                        <a:cs typeface="Arial" charset="0"/>
+                      </a:endParaRPr>
+                    </a:p>
+                  </a:txBody>
+                  <a:tcPr marL="54864" marR="54864" marT="54864" marB="54864" anchor="ctr">
+                    <a:lnL w="12700" cap="flat" cmpd="sng" algn="ctr">
+                      <a:solidFill>
+                        <a:srgbClr val="D1D5DB"/>
+                      </a:solidFill>
+                      <a:prstDash val="solid"/>
+                      <a:round/>
+                      <a:headEnd type="none" w="med" len="med"/>
+                      <a:tailEnd type="none" w="med" len="med"/>
+                    </a:lnL>
+                    <a:lnR w="12700" cap="flat" cmpd="sng" algn="ctr">
+                      <a:solidFill>
+                        <a:srgbClr val="D1D5DB"/>
+                      </a:solidFill>
+                      <a:prstDash val="solid"/>
+                      <a:round/>
+                      <a:headEnd type="none" w="med" len="med"/>
+                      <a:tailEnd type="none" w="med" len="med"/>
+                    </a:lnR>
+                    <a:lnT w="12700" cap="flat" cmpd="sng" algn="ctr">
+                      <a:solidFill>
+                        <a:srgbClr val="D1D5DB"/>
+                      </a:solidFill>
+                      <a:prstDash val="solid"/>
+                      <a:round/>
+                      <a:headEnd type="none" w="med" len="med"/>
+                      <a:tailEnd type="none" w="med" len="med"/>
+                    </a:lnT>
+                    <a:lnB w="12700" cap="flat" cmpd="sng" algn="ctr">
+                      <a:solidFill>
+                        <a:srgbClr val="D1D5DB"/>
+                      </a:solidFill>
+                      <a:prstDash val="solid"/>
+                      <a:round/>
+                      <a:headEnd type="none" w="med" len="med"/>
+                      <a:tailEnd type="none" w="med" len="med"/>
+                    </a:lnB>
+                    <a:solidFill>
+                      <a:srgbClr val="FFFFFF"/>
+                    </a:solidFill>
+                  </a:tcPr>
+                </a:tc>
+                <a:tc>
+                  <a:txBody>
+                    <a:bodyPr/>
+                    <a:lstStyle/>
+                    <a:p>
+                      <a:pPr rtl="1" algn="r" indent="0" marL="0">
+                        <a:buNone/>
+                      </a:pPr>
+                      <a:r>
+                        <a:rPr lang="en-US" sz="1150" b="1" dirty="0">
+                          <a:solidFill>
+                            <a:srgbClr val="1F2937"/>
+                          </a:solidFill>
+                          <a:latin typeface="Arial" pitchFamily="34" charset="0"/>
+                          <a:ea typeface="Arial" pitchFamily="34" charset="-122"/>
+                          <a:cs typeface="Arial" pitchFamily="34" charset="-120"/>
+                        </a:rPr>
+                        <a:t>הגורמים המניעים וההיגייניים של הרצברג</a:t>
+                      </a:r>
+                      <a:endParaRPr lang="en-US" sz="1150" dirty="0">
+                        <a:latin typeface="Arial" charset="0"/>
+                        <a:ea typeface="Arial" charset="0"/>
+                        <a:cs typeface="Arial" charset="0"/>
+                      </a:endParaRPr>
+                    </a:p>
+                  </a:txBody>
+                  <a:tcPr marL="54864" marR="54864" marT="54864" marB="54864" anchor="ctr">
+                    <a:lnL w="12700" cap="flat" cmpd="sng" algn="ctr">
+                      <a:solidFill>
+                        <a:srgbClr val="D1D5DB"/>
+                      </a:solidFill>
+                      <a:prstDash val="solid"/>
+                      <a:round/>
+                      <a:headEnd type="none" w="med" len="med"/>
+                      <a:tailEnd type="none" w="med" len="med"/>
+                    </a:lnL>
+                    <a:lnR w="12700" cap="flat" cmpd="sng" algn="ctr">
+                      <a:solidFill>
+                        <a:srgbClr val="D1D5DB"/>
+                      </a:solidFill>
+                      <a:prstDash val="solid"/>
+                      <a:round/>
+                      <a:headEnd type="none" w="med" len="med"/>
+                      <a:tailEnd type="none" w="med" len="med"/>
+                    </a:lnR>
+                    <a:lnT w="12700" cap="flat" cmpd="sng" algn="ctr">
+                      <a:solidFill>
+                        <a:srgbClr val="D1D5DB"/>
+                      </a:solidFill>
+                      <a:prstDash val="solid"/>
+                      <a:round/>
+                      <a:headEnd type="none" w="med" len="med"/>
+                      <a:tailEnd type="none" w="med" len="med"/>
+                    </a:lnT>
+                    <a:lnB w="12700" cap="flat" cmpd="sng" algn="ctr">
+                      <a:solidFill>
+                        <a:srgbClr val="D1D5DB"/>
+                      </a:solidFill>
+                      <a:prstDash val="solid"/>
+                      <a:round/>
+                      <a:headEnd type="none" w="med" len="med"/>
+                      <a:tailEnd type="none" w="med" len="med"/>
+                    </a:lnB>
+                    <a:solidFill>
+                      <a:srgbClr val="FFFFFF"/>
+                    </a:solidFill>
+                  </a:tcPr>
+                </a:tc>
+              </a:tr>
+              <a:tr h="685800">
+                <a:tc>
+                  <a:txBody>
+                    <a:bodyPr/>
+                    <a:lstStyle/>
+                    <a:p>
+                      <a:pPr rtl="1" algn="r" indent="0" marL="0">
+                        <a:buNone/>
+                      </a:pPr>
+                      <a:r>
+                        <a:rPr lang="en-US" sz="1150" dirty="0">
+                          <a:solidFill>
+                            <a:srgbClr val="1F2937"/>
+                          </a:solidFill>
+                          <a:latin typeface="Arial" pitchFamily="34" charset="0"/>
+                          <a:ea typeface="Arial" pitchFamily="34" charset="-122"/>
+                          <a:cs typeface="Arial" pitchFamily="34" charset="-120"/>
+                        </a:rPr>
+                        <a:t>צורך האוטונומיה ורכיב המובנות</a:t>
+                      </a:r>
+                      <a:endParaRPr lang="en-US" sz="1150" dirty="0">
+                        <a:latin typeface="Arial" charset="0"/>
+                        <a:ea typeface="Arial" charset="0"/>
+                        <a:cs typeface="Arial" charset="0"/>
+                      </a:endParaRPr>
+                    </a:p>
+                  </a:txBody>
+                  <a:tcPr marL="54864" marR="54864" marT="54864" marB="54864" anchor="ctr">
+                    <a:lnL w="12700" cap="flat" cmpd="sng" algn="ctr">
+                      <a:solidFill>
+                        <a:srgbClr val="D1D5DB"/>
+                      </a:solidFill>
+                      <a:prstDash val="solid"/>
+                      <a:round/>
+                      <a:headEnd type="none" w="med" len="med"/>
+                      <a:tailEnd type="none" w="med" len="med"/>
+                    </a:lnL>
+                    <a:lnR w="12700" cap="flat" cmpd="sng" algn="ctr">
+                      <a:solidFill>
+                        <a:srgbClr val="D1D5DB"/>
+                      </a:solidFill>
+                      <a:prstDash val="solid"/>
+                      <a:round/>
+                      <a:headEnd type="none" w="med" len="med"/>
+                      <a:tailEnd type="none" w="med" len="med"/>
+                    </a:lnR>
+                    <a:lnT w="12700" cap="flat" cmpd="sng" algn="ctr">
+                      <a:solidFill>
+                        <a:srgbClr val="D1D5DB"/>
+                      </a:solidFill>
+                      <a:prstDash val="solid"/>
+                      <a:round/>
+                      <a:headEnd type="none" w="med" len="med"/>
+                      <a:tailEnd type="none" w="med" len="med"/>
+                    </a:lnT>
+                    <a:lnB w="12700" cap="flat" cmpd="sng" algn="ctr">
+                      <a:solidFill>
+                        <a:srgbClr val="D1D5DB"/>
+                      </a:solidFill>
+                      <a:prstDash val="solid"/>
+                      <a:round/>
+                      <a:headEnd type="none" w="med" len="med"/>
+                      <a:tailEnd type="none" w="med" len="med"/>
+                    </a:lnB>
+                    <a:solidFill>
+                      <a:srgbClr val="FFFFFF"/>
+                    </a:solidFill>
+                  </a:tcPr>
+                </a:tc>
+                <a:tc>
+                  <a:txBody>
+                    <a:bodyPr/>
+                    <a:lstStyle/>
+                    <a:p>
+                      <a:pPr rtl="1" algn="r" indent="0" marL="0">
+                        <a:buNone/>
+                      </a:pPr>
+                      <a:r>
+                        <a:rPr lang="en-US" sz="1150" b="1" dirty="0">
+                          <a:solidFill>
+                            <a:srgbClr val="1F2937"/>
+                          </a:solidFill>
+                          <a:latin typeface="Arial" pitchFamily="34" charset="0"/>
+                          <a:ea typeface="Arial" pitchFamily="34" charset="-122"/>
+                          <a:cs typeface="Arial" pitchFamily="34" charset="-120"/>
+                        </a:rPr>
+                        <a:t>עוגני קריירה: אוטונומיה לעומת ביטחון ויציבות</a:t>
+                      </a:r>
+                      <a:endParaRPr lang="en-US" sz="1150" dirty="0">
+                        <a:latin typeface="Arial" charset="0"/>
+                        <a:ea typeface="Arial" charset="0"/>
+                        <a:cs typeface="Arial" charset="0"/>
+                      </a:endParaRPr>
+                    </a:p>
+                  </a:txBody>
+                  <a:tcPr marL="54864" marR="54864" marT="54864" marB="54864" anchor="ctr">
+                    <a:lnL w="12700" cap="flat" cmpd="sng" algn="ctr">
+                      <a:solidFill>
+                        <a:srgbClr val="D1D5DB"/>
+                      </a:solidFill>
+                      <a:prstDash val="solid"/>
+                      <a:round/>
+                      <a:headEnd type="none" w="med" len="med"/>
+                      <a:tailEnd type="none" w="med" len="med"/>
+                    </a:lnL>
+                    <a:lnR w="12700" cap="flat" cmpd="sng" algn="ctr">
+                      <a:solidFill>
+                        <a:srgbClr val="D1D5DB"/>
+                      </a:solidFill>
+                      <a:prstDash val="solid"/>
+                      <a:round/>
+                      <a:headEnd type="none" w="med" len="med"/>
+                      <a:tailEnd type="none" w="med" len="med"/>
+                    </a:lnR>
+                    <a:lnT w="12700" cap="flat" cmpd="sng" algn="ctr">
+                      <a:solidFill>
+                        <a:srgbClr val="D1D5DB"/>
+                      </a:solidFill>
+                      <a:prstDash val="solid"/>
+                      <a:round/>
+                      <a:headEnd type="none" w="med" len="med"/>
+                      <a:tailEnd type="none" w="med" len="med"/>
+                    </a:lnT>
+                    <a:lnB w="12700" cap="flat" cmpd="sng" algn="ctr">
+                      <a:solidFill>
+                        <a:srgbClr val="D1D5DB"/>
+                      </a:solidFill>
+                      <a:prstDash val="solid"/>
+                      <a:round/>
+                      <a:headEnd type="none" w="med" len="med"/>
+                      <a:tailEnd type="none" w="med" len="med"/>
+                    </a:lnB>
+                    <a:solidFill>
+                      <a:srgbClr val="FFFFFF"/>
+                    </a:solidFill>
+                  </a:tcPr>
+                </a:tc>
+              </a:tr>
+              <a:tr h="685800">
+                <a:tc>
+                  <a:txBody>
+                    <a:bodyPr/>
+                    <a:lstStyle/>
+                    <a:p>
+                      <a:pPr rtl="1" algn="r" indent="0" marL="0">
+                        <a:buNone/>
+                      </a:pPr>
+                      <a:r>
+                        <a:rPr lang="en-US" sz="1150" dirty="0">
+                          <a:solidFill>
+                            <a:srgbClr val="1F2937"/>
+                          </a:solidFill>
+                          <a:latin typeface="Arial" pitchFamily="34" charset="0"/>
+                          <a:ea typeface="Arial" pitchFamily="34" charset="-122"/>
+                          <a:cs typeface="Arial" pitchFamily="34" charset="-120"/>
+                        </a:rPr>
+                        <a:t>ניהוליות: "יש לי מספיק משאבים", המנוע ליוזמה</a:t>
+                      </a:r>
+                      <a:endParaRPr lang="en-US" sz="1150" dirty="0">
+                        <a:latin typeface="Arial" charset="0"/>
+                        <a:ea typeface="Arial" charset="0"/>
+                        <a:cs typeface="Arial" charset="0"/>
+                      </a:endParaRPr>
+                    </a:p>
+                  </a:txBody>
+                  <a:tcPr marL="54864" marR="54864" marT="54864" marB="54864" anchor="ctr">
+                    <a:lnL w="12700" cap="flat" cmpd="sng" algn="ctr">
+                      <a:solidFill>
+                        <a:srgbClr val="D1D5DB"/>
+                      </a:solidFill>
+                      <a:prstDash val="solid"/>
+                      <a:round/>
+                      <a:headEnd type="none" w="med" len="med"/>
+                      <a:tailEnd type="none" w="med" len="med"/>
+                    </a:lnL>
+                    <a:lnR w="12700" cap="flat" cmpd="sng" algn="ctr">
+                      <a:solidFill>
+                        <a:srgbClr val="D1D5DB"/>
+                      </a:solidFill>
+                      <a:prstDash val="solid"/>
+                      <a:round/>
+                      <a:headEnd type="none" w="med" len="med"/>
+                      <a:tailEnd type="none" w="med" len="med"/>
+                    </a:lnR>
+                    <a:lnT w="12700" cap="flat" cmpd="sng" algn="ctr">
+                      <a:solidFill>
+                        <a:srgbClr val="D1D5DB"/>
+                      </a:solidFill>
+                      <a:prstDash val="solid"/>
+                      <a:round/>
+                      <a:headEnd type="none" w="med" len="med"/>
+                      <a:tailEnd type="none" w="med" len="med"/>
+                    </a:lnT>
+                    <a:lnB w="12700" cap="flat" cmpd="sng" algn="ctr">
+                      <a:solidFill>
+                        <a:srgbClr val="D1D5DB"/>
+                      </a:solidFill>
+                      <a:prstDash val="solid"/>
+                      <a:round/>
+                      <a:headEnd type="none" w="med" len="med"/>
+                      <a:tailEnd type="none" w="med" len="med"/>
+                    </a:lnB>
+                    <a:solidFill>
+                      <a:srgbClr val="FFFFFF"/>
+                    </a:solidFill>
+                  </a:tcPr>
+                </a:tc>
+                <a:tc>
+                  <a:txBody>
+                    <a:bodyPr/>
+                    <a:lstStyle/>
+                    <a:p>
+                      <a:pPr rtl="1" algn="r" indent="0" marL="0">
+                        <a:buNone/>
+                      </a:pPr>
+                      <a:r>
+                        <a:rPr lang="en-US" sz="1150" b="1" dirty="0">
+                          <a:solidFill>
+                            <a:srgbClr val="1F2937"/>
+                          </a:solidFill>
+                          <a:latin typeface="Arial" pitchFamily="34" charset="0"/>
+                          <a:ea typeface="Arial" pitchFamily="34" charset="-122"/>
+                          <a:cs typeface="Arial" pitchFamily="34" charset="-120"/>
+                        </a:rPr>
+                        <a:t>תמיכה בעבודה ובמשפחה וזמינות פסיכולוגית (Russo et al., 2016)</a:t>
+                      </a:r>
+                      <a:endParaRPr lang="en-US" sz="1150" dirty="0">
+                        <a:latin typeface="Arial" charset="0"/>
+                        <a:ea typeface="Arial" charset="0"/>
+                        <a:cs typeface="Arial" charset="0"/>
+                      </a:endParaRPr>
+                    </a:p>
+                  </a:txBody>
+                  <a:tcPr marL="54864" marR="54864" marT="54864" marB="54864" anchor="ctr">
+                    <a:lnL w="12700" cap="flat" cmpd="sng" algn="ctr">
+                      <a:solidFill>
+                        <a:srgbClr val="D1D5DB"/>
+                      </a:solidFill>
+                      <a:prstDash val="solid"/>
+                      <a:round/>
+                      <a:headEnd type="none" w="med" len="med"/>
+                      <a:tailEnd type="none" w="med" len="med"/>
+                    </a:lnL>
+                    <a:lnR w="12700" cap="flat" cmpd="sng" algn="ctr">
+                      <a:solidFill>
+                        <a:srgbClr val="D1D5DB"/>
+                      </a:solidFill>
+                      <a:prstDash val="solid"/>
+                      <a:round/>
+                      <a:headEnd type="none" w="med" len="med"/>
+                      <a:tailEnd type="none" w="med" len="med"/>
+                    </a:lnR>
+                    <a:lnT w="12700" cap="flat" cmpd="sng" algn="ctr">
+                      <a:solidFill>
+                        <a:srgbClr val="D1D5DB"/>
+                      </a:solidFill>
+                      <a:prstDash val="solid"/>
+                      <a:round/>
+                      <a:headEnd type="none" w="med" len="med"/>
+                      <a:tailEnd type="none" w="med" len="med"/>
+                    </a:lnT>
+                    <a:lnB w="12700" cap="flat" cmpd="sng" algn="ctr">
+                      <a:solidFill>
+                        <a:srgbClr val="D1D5DB"/>
+                      </a:solidFill>
+                      <a:prstDash val="solid"/>
+                      <a:round/>
+                      <a:headEnd type="none" w="med" len="med"/>
+                      <a:tailEnd type="none" w="med" len="med"/>
+                    </a:lnB>
+                    <a:solidFill>
+                      <a:srgbClr val="FFFFFF"/>
+                    </a:solidFill>
+                  </a:tcPr>
+                </a:tc>
+              </a:tr>
+            </a:tbl>
+          </a:graphicData>
+        </a:graphic>
+      </p:graphicFrame>
+      <p:sp>
+        <p:nvSpPr>
+          <p:cNvPr id="4" name="Shape 1"/>
+          <p:cNvSpPr/>
+          <p:nvPr/>
+        </p:nvSpPr>
+        <p:spPr>
+          <a:xfrm>
+            <a:off x="548640" y="1280160"/>
+            <a:ext cx="5120640" cy="4983480"/>
+          </a:xfrm>
+          <a:prstGeom prst="roundRect">
+            <a:avLst>
+              <a:gd name="adj" fmla="val 2202"/>
+            </a:avLst>
+          </a:prstGeom>
+          <a:solidFill>
+            <a:srgbClr val="F4F6FA"/>
+          </a:solidFill>
+          <a:ln w="12700">
+            <a:solidFill>
+              <a:srgbClr val="F4F6FA"/>
+            </a:solidFill>
+            <a:prstDash val="solid"/>
+          </a:ln>
+          <a:effectLst>
+            <a:outerShdw sx="100000" sy="100000" kx="0" ky="0" algn="bl" rotWithShape="0" blurRad="50800" dist="25400" dir="5400000">
+              <a:srgbClr val="000000">
+                <a:alpha val="12000"/>
+              </a:srgbClr>
+            </a:outerShdw>
+          </a:effectLst>
+        </p:spPr>
+      </p:sp>
+      <p:sp>
+        <p:nvSpPr>
+          <p:cNvPr id="5" name="Text 2"/>
+          <p:cNvSpPr txBox="1"/>
+          <p:nvPr/>
+        </p:nvSpPr>
+        <p:spPr>
+          <a:xfrm>
+            <a:off x="777240" y="1463040"/>
+            <a:ext cx="4663440" cy="4663440"/>
+          </a:xfrm>
+          <a:prstGeom prst="rect">
+            <a:avLst/>
+          </a:prstGeom>
+          <a:noFill/>
+          <a:ln/>
+        </p:spPr>
+        <p:txBody>
+          <a:bodyPr wrap="square" lIns="0" tIns="0" rIns="0" bIns="0" rtlCol="0" anchor="t"/>
+          <a:lstStyle/>
+          <a:p>
+            <a:pPr rtl="1" algn="r" indent="0" marL="0">
+              <a:buNone/>
+            </a:pPr>
+            <a:r>
+              <a:rPr lang="he-IL" altLang="en-US" sz="1350" dirty="0">
+                <a:solidFill>
+                  <a:srgbClr val="1F2937"/>
+                </a:solidFill>
+                <a:latin typeface="Arial" pitchFamily="34" charset="0"/>
+                <a:ea typeface="Arial" pitchFamily="34" charset="-122"/>
+                <a:cs typeface="Arial" pitchFamily="34" charset="-120"/>
+              </a:rPr>
+              <a:t>המאמר אינו זר לחומר הקורס אלא מעניק לו בסיס אמפירי. שלושת סלי הכלים שנלמדו בקורס מקבילים כמעט אחד לאחד לצרכי ההתקרבות שנמצאו כבונים תחושת קוהרנטיות, והרעיון של קריירה רבודה, שבה כל שלב נבנה על קודמו, הוא בדיוק ספירלת הרווח שהמחקר מתעד. הגורמים המניעים של הרצברג ועוגני הקריירה מסבירים מדוע צרכים שונים חשובים לעובדים שונים, ומאמר החובה של Russo ואחרים (2016) מראה שתמיכה מהסביבה מזינה את הזמינות הפסיכולוגית, כלומר את תחושת הניהוליות שהמחקר מזהה כמנוע ליוזמה (Cetkovská et al., 2026).</a:t>
+            </a:r>
+            <a:endParaRPr lang="he-IL" sz="1350" dirty="0"/>
+          </a:p>
+        </p:txBody>
+      </p:sp>
+      <p:sp>
+        <p:nvSpPr>
+          <p:cNvPr id="6" name="Text 3"/>
+          <p:cNvSpPr txBox="1"/>
+          <p:nvPr/>
+        </p:nvSpPr>
+        <p:spPr>
+          <a:xfrm>
+            <a:off x="5943600" y="6446520"/>
+            <a:ext cx="5696712" cy="274320"/>
+          </a:xfrm>
+          <a:prstGeom prst="rect">
+            <a:avLst/>
+          </a:prstGeom>
+          <a:noFill/>
+          <a:ln/>
+        </p:spPr>
+        <p:txBody>
+          <a:bodyPr wrap="square" lIns="0" tIns="0" rIns="0" bIns="0" rtlCol="0" anchor="ctr"/>
+          <a:lstStyle/>
+          <a:p>
+            <a:pPr rtl="1" algn="r" indent="0" marL="0">
+              <a:buNone/>
+            </a:pPr>
+            <a:r>
+              <a:rPr lang="he-IL" altLang="en-US" sz="1000" dirty="0">
+                <a:solidFill>
+                  <a:srgbClr val="6B7280"/>
+                </a:solidFill>
+                <a:latin typeface="Arial" pitchFamily="34" charset="0"/>
+                <a:ea typeface="Arial" pitchFamily="34" charset="-122"/>
+                <a:cs typeface="Arial" pitchFamily="34" charset="-120"/>
+              </a:rPr>
+              <a:t>ניהול קריירה בארגונים | הקריה האקדמית אונו</a:t>
+            </a:r>
+            <a:endParaRPr lang="he-IL" sz="1000" dirty="0"/>
+          </a:p>
+        </p:txBody>
+      </p:sp>
+      <p:sp>
+        <p:nvSpPr>
+          <p:cNvPr id="7" name="Text 4"/>
+          <p:cNvSpPr txBox="1"/>
+          <p:nvPr/>
+        </p:nvSpPr>
+        <p:spPr>
+          <a:xfrm>
+            <a:off x="548640" y="6446520"/>
+            <a:ext cx="914400" cy="274320"/>
+          </a:xfrm>
+          <a:prstGeom prst="rect">
+            <a:avLst/>
+          </a:prstGeom>
+          <a:noFill/>
+          <a:ln/>
+        </p:spPr>
+        <p:txBody>
+          <a:bodyPr wrap="square" lIns="0" tIns="0" rIns="0" bIns="0" rtlCol="0" anchor="ctr"/>
+          <a:lstStyle/>
+          <a:p>
+            <a:pPr rtl="1" algn="l" indent="0" marL="0">
+              <a:buNone/>
+            </a:pPr>
+            <a:r>
+              <a:rPr lang="he-IL" altLang="en-US" sz="1000" dirty="0">
+                <a:solidFill>
+                  <a:srgbClr val="6B7280"/>
+                </a:solidFill>
+                <a:latin typeface="Arial" pitchFamily="34" charset="0"/>
+                <a:ea typeface="Arial" pitchFamily="34" charset="-122"/>
+                <a:cs typeface="Arial" pitchFamily="34" charset="-120"/>
+              </a:rPr>
+              <a:t>11</a:t>
+            </a:r>
+            <a:endParaRPr lang="he-IL" sz="1000" dirty="0"/>
+          </a:p>
+        </p:txBody>
+      </p:sp>
+    </p:spTree>
+  </p:cSld>
+  <p:clrMapOvr>
+    <a:masterClrMapping/>
+  </p:clrMapOvr>
+</p:sld>
+</file>
+
+<file path=ppt/slides/slide12.xml><?xml version="1.0" encoding="utf-8"?>
+<p:sld xmlns:a="http://schemas.openxmlformats.org/drawingml/2006/main" xmlns:r="http://schemas.openxmlformats.org/officeDocument/2006/relationships" xmlns:p="http://schemas.openxmlformats.org/presentationml/2006/main">
+  <p:cSld name="Slide 12">
+    <p:spTree>
+      <p:nvGrpSpPr>
+        <p:cNvPr id="1" name=""/>
+        <p:cNvGrpSpPr/>
+        <p:nvPr/>
+      </p:nvGrpSpPr>
+      <p:grpSpPr>
+        <a:xfrm>
+          <a:off x="0" y="0"/>
+          <a:ext cx="0" cy="0"/>
+          <a:chOff x="0" y="0"/>
+          <a:chExt cx="0" cy="0"/>
+        </a:xfrm>
+      </p:grpSpPr>
+      <p:sp>
+        <p:nvSpPr>
+          <p:cNvPr id="2" name="Text 0"/>
+          <p:cNvSpPr txBox="1"/>
+          <p:nvPr/>
+        </p:nvSpPr>
+        <p:spPr>
+          <a:xfrm>
+            <a:off x="548640" y="320040"/>
+            <a:ext cx="11091672" cy="822960"/>
+          </a:xfrm>
+          <a:prstGeom prst="rect">
+            <a:avLst/>
+          </a:prstGeom>
+          <a:noFill/>
+          <a:ln/>
+        </p:spPr>
+        <p:txBody>
+          <a:bodyPr wrap="square" lIns="0" tIns="0" rIns="0" bIns="0" rtlCol="0" anchor="ctr"/>
+          <a:lstStyle/>
+          <a:p>
+            <a:pPr rtl="1" algn="r" indent="0" marL="0">
+              <a:buNone/>
+            </a:pPr>
+            <a:r>
+              <a:rPr lang="he-IL" altLang="en-US" sz="3000" b="1" dirty="0">
+                <a:solidFill>
+                  <a:srgbClr val="14213D"/>
+                </a:solidFill>
+                <a:latin typeface="Arial" pitchFamily="34" charset="0"/>
+                <a:ea typeface="Arial" pitchFamily="34" charset="-122"/>
+                <a:cs typeface="Arial" pitchFamily="34" charset="-120"/>
+              </a:rPr>
               <a:t>תובנות, ביקורת ודעה אישית</a:t>
             </a:r>
             <a:endParaRPr lang="he-IL" sz="3000" dirty="0"/>
@@ -4024,7 +5350,7 @@
                 <a:ea typeface="Arial" pitchFamily="34" charset="-122"/>
                 <a:cs typeface="Arial" pitchFamily="34" charset="-120"/>
               </a:rPr>
-              <a:t>👍 מה אהבנו</a:t>
+              <a:t>מה אהבנו</a:t>
             </a:r>
             <a:endParaRPr lang="he-IL" sz="1800" dirty="0"/>
           </a:p>
@@ -4039,7 +5365,7 @@
         <p:spPr>
           <a:xfrm>
             <a:off x="6492240" y="1920240"/>
-            <a:ext cx="4937760" cy="2194560"/>
+            <a:ext cx="4937760" cy="2240280"/>
           </a:xfrm>
           <a:prstGeom prst="rect">
             <a:avLst/>
@@ -4051,15 +5377,11 @@
           <a:bodyPr wrap="square" lIns="0" tIns="0" rIns="0" bIns="0" rtlCol="0" anchor="t"/>
           <a:lstStyle/>
           <a:p>
-            <a:pPr algn="r" marL="342900" indent="-342900">
-              <a:spcAft>
-                <a:spcPts val="500"/>
-              </a:spcAft>
-              <a:buSzPct val="100000"/>
-              <a:buChar char="•"/>
-            </a:pPr>
-            <a:r>
-              <a:rPr lang="he-IL" altLang="en-US" sz="1300" dirty="0">
+            <a:pPr rtl="1" algn="r" indent="0" marL="0">
+              <a:buNone/>
+            </a:pPr>
+            <a:r>
+              <a:rPr lang="he-IL" altLang="en-US" sz="1250" dirty="0">
                 <a:solidFill>
                   <a:srgbClr val="1F2937"/>
                 </a:solidFill>
@@ -4067,72 +5389,9 @@
                 <a:ea typeface="Arial" pitchFamily="34" charset="-122"/>
                 <a:cs typeface="Arial" pitchFamily="34" charset="-120"/>
               </a:rPr>
-              <a:t>נקודת המבט: מה עוזר, לא רק מה מזיק. רעיון ישראלי מבן-גוריון</a:t>
-            </a:r>
-            <a:endParaRPr lang="he-IL" sz="1300" dirty="0"/>
-          </a:p>
-          <a:p>
-            <a:pPr algn="r" marL="342900" indent="-342900">
-              <a:spcAft>
-                <a:spcPts val="500"/>
-              </a:spcAft>
-              <a:buSzPct val="100000"/>
-              <a:buChar char="•"/>
-            </a:pPr>
-            <a:r>
-              <a:rPr lang="he-IL" altLang="en-US" sz="1300" dirty="0">
-                <a:solidFill>
-                  <a:srgbClr val="1F2937"/>
-                </a:solidFill>
-                <a:latin typeface="Arial" pitchFamily="34" charset="0"/>
-                <a:ea typeface="Arial" pitchFamily="34" charset="-122"/>
-                <a:cs typeface="Arial" pitchFamily="34" charset="-120"/>
-              </a:rPr>
-              <a:t>פרקטי: שישה צרכים, שאלות פשוטות, פעולות לשבועיים</a:t>
-            </a:r>
-            <a:endParaRPr lang="he-IL" sz="1300" dirty="0"/>
-          </a:p>
-          <a:p>
-            <a:pPr algn="r" marL="342900" indent="-342900">
-              <a:spcAft>
-                <a:spcPts val="500"/>
-              </a:spcAft>
-              <a:buSzPct val="100000"/>
-              <a:buChar char="•"/>
-            </a:pPr>
-            <a:r>
-              <a:rPr lang="he-IL" altLang="en-US" sz="1300" dirty="0">
-                <a:solidFill>
-                  <a:srgbClr val="1F2937"/>
-                </a:solidFill>
-                <a:latin typeface="Arial" pitchFamily="34" charset="0"/>
-                <a:ea typeface="Arial" pitchFamily="34" charset="-122"/>
-                <a:cs typeface="Arial" pitchFamily="34" charset="-120"/>
-              </a:rPr>
-              <a:t>כנות: כמעט עמוד שלם על מגבלות, כולל ממצא שקשה להם להסביר</a:t>
-            </a:r>
-            <a:endParaRPr lang="he-IL" sz="1300" dirty="0"/>
-          </a:p>
-          <a:p>
-            <a:pPr algn="r" marL="342900" indent="-342900">
-              <a:spcAft>
-                <a:spcPts val="500"/>
-              </a:spcAft>
-              <a:buSzPct val="100000"/>
-              <a:buChar char="•"/>
-            </a:pPr>
-            <a:r>
-              <a:rPr lang="he-IL" altLang="en-US" sz="1300" dirty="0">
-                <a:solidFill>
-                  <a:srgbClr val="1F2937"/>
-                </a:solidFill>
-                <a:latin typeface="Arial" pitchFamily="34" charset="0"/>
-                <a:ea typeface="Arial" pitchFamily="34" charset="-122"/>
-                <a:cs typeface="Arial" pitchFamily="34" charset="-120"/>
-              </a:rPr>
-              <a:t>זמין לכולם בחינם</a:t>
-            </a:r>
-            <a:endParaRPr lang="he-IL" sz="1300" dirty="0"/>
+              <a:t>אהבנו את נקודת המבט של המאמר, ששואל מה עוזר לעובדים ולא רק מה מזיק להם, ואת הפרקטיות שלו: שישה צרכים, שאלות פשוטות ופעולות שאפשר לבצע בשבועיים. הערכנו את הכנות של המחברים, שמקדישים כמעט עמוד שלם למגבלות, כולל ממצא שקשה להם להסביר, ואת העובדה שהמאמר זמין לכולם בחינם (Cetkovská et al., 2026).</a:t>
+            </a:r>
+            <a:endParaRPr lang="he-IL" sz="1250" dirty="0"/>
           </a:p>
         </p:txBody>
       </p:sp>
@@ -4203,7 +5462,7 @@
                 <a:ea typeface="Arial" pitchFamily="34" charset="-122"/>
                 <a:cs typeface="Arial" pitchFamily="34" charset="-120"/>
               </a:rPr>
-              <a:t>🤔 מה חסר לנו</a:t>
+              <a:t>מה חסר לנו</a:t>
             </a:r>
             <a:endParaRPr lang="he-IL" sz="1800" dirty="0"/>
           </a:p>
@@ -4218,7 +5477,7 @@
         <p:spPr>
           <a:xfrm>
             <a:off x="777240" y="1920240"/>
-            <a:ext cx="4937760" cy="2194560"/>
+            <a:ext cx="4937760" cy="2240280"/>
           </a:xfrm>
           <a:prstGeom prst="rect">
             <a:avLst/>
@@ -4230,15 +5489,11 @@
           <a:bodyPr wrap="square" lIns="0" tIns="0" rIns="0" bIns="0" rtlCol="0" anchor="t"/>
           <a:lstStyle/>
           <a:p>
-            <a:pPr algn="r" marL="342900" indent="-342900">
-              <a:spcAft>
-                <a:spcPts val="500"/>
-              </a:spcAft>
-              <a:buSzPct val="100000"/>
-              <a:buChar char="•"/>
-            </a:pPr>
-            <a:r>
-              <a:rPr lang="he-IL" altLang="en-US" sz="1300" dirty="0">
+            <a:pPr rtl="1" algn="r" indent="0" marL="0">
+              <a:buNone/>
+            </a:pPr>
+            <a:r>
+              <a:rPr lang="he-IL" altLang="en-US" sz="1250" dirty="0">
                 <a:solidFill>
                   <a:srgbClr val="1F2937"/>
                 </a:solidFill>
@@ -4246,51 +5501,9 @@
                 <a:ea typeface="Arial" pitchFamily="34" charset="-122"/>
                 <a:cs typeface="Arial" pitchFamily="34" charset="-120"/>
               </a:rPr>
-              <a:t>לא מודד חוסר ביטחון במישרין. את החיבור לנושא בנינו בעצמנו</a:t>
-            </a:r>
-            <a:endParaRPr lang="he-IL" sz="1300" dirty="0"/>
-          </a:p>
-          <a:p>
-            <a:pPr algn="r" marL="342900" indent="-342900">
-              <a:spcAft>
-                <a:spcPts val="500"/>
-              </a:spcAft>
-              <a:buSzPct val="100000"/>
-              <a:buChar char="•"/>
-            </a:pPr>
-            <a:r>
-              <a:rPr lang="he-IL" altLang="en-US" sz="1300" dirty="0">
-                <a:solidFill>
-                  <a:srgbClr val="1F2937"/>
-                </a:solidFill>
-                <a:latin typeface="Arial" pitchFamily="34" charset="0"/>
-                <a:ea typeface="Arial" pitchFamily="34" charset="-122"/>
-                <a:cs typeface="Arial" pitchFamily="34" charset="-120"/>
-              </a:rPr>
-              <a:t>מדגם גרמני-שווייצרי, גיל ממוצע 49, ביטחון סוציאלי גבוה. האם המרחב לעצב תפקיד קיים גם אצלנו?</a:t>
-            </a:r>
-            <a:endParaRPr lang="he-IL" sz="1300" dirty="0"/>
-          </a:p>
-          <a:p>
-            <a:pPr algn="r" marL="342900" indent="-342900">
-              <a:spcAft>
-                <a:spcPts val="500"/>
-              </a:spcAft>
-              <a:buSzPct val="100000"/>
-              <a:buChar char="•"/>
-            </a:pPr>
-            <a:r>
-              <a:rPr lang="he-IL" altLang="en-US" sz="1300" dirty="0">
-                <a:solidFill>
-                  <a:srgbClr val="1F2937"/>
-                </a:solidFill>
-                <a:latin typeface="Arial" pitchFamily="34" charset="0"/>
-                <a:ea typeface="Arial" pitchFamily="34" charset="-122"/>
-                <a:cs typeface="Arial" pitchFamily="34" charset="-120"/>
-              </a:rPr>
-              <a:t>שכירים בתפקיד קיים בלבד. לא מחפשי עבודה, לא עצמאים</a:t>
-            </a:r>
-            <a:endParaRPr lang="he-IL" sz="1300" dirty="0"/>
+              <a:t>המאמר אינו מודד חוסר ביטחון תעסוקתי במישרין, ואת החיבור לנושא בנינו בעצמנו דרך המאמר המשלים. המדגם גרמני ושווייצרי, בגיל ממוצע של כמעט 49, מתרבות עבודה עם ביטחון סוציאלי גבוה, ולא ברור שהמרחב לעצב תפקיד קיים גם אצל סטודנטים ישראלים בתחילת הדרך. המחקר עוסק בשכירים בתפקיד קיים בלבד, ולא במחפשי עבודה או בעצמאים.</a:t>
+            </a:r>
+            <a:endParaRPr lang="he-IL" sz="1250" dirty="0"/>
           </a:p>
         </p:txBody>
       </p:sp>
@@ -4478,7 +5691,7 @@
                 <a:ea typeface="Arial" pitchFamily="34" charset="-122"/>
                 <a:cs typeface="Arial" pitchFamily="34" charset="-120"/>
               </a:rPr>
-              <a:t>11</a:t>
+              <a:t>12</a:t>
             </a:r>
             <a:endParaRPr lang="he-IL" sz="1000" dirty="0"/>
           </a:p>
@@ -4492,9 +5705,9 @@
 </p:sld>
 </file>
 
-<file path=ppt/slides/slide12.xml><?xml version="1.0" encoding="utf-8"?>
+<file path=ppt/slides/slide13.xml><?xml version="1.0" encoding="utf-8"?>
 <p:sld xmlns:a="http://schemas.openxmlformats.org/drawingml/2006/main" xmlns:r="http://schemas.openxmlformats.org/officeDocument/2006/relationships" xmlns:p="http://schemas.openxmlformats.org/presentationml/2006/main">
-  <p:cSld name="Slide 12">
+  <p:cSld name="Slide 13">
     <p:bg>
       <p:bgPr>
         <a:solidFill>
@@ -4742,7 +5955,7 @@
         <p:spPr>
           <a:xfrm>
             <a:off x="731520" y="1965960"/>
-            <a:ext cx="5212080" cy="2560320"/>
+            <a:ext cx="5212080" cy="2651760"/>
           </a:xfrm>
           <a:prstGeom prst="rect">
             <a:avLst/>
@@ -4754,15 +5967,11 @@
           <a:bodyPr wrap="square" lIns="0" tIns="0" rIns="0" bIns="0" rtlCol="0" anchor="t"/>
           <a:lstStyle/>
           <a:p>
-            <a:pPr algn="r" marL="342900" indent="-342900">
-              <a:spcAft>
-                <a:spcPts val="800"/>
-              </a:spcAft>
-              <a:buSzPct val="100000"/>
-              <a:buChar char="•"/>
-            </a:pPr>
-            <a:r>
-              <a:rPr lang="he-IL" altLang="en-US" sz="1450" dirty="0">
+            <a:pPr rtl="1" algn="r" indent="0" marL="0">
+              <a:buNone/>
+            </a:pPr>
+            <a:r>
+              <a:rPr lang="he-IL" altLang="en-US" sz="1350" dirty="0">
                 <a:solidFill>
                   <a:srgbClr val="FFFFFF"/>
                 </a:solidFill>
@@ -4770,51 +5979,9 @@
                 <a:ea typeface="Arial" pitchFamily="34" charset="-122"/>
                 <a:cs typeface="Arial" pitchFamily="34" charset="-120"/>
               </a:rPr>
-              <a:t>"דברים רעים קורים": קבלת חוסר הוודאות כחלק מהחיים</a:t>
-            </a:r>
-            <a:endParaRPr lang="he-IL" sz="1450" dirty="0"/>
-          </a:p>
-          <a:p>
-            <a:pPr algn="r" marL="342900" indent="-342900">
-              <a:spcAft>
-                <a:spcPts val="800"/>
-              </a:spcAft>
-              <a:buSzPct val="100000"/>
-              <a:buChar char="•"/>
-            </a:pPr>
-            <a:r>
-              <a:rPr lang="he-IL" altLang="en-US" sz="1450" dirty="0">
-                <a:solidFill>
-                  <a:srgbClr val="FFFFFF"/>
-                </a:solidFill>
-                <a:latin typeface="Arial" pitchFamily="34" charset="0"/>
-                <a:ea typeface="Arial" pitchFamily="34" charset="-122"/>
-                <a:cs typeface="Arial" pitchFamily="34" charset="-120"/>
-              </a:rPr>
-              <a:t>לבחור במה להתמקד: מה בשליטתי. זו המובנות והניהוליות</a:t>
-            </a:r>
-            <a:endParaRPr lang="he-IL" sz="1450" dirty="0"/>
-          </a:p>
-          <a:p>
-            <a:pPr algn="r" marL="342900" indent="-342900">
-              <a:spcAft>
-                <a:spcPts val="800"/>
-              </a:spcAft>
-              <a:buSzPct val="100000"/>
-              <a:buChar char="•"/>
-            </a:pPr>
-            <a:r>
-              <a:rPr lang="he-IL" altLang="en-US" sz="1450" dirty="0">
-                <a:solidFill>
-                  <a:srgbClr val="FFFFFF"/>
-                </a:solidFill>
-                <a:latin typeface="Arial" pitchFamily="34" charset="0"/>
-                <a:ea typeface="Arial" pitchFamily="34" charset="-122"/>
-                <a:cs typeface="Arial" pitchFamily="34" charset="-120"/>
-              </a:rPr>
-              <a:t>"האם זה עוזר לי או פוגע בי?": האם אני מעצב את המצב או רק שורד אותו</a:t>
-            </a:r>
-            <a:endParaRPr lang="he-IL" sz="1450" dirty="0"/>
+              <a:t>חוקרת החוסן לוסי הון מציעה שלושה עקרונות: לקבל שדברים רעים קורים כחלק מהחיים, לבחור במה להתמקד ולהפנות את הקשב למה שבשליטתנו, ולשאול על כל פעולה האם היא עוזרת או פוגעת (Hone, 2019). שני העקרונות האחרונים הם, במונחי המאמר, חיזוק המובנות והניהוליות והבחירה לעצב את המצב במקום רק לשרוד אותו.</a:t>
+            </a:r>
+            <a:endParaRPr lang="he-IL" sz="1350" dirty="0"/>
           </a:p>
         </p:txBody>
       </p:sp>
@@ -4963,7 +6130,7 @@
                 <a:ea typeface="Arial" pitchFamily="34" charset="-122"/>
                 <a:cs typeface="Arial" pitchFamily="34" charset="-120"/>
               </a:rPr>
-              <a:t>12</a:t>
+              <a:t>13</a:t>
             </a:r>
             <a:endParaRPr lang="he-IL" sz="1000" dirty="0"/>
           </a:p>
@@ -4977,9 +6144,9 @@
 </p:sld>
 </file>
 
-<file path=ppt/slides/slide13.xml><?xml version="1.0" encoding="utf-8"?>
+<file path=ppt/slides/slide14.xml><?xml version="1.0" encoding="utf-8"?>
 <p:sld xmlns:a="http://schemas.openxmlformats.org/drawingml/2006/main" xmlns:r="http://schemas.openxmlformats.org/officeDocument/2006/relationships" xmlns:p="http://schemas.openxmlformats.org/presentationml/2006/main">
-  <p:cSld name="Slide 13">
+  <p:cSld name="Slide 14">
     <p:spTree>
       <p:nvGrpSpPr>
         <p:cNvPr id="1" name=""/>
@@ -5035,7 +6202,7 @@
       </p:sp>
       <p:graphicFrame>
         <p:nvGraphicFramePr>
-          <p:cNvPr id="14" name="Table 0"/>
+          <p:cNvPr id="15" name="Table 0"/>
           <p:cNvGraphicFramePr>
             <a:graphicFrameLocks noGrp="1"/>
           </p:cNvGraphicFramePr>
@@ -6239,7 +7406,7 @@
                 <a:ea typeface="Arial" pitchFamily="34" charset="-122"/>
                 <a:cs typeface="Arial" pitchFamily="34" charset="-120"/>
               </a:rPr>
-              <a:t>13</a:t>
+              <a:t>14</a:t>
             </a:r>
             <a:endParaRPr lang="he-IL" sz="1000" dirty="0"/>
           </a:p>
@@ -6253,9 +7420,9 @@
 </p:sld>
 </file>
 
-<file path=ppt/slides/slide14.xml><?xml version="1.0" encoding="utf-8"?>
+<file path=ppt/slides/slide15.xml><?xml version="1.0" encoding="utf-8"?>
 <p:sld xmlns:a="http://schemas.openxmlformats.org/drawingml/2006/main" xmlns:r="http://schemas.openxmlformats.org/officeDocument/2006/relationships" xmlns:p="http://schemas.openxmlformats.org/presentationml/2006/main">
-  <p:cSld name="Slide 14">
+  <p:cSld name="Slide 15">
     <p:bg>
       <p:bgPr>
         <a:solidFill>
@@ -7326,7 +8493,7 @@
                 <a:ea typeface="Arial" pitchFamily="34" charset="-122"/>
                 <a:cs typeface="Arial" pitchFamily="34" charset="-120"/>
               </a:rPr>
-              <a:t>14</a:t>
+              <a:t>15</a:t>
             </a:r>
             <a:endParaRPr lang="he-IL" sz="1000" dirty="0"/>
           </a:p>
@@ -7340,9 +8507,9 @@
 </p:sld>
 </file>
 
-<file path=ppt/slides/slide15.xml><?xml version="1.0" encoding="utf-8"?>
+<file path=ppt/slides/slide16.xml><?xml version="1.0" encoding="utf-8"?>
 <p:sld xmlns:a="http://schemas.openxmlformats.org/drawingml/2006/main" xmlns:r="http://schemas.openxmlformats.org/officeDocument/2006/relationships" xmlns:p="http://schemas.openxmlformats.org/presentationml/2006/main">
-  <p:cSld name="Slide 15">
+  <p:cSld name="Slide 16">
     <p:bg>
       <p:bgPr>
         <a:solidFill>
@@ -8123,7 +9290,7 @@
                 <a:ea typeface="Arial" pitchFamily="34" charset="-122"/>
                 <a:cs typeface="Arial" pitchFamily="34" charset="-120"/>
               </a:rPr>
-              <a:t>15</a:t>
+              <a:t>16</a:t>
             </a:r>
             <a:endParaRPr lang="he-IL" sz="1000" dirty="0"/>
           </a:p>
@@ -8137,9 +9304,9 @@
 </p:sld>
 </file>
 
-<file path=ppt/slides/slide16.xml><?xml version="1.0" encoding="utf-8"?>
+<file path=ppt/slides/slide17.xml><?xml version="1.0" encoding="utf-8"?>
 <p:sld xmlns:a="http://schemas.openxmlformats.org/drawingml/2006/main" xmlns:r="http://schemas.openxmlformats.org/officeDocument/2006/relationships" xmlns:p="http://schemas.openxmlformats.org/presentationml/2006/main">
-  <p:cSld name="Slide 16">
+  <p:cSld name="Slide 17">
     <p:spTree>
       <p:nvGrpSpPr>
         <p:cNvPr id="1" name=""/>
@@ -8193,9 +9360,33 @@
           </a:p>
         </p:txBody>
       </p:sp>
-      <p:sp>
-        <p:nvSpPr>
-          <p:cNvPr id="3" name="Text 1"/>
+      <p:pic>
+        <p:nvPicPr>
+          <p:cNvPr id="3" name="Image 0" descr="/tmp/claude-0/-home-user-clickwriting-landing/d2627f80-c93a-5206-ba5d-647532b375c9/scratchpad/ono-logo.jpg">    </p:cNvPr>
+          <p:cNvPicPr>
+            <a:picLocks noChangeAspect="1"/>
+          </p:cNvPicPr>
+          <p:nvPr/>
+        </p:nvPicPr>
+        <p:blipFill>
+          <a:blip r:embed="rId1"/>
+          <a:stretch>
+            <a:fillRect/>
+          </a:stretch>
+        </p:blipFill>
+        <p:spPr>
+          <a:xfrm>
+            <a:off x="548640" y="5394960"/>
+            <a:ext cx="914400" cy="914400"/>
+          </a:xfrm>
+          <a:prstGeom prst="rect">
+            <a:avLst/>
+          </a:prstGeom>
+        </p:spPr>
+      </p:pic>
+      <p:sp>
+        <p:nvSpPr>
+          <p:cNvPr id="4" name="Text 1"/>
           <p:cNvSpPr txBox="1"/>
           <p:nvPr/>
         </p:nvSpPr>
@@ -8273,11 +9464,31 @@
             </a:r>
             <a:endParaRPr lang="en-US" sz="1100" dirty="0"/>
           </a:p>
-        </p:txBody>
-      </p:sp>
-      <p:sp>
-        <p:nvSpPr>
-          <p:cNvPr id="4" name="Text 2"/>
+          <a:p>
+            <a:pPr algn="l" indent="0" marL="0">
+              <a:spcAft>
+                <a:spcPts val="600"/>
+              </a:spcAft>
+              <a:buNone/>
+            </a:pPr>
+            <a:r>
+              <a:rPr lang="en-US" sz="1100" dirty="0">
+                <a:solidFill>
+                  <a:srgbClr val="1F2937"/>
+                </a:solidFill>
+                <a:latin typeface="Arial" pitchFamily="34" charset="0"/>
+                <a:ea typeface="Arial" pitchFamily="34" charset="-122"/>
+                <a:cs typeface="Arial" pitchFamily="34" charset="-120"/>
+              </a:rPr>
+              <a:t>Russo, M., Shteigman, A., &amp; Carmeli, A. (2016). Workplace and family support and work-life balance: Implications for individual psychological availability and energy at work. The Journal of Positive Psychology, 11(2), 173-188. https://doi.org/10.1080/17439760.2015.1025424</a:t>
+            </a:r>
+            <a:endParaRPr lang="en-US" sz="1100" dirty="0"/>
+          </a:p>
+        </p:txBody>
+      </p:sp>
+      <p:sp>
+        <p:nvSpPr>
+          <p:cNvPr id="5" name="Text 2"/>
           <p:cNvSpPr txBox="1"/>
           <p:nvPr/>
         </p:nvSpPr>
@@ -8336,7 +9547,7 @@
       </p:sp>
       <p:sp>
         <p:nvSpPr>
-          <p:cNvPr id="5" name="Text 3"/>
+          <p:cNvPr id="6" name="Text 3"/>
           <p:cNvSpPr txBox="1"/>
           <p:nvPr/>
         </p:nvSpPr>
@@ -8375,7 +9586,7 @@
       </p:sp>
       <p:sp>
         <p:nvSpPr>
-          <p:cNvPr id="6" name="Text 4"/>
+          <p:cNvPr id="7" name="Text 4"/>
           <p:cNvSpPr txBox="1"/>
           <p:nvPr/>
         </p:nvSpPr>
@@ -8406,7 +9617,7 @@
                 <a:ea typeface="Arial" pitchFamily="34" charset="-122"/>
                 <a:cs typeface="Arial" pitchFamily="34" charset="-120"/>
               </a:rPr>
-              <a:t>16</a:t>
+              <a:t>17</a:t>
             </a:r>
             <a:endParaRPr lang="he-IL" sz="1000" dirty="0"/>
           </a:p>
@@ -9252,7 +10463,7 @@
                 <a:ea typeface="Arial" pitchFamily="34" charset="-122"/>
                 <a:cs typeface="Arial" pitchFamily="34" charset="-120"/>
               </a:rPr>
-              <a:t>מאמר משלים ותובנות</a:t>
+              <a:t>מאמר משלים, חומר הקורס ותובנות</a:t>
             </a:r>
             <a:endParaRPr lang="he-IL" sz="1800" dirty="0"/>
           </a:p>
@@ -9291,7 +10502,7 @@
                 <a:ea typeface="Arial" pitchFamily="34" charset="-122"/>
                 <a:cs typeface="Arial" pitchFamily="34" charset="-120"/>
               </a:rPr>
-              <a:t>בינה מלאכותית וחוסן קריירה</a:t>
+              <a:t>בינה מלאכותית, סלי הכלים, הרצברג</a:t>
             </a:r>
             <a:endParaRPr lang="he-IL" sz="1500" dirty="0"/>
           </a:p>
@@ -9330,7 +10541,7 @@
                 <a:ea typeface="Arial" pitchFamily="34" charset="-122"/>
                 <a:cs typeface="Arial" pitchFamily="34" charset="-120"/>
               </a:rPr>
-              <a:t>1 דק'</a:t>
+              <a:t>1.5 דק'</a:t>
             </a:r>
             <a:endParaRPr lang="he-IL" sz="1300" dirty="0"/>
           </a:p>
@@ -9545,7 +10756,7 @@
                 <a:ea typeface="Arial" pitchFamily="34" charset="-122"/>
                 <a:cs typeface="Arial" pitchFamily="34" charset="-120"/>
               </a:rPr>
-              <a:t>3 דק'</a:t>
+              <a:t>2.5 דק'</a:t>
             </a:r>
             <a:endParaRPr lang="he-IL" sz="1300" dirty="0"/>
           </a:p>
@@ -11680,11 +12891,11 @@
         <p:spPr>
           <a:xfrm>
             <a:off x="4846320" y="1325880"/>
-            <a:ext cx="6793992" cy="3108960"/>
+            <a:ext cx="6793992" cy="3246120"/>
           </a:xfrm>
           <a:prstGeom prst="roundRect">
             <a:avLst>
-              <a:gd name="adj" fmla="val 3529"/>
+              <a:gd name="adj" fmla="val 3380"/>
             </a:avLst>
           </a:prstGeom>
           <a:solidFill>
@@ -11714,7 +12925,7 @@
         <p:spPr>
           <a:xfrm>
             <a:off x="5074920" y="1463040"/>
-            <a:ext cx="6355080" cy="914400"/>
+            <a:ext cx="6355080" cy="868680"/>
           </a:xfrm>
           <a:prstGeom prst="rect">
             <a:avLst/>
@@ -11730,7 +12941,7 @@
               <a:buNone/>
             </a:pPr>
             <a:r>
-              <a:rPr lang="en-US" sz="1800" b="1" dirty="0">
+              <a:rPr lang="en-US" sz="1700" b="1" dirty="0">
                 <a:solidFill>
                   <a:srgbClr val="FFFFFF"/>
                 </a:solidFill>
@@ -11740,7 +12951,7 @@
               </a:rPr>
               <a:t>The Role of Needs-Based Job Crafting in Strengthening Work-Related Sense of Coherence: A Two-Wave Panel Study</a:t>
             </a:r>
-            <a:endParaRPr lang="en-US" sz="1800" dirty="0"/>
+            <a:endParaRPr lang="en-US" sz="1700" dirty="0"/>
           </a:p>
         </p:txBody>
       </p:sp>
@@ -11752,8 +12963,8 @@
         </p:nvSpPr>
         <p:spPr>
           <a:xfrm>
-            <a:off x="5074920" y="2423160"/>
-            <a:ext cx="6355080" cy="457200"/>
+            <a:off x="5074920" y="2331720"/>
+            <a:ext cx="6355080" cy="411480"/>
           </a:xfrm>
           <a:prstGeom prst="rect">
             <a:avLst/>
@@ -11769,7 +12980,7 @@
               <a:buNone/>
             </a:pPr>
             <a:r>
-              <a:rPr lang="en-US" sz="1200" dirty="0">
+              <a:rPr lang="en-US" sz="1150" dirty="0">
                 <a:solidFill>
                   <a:srgbClr val="FCA311"/>
                 </a:solidFill>
@@ -11779,7 +12990,7 @@
               </a:rPr>
               <a:t>Cetkovská, Bauer &amp; Tušl  |  Scandinavian Journal of Work and Organizational Psychology, 11(1)  |  2026</a:t>
             </a:r>
-            <a:endParaRPr lang="en-US" sz="1200" dirty="0"/>
+            <a:endParaRPr lang="en-US" sz="1150" dirty="0"/>
           </a:p>
         </p:txBody>
       </p:sp>
@@ -11791,8 +13002,8 @@
         </p:nvSpPr>
         <p:spPr>
           <a:xfrm>
-            <a:off x="5074920" y="2926080"/>
-            <a:ext cx="6355080" cy="1463040"/>
+            <a:off x="5074920" y="2788920"/>
+            <a:ext cx="6355080" cy="1737360"/>
           </a:xfrm>
           <a:prstGeom prst="rect">
             <a:avLst/>
@@ -11804,15 +13015,11 @@
           <a:bodyPr wrap="square" lIns="0" tIns="0" rIns="0" bIns="0" rtlCol="0" anchor="t"/>
           <a:lstStyle/>
           <a:p>
-            <a:pPr algn="r" marL="342900" indent="-342900">
-              <a:spcAft>
-                <a:spcPts val="600"/>
-              </a:spcAft>
-              <a:buSzPct val="100000"/>
-              <a:buChar char="•"/>
-            </a:pPr>
-            <a:r>
-              <a:rPr lang="he-IL" altLang="en-US" sz="1300" dirty="0">
+            <a:pPr rtl="1" algn="r" indent="0" marL="0">
+              <a:buNone/>
+            </a:pPr>
+            <a:r>
+              <a:rPr lang="he-IL" altLang="en-US" sz="1250" dirty="0">
                 <a:solidFill>
                   <a:srgbClr val="E5EAF3"/>
                 </a:solidFill>
@@ -11820,51 +13027,9 @@
                 <a:ea typeface="Arial" pitchFamily="34" charset="-122"/>
                 <a:cs typeface="Arial" pitchFamily="34" charset="-120"/>
               </a:rPr>
-              <a:t>מחקר אורך: 924 עובדים בגרמניה ובשווייץ, שתי מדידות בהפרש של חצי שנה</a:t>
-            </a:r>
-            <a:endParaRPr lang="he-IL" sz="1300" dirty="0"/>
-          </a:p>
-          <a:p>
-            <a:pPr algn="r" marL="342900" indent="-342900">
-              <a:spcAft>
-                <a:spcPts val="600"/>
-              </a:spcAft>
-              <a:buSzPct val="100000"/>
-              <a:buChar char="•"/>
-            </a:pPr>
-            <a:r>
-              <a:rPr lang="he-IL" altLang="en-US" sz="1300" dirty="0">
-                <a:solidFill>
-                  <a:srgbClr val="E5EAF3"/>
-                </a:solidFill>
-                <a:latin typeface="Arial" pitchFamily="34" charset="0"/>
-                <a:ea typeface="Arial" pitchFamily="34" charset="-122"/>
-                <a:cs typeface="Arial" pitchFamily="34" charset="-120"/>
-              </a:rPr>
-              <a:t>כתב עת שפיט, גישה פתוחה מלאה (Open Access), הוצאת אוניברסיטת סטוקהולם</a:t>
-            </a:r>
-            <a:endParaRPr lang="he-IL" sz="1300" dirty="0"/>
-          </a:p>
-          <a:p>
-            <a:pPr algn="r" marL="342900" indent="-342900">
-              <a:spcAft>
-                <a:spcPts val="600"/>
-              </a:spcAft>
-              <a:buSzPct val="100000"/>
-              <a:buChar char="•"/>
-            </a:pPr>
-            <a:r>
-              <a:rPr lang="he-IL" altLang="en-US" sz="1300" dirty="0">
-                <a:solidFill>
-                  <a:srgbClr val="E5EAF3"/>
-                </a:solidFill>
-                <a:latin typeface="Arial" pitchFamily="34" charset="0"/>
-                <a:ea typeface="Arial" pitchFamily="34" charset="-122"/>
-                <a:cs typeface="Arial" pitchFamily="34" charset="-120"/>
-              </a:rPr>
-              <a:t>המחברים: אוניברסיטת קארל בפראג והמרכז לסלוטוגנזה באוניברסיטת ציריך. מימון: הקרן הלאומית השווייצרית למדע</a:t>
-            </a:r>
-            <a:endParaRPr lang="he-IL" sz="1300" dirty="0"/>
+              <a:t>המאמר הוא מחקר אורך שעקב אחר 924 עובדים בגרמניה ובשווייץ בשתי מדידות בהפרש של חצי שנה, ובחן האם עיצוב תפקיד מבוסס צרכים מחזק את תחושת הקוהרנטיות בעבודה. הוא פורסם בכתב עת שפיט בגישה פתוחה מלאה בהוצאת אוניברסיטת סטוקהולם, על ידי חוקרים מאוניברסיטת קארל בפראג ומהמרכז לסלוטוגנזה באוניברסיטת ציריך, במימון הקרן הלאומית השווייצרית למדע (Cetkovská et al., 2026).</a:t>
+            </a:r>
+            <a:endParaRPr lang="he-IL" sz="1250" dirty="0"/>
           </a:p>
         </p:txBody>
       </p:sp>
@@ -11877,11 +13042,11 @@
         <p:spPr>
           <a:xfrm>
             <a:off x="548640" y="1325880"/>
-            <a:ext cx="4023360" cy="3108960"/>
+            <a:ext cx="4023360" cy="3246120"/>
           </a:xfrm>
           <a:prstGeom prst="roundRect">
             <a:avLst>
-              <a:gd name="adj" fmla="val 3529"/>
+              <a:gd name="adj" fmla="val 3380"/>
             </a:avLst>
           </a:prstGeom>
           <a:solidFill>
@@ -11927,7 +13092,7 @@
               <a:buNone/>
             </a:pPr>
             <a:r>
-              <a:rPr lang="he-IL" altLang="en-US" sz="1800" b="1" dirty="0">
+              <a:rPr lang="he-IL" altLang="en-US" sz="1700" b="1" dirty="0">
                 <a:solidFill>
                   <a:srgbClr val="14213D"/>
                 </a:solidFill>
@@ -11937,7 +13102,7 @@
               </a:rPr>
               <a:t>למה בחרנו בו?</a:t>
             </a:r>
-            <a:endParaRPr lang="he-IL" sz="1800" dirty="0"/>
+            <a:endParaRPr lang="he-IL" sz="1700" dirty="0"/>
           </a:p>
         </p:txBody>
       </p:sp>
@@ -11949,8 +13114,8 @@
         </p:nvSpPr>
         <p:spPr>
           <a:xfrm>
-            <a:off x="777240" y="1965960"/>
-            <a:ext cx="3566160" cy="2377440"/>
+            <a:off x="777240" y="1920240"/>
+            <a:ext cx="3566160" cy="2560320"/>
           </a:xfrm>
           <a:prstGeom prst="rect">
             <a:avLst/>
@@ -11962,15 +13127,11 @@
           <a:bodyPr wrap="square" lIns="0" tIns="0" rIns="0" bIns="0" rtlCol="0" anchor="t"/>
           <a:lstStyle/>
           <a:p>
-            <a:pPr algn="r" marL="342900" indent="-342900">
-              <a:spcAft>
-                <a:spcPts val="600"/>
-              </a:spcAft>
-              <a:buSzPct val="100000"/>
-              <a:buChar char="•"/>
-            </a:pPr>
-            <a:r>
-              <a:rPr lang="he-IL" altLang="en-US" sz="1300" dirty="0">
+            <a:pPr rtl="1" algn="r" indent="0" marL="0">
+              <a:buNone/>
+            </a:pPr>
+            <a:r>
+              <a:rPr lang="he-IL" altLang="en-US" sz="1250" dirty="0">
                 <a:solidFill>
                   <a:srgbClr val="1F2937"/>
                 </a:solidFill>
@@ -11978,51 +13139,9 @@
                 <a:ea typeface="Arial" pitchFamily="34" charset="-122"/>
                 <a:cs typeface="Arial" pitchFamily="34" charset="-120"/>
               </a:rPr>
-              <a:t>שואל מה עוזר, לא רק מה מזיק</a:t>
-            </a:r>
-            <a:endParaRPr lang="he-IL" sz="1300" dirty="0"/>
-          </a:p>
-          <a:p>
-            <a:pPr algn="r" marL="342900" indent="-342900">
-              <a:spcAft>
-                <a:spcPts val="600"/>
-              </a:spcAft>
-              <a:buSzPct val="100000"/>
-              <a:buChar char="•"/>
-            </a:pPr>
-            <a:r>
-              <a:rPr lang="he-IL" altLang="en-US" sz="1300" dirty="0">
-                <a:solidFill>
-                  <a:srgbClr val="1F2937"/>
-                </a:solidFill>
-                <a:latin typeface="Arial" pitchFamily="34" charset="0"/>
-                <a:ea typeface="Arial" pitchFamily="34" charset="-122"/>
-                <a:cs typeface="Arial" pitchFamily="34" charset="-120"/>
-              </a:rPr>
-              <a:t>נותן כלי שבשליטת העובד, בלי לחכות לארגון</a:t>
-            </a:r>
-            <a:endParaRPr lang="he-IL" sz="1300" dirty="0"/>
-          </a:p>
-          <a:p>
-            <a:pPr algn="r" marL="342900" indent="-342900">
-              <a:spcAft>
-                <a:spcPts val="600"/>
-              </a:spcAft>
-              <a:buSzPct val="100000"/>
-              <a:buChar char="•"/>
-            </a:pPr>
-            <a:r>
-              <a:rPr lang="he-IL" altLang="en-US" sz="1300" dirty="0">
-                <a:solidFill>
-                  <a:srgbClr val="1F2937"/>
-                </a:solidFill>
-                <a:latin typeface="Arial" pitchFamily="34" charset="0"/>
-                <a:ea typeface="Arial" pitchFamily="34" charset="-122"/>
-                <a:cs typeface="Arial" pitchFamily="34" charset="-120"/>
-              </a:rPr>
-              <a:t>מבוסס על רעיון של חוקר שפעל בישראל: אהרן אנטונובסקי מאוניברסיטת בן-גוריון</a:t>
-            </a:r>
-            <a:endParaRPr lang="he-IL" sz="1300" dirty="0"/>
+              <a:t>בחרנו במאמר משום שהוא שואל מה עוזר לעובדים ולא רק מה מזיק להם, ומשום שהוא מציע כלי שנמצא בשליטת העובד עצמו ואינו תלוי בארגון. הוא נשען על רעיון שפיתח אהרן אנטונובסקי, שפעל באוניברסיטת בן-גוריון בנגב, ולכן מתחבר גם להקשר הישראלי של הכיתה.</a:t>
+            </a:r>
+            <a:endParaRPr lang="he-IL" sz="1250" dirty="0"/>
           </a:p>
         </p:txBody>
       </p:sp>
@@ -12034,12 +13153,12 @@
         </p:nvSpPr>
         <p:spPr>
           <a:xfrm>
-            <a:off x="548640" y="4663440"/>
-            <a:ext cx="11091672" cy="1600200"/>
+            <a:off x="548640" y="4754880"/>
+            <a:ext cx="11091672" cy="1508760"/>
           </a:xfrm>
           <a:prstGeom prst="roundRect">
             <a:avLst>
-              <a:gd name="adj" fmla="val 6857"/>
+              <a:gd name="adj" fmla="val 7273"/>
             </a:avLst>
           </a:prstGeom>
           <a:solidFill>
@@ -12068,8 +13187,8 @@
         </p:nvSpPr>
         <p:spPr>
           <a:xfrm>
-            <a:off x="777240" y="4754880"/>
-            <a:ext cx="10607040" cy="411480"/>
+            <a:off x="777240" y="4828032"/>
+            <a:ext cx="10607040" cy="365760"/>
           </a:xfrm>
           <a:prstGeom prst="rect">
             <a:avLst/>
@@ -12085,7 +13204,7 @@
               <a:buNone/>
             </a:pPr>
             <a:r>
-              <a:rPr lang="he-IL" altLang="en-US" sz="1500" b="1" dirty="0">
+              <a:rPr lang="he-IL" altLang="en-US" sz="1400" b="1" dirty="0">
                 <a:solidFill>
                   <a:srgbClr val="2A9D8F"/>
                 </a:solidFill>
@@ -12095,7 +13214,7 @@
               </a:rPr>
               <a:t>מאמר משלים (2025, גישה פתוחה)</a:t>
             </a:r>
-            <a:endParaRPr lang="he-IL" sz="1500" dirty="0"/>
+            <a:endParaRPr lang="he-IL" sz="1400" dirty="0"/>
           </a:p>
         </p:txBody>
       </p:sp>
@@ -12107,7 +13226,7 @@
         </p:nvSpPr>
         <p:spPr>
           <a:xfrm>
-            <a:off x="777240" y="5166360"/>
+            <a:off x="777240" y="5193792"/>
             <a:ext cx="10607040" cy="1005840"/>
           </a:xfrm>
           <a:prstGeom prst="rect">
@@ -12120,14 +13239,11 @@
           <a:bodyPr wrap="square" lIns="0" tIns="0" rIns="0" bIns="0" rtlCol="0" anchor="t"/>
           <a:lstStyle/>
           <a:p>
-            <a:pPr algn="r" indent="0" marL="0">
-              <a:spcAft>
-                <a:spcPts val="600"/>
-              </a:spcAft>
-              <a:buNone/>
-            </a:pPr>
-            <a:r>
-              <a:rPr lang="en-US" sz="1200" dirty="0">
+            <a:pPr rtl="1" algn="r" indent="0" marL="0">
+              <a:buNone/>
+            </a:pPr>
+            <a:r>
+              <a:rPr lang="he-IL" altLang="en-US" sz="1250" dirty="0">
                 <a:solidFill>
                   <a:srgbClr val="1F2937"/>
                 </a:solidFill>
@@ -12135,9 +13251,9 @@
                 <a:ea typeface="Arial" pitchFamily="34" charset="-122"/>
                 <a:cs typeface="Arial" pitchFamily="34" charset="-120"/>
               </a:rPr>
-              <a:t>Chung, Y. W., Im, S., Kim, J. E., &amp; Yun, J. K. (2025). Artificial intelligence awareness, career resilience, job insecurity and behavioural outcomes. Australian Journal of Psychology, 77(1), Article 2559910.</a:t>
-            </a:r>
-            <a:endParaRPr lang="en-US" sz="1200" dirty="0"/>
+              <a:t>לצורך הצגת שני מאמרים נבחר מחקר אורך שבחן כיצד המודעות לבינה מלאכותית מייצרת חוסר ביטחון תעסוקתי וכיצד חוסן קריירה ממתן אותו (Chung, Im, Kim &amp; Yun, 2025, Australian Journal of Psychology, 77(1), Article 2559910). המאמר המשלים מספק את האבחנה, והמאמר המרכזי את הטיפול.</a:t>
+            </a:r>
+            <a:endParaRPr lang="he-IL" sz="1250" dirty="0"/>
           </a:p>
         </p:txBody>
       </p:sp>
@@ -14876,12 +15992,8 @@
           <a:bodyPr wrap="square" lIns="0" tIns="0" rIns="0" bIns="0" rtlCol="0" anchor="t"/>
           <a:lstStyle/>
           <a:p>
-            <a:pPr algn="r" marL="342900" indent="-342900">
-              <a:spcAft>
-                <a:spcPts val="500"/>
-              </a:spcAft>
-              <a:buSzPct val="100000"/>
-              <a:buChar char="•"/>
+            <a:pPr rtl="1" algn="r" indent="0" marL="0">
+              <a:buNone/>
             </a:pPr>
             <a:r>
               <a:rPr lang="he-IL" altLang="en-US" sz="1200" dirty="0">
@@ -14892,49 +16004,7 @@
                 <a:ea typeface="Arial" pitchFamily="34" charset="-122"/>
                 <a:cs typeface="Arial" pitchFamily="34" charset="-120"/>
               </a:rPr>
-              <a:t>הירוק מובהק, האפור לא: רק עיצוב לצרכי התקרבות משנה את התפיסה</a:t>
-            </a:r>
-            <a:endParaRPr lang="he-IL" sz="1200" dirty="0"/>
-          </a:p>
-          <a:p>
-            <a:pPr algn="r" marL="342900" indent="-342900">
-              <a:spcAft>
-                <a:spcPts val="500"/>
-              </a:spcAft>
-              <a:buSzPct val="100000"/>
-              <a:buChar char="•"/>
-            </a:pPr>
-            <a:r>
-              <a:rPr lang="he-IL" altLang="en-US" sz="1200" dirty="0">
-                <a:solidFill>
-                  <a:srgbClr val="1F2937"/>
-                </a:solidFill>
-                <a:latin typeface="Arial" pitchFamily="34" charset="0"/>
-                <a:ea typeface="Arial" pitchFamily="34" charset="-122"/>
-                <a:cs typeface="Arial" pitchFamily="34" charset="-120"/>
-              </a:rPr>
-              <a:t>אפקטים בינוניים, אבל מעבר ליציבות גבוהה (0.61 עד 0.70) של המדדים עצמם</a:t>
-            </a:r>
-            <a:endParaRPr lang="he-IL" sz="1200" dirty="0"/>
-          </a:p>
-          <a:p>
-            <a:pPr algn="r" marL="342900" indent="-342900">
-              <a:spcAft>
-                <a:spcPts val="500"/>
-              </a:spcAft>
-              <a:buSzPct val="100000"/>
-              <a:buChar char="•"/>
-            </a:pPr>
-            <a:r>
-              <a:rPr lang="he-IL" altLang="en-US" sz="1200" dirty="0">
-                <a:solidFill>
-                  <a:srgbClr val="1F2937"/>
-                </a:solidFill>
-                <a:latin typeface="Arial" pitchFamily="34" charset="0"/>
-                <a:ea typeface="Arial" pitchFamily="34" charset="-122"/>
-                <a:cs typeface="Arial" pitchFamily="34" charset="-120"/>
-              </a:rPr>
-              <a:t>ניתוח פאנל צולב: כיווניות בזמן, לא הוכחת סיבתיות</a:t>
+              <a:t>רק עיצוב התפקיד לצרכי התקרבות (בירוק) ניבא באופן מובהק את שלושת הרכיבים. האפקטים בינוניים, אך הם מתקבלים מעבר ליציבות גבוהה (0.61 עד 0.70) של המדדים עצמם, ולכן כל שינוי שנשמר אחרי חצי שנה משמעותי. מדובר בקשרים בזמן ולא בהוכחת סיבתיות (Cetkovská et al., 2026).</a:t>
             </a:r>
             <a:endParaRPr lang="he-IL" sz="1200" dirty="0"/>
           </a:p>
@@ -15653,15 +16723,11 @@
           <a:bodyPr wrap="square" lIns="0" tIns="0" rIns="0" bIns="0" rtlCol="0" anchor="t"/>
           <a:lstStyle/>
           <a:p>
-            <a:pPr algn="r" marL="342900" indent="-342900">
-              <a:spcAft>
-                <a:spcPts val="400"/>
-              </a:spcAft>
-              <a:buSzPct val="100000"/>
-              <a:buChar char="•"/>
-            </a:pPr>
-            <a:r>
-              <a:rPr lang="he-IL" altLang="en-US" sz="1350" dirty="0">
+            <a:pPr rtl="1" algn="r" indent="0" marL="0">
+              <a:buNone/>
+            </a:pPr>
+            <a:r>
+              <a:rPr lang="he-IL" altLang="en-US" sz="1300" dirty="0">
                 <a:solidFill>
                   <a:srgbClr val="1F2937"/>
                 </a:solidFill>
@@ -15669,51 +16735,9 @@
                 <a:ea typeface="Arial" pitchFamily="34" charset="-122"/>
                 <a:cs typeface="Arial" pitchFamily="34" charset="-120"/>
               </a:rPr>
-              <a:t>מחקר אורך בשלוש נקודות זמן בקרב עובדי משרד במשרה מלאה בדרום קוריאה</a:t>
-            </a:r>
-            <a:endParaRPr lang="he-IL" sz="1350" dirty="0"/>
-          </a:p>
-          <a:p>
-            <a:pPr algn="r" marL="342900" indent="-342900">
-              <a:spcAft>
-                <a:spcPts val="400"/>
-              </a:spcAft>
-              <a:buSzPct val="100000"/>
-              <a:buChar char="•"/>
-            </a:pPr>
-            <a:r>
-              <a:rPr lang="he-IL" altLang="en-US" sz="1350" dirty="0">
-                <a:solidFill>
-                  <a:srgbClr val="1F2937"/>
-                </a:solidFill>
-                <a:latin typeface="Arial" pitchFamily="34" charset="0"/>
-                <a:ea typeface="Arial" pitchFamily="34" charset="-122"/>
-                <a:cs typeface="Arial" pitchFamily="34" charset="-120"/>
-              </a:rPr>
-              <a:t>עצם המודעות לבינה מלאכותית, עוד לפני שינוי בפועל, מספיקה כדי לייצר חוסר ביטחון</a:t>
-            </a:r>
-            <a:endParaRPr lang="he-IL" sz="1350" dirty="0"/>
-          </a:p>
-          <a:p>
-            <a:pPr algn="r" marL="342900" indent="-342900">
-              <a:spcAft>
-                <a:spcPts val="400"/>
-              </a:spcAft>
-              <a:buSzPct val="100000"/>
-              <a:buChar char="•"/>
-            </a:pPr>
-            <a:r>
-              <a:rPr lang="he-IL" altLang="en-US" sz="1350" dirty="0">
-                <a:solidFill>
-                  <a:srgbClr val="1F2937"/>
-                </a:solidFill>
-                <a:latin typeface="Arial" pitchFamily="34" charset="0"/>
-                <a:ea typeface="Arial" pitchFamily="34" charset="-122"/>
-                <a:cs typeface="Arial" pitchFamily="34" charset="-120"/>
-              </a:rPr>
-              <a:t>החיבור למאמר שלנו: המשלים מראה את האיום ואת המשאב שממתן אותו. המרכזי מראה איך בונים משאב כזה בפועל</a:t>
-            </a:r>
-            <a:endParaRPr lang="he-IL" sz="1350" dirty="0"/>
+              <a:t>במחקר אורך בשלוש נקודות זמן בקרב עובדי משרד במשרה מלאה בדרום קוריאה נמצא שעצם המודעות לבינה מלאכותית, עוד לפני שינוי בפועל, מגבירה חוסר ביטחון תעסוקתי, ושחוסר הביטחון מתווך את הפגיעה בביצועים. חוסן קריירה החליש את הקשר (Chung et al., 2025). המאמר המשלים מספק אפוא את האבחנה, והמאמר המרכזי את הדרך לבנות את המשאב שממתן את האיום.</a:t>
+            </a:r>
+            <a:endParaRPr lang="he-IL" sz="1300" dirty="0"/>
           </a:p>
         </p:txBody>
       </p:sp>

--- a/career-management-final-project/ניהול קריירה - התמודדות עם חוסר ודאות תעסוקתי - מצגת.pptx
+++ b/career-management-final-project/ניהול קריירה - התמודדות עם חוסר ודאות תעסוקתי - מצגת.pptx
@@ -136,7 +136,7 @@
             <a:pPr>
               <a:defRPr sz="1100" b="0" i="0" u="none" strike="noStrike">
                 <a:solidFill>
-                  <a:srgbClr val="000000"/>
+                  <a:srgbClr val="1F4E79"/>
                 </a:solidFill>
                 <a:latin typeface="David"/>
               </a:defRPr>
@@ -144,7 +144,7 @@
             <a:r>
               <a:rPr sz="1100" b="0" i="0" u="none" strike="noStrike">
                 <a:solidFill>
-                  <a:srgbClr val="000000"/>
+                  <a:srgbClr val="1F4E79"/>
                 </a:solidFill>
                 <a:latin typeface="David"/>
               </a:rPr>
@@ -179,7 +179,7 @@
           </c:tx>
           <c:spPr>
             <a:solidFill>
-              <a:srgbClr val="404040"/>
+              <a:srgbClr val="1F4E79"/>
             </a:solidFill>
             <a:effectLst/>
           </c:spPr>
@@ -262,7 +262,7 @@
           </c:tx>
           <c:spPr>
             <a:solidFill>
-              <a:srgbClr val="BFBFBF"/>
+              <a:srgbClr val="ED7D31"/>
             </a:solidFill>
             <a:effectLst/>
           </c:spPr>
@@ -2703,7 +2703,7 @@
             <a:r>
               <a:rPr lang="he-IL" altLang="en-US" sz="3600" b="1" dirty="0">
                 <a:solidFill>
-                  <a:srgbClr val="000000"/>
+                  <a:srgbClr val="1F4E79"/>
                 </a:solidFill>
                 <a:latin typeface="David" pitchFamily="34" charset="0"/>
                 <a:ea typeface="David" pitchFamily="34" charset="-122"/>
@@ -2742,7 +2742,7 @@
             <a:r>
               <a:rPr lang="he-IL" altLang="en-US" sz="1800" dirty="0">
                 <a:solidFill>
-                  <a:srgbClr val="000000"/>
+                  <a:srgbClr val="ED7D31"/>
                 </a:solidFill>
                 <a:latin typeface="David" pitchFamily="34" charset="0"/>
                 <a:ea typeface="David" pitchFamily="34" charset="-122"/>
@@ -2962,7 +2962,7 @@
             <a:r>
               <a:rPr lang="he-IL" altLang="en-US" sz="2800" b="1" dirty="0">
                 <a:solidFill>
-                  <a:srgbClr val="000000"/>
+                  <a:srgbClr val="1F4E79"/>
                 </a:solidFill>
                 <a:latin typeface="David" pitchFamily="34" charset="0"/>
                 <a:ea typeface="David" pitchFamily="34" charset="-122"/>
@@ -3054,7 +3054,7 @@
                       <a:r>
                         <a:rPr lang="en-US" sz="1300" b="1" dirty="0">
                           <a:solidFill>
-                            <a:srgbClr val="000000"/>
+                            <a:srgbClr val="FFFFFF"/>
                           </a:solidFill>
                           <a:latin typeface="David" pitchFamily="34" charset="0"/>
                           <a:ea typeface="David" pitchFamily="34" charset="-122"/>
@@ -3072,7 +3072,7 @@
                   <a:tcPr marL="54864" marR="54864" marT="54864" marB="54864" anchor="ctr">
                     <a:lnL w="9525" cap="flat" cmpd="sng" algn="ctr">
                       <a:solidFill>
-                        <a:srgbClr val="BFBFBF"/>
+                        <a:srgbClr val="9DC3E6"/>
                       </a:solidFill>
                       <a:prstDash val="solid"/>
                       <a:round/>
@@ -3081,7 +3081,7 @@
                     </a:lnL>
                     <a:lnR w="9525" cap="flat" cmpd="sng" algn="ctr">
                       <a:solidFill>
-                        <a:srgbClr val="BFBFBF"/>
+                        <a:srgbClr val="9DC3E6"/>
                       </a:solidFill>
                       <a:prstDash val="solid"/>
                       <a:round/>
@@ -3090,7 +3090,7 @@
                     </a:lnR>
                     <a:lnT w="9525" cap="flat" cmpd="sng" algn="ctr">
                       <a:solidFill>
-                        <a:srgbClr val="BFBFBF"/>
+                        <a:srgbClr val="9DC3E6"/>
                       </a:solidFill>
                       <a:prstDash val="solid"/>
                       <a:round/>
@@ -3099,7 +3099,7 @@
                     </a:lnT>
                     <a:lnB w="9525" cap="flat" cmpd="sng" algn="ctr">
                       <a:solidFill>
-                        <a:srgbClr val="BFBFBF"/>
+                        <a:srgbClr val="9DC3E6"/>
                       </a:solidFill>
                       <a:prstDash val="solid"/>
                       <a:round/>
@@ -3107,7 +3107,7 @@
                       <a:tailEnd type="none" w="med" len="med"/>
                     </a:lnB>
                     <a:solidFill>
-                      <a:srgbClr val="F2F2F2"/>
+                      <a:srgbClr val="1F4E79"/>
                     </a:solidFill>
                   </a:tcPr>
                 </a:tc>
@@ -3122,7 +3122,7 @@
                       <a:r>
                         <a:rPr lang="en-US" sz="1300" b="1" dirty="0">
                           <a:solidFill>
-                            <a:srgbClr val="000000"/>
+                            <a:srgbClr val="FFFFFF"/>
                           </a:solidFill>
                           <a:latin typeface="David" pitchFamily="34" charset="0"/>
                           <a:ea typeface="David" pitchFamily="34" charset="-122"/>
@@ -3140,7 +3140,7 @@
                   <a:tcPr marL="54864" marR="54864" marT="54864" marB="54864" anchor="ctr">
                     <a:lnL w="9525" cap="flat" cmpd="sng" algn="ctr">
                       <a:solidFill>
-                        <a:srgbClr val="BFBFBF"/>
+                        <a:srgbClr val="9DC3E6"/>
                       </a:solidFill>
                       <a:prstDash val="solid"/>
                       <a:round/>
@@ -3149,7 +3149,7 @@
                     </a:lnL>
                     <a:lnR w="9525" cap="flat" cmpd="sng" algn="ctr">
                       <a:solidFill>
-                        <a:srgbClr val="BFBFBF"/>
+                        <a:srgbClr val="9DC3E6"/>
                       </a:solidFill>
                       <a:prstDash val="solid"/>
                       <a:round/>
@@ -3158,7 +3158,7 @@
                     </a:lnR>
                     <a:lnT w="9525" cap="flat" cmpd="sng" algn="ctr">
                       <a:solidFill>
-                        <a:srgbClr val="BFBFBF"/>
+                        <a:srgbClr val="9DC3E6"/>
                       </a:solidFill>
                       <a:prstDash val="solid"/>
                       <a:round/>
@@ -3167,7 +3167,7 @@
                     </a:lnT>
                     <a:lnB w="9525" cap="flat" cmpd="sng" algn="ctr">
                       <a:solidFill>
-                        <a:srgbClr val="BFBFBF"/>
+                        <a:srgbClr val="9DC3E6"/>
                       </a:solidFill>
                       <a:prstDash val="solid"/>
                       <a:round/>
@@ -3175,7 +3175,7 @@
                       <a:tailEnd type="none" w="med" len="med"/>
                     </a:lnB>
                     <a:solidFill>
-                      <a:srgbClr val="F2F2F2"/>
+                      <a:srgbClr val="1F4E79"/>
                     </a:solidFill>
                   </a:tcPr>
                 </a:tc>
@@ -3210,7 +3210,7 @@
                   <a:tcPr marL="54864" marR="54864" marT="54864" marB="54864" anchor="ctr">
                     <a:lnL w="9525" cap="flat" cmpd="sng" algn="ctr">
                       <a:solidFill>
-                        <a:srgbClr val="BFBFBF"/>
+                        <a:srgbClr val="9DC3E6"/>
                       </a:solidFill>
                       <a:prstDash val="solid"/>
                       <a:round/>
@@ -3219,7 +3219,7 @@
                     </a:lnL>
                     <a:lnR w="9525" cap="flat" cmpd="sng" algn="ctr">
                       <a:solidFill>
-                        <a:srgbClr val="BFBFBF"/>
+                        <a:srgbClr val="9DC3E6"/>
                       </a:solidFill>
                       <a:prstDash val="solid"/>
                       <a:round/>
@@ -3228,7 +3228,7 @@
                     </a:lnR>
                     <a:lnT w="9525" cap="flat" cmpd="sng" algn="ctr">
                       <a:solidFill>
-                        <a:srgbClr val="BFBFBF"/>
+                        <a:srgbClr val="9DC3E6"/>
                       </a:solidFill>
                       <a:prstDash val="solid"/>
                       <a:round/>
@@ -3237,7 +3237,7 @@
                     </a:lnT>
                     <a:lnB w="9525" cap="flat" cmpd="sng" algn="ctr">
                       <a:solidFill>
-                        <a:srgbClr val="BFBFBF"/>
+                        <a:srgbClr val="9DC3E6"/>
                       </a:solidFill>
                       <a:prstDash val="solid"/>
                       <a:round/>
@@ -3260,7 +3260,7 @@
                       <a:r>
                         <a:rPr lang="en-US" sz="1250" b="1" dirty="0">
                           <a:solidFill>
-                            <a:srgbClr val="000000"/>
+                            <a:srgbClr val="1F4E79"/>
                           </a:solidFill>
                           <a:latin typeface="David" pitchFamily="34" charset="0"/>
                           <a:ea typeface="David" pitchFamily="34" charset="-122"/>
@@ -3278,7 +3278,7 @@
                   <a:tcPr marL="54864" marR="54864" marT="54864" marB="54864" anchor="ctr">
                     <a:lnL w="9525" cap="flat" cmpd="sng" algn="ctr">
                       <a:solidFill>
-                        <a:srgbClr val="BFBFBF"/>
+                        <a:srgbClr val="9DC3E6"/>
                       </a:solidFill>
                       <a:prstDash val="solid"/>
                       <a:round/>
@@ -3287,7 +3287,7 @@
                     </a:lnL>
                     <a:lnR w="9525" cap="flat" cmpd="sng" algn="ctr">
                       <a:solidFill>
-                        <a:srgbClr val="BFBFBF"/>
+                        <a:srgbClr val="9DC3E6"/>
                       </a:solidFill>
                       <a:prstDash val="solid"/>
                       <a:round/>
@@ -3296,7 +3296,7 @@
                     </a:lnR>
                     <a:lnT w="9525" cap="flat" cmpd="sng" algn="ctr">
                       <a:solidFill>
-                        <a:srgbClr val="BFBFBF"/>
+                        <a:srgbClr val="9DC3E6"/>
                       </a:solidFill>
                       <a:prstDash val="solid"/>
                       <a:round/>
@@ -3305,7 +3305,7 @@
                     </a:lnT>
                     <a:lnB w="9525" cap="flat" cmpd="sng" algn="ctr">
                       <a:solidFill>
-                        <a:srgbClr val="BFBFBF"/>
+                        <a:srgbClr val="9DC3E6"/>
                       </a:solidFill>
                       <a:prstDash val="solid"/>
                       <a:round/>
@@ -3313,7 +3313,7 @@
                       <a:tailEnd type="none" w="med" len="med"/>
                     </a:lnB>
                     <a:solidFill>
-                      <a:srgbClr val="FFFFFF"/>
+                      <a:srgbClr val="DEEAF6"/>
                     </a:solidFill>
                   </a:tcPr>
                 </a:tc>
@@ -3348,7 +3348,7 @@
                   <a:tcPr marL="54864" marR="54864" marT="54864" marB="54864" anchor="ctr">
                     <a:lnL w="9525" cap="flat" cmpd="sng" algn="ctr">
                       <a:solidFill>
-                        <a:srgbClr val="BFBFBF"/>
+                        <a:srgbClr val="9DC3E6"/>
                       </a:solidFill>
                       <a:prstDash val="solid"/>
                       <a:round/>
@@ -3357,7 +3357,7 @@
                     </a:lnL>
                     <a:lnR w="9525" cap="flat" cmpd="sng" algn="ctr">
                       <a:solidFill>
-                        <a:srgbClr val="BFBFBF"/>
+                        <a:srgbClr val="9DC3E6"/>
                       </a:solidFill>
                       <a:prstDash val="solid"/>
                       <a:round/>
@@ -3366,7 +3366,7 @@
                     </a:lnR>
                     <a:lnT w="9525" cap="flat" cmpd="sng" algn="ctr">
                       <a:solidFill>
-                        <a:srgbClr val="BFBFBF"/>
+                        <a:srgbClr val="9DC3E6"/>
                       </a:solidFill>
                       <a:prstDash val="solid"/>
                       <a:round/>
@@ -3375,7 +3375,7 @@
                     </a:lnT>
                     <a:lnB w="9525" cap="flat" cmpd="sng" algn="ctr">
                       <a:solidFill>
-                        <a:srgbClr val="BFBFBF"/>
+                        <a:srgbClr val="9DC3E6"/>
                       </a:solidFill>
                       <a:prstDash val="solid"/>
                       <a:round/>
@@ -3383,7 +3383,7 @@
                       <a:tailEnd type="none" w="med" len="med"/>
                     </a:lnB>
                     <a:solidFill>
-                      <a:srgbClr val="FFFFFF"/>
+                      <a:srgbClr val="F5F8FC"/>
                     </a:solidFill>
                   </a:tcPr>
                 </a:tc>
@@ -3398,7 +3398,7 @@
                       <a:r>
                         <a:rPr lang="en-US" sz="1250" b="1" dirty="0">
                           <a:solidFill>
-                            <a:srgbClr val="000000"/>
+                            <a:srgbClr val="1F4E79"/>
                           </a:solidFill>
                           <a:latin typeface="David" pitchFamily="34" charset="0"/>
                           <a:ea typeface="David" pitchFamily="34" charset="-122"/>
@@ -3416,7 +3416,7 @@
                   <a:tcPr marL="54864" marR="54864" marT="54864" marB="54864" anchor="ctr">
                     <a:lnL w="9525" cap="flat" cmpd="sng" algn="ctr">
                       <a:solidFill>
-                        <a:srgbClr val="BFBFBF"/>
+                        <a:srgbClr val="9DC3E6"/>
                       </a:solidFill>
                       <a:prstDash val="solid"/>
                       <a:round/>
@@ -3425,7 +3425,7 @@
                     </a:lnL>
                     <a:lnR w="9525" cap="flat" cmpd="sng" algn="ctr">
                       <a:solidFill>
-                        <a:srgbClr val="BFBFBF"/>
+                        <a:srgbClr val="9DC3E6"/>
                       </a:solidFill>
                       <a:prstDash val="solid"/>
                       <a:round/>
@@ -3434,7 +3434,7 @@
                     </a:lnR>
                     <a:lnT w="9525" cap="flat" cmpd="sng" algn="ctr">
                       <a:solidFill>
-                        <a:srgbClr val="BFBFBF"/>
+                        <a:srgbClr val="9DC3E6"/>
                       </a:solidFill>
                       <a:prstDash val="solid"/>
                       <a:round/>
@@ -3443,7 +3443,7 @@
                     </a:lnT>
                     <a:lnB w="9525" cap="flat" cmpd="sng" algn="ctr">
                       <a:solidFill>
-                        <a:srgbClr val="BFBFBF"/>
+                        <a:srgbClr val="9DC3E6"/>
                       </a:solidFill>
                       <a:prstDash val="solid"/>
                       <a:round/>
@@ -3451,7 +3451,7 @@
                       <a:tailEnd type="none" w="med" len="med"/>
                     </a:lnB>
                     <a:solidFill>
-                      <a:srgbClr val="FFFFFF"/>
+                      <a:srgbClr val="DEEAF6"/>
                     </a:solidFill>
                   </a:tcPr>
                 </a:tc>
@@ -3486,7 +3486,7 @@
                   <a:tcPr marL="54864" marR="54864" marT="54864" marB="54864" anchor="ctr">
                     <a:lnL w="9525" cap="flat" cmpd="sng" algn="ctr">
                       <a:solidFill>
-                        <a:srgbClr val="BFBFBF"/>
+                        <a:srgbClr val="9DC3E6"/>
                       </a:solidFill>
                       <a:prstDash val="solid"/>
                       <a:round/>
@@ -3495,7 +3495,7 @@
                     </a:lnL>
                     <a:lnR w="9525" cap="flat" cmpd="sng" algn="ctr">
                       <a:solidFill>
-                        <a:srgbClr val="BFBFBF"/>
+                        <a:srgbClr val="9DC3E6"/>
                       </a:solidFill>
                       <a:prstDash val="solid"/>
                       <a:round/>
@@ -3504,7 +3504,7 @@
                     </a:lnR>
                     <a:lnT w="9525" cap="flat" cmpd="sng" algn="ctr">
                       <a:solidFill>
-                        <a:srgbClr val="BFBFBF"/>
+                        <a:srgbClr val="9DC3E6"/>
                       </a:solidFill>
                       <a:prstDash val="solid"/>
                       <a:round/>
@@ -3513,7 +3513,7 @@
                     </a:lnT>
                     <a:lnB w="9525" cap="flat" cmpd="sng" algn="ctr">
                       <a:solidFill>
-                        <a:srgbClr val="BFBFBF"/>
+                        <a:srgbClr val="9DC3E6"/>
                       </a:solidFill>
                       <a:prstDash val="solid"/>
                       <a:round/>
@@ -3536,7 +3536,7 @@
                       <a:r>
                         <a:rPr lang="en-US" sz="1250" b="1" dirty="0">
                           <a:solidFill>
-                            <a:srgbClr val="000000"/>
+                            <a:srgbClr val="1F4E79"/>
                           </a:solidFill>
                           <a:latin typeface="David" pitchFamily="34" charset="0"/>
                           <a:ea typeface="David" pitchFamily="34" charset="-122"/>
@@ -3554,7 +3554,7 @@
                   <a:tcPr marL="54864" marR="54864" marT="54864" marB="54864" anchor="ctr">
                     <a:lnL w="9525" cap="flat" cmpd="sng" algn="ctr">
                       <a:solidFill>
-                        <a:srgbClr val="BFBFBF"/>
+                        <a:srgbClr val="9DC3E6"/>
                       </a:solidFill>
                       <a:prstDash val="solid"/>
                       <a:round/>
@@ -3563,7 +3563,7 @@
                     </a:lnL>
                     <a:lnR w="9525" cap="flat" cmpd="sng" algn="ctr">
                       <a:solidFill>
-                        <a:srgbClr val="BFBFBF"/>
+                        <a:srgbClr val="9DC3E6"/>
                       </a:solidFill>
                       <a:prstDash val="solid"/>
                       <a:round/>
@@ -3572,7 +3572,7 @@
                     </a:lnR>
                     <a:lnT w="9525" cap="flat" cmpd="sng" algn="ctr">
                       <a:solidFill>
-                        <a:srgbClr val="BFBFBF"/>
+                        <a:srgbClr val="9DC3E6"/>
                       </a:solidFill>
                       <a:prstDash val="solid"/>
                       <a:round/>
@@ -3581,7 +3581,7 @@
                     </a:lnT>
                     <a:lnB w="9525" cap="flat" cmpd="sng" algn="ctr">
                       <a:solidFill>
-                        <a:srgbClr val="BFBFBF"/>
+                        <a:srgbClr val="9DC3E6"/>
                       </a:solidFill>
                       <a:prstDash val="solid"/>
                       <a:round/>
@@ -3589,7 +3589,7 @@
                       <a:tailEnd type="none" w="med" len="med"/>
                     </a:lnB>
                     <a:solidFill>
-                      <a:srgbClr val="FFFFFF"/>
+                      <a:srgbClr val="DEEAF6"/>
                     </a:solidFill>
                   </a:tcPr>
                 </a:tc>
@@ -3624,7 +3624,7 @@
                   <a:tcPr marL="54864" marR="54864" marT="54864" marB="54864" anchor="ctr">
                     <a:lnL w="9525" cap="flat" cmpd="sng" algn="ctr">
                       <a:solidFill>
-                        <a:srgbClr val="BFBFBF"/>
+                        <a:srgbClr val="9DC3E6"/>
                       </a:solidFill>
                       <a:prstDash val="solid"/>
                       <a:round/>
@@ -3633,7 +3633,7 @@
                     </a:lnL>
                     <a:lnR w="9525" cap="flat" cmpd="sng" algn="ctr">
                       <a:solidFill>
-                        <a:srgbClr val="BFBFBF"/>
+                        <a:srgbClr val="9DC3E6"/>
                       </a:solidFill>
                       <a:prstDash val="solid"/>
                       <a:round/>
@@ -3642,7 +3642,7 @@
                     </a:lnR>
                     <a:lnT w="9525" cap="flat" cmpd="sng" algn="ctr">
                       <a:solidFill>
-                        <a:srgbClr val="BFBFBF"/>
+                        <a:srgbClr val="9DC3E6"/>
                       </a:solidFill>
                       <a:prstDash val="solid"/>
                       <a:round/>
@@ -3651,7 +3651,7 @@
                     </a:lnT>
                     <a:lnB w="9525" cap="flat" cmpd="sng" algn="ctr">
                       <a:solidFill>
-                        <a:srgbClr val="BFBFBF"/>
+                        <a:srgbClr val="9DC3E6"/>
                       </a:solidFill>
                       <a:prstDash val="solid"/>
                       <a:round/>
@@ -3659,7 +3659,7 @@
                       <a:tailEnd type="none" w="med" len="med"/>
                     </a:lnB>
                     <a:solidFill>
-                      <a:srgbClr val="FFFFFF"/>
+                      <a:srgbClr val="F5F8FC"/>
                     </a:solidFill>
                   </a:tcPr>
                 </a:tc>
@@ -3674,7 +3674,7 @@
                       <a:r>
                         <a:rPr lang="en-US" sz="1250" b="1" dirty="0">
                           <a:solidFill>
-                            <a:srgbClr val="000000"/>
+                            <a:srgbClr val="1F4E79"/>
                           </a:solidFill>
                           <a:latin typeface="David" pitchFamily="34" charset="0"/>
                           <a:ea typeface="David" pitchFamily="34" charset="-122"/>
@@ -3692,7 +3692,7 @@
                   <a:tcPr marL="54864" marR="54864" marT="54864" marB="54864" anchor="ctr">
                     <a:lnL w="9525" cap="flat" cmpd="sng" algn="ctr">
                       <a:solidFill>
-                        <a:srgbClr val="BFBFBF"/>
+                        <a:srgbClr val="9DC3E6"/>
                       </a:solidFill>
                       <a:prstDash val="solid"/>
                       <a:round/>
@@ -3701,7 +3701,7 @@
                     </a:lnL>
                     <a:lnR w="9525" cap="flat" cmpd="sng" algn="ctr">
                       <a:solidFill>
-                        <a:srgbClr val="BFBFBF"/>
+                        <a:srgbClr val="9DC3E6"/>
                       </a:solidFill>
                       <a:prstDash val="solid"/>
                       <a:round/>
@@ -3710,7 +3710,7 @@
                     </a:lnR>
                     <a:lnT w="9525" cap="flat" cmpd="sng" algn="ctr">
                       <a:solidFill>
-                        <a:srgbClr val="BFBFBF"/>
+                        <a:srgbClr val="9DC3E6"/>
                       </a:solidFill>
                       <a:prstDash val="solid"/>
                       <a:round/>
@@ -3719,7 +3719,7 @@
                     </a:lnT>
                     <a:lnB w="9525" cap="flat" cmpd="sng" algn="ctr">
                       <a:solidFill>
-                        <a:srgbClr val="BFBFBF"/>
+                        <a:srgbClr val="9DC3E6"/>
                       </a:solidFill>
                       <a:prstDash val="solid"/>
                       <a:round/>
@@ -3727,7 +3727,7 @@
                       <a:tailEnd type="none" w="med" len="med"/>
                     </a:lnB>
                     <a:solidFill>
-                      <a:srgbClr val="FFFFFF"/>
+                      <a:srgbClr val="DEEAF6"/>
                     </a:solidFill>
                   </a:tcPr>
                 </a:tc>
@@ -3762,7 +3762,7 @@
                   <a:tcPr marL="54864" marR="54864" marT="54864" marB="54864" anchor="ctr">
                     <a:lnL w="9525" cap="flat" cmpd="sng" algn="ctr">
                       <a:solidFill>
-                        <a:srgbClr val="BFBFBF"/>
+                        <a:srgbClr val="9DC3E6"/>
                       </a:solidFill>
                       <a:prstDash val="solid"/>
                       <a:round/>
@@ -3771,7 +3771,7 @@
                     </a:lnL>
                     <a:lnR w="9525" cap="flat" cmpd="sng" algn="ctr">
                       <a:solidFill>
-                        <a:srgbClr val="BFBFBF"/>
+                        <a:srgbClr val="9DC3E6"/>
                       </a:solidFill>
                       <a:prstDash val="solid"/>
                       <a:round/>
@@ -3780,7 +3780,7 @@
                     </a:lnR>
                     <a:lnT w="9525" cap="flat" cmpd="sng" algn="ctr">
                       <a:solidFill>
-                        <a:srgbClr val="BFBFBF"/>
+                        <a:srgbClr val="9DC3E6"/>
                       </a:solidFill>
                       <a:prstDash val="solid"/>
                       <a:round/>
@@ -3789,7 +3789,7 @@
                     </a:lnT>
                     <a:lnB w="9525" cap="flat" cmpd="sng" algn="ctr">
                       <a:solidFill>
-                        <a:srgbClr val="BFBFBF"/>
+                        <a:srgbClr val="9DC3E6"/>
                       </a:solidFill>
                       <a:prstDash val="solid"/>
                       <a:round/>
@@ -3812,7 +3812,7 @@
                       <a:r>
                         <a:rPr lang="en-US" sz="1250" b="1" dirty="0">
                           <a:solidFill>
-                            <a:srgbClr val="000000"/>
+                            <a:srgbClr val="1F4E79"/>
                           </a:solidFill>
                           <a:latin typeface="David" pitchFamily="34" charset="0"/>
                           <a:ea typeface="David" pitchFamily="34" charset="-122"/>
@@ -3830,7 +3830,7 @@
                   <a:tcPr marL="54864" marR="54864" marT="54864" marB="54864" anchor="ctr">
                     <a:lnL w="9525" cap="flat" cmpd="sng" algn="ctr">
                       <a:solidFill>
-                        <a:srgbClr val="BFBFBF"/>
+                        <a:srgbClr val="9DC3E6"/>
                       </a:solidFill>
                       <a:prstDash val="solid"/>
                       <a:round/>
@@ -3839,7 +3839,7 @@
                     </a:lnL>
                     <a:lnR w="9525" cap="flat" cmpd="sng" algn="ctr">
                       <a:solidFill>
-                        <a:srgbClr val="BFBFBF"/>
+                        <a:srgbClr val="9DC3E6"/>
                       </a:solidFill>
                       <a:prstDash val="solid"/>
                       <a:round/>
@@ -3848,7 +3848,7 @@
                     </a:lnR>
                     <a:lnT w="9525" cap="flat" cmpd="sng" algn="ctr">
                       <a:solidFill>
-                        <a:srgbClr val="BFBFBF"/>
+                        <a:srgbClr val="9DC3E6"/>
                       </a:solidFill>
                       <a:prstDash val="solid"/>
                       <a:round/>
@@ -3857,7 +3857,7 @@
                     </a:lnT>
                     <a:lnB w="9525" cap="flat" cmpd="sng" algn="ctr">
                       <a:solidFill>
-                        <a:srgbClr val="BFBFBF"/>
+                        <a:srgbClr val="9DC3E6"/>
                       </a:solidFill>
                       <a:prstDash val="solid"/>
                       <a:round/>
@@ -3865,7 +3865,7 @@
                       <a:tailEnd type="none" w="med" len="med"/>
                     </a:lnB>
                     <a:solidFill>
-                      <a:srgbClr val="FFFFFF"/>
+                      <a:srgbClr val="DEEAF6"/>
                     </a:solidFill>
                   </a:tcPr>
                 </a:tc>
@@ -3900,7 +3900,7 @@
                   <a:tcPr marL="54864" marR="54864" marT="54864" marB="54864" anchor="ctr">
                     <a:lnL w="9525" cap="flat" cmpd="sng" algn="ctr">
                       <a:solidFill>
-                        <a:srgbClr val="BFBFBF"/>
+                        <a:srgbClr val="9DC3E6"/>
                       </a:solidFill>
                       <a:prstDash val="solid"/>
                       <a:round/>
@@ -3909,7 +3909,7 @@
                     </a:lnL>
                     <a:lnR w="9525" cap="flat" cmpd="sng" algn="ctr">
                       <a:solidFill>
-                        <a:srgbClr val="BFBFBF"/>
+                        <a:srgbClr val="9DC3E6"/>
                       </a:solidFill>
                       <a:prstDash val="solid"/>
                       <a:round/>
@@ -3918,7 +3918,7 @@
                     </a:lnR>
                     <a:lnT w="9525" cap="flat" cmpd="sng" algn="ctr">
                       <a:solidFill>
-                        <a:srgbClr val="BFBFBF"/>
+                        <a:srgbClr val="9DC3E6"/>
                       </a:solidFill>
                       <a:prstDash val="solid"/>
                       <a:round/>
@@ -3927,7 +3927,7 @@
                     </a:lnT>
                     <a:lnB w="9525" cap="flat" cmpd="sng" algn="ctr">
                       <a:solidFill>
-                        <a:srgbClr val="BFBFBF"/>
+                        <a:srgbClr val="9DC3E6"/>
                       </a:solidFill>
                       <a:prstDash val="solid"/>
                       <a:round/>
@@ -3935,7 +3935,7 @@
                       <a:tailEnd type="none" w="med" len="med"/>
                     </a:lnB>
                     <a:solidFill>
-                      <a:srgbClr val="FFFFFF"/>
+                      <a:srgbClr val="F5F8FC"/>
                     </a:solidFill>
                   </a:tcPr>
                 </a:tc>
@@ -3950,7 +3950,7 @@
                       <a:r>
                         <a:rPr lang="en-US" sz="1250" b="1" dirty="0">
                           <a:solidFill>
-                            <a:srgbClr val="000000"/>
+                            <a:srgbClr val="1F4E79"/>
                           </a:solidFill>
                           <a:latin typeface="David" pitchFamily="34" charset="0"/>
                           <a:ea typeface="David" pitchFamily="34" charset="-122"/>
@@ -3968,7 +3968,7 @@
                   <a:tcPr marL="54864" marR="54864" marT="54864" marB="54864" anchor="ctr">
                     <a:lnL w="9525" cap="flat" cmpd="sng" algn="ctr">
                       <a:solidFill>
-                        <a:srgbClr val="BFBFBF"/>
+                        <a:srgbClr val="9DC3E6"/>
                       </a:solidFill>
                       <a:prstDash val="solid"/>
                       <a:round/>
@@ -3977,7 +3977,7 @@
                     </a:lnL>
                     <a:lnR w="9525" cap="flat" cmpd="sng" algn="ctr">
                       <a:solidFill>
-                        <a:srgbClr val="BFBFBF"/>
+                        <a:srgbClr val="9DC3E6"/>
                       </a:solidFill>
                       <a:prstDash val="solid"/>
                       <a:round/>
@@ -3986,7 +3986,7 @@
                     </a:lnR>
                     <a:lnT w="9525" cap="flat" cmpd="sng" algn="ctr">
                       <a:solidFill>
-                        <a:srgbClr val="BFBFBF"/>
+                        <a:srgbClr val="9DC3E6"/>
                       </a:solidFill>
                       <a:prstDash val="solid"/>
                       <a:round/>
@@ -3995,7 +3995,7 @@
                     </a:lnT>
                     <a:lnB w="9525" cap="flat" cmpd="sng" algn="ctr">
                       <a:solidFill>
-                        <a:srgbClr val="BFBFBF"/>
+                        <a:srgbClr val="9DC3E6"/>
                       </a:solidFill>
                       <a:prstDash val="solid"/>
                       <a:round/>
@@ -4003,7 +4003,7 @@
                       <a:tailEnd type="none" w="med" len="med"/>
                     </a:lnB>
                     <a:solidFill>
-                      <a:srgbClr val="FFFFFF"/>
+                      <a:srgbClr val="DEEAF6"/>
                     </a:solidFill>
                   </a:tcPr>
                 </a:tc>
@@ -4039,7 +4039,7 @@
             <a:r>
               <a:rPr lang="he-IL" altLang="en-US" sz="1000" dirty="0">
                 <a:solidFill>
-                  <a:srgbClr val="595959"/>
+                  <a:srgbClr val="1F4E79"/>
                 </a:solidFill>
                 <a:latin typeface="David" pitchFamily="34" charset="0"/>
                 <a:ea typeface="David" pitchFamily="34" charset="-122"/>
@@ -4142,7 +4142,7 @@
             <a:r>
               <a:rPr lang="he-IL" altLang="en-US" sz="2800" b="1" dirty="0">
                 <a:solidFill>
-                  <a:srgbClr val="000000"/>
+                  <a:srgbClr val="1F4E79"/>
                 </a:solidFill>
                 <a:latin typeface="David" pitchFamily="34" charset="0"/>
                 <a:ea typeface="David" pitchFamily="34" charset="-122"/>
@@ -4265,7 +4265,7 @@
             <a:r>
               <a:rPr lang="he-IL" altLang="en-US" sz="1000" dirty="0">
                 <a:solidFill>
-                  <a:srgbClr val="595959"/>
+                  <a:srgbClr val="1F4E79"/>
                 </a:solidFill>
                 <a:latin typeface="David" pitchFamily="34" charset="0"/>
                 <a:ea typeface="David" pitchFamily="34" charset="-122"/>
@@ -4368,7 +4368,7 @@
             <a:r>
               <a:rPr lang="he-IL" altLang="en-US" sz="2800" b="1" dirty="0">
                 <a:solidFill>
-                  <a:srgbClr val="000000"/>
+                  <a:srgbClr val="1F4E79"/>
                 </a:solidFill>
                 <a:latin typeface="David" pitchFamily="34" charset="0"/>
                 <a:ea typeface="David" pitchFamily="34" charset="-122"/>
@@ -4491,7 +4491,7 @@
             <a:r>
               <a:rPr lang="he-IL" altLang="en-US" sz="1000" dirty="0">
                 <a:solidFill>
-                  <a:srgbClr val="595959"/>
+                  <a:srgbClr val="1F4E79"/>
                 </a:solidFill>
                 <a:latin typeface="David" pitchFamily="34" charset="0"/>
                 <a:ea typeface="David" pitchFamily="34" charset="-122"/>
@@ -4594,7 +4594,7 @@
             <a:r>
               <a:rPr lang="he-IL" altLang="en-US" sz="2800" b="1" dirty="0">
                 <a:solidFill>
-                  <a:srgbClr val="000000"/>
+                  <a:srgbClr val="1F4E79"/>
                 </a:solidFill>
                 <a:latin typeface="David" pitchFamily="34" charset="0"/>
                 <a:ea typeface="David" pitchFamily="34" charset="-122"/>
@@ -4687,7 +4687,7 @@
                       <a:r>
                         <a:rPr lang="en-US" sz="1300" b="1" dirty="0">
                           <a:solidFill>
-                            <a:srgbClr val="000000"/>
+                            <a:srgbClr val="FFFFFF"/>
                           </a:solidFill>
                           <a:latin typeface="David" pitchFamily="34" charset="0"/>
                           <a:ea typeface="David" pitchFamily="34" charset="-122"/>
@@ -4705,7 +4705,7 @@
                   <a:tcPr marL="54864" marR="54864" marT="54864" marB="54864" anchor="ctr">
                     <a:lnL w="9525" cap="flat" cmpd="sng" algn="ctr">
                       <a:solidFill>
-                        <a:srgbClr val="BFBFBF"/>
+                        <a:srgbClr val="9DC3E6"/>
                       </a:solidFill>
                       <a:prstDash val="solid"/>
                       <a:round/>
@@ -4714,7 +4714,7 @@
                     </a:lnL>
                     <a:lnR w="9525" cap="flat" cmpd="sng" algn="ctr">
                       <a:solidFill>
-                        <a:srgbClr val="BFBFBF"/>
+                        <a:srgbClr val="9DC3E6"/>
                       </a:solidFill>
                       <a:prstDash val="solid"/>
                       <a:round/>
@@ -4723,7 +4723,7 @@
                     </a:lnR>
                     <a:lnT w="9525" cap="flat" cmpd="sng" algn="ctr">
                       <a:solidFill>
-                        <a:srgbClr val="BFBFBF"/>
+                        <a:srgbClr val="9DC3E6"/>
                       </a:solidFill>
                       <a:prstDash val="solid"/>
                       <a:round/>
@@ -4732,7 +4732,7 @@
                     </a:lnT>
                     <a:lnB w="9525" cap="flat" cmpd="sng" algn="ctr">
                       <a:solidFill>
-                        <a:srgbClr val="BFBFBF"/>
+                        <a:srgbClr val="9DC3E6"/>
                       </a:solidFill>
                       <a:prstDash val="solid"/>
                       <a:round/>
@@ -4740,7 +4740,7 @@
                       <a:tailEnd type="none" w="med" len="med"/>
                     </a:lnB>
                     <a:solidFill>
-                      <a:srgbClr val="F2F2F2"/>
+                      <a:srgbClr val="1F4E79"/>
                     </a:solidFill>
                   </a:tcPr>
                 </a:tc>
@@ -4755,7 +4755,7 @@
                       <a:r>
                         <a:rPr lang="en-US" sz="1300" b="1" dirty="0">
                           <a:solidFill>
-                            <a:srgbClr val="000000"/>
+                            <a:srgbClr val="FFFFFF"/>
                           </a:solidFill>
                           <a:latin typeface="David" pitchFamily="34" charset="0"/>
                           <a:ea typeface="David" pitchFamily="34" charset="-122"/>
@@ -4773,7 +4773,7 @@
                   <a:tcPr marL="54864" marR="54864" marT="54864" marB="54864" anchor="ctr">
                     <a:lnL w="9525" cap="flat" cmpd="sng" algn="ctr">
                       <a:solidFill>
-                        <a:srgbClr val="BFBFBF"/>
+                        <a:srgbClr val="9DC3E6"/>
                       </a:solidFill>
                       <a:prstDash val="solid"/>
                       <a:round/>
@@ -4782,7 +4782,7 @@
                     </a:lnL>
                     <a:lnR w="9525" cap="flat" cmpd="sng" algn="ctr">
                       <a:solidFill>
-                        <a:srgbClr val="BFBFBF"/>
+                        <a:srgbClr val="9DC3E6"/>
                       </a:solidFill>
                       <a:prstDash val="solid"/>
                       <a:round/>
@@ -4791,7 +4791,7 @@
                     </a:lnR>
                     <a:lnT w="9525" cap="flat" cmpd="sng" algn="ctr">
                       <a:solidFill>
-                        <a:srgbClr val="BFBFBF"/>
+                        <a:srgbClr val="9DC3E6"/>
                       </a:solidFill>
                       <a:prstDash val="solid"/>
                       <a:round/>
@@ -4800,7 +4800,7 @@
                     </a:lnT>
                     <a:lnB w="9525" cap="flat" cmpd="sng" algn="ctr">
                       <a:solidFill>
-                        <a:srgbClr val="BFBFBF"/>
+                        <a:srgbClr val="9DC3E6"/>
                       </a:solidFill>
                       <a:prstDash val="solid"/>
                       <a:round/>
@@ -4808,7 +4808,7 @@
                       <a:tailEnd type="none" w="med" len="med"/>
                     </a:lnB>
                     <a:solidFill>
-                      <a:srgbClr val="F2F2F2"/>
+                      <a:srgbClr val="1F4E79"/>
                     </a:solidFill>
                   </a:tcPr>
                 </a:tc>
@@ -4823,7 +4823,7 @@
                       <a:r>
                         <a:rPr lang="en-US" sz="1300" b="1" dirty="0">
                           <a:solidFill>
-                            <a:srgbClr val="000000"/>
+                            <a:srgbClr val="FFFFFF"/>
                           </a:solidFill>
                           <a:latin typeface="David" pitchFamily="34" charset="0"/>
                           <a:ea typeface="David" pitchFamily="34" charset="-122"/>
@@ -4841,7 +4841,7 @@
                   <a:tcPr marL="54864" marR="54864" marT="54864" marB="54864" anchor="ctr">
                     <a:lnL w="9525" cap="flat" cmpd="sng" algn="ctr">
                       <a:solidFill>
-                        <a:srgbClr val="BFBFBF"/>
+                        <a:srgbClr val="9DC3E6"/>
                       </a:solidFill>
                       <a:prstDash val="solid"/>
                       <a:round/>
@@ -4850,7 +4850,7 @@
                     </a:lnL>
                     <a:lnR w="9525" cap="flat" cmpd="sng" algn="ctr">
                       <a:solidFill>
-                        <a:srgbClr val="BFBFBF"/>
+                        <a:srgbClr val="9DC3E6"/>
                       </a:solidFill>
                       <a:prstDash val="solid"/>
                       <a:round/>
@@ -4859,7 +4859,7 @@
                     </a:lnR>
                     <a:lnT w="9525" cap="flat" cmpd="sng" algn="ctr">
                       <a:solidFill>
-                        <a:srgbClr val="BFBFBF"/>
+                        <a:srgbClr val="9DC3E6"/>
                       </a:solidFill>
                       <a:prstDash val="solid"/>
                       <a:round/>
@@ -4868,7 +4868,7 @@
                     </a:lnT>
                     <a:lnB w="9525" cap="flat" cmpd="sng" algn="ctr">
                       <a:solidFill>
-                        <a:srgbClr val="BFBFBF"/>
+                        <a:srgbClr val="9DC3E6"/>
                       </a:solidFill>
                       <a:prstDash val="solid"/>
                       <a:round/>
@@ -4876,7 +4876,7 @@
                       <a:tailEnd type="none" w="med" len="med"/>
                     </a:lnB>
                     <a:solidFill>
-                      <a:srgbClr val="F2F2F2"/>
+                      <a:srgbClr val="1F4E79"/>
                     </a:solidFill>
                   </a:tcPr>
                 </a:tc>
@@ -4911,7 +4911,7 @@
                   <a:tcPr marL="54864" marR="54864" marT="54864" marB="54864" anchor="ctr">
                     <a:lnL w="9525" cap="flat" cmpd="sng" algn="ctr">
                       <a:solidFill>
-                        <a:srgbClr val="BFBFBF"/>
+                        <a:srgbClr val="9DC3E6"/>
                       </a:solidFill>
                       <a:prstDash val="solid"/>
                       <a:round/>
@@ -4920,7 +4920,7 @@
                     </a:lnL>
                     <a:lnR w="9525" cap="flat" cmpd="sng" algn="ctr">
                       <a:solidFill>
-                        <a:srgbClr val="BFBFBF"/>
+                        <a:srgbClr val="9DC3E6"/>
                       </a:solidFill>
                       <a:prstDash val="solid"/>
                       <a:round/>
@@ -4929,7 +4929,7 @@
                     </a:lnR>
                     <a:lnT w="9525" cap="flat" cmpd="sng" algn="ctr">
                       <a:solidFill>
-                        <a:srgbClr val="BFBFBF"/>
+                        <a:srgbClr val="9DC3E6"/>
                       </a:solidFill>
                       <a:prstDash val="solid"/>
                       <a:round/>
@@ -4938,7 +4938,7 @@
                     </a:lnT>
                     <a:lnB w="9525" cap="flat" cmpd="sng" algn="ctr">
                       <a:solidFill>
-                        <a:srgbClr val="BFBFBF"/>
+                        <a:srgbClr val="9DC3E6"/>
                       </a:solidFill>
                       <a:prstDash val="solid"/>
                       <a:round/>
@@ -4979,7 +4979,7 @@
                   <a:tcPr marL="54864" marR="54864" marT="54864" marB="54864" anchor="ctr">
                     <a:lnL w="9525" cap="flat" cmpd="sng" algn="ctr">
                       <a:solidFill>
-                        <a:srgbClr val="BFBFBF"/>
+                        <a:srgbClr val="9DC3E6"/>
                       </a:solidFill>
                       <a:prstDash val="solid"/>
                       <a:round/>
@@ -4988,7 +4988,7 @@
                     </a:lnL>
                     <a:lnR w="9525" cap="flat" cmpd="sng" algn="ctr">
                       <a:solidFill>
-                        <a:srgbClr val="BFBFBF"/>
+                        <a:srgbClr val="9DC3E6"/>
                       </a:solidFill>
                       <a:prstDash val="solid"/>
                       <a:round/>
@@ -4997,7 +4997,7 @@
                     </a:lnR>
                     <a:lnT w="9525" cap="flat" cmpd="sng" algn="ctr">
                       <a:solidFill>
-                        <a:srgbClr val="BFBFBF"/>
+                        <a:srgbClr val="9DC3E6"/>
                       </a:solidFill>
                       <a:prstDash val="solid"/>
                       <a:round/>
@@ -5006,7 +5006,7 @@
                     </a:lnT>
                     <a:lnB w="9525" cap="flat" cmpd="sng" algn="ctr">
                       <a:solidFill>
-                        <a:srgbClr val="BFBFBF"/>
+                        <a:srgbClr val="9DC3E6"/>
                       </a:solidFill>
                       <a:prstDash val="solid"/>
                       <a:round/>
@@ -5029,7 +5029,7 @@
                       <a:r>
                         <a:rPr lang="en-US" sz="1250" b="1" dirty="0">
                           <a:solidFill>
-                            <a:srgbClr val="000000"/>
+                            <a:srgbClr val="1F4E79"/>
                           </a:solidFill>
                           <a:latin typeface="David" pitchFamily="34" charset="0"/>
                           <a:ea typeface="David" pitchFamily="34" charset="-122"/>
@@ -5047,7 +5047,7 @@
                   <a:tcPr marL="54864" marR="54864" marT="54864" marB="54864" anchor="ctr">
                     <a:lnL w="9525" cap="flat" cmpd="sng" algn="ctr">
                       <a:solidFill>
-                        <a:srgbClr val="BFBFBF"/>
+                        <a:srgbClr val="9DC3E6"/>
                       </a:solidFill>
                       <a:prstDash val="solid"/>
                       <a:round/>
@@ -5056,7 +5056,7 @@
                     </a:lnL>
                     <a:lnR w="9525" cap="flat" cmpd="sng" algn="ctr">
                       <a:solidFill>
-                        <a:srgbClr val="BFBFBF"/>
+                        <a:srgbClr val="9DC3E6"/>
                       </a:solidFill>
                       <a:prstDash val="solid"/>
                       <a:round/>
@@ -5065,7 +5065,7 @@
                     </a:lnR>
                     <a:lnT w="9525" cap="flat" cmpd="sng" algn="ctr">
                       <a:solidFill>
-                        <a:srgbClr val="BFBFBF"/>
+                        <a:srgbClr val="9DC3E6"/>
                       </a:solidFill>
                       <a:prstDash val="solid"/>
                       <a:round/>
@@ -5074,7 +5074,7 @@
                     </a:lnT>
                     <a:lnB w="9525" cap="flat" cmpd="sng" algn="ctr">
                       <a:solidFill>
-                        <a:srgbClr val="BFBFBF"/>
+                        <a:srgbClr val="9DC3E6"/>
                       </a:solidFill>
                       <a:prstDash val="solid"/>
                       <a:round/>
@@ -5082,7 +5082,7 @@
                       <a:tailEnd type="none" w="med" len="med"/>
                     </a:lnB>
                     <a:solidFill>
-                      <a:srgbClr val="FFFFFF"/>
+                      <a:srgbClr val="DEEAF6"/>
                     </a:solidFill>
                   </a:tcPr>
                 </a:tc>
@@ -5117,7 +5117,7 @@
                   <a:tcPr marL="54864" marR="54864" marT="54864" marB="54864" anchor="ctr">
                     <a:lnL w="9525" cap="flat" cmpd="sng" algn="ctr">
                       <a:solidFill>
-                        <a:srgbClr val="BFBFBF"/>
+                        <a:srgbClr val="9DC3E6"/>
                       </a:solidFill>
                       <a:prstDash val="solid"/>
                       <a:round/>
@@ -5126,7 +5126,7 @@
                     </a:lnL>
                     <a:lnR w="9525" cap="flat" cmpd="sng" algn="ctr">
                       <a:solidFill>
-                        <a:srgbClr val="BFBFBF"/>
+                        <a:srgbClr val="9DC3E6"/>
                       </a:solidFill>
                       <a:prstDash val="solid"/>
                       <a:round/>
@@ -5135,7 +5135,7 @@
                     </a:lnR>
                     <a:lnT w="9525" cap="flat" cmpd="sng" algn="ctr">
                       <a:solidFill>
-                        <a:srgbClr val="BFBFBF"/>
+                        <a:srgbClr val="9DC3E6"/>
                       </a:solidFill>
                       <a:prstDash val="solid"/>
                       <a:round/>
@@ -5144,7 +5144,7 @@
                     </a:lnT>
                     <a:lnB w="9525" cap="flat" cmpd="sng" algn="ctr">
                       <a:solidFill>
-                        <a:srgbClr val="BFBFBF"/>
+                        <a:srgbClr val="9DC3E6"/>
                       </a:solidFill>
                       <a:prstDash val="solid"/>
                       <a:round/>
@@ -5152,7 +5152,7 @@
                       <a:tailEnd type="none" w="med" len="med"/>
                     </a:lnB>
                     <a:solidFill>
-                      <a:srgbClr val="FFFFFF"/>
+                      <a:srgbClr val="F5F8FC"/>
                     </a:solidFill>
                   </a:tcPr>
                 </a:tc>
@@ -5185,7 +5185,7 @@
                   <a:tcPr marL="54864" marR="54864" marT="54864" marB="54864" anchor="ctr">
                     <a:lnL w="9525" cap="flat" cmpd="sng" algn="ctr">
                       <a:solidFill>
-                        <a:srgbClr val="BFBFBF"/>
+                        <a:srgbClr val="9DC3E6"/>
                       </a:solidFill>
                       <a:prstDash val="solid"/>
                       <a:round/>
@@ -5194,7 +5194,7 @@
                     </a:lnL>
                     <a:lnR w="9525" cap="flat" cmpd="sng" algn="ctr">
                       <a:solidFill>
-                        <a:srgbClr val="BFBFBF"/>
+                        <a:srgbClr val="9DC3E6"/>
                       </a:solidFill>
                       <a:prstDash val="solid"/>
                       <a:round/>
@@ -5203,7 +5203,7 @@
                     </a:lnR>
                     <a:lnT w="9525" cap="flat" cmpd="sng" algn="ctr">
                       <a:solidFill>
-                        <a:srgbClr val="BFBFBF"/>
+                        <a:srgbClr val="9DC3E6"/>
                       </a:solidFill>
                       <a:prstDash val="solid"/>
                       <a:round/>
@@ -5212,7 +5212,7 @@
                     </a:lnT>
                     <a:lnB w="9525" cap="flat" cmpd="sng" algn="ctr">
                       <a:solidFill>
-                        <a:srgbClr val="BFBFBF"/>
+                        <a:srgbClr val="9DC3E6"/>
                       </a:solidFill>
                       <a:prstDash val="solid"/>
                       <a:round/>
@@ -5220,7 +5220,7 @@
                       <a:tailEnd type="none" w="med" len="med"/>
                     </a:lnB>
                     <a:solidFill>
-                      <a:srgbClr val="FFFFFF"/>
+                      <a:srgbClr val="F5F8FC"/>
                     </a:solidFill>
                   </a:tcPr>
                 </a:tc>
@@ -5235,7 +5235,7 @@
                       <a:r>
                         <a:rPr lang="en-US" sz="1250" b="1" dirty="0">
                           <a:solidFill>
-                            <a:srgbClr val="000000"/>
+                            <a:srgbClr val="1F4E79"/>
                           </a:solidFill>
                           <a:latin typeface="David" pitchFamily="34" charset="0"/>
                           <a:ea typeface="David" pitchFamily="34" charset="-122"/>
@@ -5253,7 +5253,7 @@
                   <a:tcPr marL="54864" marR="54864" marT="54864" marB="54864" anchor="ctr">
                     <a:lnL w="9525" cap="flat" cmpd="sng" algn="ctr">
                       <a:solidFill>
-                        <a:srgbClr val="BFBFBF"/>
+                        <a:srgbClr val="9DC3E6"/>
                       </a:solidFill>
                       <a:prstDash val="solid"/>
                       <a:round/>
@@ -5262,7 +5262,7 @@
                     </a:lnL>
                     <a:lnR w="9525" cap="flat" cmpd="sng" algn="ctr">
                       <a:solidFill>
-                        <a:srgbClr val="BFBFBF"/>
+                        <a:srgbClr val="9DC3E6"/>
                       </a:solidFill>
                       <a:prstDash val="solid"/>
                       <a:round/>
@@ -5271,7 +5271,7 @@
                     </a:lnR>
                     <a:lnT w="9525" cap="flat" cmpd="sng" algn="ctr">
                       <a:solidFill>
-                        <a:srgbClr val="BFBFBF"/>
+                        <a:srgbClr val="9DC3E6"/>
                       </a:solidFill>
                       <a:prstDash val="solid"/>
                       <a:round/>
@@ -5280,7 +5280,7 @@
                     </a:lnT>
                     <a:lnB w="9525" cap="flat" cmpd="sng" algn="ctr">
                       <a:solidFill>
-                        <a:srgbClr val="BFBFBF"/>
+                        <a:srgbClr val="9DC3E6"/>
                       </a:solidFill>
                       <a:prstDash val="solid"/>
                       <a:round/>
@@ -5288,7 +5288,7 @@
                       <a:tailEnd type="none" w="med" len="med"/>
                     </a:lnB>
                     <a:solidFill>
-                      <a:srgbClr val="FFFFFF"/>
+                      <a:srgbClr val="DEEAF6"/>
                     </a:solidFill>
                   </a:tcPr>
                 </a:tc>
@@ -5323,7 +5323,7 @@
                   <a:tcPr marL="54864" marR="54864" marT="54864" marB="54864" anchor="ctr">
                     <a:lnL w="9525" cap="flat" cmpd="sng" algn="ctr">
                       <a:solidFill>
-                        <a:srgbClr val="BFBFBF"/>
+                        <a:srgbClr val="9DC3E6"/>
                       </a:solidFill>
                       <a:prstDash val="solid"/>
                       <a:round/>
@@ -5332,7 +5332,7 @@
                     </a:lnL>
                     <a:lnR w="9525" cap="flat" cmpd="sng" algn="ctr">
                       <a:solidFill>
-                        <a:srgbClr val="BFBFBF"/>
+                        <a:srgbClr val="9DC3E6"/>
                       </a:solidFill>
                       <a:prstDash val="solid"/>
                       <a:round/>
@@ -5341,7 +5341,7 @@
                     </a:lnR>
                     <a:lnT w="9525" cap="flat" cmpd="sng" algn="ctr">
                       <a:solidFill>
-                        <a:srgbClr val="BFBFBF"/>
+                        <a:srgbClr val="9DC3E6"/>
                       </a:solidFill>
                       <a:prstDash val="solid"/>
                       <a:round/>
@@ -5350,7 +5350,7 @@
                     </a:lnT>
                     <a:lnB w="9525" cap="flat" cmpd="sng" algn="ctr">
                       <a:solidFill>
-                        <a:srgbClr val="BFBFBF"/>
+                        <a:srgbClr val="9DC3E6"/>
                       </a:solidFill>
                       <a:prstDash val="solid"/>
                       <a:round/>
@@ -5391,7 +5391,7 @@
                   <a:tcPr marL="54864" marR="54864" marT="54864" marB="54864" anchor="ctr">
                     <a:lnL w="9525" cap="flat" cmpd="sng" algn="ctr">
                       <a:solidFill>
-                        <a:srgbClr val="BFBFBF"/>
+                        <a:srgbClr val="9DC3E6"/>
                       </a:solidFill>
                       <a:prstDash val="solid"/>
                       <a:round/>
@@ -5400,7 +5400,7 @@
                     </a:lnL>
                     <a:lnR w="9525" cap="flat" cmpd="sng" algn="ctr">
                       <a:solidFill>
-                        <a:srgbClr val="BFBFBF"/>
+                        <a:srgbClr val="9DC3E6"/>
                       </a:solidFill>
                       <a:prstDash val="solid"/>
                       <a:round/>
@@ -5409,7 +5409,7 @@
                     </a:lnR>
                     <a:lnT w="9525" cap="flat" cmpd="sng" algn="ctr">
                       <a:solidFill>
-                        <a:srgbClr val="BFBFBF"/>
+                        <a:srgbClr val="9DC3E6"/>
                       </a:solidFill>
                       <a:prstDash val="solid"/>
                       <a:round/>
@@ -5418,7 +5418,7 @@
                     </a:lnT>
                     <a:lnB w="9525" cap="flat" cmpd="sng" algn="ctr">
                       <a:solidFill>
-                        <a:srgbClr val="BFBFBF"/>
+                        <a:srgbClr val="9DC3E6"/>
                       </a:solidFill>
                       <a:prstDash val="solid"/>
                       <a:round/>
@@ -5441,7 +5441,7 @@
                       <a:r>
                         <a:rPr lang="en-US" sz="1250" b="1" dirty="0">
                           <a:solidFill>
-                            <a:srgbClr val="000000"/>
+                            <a:srgbClr val="1F4E79"/>
                           </a:solidFill>
                           <a:latin typeface="David" pitchFamily="34" charset="0"/>
                           <a:ea typeface="David" pitchFamily="34" charset="-122"/>
@@ -5459,7 +5459,7 @@
                   <a:tcPr marL="54864" marR="54864" marT="54864" marB="54864" anchor="ctr">
                     <a:lnL w="9525" cap="flat" cmpd="sng" algn="ctr">
                       <a:solidFill>
-                        <a:srgbClr val="BFBFBF"/>
+                        <a:srgbClr val="9DC3E6"/>
                       </a:solidFill>
                       <a:prstDash val="solid"/>
                       <a:round/>
@@ -5468,7 +5468,7 @@
                     </a:lnL>
                     <a:lnR w="9525" cap="flat" cmpd="sng" algn="ctr">
                       <a:solidFill>
-                        <a:srgbClr val="BFBFBF"/>
+                        <a:srgbClr val="9DC3E6"/>
                       </a:solidFill>
                       <a:prstDash val="solid"/>
                       <a:round/>
@@ -5477,7 +5477,7 @@
                     </a:lnR>
                     <a:lnT w="9525" cap="flat" cmpd="sng" algn="ctr">
                       <a:solidFill>
-                        <a:srgbClr val="BFBFBF"/>
+                        <a:srgbClr val="9DC3E6"/>
                       </a:solidFill>
                       <a:prstDash val="solid"/>
                       <a:round/>
@@ -5486,7 +5486,7 @@
                     </a:lnT>
                     <a:lnB w="9525" cap="flat" cmpd="sng" algn="ctr">
                       <a:solidFill>
-                        <a:srgbClr val="BFBFBF"/>
+                        <a:srgbClr val="9DC3E6"/>
                       </a:solidFill>
                       <a:prstDash val="solid"/>
                       <a:round/>
@@ -5494,7 +5494,7 @@
                       <a:tailEnd type="none" w="med" len="med"/>
                     </a:lnB>
                     <a:solidFill>
-                      <a:srgbClr val="FFFFFF"/>
+                      <a:srgbClr val="DEEAF6"/>
                     </a:solidFill>
                   </a:tcPr>
                 </a:tc>
@@ -5529,7 +5529,7 @@
                   <a:tcPr marL="54864" marR="54864" marT="54864" marB="54864" anchor="ctr">
                     <a:lnL w="9525" cap="flat" cmpd="sng" algn="ctr">
                       <a:solidFill>
-                        <a:srgbClr val="BFBFBF"/>
+                        <a:srgbClr val="9DC3E6"/>
                       </a:solidFill>
                       <a:prstDash val="solid"/>
                       <a:round/>
@@ -5538,7 +5538,7 @@
                     </a:lnL>
                     <a:lnR w="9525" cap="flat" cmpd="sng" algn="ctr">
                       <a:solidFill>
-                        <a:srgbClr val="BFBFBF"/>
+                        <a:srgbClr val="9DC3E6"/>
                       </a:solidFill>
                       <a:prstDash val="solid"/>
                       <a:round/>
@@ -5547,7 +5547,7 @@
                     </a:lnR>
                     <a:lnT w="9525" cap="flat" cmpd="sng" algn="ctr">
                       <a:solidFill>
-                        <a:srgbClr val="BFBFBF"/>
+                        <a:srgbClr val="9DC3E6"/>
                       </a:solidFill>
                       <a:prstDash val="solid"/>
                       <a:round/>
@@ -5556,7 +5556,7 @@
                     </a:lnT>
                     <a:lnB w="9525" cap="flat" cmpd="sng" algn="ctr">
                       <a:solidFill>
-                        <a:srgbClr val="BFBFBF"/>
+                        <a:srgbClr val="9DC3E6"/>
                       </a:solidFill>
                       <a:prstDash val="solid"/>
                       <a:round/>
@@ -5564,7 +5564,7 @@
                       <a:tailEnd type="none" w="med" len="med"/>
                     </a:lnB>
                     <a:solidFill>
-                      <a:srgbClr val="FFFFFF"/>
+                      <a:srgbClr val="F5F8FC"/>
                     </a:solidFill>
                   </a:tcPr>
                 </a:tc>
@@ -5597,7 +5597,7 @@
                   <a:tcPr marL="54864" marR="54864" marT="54864" marB="54864" anchor="ctr">
                     <a:lnL w="9525" cap="flat" cmpd="sng" algn="ctr">
                       <a:solidFill>
-                        <a:srgbClr val="BFBFBF"/>
+                        <a:srgbClr val="9DC3E6"/>
                       </a:solidFill>
                       <a:prstDash val="solid"/>
                       <a:round/>
@@ -5606,7 +5606,7 @@
                     </a:lnL>
                     <a:lnR w="9525" cap="flat" cmpd="sng" algn="ctr">
                       <a:solidFill>
-                        <a:srgbClr val="BFBFBF"/>
+                        <a:srgbClr val="9DC3E6"/>
                       </a:solidFill>
                       <a:prstDash val="solid"/>
                       <a:round/>
@@ -5615,7 +5615,7 @@
                     </a:lnR>
                     <a:lnT w="9525" cap="flat" cmpd="sng" algn="ctr">
                       <a:solidFill>
-                        <a:srgbClr val="BFBFBF"/>
+                        <a:srgbClr val="9DC3E6"/>
                       </a:solidFill>
                       <a:prstDash val="solid"/>
                       <a:round/>
@@ -5624,7 +5624,7 @@
                     </a:lnT>
                     <a:lnB w="9525" cap="flat" cmpd="sng" algn="ctr">
                       <a:solidFill>
-                        <a:srgbClr val="BFBFBF"/>
+                        <a:srgbClr val="9DC3E6"/>
                       </a:solidFill>
                       <a:prstDash val="solid"/>
                       <a:round/>
@@ -5632,7 +5632,7 @@
                       <a:tailEnd type="none" w="med" len="med"/>
                     </a:lnB>
                     <a:solidFill>
-                      <a:srgbClr val="FFFFFF"/>
+                      <a:srgbClr val="F5F8FC"/>
                     </a:solidFill>
                   </a:tcPr>
                 </a:tc>
@@ -5647,7 +5647,7 @@
                       <a:r>
                         <a:rPr lang="en-US" sz="1250" b="1" dirty="0">
                           <a:solidFill>
-                            <a:srgbClr val="000000"/>
+                            <a:srgbClr val="1F4E79"/>
                           </a:solidFill>
                           <a:latin typeface="David" pitchFamily="34" charset="0"/>
                           <a:ea typeface="David" pitchFamily="34" charset="-122"/>
@@ -5665,7 +5665,7 @@
                   <a:tcPr marL="54864" marR="54864" marT="54864" marB="54864" anchor="ctr">
                     <a:lnL w="9525" cap="flat" cmpd="sng" algn="ctr">
                       <a:solidFill>
-                        <a:srgbClr val="BFBFBF"/>
+                        <a:srgbClr val="9DC3E6"/>
                       </a:solidFill>
                       <a:prstDash val="solid"/>
                       <a:round/>
@@ -5674,7 +5674,7 @@
                     </a:lnL>
                     <a:lnR w="9525" cap="flat" cmpd="sng" algn="ctr">
                       <a:solidFill>
-                        <a:srgbClr val="BFBFBF"/>
+                        <a:srgbClr val="9DC3E6"/>
                       </a:solidFill>
                       <a:prstDash val="solid"/>
                       <a:round/>
@@ -5683,7 +5683,7 @@
                     </a:lnR>
                     <a:lnT w="9525" cap="flat" cmpd="sng" algn="ctr">
                       <a:solidFill>
-                        <a:srgbClr val="BFBFBF"/>
+                        <a:srgbClr val="9DC3E6"/>
                       </a:solidFill>
                       <a:prstDash val="solid"/>
                       <a:round/>
@@ -5692,7 +5692,7 @@
                     </a:lnT>
                     <a:lnB w="9525" cap="flat" cmpd="sng" algn="ctr">
                       <a:solidFill>
-                        <a:srgbClr val="BFBFBF"/>
+                        <a:srgbClr val="9DC3E6"/>
                       </a:solidFill>
                       <a:prstDash val="solid"/>
                       <a:round/>
@@ -5700,7 +5700,7 @@
                       <a:tailEnd type="none" w="med" len="med"/>
                     </a:lnB>
                     <a:solidFill>
-                      <a:srgbClr val="FFFFFF"/>
+                      <a:srgbClr val="DEEAF6"/>
                     </a:solidFill>
                   </a:tcPr>
                 </a:tc>
@@ -5736,7 +5736,7 @@
             <a:r>
               <a:rPr lang="he-IL" altLang="en-US" sz="1050" dirty="0">
                 <a:solidFill>
-                  <a:srgbClr val="595959"/>
+                  <a:srgbClr val="ED7D31"/>
                 </a:solidFill>
                 <a:latin typeface="David" pitchFamily="34" charset="0"/>
                 <a:ea typeface="David" pitchFamily="34" charset="-122"/>
@@ -5775,7 +5775,7 @@
             <a:r>
               <a:rPr lang="he-IL" altLang="en-US" sz="1000" dirty="0">
                 <a:solidFill>
-                  <a:srgbClr val="595959"/>
+                  <a:srgbClr val="1F4E79"/>
                 </a:solidFill>
                 <a:latin typeface="David" pitchFamily="34" charset="0"/>
                 <a:ea typeface="David" pitchFamily="34" charset="-122"/>
@@ -5878,7 +5878,7 @@
             <a:r>
               <a:rPr lang="he-IL" altLang="en-US" sz="2800" b="1" dirty="0">
                 <a:solidFill>
-                  <a:srgbClr val="000000"/>
+                  <a:srgbClr val="1F4E79"/>
                 </a:solidFill>
                 <a:latin typeface="David" pitchFamily="34" charset="0"/>
                 <a:ea typeface="David" pitchFamily="34" charset="-122"/>
@@ -6091,7 +6091,7 @@
             <a:r>
               <a:rPr lang="he-IL" altLang="en-US" sz="1000" dirty="0">
                 <a:solidFill>
-                  <a:srgbClr val="595959"/>
+                  <a:srgbClr val="1F4E79"/>
                 </a:solidFill>
                 <a:latin typeface="David" pitchFamily="34" charset="0"/>
                 <a:ea typeface="David" pitchFamily="34" charset="-122"/>
@@ -6194,7 +6194,7 @@
             <a:r>
               <a:rPr lang="he-IL" altLang="en-US" sz="2800" b="1" dirty="0">
                 <a:solidFill>
-                  <a:srgbClr val="000000"/>
+                  <a:srgbClr val="1F4E79"/>
                 </a:solidFill>
                 <a:latin typeface="David" pitchFamily="34" charset="0"/>
                 <a:ea typeface="David" pitchFamily="34" charset="-122"/>
@@ -6317,7 +6317,7 @@
             <a:r>
               <a:rPr lang="he-IL" altLang="en-US" sz="1600" b="1" dirty="0">
                 <a:solidFill>
-                  <a:srgbClr val="000000"/>
+                  <a:srgbClr val="ED7D31"/>
                 </a:solidFill>
                 <a:latin typeface="David" pitchFamily="34" charset="0"/>
                 <a:ea typeface="David" pitchFamily="34" charset="-122"/>
@@ -6356,7 +6356,7 @@
             <a:r>
               <a:rPr lang="he-IL" altLang="en-US" sz="1000" dirty="0">
                 <a:solidFill>
-                  <a:srgbClr val="595959"/>
+                  <a:srgbClr val="1F4E79"/>
                 </a:solidFill>
                 <a:latin typeface="David" pitchFamily="34" charset="0"/>
                 <a:ea typeface="David" pitchFamily="34" charset="-122"/>
@@ -6459,7 +6459,7 @@
             <a:r>
               <a:rPr lang="he-IL" altLang="en-US" sz="2800" b="1" dirty="0">
                 <a:solidFill>
-                  <a:srgbClr val="000000"/>
+                  <a:srgbClr val="1F4E79"/>
                 </a:solidFill>
                 <a:latin typeface="David" pitchFamily="34" charset="0"/>
                 <a:ea typeface="David" pitchFamily="34" charset="-122"/>
@@ -6656,7 +6656,7 @@
             <a:r>
               <a:rPr lang="he-IL" altLang="en-US" sz="1000" dirty="0">
                 <a:solidFill>
-                  <a:srgbClr val="595959"/>
+                  <a:srgbClr val="1F4E79"/>
                 </a:solidFill>
                 <a:latin typeface="David" pitchFamily="34" charset="0"/>
                 <a:ea typeface="David" pitchFamily="34" charset="-122"/>
@@ -6759,7 +6759,7 @@
             <a:r>
               <a:rPr lang="he-IL" altLang="en-US" sz="2800" b="1" dirty="0">
                 <a:solidFill>
-                  <a:srgbClr val="000000"/>
+                  <a:srgbClr val="1F4E79"/>
                 </a:solidFill>
                 <a:latin typeface="David" pitchFamily="34" charset="0"/>
                 <a:ea typeface="David" pitchFamily="34" charset="-122"/>
@@ -6882,7 +6882,7 @@
             <a:r>
               <a:rPr lang="he-IL" altLang="en-US" sz="1000" dirty="0">
                 <a:solidFill>
-                  <a:srgbClr val="595959"/>
+                  <a:srgbClr val="1F4E79"/>
                 </a:solidFill>
                 <a:latin typeface="David" pitchFamily="34" charset="0"/>
                 <a:ea typeface="David" pitchFamily="34" charset="-122"/>
@@ -6985,7 +6985,7 @@
             <a:r>
               <a:rPr lang="he-IL" altLang="en-US" sz="2800" b="1" dirty="0">
                 <a:solidFill>
-                  <a:srgbClr val="000000"/>
+                  <a:srgbClr val="1F4E79"/>
                 </a:solidFill>
                 <a:latin typeface="David" pitchFamily="34" charset="0"/>
                 <a:ea typeface="David" pitchFamily="34" charset="-122"/>
@@ -7077,7 +7077,7 @@
                       <a:r>
                         <a:rPr lang="en-US" sz="1300" b="1" dirty="0">
                           <a:solidFill>
-                            <a:srgbClr val="000000"/>
+                            <a:srgbClr val="FFFFFF"/>
                           </a:solidFill>
                           <a:latin typeface="David" pitchFamily="34" charset="0"/>
                           <a:ea typeface="David" pitchFamily="34" charset="-122"/>
@@ -7095,7 +7095,7 @@
                   <a:tcPr marL="54864" marR="54864" marT="54864" marB="54864" anchor="ctr">
                     <a:lnL w="9525" cap="flat" cmpd="sng" algn="ctr">
                       <a:solidFill>
-                        <a:srgbClr val="BFBFBF"/>
+                        <a:srgbClr val="9DC3E6"/>
                       </a:solidFill>
                       <a:prstDash val="solid"/>
                       <a:round/>
@@ -7104,7 +7104,7 @@
                     </a:lnL>
                     <a:lnR w="9525" cap="flat" cmpd="sng" algn="ctr">
                       <a:solidFill>
-                        <a:srgbClr val="BFBFBF"/>
+                        <a:srgbClr val="9DC3E6"/>
                       </a:solidFill>
                       <a:prstDash val="solid"/>
                       <a:round/>
@@ -7113,7 +7113,7 @@
                     </a:lnR>
                     <a:lnT w="9525" cap="flat" cmpd="sng" algn="ctr">
                       <a:solidFill>
-                        <a:srgbClr val="BFBFBF"/>
+                        <a:srgbClr val="9DC3E6"/>
                       </a:solidFill>
                       <a:prstDash val="solid"/>
                       <a:round/>
@@ -7122,7 +7122,7 @@
                     </a:lnT>
                     <a:lnB w="9525" cap="flat" cmpd="sng" algn="ctr">
                       <a:solidFill>
-                        <a:srgbClr val="BFBFBF"/>
+                        <a:srgbClr val="9DC3E6"/>
                       </a:solidFill>
                       <a:prstDash val="solid"/>
                       <a:round/>
@@ -7130,7 +7130,7 @@
                       <a:tailEnd type="none" w="med" len="med"/>
                     </a:lnB>
                     <a:solidFill>
-                      <a:srgbClr val="F2F2F2"/>
+                      <a:srgbClr val="1F4E79"/>
                     </a:solidFill>
                   </a:tcPr>
                 </a:tc>
@@ -7145,7 +7145,7 @@
                       <a:r>
                         <a:rPr lang="en-US" sz="1300" b="1" dirty="0">
                           <a:solidFill>
-                            <a:srgbClr val="000000"/>
+                            <a:srgbClr val="FFFFFF"/>
                           </a:solidFill>
                           <a:latin typeface="David" pitchFamily="34" charset="0"/>
                           <a:ea typeface="David" pitchFamily="34" charset="-122"/>
@@ -7163,7 +7163,7 @@
                   <a:tcPr marL="54864" marR="54864" marT="54864" marB="54864" anchor="ctr">
                     <a:lnL w="9525" cap="flat" cmpd="sng" algn="ctr">
                       <a:solidFill>
-                        <a:srgbClr val="BFBFBF"/>
+                        <a:srgbClr val="9DC3E6"/>
                       </a:solidFill>
                       <a:prstDash val="solid"/>
                       <a:round/>
@@ -7172,7 +7172,7 @@
                     </a:lnL>
                     <a:lnR w="9525" cap="flat" cmpd="sng" algn="ctr">
                       <a:solidFill>
-                        <a:srgbClr val="BFBFBF"/>
+                        <a:srgbClr val="9DC3E6"/>
                       </a:solidFill>
                       <a:prstDash val="solid"/>
                       <a:round/>
@@ -7181,7 +7181,7 @@
                     </a:lnR>
                     <a:lnT w="9525" cap="flat" cmpd="sng" algn="ctr">
                       <a:solidFill>
-                        <a:srgbClr val="BFBFBF"/>
+                        <a:srgbClr val="9DC3E6"/>
                       </a:solidFill>
                       <a:prstDash val="solid"/>
                       <a:round/>
@@ -7190,7 +7190,7 @@
                     </a:lnT>
                     <a:lnB w="9525" cap="flat" cmpd="sng" algn="ctr">
                       <a:solidFill>
-                        <a:srgbClr val="BFBFBF"/>
+                        <a:srgbClr val="9DC3E6"/>
                       </a:solidFill>
                       <a:prstDash val="solid"/>
                       <a:round/>
@@ -7198,7 +7198,7 @@
                       <a:tailEnd type="none" w="med" len="med"/>
                     </a:lnB>
                     <a:solidFill>
-                      <a:srgbClr val="F2F2F2"/>
+                      <a:srgbClr val="1F4E79"/>
                     </a:solidFill>
                   </a:tcPr>
                 </a:tc>
@@ -7233,7 +7233,7 @@
                   <a:tcPr marL="54864" marR="54864" marT="54864" marB="54864" anchor="ctr">
                     <a:lnL w="9525" cap="flat" cmpd="sng" algn="ctr">
                       <a:solidFill>
-                        <a:srgbClr val="BFBFBF"/>
+                        <a:srgbClr val="9DC3E6"/>
                       </a:solidFill>
                       <a:prstDash val="solid"/>
                       <a:round/>
@@ -7242,7 +7242,7 @@
                     </a:lnL>
                     <a:lnR w="9525" cap="flat" cmpd="sng" algn="ctr">
                       <a:solidFill>
-                        <a:srgbClr val="BFBFBF"/>
+                        <a:srgbClr val="9DC3E6"/>
                       </a:solidFill>
                       <a:prstDash val="solid"/>
                       <a:round/>
@@ -7251,7 +7251,7 @@
                     </a:lnR>
                     <a:lnT w="9525" cap="flat" cmpd="sng" algn="ctr">
                       <a:solidFill>
-                        <a:srgbClr val="BFBFBF"/>
+                        <a:srgbClr val="9DC3E6"/>
                       </a:solidFill>
                       <a:prstDash val="solid"/>
                       <a:round/>
@@ -7260,7 +7260,7 @@
                     </a:lnT>
                     <a:lnB w="9525" cap="flat" cmpd="sng" algn="ctr">
                       <a:solidFill>
-                        <a:srgbClr val="BFBFBF"/>
+                        <a:srgbClr val="9DC3E6"/>
                       </a:solidFill>
                       <a:prstDash val="solid"/>
                       <a:round/>
@@ -7283,7 +7283,7 @@
                       <a:r>
                         <a:rPr lang="en-US" sz="1250" b="1" dirty="0">
                           <a:solidFill>
-                            <a:srgbClr val="000000"/>
+                            <a:srgbClr val="1F4E79"/>
                           </a:solidFill>
                           <a:latin typeface="David" pitchFamily="34" charset="0"/>
                           <a:ea typeface="David" pitchFamily="34" charset="-122"/>
@@ -7301,7 +7301,7 @@
                   <a:tcPr marL="54864" marR="54864" marT="54864" marB="54864" anchor="ctr">
                     <a:lnL w="9525" cap="flat" cmpd="sng" algn="ctr">
                       <a:solidFill>
-                        <a:srgbClr val="BFBFBF"/>
+                        <a:srgbClr val="9DC3E6"/>
                       </a:solidFill>
                       <a:prstDash val="solid"/>
                       <a:round/>
@@ -7310,7 +7310,7 @@
                     </a:lnL>
                     <a:lnR w="9525" cap="flat" cmpd="sng" algn="ctr">
                       <a:solidFill>
-                        <a:srgbClr val="BFBFBF"/>
+                        <a:srgbClr val="9DC3E6"/>
                       </a:solidFill>
                       <a:prstDash val="solid"/>
                       <a:round/>
@@ -7319,7 +7319,7 @@
                     </a:lnR>
                     <a:lnT w="9525" cap="flat" cmpd="sng" algn="ctr">
                       <a:solidFill>
-                        <a:srgbClr val="BFBFBF"/>
+                        <a:srgbClr val="9DC3E6"/>
                       </a:solidFill>
                       <a:prstDash val="solid"/>
                       <a:round/>
@@ -7328,7 +7328,7 @@
                     </a:lnT>
                     <a:lnB w="9525" cap="flat" cmpd="sng" algn="ctr">
                       <a:solidFill>
-                        <a:srgbClr val="BFBFBF"/>
+                        <a:srgbClr val="9DC3E6"/>
                       </a:solidFill>
                       <a:prstDash val="solid"/>
                       <a:round/>
@@ -7336,7 +7336,7 @@
                       <a:tailEnd type="none" w="med" len="med"/>
                     </a:lnB>
                     <a:solidFill>
-                      <a:srgbClr val="FFFFFF"/>
+                      <a:srgbClr val="DEEAF6"/>
                     </a:solidFill>
                   </a:tcPr>
                 </a:tc>
@@ -7371,7 +7371,7 @@
                   <a:tcPr marL="54864" marR="54864" marT="54864" marB="54864" anchor="ctr">
                     <a:lnL w="9525" cap="flat" cmpd="sng" algn="ctr">
                       <a:solidFill>
-                        <a:srgbClr val="BFBFBF"/>
+                        <a:srgbClr val="9DC3E6"/>
                       </a:solidFill>
                       <a:prstDash val="solid"/>
                       <a:round/>
@@ -7380,7 +7380,7 @@
                     </a:lnL>
                     <a:lnR w="9525" cap="flat" cmpd="sng" algn="ctr">
                       <a:solidFill>
-                        <a:srgbClr val="BFBFBF"/>
+                        <a:srgbClr val="9DC3E6"/>
                       </a:solidFill>
                       <a:prstDash val="solid"/>
                       <a:round/>
@@ -7389,7 +7389,7 @@
                     </a:lnR>
                     <a:lnT w="9525" cap="flat" cmpd="sng" algn="ctr">
                       <a:solidFill>
-                        <a:srgbClr val="BFBFBF"/>
+                        <a:srgbClr val="9DC3E6"/>
                       </a:solidFill>
                       <a:prstDash val="solid"/>
                       <a:round/>
@@ -7398,7 +7398,7 @@
                     </a:lnT>
                     <a:lnB w="9525" cap="flat" cmpd="sng" algn="ctr">
                       <a:solidFill>
-                        <a:srgbClr val="BFBFBF"/>
+                        <a:srgbClr val="9DC3E6"/>
                       </a:solidFill>
                       <a:prstDash val="solid"/>
                       <a:round/>
@@ -7406,7 +7406,7 @@
                       <a:tailEnd type="none" w="med" len="med"/>
                     </a:lnB>
                     <a:solidFill>
-                      <a:srgbClr val="FFFFFF"/>
+                      <a:srgbClr val="F5F8FC"/>
                     </a:solidFill>
                   </a:tcPr>
                 </a:tc>
@@ -7421,7 +7421,7 @@
                       <a:r>
                         <a:rPr lang="en-US" sz="1250" b="1" dirty="0">
                           <a:solidFill>
-                            <a:srgbClr val="000000"/>
+                            <a:srgbClr val="1F4E79"/>
                           </a:solidFill>
                           <a:latin typeface="David" pitchFamily="34" charset="0"/>
                           <a:ea typeface="David" pitchFamily="34" charset="-122"/>
@@ -7439,7 +7439,7 @@
                   <a:tcPr marL="54864" marR="54864" marT="54864" marB="54864" anchor="ctr">
                     <a:lnL w="9525" cap="flat" cmpd="sng" algn="ctr">
                       <a:solidFill>
-                        <a:srgbClr val="BFBFBF"/>
+                        <a:srgbClr val="9DC3E6"/>
                       </a:solidFill>
                       <a:prstDash val="solid"/>
                       <a:round/>
@@ -7448,7 +7448,7 @@
                     </a:lnL>
                     <a:lnR w="9525" cap="flat" cmpd="sng" algn="ctr">
                       <a:solidFill>
-                        <a:srgbClr val="BFBFBF"/>
+                        <a:srgbClr val="9DC3E6"/>
                       </a:solidFill>
                       <a:prstDash val="solid"/>
                       <a:round/>
@@ -7457,7 +7457,7 @@
                     </a:lnR>
                     <a:lnT w="9525" cap="flat" cmpd="sng" algn="ctr">
                       <a:solidFill>
-                        <a:srgbClr val="BFBFBF"/>
+                        <a:srgbClr val="9DC3E6"/>
                       </a:solidFill>
                       <a:prstDash val="solid"/>
                       <a:round/>
@@ -7466,7 +7466,7 @@
                     </a:lnT>
                     <a:lnB w="9525" cap="flat" cmpd="sng" algn="ctr">
                       <a:solidFill>
-                        <a:srgbClr val="BFBFBF"/>
+                        <a:srgbClr val="9DC3E6"/>
                       </a:solidFill>
                       <a:prstDash val="solid"/>
                       <a:round/>
@@ -7474,7 +7474,7 @@
                       <a:tailEnd type="none" w="med" len="med"/>
                     </a:lnB>
                     <a:solidFill>
-                      <a:srgbClr val="FFFFFF"/>
+                      <a:srgbClr val="DEEAF6"/>
                     </a:solidFill>
                   </a:tcPr>
                 </a:tc>
@@ -7509,7 +7509,7 @@
                   <a:tcPr marL="54864" marR="54864" marT="54864" marB="54864" anchor="ctr">
                     <a:lnL w="9525" cap="flat" cmpd="sng" algn="ctr">
                       <a:solidFill>
-                        <a:srgbClr val="BFBFBF"/>
+                        <a:srgbClr val="9DC3E6"/>
                       </a:solidFill>
                       <a:prstDash val="solid"/>
                       <a:round/>
@@ -7518,7 +7518,7 @@
                     </a:lnL>
                     <a:lnR w="9525" cap="flat" cmpd="sng" algn="ctr">
                       <a:solidFill>
-                        <a:srgbClr val="BFBFBF"/>
+                        <a:srgbClr val="9DC3E6"/>
                       </a:solidFill>
                       <a:prstDash val="solid"/>
                       <a:round/>
@@ -7527,7 +7527,7 @@
                     </a:lnR>
                     <a:lnT w="9525" cap="flat" cmpd="sng" algn="ctr">
                       <a:solidFill>
-                        <a:srgbClr val="BFBFBF"/>
+                        <a:srgbClr val="9DC3E6"/>
                       </a:solidFill>
                       <a:prstDash val="solid"/>
                       <a:round/>
@@ -7536,7 +7536,7 @@
                     </a:lnT>
                     <a:lnB w="9525" cap="flat" cmpd="sng" algn="ctr">
                       <a:solidFill>
-                        <a:srgbClr val="BFBFBF"/>
+                        <a:srgbClr val="9DC3E6"/>
                       </a:solidFill>
                       <a:prstDash val="solid"/>
                       <a:round/>
@@ -7559,7 +7559,7 @@
                       <a:r>
                         <a:rPr lang="en-US" sz="1250" b="1" dirty="0">
                           <a:solidFill>
-                            <a:srgbClr val="000000"/>
+                            <a:srgbClr val="1F4E79"/>
                           </a:solidFill>
                           <a:latin typeface="David" pitchFamily="34" charset="0"/>
                           <a:ea typeface="David" pitchFamily="34" charset="-122"/>
@@ -7577,7 +7577,7 @@
                   <a:tcPr marL="54864" marR="54864" marT="54864" marB="54864" anchor="ctr">
                     <a:lnL w="9525" cap="flat" cmpd="sng" algn="ctr">
                       <a:solidFill>
-                        <a:srgbClr val="BFBFBF"/>
+                        <a:srgbClr val="9DC3E6"/>
                       </a:solidFill>
                       <a:prstDash val="solid"/>
                       <a:round/>
@@ -7586,7 +7586,7 @@
                     </a:lnL>
                     <a:lnR w="9525" cap="flat" cmpd="sng" algn="ctr">
                       <a:solidFill>
-                        <a:srgbClr val="BFBFBF"/>
+                        <a:srgbClr val="9DC3E6"/>
                       </a:solidFill>
                       <a:prstDash val="solid"/>
                       <a:round/>
@@ -7595,7 +7595,7 @@
                     </a:lnR>
                     <a:lnT w="9525" cap="flat" cmpd="sng" algn="ctr">
                       <a:solidFill>
-                        <a:srgbClr val="BFBFBF"/>
+                        <a:srgbClr val="9DC3E6"/>
                       </a:solidFill>
                       <a:prstDash val="solid"/>
                       <a:round/>
@@ -7604,7 +7604,7 @@
                     </a:lnT>
                     <a:lnB w="9525" cap="flat" cmpd="sng" algn="ctr">
                       <a:solidFill>
-                        <a:srgbClr val="BFBFBF"/>
+                        <a:srgbClr val="9DC3E6"/>
                       </a:solidFill>
                       <a:prstDash val="solid"/>
                       <a:round/>
@@ -7612,7 +7612,7 @@
                       <a:tailEnd type="none" w="med" len="med"/>
                     </a:lnB>
                     <a:solidFill>
-                      <a:srgbClr val="FFFFFF"/>
+                      <a:srgbClr val="DEEAF6"/>
                     </a:solidFill>
                   </a:tcPr>
                 </a:tc>
@@ -7647,7 +7647,7 @@
                   <a:tcPr marL="54864" marR="54864" marT="54864" marB="54864" anchor="ctr">
                     <a:lnL w="9525" cap="flat" cmpd="sng" algn="ctr">
                       <a:solidFill>
-                        <a:srgbClr val="BFBFBF"/>
+                        <a:srgbClr val="9DC3E6"/>
                       </a:solidFill>
                       <a:prstDash val="solid"/>
                       <a:round/>
@@ -7656,7 +7656,7 @@
                     </a:lnL>
                     <a:lnR w="9525" cap="flat" cmpd="sng" algn="ctr">
                       <a:solidFill>
-                        <a:srgbClr val="BFBFBF"/>
+                        <a:srgbClr val="9DC3E6"/>
                       </a:solidFill>
                       <a:prstDash val="solid"/>
                       <a:round/>
@@ -7665,7 +7665,7 @@
                     </a:lnR>
                     <a:lnT w="9525" cap="flat" cmpd="sng" algn="ctr">
                       <a:solidFill>
-                        <a:srgbClr val="BFBFBF"/>
+                        <a:srgbClr val="9DC3E6"/>
                       </a:solidFill>
                       <a:prstDash val="solid"/>
                       <a:round/>
@@ -7674,7 +7674,7 @@
                     </a:lnT>
                     <a:lnB w="9525" cap="flat" cmpd="sng" algn="ctr">
                       <a:solidFill>
-                        <a:srgbClr val="BFBFBF"/>
+                        <a:srgbClr val="9DC3E6"/>
                       </a:solidFill>
                       <a:prstDash val="solid"/>
                       <a:round/>
@@ -7682,7 +7682,7 @@
                       <a:tailEnd type="none" w="med" len="med"/>
                     </a:lnB>
                     <a:solidFill>
-                      <a:srgbClr val="FFFFFF"/>
+                      <a:srgbClr val="F5F8FC"/>
                     </a:solidFill>
                   </a:tcPr>
                 </a:tc>
@@ -7697,7 +7697,7 @@
                       <a:r>
                         <a:rPr lang="en-US" sz="1250" b="1" dirty="0">
                           <a:solidFill>
-                            <a:srgbClr val="000000"/>
+                            <a:srgbClr val="1F4E79"/>
                           </a:solidFill>
                           <a:latin typeface="David" pitchFamily="34" charset="0"/>
                           <a:ea typeface="David" pitchFamily="34" charset="-122"/>
@@ -7715,7 +7715,7 @@
                   <a:tcPr marL="54864" marR="54864" marT="54864" marB="54864" anchor="ctr">
                     <a:lnL w="9525" cap="flat" cmpd="sng" algn="ctr">
                       <a:solidFill>
-                        <a:srgbClr val="BFBFBF"/>
+                        <a:srgbClr val="9DC3E6"/>
                       </a:solidFill>
                       <a:prstDash val="solid"/>
                       <a:round/>
@@ -7724,7 +7724,7 @@
                     </a:lnL>
                     <a:lnR w="9525" cap="flat" cmpd="sng" algn="ctr">
                       <a:solidFill>
-                        <a:srgbClr val="BFBFBF"/>
+                        <a:srgbClr val="9DC3E6"/>
                       </a:solidFill>
                       <a:prstDash val="solid"/>
                       <a:round/>
@@ -7733,7 +7733,7 @@
                     </a:lnR>
                     <a:lnT w="9525" cap="flat" cmpd="sng" algn="ctr">
                       <a:solidFill>
-                        <a:srgbClr val="BFBFBF"/>
+                        <a:srgbClr val="9DC3E6"/>
                       </a:solidFill>
                       <a:prstDash val="solid"/>
                       <a:round/>
@@ -7742,7 +7742,7 @@
                     </a:lnT>
                     <a:lnB w="9525" cap="flat" cmpd="sng" algn="ctr">
                       <a:solidFill>
-                        <a:srgbClr val="BFBFBF"/>
+                        <a:srgbClr val="9DC3E6"/>
                       </a:solidFill>
                       <a:prstDash val="solid"/>
                       <a:round/>
@@ -7750,7 +7750,7 @@
                       <a:tailEnd type="none" w="med" len="med"/>
                     </a:lnB>
                     <a:solidFill>
-                      <a:srgbClr val="FFFFFF"/>
+                      <a:srgbClr val="DEEAF6"/>
                     </a:solidFill>
                   </a:tcPr>
                 </a:tc>
@@ -7785,7 +7785,7 @@
                   <a:tcPr marL="54864" marR="54864" marT="54864" marB="54864" anchor="ctr">
                     <a:lnL w="9525" cap="flat" cmpd="sng" algn="ctr">
                       <a:solidFill>
-                        <a:srgbClr val="BFBFBF"/>
+                        <a:srgbClr val="9DC3E6"/>
                       </a:solidFill>
                       <a:prstDash val="solid"/>
                       <a:round/>
@@ -7794,7 +7794,7 @@
                     </a:lnL>
                     <a:lnR w="9525" cap="flat" cmpd="sng" algn="ctr">
                       <a:solidFill>
-                        <a:srgbClr val="BFBFBF"/>
+                        <a:srgbClr val="9DC3E6"/>
                       </a:solidFill>
                       <a:prstDash val="solid"/>
                       <a:round/>
@@ -7803,7 +7803,7 @@
                     </a:lnR>
                     <a:lnT w="9525" cap="flat" cmpd="sng" algn="ctr">
                       <a:solidFill>
-                        <a:srgbClr val="BFBFBF"/>
+                        <a:srgbClr val="9DC3E6"/>
                       </a:solidFill>
                       <a:prstDash val="solid"/>
                       <a:round/>
@@ -7812,7 +7812,7 @@
                     </a:lnT>
                     <a:lnB w="9525" cap="flat" cmpd="sng" algn="ctr">
                       <a:solidFill>
-                        <a:srgbClr val="BFBFBF"/>
+                        <a:srgbClr val="9DC3E6"/>
                       </a:solidFill>
                       <a:prstDash val="solid"/>
                       <a:round/>
@@ -7835,7 +7835,7 @@
                       <a:r>
                         <a:rPr lang="en-US" sz="1250" b="1" dirty="0">
                           <a:solidFill>
-                            <a:srgbClr val="000000"/>
+                            <a:srgbClr val="1F4E79"/>
                           </a:solidFill>
                           <a:latin typeface="David" pitchFamily="34" charset="0"/>
                           <a:ea typeface="David" pitchFamily="34" charset="-122"/>
@@ -7853,7 +7853,7 @@
                   <a:tcPr marL="54864" marR="54864" marT="54864" marB="54864" anchor="ctr">
                     <a:lnL w="9525" cap="flat" cmpd="sng" algn="ctr">
                       <a:solidFill>
-                        <a:srgbClr val="BFBFBF"/>
+                        <a:srgbClr val="9DC3E6"/>
                       </a:solidFill>
                       <a:prstDash val="solid"/>
                       <a:round/>
@@ -7862,7 +7862,7 @@
                     </a:lnL>
                     <a:lnR w="9525" cap="flat" cmpd="sng" algn="ctr">
                       <a:solidFill>
-                        <a:srgbClr val="BFBFBF"/>
+                        <a:srgbClr val="9DC3E6"/>
                       </a:solidFill>
                       <a:prstDash val="solid"/>
                       <a:round/>
@@ -7871,7 +7871,7 @@
                     </a:lnR>
                     <a:lnT w="9525" cap="flat" cmpd="sng" algn="ctr">
                       <a:solidFill>
-                        <a:srgbClr val="BFBFBF"/>
+                        <a:srgbClr val="9DC3E6"/>
                       </a:solidFill>
                       <a:prstDash val="solid"/>
                       <a:round/>
@@ -7880,7 +7880,7 @@
                     </a:lnT>
                     <a:lnB w="9525" cap="flat" cmpd="sng" algn="ctr">
                       <a:solidFill>
-                        <a:srgbClr val="BFBFBF"/>
+                        <a:srgbClr val="9DC3E6"/>
                       </a:solidFill>
                       <a:prstDash val="solid"/>
                       <a:round/>
@@ -7888,7 +7888,7 @@
                       <a:tailEnd type="none" w="med" len="med"/>
                     </a:lnB>
                     <a:solidFill>
-                      <a:srgbClr val="FFFFFF"/>
+                      <a:srgbClr val="DEEAF6"/>
                     </a:solidFill>
                   </a:tcPr>
                 </a:tc>
@@ -7924,7 +7924,7 @@
             <a:r>
               <a:rPr lang="he-IL" altLang="en-US" sz="1000" dirty="0">
                 <a:solidFill>
-                  <a:srgbClr val="595959"/>
+                  <a:srgbClr val="1F4E79"/>
                 </a:solidFill>
                 <a:latin typeface="David" pitchFamily="34" charset="0"/>
                 <a:ea typeface="David" pitchFamily="34" charset="-122"/>
@@ -8027,7 +8027,7 @@
             <a:r>
               <a:rPr lang="he-IL" altLang="en-US" sz="2800" b="1" dirty="0">
                 <a:solidFill>
-                  <a:srgbClr val="000000"/>
+                  <a:srgbClr val="1F4E79"/>
                 </a:solidFill>
                 <a:latin typeface="David" pitchFamily="34" charset="0"/>
                 <a:ea typeface="David" pitchFamily="34" charset="-122"/>
@@ -8120,7 +8120,7 @@
                       <a:r>
                         <a:rPr lang="en-US" sz="1300" b="1" dirty="0">
                           <a:solidFill>
-                            <a:srgbClr val="000000"/>
+                            <a:srgbClr val="FFFFFF"/>
                           </a:solidFill>
                           <a:latin typeface="David" pitchFamily="34" charset="0"/>
                           <a:ea typeface="David" pitchFamily="34" charset="-122"/>
@@ -8138,7 +8138,7 @@
                   <a:tcPr marL="54864" marR="54864" marT="54864" marB="54864" anchor="ctr">
                     <a:lnL w="9525" cap="flat" cmpd="sng" algn="ctr">
                       <a:solidFill>
-                        <a:srgbClr val="BFBFBF"/>
+                        <a:srgbClr val="9DC3E6"/>
                       </a:solidFill>
                       <a:prstDash val="solid"/>
                       <a:round/>
@@ -8147,7 +8147,7 @@
                     </a:lnL>
                     <a:lnR w="9525" cap="flat" cmpd="sng" algn="ctr">
                       <a:solidFill>
-                        <a:srgbClr val="BFBFBF"/>
+                        <a:srgbClr val="9DC3E6"/>
                       </a:solidFill>
                       <a:prstDash val="solid"/>
                       <a:round/>
@@ -8156,7 +8156,7 @@
                     </a:lnR>
                     <a:lnT w="9525" cap="flat" cmpd="sng" algn="ctr">
                       <a:solidFill>
-                        <a:srgbClr val="BFBFBF"/>
+                        <a:srgbClr val="9DC3E6"/>
                       </a:solidFill>
                       <a:prstDash val="solid"/>
                       <a:round/>
@@ -8165,7 +8165,7 @@
                     </a:lnT>
                     <a:lnB w="9525" cap="flat" cmpd="sng" algn="ctr">
                       <a:solidFill>
-                        <a:srgbClr val="BFBFBF"/>
+                        <a:srgbClr val="9DC3E6"/>
                       </a:solidFill>
                       <a:prstDash val="solid"/>
                       <a:round/>
@@ -8173,7 +8173,7 @@
                       <a:tailEnd type="none" w="med" len="med"/>
                     </a:lnB>
                     <a:solidFill>
-                      <a:srgbClr val="F2F2F2"/>
+                      <a:srgbClr val="1F4E79"/>
                     </a:solidFill>
                   </a:tcPr>
                 </a:tc>
@@ -8188,7 +8188,7 @@
                       <a:r>
                         <a:rPr lang="en-US" sz="1300" b="1" dirty="0">
                           <a:solidFill>
-                            <a:srgbClr val="000000"/>
+                            <a:srgbClr val="FFFFFF"/>
                           </a:solidFill>
                           <a:latin typeface="David" pitchFamily="34" charset="0"/>
                           <a:ea typeface="David" pitchFamily="34" charset="-122"/>
@@ -8206,7 +8206,7 @@
                   <a:tcPr marL="54864" marR="54864" marT="54864" marB="54864" anchor="ctr">
                     <a:lnL w="9525" cap="flat" cmpd="sng" algn="ctr">
                       <a:solidFill>
-                        <a:srgbClr val="BFBFBF"/>
+                        <a:srgbClr val="9DC3E6"/>
                       </a:solidFill>
                       <a:prstDash val="solid"/>
                       <a:round/>
@@ -8215,7 +8215,7 @@
                     </a:lnL>
                     <a:lnR w="9525" cap="flat" cmpd="sng" algn="ctr">
                       <a:solidFill>
-                        <a:srgbClr val="BFBFBF"/>
+                        <a:srgbClr val="9DC3E6"/>
                       </a:solidFill>
                       <a:prstDash val="solid"/>
                       <a:round/>
@@ -8224,7 +8224,7 @@
                     </a:lnR>
                     <a:lnT w="9525" cap="flat" cmpd="sng" algn="ctr">
                       <a:solidFill>
-                        <a:srgbClr val="BFBFBF"/>
+                        <a:srgbClr val="9DC3E6"/>
                       </a:solidFill>
                       <a:prstDash val="solid"/>
                       <a:round/>
@@ -8233,7 +8233,7 @@
                     </a:lnT>
                     <a:lnB w="9525" cap="flat" cmpd="sng" algn="ctr">
                       <a:solidFill>
-                        <a:srgbClr val="BFBFBF"/>
+                        <a:srgbClr val="9DC3E6"/>
                       </a:solidFill>
                       <a:prstDash val="solid"/>
                       <a:round/>
@@ -8241,7 +8241,7 @@
                       <a:tailEnd type="none" w="med" len="med"/>
                     </a:lnB>
                     <a:solidFill>
-                      <a:srgbClr val="F2F2F2"/>
+                      <a:srgbClr val="1F4E79"/>
                     </a:solidFill>
                   </a:tcPr>
                 </a:tc>
@@ -8256,7 +8256,7 @@
                       <a:r>
                         <a:rPr lang="en-US" sz="1300" b="1" dirty="0">
                           <a:solidFill>
-                            <a:srgbClr val="000000"/>
+                            <a:srgbClr val="FFFFFF"/>
                           </a:solidFill>
                           <a:latin typeface="David" pitchFamily="34" charset="0"/>
                           <a:ea typeface="David" pitchFamily="34" charset="-122"/>
@@ -8274,7 +8274,7 @@
                   <a:tcPr marL="54864" marR="54864" marT="54864" marB="54864" anchor="ctr">
                     <a:lnL w="9525" cap="flat" cmpd="sng" algn="ctr">
                       <a:solidFill>
-                        <a:srgbClr val="BFBFBF"/>
+                        <a:srgbClr val="9DC3E6"/>
                       </a:solidFill>
                       <a:prstDash val="solid"/>
                       <a:round/>
@@ -8283,7 +8283,7 @@
                     </a:lnL>
                     <a:lnR w="9525" cap="flat" cmpd="sng" algn="ctr">
                       <a:solidFill>
-                        <a:srgbClr val="BFBFBF"/>
+                        <a:srgbClr val="9DC3E6"/>
                       </a:solidFill>
                       <a:prstDash val="solid"/>
                       <a:round/>
@@ -8292,7 +8292,7 @@
                     </a:lnR>
                     <a:lnT w="9525" cap="flat" cmpd="sng" algn="ctr">
                       <a:solidFill>
-                        <a:srgbClr val="BFBFBF"/>
+                        <a:srgbClr val="9DC3E6"/>
                       </a:solidFill>
                       <a:prstDash val="solid"/>
                       <a:round/>
@@ -8301,7 +8301,7 @@
                     </a:lnT>
                     <a:lnB w="9525" cap="flat" cmpd="sng" algn="ctr">
                       <a:solidFill>
-                        <a:srgbClr val="BFBFBF"/>
+                        <a:srgbClr val="9DC3E6"/>
                       </a:solidFill>
                       <a:prstDash val="solid"/>
                       <a:round/>
@@ -8309,7 +8309,7 @@
                       <a:tailEnd type="none" w="med" len="med"/>
                     </a:lnB>
                     <a:solidFill>
-                      <a:srgbClr val="F2F2F2"/>
+                      <a:srgbClr val="1F4E79"/>
                     </a:solidFill>
                   </a:tcPr>
                 </a:tc>
@@ -8344,7 +8344,7 @@
                   <a:tcPr marL="54864" marR="54864" marT="54864" marB="54864" anchor="ctr">
                     <a:lnL w="9525" cap="flat" cmpd="sng" algn="ctr">
                       <a:solidFill>
-                        <a:srgbClr val="BFBFBF"/>
+                        <a:srgbClr val="9DC3E6"/>
                       </a:solidFill>
                       <a:prstDash val="solid"/>
                       <a:round/>
@@ -8353,7 +8353,7 @@
                     </a:lnL>
                     <a:lnR w="9525" cap="flat" cmpd="sng" algn="ctr">
                       <a:solidFill>
-                        <a:srgbClr val="BFBFBF"/>
+                        <a:srgbClr val="9DC3E6"/>
                       </a:solidFill>
                       <a:prstDash val="solid"/>
                       <a:round/>
@@ -8362,7 +8362,7 @@
                     </a:lnR>
                     <a:lnT w="9525" cap="flat" cmpd="sng" algn="ctr">
                       <a:solidFill>
-                        <a:srgbClr val="BFBFBF"/>
+                        <a:srgbClr val="9DC3E6"/>
                       </a:solidFill>
                       <a:prstDash val="solid"/>
                       <a:round/>
@@ -8371,7 +8371,7 @@
                     </a:lnT>
                     <a:lnB w="9525" cap="flat" cmpd="sng" algn="ctr">
                       <a:solidFill>
-                        <a:srgbClr val="BFBFBF"/>
+                        <a:srgbClr val="9DC3E6"/>
                       </a:solidFill>
                       <a:prstDash val="solid"/>
                       <a:round/>
@@ -8412,7 +8412,7 @@
                   <a:tcPr marL="54864" marR="54864" marT="54864" marB="54864" anchor="ctr">
                     <a:lnL w="9525" cap="flat" cmpd="sng" algn="ctr">
                       <a:solidFill>
-                        <a:srgbClr val="BFBFBF"/>
+                        <a:srgbClr val="9DC3E6"/>
                       </a:solidFill>
                       <a:prstDash val="solid"/>
                       <a:round/>
@@ -8421,7 +8421,7 @@
                     </a:lnL>
                     <a:lnR w="9525" cap="flat" cmpd="sng" algn="ctr">
                       <a:solidFill>
-                        <a:srgbClr val="BFBFBF"/>
+                        <a:srgbClr val="9DC3E6"/>
                       </a:solidFill>
                       <a:prstDash val="solid"/>
                       <a:round/>
@@ -8430,7 +8430,7 @@
                     </a:lnR>
                     <a:lnT w="9525" cap="flat" cmpd="sng" algn="ctr">
                       <a:solidFill>
-                        <a:srgbClr val="BFBFBF"/>
+                        <a:srgbClr val="9DC3E6"/>
                       </a:solidFill>
                       <a:prstDash val="solid"/>
                       <a:round/>
@@ -8439,7 +8439,7 @@
                     </a:lnT>
                     <a:lnB w="9525" cap="flat" cmpd="sng" algn="ctr">
                       <a:solidFill>
-                        <a:srgbClr val="BFBFBF"/>
+                        <a:srgbClr val="9DC3E6"/>
                       </a:solidFill>
                       <a:prstDash val="solid"/>
                       <a:round/>
@@ -8462,7 +8462,7 @@
                       <a:r>
                         <a:rPr lang="en-US" sz="1250" b="1" dirty="0">
                           <a:solidFill>
-                            <a:srgbClr val="000000"/>
+                            <a:srgbClr val="1F4E79"/>
                           </a:solidFill>
                           <a:latin typeface="David" pitchFamily="34" charset="0"/>
                           <a:ea typeface="David" pitchFamily="34" charset="-122"/>
@@ -8480,7 +8480,7 @@
                   <a:tcPr marL="54864" marR="54864" marT="54864" marB="54864" anchor="ctr">
                     <a:lnL w="9525" cap="flat" cmpd="sng" algn="ctr">
                       <a:solidFill>
-                        <a:srgbClr val="BFBFBF"/>
+                        <a:srgbClr val="9DC3E6"/>
                       </a:solidFill>
                       <a:prstDash val="solid"/>
                       <a:round/>
@@ -8489,7 +8489,7 @@
                     </a:lnL>
                     <a:lnR w="9525" cap="flat" cmpd="sng" algn="ctr">
                       <a:solidFill>
-                        <a:srgbClr val="BFBFBF"/>
+                        <a:srgbClr val="9DC3E6"/>
                       </a:solidFill>
                       <a:prstDash val="solid"/>
                       <a:round/>
@@ -8498,7 +8498,7 @@
                     </a:lnR>
                     <a:lnT w="9525" cap="flat" cmpd="sng" algn="ctr">
                       <a:solidFill>
-                        <a:srgbClr val="BFBFBF"/>
+                        <a:srgbClr val="9DC3E6"/>
                       </a:solidFill>
                       <a:prstDash val="solid"/>
                       <a:round/>
@@ -8507,7 +8507,7 @@
                     </a:lnT>
                     <a:lnB w="9525" cap="flat" cmpd="sng" algn="ctr">
                       <a:solidFill>
-                        <a:srgbClr val="BFBFBF"/>
+                        <a:srgbClr val="9DC3E6"/>
                       </a:solidFill>
                       <a:prstDash val="solid"/>
                       <a:round/>
@@ -8515,7 +8515,7 @@
                       <a:tailEnd type="none" w="med" len="med"/>
                     </a:lnB>
                     <a:solidFill>
-                      <a:srgbClr val="FFFFFF"/>
+                      <a:srgbClr val="DEEAF6"/>
                     </a:solidFill>
                   </a:tcPr>
                 </a:tc>
@@ -8550,7 +8550,7 @@
                   <a:tcPr marL="54864" marR="54864" marT="54864" marB="54864" anchor="ctr">
                     <a:lnL w="9525" cap="flat" cmpd="sng" algn="ctr">
                       <a:solidFill>
-                        <a:srgbClr val="BFBFBF"/>
+                        <a:srgbClr val="9DC3E6"/>
                       </a:solidFill>
                       <a:prstDash val="solid"/>
                       <a:round/>
@@ -8559,7 +8559,7 @@
                     </a:lnL>
                     <a:lnR w="9525" cap="flat" cmpd="sng" algn="ctr">
                       <a:solidFill>
-                        <a:srgbClr val="BFBFBF"/>
+                        <a:srgbClr val="9DC3E6"/>
                       </a:solidFill>
                       <a:prstDash val="solid"/>
                       <a:round/>
@@ -8568,7 +8568,7 @@
                     </a:lnR>
                     <a:lnT w="9525" cap="flat" cmpd="sng" algn="ctr">
                       <a:solidFill>
-                        <a:srgbClr val="BFBFBF"/>
+                        <a:srgbClr val="9DC3E6"/>
                       </a:solidFill>
                       <a:prstDash val="solid"/>
                       <a:round/>
@@ -8577,7 +8577,7 @@
                     </a:lnT>
                     <a:lnB w="9525" cap="flat" cmpd="sng" algn="ctr">
                       <a:solidFill>
-                        <a:srgbClr val="BFBFBF"/>
+                        <a:srgbClr val="9DC3E6"/>
                       </a:solidFill>
                       <a:prstDash val="solid"/>
                       <a:round/>
@@ -8585,7 +8585,7 @@
                       <a:tailEnd type="none" w="med" len="med"/>
                     </a:lnB>
                     <a:solidFill>
-                      <a:srgbClr val="FFFFFF"/>
+                      <a:srgbClr val="F5F8FC"/>
                     </a:solidFill>
                   </a:tcPr>
                 </a:tc>
@@ -8618,7 +8618,7 @@
                   <a:tcPr marL="54864" marR="54864" marT="54864" marB="54864" anchor="ctr">
                     <a:lnL w="9525" cap="flat" cmpd="sng" algn="ctr">
                       <a:solidFill>
-                        <a:srgbClr val="BFBFBF"/>
+                        <a:srgbClr val="9DC3E6"/>
                       </a:solidFill>
                       <a:prstDash val="solid"/>
                       <a:round/>
@@ -8627,7 +8627,7 @@
                     </a:lnL>
                     <a:lnR w="9525" cap="flat" cmpd="sng" algn="ctr">
                       <a:solidFill>
-                        <a:srgbClr val="BFBFBF"/>
+                        <a:srgbClr val="9DC3E6"/>
                       </a:solidFill>
                       <a:prstDash val="solid"/>
                       <a:round/>
@@ -8636,7 +8636,7 @@
                     </a:lnR>
                     <a:lnT w="9525" cap="flat" cmpd="sng" algn="ctr">
                       <a:solidFill>
-                        <a:srgbClr val="BFBFBF"/>
+                        <a:srgbClr val="9DC3E6"/>
                       </a:solidFill>
                       <a:prstDash val="solid"/>
                       <a:round/>
@@ -8645,7 +8645,7 @@
                     </a:lnT>
                     <a:lnB w="9525" cap="flat" cmpd="sng" algn="ctr">
                       <a:solidFill>
-                        <a:srgbClr val="BFBFBF"/>
+                        <a:srgbClr val="9DC3E6"/>
                       </a:solidFill>
                       <a:prstDash val="solid"/>
                       <a:round/>
@@ -8653,7 +8653,7 @@
                       <a:tailEnd type="none" w="med" len="med"/>
                     </a:lnB>
                     <a:solidFill>
-                      <a:srgbClr val="FFFFFF"/>
+                      <a:srgbClr val="F5F8FC"/>
                     </a:solidFill>
                   </a:tcPr>
                 </a:tc>
@@ -8668,7 +8668,7 @@
                       <a:r>
                         <a:rPr lang="en-US" sz="1250" b="1" dirty="0">
                           <a:solidFill>
-                            <a:srgbClr val="000000"/>
+                            <a:srgbClr val="1F4E79"/>
                           </a:solidFill>
                           <a:latin typeface="David" pitchFamily="34" charset="0"/>
                           <a:ea typeface="David" pitchFamily="34" charset="-122"/>
@@ -8686,7 +8686,7 @@
                   <a:tcPr marL="54864" marR="54864" marT="54864" marB="54864" anchor="ctr">
                     <a:lnL w="9525" cap="flat" cmpd="sng" algn="ctr">
                       <a:solidFill>
-                        <a:srgbClr val="BFBFBF"/>
+                        <a:srgbClr val="9DC3E6"/>
                       </a:solidFill>
                       <a:prstDash val="solid"/>
                       <a:round/>
@@ -8695,7 +8695,7 @@
                     </a:lnL>
                     <a:lnR w="9525" cap="flat" cmpd="sng" algn="ctr">
                       <a:solidFill>
-                        <a:srgbClr val="BFBFBF"/>
+                        <a:srgbClr val="9DC3E6"/>
                       </a:solidFill>
                       <a:prstDash val="solid"/>
                       <a:round/>
@@ -8704,7 +8704,7 @@
                     </a:lnR>
                     <a:lnT w="9525" cap="flat" cmpd="sng" algn="ctr">
                       <a:solidFill>
-                        <a:srgbClr val="BFBFBF"/>
+                        <a:srgbClr val="9DC3E6"/>
                       </a:solidFill>
                       <a:prstDash val="solid"/>
                       <a:round/>
@@ -8713,7 +8713,7 @@
                     </a:lnT>
                     <a:lnB w="9525" cap="flat" cmpd="sng" algn="ctr">
                       <a:solidFill>
-                        <a:srgbClr val="BFBFBF"/>
+                        <a:srgbClr val="9DC3E6"/>
                       </a:solidFill>
                       <a:prstDash val="solid"/>
                       <a:round/>
@@ -8721,7 +8721,7 @@
                       <a:tailEnd type="none" w="med" len="med"/>
                     </a:lnB>
                     <a:solidFill>
-                      <a:srgbClr val="FFFFFF"/>
+                      <a:srgbClr val="DEEAF6"/>
                     </a:solidFill>
                   </a:tcPr>
                 </a:tc>
@@ -8756,7 +8756,7 @@
                   <a:tcPr marL="54864" marR="54864" marT="54864" marB="54864" anchor="ctr">
                     <a:lnL w="9525" cap="flat" cmpd="sng" algn="ctr">
                       <a:solidFill>
-                        <a:srgbClr val="BFBFBF"/>
+                        <a:srgbClr val="9DC3E6"/>
                       </a:solidFill>
                       <a:prstDash val="solid"/>
                       <a:round/>
@@ -8765,7 +8765,7 @@
                     </a:lnL>
                     <a:lnR w="9525" cap="flat" cmpd="sng" algn="ctr">
                       <a:solidFill>
-                        <a:srgbClr val="BFBFBF"/>
+                        <a:srgbClr val="9DC3E6"/>
                       </a:solidFill>
                       <a:prstDash val="solid"/>
                       <a:round/>
@@ -8774,7 +8774,7 @@
                     </a:lnR>
                     <a:lnT w="9525" cap="flat" cmpd="sng" algn="ctr">
                       <a:solidFill>
-                        <a:srgbClr val="BFBFBF"/>
+                        <a:srgbClr val="9DC3E6"/>
                       </a:solidFill>
                       <a:prstDash val="solid"/>
                       <a:round/>
@@ -8783,7 +8783,7 @@
                     </a:lnT>
                     <a:lnB w="9525" cap="flat" cmpd="sng" algn="ctr">
                       <a:solidFill>
-                        <a:srgbClr val="BFBFBF"/>
+                        <a:srgbClr val="9DC3E6"/>
                       </a:solidFill>
                       <a:prstDash val="solid"/>
                       <a:round/>
@@ -8824,7 +8824,7 @@
                   <a:tcPr marL="54864" marR="54864" marT="54864" marB="54864" anchor="ctr">
                     <a:lnL w="9525" cap="flat" cmpd="sng" algn="ctr">
                       <a:solidFill>
-                        <a:srgbClr val="BFBFBF"/>
+                        <a:srgbClr val="9DC3E6"/>
                       </a:solidFill>
                       <a:prstDash val="solid"/>
                       <a:round/>
@@ -8833,7 +8833,7 @@
                     </a:lnL>
                     <a:lnR w="9525" cap="flat" cmpd="sng" algn="ctr">
                       <a:solidFill>
-                        <a:srgbClr val="BFBFBF"/>
+                        <a:srgbClr val="9DC3E6"/>
                       </a:solidFill>
                       <a:prstDash val="solid"/>
                       <a:round/>
@@ -8842,7 +8842,7 @@
                     </a:lnR>
                     <a:lnT w="9525" cap="flat" cmpd="sng" algn="ctr">
                       <a:solidFill>
-                        <a:srgbClr val="BFBFBF"/>
+                        <a:srgbClr val="9DC3E6"/>
                       </a:solidFill>
                       <a:prstDash val="solid"/>
                       <a:round/>
@@ -8851,7 +8851,7 @@
                     </a:lnT>
                     <a:lnB w="9525" cap="flat" cmpd="sng" algn="ctr">
                       <a:solidFill>
-                        <a:srgbClr val="BFBFBF"/>
+                        <a:srgbClr val="9DC3E6"/>
                       </a:solidFill>
                       <a:prstDash val="solid"/>
                       <a:round/>
@@ -8874,7 +8874,7 @@
                       <a:r>
                         <a:rPr lang="en-US" sz="1250" b="1" dirty="0">
                           <a:solidFill>
-                            <a:srgbClr val="000000"/>
+                            <a:srgbClr val="1F4E79"/>
                           </a:solidFill>
                           <a:latin typeface="David" pitchFamily="34" charset="0"/>
                           <a:ea typeface="David" pitchFamily="34" charset="-122"/>
@@ -8892,7 +8892,7 @@
                   <a:tcPr marL="54864" marR="54864" marT="54864" marB="54864" anchor="ctr">
                     <a:lnL w="9525" cap="flat" cmpd="sng" algn="ctr">
                       <a:solidFill>
-                        <a:srgbClr val="BFBFBF"/>
+                        <a:srgbClr val="9DC3E6"/>
                       </a:solidFill>
                       <a:prstDash val="solid"/>
                       <a:round/>
@@ -8901,7 +8901,7 @@
                     </a:lnL>
                     <a:lnR w="9525" cap="flat" cmpd="sng" algn="ctr">
                       <a:solidFill>
-                        <a:srgbClr val="BFBFBF"/>
+                        <a:srgbClr val="9DC3E6"/>
                       </a:solidFill>
                       <a:prstDash val="solid"/>
                       <a:round/>
@@ -8910,7 +8910,7 @@
                     </a:lnR>
                     <a:lnT w="9525" cap="flat" cmpd="sng" algn="ctr">
                       <a:solidFill>
-                        <a:srgbClr val="BFBFBF"/>
+                        <a:srgbClr val="9DC3E6"/>
                       </a:solidFill>
                       <a:prstDash val="solid"/>
                       <a:round/>
@@ -8919,7 +8919,7 @@
                     </a:lnT>
                     <a:lnB w="9525" cap="flat" cmpd="sng" algn="ctr">
                       <a:solidFill>
-                        <a:srgbClr val="BFBFBF"/>
+                        <a:srgbClr val="9DC3E6"/>
                       </a:solidFill>
                       <a:prstDash val="solid"/>
                       <a:round/>
@@ -8927,7 +8927,7 @@
                       <a:tailEnd type="none" w="med" len="med"/>
                     </a:lnB>
                     <a:solidFill>
-                      <a:srgbClr val="FFFFFF"/>
+                      <a:srgbClr val="DEEAF6"/>
                     </a:solidFill>
                   </a:tcPr>
                 </a:tc>
@@ -9005,7 +9005,7 @@
             <a:r>
               <a:rPr lang="he-IL" altLang="en-US" sz="1000" dirty="0">
                 <a:solidFill>
-                  <a:srgbClr val="595959"/>
+                  <a:srgbClr val="1F4E79"/>
                 </a:solidFill>
                 <a:latin typeface="David" pitchFamily="34" charset="0"/>
                 <a:ea typeface="David" pitchFamily="34" charset="-122"/>
@@ -9108,7 +9108,7 @@
             <a:r>
               <a:rPr lang="he-IL" altLang="en-US" sz="2800" b="1" dirty="0">
                 <a:solidFill>
-                  <a:srgbClr val="000000"/>
+                  <a:srgbClr val="1F4E79"/>
                 </a:solidFill>
                 <a:latin typeface="David" pitchFamily="34" charset="0"/>
                 <a:ea typeface="David" pitchFamily="34" charset="-122"/>
@@ -9231,7 +9231,7 @@
             <a:r>
               <a:rPr lang="he-IL" altLang="en-US" sz="1000" dirty="0">
                 <a:solidFill>
-                  <a:srgbClr val="595959"/>
+                  <a:srgbClr val="1F4E79"/>
                 </a:solidFill>
                 <a:latin typeface="David" pitchFamily="34" charset="0"/>
                 <a:ea typeface="David" pitchFamily="34" charset="-122"/>
@@ -9334,7 +9334,7 @@
             <a:r>
               <a:rPr lang="he-IL" altLang="en-US" sz="2800" b="1" dirty="0">
                 <a:solidFill>
-                  <a:srgbClr val="000000"/>
+                  <a:srgbClr val="1F4E79"/>
                 </a:solidFill>
                 <a:latin typeface="David" pitchFamily="34" charset="0"/>
                 <a:ea typeface="David" pitchFamily="34" charset="-122"/>
@@ -9426,7 +9426,7 @@
                       <a:r>
                         <a:rPr lang="en-US" sz="1300" b="1" dirty="0">
                           <a:solidFill>
-                            <a:srgbClr val="000000"/>
+                            <a:srgbClr val="FFFFFF"/>
                           </a:solidFill>
                           <a:latin typeface="David" pitchFamily="34" charset="0"/>
                           <a:ea typeface="David" pitchFamily="34" charset="-122"/>
@@ -9444,7 +9444,7 @@
                   <a:tcPr marL="54864" marR="54864" marT="54864" marB="54864" anchor="ctr">
                     <a:lnL w="9525" cap="flat" cmpd="sng" algn="ctr">
                       <a:solidFill>
-                        <a:srgbClr val="BFBFBF"/>
+                        <a:srgbClr val="9DC3E6"/>
                       </a:solidFill>
                       <a:prstDash val="solid"/>
                       <a:round/>
@@ -9453,7 +9453,7 @@
                     </a:lnL>
                     <a:lnR w="9525" cap="flat" cmpd="sng" algn="ctr">
                       <a:solidFill>
-                        <a:srgbClr val="BFBFBF"/>
+                        <a:srgbClr val="9DC3E6"/>
                       </a:solidFill>
                       <a:prstDash val="solid"/>
                       <a:round/>
@@ -9462,7 +9462,7 @@
                     </a:lnR>
                     <a:lnT w="9525" cap="flat" cmpd="sng" algn="ctr">
                       <a:solidFill>
-                        <a:srgbClr val="BFBFBF"/>
+                        <a:srgbClr val="9DC3E6"/>
                       </a:solidFill>
                       <a:prstDash val="solid"/>
                       <a:round/>
@@ -9471,7 +9471,7 @@
                     </a:lnT>
                     <a:lnB w="9525" cap="flat" cmpd="sng" algn="ctr">
                       <a:solidFill>
-                        <a:srgbClr val="BFBFBF"/>
+                        <a:srgbClr val="9DC3E6"/>
                       </a:solidFill>
                       <a:prstDash val="solid"/>
                       <a:round/>
@@ -9479,7 +9479,7 @@
                       <a:tailEnd type="none" w="med" len="med"/>
                     </a:lnB>
                     <a:solidFill>
-                      <a:srgbClr val="F2F2F2"/>
+                      <a:srgbClr val="1F4E79"/>
                     </a:solidFill>
                   </a:tcPr>
                 </a:tc>
@@ -9494,7 +9494,7 @@
                       <a:r>
                         <a:rPr lang="en-US" sz="1300" b="1" dirty="0">
                           <a:solidFill>
-                            <a:srgbClr val="000000"/>
+                            <a:srgbClr val="FFFFFF"/>
                           </a:solidFill>
                           <a:latin typeface="David" pitchFamily="34" charset="0"/>
                           <a:ea typeface="David" pitchFamily="34" charset="-122"/>
@@ -9512,7 +9512,7 @@
                   <a:tcPr marL="54864" marR="54864" marT="54864" marB="54864" anchor="ctr">
                     <a:lnL w="9525" cap="flat" cmpd="sng" algn="ctr">
                       <a:solidFill>
-                        <a:srgbClr val="BFBFBF"/>
+                        <a:srgbClr val="9DC3E6"/>
                       </a:solidFill>
                       <a:prstDash val="solid"/>
                       <a:round/>
@@ -9521,7 +9521,7 @@
                     </a:lnL>
                     <a:lnR w="9525" cap="flat" cmpd="sng" algn="ctr">
                       <a:solidFill>
-                        <a:srgbClr val="BFBFBF"/>
+                        <a:srgbClr val="9DC3E6"/>
                       </a:solidFill>
                       <a:prstDash val="solid"/>
                       <a:round/>
@@ -9530,7 +9530,7 @@
                     </a:lnR>
                     <a:lnT w="9525" cap="flat" cmpd="sng" algn="ctr">
                       <a:solidFill>
-                        <a:srgbClr val="BFBFBF"/>
+                        <a:srgbClr val="9DC3E6"/>
                       </a:solidFill>
                       <a:prstDash val="solid"/>
                       <a:round/>
@@ -9539,7 +9539,7 @@
                     </a:lnT>
                     <a:lnB w="9525" cap="flat" cmpd="sng" algn="ctr">
                       <a:solidFill>
-                        <a:srgbClr val="BFBFBF"/>
+                        <a:srgbClr val="9DC3E6"/>
                       </a:solidFill>
                       <a:prstDash val="solid"/>
                       <a:round/>
@@ -9547,7 +9547,7 @@
                       <a:tailEnd type="none" w="med" len="med"/>
                     </a:lnB>
                     <a:solidFill>
-                      <a:srgbClr val="F2F2F2"/>
+                      <a:srgbClr val="1F4E79"/>
                     </a:solidFill>
                   </a:tcPr>
                 </a:tc>
@@ -9582,7 +9582,7 @@
                   <a:tcPr marL="54864" marR="54864" marT="54864" marB="54864" anchor="ctr">
                     <a:lnL w="9525" cap="flat" cmpd="sng" algn="ctr">
                       <a:solidFill>
-                        <a:srgbClr val="BFBFBF"/>
+                        <a:srgbClr val="9DC3E6"/>
                       </a:solidFill>
                       <a:prstDash val="solid"/>
                       <a:round/>
@@ -9591,7 +9591,7 @@
                     </a:lnL>
                     <a:lnR w="9525" cap="flat" cmpd="sng" algn="ctr">
                       <a:solidFill>
-                        <a:srgbClr val="BFBFBF"/>
+                        <a:srgbClr val="9DC3E6"/>
                       </a:solidFill>
                       <a:prstDash val="solid"/>
                       <a:round/>
@@ -9600,7 +9600,7 @@
                     </a:lnR>
                     <a:lnT w="9525" cap="flat" cmpd="sng" algn="ctr">
                       <a:solidFill>
-                        <a:srgbClr val="BFBFBF"/>
+                        <a:srgbClr val="9DC3E6"/>
                       </a:solidFill>
                       <a:prstDash val="solid"/>
                       <a:round/>
@@ -9609,7 +9609,7 @@
                     </a:lnT>
                     <a:lnB w="9525" cap="flat" cmpd="sng" algn="ctr">
                       <a:solidFill>
-                        <a:srgbClr val="BFBFBF"/>
+                        <a:srgbClr val="9DC3E6"/>
                       </a:solidFill>
                       <a:prstDash val="solid"/>
                       <a:round/>
@@ -9632,7 +9632,7 @@
                       <a:r>
                         <a:rPr lang="en-US" sz="1250" b="1" dirty="0">
                           <a:solidFill>
-                            <a:srgbClr val="000000"/>
+                            <a:srgbClr val="1F4E79"/>
                           </a:solidFill>
                           <a:latin typeface="David" pitchFamily="34" charset="0"/>
                           <a:ea typeface="David" pitchFamily="34" charset="-122"/>
@@ -9650,7 +9650,7 @@
                   <a:tcPr marL="54864" marR="54864" marT="54864" marB="54864" anchor="ctr">
                     <a:lnL w="9525" cap="flat" cmpd="sng" algn="ctr">
                       <a:solidFill>
-                        <a:srgbClr val="BFBFBF"/>
+                        <a:srgbClr val="9DC3E6"/>
                       </a:solidFill>
                       <a:prstDash val="solid"/>
                       <a:round/>
@@ -9659,7 +9659,7 @@
                     </a:lnL>
                     <a:lnR w="9525" cap="flat" cmpd="sng" algn="ctr">
                       <a:solidFill>
-                        <a:srgbClr val="BFBFBF"/>
+                        <a:srgbClr val="9DC3E6"/>
                       </a:solidFill>
                       <a:prstDash val="solid"/>
                       <a:round/>
@@ -9668,7 +9668,7 @@
                     </a:lnR>
                     <a:lnT w="9525" cap="flat" cmpd="sng" algn="ctr">
                       <a:solidFill>
-                        <a:srgbClr val="BFBFBF"/>
+                        <a:srgbClr val="9DC3E6"/>
                       </a:solidFill>
                       <a:prstDash val="solid"/>
                       <a:round/>
@@ -9677,7 +9677,7 @@
                     </a:lnT>
                     <a:lnB w="9525" cap="flat" cmpd="sng" algn="ctr">
                       <a:solidFill>
-                        <a:srgbClr val="BFBFBF"/>
+                        <a:srgbClr val="9DC3E6"/>
                       </a:solidFill>
                       <a:prstDash val="solid"/>
                       <a:round/>
@@ -9685,7 +9685,7 @@
                       <a:tailEnd type="none" w="med" len="med"/>
                     </a:lnB>
                     <a:solidFill>
-                      <a:srgbClr val="FFFFFF"/>
+                      <a:srgbClr val="DEEAF6"/>
                     </a:solidFill>
                   </a:tcPr>
                 </a:tc>
@@ -9720,7 +9720,7 @@
                   <a:tcPr marL="54864" marR="54864" marT="54864" marB="54864" anchor="ctr">
                     <a:lnL w="9525" cap="flat" cmpd="sng" algn="ctr">
                       <a:solidFill>
-                        <a:srgbClr val="BFBFBF"/>
+                        <a:srgbClr val="9DC3E6"/>
                       </a:solidFill>
                       <a:prstDash val="solid"/>
                       <a:round/>
@@ -9729,7 +9729,7 @@
                     </a:lnL>
                     <a:lnR w="9525" cap="flat" cmpd="sng" algn="ctr">
                       <a:solidFill>
-                        <a:srgbClr val="BFBFBF"/>
+                        <a:srgbClr val="9DC3E6"/>
                       </a:solidFill>
                       <a:prstDash val="solid"/>
                       <a:round/>
@@ -9738,7 +9738,7 @@
                     </a:lnR>
                     <a:lnT w="9525" cap="flat" cmpd="sng" algn="ctr">
                       <a:solidFill>
-                        <a:srgbClr val="BFBFBF"/>
+                        <a:srgbClr val="9DC3E6"/>
                       </a:solidFill>
                       <a:prstDash val="solid"/>
                       <a:round/>
@@ -9747,7 +9747,7 @@
                     </a:lnT>
                     <a:lnB w="9525" cap="flat" cmpd="sng" algn="ctr">
                       <a:solidFill>
-                        <a:srgbClr val="BFBFBF"/>
+                        <a:srgbClr val="9DC3E6"/>
                       </a:solidFill>
                       <a:prstDash val="solid"/>
                       <a:round/>
@@ -9755,7 +9755,7 @@
                       <a:tailEnd type="none" w="med" len="med"/>
                     </a:lnB>
                     <a:solidFill>
-                      <a:srgbClr val="FFFFFF"/>
+                      <a:srgbClr val="F5F8FC"/>
                     </a:solidFill>
                   </a:tcPr>
                 </a:tc>
@@ -9770,7 +9770,7 @@
                       <a:r>
                         <a:rPr lang="en-US" sz="1250" b="1" dirty="0">
                           <a:solidFill>
-                            <a:srgbClr val="000000"/>
+                            <a:srgbClr val="1F4E79"/>
                           </a:solidFill>
                           <a:latin typeface="David" pitchFamily="34" charset="0"/>
                           <a:ea typeface="David" pitchFamily="34" charset="-122"/>
@@ -9788,7 +9788,7 @@
                   <a:tcPr marL="54864" marR="54864" marT="54864" marB="54864" anchor="ctr">
                     <a:lnL w="9525" cap="flat" cmpd="sng" algn="ctr">
                       <a:solidFill>
-                        <a:srgbClr val="BFBFBF"/>
+                        <a:srgbClr val="9DC3E6"/>
                       </a:solidFill>
                       <a:prstDash val="solid"/>
                       <a:round/>
@@ -9797,7 +9797,7 @@
                     </a:lnL>
                     <a:lnR w="9525" cap="flat" cmpd="sng" algn="ctr">
                       <a:solidFill>
-                        <a:srgbClr val="BFBFBF"/>
+                        <a:srgbClr val="9DC3E6"/>
                       </a:solidFill>
                       <a:prstDash val="solid"/>
                       <a:round/>
@@ -9806,7 +9806,7 @@
                     </a:lnR>
                     <a:lnT w="9525" cap="flat" cmpd="sng" algn="ctr">
                       <a:solidFill>
-                        <a:srgbClr val="BFBFBF"/>
+                        <a:srgbClr val="9DC3E6"/>
                       </a:solidFill>
                       <a:prstDash val="solid"/>
                       <a:round/>
@@ -9815,7 +9815,7 @@
                     </a:lnT>
                     <a:lnB w="9525" cap="flat" cmpd="sng" algn="ctr">
                       <a:solidFill>
-                        <a:srgbClr val="BFBFBF"/>
+                        <a:srgbClr val="9DC3E6"/>
                       </a:solidFill>
                       <a:prstDash val="solid"/>
                       <a:round/>
@@ -9823,7 +9823,7 @@
                       <a:tailEnd type="none" w="med" len="med"/>
                     </a:lnB>
                     <a:solidFill>
-                      <a:srgbClr val="FFFFFF"/>
+                      <a:srgbClr val="DEEAF6"/>
                     </a:solidFill>
                   </a:tcPr>
                 </a:tc>
@@ -9858,7 +9858,7 @@
                   <a:tcPr marL="54864" marR="54864" marT="54864" marB="54864" anchor="ctr">
                     <a:lnL w="9525" cap="flat" cmpd="sng" algn="ctr">
                       <a:solidFill>
-                        <a:srgbClr val="BFBFBF"/>
+                        <a:srgbClr val="9DC3E6"/>
                       </a:solidFill>
                       <a:prstDash val="solid"/>
                       <a:round/>
@@ -9867,7 +9867,7 @@
                     </a:lnL>
                     <a:lnR w="9525" cap="flat" cmpd="sng" algn="ctr">
                       <a:solidFill>
-                        <a:srgbClr val="BFBFBF"/>
+                        <a:srgbClr val="9DC3E6"/>
                       </a:solidFill>
                       <a:prstDash val="solid"/>
                       <a:round/>
@@ -9876,7 +9876,7 @@
                     </a:lnR>
                     <a:lnT w="9525" cap="flat" cmpd="sng" algn="ctr">
                       <a:solidFill>
-                        <a:srgbClr val="BFBFBF"/>
+                        <a:srgbClr val="9DC3E6"/>
                       </a:solidFill>
                       <a:prstDash val="solid"/>
                       <a:round/>
@@ -9885,7 +9885,7 @@
                     </a:lnT>
                     <a:lnB w="9525" cap="flat" cmpd="sng" algn="ctr">
                       <a:solidFill>
-                        <a:srgbClr val="BFBFBF"/>
+                        <a:srgbClr val="9DC3E6"/>
                       </a:solidFill>
                       <a:prstDash val="solid"/>
                       <a:round/>
@@ -9908,7 +9908,7 @@
                       <a:r>
                         <a:rPr lang="en-US" sz="1250" b="1" dirty="0">
                           <a:solidFill>
-                            <a:srgbClr val="000000"/>
+                            <a:srgbClr val="1F4E79"/>
                           </a:solidFill>
                           <a:latin typeface="David" pitchFamily="34" charset="0"/>
                           <a:ea typeface="David" pitchFamily="34" charset="-122"/>
@@ -9926,7 +9926,7 @@
                   <a:tcPr marL="54864" marR="54864" marT="54864" marB="54864" anchor="ctr">
                     <a:lnL w="9525" cap="flat" cmpd="sng" algn="ctr">
                       <a:solidFill>
-                        <a:srgbClr val="BFBFBF"/>
+                        <a:srgbClr val="9DC3E6"/>
                       </a:solidFill>
                       <a:prstDash val="solid"/>
                       <a:round/>
@@ -9935,7 +9935,7 @@
                     </a:lnL>
                     <a:lnR w="9525" cap="flat" cmpd="sng" algn="ctr">
                       <a:solidFill>
-                        <a:srgbClr val="BFBFBF"/>
+                        <a:srgbClr val="9DC3E6"/>
                       </a:solidFill>
                       <a:prstDash val="solid"/>
                       <a:round/>
@@ -9944,7 +9944,7 @@
                     </a:lnR>
                     <a:lnT w="9525" cap="flat" cmpd="sng" algn="ctr">
                       <a:solidFill>
-                        <a:srgbClr val="BFBFBF"/>
+                        <a:srgbClr val="9DC3E6"/>
                       </a:solidFill>
                       <a:prstDash val="solid"/>
                       <a:round/>
@@ -9953,7 +9953,7 @@
                     </a:lnT>
                     <a:lnB w="9525" cap="flat" cmpd="sng" algn="ctr">
                       <a:solidFill>
-                        <a:srgbClr val="BFBFBF"/>
+                        <a:srgbClr val="9DC3E6"/>
                       </a:solidFill>
                       <a:prstDash val="solid"/>
                       <a:round/>
@@ -9961,7 +9961,7 @@
                       <a:tailEnd type="none" w="med" len="med"/>
                     </a:lnB>
                     <a:solidFill>
-                      <a:srgbClr val="FFFFFF"/>
+                      <a:srgbClr val="DEEAF6"/>
                     </a:solidFill>
                   </a:tcPr>
                 </a:tc>
@@ -9996,7 +9996,7 @@
                   <a:tcPr marL="54864" marR="54864" marT="54864" marB="54864" anchor="ctr">
                     <a:lnL w="9525" cap="flat" cmpd="sng" algn="ctr">
                       <a:solidFill>
-                        <a:srgbClr val="BFBFBF"/>
+                        <a:srgbClr val="9DC3E6"/>
                       </a:solidFill>
                       <a:prstDash val="solid"/>
                       <a:round/>
@@ -10005,7 +10005,7 @@
                     </a:lnL>
                     <a:lnR w="9525" cap="flat" cmpd="sng" algn="ctr">
                       <a:solidFill>
-                        <a:srgbClr val="BFBFBF"/>
+                        <a:srgbClr val="9DC3E6"/>
                       </a:solidFill>
                       <a:prstDash val="solid"/>
                       <a:round/>
@@ -10014,7 +10014,7 @@
                     </a:lnR>
                     <a:lnT w="9525" cap="flat" cmpd="sng" algn="ctr">
                       <a:solidFill>
-                        <a:srgbClr val="BFBFBF"/>
+                        <a:srgbClr val="9DC3E6"/>
                       </a:solidFill>
                       <a:prstDash val="solid"/>
                       <a:round/>
@@ -10023,7 +10023,7 @@
                     </a:lnT>
                     <a:lnB w="9525" cap="flat" cmpd="sng" algn="ctr">
                       <a:solidFill>
-                        <a:srgbClr val="BFBFBF"/>
+                        <a:srgbClr val="9DC3E6"/>
                       </a:solidFill>
                       <a:prstDash val="solid"/>
                       <a:round/>
@@ -10031,7 +10031,7 @@
                       <a:tailEnd type="none" w="med" len="med"/>
                     </a:lnB>
                     <a:solidFill>
-                      <a:srgbClr val="FFFFFF"/>
+                      <a:srgbClr val="F5F8FC"/>
                     </a:solidFill>
                   </a:tcPr>
                 </a:tc>
@@ -10046,7 +10046,7 @@
                       <a:r>
                         <a:rPr lang="en-US" sz="1250" b="1" dirty="0">
                           <a:solidFill>
-                            <a:srgbClr val="000000"/>
+                            <a:srgbClr val="1F4E79"/>
                           </a:solidFill>
                           <a:latin typeface="David" pitchFamily="34" charset="0"/>
                           <a:ea typeface="David" pitchFamily="34" charset="-122"/>
@@ -10064,7 +10064,7 @@
                   <a:tcPr marL="54864" marR="54864" marT="54864" marB="54864" anchor="ctr">
                     <a:lnL w="9525" cap="flat" cmpd="sng" algn="ctr">
                       <a:solidFill>
-                        <a:srgbClr val="BFBFBF"/>
+                        <a:srgbClr val="9DC3E6"/>
                       </a:solidFill>
                       <a:prstDash val="solid"/>
                       <a:round/>
@@ -10073,7 +10073,7 @@
                     </a:lnL>
                     <a:lnR w="9525" cap="flat" cmpd="sng" algn="ctr">
                       <a:solidFill>
-                        <a:srgbClr val="BFBFBF"/>
+                        <a:srgbClr val="9DC3E6"/>
                       </a:solidFill>
                       <a:prstDash val="solid"/>
                       <a:round/>
@@ -10082,7 +10082,7 @@
                     </a:lnR>
                     <a:lnT w="9525" cap="flat" cmpd="sng" algn="ctr">
                       <a:solidFill>
-                        <a:srgbClr val="BFBFBF"/>
+                        <a:srgbClr val="9DC3E6"/>
                       </a:solidFill>
                       <a:prstDash val="solid"/>
                       <a:round/>
@@ -10091,7 +10091,7 @@
                     </a:lnT>
                     <a:lnB w="9525" cap="flat" cmpd="sng" algn="ctr">
                       <a:solidFill>
-                        <a:srgbClr val="BFBFBF"/>
+                        <a:srgbClr val="9DC3E6"/>
                       </a:solidFill>
                       <a:prstDash val="solid"/>
                       <a:round/>
@@ -10099,7 +10099,7 @@
                       <a:tailEnd type="none" w="med" len="med"/>
                     </a:lnB>
                     <a:solidFill>
-                      <a:srgbClr val="FFFFFF"/>
+                      <a:srgbClr val="DEEAF6"/>
                     </a:solidFill>
                   </a:tcPr>
                 </a:tc>
@@ -10135,7 +10135,7 @@
             <a:r>
               <a:rPr lang="he-IL" altLang="en-US" sz="1000" dirty="0">
                 <a:solidFill>
-                  <a:srgbClr val="595959"/>
+                  <a:srgbClr val="1F4E79"/>
                 </a:solidFill>
                 <a:latin typeface="David" pitchFamily="34" charset="0"/>
                 <a:ea typeface="David" pitchFamily="34" charset="-122"/>
@@ -10238,7 +10238,7 @@
             <a:r>
               <a:rPr lang="he-IL" altLang="en-US" sz="2800" b="1" dirty="0">
                 <a:solidFill>
-                  <a:srgbClr val="000000"/>
+                  <a:srgbClr val="1F4E79"/>
                 </a:solidFill>
                 <a:latin typeface="David" pitchFamily="34" charset="0"/>
                 <a:ea typeface="David" pitchFamily="34" charset="-122"/>
@@ -10347,7 +10347,7 @@
                       <a:r>
                         <a:rPr lang="en-US" sz="1300" b="1" dirty="0">
                           <a:solidFill>
-                            <a:srgbClr val="000000"/>
+                            <a:srgbClr val="FFFFFF"/>
                           </a:solidFill>
                           <a:latin typeface="David" pitchFamily="34" charset="0"/>
                           <a:ea typeface="David" pitchFamily="34" charset="-122"/>
@@ -10365,7 +10365,7 @@
                   <a:tcPr marL="54864" marR="54864" marT="54864" marB="54864" anchor="ctr">
                     <a:lnL w="9525" cap="flat" cmpd="sng" algn="ctr">
                       <a:solidFill>
-                        <a:srgbClr val="BFBFBF"/>
+                        <a:srgbClr val="9DC3E6"/>
                       </a:solidFill>
                       <a:prstDash val="solid"/>
                       <a:round/>
@@ -10374,7 +10374,7 @@
                     </a:lnL>
                     <a:lnR w="9525" cap="flat" cmpd="sng" algn="ctr">
                       <a:solidFill>
-                        <a:srgbClr val="BFBFBF"/>
+                        <a:srgbClr val="9DC3E6"/>
                       </a:solidFill>
                       <a:prstDash val="solid"/>
                       <a:round/>
@@ -10383,7 +10383,7 @@
                     </a:lnR>
                     <a:lnT w="9525" cap="flat" cmpd="sng" algn="ctr">
                       <a:solidFill>
-                        <a:srgbClr val="BFBFBF"/>
+                        <a:srgbClr val="9DC3E6"/>
                       </a:solidFill>
                       <a:prstDash val="solid"/>
                       <a:round/>
@@ -10392,7 +10392,7 @@
                     </a:lnT>
                     <a:lnB w="9525" cap="flat" cmpd="sng" algn="ctr">
                       <a:solidFill>
-                        <a:srgbClr val="BFBFBF"/>
+                        <a:srgbClr val="9DC3E6"/>
                       </a:solidFill>
                       <a:prstDash val="solid"/>
                       <a:round/>
@@ -10400,7 +10400,7 @@
                       <a:tailEnd type="none" w="med" len="med"/>
                     </a:lnB>
                     <a:solidFill>
-                      <a:srgbClr val="F2F2F2"/>
+                      <a:srgbClr val="1F4E79"/>
                     </a:solidFill>
                   </a:tcPr>
                 </a:tc>
@@ -10415,7 +10415,7 @@
                       <a:r>
                         <a:rPr lang="en-US" sz="1300" b="1" dirty="0">
                           <a:solidFill>
-                            <a:srgbClr val="000000"/>
+                            <a:srgbClr val="FFFFFF"/>
                           </a:solidFill>
                           <a:latin typeface="David" pitchFamily="34" charset="0"/>
                           <a:ea typeface="David" pitchFamily="34" charset="-122"/>
@@ -10433,7 +10433,7 @@
                   <a:tcPr marL="54864" marR="54864" marT="54864" marB="54864" anchor="ctr">
                     <a:lnL w="9525" cap="flat" cmpd="sng" algn="ctr">
                       <a:solidFill>
-                        <a:srgbClr val="BFBFBF"/>
+                        <a:srgbClr val="9DC3E6"/>
                       </a:solidFill>
                       <a:prstDash val="solid"/>
                       <a:round/>
@@ -10442,7 +10442,7 @@
                     </a:lnL>
                     <a:lnR w="9525" cap="flat" cmpd="sng" algn="ctr">
                       <a:solidFill>
-                        <a:srgbClr val="BFBFBF"/>
+                        <a:srgbClr val="9DC3E6"/>
                       </a:solidFill>
                       <a:prstDash val="solid"/>
                       <a:round/>
@@ -10451,7 +10451,7 @@
                     </a:lnR>
                     <a:lnT w="9525" cap="flat" cmpd="sng" algn="ctr">
                       <a:solidFill>
-                        <a:srgbClr val="BFBFBF"/>
+                        <a:srgbClr val="9DC3E6"/>
                       </a:solidFill>
                       <a:prstDash val="solid"/>
                       <a:round/>
@@ -10460,7 +10460,7 @@
                     </a:lnT>
                     <a:lnB w="9525" cap="flat" cmpd="sng" algn="ctr">
                       <a:solidFill>
-                        <a:srgbClr val="BFBFBF"/>
+                        <a:srgbClr val="9DC3E6"/>
                       </a:solidFill>
                       <a:prstDash val="solid"/>
                       <a:round/>
@@ -10468,7 +10468,7 @@
                       <a:tailEnd type="none" w="med" len="med"/>
                     </a:lnB>
                     <a:solidFill>
-                      <a:srgbClr val="F2F2F2"/>
+                      <a:srgbClr val="1F4E79"/>
                     </a:solidFill>
                   </a:tcPr>
                 </a:tc>
@@ -10483,7 +10483,7 @@
                       <a:r>
                         <a:rPr lang="en-US" sz="1300" b="1" dirty="0">
                           <a:solidFill>
-                            <a:srgbClr val="000000"/>
+                            <a:srgbClr val="FFFFFF"/>
                           </a:solidFill>
                           <a:latin typeface="David" pitchFamily="34" charset="0"/>
                           <a:ea typeface="David" pitchFamily="34" charset="-122"/>
@@ -10501,7 +10501,7 @@
                   <a:tcPr marL="54864" marR="54864" marT="54864" marB="54864" anchor="ctr">
                     <a:lnL w="9525" cap="flat" cmpd="sng" algn="ctr">
                       <a:solidFill>
-                        <a:srgbClr val="BFBFBF"/>
+                        <a:srgbClr val="9DC3E6"/>
                       </a:solidFill>
                       <a:prstDash val="solid"/>
                       <a:round/>
@@ -10510,7 +10510,7 @@
                     </a:lnL>
                     <a:lnR w="9525" cap="flat" cmpd="sng" algn="ctr">
                       <a:solidFill>
-                        <a:srgbClr val="BFBFBF"/>
+                        <a:srgbClr val="9DC3E6"/>
                       </a:solidFill>
                       <a:prstDash val="solid"/>
                       <a:round/>
@@ -10519,7 +10519,7 @@
                     </a:lnR>
                     <a:lnT w="9525" cap="flat" cmpd="sng" algn="ctr">
                       <a:solidFill>
-                        <a:srgbClr val="BFBFBF"/>
+                        <a:srgbClr val="9DC3E6"/>
                       </a:solidFill>
                       <a:prstDash val="solid"/>
                       <a:round/>
@@ -10528,7 +10528,7 @@
                     </a:lnT>
                     <a:lnB w="9525" cap="flat" cmpd="sng" algn="ctr">
                       <a:solidFill>
-                        <a:srgbClr val="BFBFBF"/>
+                        <a:srgbClr val="9DC3E6"/>
                       </a:solidFill>
                       <a:prstDash val="solid"/>
                       <a:round/>
@@ -10536,7 +10536,7 @@
                       <a:tailEnd type="none" w="med" len="med"/>
                     </a:lnB>
                     <a:solidFill>
-                      <a:srgbClr val="F2F2F2"/>
+                      <a:srgbClr val="1F4E79"/>
                     </a:solidFill>
                   </a:tcPr>
                 </a:tc>
@@ -10571,7 +10571,7 @@
                   <a:tcPr marL="54864" marR="54864" marT="54864" marB="54864" anchor="ctr">
                     <a:lnL w="9525" cap="flat" cmpd="sng" algn="ctr">
                       <a:solidFill>
-                        <a:srgbClr val="BFBFBF"/>
+                        <a:srgbClr val="9DC3E6"/>
                       </a:solidFill>
                       <a:prstDash val="solid"/>
                       <a:round/>
@@ -10580,7 +10580,7 @@
                     </a:lnL>
                     <a:lnR w="9525" cap="flat" cmpd="sng" algn="ctr">
                       <a:solidFill>
-                        <a:srgbClr val="BFBFBF"/>
+                        <a:srgbClr val="9DC3E6"/>
                       </a:solidFill>
                       <a:prstDash val="solid"/>
                       <a:round/>
@@ -10589,7 +10589,7 @@
                     </a:lnR>
                     <a:lnT w="9525" cap="flat" cmpd="sng" algn="ctr">
                       <a:solidFill>
-                        <a:srgbClr val="BFBFBF"/>
+                        <a:srgbClr val="9DC3E6"/>
                       </a:solidFill>
                       <a:prstDash val="solid"/>
                       <a:round/>
@@ -10598,7 +10598,7 @@
                     </a:lnT>
                     <a:lnB w="9525" cap="flat" cmpd="sng" algn="ctr">
                       <a:solidFill>
-                        <a:srgbClr val="BFBFBF"/>
+                        <a:srgbClr val="9DC3E6"/>
                       </a:solidFill>
                       <a:prstDash val="solid"/>
                       <a:round/>
@@ -10639,7 +10639,7 @@
                   <a:tcPr marL="54864" marR="54864" marT="54864" marB="54864" anchor="ctr">
                     <a:lnL w="9525" cap="flat" cmpd="sng" algn="ctr">
                       <a:solidFill>
-                        <a:srgbClr val="BFBFBF"/>
+                        <a:srgbClr val="9DC3E6"/>
                       </a:solidFill>
                       <a:prstDash val="solid"/>
                       <a:round/>
@@ -10648,7 +10648,7 @@
                     </a:lnL>
                     <a:lnR w="9525" cap="flat" cmpd="sng" algn="ctr">
                       <a:solidFill>
-                        <a:srgbClr val="BFBFBF"/>
+                        <a:srgbClr val="9DC3E6"/>
                       </a:solidFill>
                       <a:prstDash val="solid"/>
                       <a:round/>
@@ -10657,7 +10657,7 @@
                     </a:lnR>
                     <a:lnT w="9525" cap="flat" cmpd="sng" algn="ctr">
                       <a:solidFill>
-                        <a:srgbClr val="BFBFBF"/>
+                        <a:srgbClr val="9DC3E6"/>
                       </a:solidFill>
                       <a:prstDash val="solid"/>
                       <a:round/>
@@ -10666,7 +10666,7 @@
                     </a:lnT>
                     <a:lnB w="9525" cap="flat" cmpd="sng" algn="ctr">
                       <a:solidFill>
-                        <a:srgbClr val="BFBFBF"/>
+                        <a:srgbClr val="9DC3E6"/>
                       </a:solidFill>
                       <a:prstDash val="solid"/>
                       <a:round/>
@@ -10707,7 +10707,7 @@
                   <a:tcPr marL="54864" marR="54864" marT="54864" marB="54864" anchor="ctr">
                     <a:lnL w="9525" cap="flat" cmpd="sng" algn="ctr">
                       <a:solidFill>
-                        <a:srgbClr val="BFBFBF"/>
+                        <a:srgbClr val="9DC3E6"/>
                       </a:solidFill>
                       <a:prstDash val="solid"/>
                       <a:round/>
@@ -10716,7 +10716,7 @@
                     </a:lnL>
                     <a:lnR w="9525" cap="flat" cmpd="sng" algn="ctr">
                       <a:solidFill>
-                        <a:srgbClr val="BFBFBF"/>
+                        <a:srgbClr val="9DC3E6"/>
                       </a:solidFill>
                       <a:prstDash val="solid"/>
                       <a:round/>
@@ -10725,7 +10725,7 @@
                     </a:lnR>
                     <a:lnT w="9525" cap="flat" cmpd="sng" algn="ctr">
                       <a:solidFill>
-                        <a:srgbClr val="BFBFBF"/>
+                        <a:srgbClr val="9DC3E6"/>
                       </a:solidFill>
                       <a:prstDash val="solid"/>
                       <a:round/>
@@ -10734,7 +10734,7 @@
                     </a:lnT>
                     <a:lnB w="9525" cap="flat" cmpd="sng" algn="ctr">
                       <a:solidFill>
-                        <a:srgbClr val="BFBFBF"/>
+                        <a:srgbClr val="9DC3E6"/>
                       </a:solidFill>
                       <a:prstDash val="solid"/>
                       <a:round/>
@@ -10777,7 +10777,7 @@
                   <a:tcPr marL="54864" marR="54864" marT="54864" marB="54864" anchor="ctr">
                     <a:lnL w="9525" cap="flat" cmpd="sng" algn="ctr">
                       <a:solidFill>
-                        <a:srgbClr val="BFBFBF"/>
+                        <a:srgbClr val="9DC3E6"/>
                       </a:solidFill>
                       <a:prstDash val="solid"/>
                       <a:round/>
@@ -10786,7 +10786,7 @@
                     </a:lnL>
                     <a:lnR w="9525" cap="flat" cmpd="sng" algn="ctr">
                       <a:solidFill>
-                        <a:srgbClr val="BFBFBF"/>
+                        <a:srgbClr val="9DC3E6"/>
                       </a:solidFill>
                       <a:prstDash val="solid"/>
                       <a:round/>
@@ -10795,7 +10795,7 @@
                     </a:lnR>
                     <a:lnT w="9525" cap="flat" cmpd="sng" algn="ctr">
                       <a:solidFill>
-                        <a:srgbClr val="BFBFBF"/>
+                        <a:srgbClr val="9DC3E6"/>
                       </a:solidFill>
                       <a:prstDash val="solid"/>
                       <a:round/>
@@ -10804,7 +10804,7 @@
                     </a:lnT>
                     <a:lnB w="9525" cap="flat" cmpd="sng" algn="ctr">
                       <a:solidFill>
-                        <a:srgbClr val="BFBFBF"/>
+                        <a:srgbClr val="9DC3E6"/>
                       </a:solidFill>
                       <a:prstDash val="solid"/>
                       <a:round/>
@@ -10812,7 +10812,7 @@
                       <a:tailEnd type="none" w="med" len="med"/>
                     </a:lnB>
                     <a:solidFill>
-                      <a:srgbClr val="FFFFFF"/>
+                      <a:srgbClr val="F5F8FC"/>
                     </a:solidFill>
                   </a:tcPr>
                 </a:tc>
@@ -10845,7 +10845,7 @@
                   <a:tcPr marL="54864" marR="54864" marT="54864" marB="54864" anchor="ctr">
                     <a:lnL w="9525" cap="flat" cmpd="sng" algn="ctr">
                       <a:solidFill>
-                        <a:srgbClr val="BFBFBF"/>
+                        <a:srgbClr val="9DC3E6"/>
                       </a:solidFill>
                       <a:prstDash val="solid"/>
                       <a:round/>
@@ -10854,7 +10854,7 @@
                     </a:lnL>
                     <a:lnR w="9525" cap="flat" cmpd="sng" algn="ctr">
                       <a:solidFill>
-                        <a:srgbClr val="BFBFBF"/>
+                        <a:srgbClr val="9DC3E6"/>
                       </a:solidFill>
                       <a:prstDash val="solid"/>
                       <a:round/>
@@ -10863,7 +10863,7 @@
                     </a:lnR>
                     <a:lnT w="9525" cap="flat" cmpd="sng" algn="ctr">
                       <a:solidFill>
-                        <a:srgbClr val="BFBFBF"/>
+                        <a:srgbClr val="9DC3E6"/>
                       </a:solidFill>
                       <a:prstDash val="solid"/>
                       <a:round/>
@@ -10872,7 +10872,7 @@
                     </a:lnT>
                     <a:lnB w="9525" cap="flat" cmpd="sng" algn="ctr">
                       <a:solidFill>
-                        <a:srgbClr val="BFBFBF"/>
+                        <a:srgbClr val="9DC3E6"/>
                       </a:solidFill>
                       <a:prstDash val="solid"/>
                       <a:round/>
@@ -10880,7 +10880,7 @@
                       <a:tailEnd type="none" w="med" len="med"/>
                     </a:lnB>
                     <a:solidFill>
-                      <a:srgbClr val="FFFFFF"/>
+                      <a:srgbClr val="F5F8FC"/>
                     </a:solidFill>
                   </a:tcPr>
                 </a:tc>
@@ -10913,7 +10913,7 @@
                   <a:tcPr marL="54864" marR="54864" marT="54864" marB="54864" anchor="ctr">
                     <a:lnL w="9525" cap="flat" cmpd="sng" algn="ctr">
                       <a:solidFill>
-                        <a:srgbClr val="BFBFBF"/>
+                        <a:srgbClr val="9DC3E6"/>
                       </a:solidFill>
                       <a:prstDash val="solid"/>
                       <a:round/>
@@ -10922,7 +10922,7 @@
                     </a:lnL>
                     <a:lnR w="9525" cap="flat" cmpd="sng" algn="ctr">
                       <a:solidFill>
-                        <a:srgbClr val="BFBFBF"/>
+                        <a:srgbClr val="9DC3E6"/>
                       </a:solidFill>
                       <a:prstDash val="solid"/>
                       <a:round/>
@@ -10931,7 +10931,7 @@
                     </a:lnR>
                     <a:lnT w="9525" cap="flat" cmpd="sng" algn="ctr">
                       <a:solidFill>
-                        <a:srgbClr val="BFBFBF"/>
+                        <a:srgbClr val="9DC3E6"/>
                       </a:solidFill>
                       <a:prstDash val="solid"/>
                       <a:round/>
@@ -10940,7 +10940,7 @@
                     </a:lnT>
                     <a:lnB w="9525" cap="flat" cmpd="sng" algn="ctr">
                       <a:solidFill>
-                        <a:srgbClr val="BFBFBF"/>
+                        <a:srgbClr val="9DC3E6"/>
                       </a:solidFill>
                       <a:prstDash val="solid"/>
                       <a:round/>
@@ -10948,7 +10948,7 @@
                       <a:tailEnd type="none" w="med" len="med"/>
                     </a:lnB>
                     <a:solidFill>
-                      <a:srgbClr val="FFFFFF"/>
+                      <a:srgbClr val="F5F8FC"/>
                     </a:solidFill>
                   </a:tcPr>
                 </a:tc>
@@ -10983,7 +10983,7 @@
                   <a:tcPr marL="54864" marR="54864" marT="54864" marB="54864" anchor="ctr">
                     <a:lnL w="9525" cap="flat" cmpd="sng" algn="ctr">
                       <a:solidFill>
-                        <a:srgbClr val="BFBFBF"/>
+                        <a:srgbClr val="9DC3E6"/>
                       </a:solidFill>
                       <a:prstDash val="solid"/>
                       <a:round/>
@@ -10992,7 +10992,7 @@
                     </a:lnL>
                     <a:lnR w="9525" cap="flat" cmpd="sng" algn="ctr">
                       <a:solidFill>
-                        <a:srgbClr val="BFBFBF"/>
+                        <a:srgbClr val="9DC3E6"/>
                       </a:solidFill>
                       <a:prstDash val="solid"/>
                       <a:round/>
@@ -11001,7 +11001,7 @@
                     </a:lnR>
                     <a:lnT w="9525" cap="flat" cmpd="sng" algn="ctr">
                       <a:solidFill>
-                        <a:srgbClr val="BFBFBF"/>
+                        <a:srgbClr val="9DC3E6"/>
                       </a:solidFill>
                       <a:prstDash val="solid"/>
                       <a:round/>
@@ -11010,7 +11010,7 @@
                     </a:lnT>
                     <a:lnB w="9525" cap="flat" cmpd="sng" algn="ctr">
                       <a:solidFill>
-                        <a:srgbClr val="BFBFBF"/>
+                        <a:srgbClr val="9DC3E6"/>
                       </a:solidFill>
                       <a:prstDash val="solid"/>
                       <a:round/>
@@ -11051,7 +11051,7 @@
                   <a:tcPr marL="54864" marR="54864" marT="54864" marB="54864" anchor="ctr">
                     <a:lnL w="9525" cap="flat" cmpd="sng" algn="ctr">
                       <a:solidFill>
-                        <a:srgbClr val="BFBFBF"/>
+                        <a:srgbClr val="9DC3E6"/>
                       </a:solidFill>
                       <a:prstDash val="solid"/>
                       <a:round/>
@@ -11060,7 +11060,7 @@
                     </a:lnL>
                     <a:lnR w="9525" cap="flat" cmpd="sng" algn="ctr">
                       <a:solidFill>
-                        <a:srgbClr val="BFBFBF"/>
+                        <a:srgbClr val="9DC3E6"/>
                       </a:solidFill>
                       <a:prstDash val="solid"/>
                       <a:round/>
@@ -11069,7 +11069,7 @@
                     </a:lnR>
                     <a:lnT w="9525" cap="flat" cmpd="sng" algn="ctr">
                       <a:solidFill>
-                        <a:srgbClr val="BFBFBF"/>
+                        <a:srgbClr val="9DC3E6"/>
                       </a:solidFill>
                       <a:prstDash val="solid"/>
                       <a:round/>
@@ -11078,7 +11078,7 @@
                     </a:lnT>
                     <a:lnB w="9525" cap="flat" cmpd="sng" algn="ctr">
                       <a:solidFill>
-                        <a:srgbClr val="BFBFBF"/>
+                        <a:srgbClr val="9DC3E6"/>
                       </a:solidFill>
                       <a:prstDash val="solid"/>
                       <a:round/>
@@ -11119,7 +11119,7 @@
                   <a:tcPr marL="54864" marR="54864" marT="54864" marB="54864" anchor="ctr">
                     <a:lnL w="9525" cap="flat" cmpd="sng" algn="ctr">
                       <a:solidFill>
-                        <a:srgbClr val="BFBFBF"/>
+                        <a:srgbClr val="9DC3E6"/>
                       </a:solidFill>
                       <a:prstDash val="solid"/>
                       <a:round/>
@@ -11128,7 +11128,7 @@
                     </a:lnL>
                     <a:lnR w="9525" cap="flat" cmpd="sng" algn="ctr">
                       <a:solidFill>
-                        <a:srgbClr val="BFBFBF"/>
+                        <a:srgbClr val="9DC3E6"/>
                       </a:solidFill>
                       <a:prstDash val="solid"/>
                       <a:round/>
@@ -11137,7 +11137,7 @@
                     </a:lnR>
                     <a:lnT w="9525" cap="flat" cmpd="sng" algn="ctr">
                       <a:solidFill>
-                        <a:srgbClr val="BFBFBF"/>
+                        <a:srgbClr val="9DC3E6"/>
                       </a:solidFill>
                       <a:prstDash val="solid"/>
                       <a:round/>
@@ -11146,7 +11146,7 @@
                     </a:lnT>
                     <a:lnB w="9525" cap="flat" cmpd="sng" algn="ctr">
                       <a:solidFill>
-                        <a:srgbClr val="BFBFBF"/>
+                        <a:srgbClr val="9DC3E6"/>
                       </a:solidFill>
                       <a:prstDash val="solid"/>
                       <a:round/>
@@ -11189,7 +11189,7 @@
                   <a:tcPr marL="54864" marR="54864" marT="54864" marB="54864" anchor="ctr">
                     <a:lnL w="9525" cap="flat" cmpd="sng" algn="ctr">
                       <a:solidFill>
-                        <a:srgbClr val="BFBFBF"/>
+                        <a:srgbClr val="9DC3E6"/>
                       </a:solidFill>
                       <a:prstDash val="solid"/>
                       <a:round/>
@@ -11198,7 +11198,7 @@
                     </a:lnL>
                     <a:lnR w="9525" cap="flat" cmpd="sng" algn="ctr">
                       <a:solidFill>
-                        <a:srgbClr val="BFBFBF"/>
+                        <a:srgbClr val="9DC3E6"/>
                       </a:solidFill>
                       <a:prstDash val="solid"/>
                       <a:round/>
@@ -11207,7 +11207,7 @@
                     </a:lnR>
                     <a:lnT w="9525" cap="flat" cmpd="sng" algn="ctr">
                       <a:solidFill>
-                        <a:srgbClr val="BFBFBF"/>
+                        <a:srgbClr val="9DC3E6"/>
                       </a:solidFill>
                       <a:prstDash val="solid"/>
                       <a:round/>
@@ -11216,7 +11216,7 @@
                     </a:lnT>
                     <a:lnB w="9525" cap="flat" cmpd="sng" algn="ctr">
                       <a:solidFill>
-                        <a:srgbClr val="BFBFBF"/>
+                        <a:srgbClr val="9DC3E6"/>
                       </a:solidFill>
                       <a:prstDash val="solid"/>
                       <a:round/>
@@ -11224,7 +11224,7 @@
                       <a:tailEnd type="none" w="med" len="med"/>
                     </a:lnB>
                     <a:solidFill>
-                      <a:srgbClr val="FFFFFF"/>
+                      <a:srgbClr val="F5F8FC"/>
                     </a:solidFill>
                   </a:tcPr>
                 </a:tc>
@@ -11257,7 +11257,7 @@
                   <a:tcPr marL="54864" marR="54864" marT="54864" marB="54864" anchor="ctr">
                     <a:lnL w="9525" cap="flat" cmpd="sng" algn="ctr">
                       <a:solidFill>
-                        <a:srgbClr val="BFBFBF"/>
+                        <a:srgbClr val="9DC3E6"/>
                       </a:solidFill>
                       <a:prstDash val="solid"/>
                       <a:round/>
@@ -11266,7 +11266,7 @@
                     </a:lnL>
                     <a:lnR w="9525" cap="flat" cmpd="sng" algn="ctr">
                       <a:solidFill>
-                        <a:srgbClr val="BFBFBF"/>
+                        <a:srgbClr val="9DC3E6"/>
                       </a:solidFill>
                       <a:prstDash val="solid"/>
                       <a:round/>
@@ -11275,7 +11275,7 @@
                     </a:lnR>
                     <a:lnT w="9525" cap="flat" cmpd="sng" algn="ctr">
                       <a:solidFill>
-                        <a:srgbClr val="BFBFBF"/>
+                        <a:srgbClr val="9DC3E6"/>
                       </a:solidFill>
                       <a:prstDash val="solid"/>
                       <a:round/>
@@ -11284,7 +11284,7 @@
                     </a:lnT>
                     <a:lnB w="9525" cap="flat" cmpd="sng" algn="ctr">
                       <a:solidFill>
-                        <a:srgbClr val="BFBFBF"/>
+                        <a:srgbClr val="9DC3E6"/>
                       </a:solidFill>
                       <a:prstDash val="solid"/>
                       <a:round/>
@@ -11292,7 +11292,7 @@
                       <a:tailEnd type="none" w="med" len="med"/>
                     </a:lnB>
                     <a:solidFill>
-                      <a:srgbClr val="FFFFFF"/>
+                      <a:srgbClr val="F5F8FC"/>
                     </a:solidFill>
                   </a:tcPr>
                 </a:tc>
@@ -11325,7 +11325,7 @@
                   <a:tcPr marL="54864" marR="54864" marT="54864" marB="54864" anchor="ctr">
                     <a:lnL w="9525" cap="flat" cmpd="sng" algn="ctr">
                       <a:solidFill>
-                        <a:srgbClr val="BFBFBF"/>
+                        <a:srgbClr val="9DC3E6"/>
                       </a:solidFill>
                       <a:prstDash val="solid"/>
                       <a:round/>
@@ -11334,7 +11334,7 @@
                     </a:lnL>
                     <a:lnR w="9525" cap="flat" cmpd="sng" algn="ctr">
                       <a:solidFill>
-                        <a:srgbClr val="BFBFBF"/>
+                        <a:srgbClr val="9DC3E6"/>
                       </a:solidFill>
                       <a:prstDash val="solid"/>
                       <a:round/>
@@ -11343,7 +11343,7 @@
                     </a:lnR>
                     <a:lnT w="9525" cap="flat" cmpd="sng" algn="ctr">
                       <a:solidFill>
-                        <a:srgbClr val="BFBFBF"/>
+                        <a:srgbClr val="9DC3E6"/>
                       </a:solidFill>
                       <a:prstDash val="solid"/>
                       <a:round/>
@@ -11352,7 +11352,7 @@
                     </a:lnT>
                     <a:lnB w="9525" cap="flat" cmpd="sng" algn="ctr">
                       <a:solidFill>
-                        <a:srgbClr val="BFBFBF"/>
+                        <a:srgbClr val="9DC3E6"/>
                       </a:solidFill>
                       <a:prstDash val="solid"/>
                       <a:round/>
@@ -11360,7 +11360,7 @@
                       <a:tailEnd type="none" w="med" len="med"/>
                     </a:lnB>
                     <a:solidFill>
-                      <a:srgbClr val="FFFFFF"/>
+                      <a:srgbClr val="F5F8FC"/>
                     </a:solidFill>
                   </a:tcPr>
                 </a:tc>
@@ -11395,7 +11395,7 @@
                   <a:tcPr marL="54864" marR="54864" marT="54864" marB="54864" anchor="ctr">
                     <a:lnL w="9525" cap="flat" cmpd="sng" algn="ctr">
                       <a:solidFill>
-                        <a:srgbClr val="BFBFBF"/>
+                        <a:srgbClr val="9DC3E6"/>
                       </a:solidFill>
                       <a:prstDash val="solid"/>
                       <a:round/>
@@ -11404,7 +11404,7 @@
                     </a:lnL>
                     <a:lnR w="9525" cap="flat" cmpd="sng" algn="ctr">
                       <a:solidFill>
-                        <a:srgbClr val="BFBFBF"/>
+                        <a:srgbClr val="9DC3E6"/>
                       </a:solidFill>
                       <a:prstDash val="solid"/>
                       <a:round/>
@@ -11413,7 +11413,7 @@
                     </a:lnR>
                     <a:lnT w="9525" cap="flat" cmpd="sng" algn="ctr">
                       <a:solidFill>
-                        <a:srgbClr val="BFBFBF"/>
+                        <a:srgbClr val="9DC3E6"/>
                       </a:solidFill>
                       <a:prstDash val="solid"/>
                       <a:round/>
@@ -11422,7 +11422,7 @@
                     </a:lnT>
                     <a:lnB w="9525" cap="flat" cmpd="sng" algn="ctr">
                       <a:solidFill>
-                        <a:srgbClr val="BFBFBF"/>
+                        <a:srgbClr val="9DC3E6"/>
                       </a:solidFill>
                       <a:prstDash val="solid"/>
                       <a:round/>
@@ -11463,7 +11463,7 @@
                   <a:tcPr marL="54864" marR="54864" marT="54864" marB="54864" anchor="ctr">
                     <a:lnL w="9525" cap="flat" cmpd="sng" algn="ctr">
                       <a:solidFill>
-                        <a:srgbClr val="BFBFBF"/>
+                        <a:srgbClr val="9DC3E6"/>
                       </a:solidFill>
                       <a:prstDash val="solid"/>
                       <a:round/>
@@ -11472,7 +11472,7 @@
                     </a:lnL>
                     <a:lnR w="9525" cap="flat" cmpd="sng" algn="ctr">
                       <a:solidFill>
-                        <a:srgbClr val="BFBFBF"/>
+                        <a:srgbClr val="9DC3E6"/>
                       </a:solidFill>
                       <a:prstDash val="solid"/>
                       <a:round/>
@@ -11481,7 +11481,7 @@
                     </a:lnR>
                     <a:lnT w="9525" cap="flat" cmpd="sng" algn="ctr">
                       <a:solidFill>
-                        <a:srgbClr val="BFBFBF"/>
+                        <a:srgbClr val="9DC3E6"/>
                       </a:solidFill>
                       <a:prstDash val="solid"/>
                       <a:round/>
@@ -11490,7 +11490,7 @@
                     </a:lnT>
                     <a:lnB w="9525" cap="flat" cmpd="sng" algn="ctr">
                       <a:solidFill>
-                        <a:srgbClr val="BFBFBF"/>
+                        <a:srgbClr val="9DC3E6"/>
                       </a:solidFill>
                       <a:prstDash val="solid"/>
                       <a:round/>
@@ -11531,7 +11531,7 @@
                   <a:tcPr marL="54864" marR="54864" marT="54864" marB="54864" anchor="ctr">
                     <a:lnL w="9525" cap="flat" cmpd="sng" algn="ctr">
                       <a:solidFill>
-                        <a:srgbClr val="BFBFBF"/>
+                        <a:srgbClr val="9DC3E6"/>
                       </a:solidFill>
                       <a:prstDash val="solid"/>
                       <a:round/>
@@ -11540,7 +11540,7 @@
                     </a:lnL>
                     <a:lnR w="9525" cap="flat" cmpd="sng" algn="ctr">
                       <a:solidFill>
-                        <a:srgbClr val="BFBFBF"/>
+                        <a:srgbClr val="9DC3E6"/>
                       </a:solidFill>
                       <a:prstDash val="solid"/>
                       <a:round/>
@@ -11549,7 +11549,7 @@
                     </a:lnR>
                     <a:lnT w="9525" cap="flat" cmpd="sng" algn="ctr">
                       <a:solidFill>
-                        <a:srgbClr val="BFBFBF"/>
+                        <a:srgbClr val="9DC3E6"/>
                       </a:solidFill>
                       <a:prstDash val="solid"/>
                       <a:round/>
@@ -11558,7 +11558,7 @@
                     </a:lnT>
                     <a:lnB w="9525" cap="flat" cmpd="sng" algn="ctr">
                       <a:solidFill>
-                        <a:srgbClr val="BFBFBF"/>
+                        <a:srgbClr val="9DC3E6"/>
                       </a:solidFill>
                       <a:prstDash val="solid"/>
                       <a:round/>
@@ -11602,7 +11602,7 @@
             <a:r>
               <a:rPr lang="he-IL" altLang="en-US" sz="1050" dirty="0">
                 <a:solidFill>
-                  <a:srgbClr val="595959"/>
+                  <a:srgbClr val="ED7D31"/>
                 </a:solidFill>
                 <a:latin typeface="David" pitchFamily="34" charset="0"/>
                 <a:ea typeface="David" pitchFamily="34" charset="-122"/>
@@ -11641,7 +11641,7 @@
             <a:r>
               <a:rPr lang="he-IL" altLang="en-US" sz="1000" dirty="0">
                 <a:solidFill>
-                  <a:srgbClr val="595959"/>
+                  <a:srgbClr val="1F4E79"/>
                 </a:solidFill>
                 <a:latin typeface="David" pitchFamily="34" charset="0"/>
                 <a:ea typeface="David" pitchFamily="34" charset="-122"/>
@@ -11744,7 +11744,7 @@
             <a:r>
               <a:rPr lang="he-IL" altLang="en-US" sz="2800" b="1" dirty="0">
                 <a:solidFill>
-                  <a:srgbClr val="000000"/>
+                  <a:srgbClr val="1F4E79"/>
                 </a:solidFill>
                 <a:latin typeface="David" pitchFamily="34" charset="0"/>
                 <a:ea typeface="David" pitchFamily="34" charset="-122"/>
@@ -11867,7 +11867,7 @@
             <a:r>
               <a:rPr lang="he-IL" altLang="en-US" sz="1000" dirty="0">
                 <a:solidFill>
-                  <a:srgbClr val="595959"/>
+                  <a:srgbClr val="1F4E79"/>
                 </a:solidFill>
                 <a:latin typeface="David" pitchFamily="34" charset="0"/>
                 <a:ea typeface="David" pitchFamily="34" charset="-122"/>
@@ -11970,7 +11970,7 @@
             <a:r>
               <a:rPr lang="he-IL" altLang="en-US" sz="2800" b="1" dirty="0">
                 <a:solidFill>
-                  <a:srgbClr val="000000"/>
+                  <a:srgbClr val="1F4E79"/>
                 </a:solidFill>
                 <a:latin typeface="David" pitchFamily="34" charset="0"/>
                 <a:ea typeface="David" pitchFamily="34" charset="-122"/>
@@ -12132,7 +12132,7 @@
             <a:r>
               <a:rPr lang="he-IL" altLang="en-US" sz="1000" dirty="0">
                 <a:solidFill>
-                  <a:srgbClr val="595959"/>
+                  <a:srgbClr val="1F4E79"/>
                 </a:solidFill>
                 <a:latin typeface="David" pitchFamily="34" charset="0"/>
                 <a:ea typeface="David" pitchFamily="34" charset="-122"/>

--- a/career-management-final-project/ניהול קריירה - התמודדות עם חוסר ודאות תעסוקתי - מצגת.pptx
+++ b/career-management-final-project/ניהול קריירה - התמודדות עם חוסר ודאות תעסוקתי - מצגת.pptx
@@ -6507,7 +6507,7 @@
                 <a:ea typeface="David" pitchFamily="34" charset="-122"/>
                 <a:cs typeface="David" pitchFamily="34" charset="-120"/>
               </a:rPr>
-              <a:t>בנק ישראל. (2025, 11 במרץ). ההשפעה הצפויה של בינה מלאכותית יוצרת על העובדים: השלכות על המדיניות בשוק העבודה [תיבה מתוך דוח בנק ישראל לשנת 2024]. https://www.boi.org.il/publications/pressreleases/11-3-25/</a:t>
+              <a:t>בנק ישראל. (2025, 11 במרץ). ההשפעה הצפויה של בינה מלאכותית יוצרת על העובדים: השלכות על המדיניות בשוק העבודה [תיבה מתוך דוח בנק ישראל לשנת 2024].</a:t>
             </a:r>
             <a:endParaRPr lang="he-IL" sz="1300" dirty="0"/>
           </a:p>

--- a/career-management-final-project/ניהול קריירה - התמודדות עם חוסר ודאות תעסוקתי - מצגת.pptx
+++ b/career-management-final-project/ניהול קריירה - התמודדות עם חוסר ודאות תעסוקתי - מצגת.pptx
@@ -150,7 +150,7 @@
           </c:tx>
           <c:spPr>
             <a:solidFill>
-              <a:srgbClr val="9DC3E6"/>
+              <a:srgbClr val="1F3864"/>
             </a:solidFill>
             <a:effectLst/>
           </c:spPr>
@@ -233,7 +233,7 @@
           </c:tx>
           <c:spPr>
             <a:solidFill>
-              <a:srgbClr val="F8CBAD"/>
+              <a:srgbClr val="ED7D31"/>
             </a:solidFill>
             <a:effectLst/>
           </c:spPr>
@@ -333,7 +333,7 @@
       <c:catAx>
         <c:axId val="2094734554"/>
         <c:scaling>
-          <c:orientation val="minMax"/>
+          <c:orientation val="maxMin"/>
         </c:scaling>
         <c:delete val="0"/>
         <c:axPos val="b"/>
@@ -2531,6 +2531,13 @@
 <file path=ppt/slides/slide1.xml><?xml version="1.0" encoding="utf-8"?>
 <p:sld xmlns:a="http://schemas.openxmlformats.org/drawingml/2006/main" xmlns:r="http://schemas.openxmlformats.org/officeDocument/2006/relationships" xmlns:p="http://schemas.openxmlformats.org/presentationml/2006/main">
   <p:cSld name="Slide 1">
+    <p:bg>
+      <p:bgPr>
+        <a:solidFill>
+          <a:srgbClr val="1F3864"/>
+        </a:solidFill>
+      </p:bgPr>
+    </p:bg>
     <p:spTree>
       <p:nvGrpSpPr>
         <p:cNvPr id="1" name=""/>
@@ -2545,9 +2552,59 @@
           <a:chExt cx="0" cy="0"/>
         </a:xfrm>
       </p:grpSpPr>
+      <p:sp>
+        <p:nvSpPr>
+          <p:cNvPr id="2" name="Shape 0"/>
+          <p:cNvSpPr/>
+          <p:nvPr/>
+        </p:nvSpPr>
+        <p:spPr>
+          <a:xfrm>
+            <a:off x="0" y="4041648"/>
+            <a:ext cx="12188952" cy="64008"/>
+          </a:xfrm>
+          <a:prstGeom prst="rect">
+            <a:avLst/>
+          </a:prstGeom>
+          <a:solidFill>
+            <a:srgbClr val="ED7D31"/>
+          </a:solidFill>
+          <a:ln w="12700">
+            <a:solidFill>
+              <a:srgbClr val="ED7D31"/>
+            </a:solidFill>
+            <a:prstDash val="solid"/>
+          </a:ln>
+        </p:spPr>
+      </p:sp>
+      <p:sp>
+        <p:nvSpPr>
+          <p:cNvPr id="3" name="Shape 1"/>
+          <p:cNvSpPr/>
+          <p:nvPr/>
+        </p:nvSpPr>
+        <p:spPr>
+          <a:xfrm>
+            <a:off x="5276088" y="274320"/>
+            <a:ext cx="1645920" cy="1645920"/>
+          </a:xfrm>
+          <a:prstGeom prst="rect">
+            <a:avLst/>
+          </a:prstGeom>
+          <a:solidFill>
+            <a:srgbClr val="FFFFFF"/>
+          </a:solidFill>
+          <a:ln w="12700">
+            <a:solidFill>
+              <a:srgbClr val="FFFFFF"/>
+            </a:solidFill>
+            <a:prstDash val="solid"/>
+          </a:ln>
+        </p:spPr>
+      </p:sp>
       <p:pic>
         <p:nvPicPr>
-          <p:cNvPr id="2" name="Image 0" descr="/tmp/claude-0/-home-user-clickwriting-landing/d2627f80-c93a-5206-ba5d-647532b375c9/scratchpad/ono-logo.jpg">    </p:cNvPr>
+          <p:cNvPr id="4" name="Image 0" descr="/tmp/claude-0/-home-user-clickwriting-landing/d2627f80-c93a-5206-ba5d-647532b375c9/scratchpad/ono-logo.jpg">    </p:cNvPr>
           <p:cNvPicPr>
             <a:picLocks noChangeAspect="1"/>
           </p:cNvPicPr>
@@ -2561,7 +2618,7 @@
         </p:blipFill>
         <p:spPr>
           <a:xfrm>
-            <a:off x="5413248" y="320040"/>
+            <a:off x="5413248" y="411480"/>
             <a:ext cx="1371600" cy="1371600"/>
           </a:xfrm>
           <a:prstGeom prst="rect">
@@ -2571,13 +2628,130 @@
       </p:pic>
       <p:sp>
         <p:nvSpPr>
-          <p:cNvPr id="3" name="Text 0"/>
-          <p:cNvSpPr txBox="1"/>
-          <p:nvPr/>
-        </p:nvSpPr>
-        <p:spPr>
-          <a:xfrm>
-            <a:off x="640080" y="1783080"/>
+          <p:cNvPr id="5" name="Text 2"/>
+          <p:cNvSpPr txBox="1"/>
+          <p:nvPr/>
+        </p:nvSpPr>
+        <p:spPr>
+          <a:xfrm>
+            <a:off x="640080" y="2057400"/>
+            <a:ext cx="10908792" cy="365760"/>
+          </a:xfrm>
+          <a:prstGeom prst="rect">
+            <a:avLst/>
+          </a:prstGeom>
+          <a:noFill/>
+          <a:ln/>
+        </p:spPr>
+        <p:txBody>
+          <a:bodyPr wrap="square" lIns="0" tIns="0" rIns="0" bIns="0" rtlCol="0" anchor="t"/>
+          <a:lstStyle/>
+          <a:p>
+            <a:pPr rtl="1" algn="ctr" indent="0" marL="0">
+              <a:buNone/>
+            </a:pPr>
+            <a:r>
+              <a:rPr lang="he-IL" altLang="en-US" sz="1700" dirty="0">
+                <a:solidFill>
+                  <a:srgbClr val="FFFFFF"/>
+                </a:solidFill>
+                <a:latin typeface="David" pitchFamily="34" charset="0"/>
+                <a:ea typeface="David" pitchFamily="34" charset="-122"/>
+                <a:cs typeface="David" pitchFamily="34" charset="-120"/>
+              </a:rPr>
+              <a:t>הקריה האקדמית אונו, הפקולטה למנהל עסקים</a:t>
+            </a:r>
+            <a:endParaRPr lang="he-IL" sz="1700" dirty="0"/>
+          </a:p>
+        </p:txBody>
+      </p:sp>
+      <p:sp>
+        <p:nvSpPr>
+          <p:cNvPr id="6" name="Text 3"/>
+          <p:cNvSpPr txBox="1"/>
+          <p:nvPr/>
+        </p:nvSpPr>
+        <p:spPr>
+          <a:xfrm>
+            <a:off x="640080" y="2423160"/>
+            <a:ext cx="10908792" cy="365760"/>
+          </a:xfrm>
+          <a:prstGeom prst="rect">
+            <a:avLst/>
+          </a:prstGeom>
+          <a:noFill/>
+          <a:ln/>
+        </p:spPr>
+        <p:txBody>
+          <a:bodyPr wrap="square" lIns="0" tIns="0" rIns="0" bIns="0" rtlCol="0" anchor="t"/>
+          <a:lstStyle/>
+          <a:p>
+            <a:pPr rtl="1" algn="ctr" indent="0" marL="0">
+              <a:buNone/>
+            </a:pPr>
+            <a:r>
+              <a:rPr lang="he-IL" altLang="en-US" sz="1700" dirty="0">
+                <a:solidFill>
+                  <a:srgbClr val="FFFFFF"/>
+                </a:solidFill>
+                <a:latin typeface="David" pitchFamily="34" charset="0"/>
+                <a:ea typeface="David" pitchFamily="34" charset="-122"/>
+                <a:cs typeface="David" pitchFamily="34" charset="-120"/>
+              </a:rPr>
+              <a:t>עבודה מסכמת בקורס ניהול קריירה בארגונים</a:t>
+            </a:r>
+            <a:endParaRPr lang="he-IL" sz="1700" dirty="0"/>
+          </a:p>
+        </p:txBody>
+      </p:sp>
+      <p:sp>
+        <p:nvSpPr>
+          <p:cNvPr id="7" name="Text 4"/>
+          <p:cNvSpPr txBox="1"/>
+          <p:nvPr/>
+        </p:nvSpPr>
+        <p:spPr>
+          <a:xfrm>
+            <a:off x="640080" y="2880360"/>
+            <a:ext cx="10908792" cy="777240"/>
+          </a:xfrm>
+          <a:prstGeom prst="rect">
+            <a:avLst/>
+          </a:prstGeom>
+          <a:noFill/>
+          <a:ln/>
+        </p:spPr>
+        <p:txBody>
+          <a:bodyPr wrap="square" lIns="0" tIns="0" rIns="0" bIns="0" rtlCol="0" anchor="ctr"/>
+          <a:lstStyle/>
+          <a:p>
+            <a:pPr rtl="1" algn="ctr" indent="0" marL="0">
+              <a:buNone/>
+            </a:pPr>
+            <a:r>
+              <a:rPr lang="he-IL" altLang="en-US" sz="3800" b="1" dirty="0">
+                <a:solidFill>
+                  <a:srgbClr val="FFFFFF"/>
+                </a:solidFill>
+                <a:latin typeface="David" pitchFamily="34" charset="0"/>
+                <a:ea typeface="David" pitchFamily="34" charset="-122"/>
+                <a:cs typeface="David" pitchFamily="34" charset="-120"/>
+              </a:rPr>
+              <a:t>התמודדות עם חוסר ודאות תעסוקתי</a:t>
+            </a:r>
+            <a:endParaRPr lang="he-IL" sz="3800" dirty="0"/>
+          </a:p>
+        </p:txBody>
+      </p:sp>
+      <p:sp>
+        <p:nvSpPr>
+          <p:cNvPr id="8" name="Text 5"/>
+          <p:cNvSpPr txBox="1"/>
+          <p:nvPr/>
+        </p:nvSpPr>
+        <p:spPr>
+          <a:xfrm>
+            <a:off x="640080" y="3639312"/>
             <a:ext cx="10908792" cy="411480"/>
           </a:xfrm>
           <a:prstGeom prst="rect">
@@ -2596,13 +2770,13 @@
             <a:r>
               <a:rPr lang="he-IL" altLang="en-US" sz="1800" dirty="0">
                 <a:solidFill>
-                  <a:srgbClr val="000000"/>
-                </a:solidFill>
-                <a:latin typeface="David" pitchFamily="34" charset="0"/>
-                <a:ea typeface="David" pitchFamily="34" charset="-122"/>
-                <a:cs typeface="David" pitchFamily="34" charset="-120"/>
-              </a:rPr>
-              <a:t>הקריה האקדמית אונו, הפקולטה למנהל עסקים</a:t>
+                  <a:srgbClr val="ED7D31"/>
+                </a:solidFill>
+                <a:latin typeface="David" pitchFamily="34" charset="0"/>
+                <a:ea typeface="David" pitchFamily="34" charset="-122"/>
+                <a:cs typeface="David" pitchFamily="34" charset="-120"/>
+              </a:rPr>
+              <a:t>עיצוב תפקיד מבוסס צרכים כדרך לבנות בהירות, שליטה ומשמעות בעבודה</a:t>
             </a:r>
             <a:endParaRPr lang="he-IL" sz="1800" dirty="0"/>
           </a:p>
@@ -2610,14 +2784,14 @@
       </p:sp>
       <p:sp>
         <p:nvSpPr>
-          <p:cNvPr id="4" name="Text 1"/>
-          <p:cNvSpPr txBox="1"/>
-          <p:nvPr/>
-        </p:nvSpPr>
-        <p:spPr>
-          <a:xfrm>
-            <a:off x="640080" y="2194560"/>
-            <a:ext cx="10908792" cy="411480"/>
+          <p:cNvPr id="9" name="Text 6"/>
+          <p:cNvSpPr txBox="1"/>
+          <p:nvPr/>
+        </p:nvSpPr>
+        <p:spPr>
+          <a:xfrm>
+            <a:off x="1097280" y="4251960"/>
+            <a:ext cx="9994392" cy="594360"/>
           </a:xfrm>
           <a:prstGeom prst="rect">
             <a:avLst/>
@@ -2629,130 +2803,13 @@
           <a:bodyPr wrap="square" lIns="0" tIns="0" rIns="0" bIns="0" rtlCol="0" anchor="t"/>
           <a:lstStyle/>
           <a:p>
-            <a:pPr rtl="1" algn="ctr" indent="0" marL="0">
-              <a:buNone/>
-            </a:pPr>
-            <a:r>
-              <a:rPr lang="he-IL" altLang="en-US" sz="1800" dirty="0">
-                <a:solidFill>
-                  <a:srgbClr val="000000"/>
-                </a:solidFill>
-                <a:latin typeface="David" pitchFamily="34" charset="0"/>
-                <a:ea typeface="David" pitchFamily="34" charset="-122"/>
-                <a:cs typeface="David" pitchFamily="34" charset="-120"/>
-              </a:rPr>
-              <a:t>עבודה מסכמת בקורס ניהול קריירה בארגונים</a:t>
-            </a:r>
-            <a:endParaRPr lang="he-IL" sz="1800" dirty="0"/>
-          </a:p>
-        </p:txBody>
-      </p:sp>
-      <p:sp>
-        <p:nvSpPr>
-          <p:cNvPr id="5" name="Text 2"/>
-          <p:cNvSpPr txBox="1"/>
-          <p:nvPr/>
-        </p:nvSpPr>
-        <p:spPr>
-          <a:xfrm>
-            <a:off x="640080" y="2743200"/>
-            <a:ext cx="10908792" cy="822960"/>
-          </a:xfrm>
-          <a:prstGeom prst="rect">
-            <a:avLst/>
-          </a:prstGeom>
-          <a:noFill/>
-          <a:ln/>
-        </p:spPr>
-        <p:txBody>
-          <a:bodyPr wrap="square" lIns="0" tIns="0" rIns="0" bIns="0" rtlCol="0" anchor="ctr"/>
-          <a:lstStyle/>
-          <a:p>
-            <a:pPr rtl="1" algn="ctr" indent="0" marL="0">
-              <a:buNone/>
-            </a:pPr>
-            <a:r>
-              <a:rPr lang="he-IL" altLang="en-US" sz="3600" b="1" dirty="0">
-                <a:solidFill>
-                  <a:srgbClr val="000000"/>
-                </a:solidFill>
-                <a:latin typeface="David" pitchFamily="34" charset="0"/>
-                <a:ea typeface="David" pitchFamily="34" charset="-122"/>
-                <a:cs typeface="David" pitchFamily="34" charset="-120"/>
-              </a:rPr>
-              <a:t>התמודדות עם חוסר ודאות תעסוקתי</a:t>
-            </a:r>
-            <a:endParaRPr lang="he-IL" sz="3600" dirty="0"/>
-          </a:p>
-        </p:txBody>
-      </p:sp>
-      <p:sp>
-        <p:nvSpPr>
-          <p:cNvPr id="6" name="Text 3"/>
-          <p:cNvSpPr txBox="1"/>
-          <p:nvPr/>
-        </p:nvSpPr>
-        <p:spPr>
-          <a:xfrm>
-            <a:off x="640080" y="3566160"/>
-            <a:ext cx="10908792" cy="457200"/>
-          </a:xfrm>
-          <a:prstGeom prst="rect">
-            <a:avLst/>
-          </a:prstGeom>
-          <a:noFill/>
-          <a:ln/>
-        </p:spPr>
-        <p:txBody>
-          <a:bodyPr wrap="square" lIns="0" tIns="0" rIns="0" bIns="0" rtlCol="0" anchor="t"/>
-          <a:lstStyle/>
-          <a:p>
-            <a:pPr rtl="1" algn="ctr" indent="0" marL="0">
-              <a:buNone/>
-            </a:pPr>
-            <a:r>
-              <a:rPr lang="he-IL" altLang="en-US" sz="1800" dirty="0">
-                <a:solidFill>
-                  <a:srgbClr val="000000"/>
-                </a:solidFill>
-                <a:latin typeface="David" pitchFamily="34" charset="0"/>
-                <a:ea typeface="David" pitchFamily="34" charset="-122"/>
-                <a:cs typeface="David" pitchFamily="34" charset="-120"/>
-              </a:rPr>
-              <a:t>עיצוב תפקיד מבוסס צרכים כדרך לבנות בהירות, שליטה ומשמעות בעבודה</a:t>
-            </a:r>
-            <a:endParaRPr lang="he-IL" sz="1800" dirty="0"/>
-          </a:p>
-        </p:txBody>
-      </p:sp>
-      <p:sp>
-        <p:nvSpPr>
-          <p:cNvPr id="7" name="Text 4"/>
-          <p:cNvSpPr txBox="1"/>
-          <p:nvPr/>
-        </p:nvSpPr>
-        <p:spPr>
-          <a:xfrm>
-            <a:off x="1097280" y="4114800"/>
-            <a:ext cx="9994392" cy="640080"/>
-          </a:xfrm>
-          <a:prstGeom prst="rect">
-            <a:avLst/>
-          </a:prstGeom>
-          <a:noFill/>
-          <a:ln/>
-        </p:spPr>
-        <p:txBody>
-          <a:bodyPr wrap="square" lIns="0" tIns="0" rIns="0" bIns="0" rtlCol="0" anchor="t"/>
-          <a:lstStyle/>
-          <a:p>
             <a:pPr algn="ctr" indent="0" marL="0">
               <a:buNone/>
             </a:pPr>
             <a:r>
               <a:rPr lang="en-US" sz="1200" i="1" dirty="0">
                 <a:solidFill>
-                  <a:srgbClr val="000000"/>
+                  <a:srgbClr val="FFFFFF"/>
                 </a:solidFill>
                 <a:latin typeface="Times New Roman" pitchFamily="34" charset="0"/>
                 <a:ea typeface="Times New Roman" pitchFamily="34" charset="-122"/>
@@ -2766,13 +2823,13 @@
       </p:sp>
       <p:sp>
         <p:nvSpPr>
-          <p:cNvPr id="8" name="Text 5"/>
-          <p:cNvSpPr txBox="1"/>
-          <p:nvPr/>
-        </p:nvSpPr>
-        <p:spPr>
-          <a:xfrm>
-            <a:off x="640080" y="4937760"/>
+          <p:cNvPr id="10" name="Text 7"/>
+          <p:cNvSpPr txBox="1"/>
+          <p:nvPr/>
+        </p:nvSpPr>
+        <p:spPr>
+          <a:xfrm>
+            <a:off x="640080" y="4983480"/>
             <a:ext cx="10908792" cy="411480"/>
           </a:xfrm>
           <a:prstGeom prst="rect">
@@ -2791,7 +2848,7 @@
             <a:r>
               <a:rPr lang="he-IL" altLang="en-US" sz="1800" b="1" dirty="0">
                 <a:solidFill>
-                  <a:srgbClr val="000000"/>
+                  <a:srgbClr val="ED7D31"/>
                 </a:solidFill>
                 <a:latin typeface="David" pitchFamily="34" charset="0"/>
                 <a:ea typeface="David" pitchFamily="34" charset="-122"/>
@@ -2805,13 +2862,13 @@
       </p:sp>
       <p:sp>
         <p:nvSpPr>
-          <p:cNvPr id="9" name="Text 6"/>
-          <p:cNvSpPr txBox="1"/>
-          <p:nvPr/>
-        </p:nvSpPr>
-        <p:spPr>
-          <a:xfrm>
-            <a:off x="640080" y="5440680"/>
+          <p:cNvPr id="11" name="Text 8"/>
+          <p:cNvSpPr txBox="1"/>
+          <p:nvPr/>
+        </p:nvSpPr>
+        <p:spPr>
+          <a:xfrm>
+            <a:off x="640080" y="5468112"/>
             <a:ext cx="10908792" cy="411480"/>
           </a:xfrm>
           <a:prstGeom prst="rect">
@@ -2830,7 +2887,7 @@
             <a:r>
               <a:rPr lang="he-IL" altLang="en-US" sz="1500" dirty="0">
                 <a:solidFill>
-                  <a:srgbClr val="000000"/>
+                  <a:srgbClr val="FFFFFF"/>
                 </a:solidFill>
                 <a:latin typeface="David" pitchFamily="34" charset="0"/>
                 <a:ea typeface="David" pitchFamily="34" charset="-122"/>
@@ -2844,13 +2901,13 @@
       </p:sp>
       <p:sp>
         <p:nvSpPr>
-          <p:cNvPr id="10" name="Text 7"/>
-          <p:cNvSpPr txBox="1"/>
-          <p:nvPr/>
-        </p:nvSpPr>
-        <p:spPr>
-          <a:xfrm>
-            <a:off x="640080" y="5852160"/>
+          <p:cNvPr id="12" name="Text 9"/>
+          <p:cNvSpPr txBox="1"/>
+          <p:nvPr/>
+        </p:nvSpPr>
+        <p:spPr>
+          <a:xfrm>
+            <a:off x="640080" y="5870448"/>
             <a:ext cx="10908792" cy="411480"/>
           </a:xfrm>
           <a:prstGeom prst="rect">
@@ -2869,7 +2926,7 @@
             <a:r>
               <a:rPr lang="he-IL" altLang="en-US" sz="1400" dirty="0">
                 <a:solidFill>
-                  <a:srgbClr val="595959"/>
+                  <a:srgbClr val="D9E2F3"/>
                 </a:solidFill>
                 <a:latin typeface="David" pitchFamily="34" charset="0"/>
                 <a:ea typeface="David" pitchFamily="34" charset="-122"/>
@@ -2892,6 +2949,13 @@
 <file path=ppt/slides/slide10.xml><?xml version="1.0" encoding="utf-8"?>
 <p:sld xmlns:a="http://schemas.openxmlformats.org/drawingml/2006/main" xmlns:r="http://schemas.openxmlformats.org/officeDocument/2006/relationships" xmlns:p="http://schemas.openxmlformats.org/presentationml/2006/main">
   <p:cSld name="Slide 10">
+    <p:bg>
+      <p:bgPr>
+        <a:solidFill>
+          <a:srgbClr val="FFFFFF"/>
+        </a:solidFill>
+      </p:bgPr>
+    </p:bg>
     <p:spTree>
       <p:nvGrpSpPr>
         <p:cNvPr id="1" name=""/>
@@ -2908,61 +2972,24 @@
       </p:grpSpPr>
       <p:sp>
         <p:nvSpPr>
-          <p:cNvPr id="2" name="Text 0"/>
-          <p:cNvSpPr txBox="1"/>
-          <p:nvPr/>
-        </p:nvSpPr>
-        <p:spPr>
-          <a:xfrm>
-            <a:off x="640080" y="365760"/>
-            <a:ext cx="10908792" cy="731520"/>
-          </a:xfrm>
-          <a:prstGeom prst="rect">
-            <a:avLst/>
-          </a:prstGeom>
-          <a:noFill/>
-          <a:ln/>
-        </p:spPr>
-        <p:txBody>
-          <a:bodyPr wrap="square" lIns="0" tIns="0" rIns="0" bIns="0" rtlCol="0" anchor="ctr"/>
-          <a:lstStyle/>
-          <a:p>
-            <a:pPr rtl="1" algn="r" indent="0" marL="0">
-              <a:buNone/>
-            </a:pPr>
-            <a:r>
-              <a:rPr lang="he-IL" altLang="en-US" sz="2800" b="1" dirty="0">
-                <a:solidFill>
-                  <a:srgbClr val="000000"/>
-                </a:solidFill>
-                <a:latin typeface="David" pitchFamily="34" charset="0"/>
-                <a:ea typeface="David" pitchFamily="34" charset="-122"/>
-                <a:cs typeface="David" pitchFamily="34" charset="-120"/>
-              </a:rPr>
-              <a:t>חיבור לחומר הנלמד בקורס</a:t>
-            </a:r>
-            <a:endParaRPr lang="he-IL" sz="2800" dirty="0"/>
-          </a:p>
-        </p:txBody>
-      </p:sp>
-      <p:sp>
-        <p:nvSpPr>
-          <p:cNvPr id="3" name="Shape 1"/>
+          <p:cNvPr id="2" name="Shape 0"/>
           <p:cNvSpPr/>
           <p:nvPr/>
         </p:nvSpPr>
         <p:spPr>
           <a:xfrm>
-            <a:off x="640080" y="1115568"/>
-            <a:ext cx="10908792" cy="0"/>
-          </a:xfrm>
-          <a:prstGeom prst="line">
-            <a:avLst/>
-          </a:prstGeom>
-          <a:noFill/>
-          <a:ln w="19050">
+            <a:off x="0" y="0"/>
+            <a:ext cx="12188952" cy="1051560"/>
+          </a:xfrm>
+          <a:prstGeom prst="rect">
+            <a:avLst/>
+          </a:prstGeom>
+          <a:solidFill>
+            <a:srgbClr val="1F3864"/>
+          </a:solidFill>
+          <a:ln w="12700">
             <a:solidFill>
-              <a:srgbClr val="BDD7EE"/>
+              <a:srgbClr val="1F3864"/>
             </a:solidFill>
             <a:prstDash val="solid"/>
           </a:ln>
@@ -2970,7 +2997,71 @@
       </p:sp>
       <p:sp>
         <p:nvSpPr>
+          <p:cNvPr id="3" name="Shape 1"/>
+          <p:cNvSpPr/>
+          <p:nvPr/>
+        </p:nvSpPr>
+        <p:spPr>
+          <a:xfrm>
+            <a:off x="0" y="1051560"/>
+            <a:ext cx="12188952" cy="64008"/>
+          </a:xfrm>
+          <a:prstGeom prst="rect">
+            <a:avLst/>
+          </a:prstGeom>
+          <a:solidFill>
+            <a:srgbClr val="ED7D31"/>
+          </a:solidFill>
+          <a:ln w="12700">
+            <a:solidFill>
+              <a:srgbClr val="ED7D31"/>
+            </a:solidFill>
+            <a:prstDash val="solid"/>
+          </a:ln>
+        </p:spPr>
+      </p:sp>
+      <p:sp>
+        <p:nvSpPr>
           <p:cNvPr id="4" name="Text 2"/>
+          <p:cNvSpPr txBox="1"/>
+          <p:nvPr/>
+        </p:nvSpPr>
+        <p:spPr>
+          <a:xfrm>
+            <a:off x="640080" y="137160"/>
+            <a:ext cx="10908792" cy="777240"/>
+          </a:xfrm>
+          <a:prstGeom prst="rect">
+            <a:avLst/>
+          </a:prstGeom>
+          <a:noFill/>
+          <a:ln/>
+        </p:spPr>
+        <p:txBody>
+          <a:bodyPr wrap="square" lIns="0" tIns="0" rIns="0" bIns="0" rtlCol="0" anchor="ctr"/>
+          <a:lstStyle/>
+          <a:p>
+            <a:pPr rtl="1" algn="r" indent="0" marL="0">
+              <a:buNone/>
+            </a:pPr>
+            <a:r>
+              <a:rPr lang="he-IL" altLang="en-US" sz="2800" b="1" dirty="0">
+                <a:solidFill>
+                  <a:srgbClr val="FFFFFF"/>
+                </a:solidFill>
+                <a:latin typeface="David" pitchFamily="34" charset="0"/>
+                <a:ea typeface="David" pitchFamily="34" charset="-122"/>
+                <a:cs typeface="David" pitchFamily="34" charset="-120"/>
+              </a:rPr>
+              <a:t>חיבור לחומר הנלמד בקורס</a:t>
+            </a:r>
+            <a:endParaRPr lang="he-IL" sz="2800" dirty="0"/>
+          </a:p>
+        </p:txBody>
+      </p:sp>
+      <p:sp>
+        <p:nvSpPr>
+          <p:cNvPr id="5" name="Text 3"/>
           <p:cNvSpPr txBox="1"/>
           <p:nvPr/>
         </p:nvSpPr>
@@ -3012,7 +3103,7 @@
       </p:sp>
       <p:sp>
         <p:nvSpPr>
-          <p:cNvPr id="5" name="Text 3"/>
+          <p:cNvPr id="6" name="Text 4"/>
           <p:cNvSpPr txBox="1"/>
           <p:nvPr/>
         </p:nvSpPr>
@@ -3054,7 +3145,30 @@
       </p:sp>
       <p:sp>
         <p:nvSpPr>
-          <p:cNvPr id="6" name="Text 4"/>
+          <p:cNvPr id="7" name="Shape 5"/>
+          <p:cNvSpPr/>
+          <p:nvPr/>
+        </p:nvSpPr>
+        <p:spPr>
+          <a:xfrm>
+            <a:off x="640080" y="6355080"/>
+            <a:ext cx="10908792" cy="0"/>
+          </a:xfrm>
+          <a:prstGeom prst="line">
+            <a:avLst/>
+          </a:prstGeom>
+          <a:noFill/>
+          <a:ln w="12700">
+            <a:solidFill>
+              <a:srgbClr val="ED7D31"/>
+            </a:solidFill>
+            <a:prstDash val="solid"/>
+          </a:ln>
+        </p:spPr>
+      </p:sp>
+      <p:sp>
+        <p:nvSpPr>
+          <p:cNvPr id="8" name="Text 6"/>
           <p:cNvSpPr txBox="1"/>
           <p:nvPr/>
         </p:nvSpPr>
@@ -3079,7 +3193,7 @@
             <a:r>
               <a:rPr lang="he-IL" altLang="en-US" sz="1000" dirty="0">
                 <a:solidFill>
-                  <a:srgbClr val="595959"/>
+                  <a:srgbClr val="1F3864"/>
                 </a:solidFill>
                 <a:latin typeface="David" pitchFamily="34" charset="0"/>
                 <a:ea typeface="David" pitchFamily="34" charset="-122"/>
@@ -3093,7 +3207,7 @@
       </p:sp>
       <p:sp>
         <p:nvSpPr>
-          <p:cNvPr id="7" name="Text 5"/>
+          <p:cNvPr id="9" name="Text 7"/>
           <p:cNvSpPr txBox="1"/>
           <p:nvPr/>
         </p:nvSpPr>
@@ -3116,9 +3230,9 @@
               <a:buNone/>
             </a:pPr>
             <a:r>
-              <a:rPr lang="he-IL" altLang="en-US" sz="1000" dirty="0">
-                <a:solidFill>
-                  <a:srgbClr val="595959"/>
+              <a:rPr lang="he-IL" altLang="en-US" sz="1100" b="1" dirty="0">
+                <a:solidFill>
+                  <a:srgbClr val="ED7D31"/>
                 </a:solidFill>
                 <a:latin typeface="David" pitchFamily="34" charset="0"/>
                 <a:ea typeface="David" pitchFamily="34" charset="-122"/>
@@ -3126,7 +3240,7 @@
               </a:rPr>
               <a:t>10</a:t>
             </a:r>
-            <a:endParaRPr lang="he-IL" sz="1000" dirty="0"/>
+            <a:endParaRPr lang="he-IL" sz="1100" dirty="0"/>
           </a:p>
         </p:txBody>
       </p:sp>
@@ -3141,6 +3255,13 @@
 <file path=ppt/slides/slide11.xml><?xml version="1.0" encoding="utf-8"?>
 <p:sld xmlns:a="http://schemas.openxmlformats.org/drawingml/2006/main" xmlns:r="http://schemas.openxmlformats.org/officeDocument/2006/relationships" xmlns:p="http://schemas.openxmlformats.org/presentationml/2006/main">
   <p:cSld name="Slide 11">
+    <p:bg>
+      <p:bgPr>
+        <a:solidFill>
+          <a:srgbClr val="FFFFFF"/>
+        </a:solidFill>
+      </p:bgPr>
+    </p:bg>
     <p:spTree>
       <p:nvGrpSpPr>
         <p:cNvPr id="1" name=""/>
@@ -3157,61 +3278,24 @@
       </p:grpSpPr>
       <p:sp>
         <p:nvSpPr>
-          <p:cNvPr id="2" name="Text 0"/>
-          <p:cNvSpPr txBox="1"/>
-          <p:nvPr/>
-        </p:nvSpPr>
-        <p:spPr>
-          <a:xfrm>
-            <a:off x="640080" y="365760"/>
-            <a:ext cx="10908792" cy="731520"/>
-          </a:xfrm>
-          <a:prstGeom prst="rect">
-            <a:avLst/>
-          </a:prstGeom>
-          <a:noFill/>
-          <a:ln/>
-        </p:spPr>
-        <p:txBody>
-          <a:bodyPr wrap="square" lIns="0" tIns="0" rIns="0" bIns="0" rtlCol="0" anchor="ctr"/>
-          <a:lstStyle/>
-          <a:p>
-            <a:pPr rtl="1" algn="r" indent="0" marL="0">
-              <a:buNone/>
-            </a:pPr>
-            <a:r>
-              <a:rPr lang="he-IL" altLang="en-US" sz="2800" b="1" dirty="0">
-                <a:solidFill>
-                  <a:srgbClr val="000000"/>
-                </a:solidFill>
-                <a:latin typeface="David" pitchFamily="34" charset="0"/>
-                <a:ea typeface="David" pitchFamily="34" charset="-122"/>
-                <a:cs typeface="David" pitchFamily="34" charset="-120"/>
-              </a:rPr>
-              <a:t>תובנות ומסקנות</a:t>
-            </a:r>
-            <a:endParaRPr lang="he-IL" sz="2800" dirty="0"/>
-          </a:p>
-        </p:txBody>
-      </p:sp>
-      <p:sp>
-        <p:nvSpPr>
-          <p:cNvPr id="3" name="Shape 1"/>
+          <p:cNvPr id="2" name="Shape 0"/>
           <p:cNvSpPr/>
           <p:nvPr/>
         </p:nvSpPr>
         <p:spPr>
           <a:xfrm>
-            <a:off x="640080" y="1115568"/>
-            <a:ext cx="10908792" cy="0"/>
-          </a:xfrm>
-          <a:prstGeom prst="line">
-            <a:avLst/>
-          </a:prstGeom>
-          <a:noFill/>
-          <a:ln w="19050">
+            <a:off x="0" y="0"/>
+            <a:ext cx="12188952" cy="1051560"/>
+          </a:xfrm>
+          <a:prstGeom prst="rect">
+            <a:avLst/>
+          </a:prstGeom>
+          <a:solidFill>
+            <a:srgbClr val="1F3864"/>
+          </a:solidFill>
+          <a:ln w="12700">
             <a:solidFill>
-              <a:srgbClr val="BDD7EE"/>
+              <a:srgbClr val="1F3864"/>
             </a:solidFill>
             <a:prstDash val="solid"/>
           </a:ln>
@@ -3219,7 +3303,71 @@
       </p:sp>
       <p:sp>
         <p:nvSpPr>
+          <p:cNvPr id="3" name="Shape 1"/>
+          <p:cNvSpPr/>
+          <p:nvPr/>
+        </p:nvSpPr>
+        <p:spPr>
+          <a:xfrm>
+            <a:off x="0" y="1051560"/>
+            <a:ext cx="12188952" cy="64008"/>
+          </a:xfrm>
+          <a:prstGeom prst="rect">
+            <a:avLst/>
+          </a:prstGeom>
+          <a:solidFill>
+            <a:srgbClr val="ED7D31"/>
+          </a:solidFill>
+          <a:ln w="12700">
+            <a:solidFill>
+              <a:srgbClr val="ED7D31"/>
+            </a:solidFill>
+            <a:prstDash val="solid"/>
+          </a:ln>
+        </p:spPr>
+      </p:sp>
+      <p:sp>
+        <p:nvSpPr>
           <p:cNvPr id="4" name="Text 2"/>
+          <p:cNvSpPr txBox="1"/>
+          <p:nvPr/>
+        </p:nvSpPr>
+        <p:spPr>
+          <a:xfrm>
+            <a:off x="640080" y="137160"/>
+            <a:ext cx="10908792" cy="777240"/>
+          </a:xfrm>
+          <a:prstGeom prst="rect">
+            <a:avLst/>
+          </a:prstGeom>
+          <a:noFill/>
+          <a:ln/>
+        </p:spPr>
+        <p:txBody>
+          <a:bodyPr wrap="square" lIns="0" tIns="0" rIns="0" bIns="0" rtlCol="0" anchor="ctr"/>
+          <a:lstStyle/>
+          <a:p>
+            <a:pPr rtl="1" algn="r" indent="0" marL="0">
+              <a:buNone/>
+            </a:pPr>
+            <a:r>
+              <a:rPr lang="he-IL" altLang="en-US" sz="2800" b="1" dirty="0">
+                <a:solidFill>
+                  <a:srgbClr val="FFFFFF"/>
+                </a:solidFill>
+                <a:latin typeface="David" pitchFamily="34" charset="0"/>
+                <a:ea typeface="David" pitchFamily="34" charset="-122"/>
+                <a:cs typeface="David" pitchFamily="34" charset="-120"/>
+              </a:rPr>
+              <a:t>תובנות ומסקנות</a:t>
+            </a:r>
+            <a:endParaRPr lang="he-IL" sz="2800" dirty="0"/>
+          </a:p>
+        </p:txBody>
+      </p:sp>
+      <p:sp>
+        <p:nvSpPr>
+          <p:cNvPr id="5" name="Text 3"/>
           <p:cNvSpPr txBox="1"/>
           <p:nvPr/>
         </p:nvSpPr>
@@ -3261,7 +3409,7 @@
       </p:sp>
       <p:sp>
         <p:nvSpPr>
-          <p:cNvPr id="5" name="Text 3"/>
+          <p:cNvPr id="6" name="Text 4"/>
           <p:cNvSpPr txBox="1"/>
           <p:nvPr/>
         </p:nvSpPr>
@@ -3303,7 +3451,30 @@
       </p:sp>
       <p:sp>
         <p:nvSpPr>
-          <p:cNvPr id="6" name="Text 4"/>
+          <p:cNvPr id="7" name="Shape 5"/>
+          <p:cNvSpPr/>
+          <p:nvPr/>
+        </p:nvSpPr>
+        <p:spPr>
+          <a:xfrm>
+            <a:off x="640080" y="6355080"/>
+            <a:ext cx="10908792" cy="0"/>
+          </a:xfrm>
+          <a:prstGeom prst="line">
+            <a:avLst/>
+          </a:prstGeom>
+          <a:noFill/>
+          <a:ln w="12700">
+            <a:solidFill>
+              <a:srgbClr val="ED7D31"/>
+            </a:solidFill>
+            <a:prstDash val="solid"/>
+          </a:ln>
+        </p:spPr>
+      </p:sp>
+      <p:sp>
+        <p:nvSpPr>
+          <p:cNvPr id="8" name="Text 6"/>
           <p:cNvSpPr txBox="1"/>
           <p:nvPr/>
         </p:nvSpPr>
@@ -3328,7 +3499,7 @@
             <a:r>
               <a:rPr lang="he-IL" altLang="en-US" sz="1000" dirty="0">
                 <a:solidFill>
-                  <a:srgbClr val="595959"/>
+                  <a:srgbClr val="1F3864"/>
                 </a:solidFill>
                 <a:latin typeface="David" pitchFamily="34" charset="0"/>
                 <a:ea typeface="David" pitchFamily="34" charset="-122"/>
@@ -3342,7 +3513,7 @@
       </p:sp>
       <p:sp>
         <p:nvSpPr>
-          <p:cNvPr id="7" name="Text 5"/>
+          <p:cNvPr id="9" name="Text 7"/>
           <p:cNvSpPr txBox="1"/>
           <p:nvPr/>
         </p:nvSpPr>
@@ -3365,9 +3536,9 @@
               <a:buNone/>
             </a:pPr>
             <a:r>
-              <a:rPr lang="he-IL" altLang="en-US" sz="1000" dirty="0">
-                <a:solidFill>
-                  <a:srgbClr val="595959"/>
+              <a:rPr lang="he-IL" altLang="en-US" sz="1100" b="1" dirty="0">
+                <a:solidFill>
+                  <a:srgbClr val="ED7D31"/>
                 </a:solidFill>
                 <a:latin typeface="David" pitchFamily="34" charset="0"/>
                 <a:ea typeface="David" pitchFamily="34" charset="-122"/>
@@ -3375,7 +3546,7 @@
               </a:rPr>
               <a:t>11</a:t>
             </a:r>
-            <a:endParaRPr lang="he-IL" sz="1000" dirty="0"/>
+            <a:endParaRPr lang="he-IL" sz="1100" dirty="0"/>
           </a:p>
         </p:txBody>
       </p:sp>
@@ -3390,6 +3561,13 @@
 <file path=ppt/slides/slide12.xml><?xml version="1.0" encoding="utf-8"?>
 <p:sld xmlns:a="http://schemas.openxmlformats.org/drawingml/2006/main" xmlns:r="http://schemas.openxmlformats.org/officeDocument/2006/relationships" xmlns:p="http://schemas.openxmlformats.org/presentationml/2006/main">
   <p:cSld name="Slide 12">
+    <p:bg>
+      <p:bgPr>
+        <a:solidFill>
+          <a:srgbClr val="FFFFFF"/>
+        </a:solidFill>
+      </p:bgPr>
+    </p:bg>
     <p:spTree>
       <p:nvGrpSpPr>
         <p:cNvPr id="1" name=""/>
@@ -3406,61 +3584,24 @@
       </p:grpSpPr>
       <p:sp>
         <p:nvSpPr>
-          <p:cNvPr id="2" name="Text 0"/>
-          <p:cNvSpPr txBox="1"/>
-          <p:nvPr/>
-        </p:nvSpPr>
-        <p:spPr>
-          <a:xfrm>
-            <a:off x="640080" y="365760"/>
-            <a:ext cx="10908792" cy="731520"/>
-          </a:xfrm>
-          <a:prstGeom prst="rect">
-            <a:avLst/>
-          </a:prstGeom>
-          <a:noFill/>
-          <a:ln/>
-        </p:spPr>
-        <p:txBody>
-          <a:bodyPr wrap="square" lIns="0" tIns="0" rIns="0" bIns="0" rtlCol="0" anchor="ctr"/>
-          <a:lstStyle/>
-          <a:p>
-            <a:pPr rtl="1" algn="r" indent="0" marL="0">
-              <a:buNone/>
-            </a:pPr>
-            <a:r>
-              <a:rPr lang="he-IL" altLang="en-US" sz="2800" b="1" dirty="0">
-                <a:solidFill>
-                  <a:srgbClr val="000000"/>
-                </a:solidFill>
-                <a:latin typeface="David" pitchFamily="34" charset="0"/>
-                <a:ea typeface="David" pitchFamily="34" charset="-122"/>
-                <a:cs typeface="David" pitchFamily="34" charset="-120"/>
-              </a:rPr>
-              <a:t>דעה אישית על המאמר</a:t>
-            </a:r>
-            <a:endParaRPr lang="he-IL" sz="2800" dirty="0"/>
-          </a:p>
-        </p:txBody>
-      </p:sp>
-      <p:sp>
-        <p:nvSpPr>
-          <p:cNvPr id="3" name="Shape 1"/>
+          <p:cNvPr id="2" name="Shape 0"/>
           <p:cNvSpPr/>
           <p:nvPr/>
         </p:nvSpPr>
         <p:spPr>
           <a:xfrm>
-            <a:off x="640080" y="1115568"/>
-            <a:ext cx="10908792" cy="0"/>
-          </a:xfrm>
-          <a:prstGeom prst="line">
-            <a:avLst/>
-          </a:prstGeom>
-          <a:noFill/>
-          <a:ln w="19050">
+            <a:off x="0" y="0"/>
+            <a:ext cx="12188952" cy="1051560"/>
+          </a:xfrm>
+          <a:prstGeom prst="rect">
+            <a:avLst/>
+          </a:prstGeom>
+          <a:solidFill>
+            <a:srgbClr val="1F3864"/>
+          </a:solidFill>
+          <a:ln w="12700">
             <a:solidFill>
-              <a:srgbClr val="BDD7EE"/>
+              <a:srgbClr val="1F3864"/>
             </a:solidFill>
             <a:prstDash val="solid"/>
           </a:ln>
@@ -3468,7 +3609,71 @@
       </p:sp>
       <p:sp>
         <p:nvSpPr>
+          <p:cNvPr id="3" name="Shape 1"/>
+          <p:cNvSpPr/>
+          <p:nvPr/>
+        </p:nvSpPr>
+        <p:spPr>
+          <a:xfrm>
+            <a:off x="0" y="1051560"/>
+            <a:ext cx="12188952" cy="64008"/>
+          </a:xfrm>
+          <a:prstGeom prst="rect">
+            <a:avLst/>
+          </a:prstGeom>
+          <a:solidFill>
+            <a:srgbClr val="ED7D31"/>
+          </a:solidFill>
+          <a:ln w="12700">
+            <a:solidFill>
+              <a:srgbClr val="ED7D31"/>
+            </a:solidFill>
+            <a:prstDash val="solid"/>
+          </a:ln>
+        </p:spPr>
+      </p:sp>
+      <p:sp>
+        <p:nvSpPr>
           <p:cNvPr id="4" name="Text 2"/>
+          <p:cNvSpPr txBox="1"/>
+          <p:nvPr/>
+        </p:nvSpPr>
+        <p:spPr>
+          <a:xfrm>
+            <a:off x="640080" y="137160"/>
+            <a:ext cx="10908792" cy="777240"/>
+          </a:xfrm>
+          <a:prstGeom prst="rect">
+            <a:avLst/>
+          </a:prstGeom>
+          <a:noFill/>
+          <a:ln/>
+        </p:spPr>
+        <p:txBody>
+          <a:bodyPr wrap="square" lIns="0" tIns="0" rIns="0" bIns="0" rtlCol="0" anchor="ctr"/>
+          <a:lstStyle/>
+          <a:p>
+            <a:pPr rtl="1" algn="r" indent="0" marL="0">
+              <a:buNone/>
+            </a:pPr>
+            <a:r>
+              <a:rPr lang="he-IL" altLang="en-US" sz="2800" b="1" dirty="0">
+                <a:solidFill>
+                  <a:srgbClr val="FFFFFF"/>
+                </a:solidFill>
+                <a:latin typeface="David" pitchFamily="34" charset="0"/>
+                <a:ea typeface="David" pitchFamily="34" charset="-122"/>
+                <a:cs typeface="David" pitchFamily="34" charset="-120"/>
+              </a:rPr>
+              <a:t>דעה אישית על המאמר</a:t>
+            </a:r>
+            <a:endParaRPr lang="he-IL" sz="2800" dirty="0"/>
+          </a:p>
+        </p:txBody>
+      </p:sp>
+      <p:sp>
+        <p:nvSpPr>
+          <p:cNvPr id="5" name="Text 3"/>
           <p:cNvSpPr txBox="1"/>
           <p:nvPr/>
         </p:nvSpPr>
@@ -3510,7 +3715,7 @@
       </p:sp>
       <p:sp>
         <p:nvSpPr>
-          <p:cNvPr id="5" name="Text 3"/>
+          <p:cNvPr id="6" name="Text 4"/>
           <p:cNvSpPr txBox="1"/>
           <p:nvPr/>
         </p:nvSpPr>
@@ -3552,7 +3757,30 @@
       </p:sp>
       <p:sp>
         <p:nvSpPr>
-          <p:cNvPr id="6" name="Text 4"/>
+          <p:cNvPr id="7" name="Shape 5"/>
+          <p:cNvSpPr/>
+          <p:nvPr/>
+        </p:nvSpPr>
+        <p:spPr>
+          <a:xfrm>
+            <a:off x="640080" y="6355080"/>
+            <a:ext cx="10908792" cy="0"/>
+          </a:xfrm>
+          <a:prstGeom prst="line">
+            <a:avLst/>
+          </a:prstGeom>
+          <a:noFill/>
+          <a:ln w="12700">
+            <a:solidFill>
+              <a:srgbClr val="ED7D31"/>
+            </a:solidFill>
+            <a:prstDash val="solid"/>
+          </a:ln>
+        </p:spPr>
+      </p:sp>
+      <p:sp>
+        <p:nvSpPr>
+          <p:cNvPr id="8" name="Text 6"/>
           <p:cNvSpPr txBox="1"/>
           <p:nvPr/>
         </p:nvSpPr>
@@ -3577,7 +3805,7 @@
             <a:r>
               <a:rPr lang="he-IL" altLang="en-US" sz="1000" dirty="0">
                 <a:solidFill>
-                  <a:srgbClr val="595959"/>
+                  <a:srgbClr val="1F3864"/>
                 </a:solidFill>
                 <a:latin typeface="David" pitchFamily="34" charset="0"/>
                 <a:ea typeface="David" pitchFamily="34" charset="-122"/>
@@ -3591,7 +3819,7 @@
       </p:sp>
       <p:sp>
         <p:nvSpPr>
-          <p:cNvPr id="7" name="Text 5"/>
+          <p:cNvPr id="9" name="Text 7"/>
           <p:cNvSpPr txBox="1"/>
           <p:nvPr/>
         </p:nvSpPr>
@@ -3614,9 +3842,9 @@
               <a:buNone/>
             </a:pPr>
             <a:r>
-              <a:rPr lang="he-IL" altLang="en-US" sz="1000" dirty="0">
-                <a:solidFill>
-                  <a:srgbClr val="595959"/>
+              <a:rPr lang="he-IL" altLang="en-US" sz="1100" b="1" dirty="0">
+                <a:solidFill>
+                  <a:srgbClr val="ED7D31"/>
                 </a:solidFill>
                 <a:latin typeface="David" pitchFamily="34" charset="0"/>
                 <a:ea typeface="David" pitchFamily="34" charset="-122"/>
@@ -3624,7 +3852,7 @@
               </a:rPr>
               <a:t>12</a:t>
             </a:r>
-            <a:endParaRPr lang="he-IL" sz="1000" dirty="0"/>
+            <a:endParaRPr lang="he-IL" sz="1100" dirty="0"/>
           </a:p>
         </p:txBody>
       </p:sp>
@@ -3639,6 +3867,13 @@
 <file path=ppt/slides/slide13.xml><?xml version="1.0" encoding="utf-8"?>
 <p:sld xmlns:a="http://schemas.openxmlformats.org/drawingml/2006/main" xmlns:r="http://schemas.openxmlformats.org/officeDocument/2006/relationships" xmlns:p="http://schemas.openxmlformats.org/presentationml/2006/main">
   <p:cSld name="Slide 13">
+    <p:bg>
+      <p:bgPr>
+        <a:solidFill>
+          <a:srgbClr val="FFFFFF"/>
+        </a:solidFill>
+      </p:bgPr>
+    </p:bg>
     <p:spTree>
       <p:nvGrpSpPr>
         <p:cNvPr id="1" name=""/>
@@ -3655,61 +3890,24 @@
       </p:grpSpPr>
       <p:sp>
         <p:nvSpPr>
-          <p:cNvPr id="2" name="Text 0"/>
-          <p:cNvSpPr txBox="1"/>
-          <p:nvPr/>
-        </p:nvSpPr>
-        <p:spPr>
-          <a:xfrm>
-            <a:off x="640080" y="365760"/>
-            <a:ext cx="10908792" cy="731520"/>
-          </a:xfrm>
-          <a:prstGeom prst="rect">
-            <a:avLst/>
-          </a:prstGeom>
-          <a:noFill/>
-          <a:ln/>
-        </p:spPr>
-        <p:txBody>
-          <a:bodyPr wrap="square" lIns="0" tIns="0" rIns="0" bIns="0" rtlCol="0" anchor="ctr"/>
-          <a:lstStyle/>
-          <a:p>
-            <a:pPr rtl="1" algn="r" indent="0" marL="0">
-              <a:buNone/>
-            </a:pPr>
-            <a:r>
-              <a:rPr lang="he-IL" altLang="en-US" sz="2800" b="1" dirty="0">
-                <a:solidFill>
-                  <a:srgbClr val="000000"/>
-                </a:solidFill>
-                <a:latin typeface="David" pitchFamily="34" charset="0"/>
-                <a:ea typeface="David" pitchFamily="34" charset="-122"/>
-                <a:cs typeface="David" pitchFamily="34" charset="-120"/>
-              </a:rPr>
-              <a:t>יישום מעשי: תוכנית עיצוב תפקיד אישית</a:t>
-            </a:r>
-            <a:endParaRPr lang="he-IL" sz="2800" dirty="0"/>
-          </a:p>
-        </p:txBody>
-      </p:sp>
-      <p:sp>
-        <p:nvSpPr>
-          <p:cNvPr id="3" name="Shape 1"/>
+          <p:cNvPr id="2" name="Shape 0"/>
           <p:cNvSpPr/>
           <p:nvPr/>
         </p:nvSpPr>
         <p:spPr>
           <a:xfrm>
-            <a:off x="640080" y="1115568"/>
-            <a:ext cx="10908792" cy="0"/>
-          </a:xfrm>
-          <a:prstGeom prst="line">
-            <a:avLst/>
-          </a:prstGeom>
-          <a:noFill/>
-          <a:ln w="19050">
+            <a:off x="0" y="0"/>
+            <a:ext cx="12188952" cy="1051560"/>
+          </a:xfrm>
+          <a:prstGeom prst="rect">
+            <a:avLst/>
+          </a:prstGeom>
+          <a:solidFill>
+            <a:srgbClr val="1F3864"/>
+          </a:solidFill>
+          <a:ln w="12700">
             <a:solidFill>
-              <a:srgbClr val="BDD7EE"/>
+              <a:srgbClr val="1F3864"/>
             </a:solidFill>
             <a:prstDash val="solid"/>
           </a:ln>
@@ -3717,7 +3915,71 @@
       </p:sp>
       <p:sp>
         <p:nvSpPr>
+          <p:cNvPr id="3" name="Shape 1"/>
+          <p:cNvSpPr/>
+          <p:nvPr/>
+        </p:nvSpPr>
+        <p:spPr>
+          <a:xfrm>
+            <a:off x="0" y="1051560"/>
+            <a:ext cx="12188952" cy="64008"/>
+          </a:xfrm>
+          <a:prstGeom prst="rect">
+            <a:avLst/>
+          </a:prstGeom>
+          <a:solidFill>
+            <a:srgbClr val="ED7D31"/>
+          </a:solidFill>
+          <a:ln w="12700">
+            <a:solidFill>
+              <a:srgbClr val="ED7D31"/>
+            </a:solidFill>
+            <a:prstDash val="solid"/>
+          </a:ln>
+        </p:spPr>
+      </p:sp>
+      <p:sp>
+        <p:nvSpPr>
           <p:cNvPr id="4" name="Text 2"/>
+          <p:cNvSpPr txBox="1"/>
+          <p:nvPr/>
+        </p:nvSpPr>
+        <p:spPr>
+          <a:xfrm>
+            <a:off x="640080" y="137160"/>
+            <a:ext cx="10908792" cy="777240"/>
+          </a:xfrm>
+          <a:prstGeom prst="rect">
+            <a:avLst/>
+          </a:prstGeom>
+          <a:noFill/>
+          <a:ln/>
+        </p:spPr>
+        <p:txBody>
+          <a:bodyPr wrap="square" lIns="0" tIns="0" rIns="0" bIns="0" rtlCol="0" anchor="ctr"/>
+          <a:lstStyle/>
+          <a:p>
+            <a:pPr rtl="1" algn="r" indent="0" marL="0">
+              <a:buNone/>
+            </a:pPr>
+            <a:r>
+              <a:rPr lang="he-IL" altLang="en-US" sz="2800" b="1" dirty="0">
+                <a:solidFill>
+                  <a:srgbClr val="FFFFFF"/>
+                </a:solidFill>
+                <a:latin typeface="David" pitchFamily="34" charset="0"/>
+                <a:ea typeface="David" pitchFamily="34" charset="-122"/>
+                <a:cs typeface="David" pitchFamily="34" charset="-120"/>
+              </a:rPr>
+              <a:t>יישום מעשי: תוכנית עיצוב תפקיד אישית</a:t>
+            </a:r>
+            <a:endParaRPr lang="he-IL" sz="2800" dirty="0"/>
+          </a:p>
+        </p:txBody>
+      </p:sp>
+      <p:sp>
+        <p:nvSpPr>
+          <p:cNvPr id="5" name="Text 3"/>
           <p:cNvSpPr txBox="1"/>
           <p:nvPr/>
         </p:nvSpPr>
@@ -3759,7 +4021,7 @@
       </p:sp>
       <p:sp>
         <p:nvSpPr>
-          <p:cNvPr id="5" name="Shape 3"/>
+          <p:cNvPr id="6" name="Shape 4"/>
           <p:cNvSpPr/>
           <p:nvPr/>
         </p:nvSpPr>
@@ -3768,17 +4030,40 @@
             <a:off x="8951976" y="2697480"/>
             <a:ext cx="2587752" cy="3017520"/>
           </a:xfrm>
-          <a:prstGeom prst="roundRect">
-            <a:avLst>
-              <a:gd name="adj" fmla="val 2827"/>
-            </a:avLst>
+          <a:prstGeom prst="rect">
+            <a:avLst/>
           </a:prstGeom>
           <a:solidFill>
-            <a:srgbClr val="F3F8FD"/>
+            <a:srgbClr val="FFFFFF"/>
+          </a:solidFill>
+          <a:ln w="15875">
+            <a:solidFill>
+              <a:srgbClr val="1F3864"/>
+            </a:solidFill>
+            <a:prstDash val="solid"/>
+          </a:ln>
+        </p:spPr>
+      </p:sp>
+      <p:sp>
+        <p:nvSpPr>
+          <p:cNvPr id="7" name="Shape 5"/>
+          <p:cNvSpPr/>
+          <p:nvPr/>
+        </p:nvSpPr>
+        <p:spPr>
+          <a:xfrm>
+            <a:off x="8951976" y="2697480"/>
+            <a:ext cx="2587752" cy="502920"/>
+          </a:xfrm>
+          <a:prstGeom prst="rect">
+            <a:avLst/>
+          </a:prstGeom>
+          <a:solidFill>
+            <a:srgbClr val="1F3864"/>
           </a:solidFill>
           <a:ln w="12700">
             <a:solidFill>
-              <a:srgbClr val="BDD7EE"/>
+              <a:srgbClr val="1F3864"/>
             </a:solidFill>
             <a:prstDash val="solid"/>
           </a:ln>
@@ -3786,14 +4071,39 @@
       </p:sp>
       <p:sp>
         <p:nvSpPr>
-          <p:cNvPr id="6" name="Text 4"/>
-          <p:cNvSpPr txBox="1"/>
-          <p:nvPr/>
-        </p:nvSpPr>
-        <p:spPr>
-          <a:xfrm>
-            <a:off x="9089136" y="2807208"/>
-            <a:ext cx="2313432" cy="411480"/>
+          <p:cNvPr id="8" name="Shape 6"/>
+          <p:cNvSpPr/>
+          <p:nvPr/>
+        </p:nvSpPr>
+        <p:spPr>
+          <a:xfrm>
+            <a:off x="8951976" y="3200400"/>
+            <a:ext cx="2587752" cy="45720"/>
+          </a:xfrm>
+          <a:prstGeom prst="rect">
+            <a:avLst/>
+          </a:prstGeom>
+          <a:solidFill>
+            <a:srgbClr val="ED7D31"/>
+          </a:solidFill>
+          <a:ln w="12700">
+            <a:solidFill>
+              <a:srgbClr val="ED7D31"/>
+            </a:solidFill>
+            <a:prstDash val="solid"/>
+          </a:ln>
+        </p:spPr>
+      </p:sp>
+      <p:sp>
+        <p:nvSpPr>
+          <p:cNvPr id="9" name="Text 7"/>
+          <p:cNvSpPr txBox="1"/>
+          <p:nvPr/>
+        </p:nvSpPr>
+        <p:spPr>
+          <a:xfrm>
+            <a:off x="9043416" y="2697480"/>
+            <a:ext cx="2404872" cy="502920"/>
           </a:xfrm>
           <a:prstGeom prst="rect">
             <a:avLst/>
@@ -3811,7 +4121,7 @@
             <a:r>
               <a:rPr lang="he-IL" altLang="en-US" sz="1600" b="1" dirty="0">
                 <a:solidFill>
-                  <a:srgbClr val="000000"/>
+                  <a:srgbClr val="FFFFFF"/>
                 </a:solidFill>
                 <a:latin typeface="David" pitchFamily="34" charset="0"/>
                 <a:ea typeface="David" pitchFamily="34" charset="-122"/>
@@ -3825,14 +4135,14 @@
       </p:sp>
       <p:sp>
         <p:nvSpPr>
-          <p:cNvPr id="7" name="Text 5"/>
-          <p:cNvSpPr txBox="1"/>
-          <p:nvPr/>
-        </p:nvSpPr>
-        <p:spPr>
-          <a:xfrm>
-            <a:off x="9089136" y="3246120"/>
-            <a:ext cx="2313432" cy="2377440"/>
+          <p:cNvPr id="10" name="Text 8"/>
+          <p:cNvSpPr txBox="1"/>
+          <p:nvPr/>
+        </p:nvSpPr>
+        <p:spPr>
+          <a:xfrm>
+            <a:off x="9089136" y="3337560"/>
+            <a:ext cx="2313432" cy="2286000"/>
           </a:xfrm>
           <a:prstGeom prst="rect">
             <a:avLst/>
@@ -3896,7 +4206,7 @@
       </p:sp>
       <p:sp>
         <p:nvSpPr>
-          <p:cNvPr id="8" name="Shape 6"/>
+          <p:cNvPr id="11" name="Shape 9"/>
           <p:cNvSpPr/>
           <p:nvPr/>
         </p:nvSpPr>
@@ -3905,17 +4215,40 @@
             <a:off x="6181344" y="2697480"/>
             <a:ext cx="2587752" cy="3017520"/>
           </a:xfrm>
-          <a:prstGeom prst="roundRect">
-            <a:avLst>
-              <a:gd name="adj" fmla="val 2827"/>
-            </a:avLst>
+          <a:prstGeom prst="rect">
+            <a:avLst/>
           </a:prstGeom>
           <a:solidFill>
-            <a:srgbClr val="F3F8FD"/>
+            <a:srgbClr val="FFFFFF"/>
+          </a:solidFill>
+          <a:ln w="15875">
+            <a:solidFill>
+              <a:srgbClr val="1F3864"/>
+            </a:solidFill>
+            <a:prstDash val="solid"/>
+          </a:ln>
+        </p:spPr>
+      </p:sp>
+      <p:sp>
+        <p:nvSpPr>
+          <p:cNvPr id="12" name="Shape 10"/>
+          <p:cNvSpPr/>
+          <p:nvPr/>
+        </p:nvSpPr>
+        <p:spPr>
+          <a:xfrm>
+            <a:off x="6181344" y="2697480"/>
+            <a:ext cx="2587752" cy="502920"/>
+          </a:xfrm>
+          <a:prstGeom prst="rect">
+            <a:avLst/>
+          </a:prstGeom>
+          <a:solidFill>
+            <a:srgbClr val="1F3864"/>
           </a:solidFill>
           <a:ln w="12700">
             <a:solidFill>
-              <a:srgbClr val="BDD7EE"/>
+              <a:srgbClr val="1F3864"/>
             </a:solidFill>
             <a:prstDash val="solid"/>
           </a:ln>
@@ -3923,14 +4256,39 @@
       </p:sp>
       <p:sp>
         <p:nvSpPr>
-          <p:cNvPr id="9" name="Text 7"/>
-          <p:cNvSpPr txBox="1"/>
-          <p:nvPr/>
-        </p:nvSpPr>
-        <p:spPr>
-          <a:xfrm>
-            <a:off x="6318504" y="2807208"/>
-            <a:ext cx="2313432" cy="411480"/>
+          <p:cNvPr id="13" name="Shape 11"/>
+          <p:cNvSpPr/>
+          <p:nvPr/>
+        </p:nvSpPr>
+        <p:spPr>
+          <a:xfrm>
+            <a:off x="6181344" y="3200400"/>
+            <a:ext cx="2587752" cy="45720"/>
+          </a:xfrm>
+          <a:prstGeom prst="rect">
+            <a:avLst/>
+          </a:prstGeom>
+          <a:solidFill>
+            <a:srgbClr val="ED7D31"/>
+          </a:solidFill>
+          <a:ln w="12700">
+            <a:solidFill>
+              <a:srgbClr val="ED7D31"/>
+            </a:solidFill>
+            <a:prstDash val="solid"/>
+          </a:ln>
+        </p:spPr>
+      </p:sp>
+      <p:sp>
+        <p:nvSpPr>
+          <p:cNvPr id="14" name="Text 12"/>
+          <p:cNvSpPr txBox="1"/>
+          <p:nvPr/>
+        </p:nvSpPr>
+        <p:spPr>
+          <a:xfrm>
+            <a:off x="6272784" y="2697480"/>
+            <a:ext cx="2404872" cy="502920"/>
           </a:xfrm>
           <a:prstGeom prst="rect">
             <a:avLst/>
@@ -3948,7 +4306,7 @@
             <a:r>
               <a:rPr lang="he-IL" altLang="en-US" sz="1600" b="1" dirty="0">
                 <a:solidFill>
-                  <a:srgbClr val="000000"/>
+                  <a:srgbClr val="FFFFFF"/>
                 </a:solidFill>
                 <a:latin typeface="David" pitchFamily="34" charset="0"/>
                 <a:ea typeface="David" pitchFamily="34" charset="-122"/>
@@ -3962,14 +4320,14 @@
       </p:sp>
       <p:sp>
         <p:nvSpPr>
-          <p:cNvPr id="10" name="Text 8"/>
-          <p:cNvSpPr txBox="1"/>
-          <p:nvPr/>
-        </p:nvSpPr>
-        <p:spPr>
-          <a:xfrm>
-            <a:off x="6318504" y="3246120"/>
-            <a:ext cx="2313432" cy="2377440"/>
+          <p:cNvPr id="15" name="Text 13"/>
+          <p:cNvSpPr txBox="1"/>
+          <p:nvPr/>
+        </p:nvSpPr>
+        <p:spPr>
+          <a:xfrm>
+            <a:off x="6318504" y="3337560"/>
+            <a:ext cx="2313432" cy="2286000"/>
           </a:xfrm>
           <a:prstGeom prst="rect">
             <a:avLst/>
@@ -4033,7 +4391,7 @@
       </p:sp>
       <p:sp>
         <p:nvSpPr>
-          <p:cNvPr id="11" name="Shape 9"/>
+          <p:cNvPr id="16" name="Shape 14"/>
           <p:cNvSpPr/>
           <p:nvPr/>
         </p:nvSpPr>
@@ -4042,17 +4400,40 @@
             <a:off x="3410712" y="2697480"/>
             <a:ext cx="2587752" cy="3017520"/>
           </a:xfrm>
-          <a:prstGeom prst="roundRect">
-            <a:avLst>
-              <a:gd name="adj" fmla="val 2827"/>
-            </a:avLst>
+          <a:prstGeom prst="rect">
+            <a:avLst/>
           </a:prstGeom>
           <a:solidFill>
-            <a:srgbClr val="F3F8FD"/>
+            <a:srgbClr val="FFFFFF"/>
+          </a:solidFill>
+          <a:ln w="15875">
+            <a:solidFill>
+              <a:srgbClr val="1F3864"/>
+            </a:solidFill>
+            <a:prstDash val="solid"/>
+          </a:ln>
+        </p:spPr>
+      </p:sp>
+      <p:sp>
+        <p:nvSpPr>
+          <p:cNvPr id="17" name="Shape 15"/>
+          <p:cNvSpPr/>
+          <p:nvPr/>
+        </p:nvSpPr>
+        <p:spPr>
+          <a:xfrm>
+            <a:off x="3410712" y="2697480"/>
+            <a:ext cx="2587752" cy="502920"/>
+          </a:xfrm>
+          <a:prstGeom prst="rect">
+            <a:avLst/>
+          </a:prstGeom>
+          <a:solidFill>
+            <a:srgbClr val="1F3864"/>
           </a:solidFill>
           <a:ln w="12700">
             <a:solidFill>
-              <a:srgbClr val="BDD7EE"/>
+              <a:srgbClr val="1F3864"/>
             </a:solidFill>
             <a:prstDash val="solid"/>
           </a:ln>
@@ -4060,14 +4441,39 @@
       </p:sp>
       <p:sp>
         <p:nvSpPr>
-          <p:cNvPr id="12" name="Text 10"/>
-          <p:cNvSpPr txBox="1"/>
-          <p:nvPr/>
-        </p:nvSpPr>
-        <p:spPr>
-          <a:xfrm>
-            <a:off x="3547872" y="2807208"/>
-            <a:ext cx="2313432" cy="411480"/>
+          <p:cNvPr id="18" name="Shape 16"/>
+          <p:cNvSpPr/>
+          <p:nvPr/>
+        </p:nvSpPr>
+        <p:spPr>
+          <a:xfrm>
+            <a:off x="3410712" y="3200400"/>
+            <a:ext cx="2587752" cy="45720"/>
+          </a:xfrm>
+          <a:prstGeom prst="rect">
+            <a:avLst/>
+          </a:prstGeom>
+          <a:solidFill>
+            <a:srgbClr val="ED7D31"/>
+          </a:solidFill>
+          <a:ln w="12700">
+            <a:solidFill>
+              <a:srgbClr val="ED7D31"/>
+            </a:solidFill>
+            <a:prstDash val="solid"/>
+          </a:ln>
+        </p:spPr>
+      </p:sp>
+      <p:sp>
+        <p:nvSpPr>
+          <p:cNvPr id="19" name="Text 17"/>
+          <p:cNvSpPr txBox="1"/>
+          <p:nvPr/>
+        </p:nvSpPr>
+        <p:spPr>
+          <a:xfrm>
+            <a:off x="3502152" y="2697480"/>
+            <a:ext cx="2404872" cy="502920"/>
           </a:xfrm>
           <a:prstGeom prst="rect">
             <a:avLst/>
@@ -4085,7 +4491,7 @@
             <a:r>
               <a:rPr lang="he-IL" altLang="en-US" sz="1600" b="1" dirty="0">
                 <a:solidFill>
-                  <a:srgbClr val="000000"/>
+                  <a:srgbClr val="FFFFFF"/>
                 </a:solidFill>
                 <a:latin typeface="David" pitchFamily="34" charset="0"/>
                 <a:ea typeface="David" pitchFamily="34" charset="-122"/>
@@ -4099,14 +4505,14 @@
       </p:sp>
       <p:sp>
         <p:nvSpPr>
-          <p:cNvPr id="13" name="Text 11"/>
-          <p:cNvSpPr txBox="1"/>
-          <p:nvPr/>
-        </p:nvSpPr>
-        <p:spPr>
-          <a:xfrm>
-            <a:off x="3547872" y="3246120"/>
-            <a:ext cx="2313432" cy="2377440"/>
+          <p:cNvPr id="20" name="Text 18"/>
+          <p:cNvSpPr txBox="1"/>
+          <p:nvPr/>
+        </p:nvSpPr>
+        <p:spPr>
+          <a:xfrm>
+            <a:off x="3547872" y="3337560"/>
+            <a:ext cx="2313432" cy="2286000"/>
           </a:xfrm>
           <a:prstGeom prst="rect">
             <a:avLst/>
@@ -4170,7 +4576,7 @@
       </p:sp>
       <p:sp>
         <p:nvSpPr>
-          <p:cNvPr id="14" name="Shape 12"/>
+          <p:cNvPr id="21" name="Shape 19"/>
           <p:cNvSpPr/>
           <p:nvPr/>
         </p:nvSpPr>
@@ -4179,17 +4585,40 @@
             <a:off x="640080" y="2697480"/>
             <a:ext cx="2587752" cy="3017520"/>
           </a:xfrm>
-          <a:prstGeom prst="roundRect">
-            <a:avLst>
-              <a:gd name="adj" fmla="val 2827"/>
-            </a:avLst>
+          <a:prstGeom prst="rect">
+            <a:avLst/>
           </a:prstGeom>
           <a:solidFill>
-            <a:srgbClr val="F3F8FD"/>
+            <a:srgbClr val="FFFFFF"/>
+          </a:solidFill>
+          <a:ln w="15875">
+            <a:solidFill>
+              <a:srgbClr val="1F3864"/>
+            </a:solidFill>
+            <a:prstDash val="solid"/>
+          </a:ln>
+        </p:spPr>
+      </p:sp>
+      <p:sp>
+        <p:nvSpPr>
+          <p:cNvPr id="22" name="Shape 20"/>
+          <p:cNvSpPr/>
+          <p:nvPr/>
+        </p:nvSpPr>
+        <p:spPr>
+          <a:xfrm>
+            <a:off x="640080" y="2697480"/>
+            <a:ext cx="2587752" cy="502920"/>
+          </a:xfrm>
+          <a:prstGeom prst="rect">
+            <a:avLst/>
+          </a:prstGeom>
+          <a:solidFill>
+            <a:srgbClr val="1F3864"/>
           </a:solidFill>
           <a:ln w="12700">
             <a:solidFill>
-              <a:srgbClr val="BDD7EE"/>
+              <a:srgbClr val="1F3864"/>
             </a:solidFill>
             <a:prstDash val="solid"/>
           </a:ln>
@@ -4197,14 +4626,39 @@
       </p:sp>
       <p:sp>
         <p:nvSpPr>
-          <p:cNvPr id="15" name="Text 13"/>
-          <p:cNvSpPr txBox="1"/>
-          <p:nvPr/>
-        </p:nvSpPr>
-        <p:spPr>
-          <a:xfrm>
-            <a:off x="777240" y="2807208"/>
-            <a:ext cx="2313432" cy="411480"/>
+          <p:cNvPr id="23" name="Shape 21"/>
+          <p:cNvSpPr/>
+          <p:nvPr/>
+        </p:nvSpPr>
+        <p:spPr>
+          <a:xfrm>
+            <a:off x="640080" y="3200400"/>
+            <a:ext cx="2587752" cy="45720"/>
+          </a:xfrm>
+          <a:prstGeom prst="rect">
+            <a:avLst/>
+          </a:prstGeom>
+          <a:solidFill>
+            <a:srgbClr val="ED7D31"/>
+          </a:solidFill>
+          <a:ln w="12700">
+            <a:solidFill>
+              <a:srgbClr val="ED7D31"/>
+            </a:solidFill>
+            <a:prstDash val="solid"/>
+          </a:ln>
+        </p:spPr>
+      </p:sp>
+      <p:sp>
+        <p:nvSpPr>
+          <p:cNvPr id="24" name="Text 22"/>
+          <p:cNvSpPr txBox="1"/>
+          <p:nvPr/>
+        </p:nvSpPr>
+        <p:spPr>
+          <a:xfrm>
+            <a:off x="731520" y="2697480"/>
+            <a:ext cx="2404872" cy="502920"/>
           </a:xfrm>
           <a:prstGeom prst="rect">
             <a:avLst/>
@@ -4222,7 +4676,7 @@
             <a:r>
               <a:rPr lang="he-IL" altLang="en-US" sz="1600" b="1" dirty="0">
                 <a:solidFill>
-                  <a:srgbClr val="000000"/>
+                  <a:srgbClr val="FFFFFF"/>
                 </a:solidFill>
                 <a:latin typeface="David" pitchFamily="34" charset="0"/>
                 <a:ea typeface="David" pitchFamily="34" charset="-122"/>
@@ -4236,14 +4690,14 @@
       </p:sp>
       <p:sp>
         <p:nvSpPr>
-          <p:cNvPr id="16" name="Text 14"/>
-          <p:cNvSpPr txBox="1"/>
-          <p:nvPr/>
-        </p:nvSpPr>
-        <p:spPr>
-          <a:xfrm>
-            <a:off x="777240" y="3246120"/>
-            <a:ext cx="2313432" cy="2377440"/>
+          <p:cNvPr id="25" name="Text 23"/>
+          <p:cNvSpPr txBox="1"/>
+          <p:nvPr/>
+        </p:nvSpPr>
+        <p:spPr>
+          <a:xfrm>
+            <a:off x="777240" y="3337560"/>
+            <a:ext cx="2313432" cy="2286000"/>
           </a:xfrm>
           <a:prstGeom prst="rect">
             <a:avLst/>
@@ -4307,7 +4761,7 @@
       </p:sp>
       <p:sp>
         <p:nvSpPr>
-          <p:cNvPr id="17" name="Text 15"/>
+          <p:cNvPr id="26" name="Text 24"/>
           <p:cNvSpPr txBox="1"/>
           <p:nvPr/>
         </p:nvSpPr>
@@ -4332,7 +4786,7 @@
             <a:r>
               <a:rPr lang="he-IL" altLang="en-US" sz="1100" dirty="0">
                 <a:solidFill>
-                  <a:srgbClr val="595959"/>
+                  <a:srgbClr val="1F3864"/>
                 </a:solidFill>
                 <a:latin typeface="David" pitchFamily="34" charset="0"/>
                 <a:ea typeface="David" pitchFamily="34" charset="-122"/>
@@ -4346,7 +4800,30 @@
       </p:sp>
       <p:sp>
         <p:nvSpPr>
-          <p:cNvPr id="18" name="Text 16"/>
+          <p:cNvPr id="27" name="Shape 25"/>
+          <p:cNvSpPr/>
+          <p:nvPr/>
+        </p:nvSpPr>
+        <p:spPr>
+          <a:xfrm>
+            <a:off x="640080" y="6355080"/>
+            <a:ext cx="10908792" cy="0"/>
+          </a:xfrm>
+          <a:prstGeom prst="line">
+            <a:avLst/>
+          </a:prstGeom>
+          <a:noFill/>
+          <a:ln w="12700">
+            <a:solidFill>
+              <a:srgbClr val="ED7D31"/>
+            </a:solidFill>
+            <a:prstDash val="solid"/>
+          </a:ln>
+        </p:spPr>
+      </p:sp>
+      <p:sp>
+        <p:nvSpPr>
+          <p:cNvPr id="28" name="Text 26"/>
           <p:cNvSpPr txBox="1"/>
           <p:nvPr/>
         </p:nvSpPr>
@@ -4371,7 +4848,7 @@
             <a:r>
               <a:rPr lang="he-IL" altLang="en-US" sz="1000" dirty="0">
                 <a:solidFill>
-                  <a:srgbClr val="595959"/>
+                  <a:srgbClr val="1F3864"/>
                 </a:solidFill>
                 <a:latin typeface="David" pitchFamily="34" charset="0"/>
                 <a:ea typeface="David" pitchFamily="34" charset="-122"/>
@@ -4385,7 +4862,7 @@
       </p:sp>
       <p:sp>
         <p:nvSpPr>
-          <p:cNvPr id="19" name="Text 17"/>
+          <p:cNvPr id="29" name="Text 27"/>
           <p:cNvSpPr txBox="1"/>
           <p:nvPr/>
         </p:nvSpPr>
@@ -4408,9 +4885,9 @@
               <a:buNone/>
             </a:pPr>
             <a:r>
-              <a:rPr lang="he-IL" altLang="en-US" sz="1000" dirty="0">
-                <a:solidFill>
-                  <a:srgbClr val="595959"/>
+              <a:rPr lang="he-IL" altLang="en-US" sz="1100" b="1" dirty="0">
+                <a:solidFill>
+                  <a:srgbClr val="ED7D31"/>
                 </a:solidFill>
                 <a:latin typeface="David" pitchFamily="34" charset="0"/>
                 <a:ea typeface="David" pitchFamily="34" charset="-122"/>
@@ -4418,7 +4895,7 @@
               </a:rPr>
               <a:t>13</a:t>
             </a:r>
-            <a:endParaRPr lang="he-IL" sz="1000" dirty="0"/>
+            <a:endParaRPr lang="he-IL" sz="1100" dirty="0"/>
           </a:p>
         </p:txBody>
       </p:sp>
@@ -4433,6 +4910,13 @@
 <file path=ppt/slides/slide14.xml><?xml version="1.0" encoding="utf-8"?>
 <p:sld xmlns:a="http://schemas.openxmlformats.org/drawingml/2006/main" xmlns:r="http://schemas.openxmlformats.org/officeDocument/2006/relationships" xmlns:p="http://schemas.openxmlformats.org/presentationml/2006/main">
   <p:cSld name="Slide 14">
+    <p:bg>
+      <p:bgPr>
+        <a:solidFill>
+          <a:srgbClr val="FFFFFF"/>
+        </a:solidFill>
+      </p:bgPr>
+    </p:bg>
     <p:spTree>
       <p:nvGrpSpPr>
         <p:cNvPr id="1" name=""/>
@@ -4449,61 +4933,24 @@
       </p:grpSpPr>
       <p:sp>
         <p:nvSpPr>
-          <p:cNvPr id="2" name="Text 0"/>
-          <p:cNvSpPr txBox="1"/>
-          <p:nvPr/>
-        </p:nvSpPr>
-        <p:spPr>
-          <a:xfrm>
-            <a:off x="640080" y="365760"/>
-            <a:ext cx="10908792" cy="731520"/>
-          </a:xfrm>
-          <a:prstGeom prst="rect">
-            <a:avLst/>
-          </a:prstGeom>
-          <a:noFill/>
-          <a:ln/>
-        </p:spPr>
-        <p:txBody>
-          <a:bodyPr wrap="square" lIns="0" tIns="0" rIns="0" bIns="0" rtlCol="0" anchor="ctr"/>
-          <a:lstStyle/>
-          <a:p>
-            <a:pPr rtl="1" algn="r" indent="0" marL="0">
-              <a:buNone/>
-            </a:pPr>
-            <a:r>
-              <a:rPr lang="he-IL" altLang="en-US" sz="2800" b="1" dirty="0">
-                <a:solidFill>
-                  <a:srgbClr val="000000"/>
-                </a:solidFill>
-                <a:latin typeface="David" pitchFamily="34" charset="0"/>
-                <a:ea typeface="David" pitchFamily="34" charset="-122"/>
-                <a:cs typeface="David" pitchFamily="34" charset="-120"/>
-              </a:rPr>
-              <a:t>אמצעי עזר להמחשה ולהפעלה</a:t>
-            </a:r>
-            <a:endParaRPr lang="he-IL" sz="2800" dirty="0"/>
-          </a:p>
-        </p:txBody>
-      </p:sp>
-      <p:sp>
-        <p:nvSpPr>
-          <p:cNvPr id="3" name="Shape 1"/>
+          <p:cNvPr id="2" name="Shape 0"/>
           <p:cNvSpPr/>
           <p:nvPr/>
         </p:nvSpPr>
         <p:spPr>
           <a:xfrm>
-            <a:off x="640080" y="1115568"/>
-            <a:ext cx="10908792" cy="0"/>
-          </a:xfrm>
-          <a:prstGeom prst="line">
-            <a:avLst/>
-          </a:prstGeom>
-          <a:noFill/>
-          <a:ln w="19050">
+            <a:off x="0" y="0"/>
+            <a:ext cx="12188952" cy="1051560"/>
+          </a:xfrm>
+          <a:prstGeom prst="rect">
+            <a:avLst/>
+          </a:prstGeom>
+          <a:solidFill>
+            <a:srgbClr val="1F3864"/>
+          </a:solidFill>
+          <a:ln w="12700">
             <a:solidFill>
-              <a:srgbClr val="BDD7EE"/>
+              <a:srgbClr val="1F3864"/>
             </a:solidFill>
             <a:prstDash val="solid"/>
           </a:ln>
@@ -4511,7 +4958,71 @@
       </p:sp>
       <p:sp>
         <p:nvSpPr>
+          <p:cNvPr id="3" name="Shape 1"/>
+          <p:cNvSpPr/>
+          <p:nvPr/>
+        </p:nvSpPr>
+        <p:spPr>
+          <a:xfrm>
+            <a:off x="0" y="1051560"/>
+            <a:ext cx="12188952" cy="64008"/>
+          </a:xfrm>
+          <a:prstGeom prst="rect">
+            <a:avLst/>
+          </a:prstGeom>
+          <a:solidFill>
+            <a:srgbClr val="ED7D31"/>
+          </a:solidFill>
+          <a:ln w="12700">
+            <a:solidFill>
+              <a:srgbClr val="ED7D31"/>
+            </a:solidFill>
+            <a:prstDash val="solid"/>
+          </a:ln>
+        </p:spPr>
+      </p:sp>
+      <p:sp>
+        <p:nvSpPr>
           <p:cNvPr id="4" name="Text 2"/>
+          <p:cNvSpPr txBox="1"/>
+          <p:nvPr/>
+        </p:nvSpPr>
+        <p:spPr>
+          <a:xfrm>
+            <a:off x="640080" y="137160"/>
+            <a:ext cx="10908792" cy="777240"/>
+          </a:xfrm>
+          <a:prstGeom prst="rect">
+            <a:avLst/>
+          </a:prstGeom>
+          <a:noFill/>
+          <a:ln/>
+        </p:spPr>
+        <p:txBody>
+          <a:bodyPr wrap="square" lIns="0" tIns="0" rIns="0" bIns="0" rtlCol="0" anchor="ctr"/>
+          <a:lstStyle/>
+          <a:p>
+            <a:pPr rtl="1" algn="r" indent="0" marL="0">
+              <a:buNone/>
+            </a:pPr>
+            <a:r>
+              <a:rPr lang="he-IL" altLang="en-US" sz="2800" b="1" dirty="0">
+                <a:solidFill>
+                  <a:srgbClr val="FFFFFF"/>
+                </a:solidFill>
+                <a:latin typeface="David" pitchFamily="34" charset="0"/>
+                <a:ea typeface="David" pitchFamily="34" charset="-122"/>
+                <a:cs typeface="David" pitchFamily="34" charset="-120"/>
+              </a:rPr>
+              <a:t>אמצעי עזר להמחשה ולהפעלה</a:t>
+            </a:r>
+            <a:endParaRPr lang="he-IL" sz="2800" dirty="0"/>
+          </a:p>
+        </p:txBody>
+      </p:sp>
+      <p:sp>
+        <p:nvSpPr>
+          <p:cNvPr id="5" name="Text 3"/>
           <p:cNvSpPr txBox="1"/>
           <p:nvPr/>
         </p:nvSpPr>
@@ -4553,7 +5064,7 @@
       </p:sp>
       <p:sp>
         <p:nvSpPr>
-          <p:cNvPr id="5" name="Text 3"/>
+          <p:cNvPr id="6" name="Text 4"/>
           <p:cNvSpPr txBox="1"/>
           <p:nvPr/>
         </p:nvSpPr>
@@ -4595,7 +5106,7 @@
       </p:sp>
       <p:sp>
         <p:nvSpPr>
-          <p:cNvPr id="6" name="Text 4">
+          <p:cNvPr id="7" name="Text 5">
             <a:hlinkClick r:id="rId1" tooltip=""/>
           </p:cNvPr>
           <p:cNvSpPr txBox="1"/>
@@ -4643,7 +5154,7 @@
       </p:sp>
       <p:sp>
         <p:nvSpPr>
-          <p:cNvPr id="7" name="Text 5"/>
+          <p:cNvPr id="8" name="Text 6"/>
           <p:cNvSpPr txBox="1"/>
           <p:nvPr/>
         </p:nvSpPr>
@@ -4685,7 +5196,30 @@
       </p:sp>
       <p:sp>
         <p:nvSpPr>
-          <p:cNvPr id="8" name="Text 6"/>
+          <p:cNvPr id="9" name="Shape 7"/>
+          <p:cNvSpPr/>
+          <p:nvPr/>
+        </p:nvSpPr>
+        <p:spPr>
+          <a:xfrm>
+            <a:off x="640080" y="6355080"/>
+            <a:ext cx="10908792" cy="0"/>
+          </a:xfrm>
+          <a:prstGeom prst="line">
+            <a:avLst/>
+          </a:prstGeom>
+          <a:noFill/>
+          <a:ln w="12700">
+            <a:solidFill>
+              <a:srgbClr val="ED7D31"/>
+            </a:solidFill>
+            <a:prstDash val="solid"/>
+          </a:ln>
+        </p:spPr>
+      </p:sp>
+      <p:sp>
+        <p:nvSpPr>
+          <p:cNvPr id="10" name="Text 8"/>
           <p:cNvSpPr txBox="1"/>
           <p:nvPr/>
         </p:nvSpPr>
@@ -4710,7 +5244,7 @@
             <a:r>
               <a:rPr lang="he-IL" altLang="en-US" sz="1000" dirty="0">
                 <a:solidFill>
-                  <a:srgbClr val="595959"/>
+                  <a:srgbClr val="1F3864"/>
                 </a:solidFill>
                 <a:latin typeface="David" pitchFamily="34" charset="0"/>
                 <a:ea typeface="David" pitchFamily="34" charset="-122"/>
@@ -4724,7 +5258,7 @@
       </p:sp>
       <p:sp>
         <p:nvSpPr>
-          <p:cNvPr id="9" name="Text 7"/>
+          <p:cNvPr id="11" name="Text 9"/>
           <p:cNvSpPr txBox="1"/>
           <p:nvPr/>
         </p:nvSpPr>
@@ -4747,9 +5281,9 @@
               <a:buNone/>
             </a:pPr>
             <a:r>
-              <a:rPr lang="he-IL" altLang="en-US" sz="1000" dirty="0">
-                <a:solidFill>
-                  <a:srgbClr val="595959"/>
+              <a:rPr lang="he-IL" altLang="en-US" sz="1100" b="1" dirty="0">
+                <a:solidFill>
+                  <a:srgbClr val="ED7D31"/>
                 </a:solidFill>
                 <a:latin typeface="David" pitchFamily="34" charset="0"/>
                 <a:ea typeface="David" pitchFamily="34" charset="-122"/>
@@ -4757,7 +5291,7 @@
               </a:rPr>
               <a:t>14</a:t>
             </a:r>
-            <a:endParaRPr lang="he-IL" sz="1000" dirty="0"/>
+            <a:endParaRPr lang="he-IL" sz="1100" dirty="0"/>
           </a:p>
         </p:txBody>
       </p:sp>
@@ -4772,6 +5306,13 @@
 <file path=ppt/slides/slide15.xml><?xml version="1.0" encoding="utf-8"?>
 <p:sld xmlns:a="http://schemas.openxmlformats.org/drawingml/2006/main" xmlns:r="http://schemas.openxmlformats.org/officeDocument/2006/relationships" xmlns:p="http://schemas.openxmlformats.org/presentationml/2006/main">
   <p:cSld name="Slide 15">
+    <p:bg>
+      <p:bgPr>
+        <a:solidFill>
+          <a:srgbClr val="FFFFFF"/>
+        </a:solidFill>
+      </p:bgPr>
+    </p:bg>
     <p:spTree>
       <p:nvGrpSpPr>
         <p:cNvPr id="1" name=""/>
@@ -4788,61 +5329,24 @@
       </p:grpSpPr>
       <p:sp>
         <p:nvSpPr>
-          <p:cNvPr id="2" name="Text 0"/>
-          <p:cNvSpPr txBox="1"/>
-          <p:nvPr/>
-        </p:nvSpPr>
-        <p:spPr>
-          <a:xfrm>
-            <a:off x="640080" y="365760"/>
-            <a:ext cx="10908792" cy="731520"/>
-          </a:xfrm>
-          <a:prstGeom prst="rect">
-            <a:avLst/>
-          </a:prstGeom>
-          <a:noFill/>
-          <a:ln/>
-        </p:spPr>
-        <p:txBody>
-          <a:bodyPr wrap="square" lIns="0" tIns="0" rIns="0" bIns="0" rtlCol="0" anchor="ctr"/>
-          <a:lstStyle/>
-          <a:p>
-            <a:pPr rtl="1" algn="r" indent="0" marL="0">
-              <a:buNone/>
-            </a:pPr>
-            <a:r>
-              <a:rPr lang="he-IL" altLang="en-US" sz="2800" b="1" dirty="0">
-                <a:solidFill>
-                  <a:srgbClr val="000000"/>
-                </a:solidFill>
-                <a:latin typeface="David" pitchFamily="34" charset="0"/>
-                <a:ea typeface="David" pitchFamily="34" charset="-122"/>
-                <a:cs typeface="David" pitchFamily="34" charset="-120"/>
-              </a:rPr>
-              <a:t>סיכום</a:t>
-            </a:r>
-            <a:endParaRPr lang="he-IL" sz="2800" dirty="0"/>
-          </a:p>
-        </p:txBody>
-      </p:sp>
-      <p:sp>
-        <p:nvSpPr>
-          <p:cNvPr id="3" name="Shape 1"/>
+          <p:cNvPr id="2" name="Shape 0"/>
           <p:cNvSpPr/>
           <p:nvPr/>
         </p:nvSpPr>
         <p:spPr>
           <a:xfrm>
-            <a:off x="640080" y="1115568"/>
-            <a:ext cx="10908792" cy="0"/>
-          </a:xfrm>
-          <a:prstGeom prst="line">
-            <a:avLst/>
-          </a:prstGeom>
-          <a:noFill/>
-          <a:ln w="19050">
+            <a:off x="0" y="0"/>
+            <a:ext cx="12188952" cy="1051560"/>
+          </a:xfrm>
+          <a:prstGeom prst="rect">
+            <a:avLst/>
+          </a:prstGeom>
+          <a:solidFill>
+            <a:srgbClr val="1F3864"/>
+          </a:solidFill>
+          <a:ln w="12700">
             <a:solidFill>
-              <a:srgbClr val="BDD7EE"/>
+              <a:srgbClr val="1F3864"/>
             </a:solidFill>
             <a:prstDash val="solid"/>
           </a:ln>
@@ -4850,7 +5354,71 @@
       </p:sp>
       <p:sp>
         <p:nvSpPr>
+          <p:cNvPr id="3" name="Shape 1"/>
+          <p:cNvSpPr/>
+          <p:nvPr/>
+        </p:nvSpPr>
+        <p:spPr>
+          <a:xfrm>
+            <a:off x="0" y="1051560"/>
+            <a:ext cx="12188952" cy="64008"/>
+          </a:xfrm>
+          <a:prstGeom prst="rect">
+            <a:avLst/>
+          </a:prstGeom>
+          <a:solidFill>
+            <a:srgbClr val="ED7D31"/>
+          </a:solidFill>
+          <a:ln w="12700">
+            <a:solidFill>
+              <a:srgbClr val="ED7D31"/>
+            </a:solidFill>
+            <a:prstDash val="solid"/>
+          </a:ln>
+        </p:spPr>
+      </p:sp>
+      <p:sp>
+        <p:nvSpPr>
           <p:cNvPr id="4" name="Text 2"/>
+          <p:cNvSpPr txBox="1"/>
+          <p:nvPr/>
+        </p:nvSpPr>
+        <p:spPr>
+          <a:xfrm>
+            <a:off x="640080" y="137160"/>
+            <a:ext cx="10908792" cy="777240"/>
+          </a:xfrm>
+          <a:prstGeom prst="rect">
+            <a:avLst/>
+          </a:prstGeom>
+          <a:noFill/>
+          <a:ln/>
+        </p:spPr>
+        <p:txBody>
+          <a:bodyPr wrap="square" lIns="0" tIns="0" rIns="0" bIns="0" rtlCol="0" anchor="ctr"/>
+          <a:lstStyle/>
+          <a:p>
+            <a:pPr rtl="1" algn="r" indent="0" marL="0">
+              <a:buNone/>
+            </a:pPr>
+            <a:r>
+              <a:rPr lang="he-IL" altLang="en-US" sz="2800" b="1" dirty="0">
+                <a:solidFill>
+                  <a:srgbClr val="FFFFFF"/>
+                </a:solidFill>
+                <a:latin typeface="David" pitchFamily="34" charset="0"/>
+                <a:ea typeface="David" pitchFamily="34" charset="-122"/>
+                <a:cs typeface="David" pitchFamily="34" charset="-120"/>
+              </a:rPr>
+              <a:t>סיכום</a:t>
+            </a:r>
+            <a:endParaRPr lang="he-IL" sz="2800" dirty="0"/>
+          </a:p>
+        </p:txBody>
+      </p:sp>
+      <p:sp>
+        <p:nvSpPr>
+          <p:cNvPr id="5" name="Text 3"/>
           <p:cNvSpPr txBox="1"/>
           <p:nvPr/>
         </p:nvSpPr>
@@ -4892,7 +5460,7 @@
       </p:sp>
       <p:sp>
         <p:nvSpPr>
-          <p:cNvPr id="5" name="Text 3"/>
+          <p:cNvPr id="6" name="Text 4"/>
           <p:cNvSpPr txBox="1"/>
           <p:nvPr/>
         </p:nvSpPr>
@@ -4934,7 +5502,7 @@
       </p:sp>
       <p:sp>
         <p:nvSpPr>
-          <p:cNvPr id="6" name="Text 4"/>
+          <p:cNvPr id="7" name="Text 5"/>
           <p:cNvSpPr txBox="1"/>
           <p:nvPr/>
         </p:nvSpPr>
@@ -4959,7 +5527,7 @@
             <a:r>
               <a:rPr lang="he-IL" altLang="en-US" sz="1600" b="1" dirty="0">
                 <a:solidFill>
-                  <a:srgbClr val="000000"/>
+                  <a:srgbClr val="ED7D31"/>
                 </a:solidFill>
                 <a:latin typeface="David" pitchFamily="34" charset="0"/>
                 <a:ea typeface="David" pitchFamily="34" charset="-122"/>
@@ -4973,7 +5541,30 @@
       </p:sp>
       <p:sp>
         <p:nvSpPr>
-          <p:cNvPr id="7" name="Text 5"/>
+          <p:cNvPr id="8" name="Shape 6"/>
+          <p:cNvSpPr/>
+          <p:nvPr/>
+        </p:nvSpPr>
+        <p:spPr>
+          <a:xfrm>
+            <a:off x="640080" y="6355080"/>
+            <a:ext cx="10908792" cy="0"/>
+          </a:xfrm>
+          <a:prstGeom prst="line">
+            <a:avLst/>
+          </a:prstGeom>
+          <a:noFill/>
+          <a:ln w="12700">
+            <a:solidFill>
+              <a:srgbClr val="ED7D31"/>
+            </a:solidFill>
+            <a:prstDash val="solid"/>
+          </a:ln>
+        </p:spPr>
+      </p:sp>
+      <p:sp>
+        <p:nvSpPr>
+          <p:cNvPr id="9" name="Text 7"/>
           <p:cNvSpPr txBox="1"/>
           <p:nvPr/>
         </p:nvSpPr>
@@ -4998,7 +5589,7 @@
             <a:r>
               <a:rPr lang="he-IL" altLang="en-US" sz="1000" dirty="0">
                 <a:solidFill>
-                  <a:srgbClr val="595959"/>
+                  <a:srgbClr val="1F3864"/>
                 </a:solidFill>
                 <a:latin typeface="David" pitchFamily="34" charset="0"/>
                 <a:ea typeface="David" pitchFamily="34" charset="-122"/>
@@ -5012,7 +5603,7 @@
       </p:sp>
       <p:sp>
         <p:nvSpPr>
-          <p:cNvPr id="8" name="Text 6"/>
+          <p:cNvPr id="10" name="Text 8"/>
           <p:cNvSpPr txBox="1"/>
           <p:nvPr/>
         </p:nvSpPr>
@@ -5035,9 +5626,9 @@
               <a:buNone/>
             </a:pPr>
             <a:r>
-              <a:rPr lang="he-IL" altLang="en-US" sz="1000" dirty="0">
-                <a:solidFill>
-                  <a:srgbClr val="595959"/>
+              <a:rPr lang="he-IL" altLang="en-US" sz="1100" b="1" dirty="0">
+                <a:solidFill>
+                  <a:srgbClr val="ED7D31"/>
                 </a:solidFill>
                 <a:latin typeface="David" pitchFamily="34" charset="0"/>
                 <a:ea typeface="David" pitchFamily="34" charset="-122"/>
@@ -5045,7 +5636,7 @@
               </a:rPr>
               <a:t>15</a:t>
             </a:r>
-            <a:endParaRPr lang="he-IL" sz="1000" dirty="0"/>
+            <a:endParaRPr lang="he-IL" sz="1100" dirty="0"/>
           </a:p>
         </p:txBody>
       </p:sp>
@@ -5060,6 +5651,13 @@
 <file path=ppt/slides/slide16.xml><?xml version="1.0" encoding="utf-8"?>
 <p:sld xmlns:a="http://schemas.openxmlformats.org/drawingml/2006/main" xmlns:r="http://schemas.openxmlformats.org/officeDocument/2006/relationships" xmlns:p="http://schemas.openxmlformats.org/presentationml/2006/main">
   <p:cSld name="Slide 16">
+    <p:bg>
+      <p:bgPr>
+        <a:solidFill>
+          <a:srgbClr val="FFFFFF"/>
+        </a:solidFill>
+      </p:bgPr>
+    </p:bg>
     <p:spTree>
       <p:nvGrpSpPr>
         <p:cNvPr id="1" name=""/>
@@ -5076,61 +5674,24 @@
       </p:grpSpPr>
       <p:sp>
         <p:nvSpPr>
-          <p:cNvPr id="2" name="Text 0"/>
-          <p:cNvSpPr txBox="1"/>
-          <p:nvPr/>
-        </p:nvSpPr>
-        <p:spPr>
-          <a:xfrm>
-            <a:off x="640080" y="365760"/>
-            <a:ext cx="10908792" cy="731520"/>
-          </a:xfrm>
-          <a:prstGeom prst="rect">
-            <a:avLst/>
-          </a:prstGeom>
-          <a:noFill/>
-          <a:ln/>
-        </p:spPr>
-        <p:txBody>
-          <a:bodyPr wrap="square" lIns="0" tIns="0" rIns="0" bIns="0" rtlCol="0" anchor="ctr"/>
-          <a:lstStyle/>
-          <a:p>
-            <a:pPr rtl="1" algn="r" indent="0" marL="0">
-              <a:buNone/>
-            </a:pPr>
-            <a:r>
-              <a:rPr lang="he-IL" altLang="en-US" sz="2800" b="1" dirty="0">
-                <a:solidFill>
-                  <a:srgbClr val="000000"/>
-                </a:solidFill>
-                <a:latin typeface="David" pitchFamily="34" charset="0"/>
-                <a:ea typeface="David" pitchFamily="34" charset="-122"/>
-                <a:cs typeface="David" pitchFamily="34" charset="-120"/>
-              </a:rPr>
-              <a:t>רשימת מקורות</a:t>
-            </a:r>
-            <a:endParaRPr lang="he-IL" sz="2800" dirty="0"/>
-          </a:p>
-        </p:txBody>
-      </p:sp>
-      <p:sp>
-        <p:nvSpPr>
-          <p:cNvPr id="3" name="Shape 1"/>
+          <p:cNvPr id="2" name="Shape 0"/>
           <p:cNvSpPr/>
           <p:nvPr/>
         </p:nvSpPr>
         <p:spPr>
           <a:xfrm>
-            <a:off x="640080" y="1115568"/>
-            <a:ext cx="10908792" cy="0"/>
-          </a:xfrm>
-          <a:prstGeom prst="line">
-            <a:avLst/>
-          </a:prstGeom>
-          <a:noFill/>
-          <a:ln w="19050">
+            <a:off x="0" y="0"/>
+            <a:ext cx="12188952" cy="1051560"/>
+          </a:xfrm>
+          <a:prstGeom prst="rect">
+            <a:avLst/>
+          </a:prstGeom>
+          <a:solidFill>
+            <a:srgbClr val="1F3864"/>
+          </a:solidFill>
+          <a:ln w="12700">
             <a:solidFill>
-              <a:srgbClr val="BDD7EE"/>
+              <a:srgbClr val="1F3864"/>
             </a:solidFill>
             <a:prstDash val="solid"/>
           </a:ln>
@@ -5138,7 +5699,71 @@
       </p:sp>
       <p:sp>
         <p:nvSpPr>
+          <p:cNvPr id="3" name="Shape 1"/>
+          <p:cNvSpPr/>
+          <p:nvPr/>
+        </p:nvSpPr>
+        <p:spPr>
+          <a:xfrm>
+            <a:off x="0" y="1051560"/>
+            <a:ext cx="12188952" cy="64008"/>
+          </a:xfrm>
+          <a:prstGeom prst="rect">
+            <a:avLst/>
+          </a:prstGeom>
+          <a:solidFill>
+            <a:srgbClr val="ED7D31"/>
+          </a:solidFill>
+          <a:ln w="12700">
+            <a:solidFill>
+              <a:srgbClr val="ED7D31"/>
+            </a:solidFill>
+            <a:prstDash val="solid"/>
+          </a:ln>
+        </p:spPr>
+      </p:sp>
+      <p:sp>
+        <p:nvSpPr>
           <p:cNvPr id="4" name="Text 2"/>
+          <p:cNvSpPr txBox="1"/>
+          <p:nvPr/>
+        </p:nvSpPr>
+        <p:spPr>
+          <a:xfrm>
+            <a:off x="640080" y="137160"/>
+            <a:ext cx="10908792" cy="777240"/>
+          </a:xfrm>
+          <a:prstGeom prst="rect">
+            <a:avLst/>
+          </a:prstGeom>
+          <a:noFill/>
+          <a:ln/>
+        </p:spPr>
+        <p:txBody>
+          <a:bodyPr wrap="square" lIns="0" tIns="0" rIns="0" bIns="0" rtlCol="0" anchor="ctr"/>
+          <a:lstStyle/>
+          <a:p>
+            <a:pPr rtl="1" algn="r" indent="0" marL="0">
+              <a:buNone/>
+            </a:pPr>
+            <a:r>
+              <a:rPr lang="he-IL" altLang="en-US" sz="2800" b="1" dirty="0">
+                <a:solidFill>
+                  <a:srgbClr val="FFFFFF"/>
+                </a:solidFill>
+                <a:latin typeface="David" pitchFamily="34" charset="0"/>
+                <a:ea typeface="David" pitchFamily="34" charset="-122"/>
+                <a:cs typeface="David" pitchFamily="34" charset="-120"/>
+              </a:rPr>
+              <a:t>רשימת מקורות</a:t>
+            </a:r>
+            <a:endParaRPr lang="he-IL" sz="2800" dirty="0"/>
+          </a:p>
+        </p:txBody>
+      </p:sp>
+      <p:sp>
+        <p:nvSpPr>
+          <p:cNvPr id="5" name="Text 3"/>
           <p:cNvSpPr txBox="1"/>
           <p:nvPr/>
         </p:nvSpPr>
@@ -5197,7 +5822,7 @@
       </p:sp>
       <p:sp>
         <p:nvSpPr>
-          <p:cNvPr id="5" name="Text 3"/>
+          <p:cNvPr id="6" name="Text 4"/>
           <p:cNvSpPr txBox="1"/>
           <p:nvPr/>
         </p:nvSpPr>
@@ -5296,7 +5921,30 @@
       </p:sp>
       <p:sp>
         <p:nvSpPr>
-          <p:cNvPr id="6" name="Text 4"/>
+          <p:cNvPr id="7" name="Shape 5"/>
+          <p:cNvSpPr/>
+          <p:nvPr/>
+        </p:nvSpPr>
+        <p:spPr>
+          <a:xfrm>
+            <a:off x="640080" y="6355080"/>
+            <a:ext cx="10908792" cy="0"/>
+          </a:xfrm>
+          <a:prstGeom prst="line">
+            <a:avLst/>
+          </a:prstGeom>
+          <a:noFill/>
+          <a:ln w="12700">
+            <a:solidFill>
+              <a:srgbClr val="ED7D31"/>
+            </a:solidFill>
+            <a:prstDash val="solid"/>
+          </a:ln>
+        </p:spPr>
+      </p:sp>
+      <p:sp>
+        <p:nvSpPr>
+          <p:cNvPr id="8" name="Text 6"/>
           <p:cNvSpPr txBox="1"/>
           <p:nvPr/>
         </p:nvSpPr>
@@ -5321,7 +5969,7 @@
             <a:r>
               <a:rPr lang="he-IL" altLang="en-US" sz="1000" dirty="0">
                 <a:solidFill>
-                  <a:srgbClr val="595959"/>
+                  <a:srgbClr val="1F3864"/>
                 </a:solidFill>
                 <a:latin typeface="David" pitchFamily="34" charset="0"/>
                 <a:ea typeface="David" pitchFamily="34" charset="-122"/>
@@ -5335,7 +5983,7 @@
       </p:sp>
       <p:sp>
         <p:nvSpPr>
-          <p:cNvPr id="7" name="Text 5"/>
+          <p:cNvPr id="9" name="Text 7"/>
           <p:cNvSpPr txBox="1"/>
           <p:nvPr/>
         </p:nvSpPr>
@@ -5358,9 +6006,9 @@
               <a:buNone/>
             </a:pPr>
             <a:r>
-              <a:rPr lang="he-IL" altLang="en-US" sz="1000" dirty="0">
-                <a:solidFill>
-                  <a:srgbClr val="595959"/>
+              <a:rPr lang="he-IL" altLang="en-US" sz="1100" b="1" dirty="0">
+                <a:solidFill>
+                  <a:srgbClr val="ED7D31"/>
                 </a:solidFill>
                 <a:latin typeface="David" pitchFamily="34" charset="0"/>
                 <a:ea typeface="David" pitchFamily="34" charset="-122"/>
@@ -5368,7 +6016,7 @@
               </a:rPr>
               <a:t>16</a:t>
             </a:r>
-            <a:endParaRPr lang="he-IL" sz="1000" dirty="0"/>
+            <a:endParaRPr lang="he-IL" sz="1100" dirty="0"/>
           </a:p>
         </p:txBody>
       </p:sp>
@@ -5383,6 +6031,13 @@
 <file path=ppt/slides/slide2.xml><?xml version="1.0" encoding="utf-8"?>
 <p:sld xmlns:a="http://schemas.openxmlformats.org/drawingml/2006/main" xmlns:r="http://schemas.openxmlformats.org/officeDocument/2006/relationships" xmlns:p="http://schemas.openxmlformats.org/presentationml/2006/main">
   <p:cSld name="Slide 2">
+    <p:bg>
+      <p:bgPr>
+        <a:solidFill>
+          <a:srgbClr val="FFFFFF"/>
+        </a:solidFill>
+      </p:bgPr>
+    </p:bg>
     <p:spTree>
       <p:nvGrpSpPr>
         <p:cNvPr id="1" name=""/>
@@ -5399,61 +6054,24 @@
       </p:grpSpPr>
       <p:sp>
         <p:nvSpPr>
-          <p:cNvPr id="2" name="Text 0"/>
-          <p:cNvSpPr txBox="1"/>
-          <p:nvPr/>
-        </p:nvSpPr>
-        <p:spPr>
-          <a:xfrm>
-            <a:off x="640080" y="365760"/>
-            <a:ext cx="10908792" cy="731520"/>
-          </a:xfrm>
-          <a:prstGeom prst="rect">
-            <a:avLst/>
-          </a:prstGeom>
-          <a:noFill/>
-          <a:ln/>
-        </p:spPr>
-        <p:txBody>
-          <a:bodyPr wrap="square" lIns="0" tIns="0" rIns="0" bIns="0" rtlCol="0" anchor="ctr"/>
-          <a:lstStyle/>
-          <a:p>
-            <a:pPr rtl="1" algn="r" indent="0" marL="0">
-              <a:buNone/>
-            </a:pPr>
-            <a:r>
-              <a:rPr lang="he-IL" altLang="en-US" sz="2800" b="1" dirty="0">
-                <a:solidFill>
-                  <a:srgbClr val="000000"/>
-                </a:solidFill>
-                <a:latin typeface="David" pitchFamily="34" charset="0"/>
-                <a:ea typeface="David" pitchFamily="34" charset="-122"/>
-                <a:cs typeface="David" pitchFamily="34" charset="-120"/>
-              </a:rPr>
-              <a:t>מבוא: הצגת הנושא</a:t>
-            </a:r>
-            <a:endParaRPr lang="he-IL" sz="2800" dirty="0"/>
-          </a:p>
-        </p:txBody>
-      </p:sp>
-      <p:sp>
-        <p:nvSpPr>
-          <p:cNvPr id="3" name="Shape 1"/>
+          <p:cNvPr id="2" name="Shape 0"/>
           <p:cNvSpPr/>
           <p:nvPr/>
         </p:nvSpPr>
         <p:spPr>
           <a:xfrm>
-            <a:off x="640080" y="1115568"/>
-            <a:ext cx="10908792" cy="0"/>
-          </a:xfrm>
-          <a:prstGeom prst="line">
-            <a:avLst/>
-          </a:prstGeom>
-          <a:noFill/>
-          <a:ln w="19050">
+            <a:off x="0" y="0"/>
+            <a:ext cx="12188952" cy="1051560"/>
+          </a:xfrm>
+          <a:prstGeom prst="rect">
+            <a:avLst/>
+          </a:prstGeom>
+          <a:solidFill>
+            <a:srgbClr val="1F3864"/>
+          </a:solidFill>
+          <a:ln w="12700">
             <a:solidFill>
-              <a:srgbClr val="BDD7EE"/>
+              <a:srgbClr val="1F3864"/>
             </a:solidFill>
             <a:prstDash val="solid"/>
           </a:ln>
@@ -5461,7 +6079,71 @@
       </p:sp>
       <p:sp>
         <p:nvSpPr>
+          <p:cNvPr id="3" name="Shape 1"/>
+          <p:cNvSpPr/>
+          <p:nvPr/>
+        </p:nvSpPr>
+        <p:spPr>
+          <a:xfrm>
+            <a:off x="0" y="1051560"/>
+            <a:ext cx="12188952" cy="64008"/>
+          </a:xfrm>
+          <a:prstGeom prst="rect">
+            <a:avLst/>
+          </a:prstGeom>
+          <a:solidFill>
+            <a:srgbClr val="ED7D31"/>
+          </a:solidFill>
+          <a:ln w="12700">
+            <a:solidFill>
+              <a:srgbClr val="ED7D31"/>
+            </a:solidFill>
+            <a:prstDash val="solid"/>
+          </a:ln>
+        </p:spPr>
+      </p:sp>
+      <p:sp>
+        <p:nvSpPr>
           <p:cNvPr id="4" name="Text 2"/>
+          <p:cNvSpPr txBox="1"/>
+          <p:nvPr/>
+        </p:nvSpPr>
+        <p:spPr>
+          <a:xfrm>
+            <a:off x="640080" y="137160"/>
+            <a:ext cx="10908792" cy="777240"/>
+          </a:xfrm>
+          <a:prstGeom prst="rect">
+            <a:avLst/>
+          </a:prstGeom>
+          <a:noFill/>
+          <a:ln/>
+        </p:spPr>
+        <p:txBody>
+          <a:bodyPr wrap="square" lIns="0" tIns="0" rIns="0" bIns="0" rtlCol="0" anchor="ctr"/>
+          <a:lstStyle/>
+          <a:p>
+            <a:pPr rtl="1" algn="r" indent="0" marL="0">
+              <a:buNone/>
+            </a:pPr>
+            <a:r>
+              <a:rPr lang="he-IL" altLang="en-US" sz="2800" b="1" dirty="0">
+                <a:solidFill>
+                  <a:srgbClr val="FFFFFF"/>
+                </a:solidFill>
+                <a:latin typeface="David" pitchFamily="34" charset="0"/>
+                <a:ea typeface="David" pitchFamily="34" charset="-122"/>
+                <a:cs typeface="David" pitchFamily="34" charset="-120"/>
+              </a:rPr>
+              <a:t>מבוא: הצגת הנושא</a:t>
+            </a:r>
+            <a:endParaRPr lang="he-IL" sz="2800" dirty="0"/>
+          </a:p>
+        </p:txBody>
+      </p:sp>
+      <p:sp>
+        <p:nvSpPr>
+          <p:cNvPr id="5" name="Text 3"/>
           <p:cNvSpPr txBox="1"/>
           <p:nvPr/>
         </p:nvSpPr>
@@ -5503,7 +6185,7 @@
       </p:sp>
       <p:sp>
         <p:nvSpPr>
-          <p:cNvPr id="5" name="Text 3"/>
+          <p:cNvPr id="6" name="Text 4"/>
           <p:cNvSpPr txBox="1"/>
           <p:nvPr/>
         </p:nvSpPr>
@@ -5545,7 +6227,30 @@
       </p:sp>
       <p:sp>
         <p:nvSpPr>
-          <p:cNvPr id="6" name="Text 4"/>
+          <p:cNvPr id="7" name="Shape 5"/>
+          <p:cNvSpPr/>
+          <p:nvPr/>
+        </p:nvSpPr>
+        <p:spPr>
+          <a:xfrm>
+            <a:off x="640080" y="6355080"/>
+            <a:ext cx="10908792" cy="0"/>
+          </a:xfrm>
+          <a:prstGeom prst="line">
+            <a:avLst/>
+          </a:prstGeom>
+          <a:noFill/>
+          <a:ln w="12700">
+            <a:solidFill>
+              <a:srgbClr val="ED7D31"/>
+            </a:solidFill>
+            <a:prstDash val="solid"/>
+          </a:ln>
+        </p:spPr>
+      </p:sp>
+      <p:sp>
+        <p:nvSpPr>
+          <p:cNvPr id="8" name="Text 6"/>
           <p:cNvSpPr txBox="1"/>
           <p:nvPr/>
         </p:nvSpPr>
@@ -5570,7 +6275,7 @@
             <a:r>
               <a:rPr lang="he-IL" altLang="en-US" sz="1000" dirty="0">
                 <a:solidFill>
-                  <a:srgbClr val="595959"/>
+                  <a:srgbClr val="1F3864"/>
                 </a:solidFill>
                 <a:latin typeface="David" pitchFamily="34" charset="0"/>
                 <a:ea typeface="David" pitchFamily="34" charset="-122"/>
@@ -5584,7 +6289,7 @@
       </p:sp>
       <p:sp>
         <p:nvSpPr>
-          <p:cNvPr id="7" name="Text 5"/>
+          <p:cNvPr id="9" name="Text 7"/>
           <p:cNvSpPr txBox="1"/>
           <p:nvPr/>
         </p:nvSpPr>
@@ -5607,9 +6312,9 @@
               <a:buNone/>
             </a:pPr>
             <a:r>
-              <a:rPr lang="he-IL" altLang="en-US" sz="1000" dirty="0">
-                <a:solidFill>
-                  <a:srgbClr val="595959"/>
+              <a:rPr lang="he-IL" altLang="en-US" sz="1100" b="1" dirty="0">
+                <a:solidFill>
+                  <a:srgbClr val="ED7D31"/>
                 </a:solidFill>
                 <a:latin typeface="David" pitchFamily="34" charset="0"/>
                 <a:ea typeface="David" pitchFamily="34" charset="-122"/>
@@ -5617,7 +6322,7 @@
               </a:rPr>
               <a:t>2</a:t>
             </a:r>
-            <a:endParaRPr lang="he-IL" sz="1000" dirty="0"/>
+            <a:endParaRPr lang="he-IL" sz="1100" dirty="0"/>
           </a:p>
         </p:txBody>
       </p:sp>
@@ -5632,6 +6337,13 @@
 <file path=ppt/slides/slide3.xml><?xml version="1.0" encoding="utf-8"?>
 <p:sld xmlns:a="http://schemas.openxmlformats.org/drawingml/2006/main" xmlns:r="http://schemas.openxmlformats.org/officeDocument/2006/relationships" xmlns:p="http://schemas.openxmlformats.org/presentationml/2006/main">
   <p:cSld name="Slide 3">
+    <p:bg>
+      <p:bgPr>
+        <a:solidFill>
+          <a:srgbClr val="FFFFFF"/>
+        </a:solidFill>
+      </p:bgPr>
+    </p:bg>
     <p:spTree>
       <p:nvGrpSpPr>
         <p:cNvPr id="1" name=""/>
@@ -5648,61 +6360,24 @@
       </p:grpSpPr>
       <p:sp>
         <p:nvSpPr>
-          <p:cNvPr id="2" name="Text 0"/>
-          <p:cNvSpPr txBox="1"/>
-          <p:nvPr/>
-        </p:nvSpPr>
-        <p:spPr>
-          <a:xfrm>
-            <a:off x="640080" y="365760"/>
-            <a:ext cx="10908792" cy="731520"/>
-          </a:xfrm>
-          <a:prstGeom prst="rect">
-            <a:avLst/>
-          </a:prstGeom>
-          <a:noFill/>
-          <a:ln/>
-        </p:spPr>
-        <p:txBody>
-          <a:bodyPr wrap="square" lIns="0" tIns="0" rIns="0" bIns="0" rtlCol="0" anchor="ctr"/>
-          <a:lstStyle/>
-          <a:p>
-            <a:pPr rtl="1" algn="r" indent="0" marL="0">
-              <a:buNone/>
-            </a:pPr>
-            <a:r>
-              <a:rPr lang="he-IL" altLang="en-US" sz="2800" b="1" dirty="0">
-                <a:solidFill>
-                  <a:srgbClr val="000000"/>
-                </a:solidFill>
-                <a:latin typeface="David" pitchFamily="34" charset="0"/>
-                <a:ea typeface="David" pitchFamily="34" charset="-122"/>
-                <a:cs typeface="David" pitchFamily="34" charset="-120"/>
-              </a:rPr>
-              <a:t>מבוא: הצגת המאמר</a:t>
-            </a:r>
-            <a:endParaRPr lang="he-IL" sz="2800" dirty="0"/>
-          </a:p>
-        </p:txBody>
-      </p:sp>
-      <p:sp>
-        <p:nvSpPr>
-          <p:cNvPr id="3" name="Shape 1"/>
+          <p:cNvPr id="2" name="Shape 0"/>
           <p:cNvSpPr/>
           <p:nvPr/>
         </p:nvSpPr>
         <p:spPr>
           <a:xfrm>
-            <a:off x="640080" y="1115568"/>
-            <a:ext cx="10908792" cy="0"/>
-          </a:xfrm>
-          <a:prstGeom prst="line">
-            <a:avLst/>
-          </a:prstGeom>
-          <a:noFill/>
-          <a:ln w="19050">
+            <a:off x="0" y="0"/>
+            <a:ext cx="12188952" cy="1051560"/>
+          </a:xfrm>
+          <a:prstGeom prst="rect">
+            <a:avLst/>
+          </a:prstGeom>
+          <a:solidFill>
+            <a:srgbClr val="1F3864"/>
+          </a:solidFill>
+          <a:ln w="12700">
             <a:solidFill>
-              <a:srgbClr val="BDD7EE"/>
+              <a:srgbClr val="1F3864"/>
             </a:solidFill>
             <a:prstDash val="solid"/>
           </a:ln>
@@ -5710,7 +6385,71 @@
       </p:sp>
       <p:sp>
         <p:nvSpPr>
+          <p:cNvPr id="3" name="Shape 1"/>
+          <p:cNvSpPr/>
+          <p:nvPr/>
+        </p:nvSpPr>
+        <p:spPr>
+          <a:xfrm>
+            <a:off x="0" y="1051560"/>
+            <a:ext cx="12188952" cy="64008"/>
+          </a:xfrm>
+          <a:prstGeom prst="rect">
+            <a:avLst/>
+          </a:prstGeom>
+          <a:solidFill>
+            <a:srgbClr val="ED7D31"/>
+          </a:solidFill>
+          <a:ln w="12700">
+            <a:solidFill>
+              <a:srgbClr val="ED7D31"/>
+            </a:solidFill>
+            <a:prstDash val="solid"/>
+          </a:ln>
+        </p:spPr>
+      </p:sp>
+      <p:sp>
+        <p:nvSpPr>
           <p:cNvPr id="4" name="Text 2"/>
+          <p:cNvSpPr txBox="1"/>
+          <p:nvPr/>
+        </p:nvSpPr>
+        <p:spPr>
+          <a:xfrm>
+            <a:off x="640080" y="137160"/>
+            <a:ext cx="10908792" cy="777240"/>
+          </a:xfrm>
+          <a:prstGeom prst="rect">
+            <a:avLst/>
+          </a:prstGeom>
+          <a:noFill/>
+          <a:ln/>
+        </p:spPr>
+        <p:txBody>
+          <a:bodyPr wrap="square" lIns="0" tIns="0" rIns="0" bIns="0" rtlCol="0" anchor="ctr"/>
+          <a:lstStyle/>
+          <a:p>
+            <a:pPr rtl="1" algn="r" indent="0" marL="0">
+              <a:buNone/>
+            </a:pPr>
+            <a:r>
+              <a:rPr lang="he-IL" altLang="en-US" sz="2800" b="1" dirty="0">
+                <a:solidFill>
+                  <a:srgbClr val="FFFFFF"/>
+                </a:solidFill>
+                <a:latin typeface="David" pitchFamily="34" charset="0"/>
+                <a:ea typeface="David" pitchFamily="34" charset="-122"/>
+                <a:cs typeface="David" pitchFamily="34" charset="-120"/>
+              </a:rPr>
+              <a:t>מבוא: הצגת המאמר</a:t>
+            </a:r>
+            <a:endParaRPr lang="he-IL" sz="2800" dirty="0"/>
+          </a:p>
+        </p:txBody>
+      </p:sp>
+      <p:sp>
+        <p:nvSpPr>
+          <p:cNvPr id="5" name="Text 3"/>
           <p:cNvSpPr txBox="1"/>
           <p:nvPr/>
         </p:nvSpPr>
@@ -5735,7 +6474,7 @@
             <a:r>
               <a:rPr lang="en-US" sz="1300" i="1" dirty="0">
                 <a:solidFill>
-                  <a:srgbClr val="000000"/>
+                  <a:srgbClr val="1F3864"/>
                 </a:solidFill>
                 <a:latin typeface="Times New Roman" pitchFamily="34" charset="0"/>
                 <a:ea typeface="Times New Roman" pitchFamily="34" charset="-122"/>
@@ -5749,7 +6488,7 @@
       </p:sp>
       <p:sp>
         <p:nvSpPr>
-          <p:cNvPr id="5" name="Text 3"/>
+          <p:cNvPr id="6" name="Text 4"/>
           <p:cNvSpPr txBox="1"/>
           <p:nvPr/>
         </p:nvSpPr>
@@ -5791,7 +6530,7 @@
       </p:sp>
       <p:sp>
         <p:nvSpPr>
-          <p:cNvPr id="6" name="Text 4"/>
+          <p:cNvPr id="7" name="Text 5"/>
           <p:cNvSpPr txBox="1"/>
           <p:nvPr/>
         </p:nvSpPr>
@@ -5833,7 +6572,30 @@
       </p:sp>
       <p:sp>
         <p:nvSpPr>
-          <p:cNvPr id="7" name="Text 5"/>
+          <p:cNvPr id="8" name="Shape 6"/>
+          <p:cNvSpPr/>
+          <p:nvPr/>
+        </p:nvSpPr>
+        <p:spPr>
+          <a:xfrm>
+            <a:off x="640080" y="6355080"/>
+            <a:ext cx="10908792" cy="0"/>
+          </a:xfrm>
+          <a:prstGeom prst="line">
+            <a:avLst/>
+          </a:prstGeom>
+          <a:noFill/>
+          <a:ln w="12700">
+            <a:solidFill>
+              <a:srgbClr val="ED7D31"/>
+            </a:solidFill>
+            <a:prstDash val="solid"/>
+          </a:ln>
+        </p:spPr>
+      </p:sp>
+      <p:sp>
+        <p:nvSpPr>
+          <p:cNvPr id="9" name="Text 7"/>
           <p:cNvSpPr txBox="1"/>
           <p:nvPr/>
         </p:nvSpPr>
@@ -5858,7 +6620,7 @@
             <a:r>
               <a:rPr lang="he-IL" altLang="en-US" sz="1000" dirty="0">
                 <a:solidFill>
-                  <a:srgbClr val="595959"/>
+                  <a:srgbClr val="1F3864"/>
                 </a:solidFill>
                 <a:latin typeface="David" pitchFamily="34" charset="0"/>
                 <a:ea typeface="David" pitchFamily="34" charset="-122"/>
@@ -5872,7 +6634,7 @@
       </p:sp>
       <p:sp>
         <p:nvSpPr>
-          <p:cNvPr id="8" name="Text 6"/>
+          <p:cNvPr id="10" name="Text 8"/>
           <p:cNvSpPr txBox="1"/>
           <p:nvPr/>
         </p:nvSpPr>
@@ -5895,9 +6657,9 @@
               <a:buNone/>
             </a:pPr>
             <a:r>
-              <a:rPr lang="he-IL" altLang="en-US" sz="1000" dirty="0">
-                <a:solidFill>
-                  <a:srgbClr val="595959"/>
+              <a:rPr lang="he-IL" altLang="en-US" sz="1100" b="1" dirty="0">
+                <a:solidFill>
+                  <a:srgbClr val="ED7D31"/>
                 </a:solidFill>
                 <a:latin typeface="David" pitchFamily="34" charset="0"/>
                 <a:ea typeface="David" pitchFamily="34" charset="-122"/>
@@ -5905,7 +6667,7 @@
               </a:rPr>
               <a:t>3</a:t>
             </a:r>
-            <a:endParaRPr lang="he-IL" sz="1000" dirty="0"/>
+            <a:endParaRPr lang="he-IL" sz="1100" dirty="0"/>
           </a:p>
         </p:txBody>
       </p:sp>
@@ -5920,6 +6682,13 @@
 <file path=ppt/slides/slide4.xml><?xml version="1.0" encoding="utf-8"?>
 <p:sld xmlns:a="http://schemas.openxmlformats.org/drawingml/2006/main" xmlns:r="http://schemas.openxmlformats.org/officeDocument/2006/relationships" xmlns:p="http://schemas.openxmlformats.org/presentationml/2006/main">
   <p:cSld name="Slide 4">
+    <p:bg>
+      <p:bgPr>
+        <a:solidFill>
+          <a:srgbClr val="FFFFFF"/>
+        </a:solidFill>
+      </p:bgPr>
+    </p:bg>
     <p:spTree>
       <p:nvGrpSpPr>
         <p:cNvPr id="1" name=""/>
@@ -5936,61 +6705,24 @@
       </p:grpSpPr>
       <p:sp>
         <p:nvSpPr>
-          <p:cNvPr id="2" name="Text 0"/>
-          <p:cNvSpPr txBox="1"/>
-          <p:nvPr/>
-        </p:nvSpPr>
-        <p:spPr>
-          <a:xfrm>
-            <a:off x="640080" y="365760"/>
-            <a:ext cx="10908792" cy="731520"/>
-          </a:xfrm>
-          <a:prstGeom prst="rect">
-            <a:avLst/>
-          </a:prstGeom>
-          <a:noFill/>
-          <a:ln/>
-        </p:spPr>
-        <p:txBody>
-          <a:bodyPr wrap="square" lIns="0" tIns="0" rIns="0" bIns="0" rtlCol="0" anchor="ctr"/>
-          <a:lstStyle/>
-          <a:p>
-            <a:pPr rtl="1" algn="r" indent="0" marL="0">
-              <a:buNone/>
-            </a:pPr>
-            <a:r>
-              <a:rPr lang="he-IL" altLang="en-US" sz="2800" b="1" dirty="0">
-                <a:solidFill>
-                  <a:srgbClr val="000000"/>
-                </a:solidFill>
-                <a:latin typeface="David" pitchFamily="34" charset="0"/>
-                <a:ea typeface="David" pitchFamily="34" charset="-122"/>
-                <a:cs typeface="David" pitchFamily="34" charset="-120"/>
-              </a:rPr>
-              <a:t>תמצית המאמר: הרקע התיאורטי</a:t>
-            </a:r>
-            <a:endParaRPr lang="he-IL" sz="2800" dirty="0"/>
-          </a:p>
-        </p:txBody>
-      </p:sp>
-      <p:sp>
-        <p:nvSpPr>
-          <p:cNvPr id="3" name="Shape 1"/>
+          <p:cNvPr id="2" name="Shape 0"/>
           <p:cNvSpPr/>
           <p:nvPr/>
         </p:nvSpPr>
         <p:spPr>
           <a:xfrm>
-            <a:off x="640080" y="1115568"/>
-            <a:ext cx="10908792" cy="0"/>
-          </a:xfrm>
-          <a:prstGeom prst="line">
-            <a:avLst/>
-          </a:prstGeom>
-          <a:noFill/>
-          <a:ln w="19050">
+            <a:off x="0" y="0"/>
+            <a:ext cx="12188952" cy="1051560"/>
+          </a:xfrm>
+          <a:prstGeom prst="rect">
+            <a:avLst/>
+          </a:prstGeom>
+          <a:solidFill>
+            <a:srgbClr val="1F3864"/>
+          </a:solidFill>
+          <a:ln w="12700">
             <a:solidFill>
-              <a:srgbClr val="BDD7EE"/>
+              <a:srgbClr val="1F3864"/>
             </a:solidFill>
             <a:prstDash val="solid"/>
           </a:ln>
@@ -5998,7 +6730,71 @@
       </p:sp>
       <p:sp>
         <p:nvSpPr>
+          <p:cNvPr id="3" name="Shape 1"/>
+          <p:cNvSpPr/>
+          <p:nvPr/>
+        </p:nvSpPr>
+        <p:spPr>
+          <a:xfrm>
+            <a:off x="0" y="1051560"/>
+            <a:ext cx="12188952" cy="64008"/>
+          </a:xfrm>
+          <a:prstGeom prst="rect">
+            <a:avLst/>
+          </a:prstGeom>
+          <a:solidFill>
+            <a:srgbClr val="ED7D31"/>
+          </a:solidFill>
+          <a:ln w="12700">
+            <a:solidFill>
+              <a:srgbClr val="ED7D31"/>
+            </a:solidFill>
+            <a:prstDash val="solid"/>
+          </a:ln>
+        </p:spPr>
+      </p:sp>
+      <p:sp>
+        <p:nvSpPr>
           <p:cNvPr id="4" name="Text 2"/>
+          <p:cNvSpPr txBox="1"/>
+          <p:nvPr/>
+        </p:nvSpPr>
+        <p:spPr>
+          <a:xfrm>
+            <a:off x="640080" y="137160"/>
+            <a:ext cx="10908792" cy="777240"/>
+          </a:xfrm>
+          <a:prstGeom prst="rect">
+            <a:avLst/>
+          </a:prstGeom>
+          <a:noFill/>
+          <a:ln/>
+        </p:spPr>
+        <p:txBody>
+          <a:bodyPr wrap="square" lIns="0" tIns="0" rIns="0" bIns="0" rtlCol="0" anchor="ctr"/>
+          <a:lstStyle/>
+          <a:p>
+            <a:pPr rtl="1" algn="r" indent="0" marL="0">
+              <a:buNone/>
+            </a:pPr>
+            <a:r>
+              <a:rPr lang="he-IL" altLang="en-US" sz="2800" b="1" dirty="0">
+                <a:solidFill>
+                  <a:srgbClr val="FFFFFF"/>
+                </a:solidFill>
+                <a:latin typeface="David" pitchFamily="34" charset="0"/>
+                <a:ea typeface="David" pitchFamily="34" charset="-122"/>
+                <a:cs typeface="David" pitchFamily="34" charset="-120"/>
+              </a:rPr>
+              <a:t>תמצית המאמר: הרקע התיאורטי</a:t>
+            </a:r>
+            <a:endParaRPr lang="he-IL" sz="2800" dirty="0"/>
+          </a:p>
+        </p:txBody>
+      </p:sp>
+      <p:sp>
+        <p:nvSpPr>
+          <p:cNvPr id="5" name="Text 3"/>
           <p:cNvSpPr txBox="1"/>
           <p:nvPr/>
         </p:nvSpPr>
@@ -6040,26 +6836,49 @@
       </p:sp>
       <p:sp>
         <p:nvSpPr>
-          <p:cNvPr id="5" name="Shape 3"/>
+          <p:cNvPr id="6" name="Shape 4"/>
           <p:cNvSpPr/>
           <p:nvPr/>
         </p:nvSpPr>
         <p:spPr>
           <a:xfrm>
-            <a:off x="8074152" y="3703320"/>
-            <a:ext cx="3474720" cy="1600200"/>
-          </a:xfrm>
-          <a:prstGeom prst="roundRect">
-            <a:avLst>
-              <a:gd name="adj" fmla="val 4571"/>
-            </a:avLst>
+            <a:off x="8074152" y="3657600"/>
+            <a:ext cx="3474720" cy="1691640"/>
+          </a:xfrm>
+          <a:prstGeom prst="rect">
+            <a:avLst/>
           </a:prstGeom>
           <a:solidFill>
-            <a:srgbClr val="F3F8FD"/>
+            <a:srgbClr val="FFFFFF"/>
+          </a:solidFill>
+          <a:ln w="15875">
+            <a:solidFill>
+              <a:srgbClr val="1F3864"/>
+            </a:solidFill>
+            <a:prstDash val="solid"/>
+          </a:ln>
+        </p:spPr>
+      </p:sp>
+      <p:sp>
+        <p:nvSpPr>
+          <p:cNvPr id="7" name="Shape 5"/>
+          <p:cNvSpPr/>
+          <p:nvPr/>
+        </p:nvSpPr>
+        <p:spPr>
+          <a:xfrm>
+            <a:off x="8074152" y="3657600"/>
+            <a:ext cx="3474720" cy="502920"/>
+          </a:xfrm>
+          <a:prstGeom prst="rect">
+            <a:avLst/>
+          </a:prstGeom>
+          <a:solidFill>
+            <a:srgbClr val="1F3864"/>
           </a:solidFill>
           <a:ln w="12700">
             <a:solidFill>
-              <a:srgbClr val="BDD7EE"/>
+              <a:srgbClr val="1F3864"/>
             </a:solidFill>
             <a:prstDash val="solid"/>
           </a:ln>
@@ -6067,14 +6886,39 @@
       </p:sp>
       <p:sp>
         <p:nvSpPr>
-          <p:cNvPr id="6" name="Text 4"/>
-          <p:cNvSpPr txBox="1"/>
-          <p:nvPr/>
-        </p:nvSpPr>
-        <p:spPr>
-          <a:xfrm>
-            <a:off x="8211312" y="3813048"/>
-            <a:ext cx="3200400" cy="411480"/>
+          <p:cNvPr id="8" name="Shape 6"/>
+          <p:cNvSpPr/>
+          <p:nvPr/>
+        </p:nvSpPr>
+        <p:spPr>
+          <a:xfrm>
+            <a:off x="8074152" y="4160520"/>
+            <a:ext cx="3474720" cy="45720"/>
+          </a:xfrm>
+          <a:prstGeom prst="rect">
+            <a:avLst/>
+          </a:prstGeom>
+          <a:solidFill>
+            <a:srgbClr val="ED7D31"/>
+          </a:solidFill>
+          <a:ln w="12700">
+            <a:solidFill>
+              <a:srgbClr val="ED7D31"/>
+            </a:solidFill>
+            <a:prstDash val="solid"/>
+          </a:ln>
+        </p:spPr>
+      </p:sp>
+      <p:sp>
+        <p:nvSpPr>
+          <p:cNvPr id="9" name="Text 7"/>
+          <p:cNvSpPr txBox="1"/>
+          <p:nvPr/>
+        </p:nvSpPr>
+        <p:spPr>
+          <a:xfrm>
+            <a:off x="8165592" y="3657600"/>
+            <a:ext cx="3291840" cy="502920"/>
           </a:xfrm>
           <a:prstGeom prst="rect">
             <a:avLst/>
@@ -6092,7 +6936,7 @@
             <a:r>
               <a:rPr lang="he-IL" altLang="en-US" sz="1600" b="1" dirty="0">
                 <a:solidFill>
-                  <a:srgbClr val="000000"/>
+                  <a:srgbClr val="FFFFFF"/>
                 </a:solidFill>
                 <a:latin typeface="David" pitchFamily="34" charset="0"/>
                 <a:ea typeface="David" pitchFamily="34" charset="-122"/>
@@ -6106,13 +6950,13 @@
       </p:sp>
       <p:sp>
         <p:nvSpPr>
-          <p:cNvPr id="7" name="Text 5"/>
-          <p:cNvSpPr txBox="1"/>
-          <p:nvPr/>
-        </p:nvSpPr>
-        <p:spPr>
-          <a:xfrm>
-            <a:off x="8211312" y="4251960"/>
+          <p:cNvPr id="10" name="Text 8"/>
+          <p:cNvSpPr txBox="1"/>
+          <p:nvPr/>
+        </p:nvSpPr>
+        <p:spPr>
+          <a:xfrm>
+            <a:off x="8211312" y="4297680"/>
             <a:ext cx="3200400" cy="960120"/>
           </a:xfrm>
           <a:prstGeom prst="rect">
@@ -6148,26 +6992,49 @@
       </p:sp>
       <p:sp>
         <p:nvSpPr>
-          <p:cNvPr id="8" name="Shape 6"/>
+          <p:cNvPr id="11" name="Shape 9"/>
           <p:cNvSpPr/>
           <p:nvPr/>
         </p:nvSpPr>
         <p:spPr>
           <a:xfrm>
-            <a:off x="4357116" y="3703320"/>
-            <a:ext cx="3474720" cy="1600200"/>
-          </a:xfrm>
-          <a:prstGeom prst="roundRect">
-            <a:avLst>
-              <a:gd name="adj" fmla="val 4571"/>
-            </a:avLst>
+            <a:off x="4357116" y="3657600"/>
+            <a:ext cx="3474720" cy="1691640"/>
+          </a:xfrm>
+          <a:prstGeom prst="rect">
+            <a:avLst/>
           </a:prstGeom>
           <a:solidFill>
-            <a:srgbClr val="F3F8FD"/>
+            <a:srgbClr val="FFFFFF"/>
+          </a:solidFill>
+          <a:ln w="15875">
+            <a:solidFill>
+              <a:srgbClr val="1F3864"/>
+            </a:solidFill>
+            <a:prstDash val="solid"/>
+          </a:ln>
+        </p:spPr>
+      </p:sp>
+      <p:sp>
+        <p:nvSpPr>
+          <p:cNvPr id="12" name="Shape 10"/>
+          <p:cNvSpPr/>
+          <p:nvPr/>
+        </p:nvSpPr>
+        <p:spPr>
+          <a:xfrm>
+            <a:off x="4357116" y="3657600"/>
+            <a:ext cx="3474720" cy="502920"/>
+          </a:xfrm>
+          <a:prstGeom prst="rect">
+            <a:avLst/>
+          </a:prstGeom>
+          <a:solidFill>
+            <a:srgbClr val="1F3864"/>
           </a:solidFill>
           <a:ln w="12700">
             <a:solidFill>
-              <a:srgbClr val="BDD7EE"/>
+              <a:srgbClr val="1F3864"/>
             </a:solidFill>
             <a:prstDash val="solid"/>
           </a:ln>
@@ -6175,14 +7042,39 @@
       </p:sp>
       <p:sp>
         <p:nvSpPr>
-          <p:cNvPr id="9" name="Text 7"/>
-          <p:cNvSpPr txBox="1"/>
-          <p:nvPr/>
-        </p:nvSpPr>
-        <p:spPr>
-          <a:xfrm>
-            <a:off x="4494276" y="3813048"/>
-            <a:ext cx="3200400" cy="411480"/>
+          <p:cNvPr id="13" name="Shape 11"/>
+          <p:cNvSpPr/>
+          <p:nvPr/>
+        </p:nvSpPr>
+        <p:spPr>
+          <a:xfrm>
+            <a:off x="4357116" y="4160520"/>
+            <a:ext cx="3474720" cy="45720"/>
+          </a:xfrm>
+          <a:prstGeom prst="rect">
+            <a:avLst/>
+          </a:prstGeom>
+          <a:solidFill>
+            <a:srgbClr val="ED7D31"/>
+          </a:solidFill>
+          <a:ln w="12700">
+            <a:solidFill>
+              <a:srgbClr val="ED7D31"/>
+            </a:solidFill>
+            <a:prstDash val="solid"/>
+          </a:ln>
+        </p:spPr>
+      </p:sp>
+      <p:sp>
+        <p:nvSpPr>
+          <p:cNvPr id="14" name="Text 12"/>
+          <p:cNvSpPr txBox="1"/>
+          <p:nvPr/>
+        </p:nvSpPr>
+        <p:spPr>
+          <a:xfrm>
+            <a:off x="4448556" y="3657600"/>
+            <a:ext cx="3291840" cy="502920"/>
           </a:xfrm>
           <a:prstGeom prst="rect">
             <a:avLst/>
@@ -6200,7 +7092,7 @@
             <a:r>
               <a:rPr lang="he-IL" altLang="en-US" sz="1600" b="1" dirty="0">
                 <a:solidFill>
-                  <a:srgbClr val="000000"/>
+                  <a:srgbClr val="FFFFFF"/>
                 </a:solidFill>
                 <a:latin typeface="David" pitchFamily="34" charset="0"/>
                 <a:ea typeface="David" pitchFamily="34" charset="-122"/>
@@ -6214,13 +7106,13 @@
       </p:sp>
       <p:sp>
         <p:nvSpPr>
-          <p:cNvPr id="10" name="Text 8"/>
-          <p:cNvSpPr txBox="1"/>
-          <p:nvPr/>
-        </p:nvSpPr>
-        <p:spPr>
-          <a:xfrm>
-            <a:off x="4494276" y="4251960"/>
+          <p:cNvPr id="15" name="Text 13"/>
+          <p:cNvSpPr txBox="1"/>
+          <p:nvPr/>
+        </p:nvSpPr>
+        <p:spPr>
+          <a:xfrm>
+            <a:off x="4494276" y="4297680"/>
             <a:ext cx="3200400" cy="960120"/>
           </a:xfrm>
           <a:prstGeom prst="rect">
@@ -6256,26 +7148,49 @@
       </p:sp>
       <p:sp>
         <p:nvSpPr>
-          <p:cNvPr id="11" name="Shape 9"/>
+          <p:cNvPr id="16" name="Shape 14"/>
           <p:cNvSpPr/>
           <p:nvPr/>
         </p:nvSpPr>
         <p:spPr>
           <a:xfrm>
-            <a:off x="640080" y="3703320"/>
-            <a:ext cx="3474720" cy="1600200"/>
-          </a:xfrm>
-          <a:prstGeom prst="roundRect">
-            <a:avLst>
-              <a:gd name="adj" fmla="val 4571"/>
-            </a:avLst>
+            <a:off x="640080" y="3657600"/>
+            <a:ext cx="3474720" cy="1691640"/>
+          </a:xfrm>
+          <a:prstGeom prst="rect">
+            <a:avLst/>
           </a:prstGeom>
           <a:solidFill>
-            <a:srgbClr val="F3F8FD"/>
+            <a:srgbClr val="FFFFFF"/>
+          </a:solidFill>
+          <a:ln w="15875">
+            <a:solidFill>
+              <a:srgbClr val="1F3864"/>
+            </a:solidFill>
+            <a:prstDash val="solid"/>
+          </a:ln>
+        </p:spPr>
+      </p:sp>
+      <p:sp>
+        <p:nvSpPr>
+          <p:cNvPr id="17" name="Shape 15"/>
+          <p:cNvSpPr/>
+          <p:nvPr/>
+        </p:nvSpPr>
+        <p:spPr>
+          <a:xfrm>
+            <a:off x="640080" y="3657600"/>
+            <a:ext cx="3474720" cy="502920"/>
+          </a:xfrm>
+          <a:prstGeom prst="rect">
+            <a:avLst/>
+          </a:prstGeom>
+          <a:solidFill>
+            <a:srgbClr val="1F3864"/>
           </a:solidFill>
           <a:ln w="12700">
             <a:solidFill>
-              <a:srgbClr val="BDD7EE"/>
+              <a:srgbClr val="1F3864"/>
             </a:solidFill>
             <a:prstDash val="solid"/>
           </a:ln>
@@ -6283,14 +7198,39 @@
       </p:sp>
       <p:sp>
         <p:nvSpPr>
-          <p:cNvPr id="12" name="Text 10"/>
-          <p:cNvSpPr txBox="1"/>
-          <p:nvPr/>
-        </p:nvSpPr>
-        <p:spPr>
-          <a:xfrm>
-            <a:off x="777240" y="3813048"/>
-            <a:ext cx="3200400" cy="411480"/>
+          <p:cNvPr id="18" name="Shape 16"/>
+          <p:cNvSpPr/>
+          <p:nvPr/>
+        </p:nvSpPr>
+        <p:spPr>
+          <a:xfrm>
+            <a:off x="640080" y="4160520"/>
+            <a:ext cx="3474720" cy="45720"/>
+          </a:xfrm>
+          <a:prstGeom prst="rect">
+            <a:avLst/>
+          </a:prstGeom>
+          <a:solidFill>
+            <a:srgbClr val="ED7D31"/>
+          </a:solidFill>
+          <a:ln w="12700">
+            <a:solidFill>
+              <a:srgbClr val="ED7D31"/>
+            </a:solidFill>
+            <a:prstDash val="solid"/>
+          </a:ln>
+        </p:spPr>
+      </p:sp>
+      <p:sp>
+        <p:nvSpPr>
+          <p:cNvPr id="19" name="Text 17"/>
+          <p:cNvSpPr txBox="1"/>
+          <p:nvPr/>
+        </p:nvSpPr>
+        <p:spPr>
+          <a:xfrm>
+            <a:off x="731520" y="3657600"/>
+            <a:ext cx="3291840" cy="502920"/>
           </a:xfrm>
           <a:prstGeom prst="rect">
             <a:avLst/>
@@ -6308,7 +7248,7 @@
             <a:r>
               <a:rPr lang="he-IL" altLang="en-US" sz="1600" b="1" dirty="0">
                 <a:solidFill>
-                  <a:srgbClr val="000000"/>
+                  <a:srgbClr val="FFFFFF"/>
                 </a:solidFill>
                 <a:latin typeface="David" pitchFamily="34" charset="0"/>
                 <a:ea typeface="David" pitchFamily="34" charset="-122"/>
@@ -6322,13 +7262,13 @@
       </p:sp>
       <p:sp>
         <p:nvSpPr>
-          <p:cNvPr id="13" name="Text 11"/>
-          <p:cNvSpPr txBox="1"/>
-          <p:nvPr/>
-        </p:nvSpPr>
-        <p:spPr>
-          <a:xfrm>
-            <a:off x="777240" y="4251960"/>
+          <p:cNvPr id="20" name="Text 18"/>
+          <p:cNvSpPr txBox="1"/>
+          <p:nvPr/>
+        </p:nvSpPr>
+        <p:spPr>
+          <a:xfrm>
+            <a:off x="777240" y="4297680"/>
             <a:ext cx="3200400" cy="960120"/>
           </a:xfrm>
           <a:prstGeom prst="rect">
@@ -6364,13 +7304,13 @@
       </p:sp>
       <p:sp>
         <p:nvSpPr>
-          <p:cNvPr id="14" name="Text 12"/>
-          <p:cNvSpPr txBox="1"/>
-          <p:nvPr/>
-        </p:nvSpPr>
-        <p:spPr>
-          <a:xfrm>
-            <a:off x="640080" y="5440680"/>
+          <p:cNvPr id="21" name="Text 19"/>
+          <p:cNvSpPr txBox="1"/>
+          <p:nvPr/>
+        </p:nvSpPr>
+        <p:spPr>
+          <a:xfrm>
+            <a:off x="640080" y="5486400"/>
             <a:ext cx="10908792" cy="320040"/>
           </a:xfrm>
           <a:prstGeom prst="rect">
@@ -6389,7 +7329,7 @@
             <a:r>
               <a:rPr lang="he-IL" altLang="en-US" sz="1100" dirty="0">
                 <a:solidFill>
-                  <a:srgbClr val="595959"/>
+                  <a:srgbClr val="1F3864"/>
                 </a:solidFill>
                 <a:latin typeface="David" pitchFamily="34" charset="0"/>
                 <a:ea typeface="David" pitchFamily="34" charset="-122"/>
@@ -6403,7 +7343,30 @@
       </p:sp>
       <p:sp>
         <p:nvSpPr>
-          <p:cNvPr id="15" name="Text 13"/>
+          <p:cNvPr id="22" name="Shape 20"/>
+          <p:cNvSpPr/>
+          <p:nvPr/>
+        </p:nvSpPr>
+        <p:spPr>
+          <a:xfrm>
+            <a:off x="640080" y="6355080"/>
+            <a:ext cx="10908792" cy="0"/>
+          </a:xfrm>
+          <a:prstGeom prst="line">
+            <a:avLst/>
+          </a:prstGeom>
+          <a:noFill/>
+          <a:ln w="12700">
+            <a:solidFill>
+              <a:srgbClr val="ED7D31"/>
+            </a:solidFill>
+            <a:prstDash val="solid"/>
+          </a:ln>
+        </p:spPr>
+      </p:sp>
+      <p:sp>
+        <p:nvSpPr>
+          <p:cNvPr id="23" name="Text 21"/>
           <p:cNvSpPr txBox="1"/>
           <p:nvPr/>
         </p:nvSpPr>
@@ -6428,7 +7391,7 @@
             <a:r>
               <a:rPr lang="he-IL" altLang="en-US" sz="1000" dirty="0">
                 <a:solidFill>
-                  <a:srgbClr val="595959"/>
+                  <a:srgbClr val="1F3864"/>
                 </a:solidFill>
                 <a:latin typeface="David" pitchFamily="34" charset="0"/>
                 <a:ea typeface="David" pitchFamily="34" charset="-122"/>
@@ -6442,7 +7405,7 @@
       </p:sp>
       <p:sp>
         <p:nvSpPr>
-          <p:cNvPr id="16" name="Text 14"/>
+          <p:cNvPr id="24" name="Text 22"/>
           <p:cNvSpPr txBox="1"/>
           <p:nvPr/>
         </p:nvSpPr>
@@ -6465,9 +7428,9 @@
               <a:buNone/>
             </a:pPr>
             <a:r>
-              <a:rPr lang="he-IL" altLang="en-US" sz="1000" dirty="0">
-                <a:solidFill>
-                  <a:srgbClr val="595959"/>
+              <a:rPr lang="he-IL" altLang="en-US" sz="1100" b="1" dirty="0">
+                <a:solidFill>
+                  <a:srgbClr val="ED7D31"/>
                 </a:solidFill>
                 <a:latin typeface="David" pitchFamily="34" charset="0"/>
                 <a:ea typeface="David" pitchFamily="34" charset="-122"/>
@@ -6475,7 +7438,7 @@
               </a:rPr>
               <a:t>4</a:t>
             </a:r>
-            <a:endParaRPr lang="he-IL" sz="1000" dirty="0"/>
+            <a:endParaRPr lang="he-IL" sz="1100" dirty="0"/>
           </a:p>
         </p:txBody>
       </p:sp>
@@ -6490,6 +7453,13 @@
 <file path=ppt/slides/slide5.xml><?xml version="1.0" encoding="utf-8"?>
 <p:sld xmlns:a="http://schemas.openxmlformats.org/drawingml/2006/main" xmlns:r="http://schemas.openxmlformats.org/officeDocument/2006/relationships" xmlns:p="http://schemas.openxmlformats.org/presentationml/2006/main">
   <p:cSld name="Slide 5">
+    <p:bg>
+      <p:bgPr>
+        <a:solidFill>
+          <a:srgbClr val="FFFFFF"/>
+        </a:solidFill>
+      </p:bgPr>
+    </p:bg>
     <p:spTree>
       <p:nvGrpSpPr>
         <p:cNvPr id="1" name=""/>
@@ -6506,61 +7476,24 @@
       </p:grpSpPr>
       <p:sp>
         <p:nvSpPr>
-          <p:cNvPr id="2" name="Text 0"/>
-          <p:cNvSpPr txBox="1"/>
-          <p:nvPr/>
-        </p:nvSpPr>
-        <p:spPr>
-          <a:xfrm>
-            <a:off x="640080" y="365760"/>
-            <a:ext cx="10908792" cy="731520"/>
-          </a:xfrm>
-          <a:prstGeom prst="rect">
-            <a:avLst/>
-          </a:prstGeom>
-          <a:noFill/>
-          <a:ln/>
-        </p:spPr>
-        <p:txBody>
-          <a:bodyPr wrap="square" lIns="0" tIns="0" rIns="0" bIns="0" rtlCol="0" anchor="ctr"/>
-          <a:lstStyle/>
-          <a:p>
-            <a:pPr rtl="1" algn="r" indent="0" marL="0">
-              <a:buNone/>
-            </a:pPr>
-            <a:r>
-              <a:rPr lang="he-IL" altLang="en-US" sz="2800" b="1" dirty="0">
-                <a:solidFill>
-                  <a:srgbClr val="000000"/>
-                </a:solidFill>
-                <a:latin typeface="David" pitchFamily="34" charset="0"/>
-                <a:ea typeface="David" pitchFamily="34" charset="-122"/>
-                <a:cs typeface="David" pitchFamily="34" charset="-120"/>
-              </a:rPr>
-              <a:t>תמצית המאמר: עיצוב תפקיד מבוסס צרכים והשערות המחקר</a:t>
-            </a:r>
-            <a:endParaRPr lang="he-IL" sz="2800" dirty="0"/>
-          </a:p>
-        </p:txBody>
-      </p:sp>
-      <p:sp>
-        <p:nvSpPr>
-          <p:cNvPr id="3" name="Shape 1"/>
+          <p:cNvPr id="2" name="Shape 0"/>
           <p:cNvSpPr/>
           <p:nvPr/>
         </p:nvSpPr>
         <p:spPr>
           <a:xfrm>
-            <a:off x="640080" y="1115568"/>
-            <a:ext cx="10908792" cy="0"/>
-          </a:xfrm>
-          <a:prstGeom prst="line">
-            <a:avLst/>
-          </a:prstGeom>
-          <a:noFill/>
-          <a:ln w="19050">
+            <a:off x="0" y="0"/>
+            <a:ext cx="12188952" cy="1051560"/>
+          </a:xfrm>
+          <a:prstGeom prst="rect">
+            <a:avLst/>
+          </a:prstGeom>
+          <a:solidFill>
+            <a:srgbClr val="1F3864"/>
+          </a:solidFill>
+          <a:ln w="12700">
             <a:solidFill>
-              <a:srgbClr val="BDD7EE"/>
+              <a:srgbClr val="1F3864"/>
             </a:solidFill>
             <a:prstDash val="solid"/>
           </a:ln>
@@ -6568,7 +7501,71 @@
       </p:sp>
       <p:sp>
         <p:nvSpPr>
+          <p:cNvPr id="3" name="Shape 1"/>
+          <p:cNvSpPr/>
+          <p:nvPr/>
+        </p:nvSpPr>
+        <p:spPr>
+          <a:xfrm>
+            <a:off x="0" y="1051560"/>
+            <a:ext cx="12188952" cy="64008"/>
+          </a:xfrm>
+          <a:prstGeom prst="rect">
+            <a:avLst/>
+          </a:prstGeom>
+          <a:solidFill>
+            <a:srgbClr val="ED7D31"/>
+          </a:solidFill>
+          <a:ln w="12700">
+            <a:solidFill>
+              <a:srgbClr val="ED7D31"/>
+            </a:solidFill>
+            <a:prstDash val="solid"/>
+          </a:ln>
+        </p:spPr>
+      </p:sp>
+      <p:sp>
+        <p:nvSpPr>
           <p:cNvPr id="4" name="Text 2"/>
+          <p:cNvSpPr txBox="1"/>
+          <p:nvPr/>
+        </p:nvSpPr>
+        <p:spPr>
+          <a:xfrm>
+            <a:off x="640080" y="137160"/>
+            <a:ext cx="10908792" cy="777240"/>
+          </a:xfrm>
+          <a:prstGeom prst="rect">
+            <a:avLst/>
+          </a:prstGeom>
+          <a:noFill/>
+          <a:ln/>
+        </p:spPr>
+        <p:txBody>
+          <a:bodyPr wrap="square" lIns="0" tIns="0" rIns="0" bIns="0" rtlCol="0" anchor="ctr"/>
+          <a:lstStyle/>
+          <a:p>
+            <a:pPr rtl="1" algn="r" indent="0" marL="0">
+              <a:buNone/>
+            </a:pPr>
+            <a:r>
+              <a:rPr lang="he-IL" altLang="en-US" sz="2800" b="1" dirty="0">
+                <a:solidFill>
+                  <a:srgbClr val="FFFFFF"/>
+                </a:solidFill>
+                <a:latin typeface="David" pitchFamily="34" charset="0"/>
+                <a:ea typeface="David" pitchFamily="34" charset="-122"/>
+                <a:cs typeface="David" pitchFamily="34" charset="-120"/>
+              </a:rPr>
+              <a:t>תמצית המאמר: עיצוב תפקיד מבוסס צרכים והשערות המחקר</a:t>
+            </a:r>
+            <a:endParaRPr lang="he-IL" sz="2800" dirty="0"/>
+          </a:p>
+        </p:txBody>
+      </p:sp>
+      <p:sp>
+        <p:nvSpPr>
+          <p:cNvPr id="5" name="Text 3"/>
           <p:cNvSpPr txBox="1"/>
           <p:nvPr/>
         </p:nvSpPr>
@@ -6610,7 +7607,7 @@
       </p:sp>
       <p:sp>
         <p:nvSpPr>
-          <p:cNvPr id="5" name="Text 3"/>
+          <p:cNvPr id="6" name="Text 4"/>
           <p:cNvSpPr txBox="1"/>
           <p:nvPr/>
         </p:nvSpPr>
@@ -6652,7 +7649,30 @@
       </p:sp>
       <p:sp>
         <p:nvSpPr>
-          <p:cNvPr id="6" name="Text 4"/>
+          <p:cNvPr id="7" name="Shape 5"/>
+          <p:cNvSpPr/>
+          <p:nvPr/>
+        </p:nvSpPr>
+        <p:spPr>
+          <a:xfrm>
+            <a:off x="640080" y="6355080"/>
+            <a:ext cx="10908792" cy="0"/>
+          </a:xfrm>
+          <a:prstGeom prst="line">
+            <a:avLst/>
+          </a:prstGeom>
+          <a:noFill/>
+          <a:ln w="12700">
+            <a:solidFill>
+              <a:srgbClr val="ED7D31"/>
+            </a:solidFill>
+            <a:prstDash val="solid"/>
+          </a:ln>
+        </p:spPr>
+      </p:sp>
+      <p:sp>
+        <p:nvSpPr>
+          <p:cNvPr id="8" name="Text 6"/>
           <p:cNvSpPr txBox="1"/>
           <p:nvPr/>
         </p:nvSpPr>
@@ -6677,7 +7697,7 @@
             <a:r>
               <a:rPr lang="he-IL" altLang="en-US" sz="1000" dirty="0">
                 <a:solidFill>
-                  <a:srgbClr val="595959"/>
+                  <a:srgbClr val="1F3864"/>
                 </a:solidFill>
                 <a:latin typeface="David" pitchFamily="34" charset="0"/>
                 <a:ea typeface="David" pitchFamily="34" charset="-122"/>
@@ -6691,7 +7711,7 @@
       </p:sp>
       <p:sp>
         <p:nvSpPr>
-          <p:cNvPr id="7" name="Text 5"/>
+          <p:cNvPr id="9" name="Text 7"/>
           <p:cNvSpPr txBox="1"/>
           <p:nvPr/>
         </p:nvSpPr>
@@ -6714,9 +7734,9 @@
               <a:buNone/>
             </a:pPr>
             <a:r>
-              <a:rPr lang="he-IL" altLang="en-US" sz="1000" dirty="0">
-                <a:solidFill>
-                  <a:srgbClr val="595959"/>
+              <a:rPr lang="he-IL" altLang="en-US" sz="1100" b="1" dirty="0">
+                <a:solidFill>
+                  <a:srgbClr val="ED7D31"/>
                 </a:solidFill>
                 <a:latin typeface="David" pitchFamily="34" charset="0"/>
                 <a:ea typeface="David" pitchFamily="34" charset="-122"/>
@@ -6724,7 +7744,7 @@
               </a:rPr>
               <a:t>5</a:t>
             </a:r>
-            <a:endParaRPr lang="he-IL" sz="1000" dirty="0"/>
+            <a:endParaRPr lang="he-IL" sz="1100" dirty="0"/>
           </a:p>
         </p:txBody>
       </p:sp>
@@ -6739,6 +7759,13 @@
 <file path=ppt/slides/slide6.xml><?xml version="1.0" encoding="utf-8"?>
 <p:sld xmlns:a="http://schemas.openxmlformats.org/drawingml/2006/main" xmlns:r="http://schemas.openxmlformats.org/officeDocument/2006/relationships" xmlns:p="http://schemas.openxmlformats.org/presentationml/2006/main">
   <p:cSld name="Slide 6">
+    <p:bg>
+      <p:bgPr>
+        <a:solidFill>
+          <a:srgbClr val="FFFFFF"/>
+        </a:solidFill>
+      </p:bgPr>
+    </p:bg>
     <p:spTree>
       <p:nvGrpSpPr>
         <p:cNvPr id="1" name=""/>
@@ -6755,61 +7782,24 @@
       </p:grpSpPr>
       <p:sp>
         <p:nvSpPr>
-          <p:cNvPr id="2" name="Text 0"/>
-          <p:cNvSpPr txBox="1"/>
-          <p:nvPr/>
-        </p:nvSpPr>
-        <p:spPr>
-          <a:xfrm>
-            <a:off x="640080" y="365760"/>
-            <a:ext cx="10908792" cy="731520"/>
-          </a:xfrm>
-          <a:prstGeom prst="rect">
-            <a:avLst/>
-          </a:prstGeom>
-          <a:noFill/>
-          <a:ln/>
-        </p:spPr>
-        <p:txBody>
-          <a:bodyPr wrap="square" lIns="0" tIns="0" rIns="0" bIns="0" rtlCol="0" anchor="ctr"/>
-          <a:lstStyle/>
-          <a:p>
-            <a:pPr rtl="1" algn="r" indent="0" marL="0">
-              <a:buNone/>
-            </a:pPr>
-            <a:r>
-              <a:rPr lang="he-IL" altLang="en-US" sz="2800" b="1" dirty="0">
-                <a:solidFill>
-                  <a:srgbClr val="000000"/>
-                </a:solidFill>
-                <a:latin typeface="David" pitchFamily="34" charset="0"/>
-                <a:ea typeface="David" pitchFamily="34" charset="-122"/>
-                <a:cs typeface="David" pitchFamily="34" charset="-120"/>
-              </a:rPr>
-              <a:t>תמצית המאמר: שיטת המחקר</a:t>
-            </a:r>
-            <a:endParaRPr lang="he-IL" sz="2800" dirty="0"/>
-          </a:p>
-        </p:txBody>
-      </p:sp>
-      <p:sp>
-        <p:nvSpPr>
-          <p:cNvPr id="3" name="Shape 1"/>
+          <p:cNvPr id="2" name="Shape 0"/>
           <p:cNvSpPr/>
           <p:nvPr/>
         </p:nvSpPr>
         <p:spPr>
           <a:xfrm>
-            <a:off x="640080" y="1115568"/>
-            <a:ext cx="10908792" cy="0"/>
-          </a:xfrm>
-          <a:prstGeom prst="line">
-            <a:avLst/>
-          </a:prstGeom>
-          <a:noFill/>
-          <a:ln w="19050">
+            <a:off x="0" y="0"/>
+            <a:ext cx="12188952" cy="1051560"/>
+          </a:xfrm>
+          <a:prstGeom prst="rect">
+            <a:avLst/>
+          </a:prstGeom>
+          <a:solidFill>
+            <a:srgbClr val="1F3864"/>
+          </a:solidFill>
+          <a:ln w="12700">
             <a:solidFill>
-              <a:srgbClr val="BDD7EE"/>
+              <a:srgbClr val="1F3864"/>
             </a:solidFill>
             <a:prstDash val="solid"/>
           </a:ln>
@@ -6817,7 +7807,71 @@
       </p:sp>
       <p:sp>
         <p:nvSpPr>
+          <p:cNvPr id="3" name="Shape 1"/>
+          <p:cNvSpPr/>
+          <p:nvPr/>
+        </p:nvSpPr>
+        <p:spPr>
+          <a:xfrm>
+            <a:off x="0" y="1051560"/>
+            <a:ext cx="12188952" cy="64008"/>
+          </a:xfrm>
+          <a:prstGeom prst="rect">
+            <a:avLst/>
+          </a:prstGeom>
+          <a:solidFill>
+            <a:srgbClr val="ED7D31"/>
+          </a:solidFill>
+          <a:ln w="12700">
+            <a:solidFill>
+              <a:srgbClr val="ED7D31"/>
+            </a:solidFill>
+            <a:prstDash val="solid"/>
+          </a:ln>
+        </p:spPr>
+      </p:sp>
+      <p:sp>
+        <p:nvSpPr>
           <p:cNvPr id="4" name="Text 2"/>
+          <p:cNvSpPr txBox="1"/>
+          <p:nvPr/>
+        </p:nvSpPr>
+        <p:spPr>
+          <a:xfrm>
+            <a:off x="640080" y="137160"/>
+            <a:ext cx="10908792" cy="777240"/>
+          </a:xfrm>
+          <a:prstGeom prst="rect">
+            <a:avLst/>
+          </a:prstGeom>
+          <a:noFill/>
+          <a:ln/>
+        </p:spPr>
+        <p:txBody>
+          <a:bodyPr wrap="square" lIns="0" tIns="0" rIns="0" bIns="0" rtlCol="0" anchor="ctr"/>
+          <a:lstStyle/>
+          <a:p>
+            <a:pPr rtl="1" algn="r" indent="0" marL="0">
+              <a:buNone/>
+            </a:pPr>
+            <a:r>
+              <a:rPr lang="he-IL" altLang="en-US" sz="2800" b="1" dirty="0">
+                <a:solidFill>
+                  <a:srgbClr val="FFFFFF"/>
+                </a:solidFill>
+                <a:latin typeface="David" pitchFamily="34" charset="0"/>
+                <a:ea typeface="David" pitchFamily="34" charset="-122"/>
+                <a:cs typeface="David" pitchFamily="34" charset="-120"/>
+              </a:rPr>
+              <a:t>תמצית המאמר: שיטת המחקר</a:t>
+            </a:r>
+            <a:endParaRPr lang="he-IL" sz="2800" dirty="0"/>
+          </a:p>
+        </p:txBody>
+      </p:sp>
+      <p:sp>
+        <p:nvSpPr>
+          <p:cNvPr id="5" name="Text 3"/>
           <p:cNvSpPr txBox="1"/>
           <p:nvPr/>
         </p:nvSpPr>
@@ -6859,7 +7913,7 @@
       </p:sp>
       <p:sp>
         <p:nvSpPr>
-          <p:cNvPr id="5" name="Text 3"/>
+          <p:cNvPr id="6" name="Text 4"/>
           <p:cNvSpPr txBox="1"/>
           <p:nvPr/>
         </p:nvSpPr>
@@ -6901,7 +7955,30 @@
       </p:sp>
       <p:sp>
         <p:nvSpPr>
-          <p:cNvPr id="6" name="Text 4"/>
+          <p:cNvPr id="7" name="Shape 5"/>
+          <p:cNvSpPr/>
+          <p:nvPr/>
+        </p:nvSpPr>
+        <p:spPr>
+          <a:xfrm>
+            <a:off x="640080" y="6355080"/>
+            <a:ext cx="10908792" cy="0"/>
+          </a:xfrm>
+          <a:prstGeom prst="line">
+            <a:avLst/>
+          </a:prstGeom>
+          <a:noFill/>
+          <a:ln w="12700">
+            <a:solidFill>
+              <a:srgbClr val="ED7D31"/>
+            </a:solidFill>
+            <a:prstDash val="solid"/>
+          </a:ln>
+        </p:spPr>
+      </p:sp>
+      <p:sp>
+        <p:nvSpPr>
+          <p:cNvPr id="8" name="Text 6"/>
           <p:cNvSpPr txBox="1"/>
           <p:nvPr/>
         </p:nvSpPr>
@@ -6926,7 +8003,7 @@
             <a:r>
               <a:rPr lang="he-IL" altLang="en-US" sz="1000" dirty="0">
                 <a:solidFill>
-                  <a:srgbClr val="595959"/>
+                  <a:srgbClr val="1F3864"/>
                 </a:solidFill>
                 <a:latin typeface="David" pitchFamily="34" charset="0"/>
                 <a:ea typeface="David" pitchFamily="34" charset="-122"/>
@@ -6940,7 +8017,7 @@
       </p:sp>
       <p:sp>
         <p:nvSpPr>
-          <p:cNvPr id="7" name="Text 5"/>
+          <p:cNvPr id="9" name="Text 7"/>
           <p:cNvSpPr txBox="1"/>
           <p:nvPr/>
         </p:nvSpPr>
@@ -6963,9 +8040,9 @@
               <a:buNone/>
             </a:pPr>
             <a:r>
-              <a:rPr lang="he-IL" altLang="en-US" sz="1000" dirty="0">
-                <a:solidFill>
-                  <a:srgbClr val="595959"/>
+              <a:rPr lang="he-IL" altLang="en-US" sz="1100" b="1" dirty="0">
+                <a:solidFill>
+                  <a:srgbClr val="ED7D31"/>
                 </a:solidFill>
                 <a:latin typeface="David" pitchFamily="34" charset="0"/>
                 <a:ea typeface="David" pitchFamily="34" charset="-122"/>
@@ -6973,7 +8050,7 @@
               </a:rPr>
               <a:t>6</a:t>
             </a:r>
-            <a:endParaRPr lang="he-IL" sz="1000" dirty="0"/>
+            <a:endParaRPr lang="he-IL" sz="1100" dirty="0"/>
           </a:p>
         </p:txBody>
       </p:sp>
@@ -6988,6 +8065,13 @@
 <file path=ppt/slides/slide7.xml><?xml version="1.0" encoding="utf-8"?>
 <p:sld xmlns:a="http://schemas.openxmlformats.org/drawingml/2006/main" xmlns:r="http://schemas.openxmlformats.org/officeDocument/2006/relationships" xmlns:p="http://schemas.openxmlformats.org/presentationml/2006/main">
   <p:cSld name="Slide 7">
+    <p:bg>
+      <p:bgPr>
+        <a:solidFill>
+          <a:srgbClr val="FFFFFF"/>
+        </a:solidFill>
+      </p:bgPr>
+    </p:bg>
     <p:spTree>
       <p:nvGrpSpPr>
         <p:cNvPr id="1" name=""/>
@@ -7004,61 +8088,24 @@
       </p:grpSpPr>
       <p:sp>
         <p:nvSpPr>
-          <p:cNvPr id="2" name="Text 0"/>
-          <p:cNvSpPr txBox="1"/>
-          <p:nvPr/>
-        </p:nvSpPr>
-        <p:spPr>
-          <a:xfrm>
-            <a:off x="640080" y="365760"/>
-            <a:ext cx="10908792" cy="731520"/>
-          </a:xfrm>
-          <a:prstGeom prst="rect">
-            <a:avLst/>
-          </a:prstGeom>
-          <a:noFill/>
-          <a:ln/>
-        </p:spPr>
-        <p:txBody>
-          <a:bodyPr wrap="square" lIns="0" tIns="0" rIns="0" bIns="0" rtlCol="0" anchor="ctr"/>
-          <a:lstStyle/>
-          <a:p>
-            <a:pPr rtl="1" algn="r" indent="0" marL="0">
-              <a:buNone/>
-            </a:pPr>
-            <a:r>
-              <a:rPr lang="he-IL" altLang="en-US" sz="2800" b="1" dirty="0">
-                <a:solidFill>
-                  <a:srgbClr val="000000"/>
-                </a:solidFill>
-                <a:latin typeface="David" pitchFamily="34" charset="0"/>
-                <a:ea typeface="David" pitchFamily="34" charset="-122"/>
-                <a:cs typeface="David" pitchFamily="34" charset="-120"/>
-              </a:rPr>
-              <a:t>תמצית המאמר: הממצאים המרכזיים</a:t>
-            </a:r>
-            <a:endParaRPr lang="he-IL" sz="2800" dirty="0"/>
-          </a:p>
-        </p:txBody>
-      </p:sp>
-      <p:sp>
-        <p:nvSpPr>
-          <p:cNvPr id="3" name="Shape 1"/>
+          <p:cNvPr id="2" name="Shape 0"/>
           <p:cNvSpPr/>
           <p:nvPr/>
         </p:nvSpPr>
         <p:spPr>
           <a:xfrm>
-            <a:off x="640080" y="1115568"/>
-            <a:ext cx="10908792" cy="0"/>
-          </a:xfrm>
-          <a:prstGeom prst="line">
-            <a:avLst/>
-          </a:prstGeom>
-          <a:noFill/>
-          <a:ln w="19050">
+            <a:off x="0" y="0"/>
+            <a:ext cx="12188952" cy="1051560"/>
+          </a:xfrm>
+          <a:prstGeom prst="rect">
+            <a:avLst/>
+          </a:prstGeom>
+          <a:solidFill>
+            <a:srgbClr val="1F3864"/>
+          </a:solidFill>
+          <a:ln w="12700">
             <a:solidFill>
-              <a:srgbClr val="BDD7EE"/>
+              <a:srgbClr val="1F3864"/>
             </a:solidFill>
             <a:prstDash val="solid"/>
           </a:ln>
@@ -7066,7 +8113,71 @@
       </p:sp>
       <p:sp>
         <p:nvSpPr>
+          <p:cNvPr id="3" name="Shape 1"/>
+          <p:cNvSpPr/>
+          <p:nvPr/>
+        </p:nvSpPr>
+        <p:spPr>
+          <a:xfrm>
+            <a:off x="0" y="1051560"/>
+            <a:ext cx="12188952" cy="64008"/>
+          </a:xfrm>
+          <a:prstGeom prst="rect">
+            <a:avLst/>
+          </a:prstGeom>
+          <a:solidFill>
+            <a:srgbClr val="ED7D31"/>
+          </a:solidFill>
+          <a:ln w="12700">
+            <a:solidFill>
+              <a:srgbClr val="ED7D31"/>
+            </a:solidFill>
+            <a:prstDash val="solid"/>
+          </a:ln>
+        </p:spPr>
+      </p:sp>
+      <p:sp>
+        <p:nvSpPr>
           <p:cNvPr id="4" name="Text 2"/>
+          <p:cNvSpPr txBox="1"/>
+          <p:nvPr/>
+        </p:nvSpPr>
+        <p:spPr>
+          <a:xfrm>
+            <a:off x="640080" y="137160"/>
+            <a:ext cx="10908792" cy="777240"/>
+          </a:xfrm>
+          <a:prstGeom prst="rect">
+            <a:avLst/>
+          </a:prstGeom>
+          <a:noFill/>
+          <a:ln/>
+        </p:spPr>
+        <p:txBody>
+          <a:bodyPr wrap="square" lIns="0" tIns="0" rIns="0" bIns="0" rtlCol="0" anchor="ctr"/>
+          <a:lstStyle/>
+          <a:p>
+            <a:pPr rtl="1" algn="r" indent="0" marL="0">
+              <a:buNone/>
+            </a:pPr>
+            <a:r>
+              <a:rPr lang="he-IL" altLang="en-US" sz="2800" b="1" dirty="0">
+                <a:solidFill>
+                  <a:srgbClr val="FFFFFF"/>
+                </a:solidFill>
+                <a:latin typeface="David" pitchFamily="34" charset="0"/>
+                <a:ea typeface="David" pitchFamily="34" charset="-122"/>
+                <a:cs typeface="David" pitchFamily="34" charset="-120"/>
+              </a:rPr>
+              <a:t>תמצית המאמר: הממצאים המרכזיים</a:t>
+            </a:r>
+            <a:endParaRPr lang="he-IL" sz="2800" dirty="0"/>
+          </a:p>
+        </p:txBody>
+      </p:sp>
+      <p:sp>
+        <p:nvSpPr>
+          <p:cNvPr id="5" name="Text 3"/>
           <p:cNvSpPr txBox="1"/>
           <p:nvPr/>
         </p:nvSpPr>
@@ -7108,7 +8219,7 @@
       </p:sp>
       <p:graphicFrame>
         <p:nvGraphicFramePr>
-          <p:cNvPr id="5" name="Chart 0" descr=""/>
+          <p:cNvPr id="6" name="Chart 0" descr=""/>
           <p:cNvGraphicFramePr/>
           <p:nvPr/>
         </p:nvGraphicFramePr>
@@ -7124,7 +8235,7 @@
       </p:graphicFrame>
       <p:sp>
         <p:nvSpPr>
-          <p:cNvPr id="6" name="Text 3"/>
+          <p:cNvPr id="7" name="Text 4"/>
           <p:cNvSpPr txBox="1"/>
           <p:nvPr/>
         </p:nvSpPr>
@@ -7149,7 +8260,7 @@
             <a:r>
               <a:rPr lang="he-IL" altLang="en-US" sz="1100" dirty="0">
                 <a:solidFill>
-                  <a:srgbClr val="595959"/>
+                  <a:srgbClr val="1F3864"/>
                 </a:solidFill>
                 <a:latin typeface="David" pitchFamily="34" charset="0"/>
                 <a:ea typeface="David" pitchFamily="34" charset="-122"/>
@@ -7163,7 +8274,30 @@
       </p:sp>
       <p:sp>
         <p:nvSpPr>
-          <p:cNvPr id="7" name="Text 4"/>
+          <p:cNvPr id="8" name="Shape 5"/>
+          <p:cNvSpPr/>
+          <p:nvPr/>
+        </p:nvSpPr>
+        <p:spPr>
+          <a:xfrm>
+            <a:off x="640080" y="6355080"/>
+            <a:ext cx="10908792" cy="0"/>
+          </a:xfrm>
+          <a:prstGeom prst="line">
+            <a:avLst/>
+          </a:prstGeom>
+          <a:noFill/>
+          <a:ln w="12700">
+            <a:solidFill>
+              <a:srgbClr val="ED7D31"/>
+            </a:solidFill>
+            <a:prstDash val="solid"/>
+          </a:ln>
+        </p:spPr>
+      </p:sp>
+      <p:sp>
+        <p:nvSpPr>
+          <p:cNvPr id="9" name="Text 6"/>
           <p:cNvSpPr txBox="1"/>
           <p:nvPr/>
         </p:nvSpPr>
@@ -7188,7 +8322,7 @@
             <a:r>
               <a:rPr lang="he-IL" altLang="en-US" sz="1000" dirty="0">
                 <a:solidFill>
-                  <a:srgbClr val="595959"/>
+                  <a:srgbClr val="1F3864"/>
                 </a:solidFill>
                 <a:latin typeface="David" pitchFamily="34" charset="0"/>
                 <a:ea typeface="David" pitchFamily="34" charset="-122"/>
@@ -7202,7 +8336,7 @@
       </p:sp>
       <p:sp>
         <p:nvSpPr>
-          <p:cNvPr id="8" name="Text 5"/>
+          <p:cNvPr id="10" name="Text 7"/>
           <p:cNvSpPr txBox="1"/>
           <p:nvPr/>
         </p:nvSpPr>
@@ -7225,9 +8359,9 @@
               <a:buNone/>
             </a:pPr>
             <a:r>
-              <a:rPr lang="he-IL" altLang="en-US" sz="1000" dirty="0">
-                <a:solidFill>
-                  <a:srgbClr val="595959"/>
+              <a:rPr lang="he-IL" altLang="en-US" sz="1100" b="1" dirty="0">
+                <a:solidFill>
+                  <a:srgbClr val="ED7D31"/>
                 </a:solidFill>
                 <a:latin typeface="David" pitchFamily="34" charset="0"/>
                 <a:ea typeface="David" pitchFamily="34" charset="-122"/>
@@ -7235,7 +8369,7 @@
               </a:rPr>
               <a:t>7</a:t>
             </a:r>
-            <a:endParaRPr lang="he-IL" sz="1000" dirty="0"/>
+            <a:endParaRPr lang="he-IL" sz="1100" dirty="0"/>
           </a:p>
         </p:txBody>
       </p:sp>
@@ -7250,6 +8384,13 @@
 <file path=ppt/slides/slide8.xml><?xml version="1.0" encoding="utf-8"?>
 <p:sld xmlns:a="http://schemas.openxmlformats.org/drawingml/2006/main" xmlns:r="http://schemas.openxmlformats.org/officeDocument/2006/relationships" xmlns:p="http://schemas.openxmlformats.org/presentationml/2006/main">
   <p:cSld name="Slide 8">
+    <p:bg>
+      <p:bgPr>
+        <a:solidFill>
+          <a:srgbClr val="FFFFFF"/>
+        </a:solidFill>
+      </p:bgPr>
+    </p:bg>
     <p:spTree>
       <p:nvGrpSpPr>
         <p:cNvPr id="1" name=""/>
@@ -7266,61 +8407,24 @@
       </p:grpSpPr>
       <p:sp>
         <p:nvSpPr>
-          <p:cNvPr id="2" name="Text 0"/>
-          <p:cNvSpPr txBox="1"/>
-          <p:nvPr/>
-        </p:nvSpPr>
-        <p:spPr>
-          <a:xfrm>
-            <a:off x="640080" y="365760"/>
-            <a:ext cx="10908792" cy="731520"/>
-          </a:xfrm>
-          <a:prstGeom prst="rect">
-            <a:avLst/>
-          </a:prstGeom>
-          <a:noFill/>
-          <a:ln/>
-        </p:spPr>
-        <p:txBody>
-          <a:bodyPr wrap="square" lIns="0" tIns="0" rIns="0" bIns="0" rtlCol="0" anchor="ctr"/>
-          <a:lstStyle/>
-          <a:p>
-            <a:pPr rtl="1" algn="r" indent="0" marL="0">
-              <a:buNone/>
-            </a:pPr>
-            <a:r>
-              <a:rPr lang="he-IL" altLang="en-US" sz="2800" b="1" dirty="0">
-                <a:solidFill>
-                  <a:srgbClr val="000000"/>
-                </a:solidFill>
-                <a:latin typeface="David" pitchFamily="34" charset="0"/>
-                <a:ea typeface="David" pitchFamily="34" charset="-122"/>
-                <a:cs typeface="David" pitchFamily="34" charset="-120"/>
-              </a:rPr>
-              <a:t>תמצית המאמר: מסקנות המחברים, חוזקות ומגבלות</a:t>
-            </a:r>
-            <a:endParaRPr lang="he-IL" sz="2800" dirty="0"/>
-          </a:p>
-        </p:txBody>
-      </p:sp>
-      <p:sp>
-        <p:nvSpPr>
-          <p:cNvPr id="3" name="Shape 1"/>
+          <p:cNvPr id="2" name="Shape 0"/>
           <p:cNvSpPr/>
           <p:nvPr/>
         </p:nvSpPr>
         <p:spPr>
           <a:xfrm>
-            <a:off x="640080" y="1115568"/>
-            <a:ext cx="10908792" cy="0"/>
-          </a:xfrm>
-          <a:prstGeom prst="line">
-            <a:avLst/>
-          </a:prstGeom>
-          <a:noFill/>
-          <a:ln w="19050">
+            <a:off x="0" y="0"/>
+            <a:ext cx="12188952" cy="1051560"/>
+          </a:xfrm>
+          <a:prstGeom prst="rect">
+            <a:avLst/>
+          </a:prstGeom>
+          <a:solidFill>
+            <a:srgbClr val="1F3864"/>
+          </a:solidFill>
+          <a:ln w="12700">
             <a:solidFill>
-              <a:srgbClr val="BDD7EE"/>
+              <a:srgbClr val="1F3864"/>
             </a:solidFill>
             <a:prstDash val="solid"/>
           </a:ln>
@@ -7328,7 +8432,71 @@
       </p:sp>
       <p:sp>
         <p:nvSpPr>
+          <p:cNvPr id="3" name="Shape 1"/>
+          <p:cNvSpPr/>
+          <p:nvPr/>
+        </p:nvSpPr>
+        <p:spPr>
+          <a:xfrm>
+            <a:off x="0" y="1051560"/>
+            <a:ext cx="12188952" cy="64008"/>
+          </a:xfrm>
+          <a:prstGeom prst="rect">
+            <a:avLst/>
+          </a:prstGeom>
+          <a:solidFill>
+            <a:srgbClr val="ED7D31"/>
+          </a:solidFill>
+          <a:ln w="12700">
+            <a:solidFill>
+              <a:srgbClr val="ED7D31"/>
+            </a:solidFill>
+            <a:prstDash val="solid"/>
+          </a:ln>
+        </p:spPr>
+      </p:sp>
+      <p:sp>
+        <p:nvSpPr>
           <p:cNvPr id="4" name="Text 2"/>
+          <p:cNvSpPr txBox="1"/>
+          <p:nvPr/>
+        </p:nvSpPr>
+        <p:spPr>
+          <a:xfrm>
+            <a:off x="640080" y="137160"/>
+            <a:ext cx="10908792" cy="777240"/>
+          </a:xfrm>
+          <a:prstGeom prst="rect">
+            <a:avLst/>
+          </a:prstGeom>
+          <a:noFill/>
+          <a:ln/>
+        </p:spPr>
+        <p:txBody>
+          <a:bodyPr wrap="square" lIns="0" tIns="0" rIns="0" bIns="0" rtlCol="0" anchor="ctr"/>
+          <a:lstStyle/>
+          <a:p>
+            <a:pPr rtl="1" algn="r" indent="0" marL="0">
+              <a:buNone/>
+            </a:pPr>
+            <a:r>
+              <a:rPr lang="he-IL" altLang="en-US" sz="2800" b="1" dirty="0">
+                <a:solidFill>
+                  <a:srgbClr val="FFFFFF"/>
+                </a:solidFill>
+                <a:latin typeface="David" pitchFamily="34" charset="0"/>
+                <a:ea typeface="David" pitchFamily="34" charset="-122"/>
+                <a:cs typeface="David" pitchFamily="34" charset="-120"/>
+              </a:rPr>
+              <a:t>תמצית המאמר: מסקנות המחברים, חוזקות ומגבלות</a:t>
+            </a:r>
+            <a:endParaRPr lang="he-IL" sz="2800" dirty="0"/>
+          </a:p>
+        </p:txBody>
+      </p:sp>
+      <p:sp>
+        <p:nvSpPr>
+          <p:cNvPr id="5" name="Text 3"/>
           <p:cNvSpPr txBox="1"/>
           <p:nvPr/>
         </p:nvSpPr>
@@ -7370,7 +8538,7 @@
       </p:sp>
       <p:sp>
         <p:nvSpPr>
-          <p:cNvPr id="5" name="Text 3"/>
+          <p:cNvPr id="6" name="Text 4"/>
           <p:cNvSpPr txBox="1"/>
           <p:nvPr/>
         </p:nvSpPr>
@@ -7412,7 +8580,30 @@
       </p:sp>
       <p:sp>
         <p:nvSpPr>
-          <p:cNvPr id="6" name="Text 4"/>
+          <p:cNvPr id="7" name="Shape 5"/>
+          <p:cNvSpPr/>
+          <p:nvPr/>
+        </p:nvSpPr>
+        <p:spPr>
+          <a:xfrm>
+            <a:off x="640080" y="6355080"/>
+            <a:ext cx="10908792" cy="0"/>
+          </a:xfrm>
+          <a:prstGeom prst="line">
+            <a:avLst/>
+          </a:prstGeom>
+          <a:noFill/>
+          <a:ln w="12700">
+            <a:solidFill>
+              <a:srgbClr val="ED7D31"/>
+            </a:solidFill>
+            <a:prstDash val="solid"/>
+          </a:ln>
+        </p:spPr>
+      </p:sp>
+      <p:sp>
+        <p:nvSpPr>
+          <p:cNvPr id="8" name="Text 6"/>
           <p:cNvSpPr txBox="1"/>
           <p:nvPr/>
         </p:nvSpPr>
@@ -7437,7 +8628,7 @@
             <a:r>
               <a:rPr lang="he-IL" altLang="en-US" sz="1000" dirty="0">
                 <a:solidFill>
-                  <a:srgbClr val="595959"/>
+                  <a:srgbClr val="1F3864"/>
                 </a:solidFill>
                 <a:latin typeface="David" pitchFamily="34" charset="0"/>
                 <a:ea typeface="David" pitchFamily="34" charset="-122"/>
@@ -7451,7 +8642,7 @@
       </p:sp>
       <p:sp>
         <p:nvSpPr>
-          <p:cNvPr id="7" name="Text 5"/>
+          <p:cNvPr id="9" name="Text 7"/>
           <p:cNvSpPr txBox="1"/>
           <p:nvPr/>
         </p:nvSpPr>
@@ -7474,9 +8665,9 @@
               <a:buNone/>
             </a:pPr>
             <a:r>
-              <a:rPr lang="he-IL" altLang="en-US" sz="1000" dirty="0">
-                <a:solidFill>
-                  <a:srgbClr val="595959"/>
+              <a:rPr lang="he-IL" altLang="en-US" sz="1100" b="1" dirty="0">
+                <a:solidFill>
+                  <a:srgbClr val="ED7D31"/>
                 </a:solidFill>
                 <a:latin typeface="David" pitchFamily="34" charset="0"/>
                 <a:ea typeface="David" pitchFamily="34" charset="-122"/>
@@ -7484,7 +8675,7 @@
               </a:rPr>
               <a:t>8</a:t>
             </a:r>
-            <a:endParaRPr lang="he-IL" sz="1000" dirty="0"/>
+            <a:endParaRPr lang="he-IL" sz="1100" dirty="0"/>
           </a:p>
         </p:txBody>
       </p:sp>
@@ -7499,6 +8690,13 @@
 <file path=ppt/slides/slide9.xml><?xml version="1.0" encoding="utf-8"?>
 <p:sld xmlns:a="http://schemas.openxmlformats.org/drawingml/2006/main" xmlns:r="http://schemas.openxmlformats.org/officeDocument/2006/relationships" xmlns:p="http://schemas.openxmlformats.org/presentationml/2006/main">
   <p:cSld name="Slide 9">
+    <p:bg>
+      <p:bgPr>
+        <a:solidFill>
+          <a:srgbClr val="FFFFFF"/>
+        </a:solidFill>
+      </p:bgPr>
+    </p:bg>
     <p:spTree>
       <p:nvGrpSpPr>
         <p:cNvPr id="1" name=""/>
@@ -7515,61 +8713,24 @@
       </p:grpSpPr>
       <p:sp>
         <p:nvSpPr>
-          <p:cNvPr id="2" name="Text 0"/>
-          <p:cNvSpPr txBox="1"/>
-          <p:nvPr/>
-        </p:nvSpPr>
-        <p:spPr>
-          <a:xfrm>
-            <a:off x="640080" y="365760"/>
-            <a:ext cx="10908792" cy="731520"/>
-          </a:xfrm>
-          <a:prstGeom prst="rect">
-            <a:avLst/>
-          </a:prstGeom>
-          <a:noFill/>
-          <a:ln/>
-        </p:spPr>
-        <p:txBody>
-          <a:bodyPr wrap="square" lIns="0" tIns="0" rIns="0" bIns="0" rtlCol="0" anchor="ctr"/>
-          <a:lstStyle/>
-          <a:p>
-            <a:pPr rtl="1" algn="r" indent="0" marL="0">
-              <a:buNone/>
-            </a:pPr>
-            <a:r>
-              <a:rPr lang="he-IL" altLang="en-US" sz="2800" b="1" dirty="0">
-                <a:solidFill>
-                  <a:srgbClr val="000000"/>
-                </a:solidFill>
-                <a:latin typeface="David" pitchFamily="34" charset="0"/>
-                <a:ea typeface="David" pitchFamily="34" charset="-122"/>
-                <a:cs typeface="David" pitchFamily="34" charset="-120"/>
-              </a:rPr>
-              <a:t>המאמר המשלים: מודעות לבינה מלאכותית, חוסר ביטחון וחוסן קריירה</a:t>
-            </a:r>
-            <a:endParaRPr lang="he-IL" sz="2800" dirty="0"/>
-          </a:p>
-        </p:txBody>
-      </p:sp>
-      <p:sp>
-        <p:nvSpPr>
-          <p:cNvPr id="3" name="Shape 1"/>
+          <p:cNvPr id="2" name="Shape 0"/>
           <p:cNvSpPr/>
           <p:nvPr/>
         </p:nvSpPr>
         <p:spPr>
           <a:xfrm>
-            <a:off x="640080" y="1115568"/>
-            <a:ext cx="10908792" cy="0"/>
-          </a:xfrm>
-          <a:prstGeom prst="line">
-            <a:avLst/>
-          </a:prstGeom>
-          <a:noFill/>
-          <a:ln w="19050">
+            <a:off x="0" y="0"/>
+            <a:ext cx="12188952" cy="1051560"/>
+          </a:xfrm>
+          <a:prstGeom prst="rect">
+            <a:avLst/>
+          </a:prstGeom>
+          <a:solidFill>
+            <a:srgbClr val="1F3864"/>
+          </a:solidFill>
+          <a:ln w="12700">
             <a:solidFill>
-              <a:srgbClr val="BDD7EE"/>
+              <a:srgbClr val="1F3864"/>
             </a:solidFill>
             <a:prstDash val="solid"/>
           </a:ln>
@@ -7577,7 +8738,71 @@
       </p:sp>
       <p:sp>
         <p:nvSpPr>
+          <p:cNvPr id="3" name="Shape 1"/>
+          <p:cNvSpPr/>
+          <p:nvPr/>
+        </p:nvSpPr>
+        <p:spPr>
+          <a:xfrm>
+            <a:off x="0" y="1051560"/>
+            <a:ext cx="12188952" cy="64008"/>
+          </a:xfrm>
+          <a:prstGeom prst="rect">
+            <a:avLst/>
+          </a:prstGeom>
+          <a:solidFill>
+            <a:srgbClr val="ED7D31"/>
+          </a:solidFill>
+          <a:ln w="12700">
+            <a:solidFill>
+              <a:srgbClr val="ED7D31"/>
+            </a:solidFill>
+            <a:prstDash val="solid"/>
+          </a:ln>
+        </p:spPr>
+      </p:sp>
+      <p:sp>
+        <p:nvSpPr>
           <p:cNvPr id="4" name="Text 2"/>
+          <p:cNvSpPr txBox="1"/>
+          <p:nvPr/>
+        </p:nvSpPr>
+        <p:spPr>
+          <a:xfrm>
+            <a:off x="640080" y="137160"/>
+            <a:ext cx="10908792" cy="777240"/>
+          </a:xfrm>
+          <a:prstGeom prst="rect">
+            <a:avLst/>
+          </a:prstGeom>
+          <a:noFill/>
+          <a:ln/>
+        </p:spPr>
+        <p:txBody>
+          <a:bodyPr wrap="square" lIns="0" tIns="0" rIns="0" bIns="0" rtlCol="0" anchor="ctr"/>
+          <a:lstStyle/>
+          <a:p>
+            <a:pPr rtl="1" algn="r" indent="0" marL="0">
+              <a:buNone/>
+            </a:pPr>
+            <a:r>
+              <a:rPr lang="he-IL" altLang="en-US" sz="2800" b="1" dirty="0">
+                <a:solidFill>
+                  <a:srgbClr val="FFFFFF"/>
+                </a:solidFill>
+                <a:latin typeface="David" pitchFamily="34" charset="0"/>
+                <a:ea typeface="David" pitchFamily="34" charset="-122"/>
+                <a:cs typeface="David" pitchFamily="34" charset="-120"/>
+              </a:rPr>
+              <a:t>המאמר המשלים: מודעות לבינה מלאכותית, חוסר ביטחון וחוסן קריירה</a:t>
+            </a:r>
+            <a:endParaRPr lang="he-IL" sz="2800" dirty="0"/>
+          </a:p>
+        </p:txBody>
+      </p:sp>
+      <p:sp>
+        <p:nvSpPr>
+          <p:cNvPr id="5" name="Text 3"/>
           <p:cNvSpPr txBox="1"/>
           <p:nvPr/>
         </p:nvSpPr>
@@ -7602,7 +8827,7 @@
             <a:r>
               <a:rPr lang="en-US" sz="1200" i="1" dirty="0">
                 <a:solidFill>
-                  <a:srgbClr val="000000"/>
+                  <a:srgbClr val="1F3864"/>
                 </a:solidFill>
                 <a:latin typeface="Times New Roman" pitchFamily="34" charset="0"/>
                 <a:ea typeface="Times New Roman" pitchFamily="34" charset="-122"/>
@@ -7616,7 +8841,7 @@
       </p:sp>
       <p:sp>
         <p:nvSpPr>
-          <p:cNvPr id="5" name="Text 3"/>
+          <p:cNvPr id="6" name="Text 4"/>
           <p:cNvSpPr txBox="1"/>
           <p:nvPr/>
         </p:nvSpPr>
@@ -7658,7 +8883,7 @@
       </p:sp>
       <p:sp>
         <p:nvSpPr>
-          <p:cNvPr id="6" name="Text 4"/>
+          <p:cNvPr id="7" name="Text 5"/>
           <p:cNvSpPr txBox="1"/>
           <p:nvPr/>
         </p:nvSpPr>
@@ -7700,7 +8925,30 @@
       </p:sp>
       <p:sp>
         <p:nvSpPr>
-          <p:cNvPr id="7" name="Text 5"/>
+          <p:cNvPr id="8" name="Shape 6"/>
+          <p:cNvSpPr/>
+          <p:nvPr/>
+        </p:nvSpPr>
+        <p:spPr>
+          <a:xfrm>
+            <a:off x="640080" y="6355080"/>
+            <a:ext cx="10908792" cy="0"/>
+          </a:xfrm>
+          <a:prstGeom prst="line">
+            <a:avLst/>
+          </a:prstGeom>
+          <a:noFill/>
+          <a:ln w="12700">
+            <a:solidFill>
+              <a:srgbClr val="ED7D31"/>
+            </a:solidFill>
+            <a:prstDash val="solid"/>
+          </a:ln>
+        </p:spPr>
+      </p:sp>
+      <p:sp>
+        <p:nvSpPr>
+          <p:cNvPr id="9" name="Text 7"/>
           <p:cNvSpPr txBox="1"/>
           <p:nvPr/>
         </p:nvSpPr>
@@ -7725,7 +8973,7 @@
             <a:r>
               <a:rPr lang="he-IL" altLang="en-US" sz="1000" dirty="0">
                 <a:solidFill>
-                  <a:srgbClr val="595959"/>
+                  <a:srgbClr val="1F3864"/>
                 </a:solidFill>
                 <a:latin typeface="David" pitchFamily="34" charset="0"/>
                 <a:ea typeface="David" pitchFamily="34" charset="-122"/>
@@ -7739,7 +8987,7 @@
       </p:sp>
       <p:sp>
         <p:nvSpPr>
-          <p:cNvPr id="8" name="Text 6"/>
+          <p:cNvPr id="10" name="Text 8"/>
           <p:cNvSpPr txBox="1"/>
           <p:nvPr/>
         </p:nvSpPr>
@@ -7762,9 +9010,9 @@
               <a:buNone/>
             </a:pPr>
             <a:r>
-              <a:rPr lang="he-IL" altLang="en-US" sz="1000" dirty="0">
-                <a:solidFill>
-                  <a:srgbClr val="595959"/>
+              <a:rPr lang="he-IL" altLang="en-US" sz="1100" b="1" dirty="0">
+                <a:solidFill>
+                  <a:srgbClr val="ED7D31"/>
                 </a:solidFill>
                 <a:latin typeface="David" pitchFamily="34" charset="0"/>
                 <a:ea typeface="David" pitchFamily="34" charset="-122"/>
@@ -7772,7 +9020,7 @@
               </a:rPr>
               <a:t>9</a:t>
             </a:r>
-            <a:endParaRPr lang="he-IL" sz="1000" dirty="0"/>
+            <a:endParaRPr lang="he-IL" sz="1100" dirty="0"/>
           </a:p>
         </p:txBody>
       </p:sp>

--- a/career-management-final-project/ניהול קריירה - התמודדות עם חוסר ודאות תעסוקתי - מצגת.pptx
+++ b/career-management-final-project/ניהול קריירה - התמודדות עם חוסר ודאות תעסוקתי - מצגת.pptx
@@ -2659,7 +2659,7 @@
                 <a:ea typeface="David" pitchFamily="34" charset="-122"/>
                 <a:cs typeface="David" pitchFamily="34" charset="-120"/>
               </a:rPr>
-              <a:t>הקריה האקדמית אונו, הפקולטה למנהל עסקים</a:t>
+              <a:t>‏הקריה האקדמית אונו, הפקולטה למנהל עסקים</a:t>
             </a:r>
             <a:endParaRPr lang="he-IL" sz="1700" dirty="0"/>
           </a:p>
@@ -2698,7 +2698,7 @@
                 <a:ea typeface="David" pitchFamily="34" charset="-122"/>
                 <a:cs typeface="David" pitchFamily="34" charset="-120"/>
               </a:rPr>
-              <a:t>עבודה מסכמת בקורס ניהול קריירה בארגונים</a:t>
+              <a:t>‏עבודה מסכמת בקורס ניהול קריירה בארגונים</a:t>
             </a:r>
             <a:endParaRPr lang="he-IL" sz="1700" dirty="0"/>
           </a:p>
@@ -2737,7 +2737,7 @@
                 <a:ea typeface="David" pitchFamily="34" charset="-122"/>
                 <a:cs typeface="David" pitchFamily="34" charset="-120"/>
               </a:rPr>
-              <a:t>התמודדות עם חוסר ודאות תעסוקתי</a:t>
+              <a:t>‏התמודדות עם חוסר ודאות תעסוקתי</a:t>
             </a:r>
             <a:endParaRPr lang="he-IL" sz="3800" dirty="0"/>
           </a:p>
@@ -2776,7 +2776,7 @@
                 <a:ea typeface="David" pitchFamily="34" charset="-122"/>
                 <a:cs typeface="David" pitchFamily="34" charset="-120"/>
               </a:rPr>
-              <a:t>עיצוב תפקיד מבוסס צרכים כדרך לבנות בהירות, שליטה ומשמעות בעבודה</a:t>
+              <a:t>‏עיצוב תפקיד מבוסס צרכים כדרך לבנות בהירות, שליטה ומשמעות בעבודה</a:t>
             </a:r>
             <a:endParaRPr lang="he-IL" sz="1800" dirty="0"/>
           </a:p>
@@ -2854,7 +2854,7 @@
                 <a:ea typeface="David" pitchFamily="34" charset="-122"/>
                 <a:cs typeface="David" pitchFamily="34" charset="-120"/>
               </a:rPr>
-              <a:t>מגיש/ה: דוחה עמאש, מספר תעודת זהות 208121137</a:t>
+              <a:t>‏מגיש/ה: דוחה עמאש, מספר תעודת זהות 208121137</a:t>
             </a:r>
             <a:endParaRPr lang="he-IL" sz="1800" dirty="0"/>
           </a:p>
@@ -2893,7 +2893,7 @@
                 <a:ea typeface="David" pitchFamily="34" charset="-122"/>
                 <a:cs typeface="David" pitchFamily="34" charset="-120"/>
               </a:rPr>
-              <a:t>מרצה: גב' מורן דבדבני דקל   |   עוזר הוראה: מר פאר רועי</a:t>
+              <a:t>‏מרצה: גב' מורן דבדבני דקל   |   עוזר הוראה: מר פאר רועי</a:t>
             </a:r>
             <a:endParaRPr lang="he-IL" sz="1500" dirty="0"/>
           </a:p>
@@ -2932,7 +2932,7 @@
                 <a:ea typeface="David" pitchFamily="34" charset="-122"/>
                 <a:cs typeface="David" pitchFamily="34" charset="-120"/>
               </a:rPr>
-              <a:t>תשפ"ו, סמסטר 3   |   ספטמבר 2026</a:t>
+              <a:t>‏תשפ"ו, סמסטר 3   |   ספטמבר 2026</a:t>
             </a:r>
             <a:endParaRPr lang="he-IL" sz="1400" dirty="0"/>
           </a:p>
@@ -3053,7 +3053,7 @@
                 <a:ea typeface="David" pitchFamily="34" charset="-122"/>
                 <a:cs typeface="David" pitchFamily="34" charset="-120"/>
               </a:rPr>
-              <a:t>חיבור לחומר הנלמד בקורס</a:t>
+              <a:t>‏חיבור לחומר הנלמד בקורס</a:t>
             </a:r>
             <a:endParaRPr lang="he-IL" sz="2800" dirty="0"/>
           </a:p>
@@ -3080,7 +3080,7 @@
           <a:bodyPr wrap="square" lIns="0" tIns="0" rIns="0" bIns="0" rtlCol="0" anchor="t"/>
           <a:lstStyle/>
           <a:p>
-            <a:pPr rtl="1" algn="just" indent="0" marL="0">
+            <a:pPr rtl="1" algn="r" indent="0" marL="0">
               <a:lnSpc>
                 <a:spcPct val="125000"/>
               </a:lnSpc>
@@ -3095,7 +3095,7 @@
                 <a:ea typeface="David" pitchFamily="34" charset="-122"/>
                 <a:cs typeface="David" pitchFamily="34" charset="-120"/>
               </a:rPr>
-              <a:t>המאמר אינו זר לחומר הקורס אלא מעניק לו בסיס אמפירי. שלושת סלי הכלים שנלמדו בקורס, רשת אנשים, זהות מקצועית והתפתחות, מקבילים כמעט אחד לאחד לצרכי ההתקרבות שנמצאו כבונים תחושת קוהרנטיות: רשת האנשים היא צורך השייכות, חמש השאלות של הזהות המקצועית הן עיצוב תפקיד לצורך המשמעות, וההתפתחות היא צורך המיומנות. הרעיון של קריירה רבודה וקיר הטיפוס, שבהם כל שלב נבנה על קודמו, הוא בדיוק ספירלת הרווח שהמחקר מתעד, שבה כל צעד של עיצוב תפקיד מגדיל את המשאבים לצעד הבא (Cetkovská et al., 2026).</a:t>
+              <a:t>‏המאמר אינו זר לחומר הקורס אלא מעניק לו בסיס אמפירי. שלושת סלי הכלים שנלמדו בקורס, רשת אנשים, זהות מקצועית והתפתחות, מקבילים כמעט אחד לאחד לצרכי ההתקרבות שנמצאו כבונים תחושת קוהרנטיות: רשת האנשים היא צורך השייכות, חמש השאלות של הזהות המקצועית הן עיצוב תפקיד לצורך המשמעות, וההתפתחות היא צורך המיומנות. הרעיון של קריירה רבודה וקיר הטיפוס, שבהם כל שלב נבנה על קודמו, הוא בדיוק ספירלת הרווח שהמחקר מתעד, שבה כל צעד של עיצוב תפקיד מגדיל את המשאבים לצעד הבא (Cetkovská et al., 2026).</a:t>
             </a:r>
             <a:endParaRPr lang="he-IL" sz="1600" dirty="0"/>
           </a:p>
@@ -3122,7 +3122,7 @@
           <a:bodyPr wrap="square" lIns="0" tIns="0" rIns="0" bIns="0" rtlCol="0" anchor="t"/>
           <a:lstStyle/>
           <a:p>
-            <a:pPr rtl="1" algn="just" indent="0" marL="0">
+            <a:pPr rtl="1" algn="r" indent="0" marL="0">
               <a:lnSpc>
                 <a:spcPct val="125000"/>
               </a:lnSpc>
@@ -3137,7 +3137,7 @@
                 <a:ea typeface="David" pitchFamily="34" charset="-122"/>
                 <a:cs typeface="David" pitchFamily="34" charset="-120"/>
               </a:rPr>
-              <a:t>הגורמים המניעים של הרצברג, הישג, הכרה ומשמעות, מקבילים לצרכי ההתקרבות, ואילו הגורמים ההיגייניים מקבילים לצרכי ההימנעות, מה שמסביר מדוע רק הראשונים שינו את תפיסת העבודה. עוגני הקריירה של שיין מסבירים מדוע צרכים שונים חשובים לעובדים שונים: מי שעוגנו הוא אוטונומיה יעצב את תפקידו סביב חופש הפעולה, ומי שעוגנו הוא ביטחון ויציבות יחפש קודם כול מובנות. מאמר החובה בקורס מראה שתמיכה במקום העבודה ובמשפחה משפרת את הזמינות הפסיכולוגית של העובד (Russo et al., 2016), כלומר את תחושת הניהוליות שהמחקר מזהה כמנוע החזק ביותר ליוזמה (Cetkovská et al., 2026).</a:t>
+              <a:t>‏הגורמים המניעים של הרצברג, הישג, הכרה ומשמעות, מקבילים לצרכי ההתקרבות, ואילו הגורמים ההיגייניים מקבילים לצרכי ההימנעות, מה שמסביר מדוע רק הראשונים שינו את תפיסת העבודה. עוגני הקריירה של שיין מסבירים מדוע צרכים שונים חשובים לעובדים שונים: מי שעוגנו הוא אוטונומיה יעצב את תפקידו סביב חופש הפעולה, ומי שעוגנו הוא ביטחון ויציבות יחפש קודם כול מובנות. מאמר החובה בקורס מראה שתמיכה במקום העבודה ובמשפחה משפרת את הזמינות הפסיכולוגית של העובד (Russo et al., 2016), כלומר את תחושת הניהוליות שהמחקר מזהה כמנוע החזק ביותר ליוזמה (Cetkovská et al., 2026).</a:t>
             </a:r>
             <a:endParaRPr lang="he-IL" sz="1600" dirty="0"/>
           </a:p>
@@ -3199,7 +3199,7 @@
                 <a:ea typeface="David" pitchFamily="34" charset="-122"/>
                 <a:cs typeface="David" pitchFamily="34" charset="-120"/>
               </a:rPr>
-              <a:t>ניהול קריירה בארגונים, הקריה האקדמית אונו</a:t>
+              <a:t>‏ניהול קריירה בארגונים, הקריה האקדמית אונו</a:t>
             </a:r>
             <a:endParaRPr lang="he-IL" sz="1000" dirty="0"/>
           </a:p>
@@ -3238,7 +3238,7 @@
                 <a:ea typeface="David" pitchFamily="34" charset="-122"/>
                 <a:cs typeface="David" pitchFamily="34" charset="-120"/>
               </a:rPr>
-              <a:t>10</a:t>
+              <a:t>‏10</a:t>
             </a:r>
             <a:endParaRPr lang="he-IL" sz="1100" dirty="0"/>
           </a:p>
@@ -3359,7 +3359,7 @@
                 <a:ea typeface="David" pitchFamily="34" charset="-122"/>
                 <a:cs typeface="David" pitchFamily="34" charset="-120"/>
               </a:rPr>
-              <a:t>תובנות ומסקנות</a:t>
+              <a:t>‏תובנות ומסקנות</a:t>
             </a:r>
             <a:endParaRPr lang="he-IL" sz="2800" dirty="0"/>
           </a:p>
@@ -3386,7 +3386,7 @@
           <a:bodyPr wrap="square" lIns="0" tIns="0" rIns="0" bIns="0" rtlCol="0" anchor="t"/>
           <a:lstStyle/>
           <a:p>
-            <a:pPr rtl="1" algn="just" indent="0" marL="0">
+            <a:pPr rtl="1" algn="r" indent="0" marL="0">
               <a:lnSpc>
                 <a:spcPct val="125000"/>
               </a:lnSpc>
@@ -3401,7 +3401,7 @@
                 <a:ea typeface="David" pitchFamily="34" charset="-122"/>
                 <a:cs typeface="David" pitchFamily="34" charset="-120"/>
               </a:rPr>
-              <a:t>התובנה הראשונה היא שבהירות, שליטה ומשמעות אינן רק תוצר של הסביבה: תחושת הקוהרנטיות עולה כשהעובד פועל על תפקידו, גם כשהסביבה לא השתנתה. התובנה השנייה היא שההבדל בין התקרבות להימנעות מכריע, שכן מאמצים להתנתק ולנוח חשובים להתאוששות אך אינם משנים את תפיסת העבודה. התובנה השלישית היא שהמשאבים קודמים ליוזמה: תחושת הניהוליות ניבאה עיצוב תפקיד עתידי במקדם החזק ביותר במודל, ולכן מי שמרגיש שאין לו משאבים מגן על מה שנותר במקום להשקיע (Cetkovská et al., 2026). התובנה הרביעית, מהמאמר המשלים, היא שמשאב אישי ממתן את הקשר בין האיום הטכנולוגי לבין חוסר הביטחון (Chung et al., 2025).</a:t>
+              <a:t>‏התובנה הראשונה היא שבהירות, שליטה ומשמעות אינן רק תוצר של הסביבה: תחושת הקוהרנטיות עולה כשהעובד פועל על תפקידו, גם כשהסביבה לא השתנתה. התובנה השנייה היא שההבדל בין התקרבות להימנעות מכריע, שכן מאמצים להתנתק ולנוח חשובים להתאוששות אך אינם משנים את תפיסת העבודה. התובנה השלישית היא שהמשאבים קודמים ליוזמה: תחושת הניהוליות ניבאה עיצוב תפקיד עתידי במקדם החזק ביותר במודל, ולכן מי שמרגיש שאין לו משאבים מגן על מה שנותר במקום להשקיע (Cetkovská et al., 2026). התובנה הרביעית, מהמאמר המשלים, היא שמשאב אישי ממתן את הקשר בין האיום הטכנולוגי לבין חוסר הביטחון (Chung et al., 2025).</a:t>
             </a:r>
             <a:endParaRPr lang="he-IL" sz="1600" dirty="0"/>
           </a:p>
@@ -3428,7 +3428,7 @@
           <a:bodyPr wrap="square" lIns="0" tIns="0" rIns="0" bIns="0" rtlCol="0" anchor="t"/>
           <a:lstStyle/>
           <a:p>
-            <a:pPr rtl="1" algn="just" indent="0" marL="0">
+            <a:pPr rtl="1" algn="r" indent="0" marL="0">
               <a:lnSpc>
                 <a:spcPct val="125000"/>
               </a:lnSpc>
@@ -3443,7 +3443,7 @@
                 <a:ea typeface="David" pitchFamily="34" charset="-122"/>
                 <a:cs typeface="David" pitchFamily="34" charset="-120"/>
               </a:rPr>
-              <a:t>המסקנה המרכזית היא שההתמודדות עם חוסר ודאות תעסוקתי אינה מסתכמת בהגנה מפני האיום, אלא בבנייה יזומה של בהירות, שליטה ומשמעות בתוך התפקיד הקיים, ושאת המשאבים לכך יש לבנות בתקופות של יציבות, לפני שהאיום מדלדל אותם. ברמה הארגונית, מנהלים שרוצים עובדים יוזמים בתקופת שינוי צריכים קודם כול לדאוג לתחושת ניהוליות: משאבים מספיקים, מידע ברור ומרחב לעיצוב התפקיד.</a:t>
+              <a:t>‏המסקנה המרכזית היא שההתמודדות עם חוסר ודאות תעסוקתי אינה מסתכמת בהגנה מפני האיום, אלא בבנייה יזומה של בהירות, שליטה ומשמעות בתוך התפקיד הקיים, ושאת המשאבים לכך יש לבנות בתקופות של יציבות, לפני שהאיום מדלדל אותם. ברמה הארגונית, מנהלים שרוצים עובדים יוזמים בתקופת שינוי צריכים קודם כול לדאוג לתחושת ניהוליות: משאבים מספיקים, מידע ברור ומרחב לעיצוב התפקיד.</a:t>
             </a:r>
             <a:endParaRPr lang="he-IL" sz="1600" dirty="0"/>
           </a:p>
@@ -3505,7 +3505,7 @@
                 <a:ea typeface="David" pitchFamily="34" charset="-122"/>
                 <a:cs typeface="David" pitchFamily="34" charset="-120"/>
               </a:rPr>
-              <a:t>ניהול קריירה בארגונים, הקריה האקדמית אונו</a:t>
+              <a:t>‏ניהול קריירה בארגונים, הקריה האקדמית אונו</a:t>
             </a:r>
             <a:endParaRPr lang="he-IL" sz="1000" dirty="0"/>
           </a:p>
@@ -3544,7 +3544,7 @@
                 <a:ea typeface="David" pitchFamily="34" charset="-122"/>
                 <a:cs typeface="David" pitchFamily="34" charset="-120"/>
               </a:rPr>
-              <a:t>11</a:t>
+              <a:t>‏11</a:t>
             </a:r>
             <a:endParaRPr lang="he-IL" sz="1100" dirty="0"/>
           </a:p>
@@ -3665,7 +3665,7 @@
                 <a:ea typeface="David" pitchFamily="34" charset="-122"/>
                 <a:cs typeface="David" pitchFamily="34" charset="-120"/>
               </a:rPr>
-              <a:t>דעה אישית על המאמר</a:t>
+              <a:t>‏דעה אישית על המאמר</a:t>
             </a:r>
             <a:endParaRPr lang="he-IL" sz="2800" dirty="0"/>
           </a:p>
@@ -3692,7 +3692,7 @@
           <a:bodyPr wrap="square" lIns="0" tIns="0" rIns="0" bIns="0" rtlCol="0" anchor="t"/>
           <a:lstStyle/>
           <a:p>
-            <a:pPr rtl="1" algn="just" indent="0" marL="0">
+            <a:pPr rtl="1" algn="r" indent="0" marL="0">
               <a:lnSpc>
                 <a:spcPct val="125000"/>
               </a:lnSpc>
@@ -3707,7 +3707,7 @@
                 <a:ea typeface="David" pitchFamily="34" charset="-122"/>
                 <a:cs typeface="David" pitchFamily="34" charset="-120"/>
               </a:rPr>
-              <a:t>מה שאהבתי במאמר הוא נקודת המבט, ששואלת מה עוזר לעובדים ולא רק מה מזיק להם, והעובדה שהיא נשענת על רעיון של חוקר שפעל בישראל. אהבתי את הפרקטיות שלו, שישה צרכים, שאלות פשוטות ופעולות לשבועיים, ואת הכנות של המחברים, שמקדישים כמעט עמוד שלם למגבלות, כולל הודאה שהמקדם השלילי של המובנות קשה להם להסביר. העובדה שהמאמר זמין לכולם בחינם חשובה בעיניי (Cetkovská et al., 2026).</a:t>
+              <a:t>‏מה שאהבתי במאמר הוא נקודת המבט, ששואלת מה עוזר לעובדים ולא רק מה מזיק להם, והעובדה שהיא נשענת על רעיון של חוקר שפעל בישראל. אהבתי את הפרקטיות שלו, שישה צרכים, שאלות פשוטות ופעולות לשבועיים, ואת הכנות של המחברים, שמקדישים כמעט עמוד שלם למגבלות, כולל הודאה שהמקדם השלילי של המובנות קשה להם להסביר. העובדה שהמאמר זמין לכולם בחינם חשובה בעיניי (Cetkovská et al., 2026).</a:t>
             </a:r>
             <a:endParaRPr lang="he-IL" sz="1600" dirty="0"/>
           </a:p>
@@ -3734,7 +3734,7 @@
           <a:bodyPr wrap="square" lIns="0" tIns="0" rIns="0" bIns="0" rtlCol="0" anchor="t"/>
           <a:lstStyle/>
           <a:p>
-            <a:pPr rtl="1" algn="just" indent="0" marL="0">
+            <a:pPr rtl="1" algn="r" indent="0" marL="0">
               <a:lnSpc>
                 <a:spcPct val="125000"/>
               </a:lnSpc>
@@ -3749,7 +3749,7 @@
                 <a:ea typeface="David" pitchFamily="34" charset="-122"/>
                 <a:cs typeface="David" pitchFamily="34" charset="-120"/>
               </a:rPr>
-              <a:t>חסרו לי שלושה דברים. המאמר אינו מודד חוסר ביטחון תעסוקתי במישרין, ואת החיבור לנושא בניתי דרך המאמר המשלים. המדגם גרמני ושווייצרי, בגיל ממוצע של כמעט 49 ומתרבות עבודה עם ביטחון סוציאלי גבוה, ולא ברור שהמרחב לעצב תפקיד קיים גם אצל סטודנטים ישראלים בתחילת הדרך. המחקר עוסק בשכירים בתפקיד קיים בלבד. עמדתי היא שהמאמר משלים את המסר "ממשבר להזדמנות" שנלמד בקורס: משבר הופך להזדמנות לא מעצמו, אלא כשמישהו מעצב אותו כך, ומי שמרגיש שאין לו משאבים צריך קודם תמיכה ולא עצות.</a:t>
+              <a:t>‏חסרו לי שלושה דברים. המאמר אינו מודד חוסר ביטחון תעסוקתי במישרין, ואת החיבור לנושא בניתי דרך המאמר המשלים. המדגם גרמני ושווייצרי, בגיל ממוצע של כמעט 49 ומתרבות עבודה עם ביטחון סוציאלי גבוה, ולא ברור שהמרחב לעצב תפקיד קיים גם אצל סטודנטים ישראלים בתחילת הדרך. המחקר עוסק בשכירים בתפקיד קיים בלבד. עמדתי היא שהמאמר משלים את המסר "ממשבר להזדמנות" שנלמד בקורס: משבר הופך להזדמנות לא מעצמו, אלא כשמישהו מעצב אותו כך, ומי שמרגיש שאין לו משאבים צריך קודם תמיכה ולא עצות.</a:t>
             </a:r>
             <a:endParaRPr lang="he-IL" sz="1600" dirty="0"/>
           </a:p>
@@ -3811,7 +3811,7 @@
                 <a:ea typeface="David" pitchFamily="34" charset="-122"/>
                 <a:cs typeface="David" pitchFamily="34" charset="-120"/>
               </a:rPr>
-              <a:t>ניהול קריירה בארגונים, הקריה האקדמית אונו</a:t>
+              <a:t>‏ניהול קריירה בארגונים, הקריה האקדמית אונו</a:t>
             </a:r>
             <a:endParaRPr lang="he-IL" sz="1000" dirty="0"/>
           </a:p>
@@ -3850,7 +3850,7 @@
                 <a:ea typeface="David" pitchFamily="34" charset="-122"/>
                 <a:cs typeface="David" pitchFamily="34" charset="-120"/>
               </a:rPr>
-              <a:t>12</a:t>
+              <a:t>‏12</a:t>
             </a:r>
             <a:endParaRPr lang="he-IL" sz="1100" dirty="0"/>
           </a:p>
@@ -3971,7 +3971,7 @@
                 <a:ea typeface="David" pitchFamily="34" charset="-122"/>
                 <a:cs typeface="David" pitchFamily="34" charset="-120"/>
               </a:rPr>
-              <a:t>יישום מעשי: תוכנית עיצוב תפקיד אישית</a:t>
+              <a:t>‏יישום מעשי: תוכנית עיצוב תפקיד אישית</a:t>
             </a:r>
             <a:endParaRPr lang="he-IL" sz="2800" dirty="0"/>
           </a:p>
@@ -3998,7 +3998,7 @@
           <a:bodyPr wrap="square" lIns="0" tIns="0" rIns="0" bIns="0" rtlCol="0" anchor="t"/>
           <a:lstStyle/>
           <a:p>
-            <a:pPr rtl="1" algn="just" indent="0" marL="0">
+            <a:pPr rtl="1" algn="r" indent="0" marL="0">
               <a:lnSpc>
                 <a:spcPct val="125000"/>
               </a:lnSpc>
@@ -4013,7 +4013,7 @@
                 <a:ea typeface="David" pitchFamily="34" charset="-122"/>
                 <a:cs typeface="David" pitchFamily="34" charset="-120"/>
               </a:rPr>
-              <a:t>ממצאי המאמר תורגמו לכלי אישי המבוסס על ארבעת צרכי ההתקרבות, שנמצאו כבונים תחושת קוהרנטיות. לכל צורך שאלה מנחה ודוגמאות לפעולה שאפשר לבצע בשבועיים, גם בתפקיד סטודנטיאלי או במשרה חלקית. את צרכי ההימנעות מומלץ לטפח לצורך התאוששות, אך לפי המאמר הם אינם משנים את תפיסת העבודה (Cetkovská et al., 2026).</a:t>
+              <a:t>‏ממצאי המאמר תורגמו לכלי אישי המבוסס על ארבעת צרכי ההתקרבות, שנמצאו כבונים תחושת קוהרנטיות. לכל צורך שאלה מנחה ודוגמאות לפעולה שאפשר לבצע בשבועיים, גם בתפקיד סטודנטיאלי או במשרה חלקית. את צרכי ההימנעות מומלץ לטפח לצורך התאוששות, אך לפי המאמר הם אינם משנים את תפיסת העבודה (Cetkovská et al., 2026).</a:t>
             </a:r>
             <a:endParaRPr lang="he-IL" sz="1500" dirty="0"/>
           </a:p>
@@ -4127,7 +4127,7 @@
                 <a:ea typeface="David" pitchFamily="34" charset="-122"/>
                 <a:cs typeface="David" pitchFamily="34" charset="-120"/>
               </a:rPr>
-              <a:t>אוטונומיה</a:t>
+              <a:t>‏אוטונומיה</a:t>
             </a:r>
             <a:endParaRPr lang="he-IL" sz="1600" dirty="0"/>
           </a:p>
@@ -4169,7 +4169,7 @@
                 <a:ea typeface="David" pitchFamily="34" charset="-122"/>
                 <a:cs typeface="David" pitchFamily="34" charset="-120"/>
               </a:rPr>
-              <a:t>שאלה מנחה: באילו החלטות קטנות אני יכול/ה לבחור בעצמי?</a:t>
+              <a:t>‏שאלה מנחה: באילו החלטות קטנות אני יכול/ה לבחור בעצמי?</a:t>
             </a:r>
             <a:endParaRPr lang="he-IL" sz="1250" dirty="0"/>
           </a:p>
@@ -4198,7 +4198,7 @@
                 <a:ea typeface="David" pitchFamily="34" charset="-122"/>
                 <a:cs typeface="David" pitchFamily="34" charset="-120"/>
               </a:rPr>
-              <a:t>לשבועיים הקרובים: לקבוע את סדר המשימות של הבוקר; להציע דרך משלי למשימה חוזרת; שעה קבועה ללא הפרעות.</a:t>
+              <a:t>‏לשבועיים הקרובים: לקבוע את סדר המשימות של הבוקר; להציע דרך משלי למשימה חוזרת; שעה קבועה ללא הפרעות.</a:t>
             </a:r>
             <a:endParaRPr lang="he-IL" sz="1250" dirty="0"/>
           </a:p>
@@ -4312,7 +4312,7 @@
                 <a:ea typeface="David" pitchFamily="34" charset="-122"/>
                 <a:cs typeface="David" pitchFamily="34" charset="-120"/>
               </a:rPr>
-              <a:t>מיומנות</a:t>
+              <a:t>‏מיומנות</a:t>
             </a:r>
             <a:endParaRPr lang="he-IL" sz="1600" dirty="0"/>
           </a:p>
@@ -4354,7 +4354,7 @@
                 <a:ea typeface="David" pitchFamily="34" charset="-122"/>
                 <a:cs typeface="David" pitchFamily="34" charset="-120"/>
               </a:rPr>
-              <a:t>שאלה מנחה: איזה אתגר בגובה הנכון יגרום לי להרגיש שאני מתקדם/ת?</a:t>
+              <a:t>‏שאלה מנחה: איזה אתגר בגובה הנכון יגרום לי להרגיש שאני מתקדם/ת?</a:t>
             </a:r>
             <a:endParaRPr lang="he-IL" sz="1250" dirty="0"/>
           </a:p>
@@ -4383,7 +4383,7 @@
                 <a:ea typeface="David" pitchFamily="34" charset="-122"/>
                 <a:cs typeface="David" pitchFamily="34" charset="-120"/>
               </a:rPr>
-              <a:t>לשבועיים הקרובים: משימה אחת מעט מעבר ליכולת; כלי בינה מלאכותית אחד בתחום; לתעד בסוף השבוע דבר אחד שלמדתי.</a:t>
+              <a:t>‏לשבועיים הקרובים: משימה אחת מעט מעבר ליכולת; כלי בינה מלאכותית אחד בתחום; לתעד בסוף השבוע דבר אחד שלמדתי.</a:t>
             </a:r>
             <a:endParaRPr lang="he-IL" sz="1250" dirty="0"/>
           </a:p>
@@ -4497,7 +4497,7 @@
                 <a:ea typeface="David" pitchFamily="34" charset="-122"/>
                 <a:cs typeface="David" pitchFamily="34" charset="-120"/>
               </a:rPr>
-              <a:t>משמעות</a:t>
+              <a:t>‏משמעות</a:t>
             </a:r>
             <a:endParaRPr lang="he-IL" sz="1600" dirty="0"/>
           </a:p>
@@ -4539,7 +4539,7 @@
                 <a:ea typeface="David" pitchFamily="34" charset="-122"/>
                 <a:cs typeface="David" pitchFamily="34" charset="-120"/>
               </a:rPr>
-              <a:t>שאלה מנחה: איזה חלק בעבודה מתחבר למה שחשוב לי, ואיך מגדילים אותו?</a:t>
+              <a:t>‏שאלה מנחה: איזה חלק בעבודה מתחבר למה שחשוב לי, ואיך מגדילים אותו?</a:t>
             </a:r>
             <a:endParaRPr lang="he-IL" sz="1250" dirty="0"/>
           </a:p>
@@ -4568,7 +4568,7 @@
                 <a:ea typeface="David" pitchFamily="34" charset="-122"/>
                 <a:cs typeface="David" pitchFamily="34" charset="-120"/>
               </a:rPr>
-              <a:t>לשבועיים הקרובים: לזהות למי העבודה שלי עוזרת ולדבר איתו; לנסח במשפט למה התפקיד חשוב; להתנדב למשימה שמתחברת לערכים.</a:t>
+              <a:t>‏לשבועיים הקרובים: לזהות למי העבודה שלי עוזרת ולדבר איתו; לנסח במשפט למה התפקיד חשוב; להתנדב למשימה שמתחברת לערכים.</a:t>
             </a:r>
             <a:endParaRPr lang="he-IL" sz="1250" dirty="0"/>
           </a:p>
@@ -4682,7 +4682,7 @@
                 <a:ea typeface="David" pitchFamily="34" charset="-122"/>
                 <a:cs typeface="David" pitchFamily="34" charset="-120"/>
               </a:rPr>
-              <a:t>שייכות</a:t>
+              <a:t>‏שייכות</a:t>
             </a:r>
             <a:endParaRPr lang="he-IL" sz="1600" dirty="0"/>
           </a:p>
@@ -4724,7 +4724,7 @@
                 <a:ea typeface="David" pitchFamily="34" charset="-122"/>
                 <a:cs typeface="David" pitchFamily="34" charset="-120"/>
               </a:rPr>
-              <a:t>שאלה מנחה: עם מי בעבודה אני רוצה קשר אמיתי יותר?</a:t>
+              <a:t>‏שאלה מנחה: עם מי בעבודה אני רוצה קשר אמיתי יותר?</a:t>
             </a:r>
             <a:endParaRPr lang="he-IL" sz="1250" dirty="0"/>
           </a:p>
@@ -4753,7 +4753,7 @@
                 <a:ea typeface="David" pitchFamily="34" charset="-122"/>
                 <a:cs typeface="David" pitchFamily="34" charset="-120"/>
               </a:rPr>
-              <a:t>לשבועיים הקרובים: הפסקת קפה קבועה עם עמית; להציע עזרה לפני שמבקשים; להצטרף לפרויקט חוצה מחלקות.</a:t>
+              <a:t>‏לשבועיים הקרובים: הפסקת קפה קבועה עם עמית; להציע עזרה לפני שמבקשים; להצטרף לפרויקט חוצה מחלקות.</a:t>
             </a:r>
             <a:endParaRPr lang="he-IL" sz="1250" dirty="0"/>
           </a:p>
@@ -4792,7 +4792,7 @@
                 <a:ea typeface="David" pitchFamily="34" charset="-122"/>
                 <a:cs typeface="David" pitchFamily="34" charset="-120"/>
               </a:rPr>
-              <a:t>איור 2: תוכנית עיצוב תפקיד אישית לפי ארבעת צרכי ההתקרבות. פיתוח על פי Cetkovská et al. (2026)</a:t>
+              <a:t>‏איור 2: תוכנית עיצוב תפקיד אישית לפי ארבעת צרכי ההתקרבות. פיתוח על פי Cetkovská et al. (2026)</a:t>
             </a:r>
             <a:endParaRPr lang="he-IL" sz="1100" dirty="0"/>
           </a:p>
@@ -4854,7 +4854,7 @@
                 <a:ea typeface="David" pitchFamily="34" charset="-122"/>
                 <a:cs typeface="David" pitchFamily="34" charset="-120"/>
               </a:rPr>
-              <a:t>ניהול קריירה בארגונים, הקריה האקדמית אונו</a:t>
+              <a:t>‏ניהול קריירה בארגונים, הקריה האקדמית אונו</a:t>
             </a:r>
             <a:endParaRPr lang="he-IL" sz="1000" dirty="0"/>
           </a:p>
@@ -4893,7 +4893,7 @@
                 <a:ea typeface="David" pitchFamily="34" charset="-122"/>
                 <a:cs typeface="David" pitchFamily="34" charset="-120"/>
               </a:rPr>
-              <a:t>13</a:t>
+              <a:t>‏13</a:t>
             </a:r>
             <a:endParaRPr lang="he-IL" sz="1100" dirty="0"/>
           </a:p>
@@ -5014,7 +5014,7 @@
                 <a:ea typeface="David" pitchFamily="34" charset="-122"/>
                 <a:cs typeface="David" pitchFamily="34" charset="-120"/>
               </a:rPr>
-              <a:t>אמצעי עזר להמחשה ולהפעלה</a:t>
+              <a:t>‏אמצעי עזר להמחשה ולהפעלה</a:t>
             </a:r>
             <a:endParaRPr lang="he-IL" sz="2800" dirty="0"/>
           </a:p>
@@ -5041,7 +5041,7 @@
           <a:bodyPr wrap="square" lIns="0" tIns="0" rIns="0" bIns="0" rtlCol="0" anchor="t"/>
           <a:lstStyle/>
           <a:p>
-            <a:pPr rtl="1" algn="just" indent="0" marL="0">
+            <a:pPr rtl="1" algn="r" indent="0" marL="0">
               <a:lnSpc>
                 <a:spcPct val="125000"/>
               </a:lnSpc>
@@ -5056,7 +5056,7 @@
                 <a:ea typeface="David" pitchFamily="34" charset="-122"/>
                 <a:cs typeface="David" pitchFamily="34" charset="-120"/>
               </a:rPr>
-              <a:t>כתבת עיתון וסקר פתיחה. ההצגה נפתחת בכותרת מהעיתונות הכלכלית על התייעלות באמצעות בינה מלאכותית בענף ההייטק ("הקשיים של מנהלי הייטק", 2026), ולאחריה הכיתה מתבקשת לדרג, בסולם 1 עד 5, עד כמה העבודה או הלימודים הנוכחיים מרגישים ברורים, בשליטה ומשמעותיים. שלוש השאלות הן שלושת רכיבי תחושת הקוהרנטיות בעבודה, והתוצאות נשמרות לדיון בסיום.</a:t>
+              <a:t>‏כתבת עיתון וסקר פתיחה. ההצגה נפתחת בכותרת מהעיתונות הכלכלית על התייעלות באמצעות בינה מלאכותית בענף ההייטק ("הקשיים של מנהלי הייטק", 2026), ולאחריה הכיתה מתבקשת לדרג, בסולם 1 עד 5, עד כמה העבודה או הלימודים הנוכחיים מרגישים ברורים, בשליטה ומשמעותיים. שלוש השאלות הן שלושת רכיבי תחושת הקוהרנטיות בעבודה, והתוצאות נשמרות לדיון בסיום.</a:t>
             </a:r>
             <a:endParaRPr lang="he-IL" sz="1600" dirty="0"/>
           </a:p>
@@ -5083,7 +5083,7 @@
           <a:bodyPr wrap="square" lIns="0" tIns="0" rIns="0" bIns="0" rtlCol="0" anchor="t"/>
           <a:lstStyle/>
           <a:p>
-            <a:pPr rtl="1" algn="just" indent="0" marL="0">
+            <a:pPr rtl="1" algn="r" indent="0" marL="0">
               <a:lnSpc>
                 <a:spcPct val="125000"/>
               </a:lnSpc>
@@ -5098,7 +5098,7 @@
                 <a:ea typeface="David" pitchFamily="34" charset="-122"/>
                 <a:cs typeface="David" pitchFamily="34" charset="-120"/>
               </a:rPr>
-              <a:t>סרטון. יוקרן קטע של כ-75 שניות מהרצאת TED של חוקרת החוסן לוסי הון, המציעה שלושה עקרונות: לקבל שדברים רעים קורים, לבחור במה להתמקד ולהפנות את הקשב למה שבשליטתנו, ולשאול על כל פעולה האם היא עוזרת או פוגעת (Hone, 2019). שני העקרונות האחרונים הם, במונחי המאמר, חיזוק המובנות והניהוליות והבחירה לעצב את המצב במקום רק לשרוד אותו.</a:t>
+              <a:t>‏סרטון. יוקרן קטע של כ-75 שניות מהרצאת TED של חוקרת החוסן לוסי הון, המציעה שלושה עקרונות: לקבל שדברים רעים קורים, לבחור במה להתמקד ולהפנות את הקשב למה שבשליטתנו, ולשאול על כל פעולה האם היא עוזרת או פוגעת (Hone, 2019). שני העקרונות האחרונים הם, במונחי המאמר, חיזוק המובנות והניהוליות והבחירה לעצב את המצב במקום רק לשרוד אותו.</a:t>
             </a:r>
             <a:endParaRPr lang="he-IL" sz="1600" dirty="0"/>
           </a:p>
@@ -5173,7 +5173,7 @@
           <a:bodyPr wrap="square" lIns="0" tIns="0" rIns="0" bIns="0" rtlCol="0" anchor="t"/>
           <a:lstStyle/>
           <a:p>
-            <a:pPr rtl="1" algn="just" indent="0" marL="0">
+            <a:pPr rtl="1" algn="r" indent="0" marL="0">
               <a:lnSpc>
                 <a:spcPct val="125000"/>
               </a:lnSpc>
@@ -5188,7 +5188,7 @@
                 <a:ea typeface="David" pitchFamily="34" charset="-122"/>
                 <a:cs typeface="David" pitchFamily="34" charset="-120"/>
               </a:rPr>
-              <a:t>הפעלה. כל סטודנט בוחר צורך התקרבות אחד מתוך ארבעת הצרכים שבאיור 2, כותב פעולה אחת קונקרטית ומועד לביצועה, ומשתף את השכן במשפט אחד. לאחר מכן נאספות שתיים או שלוש דוגמאות מהכיתה ומחוברות לממצא: פעולות מסוג זה, לפי המאמר, מנבאות עלייה בבהירות, בשליטה ובמשמעות חצי שנה מאוחר יותר (Cetkovská et al., 2026). משך ההפעלה כשתי דקות.</a:t>
+              <a:t>‏הפעלה. כל סטודנט בוחר צורך התקרבות אחד מתוך ארבעת הצרכים שבאיור 2, כותב פעולה אחת קונקרטית ומועד לביצועה, ומשתף את השכן במשפט אחד. לאחר מכן נאספות שתיים או שלוש דוגמאות מהכיתה ומחוברות לממצא: פעולות מסוג זה, לפי המאמר, מנבאות עלייה בבהירות, בשליטה ובמשמעות חצי שנה מאוחר יותר (Cetkovská et al., 2026). משך ההפעלה כשתי דקות.</a:t>
             </a:r>
             <a:endParaRPr lang="he-IL" sz="1600" dirty="0"/>
           </a:p>
@@ -5250,7 +5250,7 @@
                 <a:ea typeface="David" pitchFamily="34" charset="-122"/>
                 <a:cs typeface="David" pitchFamily="34" charset="-120"/>
               </a:rPr>
-              <a:t>ניהול קריירה בארגונים, הקריה האקדמית אונו</a:t>
+              <a:t>‏ניהול קריירה בארגונים, הקריה האקדמית אונו</a:t>
             </a:r>
             <a:endParaRPr lang="he-IL" sz="1000" dirty="0"/>
           </a:p>
@@ -5289,7 +5289,7 @@
                 <a:ea typeface="David" pitchFamily="34" charset="-122"/>
                 <a:cs typeface="David" pitchFamily="34" charset="-120"/>
               </a:rPr>
-              <a:t>14</a:t>
+              <a:t>‏14</a:t>
             </a:r>
             <a:endParaRPr lang="he-IL" sz="1100" dirty="0"/>
           </a:p>
@@ -5410,7 +5410,7 @@
                 <a:ea typeface="David" pitchFamily="34" charset="-122"/>
                 <a:cs typeface="David" pitchFamily="34" charset="-120"/>
               </a:rPr>
-              <a:t>סיכום</a:t>
+              <a:t>‏סיכום</a:t>
             </a:r>
             <a:endParaRPr lang="he-IL" sz="2800" dirty="0"/>
           </a:p>
@@ -5437,7 +5437,7 @@
           <a:bodyPr wrap="square" lIns="0" tIns="0" rIns="0" bIns="0" rtlCol="0" anchor="t"/>
           <a:lstStyle/>
           <a:p>
-            <a:pPr rtl="1" algn="just" indent="0" marL="0">
+            <a:pPr rtl="1" algn="r" indent="0" marL="0">
               <a:lnSpc>
                 <a:spcPct val="125000"/>
               </a:lnSpc>
@@ -5452,7 +5452,7 @@
                 <a:ea typeface="David" pitchFamily="34" charset="-122"/>
                 <a:cs typeface="David" pitchFamily="34" charset="-120"/>
               </a:rPr>
-              <a:t>העבודה פתחה בשאלה מה מאפשר לעובדים להישאר בריאים ומתפקדים כשעולם העבודה אינו יציב. התשובה שעלתה ממחקר האורך של צטקובסקה ואחרים היא שתחושת הקוהרנטיות בעבודה היא משאב דינמי שהעובד יכול לחזק בעצמו באמצעות עיצוב תפקיד המכוון לצרכי אוטונומיה, מיומנות, משמעות ושייכות, ושהמשאב הזה בתורו מזין יוזמה נוספת (Cetkovská et al., 2026). המאמר המשלים הראה שהמודעות לבינה מלאכותית היא מקור מרכזי לחוסר הביטחון של ימינו ושמשאב אישי ממתן אותו (Chung et al., 2025).</a:t>
+              <a:t>‏העבודה פתחה בשאלה מה מאפשר לעובדים להישאר בריאים ומתפקדים כשעולם העבודה אינו יציב. התשובה שעלתה ממחקר האורך של צטקובסקה ואחרים היא שתחושת הקוהרנטיות בעבודה היא משאב דינמי שהעובד יכול לחזק בעצמו באמצעות עיצוב תפקיד המכוון לצרכי אוטונומיה, מיומנות, משמעות ושייכות, ושהמשאב הזה בתורו מזין יוזמה נוספת (Cetkovská et al., 2026). המאמר המשלים הראה שהמודעות לבינה מלאכותית היא מקור מרכזי לחוסר הביטחון של ימינו ושמשאב אישי ממתן אותו (Chung et al., 2025).</a:t>
             </a:r>
             <a:endParaRPr lang="he-IL" sz="1600" dirty="0"/>
           </a:p>
@@ -5479,7 +5479,7 @@
           <a:bodyPr wrap="square" lIns="0" tIns="0" rIns="0" bIns="0" rtlCol="0" anchor="t"/>
           <a:lstStyle/>
           <a:p>
-            <a:pPr rtl="1" algn="just" indent="0" marL="0">
+            <a:pPr rtl="1" algn="r" indent="0" marL="0">
               <a:lnSpc>
                 <a:spcPct val="125000"/>
               </a:lnSpc>
@@ -5494,7 +5494,7 @@
                 <a:ea typeface="David" pitchFamily="34" charset="-122"/>
                 <a:cs typeface="David" pitchFamily="34" charset="-120"/>
               </a:rPr>
-              <a:t>מכאן ההמלצות היישומיות. לסטודנט: לבחור בכל שבועיים צורך התקרבות אחד ופעולה אחת של עיצוב תפקיד, ללמוד כלי בינה מלאכותית אחד בתחום העיסוק, ולתעד בסוף כל שבוע דבר אחד שנלמד. למנהל: לטפח תחושת ניהוליות באמצעות משאבים ומידע ברור, לתת מרחב לעיצוב תפקיד, ולתקשר שינויים טכנולוגיים בשקיפות. את חוסר הוודאות לא תמיד אפשר למנוע. את הבהירות, השליטה והמשמעות בתוך התפקיד אפשר לבנות.</a:t>
+              <a:t>‏מכאן ההמלצות היישומיות. לסטודנט: לבחור בכל שבועיים צורך התקרבות אחד ופעולה אחת של עיצוב תפקיד, ללמוד כלי בינה מלאכותית אחד בתחום העיסוק, ולתעד בסוף כל שבוע דבר אחד שנלמד. למנהל: לטפח תחושת ניהוליות באמצעות משאבים ומידע ברור, לתת מרחב לעיצוב תפקיד, ולתקשר שינויים טכנולוגיים בשקיפות. את חוסר הוודאות לא תמיד אפשר למנוע. את הבהירות, השליטה והמשמעות בתוך התפקיד אפשר לבנות.</a:t>
             </a:r>
             <a:endParaRPr lang="he-IL" sz="1600" dirty="0"/>
           </a:p>
@@ -5533,7 +5533,7 @@
                 <a:ea typeface="David" pitchFamily="34" charset="-122"/>
                 <a:cs typeface="David" pitchFamily="34" charset="-120"/>
               </a:rPr>
-              <a:t>תודה. אשמח לשאלות.</a:t>
+              <a:t>‏תודה. אשמח לשאלות.</a:t>
             </a:r>
             <a:endParaRPr lang="he-IL" sz="1600" dirty="0"/>
           </a:p>
@@ -5595,7 +5595,7 @@
                 <a:ea typeface="David" pitchFamily="34" charset="-122"/>
                 <a:cs typeface="David" pitchFamily="34" charset="-120"/>
               </a:rPr>
-              <a:t>ניהול קריירה בארגונים, הקריה האקדמית אונו</a:t>
+              <a:t>‏ניהול קריירה בארגונים, הקריה האקדמית אונו</a:t>
             </a:r>
             <a:endParaRPr lang="he-IL" sz="1000" dirty="0"/>
           </a:p>
@@ -5634,7 +5634,7 @@
                 <a:ea typeface="David" pitchFamily="34" charset="-122"/>
                 <a:cs typeface="David" pitchFamily="34" charset="-120"/>
               </a:rPr>
-              <a:t>15</a:t>
+              <a:t>‏15</a:t>
             </a:r>
             <a:endParaRPr lang="he-IL" sz="1100" dirty="0"/>
           </a:p>
@@ -5755,7 +5755,7 @@
                 <a:ea typeface="David" pitchFamily="34" charset="-122"/>
                 <a:cs typeface="David" pitchFamily="34" charset="-120"/>
               </a:rPr>
-              <a:t>רשימת מקורות</a:t>
+              <a:t>‏רשימת מקורות</a:t>
             </a:r>
             <a:endParaRPr lang="he-IL" sz="2800" dirty="0"/>
           </a:p>
@@ -5797,7 +5797,7 @@
                 <a:ea typeface="David" pitchFamily="34" charset="-122"/>
                 <a:cs typeface="David" pitchFamily="34" charset="-120"/>
               </a:rPr>
-              <a:t>בנק ישראל. (2025, 11 במרץ). ההשפעה הצפויה של בינה מלאכותית יוצרת על העובדים: השלכות על המדיניות בשוק העבודה [תיבה מתוך דוח בנק ישראל לשנת 2024].</a:t>
+              <a:t>‏בנק ישראל. (2025, 11 במרץ). ההשפעה הצפויה של בינה מלאכותית יוצרת על העובדים: השלכות על המדיניות בשוק העבודה [תיבה מתוך דוח בנק ישראל לשנת 2024].</a:t>
             </a:r>
             <a:endParaRPr lang="he-IL" sz="1300" dirty="0"/>
           </a:p>
@@ -5814,7 +5814,7 @@
                 <a:ea typeface="David" pitchFamily="34" charset="-122"/>
                 <a:cs typeface="David" pitchFamily="34" charset="-120"/>
               </a:rPr>
-              <a:t>הקשיים של מנהלי הייטק ב-2026: גיוס עובדים מתאימים והתייעלות AI. (2026, 21 ביוני). TheMarker.</a:t>
+              <a:t>‏הקשיים של מנהלי הייטק ב-2026: גיוס עובדים מתאימים והתייעלות AI. (2026, 21 ביוני). TheMarker.</a:t>
             </a:r>
             <a:endParaRPr lang="he-IL" sz="1300" dirty="0"/>
           </a:p>
@@ -5975,7 +5975,7 @@
                 <a:ea typeface="David" pitchFamily="34" charset="-122"/>
                 <a:cs typeface="David" pitchFamily="34" charset="-120"/>
               </a:rPr>
-              <a:t>ניהול קריירה בארגונים, הקריה האקדמית אונו</a:t>
+              <a:t>‏ניהול קריירה בארגונים, הקריה האקדמית אונו</a:t>
             </a:r>
             <a:endParaRPr lang="he-IL" sz="1000" dirty="0"/>
           </a:p>
@@ -6014,7 +6014,7 @@
                 <a:ea typeface="David" pitchFamily="34" charset="-122"/>
                 <a:cs typeface="David" pitchFamily="34" charset="-120"/>
               </a:rPr>
-              <a:t>16</a:t>
+              <a:t>‏16</a:t>
             </a:r>
             <a:endParaRPr lang="he-IL" sz="1100" dirty="0"/>
           </a:p>
@@ -6135,7 +6135,7 @@
                 <a:ea typeface="David" pitchFamily="34" charset="-122"/>
                 <a:cs typeface="David" pitchFamily="34" charset="-120"/>
               </a:rPr>
-              <a:t>מבוא: הצגת הנושא</a:t>
+              <a:t>‏מבוא: הצגת הנושא</a:t>
             </a:r>
             <a:endParaRPr lang="he-IL" sz="2800" dirty="0"/>
           </a:p>
@@ -6162,7 +6162,7 @@
           <a:bodyPr wrap="square" lIns="0" tIns="0" rIns="0" bIns="0" rtlCol="0" anchor="t"/>
           <a:lstStyle/>
           <a:p>
-            <a:pPr rtl="1" algn="just" indent="0" marL="0">
+            <a:pPr rtl="1" algn="r" indent="0" marL="0">
               <a:lnSpc>
                 <a:spcPct val="125000"/>
               </a:lnSpc>
@@ -6177,7 +6177,7 @@
                 <a:ea typeface="David" pitchFamily="34" charset="-122"/>
                 <a:cs typeface="David" pitchFamily="34" charset="-120"/>
               </a:rPr>
-              <a:t>עולם העבודה של שנת 2026 מתאפיין באי-ודאות. גלי ההתייעלות בענף ההייטק, כניסת הבינה המלאכותית היוצרת לתפקידי צווארון לבן, המלחמה ושירות המילואים הממושך והמעבר לצורות העסקה גמישות יצרו מציאות שבה גם עובדים בעלי ותק אינם יודעים כיצד ייראה תפקידם בעוד שנה. תיבה בדוח בנק ישראל לשנת 2024 העריכה כי כחמישית מהמועסקים בישראל עובדים במקצועות שבהם הביקוש צפוי לרדת באופן משמעותי עם התרחבות השימוש בבינה מלאכותית (בנק ישראל, 2025), ובעיתונות הכלכלית דווח כי ההתייעלות באמצעות בינה מלאכותית עומדת בראש סדר היום של מנהלי ההייטק ("הקשיים של מנהלי הייטק", 2026). חוסר ביטחון תעסוקתי, החשש לאבד את המשרה או את מאפייניה החשובים, הפך מאירוע חריג לתנאי קבוע (Chung et al., 2025).</a:t>
+              <a:t>‏עולם העבודה של שנת 2026 מתאפיין באי-ודאות. גלי ההתייעלות בענף ההייטק, כניסת הבינה המלאכותית היוצרת לתפקידי צווארון לבן, המלחמה ושירות המילואים הממושך והמעבר לצורות העסקה גמישות יצרו מציאות שבה גם עובדים בעלי ותק אינם יודעים כיצד ייראה תפקידם בעוד שנה. תיבה בדוח בנק ישראל לשנת 2024 העריכה כי כחמישית מהמועסקים בישראל עובדים במקצועות שבהם הביקוש צפוי לרדת באופן משמעותי עם התרחבות השימוש בבינה מלאכותית (בנק ישראל, 2025), ובעיתונות הכלכלית דווח כי ההתייעלות באמצעות בינה מלאכותית עומדת בראש סדר היום של מנהלי ההייטק ("הקשיים של מנהלי הייטק", 2026). חוסר ביטחון תעסוקתי, החשש לאבד את המשרה או את מאפייניה החשובים, הפך מאירוע חריג לתנאי קבוע (Chung et al., 2025).</a:t>
             </a:r>
             <a:endParaRPr lang="he-IL" sz="1600" dirty="0"/>
           </a:p>
@@ -6204,7 +6204,7 @@
           <a:bodyPr wrap="square" lIns="0" tIns="0" rIns="0" bIns="0" rtlCol="0" anchor="t"/>
           <a:lstStyle/>
           <a:p>
-            <a:pPr rtl="1" algn="just" indent="0" marL="0">
+            <a:pPr rtl="1" algn="r" indent="0" marL="0">
               <a:lnSpc>
                 <a:spcPct val="125000"/>
               </a:lnSpc>
@@ -6219,7 +6219,7 @@
                 <a:ea typeface="David" pitchFamily="34" charset="-122"/>
                 <a:cs typeface="David" pitchFamily="34" charset="-120"/>
               </a:rPr>
-              <a:t>רוב המחקר בתחום שואל מה הנזק שאי-הוודאות גורמת. עבודה זו בוחרת בשאלה ההפוכה, שהציב אהרן אנטונובסקי מאוניברסיטת בן-גוריון: מה מאפשר לעובדים להישאר בריאים ומתפקדים גם כשהסביבה אינה יציבה (Antonovsky, 1987, כפי שמצוטט אצל Cetkovská et al., 2026). המאמר שנבחר מציע תשובה שנמצאת בשליטת העובד עצמו.</a:t>
+              <a:t>‏רוב המחקר בתחום שואל מה הנזק שאי-הוודאות גורמת. עבודה זו בוחרת בשאלה ההפוכה, שהציב אהרן אנטונובסקי מאוניברסיטת בן-גוריון: מה מאפשר לעובדים להישאר בריאים ומתפקדים גם כשהסביבה אינה יציבה (Antonovsky, 1987, כפי שמצוטט אצל Cetkovská et al., 2026). המאמר שנבחר מציע תשובה שנמצאת בשליטת העובד עצמו.</a:t>
             </a:r>
             <a:endParaRPr lang="he-IL" sz="1600" dirty="0"/>
           </a:p>
@@ -6281,7 +6281,7 @@
                 <a:ea typeface="David" pitchFamily="34" charset="-122"/>
                 <a:cs typeface="David" pitchFamily="34" charset="-120"/>
               </a:rPr>
-              <a:t>ניהול קריירה בארגונים, הקריה האקדמית אונו</a:t>
+              <a:t>‏ניהול קריירה בארגונים, הקריה האקדמית אונו</a:t>
             </a:r>
             <a:endParaRPr lang="he-IL" sz="1000" dirty="0"/>
           </a:p>
@@ -6320,7 +6320,7 @@
                 <a:ea typeface="David" pitchFamily="34" charset="-122"/>
                 <a:cs typeface="David" pitchFamily="34" charset="-120"/>
               </a:rPr>
-              <a:t>2</a:t>
+              <a:t>‏2</a:t>
             </a:r>
             <a:endParaRPr lang="he-IL" sz="1100" dirty="0"/>
           </a:p>
@@ -6441,7 +6441,7 @@
                 <a:ea typeface="David" pitchFamily="34" charset="-122"/>
                 <a:cs typeface="David" pitchFamily="34" charset="-120"/>
               </a:rPr>
-              <a:t>מבוא: הצגת המאמר</a:t>
+              <a:t>‏מבוא: הצגת המאמר</a:t>
             </a:r>
             <a:endParaRPr lang="he-IL" sz="2800" dirty="0"/>
           </a:p>
@@ -6507,7 +6507,7 @@
           <a:bodyPr wrap="square" lIns="0" tIns="0" rIns="0" bIns="0" rtlCol="0" anchor="t"/>
           <a:lstStyle/>
           <a:p>
-            <a:pPr rtl="1" algn="just" indent="0" marL="0">
+            <a:pPr rtl="1" algn="r" indent="0" marL="0">
               <a:lnSpc>
                 <a:spcPct val="125000"/>
               </a:lnSpc>
@@ -6522,7 +6522,7 @@
                 <a:ea typeface="David" pitchFamily="34" charset="-122"/>
                 <a:cs typeface="David" pitchFamily="34" charset="-120"/>
               </a:rPr>
-              <a:t>המאמר שנבחר הוא מחקר אמפירי כמותי במערך אורך, שפורסם בשנת 2026 בכתב העת השפיט Scandinavian Journal of Work and Organizational Psychology, היוצא לאור בהוצאת אוניברסיטת סטוקהולם, בגישה פתוחה מלאה. מחבריו הם קריסטינה צטקובסקה מאוניברסיטת קארל בפראג, וגאורג באואר ומרטין טושל מהמרכז לסלוטוגנזה באוניברסיטת ציריך, והמחקר מומן על ידי הקרן הלאומית השווייצרית למדע (Cetkovská et al., 2026).</a:t>
+              <a:t>‏המאמר שנבחר הוא מחקר אמפירי כמותי במערך אורך, שפורסם בשנת 2026 בכתב העת השפיט Scandinavian Journal of Work and Organizational Psychology, היוצא לאור בהוצאת אוניברסיטת סטוקהולם, בגישה פתוחה מלאה. מחבריו הם קריסטינה צטקובסקה מאוניברסיטת קארל בפראג, וגאורג באואר ומרטין טושל מהמרכז לסלוטוגנזה באוניברסיטת ציריך, והמחקר מומן על ידי הקרן הלאומית השווייצרית למדע (Cetkovská et al., 2026).</a:t>
             </a:r>
             <a:endParaRPr lang="he-IL" sz="1600" dirty="0"/>
           </a:p>
@@ -6549,7 +6549,7 @@
           <a:bodyPr wrap="square" lIns="0" tIns="0" rIns="0" bIns="0" rtlCol="0" anchor="t"/>
           <a:lstStyle/>
           <a:p>
-            <a:pPr rtl="1" algn="just" indent="0" marL="0">
+            <a:pPr rtl="1" algn="r" indent="0" marL="0">
               <a:lnSpc>
                 <a:spcPct val="125000"/>
               </a:lnSpc>
@@ -6564,7 +6564,7 @@
                 <a:ea typeface="David" pitchFamily="34" charset="-122"/>
                 <a:cs typeface="David" pitchFamily="34" charset="-120"/>
               </a:rPr>
-              <a:t>מדובר במחקר פאנל בשני גלי מדידה בהפרש של שישה חודשים, שבו השתתפו 924 עובדים מגרמניה ומשווייץ. המאמר נבחר משום שהוא שואל מה עוזר לעובדים ולא רק מה מזיק להם, משום שהוא מציע כלי שאינו תלוי בארגון, ומשום שהוא עומד בדרישות המטלה: מאמר שפיט מחמש השנים האחרונות, מקיף ומהימן, הזמין במלואו לכל קורא (Cetkovská et al., 2026).</a:t>
+              <a:t>‏מדובר במחקר פאנל בשני גלי מדידה בהפרש של שישה חודשים, שבו השתתפו 924 עובדים מגרמניה ומשווייץ. המאמר נבחר משום שהוא שואל מה עוזר לעובדים ולא רק מה מזיק להם, משום שהוא מציע כלי שאינו תלוי בארגון, ומשום שהוא עומד בדרישות המטלה: מאמר שפיט מחמש השנים האחרונות, מקיף ומהימן, הזמין במלואו לכל קורא (Cetkovská et al., 2026).</a:t>
             </a:r>
             <a:endParaRPr lang="he-IL" sz="1600" dirty="0"/>
           </a:p>
@@ -6626,7 +6626,7 @@
                 <a:ea typeface="David" pitchFamily="34" charset="-122"/>
                 <a:cs typeface="David" pitchFamily="34" charset="-120"/>
               </a:rPr>
-              <a:t>ניהול קריירה בארגונים, הקריה האקדמית אונו</a:t>
+              <a:t>‏ניהול קריירה בארגונים, הקריה האקדמית אונו</a:t>
             </a:r>
             <a:endParaRPr lang="he-IL" sz="1000" dirty="0"/>
           </a:p>
@@ -6665,7 +6665,7 @@
                 <a:ea typeface="David" pitchFamily="34" charset="-122"/>
                 <a:cs typeface="David" pitchFamily="34" charset="-120"/>
               </a:rPr>
-              <a:t>3</a:t>
+              <a:t>‏3</a:t>
             </a:r>
             <a:endParaRPr lang="he-IL" sz="1100" dirty="0"/>
           </a:p>
@@ -6786,7 +6786,7 @@
                 <a:ea typeface="David" pitchFamily="34" charset="-122"/>
                 <a:cs typeface="David" pitchFamily="34" charset="-120"/>
               </a:rPr>
-              <a:t>תמצית המאמר: הרקע התיאורטי</a:t>
+              <a:t>‏תמצית המאמר: הרקע התיאורטי</a:t>
             </a:r>
             <a:endParaRPr lang="he-IL" sz="2800" dirty="0"/>
           </a:p>
@@ -6813,7 +6813,7 @@
           <a:bodyPr wrap="square" lIns="0" tIns="0" rIns="0" bIns="0" rtlCol="0" anchor="t"/>
           <a:lstStyle/>
           <a:p>
-            <a:pPr rtl="1" algn="just" indent="0" marL="0">
+            <a:pPr rtl="1" algn="r" indent="0" marL="0">
               <a:lnSpc>
                 <a:spcPct val="125000"/>
               </a:lnSpc>
@@ -6828,7 +6828,7 @@
                 <a:ea typeface="David" pitchFamily="34" charset="-122"/>
                 <a:cs typeface="David" pitchFamily="34" charset="-120"/>
               </a:rPr>
-              <a:t>הגישה הסלוטוגנית הופכת את שאלת המחקר המקובלת: במקום לשאול מדוע אנשים חולים, היא שואלת כיצד הם שומרים על בריאותם למרות גורמי דחק. במרכזה עומדת תחושת הקוהרנטיות, המידה שבה האדם תופס את חייו כמובנים, כניתנים לניהול וכמשמעותיים (Antonovsky, 1987, כפי שמצוטט אצל Cetkovská et al., 2026). על בסיס זה פותח המושג תחושת קוהרנטיות בעבודה, המתייחס למצב העבודה הנוכחי בלבד ומורכב משלושה רכיבים. בניגוד לתחושת הקוהרנטיות הכללית, המתייצבת בבגרות הצעירה, הרכיב התעסוקתי דינמי ומעוצב ללא הרף על ידי תנאי העבודה (Cetkovská et al., 2026).</a:t>
+              <a:t>‏הגישה הסלוטוגנית הופכת את שאלת המחקר המקובלת: במקום לשאול מדוע אנשים חולים, היא שואלת כיצד הם שומרים על בריאותם למרות גורמי דחק. במרכזה עומדת תחושת הקוהרנטיות, המידה שבה האדם תופס את חייו כמובנים, כניתנים לניהול וכמשמעותיים (Antonovsky, 1987, כפי שמצוטט אצל Cetkovská et al., 2026). על בסיס זה פותח המושג תחושת קוהרנטיות בעבודה, המתייחס למצב העבודה הנוכחי בלבד ומורכב משלושה רכיבים. בניגוד לתחושת הקוהרנטיות הכללית, המתייצבת בבגרות הצעירה, הרכיב התעסוקתי דינמי ומעוצב ללא הרף על ידי תנאי העבודה (Cetkovská et al., 2026).</a:t>
             </a:r>
             <a:endParaRPr lang="he-IL" sz="1600" dirty="0"/>
           </a:p>
@@ -6942,7 +6942,7 @@
                 <a:ea typeface="David" pitchFamily="34" charset="-122"/>
                 <a:cs typeface="David" pitchFamily="34" charset="-120"/>
               </a:rPr>
-              <a:t>מובנות (רכיב קוגניטיבי)</a:t>
+              <a:t>‏מובנות (רכיב קוגניטיבי)</a:t>
             </a:r>
             <a:endParaRPr lang="he-IL" sz="1600" dirty="0"/>
           </a:p>
@@ -6984,7 +6984,7 @@
                 <a:ea typeface="David" pitchFamily="34" charset="-122"/>
                 <a:cs typeface="David" pitchFamily="34" charset="-120"/>
               </a:rPr>
-              <a:t>מצב העבודה נתפס כמובנה, עקבי וברור. חוסר ודאות פוגע ברכיב זה ראשון: העתיד אינו צפוי.</a:t>
+              <a:t>‏מצב העבודה נתפס כמובנה, עקבי וברור. חוסר ודאות פוגע ברכיב זה ראשון: העתיד אינו צפוי.</a:t>
             </a:r>
             <a:endParaRPr lang="he-IL" sz="1300" dirty="0"/>
           </a:p>
@@ -7098,7 +7098,7 @@
                 <a:ea typeface="David" pitchFamily="34" charset="-122"/>
                 <a:cs typeface="David" pitchFamily="34" charset="-120"/>
               </a:rPr>
-              <a:t>ניהוליות (רכיב התנהגותי)</a:t>
+              <a:t>‏ניהוליות (רכיב התנהגותי)</a:t>
             </a:r>
             <a:endParaRPr lang="he-IL" sz="1600" dirty="0"/>
           </a:p>
@@ -7140,7 +7140,7 @@
                 <a:ea typeface="David" pitchFamily="34" charset="-122"/>
                 <a:cs typeface="David" pitchFamily="34" charset="-120"/>
               </a:rPr>
-              <a:t>לעובד יש משאבים מספיקים להתמודד עם הדרישות. בתקופת אי-ודאות המשאבים נראים בלתי מספיקים.</a:t>
+              <a:t>‏לעובד יש משאבים מספיקים להתמודד עם הדרישות. בתקופת אי-ודאות המשאבים נראים בלתי מספיקים.</a:t>
             </a:r>
             <a:endParaRPr lang="he-IL" sz="1300" dirty="0"/>
           </a:p>
@@ -7254,7 +7254,7 @@
                 <a:ea typeface="David" pitchFamily="34" charset="-122"/>
                 <a:cs typeface="David" pitchFamily="34" charset="-120"/>
               </a:rPr>
-              <a:t>משמעותיות (רכיב מוטיבציוני)</a:t>
+              <a:t>‏משמעותיות (רכיב מוטיבציוני)</a:t>
             </a:r>
             <a:endParaRPr lang="he-IL" sz="1600" dirty="0"/>
           </a:p>
@@ -7296,7 +7296,7 @@
                 <a:ea typeface="David" pitchFamily="34" charset="-122"/>
                 <a:cs typeface="David" pitchFamily="34" charset="-120"/>
               </a:rPr>
-              <a:t>מצב העבודה נתפס כראוי למחויבות ולמעורבות. קשה להתחייב למה שעלול להיעלם.</a:t>
+              <a:t>‏מצב העבודה נתפס כראוי למחויבות ולמעורבות. קשה להתחייב למה שעלול להיעלם.</a:t>
             </a:r>
             <a:endParaRPr lang="he-IL" sz="1300" dirty="0"/>
           </a:p>
@@ -7335,7 +7335,7 @@
                 <a:ea typeface="David" pitchFamily="34" charset="-122"/>
                 <a:cs typeface="David" pitchFamily="34" charset="-120"/>
               </a:rPr>
-              <a:t>איור 1: שלושת רכיבי תחושת הקוהרנטיות בעבודה ופגיעתו של חוסר הוודאות בכל אחד מהם (על פי Cetkovská et al., 2026)</a:t>
+              <a:t>‏איור 1: שלושת רכיבי תחושת הקוהרנטיות בעבודה ופגיעתו של חוסר הוודאות בכל אחד מהם (על פי Cetkovská et al., 2026)</a:t>
             </a:r>
             <a:endParaRPr lang="he-IL" sz="1100" dirty="0"/>
           </a:p>
@@ -7397,7 +7397,7 @@
                 <a:ea typeface="David" pitchFamily="34" charset="-122"/>
                 <a:cs typeface="David" pitchFamily="34" charset="-120"/>
               </a:rPr>
-              <a:t>ניהול קריירה בארגונים, הקריה האקדמית אונו</a:t>
+              <a:t>‏ניהול קריירה בארגונים, הקריה האקדמית אונו</a:t>
             </a:r>
             <a:endParaRPr lang="he-IL" sz="1000" dirty="0"/>
           </a:p>
@@ -7436,7 +7436,7 @@
                 <a:ea typeface="David" pitchFamily="34" charset="-122"/>
                 <a:cs typeface="David" pitchFamily="34" charset="-120"/>
               </a:rPr>
-              <a:t>4</a:t>
+              <a:t>‏4</a:t>
             </a:r>
             <a:endParaRPr lang="he-IL" sz="1100" dirty="0"/>
           </a:p>
@@ -7557,7 +7557,7 @@
                 <a:ea typeface="David" pitchFamily="34" charset="-122"/>
                 <a:cs typeface="David" pitchFamily="34" charset="-120"/>
               </a:rPr>
-              <a:t>תמצית המאמר: עיצוב תפקיד מבוסס צרכים והשערות המחקר</a:t>
+              <a:t>‏תמצית המאמר: עיצוב תפקיד מבוסס צרכים והשערות המחקר</a:t>
             </a:r>
             <a:endParaRPr lang="he-IL" sz="2800" dirty="0"/>
           </a:p>
@@ -7584,7 +7584,7 @@
           <a:bodyPr wrap="square" lIns="0" tIns="0" rIns="0" bIns="0" rtlCol="0" anchor="t"/>
           <a:lstStyle/>
           <a:p>
-            <a:pPr rtl="1" algn="just" indent="0" marL="0">
+            <a:pPr rtl="1" algn="r" indent="0" marL="0">
               <a:lnSpc>
                 <a:spcPct val="125000"/>
               </a:lnSpc>
@@ -7599,7 +7599,7 @@
                 <a:ea typeface="David" pitchFamily="34" charset="-122"/>
                 <a:cs typeface="David" pitchFamily="34" charset="-120"/>
               </a:rPr>
-              <a:t>עיצוב תפקיד הוגדר לראשונה כמאמצים יזומים של עובדים להתאים היבטים של תפקידם לצרכיהם ולכישוריהם, גישה שהעבירה את העובד ממקבל פסיבי של תנאי עבודה לשחקן פעיל בעיצובם (Wrzesniewski &amp; Dutton, 2001, כפי שמצוטט אצל Cetkovská et al., 2026). המאמר משתמש בגרסה המתמקדת בסיפוק שישה צרכים פסיכולוגיים בעבודה, צרכי DRAMMA: ניתוק והרפיה הם צרכי הימנעות שמטרתם להפחית מאמץ ולהשיב אנרגיה, ואילו אוטונומיה, מיומנות, משמעות ושייכות הם צרכי התקרבות שמטרתם לייצר מצבים חיוביים, צמיחה ומשאבים חדשים. פריט לדוגמה: "ארגנתי את עבודתי כך שאשיג תחושת תכלית במה שאני עושה" (Cetkovská et al., 2026).</a:t>
+              <a:t>‏עיצוב תפקיד הוגדר לראשונה כמאמצים יזומים של עובדים להתאים היבטים של תפקידם לצרכיהם ולכישוריהם, גישה שהעבירה את העובד ממקבל פסיבי של תנאי עבודה לשחקן פעיל בעיצובם (Wrzesniewski &amp; Dutton, 2001, כפי שמצוטט אצל Cetkovská et al., 2026). המאמר משתמש בגרסה המתמקדת בסיפוק שישה צרכים פסיכולוגיים בעבודה, צרכי DRAMMA: ניתוק והרפיה הם צרכי הימנעות שמטרתם להפחית מאמץ ולהשיב אנרגיה, ואילו אוטונומיה, מיומנות, משמעות ושייכות הם צרכי התקרבות שמטרתם לייצר מצבים חיוביים, צמיחה ומשאבים חדשים. פריט לדוגמה: "ארגנתי את עבודתי כך שאשיג תחושת תכלית במה שאני עושה" (Cetkovská et al., 2026).</a:t>
             </a:r>
             <a:endParaRPr lang="he-IL" sz="1600" dirty="0"/>
           </a:p>
@@ -7626,7 +7626,7 @@
           <a:bodyPr wrap="square" lIns="0" tIns="0" rIns="0" bIns="0" rtlCol="0" anchor="t"/>
           <a:lstStyle/>
           <a:p>
-            <a:pPr rtl="1" algn="just" indent="0" marL="0">
+            <a:pPr rtl="1" algn="r" indent="0" marL="0">
               <a:lnSpc>
                 <a:spcPct val="125000"/>
               </a:lnSpc>
@@ -7641,7 +7641,7 @@
                 <a:ea typeface="David" pitchFamily="34" charset="-122"/>
                 <a:cs typeface="David" pitchFamily="34" charset="-120"/>
               </a:rPr>
-              <a:t>על בסיס תיאוריית שימור המשאבים, שלפיה מי שמחזיק במשאבים נוטה לפתח משאבים נוספים (Hobfoll, 2001, כפי שמצוטט אצל Cetkovská et al., 2026), הועלו שתי השערות. ההשערה הראשונה היא שעיצוב תפקיד מבוסס צרכים מנבא באופן חיובי את שלושת רכיבי תחושת הקוהרנטיות חצי שנה מאוחר יותר. ההשערה השנייה היא שתחושת קוהרנטיות בעבודה מנבאת עיצוב תפקיד עתידי. יחד הן מתארות "ספירלת רווח" שבה שני המשתנים מחזקים זה את זה לאורך זמן (Cetkovská et al., 2026).</a:t>
+              <a:t>‏על בסיס תיאוריית שימור המשאבים, שלפיה מי שמחזיק במשאבים נוטה לפתח משאבים נוספים (Hobfoll, 2001, כפי שמצוטט אצל Cetkovská et al., 2026), הועלו שתי השערות. ההשערה הראשונה היא שעיצוב תפקיד מבוסס צרכים מנבא באופן חיובי את שלושת רכיבי תחושת הקוהרנטיות חצי שנה מאוחר יותר. ההשערה השנייה היא שתחושת קוהרנטיות בעבודה מנבאת עיצוב תפקיד עתידי. יחד הן מתארות "ספירלת רווח" שבה שני המשתנים מחזקים זה את זה לאורך זמן (Cetkovská et al., 2026).</a:t>
             </a:r>
             <a:endParaRPr lang="he-IL" sz="1600" dirty="0"/>
           </a:p>
@@ -7703,7 +7703,7 @@
                 <a:ea typeface="David" pitchFamily="34" charset="-122"/>
                 <a:cs typeface="David" pitchFamily="34" charset="-120"/>
               </a:rPr>
-              <a:t>ניהול קריירה בארגונים, הקריה האקדמית אונו</a:t>
+              <a:t>‏ניהול קריירה בארגונים, הקריה האקדמית אונו</a:t>
             </a:r>
             <a:endParaRPr lang="he-IL" sz="1000" dirty="0"/>
           </a:p>
@@ -7742,7 +7742,7 @@
                 <a:ea typeface="David" pitchFamily="34" charset="-122"/>
                 <a:cs typeface="David" pitchFamily="34" charset="-120"/>
               </a:rPr>
-              <a:t>5</a:t>
+              <a:t>‏5</a:t>
             </a:r>
             <a:endParaRPr lang="he-IL" sz="1100" dirty="0"/>
           </a:p>
@@ -7863,7 +7863,7 @@
                 <a:ea typeface="David" pitchFamily="34" charset="-122"/>
                 <a:cs typeface="David" pitchFamily="34" charset="-120"/>
               </a:rPr>
-              <a:t>תמצית המאמר: שיטת המחקר</a:t>
+              <a:t>‏תמצית המאמר: שיטת המחקר</a:t>
             </a:r>
             <a:endParaRPr lang="he-IL" sz="2800" dirty="0"/>
           </a:p>
@@ -7890,7 +7890,7 @@
           <a:bodyPr wrap="square" lIns="0" tIns="0" rIns="0" bIns="0" rtlCol="0" anchor="t"/>
           <a:lstStyle/>
           <a:p>
-            <a:pPr rtl="1" algn="just" indent="0" marL="0">
+            <a:pPr rtl="1" algn="r" indent="0" marL="0">
               <a:lnSpc>
                 <a:spcPct val="125000"/>
               </a:lnSpc>
@@ -7905,7 +7905,7 @@
                 <a:ea typeface="David" pitchFamily="34" charset="-122"/>
                 <a:cs typeface="David" pitchFamily="34" charset="-120"/>
               </a:rPr>
-              <a:t>המחקר הוא מחקר פאנל בשני גלים בהפרש של שישה חודשים, במסגרת פרויקט Craft4Health. הנתונים נאספו בשאלון מקוון ממדגם מכסות של האוכלוסייה העובדת בגרמניה ובאזור דובר הגרמנית בשווייץ, בדצמבר 2021 עד ינואר 2022 וביוני עד יולי 2022. בגל הראשון השתתפו 924 עובדים, לאחר סינון 53 משיבים רשלניים, ו-740 מהם השלימו את הגל השני, שיעור השתתפות של 80%. במדגם 56% גברים, הגיל הממוצע 48.9, ממוצע שעות העבודה השבועיות 38.1, ו-35% מהמשתתפים בעלי תואר אקדמי (Cetkovská et al., 2026).</a:t>
+              <a:t>‏המחקר הוא מחקר פאנל בשני גלים בהפרש של שישה חודשים, במסגרת פרויקט Craft4Health. הנתונים נאספו בשאלון מקוון ממדגם מכסות של האוכלוסייה העובדת בגרמניה ובאזור דובר הגרמנית בשווייץ, בדצמבר 2021 עד ינואר 2022 וביוני עד יולי 2022. בגל הראשון השתתפו 924 עובדים, לאחר סינון 53 משיבים רשלניים, ו-740 מהם השלימו את הגל השני, שיעור השתתפות של 80%. במדגם 56% גברים, הגיל הממוצע 48.9, ממוצע שעות העבודה השבועיות 38.1, ו-35% מהמשתתפים בעלי תואר אקדמי (Cetkovská et al., 2026).</a:t>
             </a:r>
             <a:endParaRPr lang="he-IL" sz="1600" dirty="0"/>
           </a:p>
@@ -7932,7 +7932,7 @@
           <a:bodyPr wrap="square" lIns="0" tIns="0" rIns="0" bIns="0" rtlCol="0" anchor="t"/>
           <a:lstStyle/>
           <a:p>
-            <a:pPr rtl="1" algn="just" indent="0" marL="0">
+            <a:pPr rtl="1" algn="r" indent="0" marL="0">
               <a:lnSpc>
                 <a:spcPct val="125000"/>
               </a:lnSpc>
@@ -7947,7 +7947,7 @@
                 <a:ea typeface="David" pitchFamily="34" charset="-122"/>
                 <a:cs typeface="David" pitchFamily="34" charset="-120"/>
               </a:rPr>
-              <a:t>תחושת קוהרנטיות בעבודה נמדדה בסולם של תשעה פריטים, שלושה לכל רכיב, בדיפרנציאל סמנטי בן שבע דרגות, למשל צפוי לעומת בלתי צפוי. עיצוב תפקיד מבוסס צרכים נמדד בסולם של 18 פריטים, שלושה לכל אחד משישה הצרכים, בסולם של חמש דרגות ביחס לשבועיים האחרונים. הניתוח נערך במודל פאנל צולב, לאחר ניתוח גורמים מאשש ובדיקת אי-שונות מדידה בין הגלים, והושוו ארבעה מודלים: יציבות בלבד, שני מודלים חד-כיווניים ומודל הדדי (Cetkovská et al., 2026).</a:t>
+              <a:t>‏תחושת קוהרנטיות בעבודה נמדדה בסולם של תשעה פריטים, שלושה לכל רכיב, בדיפרנציאל סמנטי בן שבע דרגות, למשל צפוי לעומת בלתי צפוי. עיצוב תפקיד מבוסס צרכים נמדד בסולם של 18 פריטים, שלושה לכל אחד משישה הצרכים, בסולם של חמש דרגות ביחס לשבועיים האחרונים. הניתוח נערך במודל פאנל צולב, לאחר ניתוח גורמים מאשש ובדיקת אי-שונות מדידה בין הגלים, והושוו ארבעה מודלים: יציבות בלבד, שני מודלים חד-כיווניים ומודל הדדי (Cetkovská et al., 2026).</a:t>
             </a:r>
             <a:endParaRPr lang="he-IL" sz="1600" dirty="0"/>
           </a:p>
@@ -8009,7 +8009,7 @@
                 <a:ea typeface="David" pitchFamily="34" charset="-122"/>
                 <a:cs typeface="David" pitchFamily="34" charset="-120"/>
               </a:rPr>
-              <a:t>ניהול קריירה בארגונים, הקריה האקדמית אונו</a:t>
+              <a:t>‏ניהול קריירה בארגונים, הקריה האקדמית אונו</a:t>
             </a:r>
             <a:endParaRPr lang="he-IL" sz="1000" dirty="0"/>
           </a:p>
@@ -8048,7 +8048,7 @@
                 <a:ea typeface="David" pitchFamily="34" charset="-122"/>
                 <a:cs typeface="David" pitchFamily="34" charset="-120"/>
               </a:rPr>
-              <a:t>6</a:t>
+              <a:t>‏6</a:t>
             </a:r>
             <a:endParaRPr lang="he-IL" sz="1100" dirty="0"/>
           </a:p>
@@ -8169,7 +8169,7 @@
                 <a:ea typeface="David" pitchFamily="34" charset="-122"/>
                 <a:cs typeface="David" pitchFamily="34" charset="-120"/>
               </a:rPr>
-              <a:t>תמצית המאמר: הממצאים המרכזיים</a:t>
+              <a:t>‏תמצית המאמר: הממצאים המרכזיים</a:t>
             </a:r>
             <a:endParaRPr lang="he-IL" sz="2800" dirty="0"/>
           </a:p>
@@ -8196,7 +8196,7 @@
           <a:bodyPr wrap="square" lIns="0" tIns="0" rIns="0" bIns="0" rtlCol="0" anchor="t"/>
           <a:lstStyle/>
           <a:p>
-            <a:pPr rtl="1" algn="just" indent="0" marL="0">
+            <a:pPr rtl="1" algn="r" indent="0" marL="0">
               <a:lnSpc>
                 <a:spcPct val="125000"/>
               </a:lnSpc>
@@ -8211,7 +8211,7 @@
                 <a:ea typeface="David" pitchFamily="34" charset="-122"/>
                 <a:cs typeface="David" pitchFamily="34" charset="-120"/>
               </a:rPr>
-              <a:t>המודל ההדדי השיג את ההתאמה הטובה ביותר לנתונים. עיצוב תפקיד לצרכי התקרבות ניבא באופן מובהק את שלושת הרכיבים חצי שנה מאוחר יותר: מובנות (β = 0.142, p = .002), ניהוליות (β = 0.137, p = .003) ומשמעותיות (β = 0.166, p &lt; .001). עיצוב תפקיד לצרכי הימנעות לא ניבא אף אחד מהם (β בין 0.03 ל-0.09, לא מובהק). בכיוון ההפוך, ניהוליות (β = 0.431, p &lt; .001) ומשמעותיות (β = 0.095) ניבאו עיצוב תפקיד עתידי לצרכי התקרבות, ומובנות הראתה מקדם שלילי שהמחברים מייחסים לאפקט דיכוי סטטיסטי. המודל הסביר 56% עד 66% מהשונות ברכיבי תחושת הקוהרנטיות (Cetkovská et al., 2026).</a:t>
+              <a:t>‏המודל ההדדי השיג את ההתאמה הטובה ביותר לנתונים. עיצוב תפקיד לצרכי התקרבות ניבא באופן מובהק את שלושת הרכיבים חצי שנה מאוחר יותר: מובנות (β = 0.142, p = .002), ניהוליות (β = 0.137, p = .003) ומשמעותיות (β = 0.166, p &lt; .001). עיצוב תפקיד לצרכי הימנעות לא ניבא אף אחד מהם (β בין 0.03 ל-0.09, לא מובהק). בכיוון ההפוך, ניהוליות (β = 0.431, p &lt; .001) ומשמעותיות (β = 0.095) ניבאו עיצוב תפקיד עתידי לצרכי התקרבות, ומובנות הראתה מקדם שלילי שהמחברים מייחסים לאפקט דיכוי סטטיסטי. המודל הסביר 56% עד 66% מהשונות ברכיבי תחושת הקוהרנטיות (Cetkovská et al., 2026).</a:t>
             </a:r>
             <a:endParaRPr lang="he-IL" sz="1500" dirty="0"/>
           </a:p>
@@ -8266,7 +8266,7 @@
                 <a:ea typeface="David" pitchFamily="34" charset="-122"/>
                 <a:cs typeface="David" pitchFamily="34" charset="-120"/>
               </a:rPr>
-              <a:t>תרשים 1: מקדמי ניבוי מתוקננים (β) של שלושת רכיבי תחושת הקוהרנטיות בגל 2 לפי סוג עיצוב התפקיד בגל 1 (Cetkovská et al., 2026, טבלה 4)</a:t>
+              <a:t>‏תרשים 1: מקדמי ניבוי מתוקננים (β) של שלושת רכיבי תחושת הקוהרנטיות בגל 2 לפי סוג עיצוב התפקיד בגל 1 (Cetkovská et al., 2026, טבלה 4)</a:t>
             </a:r>
             <a:endParaRPr lang="he-IL" sz="1100" dirty="0"/>
           </a:p>
@@ -8328,7 +8328,7 @@
                 <a:ea typeface="David" pitchFamily="34" charset="-122"/>
                 <a:cs typeface="David" pitchFamily="34" charset="-120"/>
               </a:rPr>
-              <a:t>ניהול קריירה בארגונים, הקריה האקדמית אונו</a:t>
+              <a:t>‏ניהול קריירה בארגונים, הקריה האקדמית אונו</a:t>
             </a:r>
             <a:endParaRPr lang="he-IL" sz="1000" dirty="0"/>
           </a:p>
@@ -8367,7 +8367,7 @@
                 <a:ea typeface="David" pitchFamily="34" charset="-122"/>
                 <a:cs typeface="David" pitchFamily="34" charset="-120"/>
               </a:rPr>
-              <a:t>7</a:t>
+              <a:t>‏7</a:t>
             </a:r>
             <a:endParaRPr lang="he-IL" sz="1100" dirty="0"/>
           </a:p>
@@ -8488,7 +8488,7 @@
                 <a:ea typeface="David" pitchFamily="34" charset="-122"/>
                 <a:cs typeface="David" pitchFamily="34" charset="-120"/>
               </a:rPr>
-              <a:t>תמצית המאמר: מסקנות המחברים, חוזקות ומגבלות</a:t>
+              <a:t>‏תמצית המאמר: מסקנות המחברים, חוזקות ומגבלות</a:t>
             </a:r>
             <a:endParaRPr lang="he-IL" sz="2800" dirty="0"/>
           </a:p>
@@ -8515,7 +8515,7 @@
           <a:bodyPr wrap="square" lIns="0" tIns="0" rIns="0" bIns="0" rtlCol="0" anchor="t"/>
           <a:lstStyle/>
           <a:p>
-            <a:pPr rtl="1" algn="just" indent="0" marL="0">
+            <a:pPr rtl="1" algn="r" indent="0" marL="0">
               <a:lnSpc>
                 <a:spcPct val="125000"/>
               </a:lnSpc>
@@ -8530,7 +8530,7 @@
                 <a:ea typeface="David" pitchFamily="34" charset="-122"/>
                 <a:cs typeface="David" pitchFamily="34" charset="-120"/>
               </a:rPr>
-              <a:t>המחברים מסיקים שתחושת הקוהרנטיות בעבודה היא משאב דינמי שמגיב לשינויים שהעובד עצמו יוזם. עובדים שמעצבים את תפקידם כדי לספק את צרכי האוטונומיה, המיומנות, המשמעות והשייכות תופסים את עבודתם, חצי שנה מאוחר יותר, כמובנת יותר, ניתנת לניהול יותר ומשמעותית יותר. עיצוב תפקיד שמכוון רק להתרחק מהעבודה ולנוח תומך בהתאוששות אך אינו משנה את תפיסת העבודה עצמה. לארגונים המסקנה היא שיש לטפח תחושת ניהוליות ולתת מרחב לעיצוב תפקיד, משום שהניהוליות היא המניע החזק ביותר ליוזמה נוספת (Cetkovská et al., 2026).</a:t>
+              <a:t>‏המחברים מסיקים שתחושת הקוהרנטיות בעבודה היא משאב דינמי שמגיב לשינויים שהעובד עצמו יוזם. עובדים שמעצבים את תפקידם כדי לספק את צרכי האוטונומיה, המיומנות, המשמעות והשייכות תופסים את עבודתם, חצי שנה מאוחר יותר, כמובנת יותר, ניתנת לניהול יותר ומשמעותית יותר. עיצוב תפקיד שמכוון רק להתרחק מהעבודה ולנוח תומך בהתאוששות אך אינו משנה את תפיסת העבודה עצמה. לארגונים המסקנה היא שיש לטפח תחושת ניהוליות ולתת מרחב לעיצוב תפקיד, משום שהניהוליות היא המניע החזק ביותר ליוזמה נוספת (Cetkovská et al., 2026).</a:t>
             </a:r>
             <a:endParaRPr lang="he-IL" sz="1600" dirty="0"/>
           </a:p>
@@ -8557,7 +8557,7 @@
           <a:bodyPr wrap="square" lIns="0" tIns="0" rIns="0" bIns="0" rtlCol="0" anchor="t"/>
           <a:lstStyle/>
           <a:p>
-            <a:pPr rtl="1" algn="just" indent="0" marL="0">
+            <a:pPr rtl="1" algn="r" indent="0" marL="0">
               <a:lnSpc>
                 <a:spcPct val="125000"/>
               </a:lnSpc>
@@ -8572,7 +8572,7 @@
                 <a:ea typeface="David" pitchFamily="34" charset="-122"/>
                 <a:cs typeface="David" pitchFamily="34" charset="-120"/>
               </a:rPr>
-              <a:t>חוזקות המחקר הן מערך האורך המאפשר לבחון כיווניות בזמן, המדגם הגדול והמאוזן, שיעור ההשתתפות הגבוה בגל השני וכלי המדידה המתוקפים. מגבלותיו, שהמחברים עצמם מפרטים, הן מדגם מערבי ולא מייצג לחלוטין, איסוף נתונים בתקופת הקורונה, דיווח עצמי בלבד, הקושי לפרש את המקדם השלילי של המובנות, ומודל פאנל צולב שאינו מפריד בין שונות בין-אישית לתוך-אישית, ולכן יש לפרש את הממצאים כקשרים בזמן ולא כהוכחה סיבתית (Cetkovská et al., 2026).</a:t>
+              <a:t>‏חוזקות המחקר הן מערך האורך המאפשר לבחון כיווניות בזמן, המדגם הגדול והמאוזן, שיעור ההשתתפות הגבוה בגל השני וכלי המדידה המתוקפים. מגבלותיו, שהמחברים עצמם מפרטים, הן מדגם מערבי ולא מייצג לחלוטין, איסוף נתונים בתקופת הקורונה, דיווח עצמי בלבד, הקושי לפרש את המקדם השלילי של המובנות, ומודל פאנל צולב שאינו מפריד בין שונות בין-אישית לתוך-אישית, ולכן יש לפרש את הממצאים כקשרים בזמן ולא כהוכחה סיבתית (Cetkovská et al., 2026).</a:t>
             </a:r>
             <a:endParaRPr lang="he-IL" sz="1600" dirty="0"/>
           </a:p>
@@ -8634,7 +8634,7 @@
                 <a:ea typeface="David" pitchFamily="34" charset="-122"/>
                 <a:cs typeface="David" pitchFamily="34" charset="-120"/>
               </a:rPr>
-              <a:t>ניהול קריירה בארגונים, הקריה האקדמית אונו</a:t>
+              <a:t>‏ניהול קריירה בארגונים, הקריה האקדמית אונו</a:t>
             </a:r>
             <a:endParaRPr lang="he-IL" sz="1000" dirty="0"/>
           </a:p>
@@ -8673,7 +8673,7 @@
                 <a:ea typeface="David" pitchFamily="34" charset="-122"/>
                 <a:cs typeface="David" pitchFamily="34" charset="-120"/>
               </a:rPr>
-              <a:t>8</a:t>
+              <a:t>‏8</a:t>
             </a:r>
             <a:endParaRPr lang="he-IL" sz="1100" dirty="0"/>
           </a:p>
@@ -8794,7 +8794,7 @@
                 <a:ea typeface="David" pitchFamily="34" charset="-122"/>
                 <a:cs typeface="David" pitchFamily="34" charset="-120"/>
               </a:rPr>
-              <a:t>המאמר המשלים: מודעות לבינה מלאכותית, חוסר ביטחון וחוסן קריירה</a:t>
+              <a:t>‏המאמר המשלים: מודעות לבינה מלאכותית, חוסר ביטחון וחוסן קריירה</a:t>
             </a:r>
             <a:endParaRPr lang="he-IL" sz="2800" dirty="0"/>
           </a:p>
@@ -8860,7 +8860,7 @@
           <a:bodyPr wrap="square" lIns="0" tIns="0" rIns="0" bIns="0" rtlCol="0" anchor="t"/>
           <a:lstStyle/>
           <a:p>
-            <a:pPr rtl="1" algn="just" indent="0" marL="0">
+            <a:pPr rtl="1" algn="r" indent="0" marL="0">
               <a:lnSpc>
                 <a:spcPct val="125000"/>
               </a:lnSpc>
@@ -8875,7 +8875,7 @@
                 <a:ea typeface="David" pitchFamily="34" charset="-122"/>
                 <a:cs typeface="David" pitchFamily="34" charset="-120"/>
               </a:rPr>
-              <a:t>לחיזוק הקשר בין המאמר המרכזי לבין נושא העבודה נבחר מחקר אורך נוסף, שפורסם בגישה פתוחה בכתב עת שפיט. המחברים, מאוניברסיטת סוּוֹן בדרום קוריאה, בחנו את ההשלכות של מודעות לבינה מלאכותית, כלומר תפיסת העובד שטכנולוגיה עלולה להחליף אותו או לשנות את תפקידו, על חוסר ביטחון תעסוקתי, על ביצועי משימה ועל התנהגות סוטה בעבודה. הנתונים נאספו בשלוש נקודות זמן מעובדי משרד במשרה מלאה (Chung et al., 2025).</a:t>
+              <a:t>‏לחיזוק הקשר בין המאמר המרכזי לבין נושא העבודה נבחר מחקר אורך נוסף, שפורסם בגישה פתוחה בכתב עת שפיט. המחברים, מאוניברסיטת סוּוֹן בדרום קוריאה, בחנו את ההשלכות של מודעות לבינה מלאכותית, כלומר תפיסת העובד שטכנולוגיה עלולה להחליף אותו או לשנות את תפקידו, על חוסר ביטחון תעסוקתי, על ביצועי משימה ועל התנהגות סוטה בעבודה. הנתונים נאספו בשלוש נקודות זמן מעובדי משרד במשרה מלאה (Chung et al., 2025).</a:t>
             </a:r>
             <a:endParaRPr lang="he-IL" sz="1600" dirty="0"/>
           </a:p>
@@ -8902,7 +8902,7 @@
           <a:bodyPr wrap="square" lIns="0" tIns="0" rIns="0" bIns="0" rtlCol="0" anchor="t"/>
           <a:lstStyle/>
           <a:p>
-            <a:pPr rtl="1" algn="just" indent="0" marL="0">
+            <a:pPr rtl="1" algn="r" indent="0" marL="0">
               <a:lnSpc>
                 <a:spcPct val="125000"/>
               </a:lnSpc>
@@ -8917,7 +8917,7 @@
                 <a:ea typeface="David" pitchFamily="34" charset="-122"/>
                 <a:cs typeface="David" pitchFamily="34" charset="-120"/>
               </a:rPr>
-              <a:t>הממצאים מראים שעצם המודעות לבינה מלאכותית, עוד לפני שינוי בפועל, מגבירה חוסר ביטחון תעסוקתי, ושחוסר הביטחון מתווך את הקשר בין המודעות לבין ירידה בביצועי המשימה ועלייה בהתנהגות סוטה. אצל עובדים בעלי חוסן קריירה גבוה הקשר בין המודעות לבין חוסר הביטחון היה חלש יותר (Chung et al., 2025). שני המאמרים משלימים זה את זה: המאמר המשלים מתאר את מקור חוסר הוודאות של שנת 2026 ומראה שמשאב אישי ממתן אותו, והמאמר המרכזי מראה כיצד בונים משאב כזה בפועל, באמצעות עיצוב תפקיד יזום (Cetkovská et al., 2026).</a:t>
+              <a:t>‏הממצאים מראים שעצם המודעות לבינה מלאכותית, עוד לפני שינוי בפועל, מגבירה חוסר ביטחון תעסוקתי, ושחוסר הביטחון מתווך את הקשר בין המודעות לבין ירידה בביצועי המשימה ועלייה בהתנהגות סוטה. אצל עובדים בעלי חוסן קריירה גבוה הקשר בין המודעות לבין חוסר הביטחון היה חלש יותר (Chung et al., 2025). שני המאמרים משלימים זה את זה: המאמר המשלים מתאר את מקור חוסר הוודאות של שנת 2026 ומראה שמשאב אישי ממתן אותו, והמאמר המרכזי מראה כיצד בונים משאב כזה בפועל, באמצעות עיצוב תפקיד יזום (Cetkovská et al., 2026).</a:t>
             </a:r>
             <a:endParaRPr lang="he-IL" sz="1600" dirty="0"/>
           </a:p>
@@ -8979,7 +8979,7 @@
                 <a:ea typeface="David" pitchFamily="34" charset="-122"/>
                 <a:cs typeface="David" pitchFamily="34" charset="-120"/>
               </a:rPr>
-              <a:t>ניהול קריירה בארגונים, הקריה האקדמית אונו</a:t>
+              <a:t>‏ניהול קריירה בארגונים, הקריה האקדמית אונו</a:t>
             </a:r>
             <a:endParaRPr lang="he-IL" sz="1000" dirty="0"/>
           </a:p>
@@ -9018,7 +9018,7 @@
                 <a:ea typeface="David" pitchFamily="34" charset="-122"/>
                 <a:cs typeface="David" pitchFamily="34" charset="-120"/>
               </a:rPr>
-              <a:t>9</a:t>
+              <a:t>‏9</a:t>
             </a:r>
             <a:endParaRPr lang="he-IL" sz="1100" dirty="0"/>
           </a:p>

--- a/career-management-final-project/ניהול קריירה - התמודדות עם חוסר ודאות תעסוקתי - מצגת.pptx
+++ b/career-management-final-project/ניהול קריירה - התמודדות עם חוסר ודאות תעסוקתי - מצגת.pptx
@@ -2659,7 +2659,7 @@
                 <a:ea typeface="David" pitchFamily="34" charset="-122"/>
                 <a:cs typeface="David" pitchFamily="34" charset="-120"/>
               </a:rPr>
-              <a:t>‏הקריה האקדמית אונו, הפקולטה למנהל עסקים</a:t>
+              <a:t>‫הקריה האקדמית אונו, הפקולטה למנהל עסקים‬</a:t>
             </a:r>
             <a:endParaRPr lang="he-IL" sz="1700" dirty="0"/>
           </a:p>
@@ -2698,7 +2698,7 @@
                 <a:ea typeface="David" pitchFamily="34" charset="-122"/>
                 <a:cs typeface="David" pitchFamily="34" charset="-120"/>
               </a:rPr>
-              <a:t>‏עבודה מסכמת בקורס ניהול קריירה בארגונים</a:t>
+              <a:t>‫עבודה מסכמת בקורס ניהול קריירה בארגונים‬</a:t>
             </a:r>
             <a:endParaRPr lang="he-IL" sz="1700" dirty="0"/>
           </a:p>
@@ -2737,7 +2737,7 @@
                 <a:ea typeface="David" pitchFamily="34" charset="-122"/>
                 <a:cs typeface="David" pitchFamily="34" charset="-120"/>
               </a:rPr>
-              <a:t>‏התמודדות עם חוסר ודאות תעסוקתי</a:t>
+              <a:t>‫התמודדות עם חוסר ודאות תעסוקתי‬</a:t>
             </a:r>
             <a:endParaRPr lang="he-IL" sz="3800" dirty="0"/>
           </a:p>
@@ -2776,7 +2776,7 @@
                 <a:ea typeface="David" pitchFamily="34" charset="-122"/>
                 <a:cs typeface="David" pitchFamily="34" charset="-120"/>
               </a:rPr>
-              <a:t>‏עיצוב תפקיד מבוסס צרכים כדרך לבנות בהירות, שליטה ומשמעות בעבודה</a:t>
+              <a:t>‫עיצוב תפקיד מבוסס צרכים כדרך לבנות בהירות, שליטה ומשמעות בעבודה‬</a:t>
             </a:r>
             <a:endParaRPr lang="he-IL" sz="1800" dirty="0"/>
           </a:p>
@@ -2854,7 +2854,7 @@
                 <a:ea typeface="David" pitchFamily="34" charset="-122"/>
                 <a:cs typeface="David" pitchFamily="34" charset="-120"/>
               </a:rPr>
-              <a:t>‏מגיש/ה: דוחה עמאש, מספר תעודת זהות 208121137</a:t>
+              <a:t>‫מגיש/ה: דוחה עמאש, מספר תעודת זהות 208121137‬</a:t>
             </a:r>
             <a:endParaRPr lang="he-IL" sz="1800" dirty="0"/>
           </a:p>
@@ -2893,7 +2893,7 @@
                 <a:ea typeface="David" pitchFamily="34" charset="-122"/>
                 <a:cs typeface="David" pitchFamily="34" charset="-120"/>
               </a:rPr>
-              <a:t>‏מרצה: גב' מורן דבדבני דקל   |   עוזר הוראה: מר פאר רועי</a:t>
+              <a:t>‫מרצה: גב' מורן דבדבני דקל   |   עוזר הוראה: מר פאר רועי‬</a:t>
             </a:r>
             <a:endParaRPr lang="he-IL" sz="1500" dirty="0"/>
           </a:p>
@@ -2932,7 +2932,7 @@
                 <a:ea typeface="David" pitchFamily="34" charset="-122"/>
                 <a:cs typeface="David" pitchFamily="34" charset="-120"/>
               </a:rPr>
-              <a:t>‏תשפ"ו, סמסטר 3   |   ספטמבר 2026</a:t>
+              <a:t>‫תשפ"ו, סמסטר 3   |   ספטמבר 2026‬</a:t>
             </a:r>
             <a:endParaRPr lang="he-IL" sz="1400" dirty="0"/>
           </a:p>
@@ -3053,7 +3053,7 @@
                 <a:ea typeface="David" pitchFamily="34" charset="-122"/>
                 <a:cs typeface="David" pitchFamily="34" charset="-120"/>
               </a:rPr>
-              <a:t>‏חיבור לחומר הנלמד בקורס</a:t>
+              <a:t>‫חיבור לחומר הנלמד בקורס‬</a:t>
             </a:r>
             <a:endParaRPr lang="he-IL" sz="2800" dirty="0"/>
           </a:p>
@@ -3095,7 +3095,7 @@
                 <a:ea typeface="David" pitchFamily="34" charset="-122"/>
                 <a:cs typeface="David" pitchFamily="34" charset="-120"/>
               </a:rPr>
-              <a:t>‏המאמר אינו זר לחומר הקורס אלא מעניק לו בסיס אמפירי. שלושת סלי הכלים שנלמדו בקורס, רשת אנשים, זהות מקצועית והתפתחות, מקבילים כמעט אחד לאחד לצרכי ההתקרבות שנמצאו כבונים תחושת קוהרנטיות: רשת האנשים היא צורך השייכות, חמש השאלות של הזהות המקצועית הן עיצוב תפקיד לצורך המשמעות, וההתפתחות היא צורך המיומנות. הרעיון של קריירה רבודה וקיר הטיפוס, שבהם כל שלב נבנה על קודמו, הוא בדיוק ספירלת הרווח שהמחקר מתעד, שבה כל צעד של עיצוב תפקיד מגדיל את המשאבים לצעד הבא (Cetkovská et al., 2026).</a:t>
+              <a:t>‫המאמר אינו זר לחומר הקורס אלא מעניק לו בסיס אמפירי. שלושת סלי הכלים שנלמדו בקורס, רשת אנשים, זהות מקצועית והתפתחות, מקבילים כמעט אחד לאחד לצרכי ההתקרבות שנמצאו כבונים תחושת קוהרנטיות: רשת האנשים היא צורך השייכות, חמש השאלות של הזהות המקצועית הן עיצוב תפקיד לצורך המשמעות, וההתפתחות היא צורך המיומנות. הרעיון של קריירה רבודה וקיר הטיפוס, שבהם כל שלב נבנה על קודמו, הוא בדיוק ספירלת הרווח שהמחקר מתעד, שבה כל צעד של עיצוב תפקיד מגדיל את המשאבים לצעד הבא (Cetkovská et al., 2026).‬</a:t>
             </a:r>
             <a:endParaRPr lang="he-IL" sz="1600" dirty="0"/>
           </a:p>
@@ -3137,7 +3137,7 @@
                 <a:ea typeface="David" pitchFamily="34" charset="-122"/>
                 <a:cs typeface="David" pitchFamily="34" charset="-120"/>
               </a:rPr>
-              <a:t>‏הגורמים המניעים של הרצברג, הישג, הכרה ומשמעות, מקבילים לצרכי ההתקרבות, ואילו הגורמים ההיגייניים מקבילים לצרכי ההימנעות, מה שמסביר מדוע רק הראשונים שינו את תפיסת העבודה. עוגני הקריירה של שיין מסבירים מדוע צרכים שונים חשובים לעובדים שונים: מי שעוגנו הוא אוטונומיה יעצב את תפקידו סביב חופש הפעולה, ומי שעוגנו הוא ביטחון ויציבות יחפש קודם כול מובנות. מאמר החובה בקורס מראה שתמיכה במקום העבודה ובמשפחה משפרת את הזמינות הפסיכולוגית של העובד (Russo et al., 2016), כלומר את תחושת הניהוליות שהמחקר מזהה כמנוע החזק ביותר ליוזמה (Cetkovská et al., 2026).</a:t>
+              <a:t>‫הגורמים המניעים של הרצברג, הישג, הכרה ומשמעות, מקבילים לצרכי ההתקרבות, ואילו הגורמים ההיגייניים מקבילים לצרכי ההימנעות, מה שמסביר מדוע רק הראשונים שינו את תפיסת העבודה. עוגני הקריירה של שיין מסבירים מדוע צרכים שונים חשובים לעובדים שונים: מי שעוגנו הוא אוטונומיה יעצב את תפקידו סביב חופש הפעולה, ומי שעוגנו הוא ביטחון ויציבות יחפש קודם כול מובנות. מאמר החובה בקורס מראה שתמיכה במקום העבודה ובמשפחה משפרת את הזמינות הפסיכולוגית של העובד (Russo et al., 2016), כלומר את תחושת הניהוליות שהמחקר מזהה כמנוע החזק ביותר ליוזמה (Cetkovská et al., 2026).‬</a:t>
             </a:r>
             <a:endParaRPr lang="he-IL" sz="1600" dirty="0"/>
           </a:p>
@@ -3199,7 +3199,7 @@
                 <a:ea typeface="David" pitchFamily="34" charset="-122"/>
                 <a:cs typeface="David" pitchFamily="34" charset="-120"/>
               </a:rPr>
-              <a:t>‏ניהול קריירה בארגונים, הקריה האקדמית אונו</a:t>
+              <a:t>‫ניהול קריירה בארגונים, הקריה האקדמית אונו‬</a:t>
             </a:r>
             <a:endParaRPr lang="he-IL" sz="1000" dirty="0"/>
           </a:p>
@@ -3238,7 +3238,7 @@
                 <a:ea typeface="David" pitchFamily="34" charset="-122"/>
                 <a:cs typeface="David" pitchFamily="34" charset="-120"/>
               </a:rPr>
-              <a:t>‏10</a:t>
+              <a:t>‫10‬</a:t>
             </a:r>
             <a:endParaRPr lang="he-IL" sz="1100" dirty="0"/>
           </a:p>
@@ -3359,7 +3359,7 @@
                 <a:ea typeface="David" pitchFamily="34" charset="-122"/>
                 <a:cs typeface="David" pitchFamily="34" charset="-120"/>
               </a:rPr>
-              <a:t>‏תובנות ומסקנות</a:t>
+              <a:t>‫תובנות ומסקנות‬</a:t>
             </a:r>
             <a:endParaRPr lang="he-IL" sz="2800" dirty="0"/>
           </a:p>
@@ -3401,7 +3401,7 @@
                 <a:ea typeface="David" pitchFamily="34" charset="-122"/>
                 <a:cs typeface="David" pitchFamily="34" charset="-120"/>
               </a:rPr>
-              <a:t>‏התובנה הראשונה היא שבהירות, שליטה ומשמעות אינן רק תוצר של הסביבה: תחושת הקוהרנטיות עולה כשהעובד פועל על תפקידו, גם כשהסביבה לא השתנתה. התובנה השנייה היא שההבדל בין התקרבות להימנעות מכריע, שכן מאמצים להתנתק ולנוח חשובים להתאוששות אך אינם משנים את תפיסת העבודה. התובנה השלישית היא שהמשאבים קודמים ליוזמה: תחושת הניהוליות ניבאה עיצוב תפקיד עתידי במקדם החזק ביותר במודל, ולכן מי שמרגיש שאין לו משאבים מגן על מה שנותר במקום להשקיע (Cetkovská et al., 2026). התובנה הרביעית, מהמאמר המשלים, היא שמשאב אישי ממתן את הקשר בין האיום הטכנולוגי לבין חוסר הביטחון (Chung et al., 2025).</a:t>
+              <a:t>‫התובנה הראשונה היא שבהירות, שליטה ומשמעות אינן רק תוצר של הסביבה: תחושת הקוהרנטיות עולה כשהעובד פועל על תפקידו, גם כשהסביבה לא השתנתה. התובנה השנייה היא שההבדל בין התקרבות להימנעות מכריע, שכן מאמצים להתנתק ולנוח חשובים להתאוששות אך אינם משנים את תפיסת העבודה. התובנה השלישית היא שהמשאבים קודמים ליוזמה: תחושת הניהוליות ניבאה עיצוב תפקיד עתידי במקדם החזק ביותר במודל, ולכן מי שמרגיש שאין לו משאבים מגן על מה שנותר במקום להשקיע (Cetkovská et al., 2026). התובנה הרביעית, מהמאמר המשלים, היא שמשאב אישי ממתן את הקשר בין האיום הטכנולוגי לבין חוסר הביטחון (Chung et al., 2025).‬</a:t>
             </a:r>
             <a:endParaRPr lang="he-IL" sz="1600" dirty="0"/>
           </a:p>
@@ -3443,7 +3443,7 @@
                 <a:ea typeface="David" pitchFamily="34" charset="-122"/>
                 <a:cs typeface="David" pitchFamily="34" charset="-120"/>
               </a:rPr>
-              <a:t>‏המסקנה המרכזית היא שההתמודדות עם חוסר ודאות תעסוקתי אינה מסתכמת בהגנה מפני האיום, אלא בבנייה יזומה של בהירות, שליטה ומשמעות בתוך התפקיד הקיים, ושאת המשאבים לכך יש לבנות בתקופות של יציבות, לפני שהאיום מדלדל אותם. ברמה הארגונית, מנהלים שרוצים עובדים יוזמים בתקופת שינוי צריכים קודם כול לדאוג לתחושת ניהוליות: משאבים מספיקים, מידע ברור ומרחב לעיצוב התפקיד.</a:t>
+              <a:t>‫המסקנה המרכזית היא שההתמודדות עם חוסר ודאות תעסוקתי אינה מסתכמת בהגנה מפני האיום, אלא בבנייה יזומה של בהירות, שליטה ומשמעות בתוך התפקיד הקיים, ושאת המשאבים לכך יש לבנות בתקופות של יציבות, לפני שהאיום מדלדל אותם. ברמה הארגונית, מנהלים שרוצים עובדים יוזמים בתקופת שינוי צריכים קודם כול לדאוג לתחושת ניהוליות: משאבים מספיקים, מידע ברור ומרחב לעיצוב התפקיד.‬</a:t>
             </a:r>
             <a:endParaRPr lang="he-IL" sz="1600" dirty="0"/>
           </a:p>
@@ -3505,7 +3505,7 @@
                 <a:ea typeface="David" pitchFamily="34" charset="-122"/>
                 <a:cs typeface="David" pitchFamily="34" charset="-120"/>
               </a:rPr>
-              <a:t>‏ניהול קריירה בארגונים, הקריה האקדמית אונו</a:t>
+              <a:t>‫ניהול קריירה בארגונים, הקריה האקדמית אונו‬</a:t>
             </a:r>
             <a:endParaRPr lang="he-IL" sz="1000" dirty="0"/>
           </a:p>
@@ -3544,7 +3544,7 @@
                 <a:ea typeface="David" pitchFamily="34" charset="-122"/>
                 <a:cs typeface="David" pitchFamily="34" charset="-120"/>
               </a:rPr>
-              <a:t>‏11</a:t>
+              <a:t>‫11‬</a:t>
             </a:r>
             <a:endParaRPr lang="he-IL" sz="1100" dirty="0"/>
           </a:p>
@@ -3665,7 +3665,7 @@
                 <a:ea typeface="David" pitchFamily="34" charset="-122"/>
                 <a:cs typeface="David" pitchFamily="34" charset="-120"/>
               </a:rPr>
-              <a:t>‏דעה אישית על המאמר</a:t>
+              <a:t>‫דעה אישית על המאמר‬</a:t>
             </a:r>
             <a:endParaRPr lang="he-IL" sz="2800" dirty="0"/>
           </a:p>
@@ -3707,7 +3707,7 @@
                 <a:ea typeface="David" pitchFamily="34" charset="-122"/>
                 <a:cs typeface="David" pitchFamily="34" charset="-120"/>
               </a:rPr>
-              <a:t>‏מה שאהבתי במאמר הוא נקודת המבט, ששואלת מה עוזר לעובדים ולא רק מה מזיק להם, והעובדה שהיא נשענת על רעיון של חוקר שפעל בישראל. אהבתי את הפרקטיות שלו, שישה צרכים, שאלות פשוטות ופעולות לשבועיים, ואת הכנות של המחברים, שמקדישים כמעט עמוד שלם למגבלות, כולל הודאה שהמקדם השלילי של המובנות קשה להם להסביר. העובדה שהמאמר זמין לכולם בחינם חשובה בעיניי (Cetkovská et al., 2026).</a:t>
+              <a:t>‫מה שאהבתי במאמר הוא נקודת המבט, ששואלת מה עוזר לעובדים ולא רק מה מזיק להם, והעובדה שהיא נשענת על רעיון של חוקר שפעל בישראל. אהבתי את הפרקטיות שלו, שישה צרכים, שאלות פשוטות ופעולות לשבועיים, ואת הכנות של המחברים, שמקדישים כמעט עמוד שלם למגבלות, כולל הודאה שהמקדם השלילי של המובנות קשה להם להסביר. העובדה שהמאמר זמין לכולם בחינם חשובה בעיניי (Cetkovská et al., 2026).‬</a:t>
             </a:r>
             <a:endParaRPr lang="he-IL" sz="1600" dirty="0"/>
           </a:p>
@@ -3749,7 +3749,7 @@
                 <a:ea typeface="David" pitchFamily="34" charset="-122"/>
                 <a:cs typeface="David" pitchFamily="34" charset="-120"/>
               </a:rPr>
-              <a:t>‏חסרו לי שלושה דברים. המאמר אינו מודד חוסר ביטחון תעסוקתי במישרין, ואת החיבור לנושא בניתי דרך המאמר המשלים. המדגם גרמני ושווייצרי, בגיל ממוצע של כמעט 49 ומתרבות עבודה עם ביטחון סוציאלי גבוה, ולא ברור שהמרחב לעצב תפקיד קיים גם אצל סטודנטים ישראלים בתחילת הדרך. המחקר עוסק בשכירים בתפקיד קיים בלבד. עמדתי היא שהמאמר משלים את המסר "ממשבר להזדמנות" שנלמד בקורס: משבר הופך להזדמנות לא מעצמו, אלא כשמישהו מעצב אותו כך, ומי שמרגיש שאין לו משאבים צריך קודם תמיכה ולא עצות.</a:t>
+              <a:t>‫חסרו לי שלושה דברים. המאמר אינו מודד חוסר ביטחון תעסוקתי במישרין, ואת החיבור לנושא בניתי דרך המאמר המשלים. המדגם גרמני ושווייצרי, בגיל ממוצע של כמעט 49 ומתרבות עבודה עם ביטחון סוציאלי גבוה, ולא ברור שהמרחב לעצב תפקיד קיים גם אצל סטודנטים ישראלים בתחילת הדרך. המחקר עוסק בשכירים בתפקיד קיים בלבד. עמדתי היא שהמאמר משלים את המסר "ממשבר להזדמנות" שנלמד בקורס: משבר הופך להזדמנות לא מעצמו, אלא כשמישהו מעצב אותו כך, ומי שמרגיש שאין לו משאבים צריך קודם תמיכה ולא עצות.‬</a:t>
             </a:r>
             <a:endParaRPr lang="he-IL" sz="1600" dirty="0"/>
           </a:p>
@@ -3811,7 +3811,7 @@
                 <a:ea typeface="David" pitchFamily="34" charset="-122"/>
                 <a:cs typeface="David" pitchFamily="34" charset="-120"/>
               </a:rPr>
-              <a:t>‏ניהול קריירה בארגונים, הקריה האקדמית אונו</a:t>
+              <a:t>‫ניהול קריירה בארגונים, הקריה האקדמית אונו‬</a:t>
             </a:r>
             <a:endParaRPr lang="he-IL" sz="1000" dirty="0"/>
           </a:p>
@@ -3850,7 +3850,7 @@
                 <a:ea typeface="David" pitchFamily="34" charset="-122"/>
                 <a:cs typeface="David" pitchFamily="34" charset="-120"/>
               </a:rPr>
-              <a:t>‏12</a:t>
+              <a:t>‫12‬</a:t>
             </a:r>
             <a:endParaRPr lang="he-IL" sz="1100" dirty="0"/>
           </a:p>
@@ -3971,7 +3971,7 @@
                 <a:ea typeface="David" pitchFamily="34" charset="-122"/>
                 <a:cs typeface="David" pitchFamily="34" charset="-120"/>
               </a:rPr>
-              <a:t>‏יישום מעשי: תוכנית עיצוב תפקיד אישית</a:t>
+              <a:t>‫יישום מעשי: תוכנית עיצוב תפקיד אישית‬</a:t>
             </a:r>
             <a:endParaRPr lang="he-IL" sz="2800" dirty="0"/>
           </a:p>
@@ -4013,7 +4013,7 @@
                 <a:ea typeface="David" pitchFamily="34" charset="-122"/>
                 <a:cs typeface="David" pitchFamily="34" charset="-120"/>
               </a:rPr>
-              <a:t>‏ממצאי המאמר תורגמו לכלי אישי המבוסס על ארבעת צרכי ההתקרבות, שנמצאו כבונים תחושת קוהרנטיות. לכל צורך שאלה מנחה ודוגמאות לפעולה שאפשר לבצע בשבועיים, גם בתפקיד סטודנטיאלי או במשרה חלקית. את צרכי ההימנעות מומלץ לטפח לצורך התאוששות, אך לפי המאמר הם אינם משנים את תפיסת העבודה (Cetkovská et al., 2026).</a:t>
+              <a:t>‫ממצאי המאמר תורגמו לכלי אישי המבוסס על ארבעת צרכי ההתקרבות, שנמצאו כבונים תחושת קוהרנטיות. לכל צורך שאלה מנחה ודוגמאות לפעולה שאפשר לבצע בשבועיים, גם בתפקיד סטודנטיאלי או במשרה חלקית. את צרכי ההימנעות מומלץ לטפח לצורך התאוששות, אך לפי המאמר הם אינם משנים את תפיסת העבודה (Cetkovská et al., 2026).‬</a:t>
             </a:r>
             <a:endParaRPr lang="he-IL" sz="1500" dirty="0"/>
           </a:p>
@@ -4127,7 +4127,7 @@
                 <a:ea typeface="David" pitchFamily="34" charset="-122"/>
                 <a:cs typeface="David" pitchFamily="34" charset="-120"/>
               </a:rPr>
-              <a:t>‏אוטונומיה</a:t>
+              <a:t>‫אוטונומיה‬</a:t>
             </a:r>
             <a:endParaRPr lang="he-IL" sz="1600" dirty="0"/>
           </a:p>
@@ -4169,7 +4169,7 @@
                 <a:ea typeface="David" pitchFamily="34" charset="-122"/>
                 <a:cs typeface="David" pitchFamily="34" charset="-120"/>
               </a:rPr>
-              <a:t>‏שאלה מנחה: באילו החלטות קטנות אני יכול/ה לבחור בעצמי?</a:t>
+              <a:t>‫שאלה מנחה: באילו החלטות קטנות אני יכול/ה לבחור בעצמי?‬</a:t>
             </a:r>
             <a:endParaRPr lang="he-IL" sz="1250" dirty="0"/>
           </a:p>
@@ -4198,7 +4198,7 @@
                 <a:ea typeface="David" pitchFamily="34" charset="-122"/>
                 <a:cs typeface="David" pitchFamily="34" charset="-120"/>
               </a:rPr>
-              <a:t>‏לשבועיים הקרובים: לקבוע את סדר המשימות של הבוקר; להציע דרך משלי למשימה חוזרת; שעה קבועה ללא הפרעות.</a:t>
+              <a:t>‫לשבועיים הקרובים: לקבוע את סדר המשימות של הבוקר; להציע דרך משלי למשימה חוזרת; שעה קבועה ללא הפרעות.‬</a:t>
             </a:r>
             <a:endParaRPr lang="he-IL" sz="1250" dirty="0"/>
           </a:p>
@@ -4312,7 +4312,7 @@
                 <a:ea typeface="David" pitchFamily="34" charset="-122"/>
                 <a:cs typeface="David" pitchFamily="34" charset="-120"/>
               </a:rPr>
-              <a:t>‏מיומנות</a:t>
+              <a:t>‫מיומנות‬</a:t>
             </a:r>
             <a:endParaRPr lang="he-IL" sz="1600" dirty="0"/>
           </a:p>
@@ -4354,7 +4354,7 @@
                 <a:ea typeface="David" pitchFamily="34" charset="-122"/>
                 <a:cs typeface="David" pitchFamily="34" charset="-120"/>
               </a:rPr>
-              <a:t>‏שאלה מנחה: איזה אתגר בגובה הנכון יגרום לי להרגיש שאני מתקדם/ת?</a:t>
+              <a:t>‫שאלה מנחה: איזה אתגר בגובה הנכון יגרום לי להרגיש שאני מתקדם/ת?‬</a:t>
             </a:r>
             <a:endParaRPr lang="he-IL" sz="1250" dirty="0"/>
           </a:p>
@@ -4383,7 +4383,7 @@
                 <a:ea typeface="David" pitchFamily="34" charset="-122"/>
                 <a:cs typeface="David" pitchFamily="34" charset="-120"/>
               </a:rPr>
-              <a:t>‏לשבועיים הקרובים: משימה אחת מעט מעבר ליכולת; כלי בינה מלאכותית אחד בתחום; לתעד בסוף השבוע דבר אחד שלמדתי.</a:t>
+              <a:t>‫לשבועיים הקרובים: משימה אחת מעט מעבר ליכולת; כלי בינה מלאכותית אחד בתחום; לתעד בסוף השבוע דבר אחד שלמדתי.‬</a:t>
             </a:r>
             <a:endParaRPr lang="he-IL" sz="1250" dirty="0"/>
           </a:p>
@@ -4497,7 +4497,7 @@
                 <a:ea typeface="David" pitchFamily="34" charset="-122"/>
                 <a:cs typeface="David" pitchFamily="34" charset="-120"/>
               </a:rPr>
-              <a:t>‏משמעות</a:t>
+              <a:t>‫משמעות‬</a:t>
             </a:r>
             <a:endParaRPr lang="he-IL" sz="1600" dirty="0"/>
           </a:p>
@@ -4539,7 +4539,7 @@
                 <a:ea typeface="David" pitchFamily="34" charset="-122"/>
                 <a:cs typeface="David" pitchFamily="34" charset="-120"/>
               </a:rPr>
-              <a:t>‏שאלה מנחה: איזה חלק בעבודה מתחבר למה שחשוב לי, ואיך מגדילים אותו?</a:t>
+              <a:t>‫שאלה מנחה: איזה חלק בעבודה מתחבר למה שחשוב לי, ואיך מגדילים אותו?‬</a:t>
             </a:r>
             <a:endParaRPr lang="he-IL" sz="1250" dirty="0"/>
           </a:p>
@@ -4568,7 +4568,7 @@
                 <a:ea typeface="David" pitchFamily="34" charset="-122"/>
                 <a:cs typeface="David" pitchFamily="34" charset="-120"/>
               </a:rPr>
-              <a:t>‏לשבועיים הקרובים: לזהות למי העבודה שלי עוזרת ולדבר איתו; לנסח במשפט למה התפקיד חשוב; להתנדב למשימה שמתחברת לערכים.</a:t>
+              <a:t>‫לשבועיים הקרובים: לזהות למי העבודה שלי עוזרת ולדבר איתו; לנסח במשפט למה התפקיד חשוב; להתנדב למשימה שמתחברת לערכים.‬</a:t>
             </a:r>
             <a:endParaRPr lang="he-IL" sz="1250" dirty="0"/>
           </a:p>
@@ -4682,7 +4682,7 @@
                 <a:ea typeface="David" pitchFamily="34" charset="-122"/>
                 <a:cs typeface="David" pitchFamily="34" charset="-120"/>
               </a:rPr>
-              <a:t>‏שייכות</a:t>
+              <a:t>‫שייכות‬</a:t>
             </a:r>
             <a:endParaRPr lang="he-IL" sz="1600" dirty="0"/>
           </a:p>
@@ -4724,7 +4724,7 @@
                 <a:ea typeface="David" pitchFamily="34" charset="-122"/>
                 <a:cs typeface="David" pitchFamily="34" charset="-120"/>
               </a:rPr>
-              <a:t>‏שאלה מנחה: עם מי בעבודה אני רוצה קשר אמיתי יותר?</a:t>
+              <a:t>‫שאלה מנחה: עם מי בעבודה אני רוצה קשר אמיתי יותר?‬</a:t>
             </a:r>
             <a:endParaRPr lang="he-IL" sz="1250" dirty="0"/>
           </a:p>
@@ -4753,7 +4753,7 @@
                 <a:ea typeface="David" pitchFamily="34" charset="-122"/>
                 <a:cs typeface="David" pitchFamily="34" charset="-120"/>
               </a:rPr>
-              <a:t>‏לשבועיים הקרובים: הפסקת קפה קבועה עם עמית; להציע עזרה לפני שמבקשים; להצטרף לפרויקט חוצה מחלקות.</a:t>
+              <a:t>‫לשבועיים הקרובים: הפסקת קפה קבועה עם עמית; להציע עזרה לפני שמבקשים; להצטרף לפרויקט חוצה מחלקות.‬</a:t>
             </a:r>
             <a:endParaRPr lang="he-IL" sz="1250" dirty="0"/>
           </a:p>
@@ -4792,7 +4792,7 @@
                 <a:ea typeface="David" pitchFamily="34" charset="-122"/>
                 <a:cs typeface="David" pitchFamily="34" charset="-120"/>
               </a:rPr>
-              <a:t>‏איור 2: תוכנית עיצוב תפקיד אישית לפי ארבעת צרכי ההתקרבות. פיתוח על פי Cetkovská et al. (2026)</a:t>
+              <a:t>‫איור 2: תוכנית עיצוב תפקיד אישית לפי ארבעת צרכי ההתקרבות. פיתוח על פי Cetkovská et al. (2026)‬</a:t>
             </a:r>
             <a:endParaRPr lang="he-IL" sz="1100" dirty="0"/>
           </a:p>
@@ -4854,7 +4854,7 @@
                 <a:ea typeface="David" pitchFamily="34" charset="-122"/>
                 <a:cs typeface="David" pitchFamily="34" charset="-120"/>
               </a:rPr>
-              <a:t>‏ניהול קריירה בארגונים, הקריה האקדמית אונו</a:t>
+              <a:t>‫ניהול קריירה בארגונים, הקריה האקדמית אונו‬</a:t>
             </a:r>
             <a:endParaRPr lang="he-IL" sz="1000" dirty="0"/>
           </a:p>
@@ -4893,7 +4893,7 @@
                 <a:ea typeface="David" pitchFamily="34" charset="-122"/>
                 <a:cs typeface="David" pitchFamily="34" charset="-120"/>
               </a:rPr>
-              <a:t>‏13</a:t>
+              <a:t>‫13‬</a:t>
             </a:r>
             <a:endParaRPr lang="he-IL" sz="1100" dirty="0"/>
           </a:p>
@@ -5014,7 +5014,7 @@
                 <a:ea typeface="David" pitchFamily="34" charset="-122"/>
                 <a:cs typeface="David" pitchFamily="34" charset="-120"/>
               </a:rPr>
-              <a:t>‏אמצעי עזר להמחשה ולהפעלה</a:t>
+              <a:t>‫אמצעי עזר להמחשה ולהפעלה‬</a:t>
             </a:r>
             <a:endParaRPr lang="he-IL" sz="2800" dirty="0"/>
           </a:p>
@@ -5056,7 +5056,7 @@
                 <a:ea typeface="David" pitchFamily="34" charset="-122"/>
                 <a:cs typeface="David" pitchFamily="34" charset="-120"/>
               </a:rPr>
-              <a:t>‏כתבת עיתון וסקר פתיחה. ההצגה נפתחת בכותרת מהעיתונות הכלכלית על התייעלות באמצעות בינה מלאכותית בענף ההייטק ("הקשיים של מנהלי הייטק", 2026), ולאחריה הכיתה מתבקשת לדרג, בסולם 1 עד 5, עד כמה העבודה או הלימודים הנוכחיים מרגישים ברורים, בשליטה ומשמעותיים. שלוש השאלות הן שלושת רכיבי תחושת הקוהרנטיות בעבודה, והתוצאות נשמרות לדיון בסיום.</a:t>
+              <a:t>‫כתבת עיתון וסקר פתיחה. ההצגה נפתחת בכותרת מהעיתונות הכלכלית על התייעלות באמצעות בינה מלאכותית בענף ההייטק ("הקשיים של מנהלי הייטק", 2026), ולאחריה הכיתה מתבקשת לדרג, בסולם 1 עד 5, עד כמה העבודה או הלימודים הנוכחיים מרגישים ברורים, בשליטה ומשמעותיים. שלוש השאלות הן שלושת רכיבי תחושת הקוהרנטיות בעבודה, והתוצאות נשמרות לדיון בסיום.‬</a:t>
             </a:r>
             <a:endParaRPr lang="he-IL" sz="1600" dirty="0"/>
           </a:p>
@@ -5098,7 +5098,7 @@
                 <a:ea typeface="David" pitchFamily="34" charset="-122"/>
                 <a:cs typeface="David" pitchFamily="34" charset="-120"/>
               </a:rPr>
-              <a:t>‏סרטון. יוקרן קטע של כ-75 שניות מהרצאת TED של חוקרת החוסן לוסי הון, המציעה שלושה עקרונות: לקבל שדברים רעים קורים, לבחור במה להתמקד ולהפנות את הקשב למה שבשליטתנו, ולשאול על כל פעולה האם היא עוזרת או פוגעת (Hone, 2019). שני העקרונות האחרונים הם, במונחי המאמר, חיזוק המובנות והניהוליות והבחירה לעצב את המצב במקום רק לשרוד אותו.</a:t>
+              <a:t>‫סרטון. יוקרן קטע של כ-75 שניות מהרצאת TED של חוקרת החוסן לוסי הון, המציעה שלושה עקרונות: לקבל שדברים רעים קורים, לבחור במה להתמקד ולהפנות את הקשב למה שבשליטתנו, ולשאול על כל פעולה האם היא עוזרת או פוגעת (Hone, 2019). שני העקרונות האחרונים הם, במונחי המאמר, חיזוק המובנות והניהוליות והבחירה לעצב את המצב במקום רק לשרוד אותו.‬</a:t>
             </a:r>
             <a:endParaRPr lang="he-IL" sz="1600" dirty="0"/>
           </a:p>
@@ -5188,7 +5188,7 @@
                 <a:ea typeface="David" pitchFamily="34" charset="-122"/>
                 <a:cs typeface="David" pitchFamily="34" charset="-120"/>
               </a:rPr>
-              <a:t>‏הפעלה. כל סטודנט בוחר צורך התקרבות אחד מתוך ארבעת הצרכים שבאיור 2, כותב פעולה אחת קונקרטית ומועד לביצועה, ומשתף את השכן במשפט אחד. לאחר מכן נאספות שתיים או שלוש דוגמאות מהכיתה ומחוברות לממצא: פעולות מסוג זה, לפי המאמר, מנבאות עלייה בבהירות, בשליטה ובמשמעות חצי שנה מאוחר יותר (Cetkovská et al., 2026). משך ההפעלה כשתי דקות.</a:t>
+              <a:t>‫הפעלה. כל סטודנט בוחר צורך התקרבות אחד מתוך ארבעת הצרכים שבאיור 2, כותב פעולה אחת קונקרטית ומועד לביצועה, ומשתף את השכן במשפט אחד. לאחר מכן נאספות שתיים או שלוש דוגמאות מהכיתה ומחוברות לממצא: פעולות מסוג זה, לפי המאמר, מנבאות עלייה בבהירות, בשליטה ובמשמעות חצי שנה מאוחר יותר (Cetkovská et al., 2026). משך ההפעלה כשתי דקות.‬</a:t>
             </a:r>
             <a:endParaRPr lang="he-IL" sz="1600" dirty="0"/>
           </a:p>
@@ -5250,7 +5250,7 @@
                 <a:ea typeface="David" pitchFamily="34" charset="-122"/>
                 <a:cs typeface="David" pitchFamily="34" charset="-120"/>
               </a:rPr>
-              <a:t>‏ניהול קריירה בארגונים, הקריה האקדמית אונו</a:t>
+              <a:t>‫ניהול קריירה בארגונים, הקריה האקדמית אונו‬</a:t>
             </a:r>
             <a:endParaRPr lang="he-IL" sz="1000" dirty="0"/>
           </a:p>
@@ -5289,7 +5289,7 @@
                 <a:ea typeface="David" pitchFamily="34" charset="-122"/>
                 <a:cs typeface="David" pitchFamily="34" charset="-120"/>
               </a:rPr>
-              <a:t>‏14</a:t>
+              <a:t>‫14‬</a:t>
             </a:r>
             <a:endParaRPr lang="he-IL" sz="1100" dirty="0"/>
           </a:p>
@@ -5410,7 +5410,7 @@
                 <a:ea typeface="David" pitchFamily="34" charset="-122"/>
                 <a:cs typeface="David" pitchFamily="34" charset="-120"/>
               </a:rPr>
-              <a:t>‏סיכום</a:t>
+              <a:t>‫סיכום‬</a:t>
             </a:r>
             <a:endParaRPr lang="he-IL" sz="2800" dirty="0"/>
           </a:p>
@@ -5452,7 +5452,7 @@
                 <a:ea typeface="David" pitchFamily="34" charset="-122"/>
                 <a:cs typeface="David" pitchFamily="34" charset="-120"/>
               </a:rPr>
-              <a:t>‏העבודה פתחה בשאלה מה מאפשר לעובדים להישאר בריאים ומתפקדים כשעולם העבודה אינו יציב. התשובה שעלתה ממחקר האורך של צטקובסקה ואחרים היא שתחושת הקוהרנטיות בעבודה היא משאב דינמי שהעובד יכול לחזק בעצמו באמצעות עיצוב תפקיד המכוון לצרכי אוטונומיה, מיומנות, משמעות ושייכות, ושהמשאב הזה בתורו מזין יוזמה נוספת (Cetkovská et al., 2026). המאמר המשלים הראה שהמודעות לבינה מלאכותית היא מקור מרכזי לחוסר הביטחון של ימינו ושמשאב אישי ממתן אותו (Chung et al., 2025).</a:t>
+              <a:t>‫העבודה פתחה בשאלה מה מאפשר לעובדים להישאר בריאים ומתפקדים כשעולם העבודה אינו יציב. התשובה שעלתה ממחקר האורך של צטקובסקה ואחרים היא שתחושת הקוהרנטיות בעבודה היא משאב דינמי שהעובד יכול לחזק בעצמו באמצעות עיצוב תפקיד המכוון לצרכי אוטונומיה, מיומנות, משמעות ושייכות, ושהמשאב הזה בתורו מזין יוזמה נוספת (Cetkovská et al., 2026). המאמר המשלים הראה שהמודעות לבינה מלאכותית היא מקור מרכזי לחוסר הביטחון של ימינו ושמשאב אישי ממתן אותו (Chung et al., 2025).‬</a:t>
             </a:r>
             <a:endParaRPr lang="he-IL" sz="1600" dirty="0"/>
           </a:p>
@@ -5494,7 +5494,7 @@
                 <a:ea typeface="David" pitchFamily="34" charset="-122"/>
                 <a:cs typeface="David" pitchFamily="34" charset="-120"/>
               </a:rPr>
-              <a:t>‏מכאן ההמלצות היישומיות. לסטודנט: לבחור בכל שבועיים צורך התקרבות אחד ופעולה אחת של עיצוב תפקיד, ללמוד כלי בינה מלאכותית אחד בתחום העיסוק, ולתעד בסוף כל שבוע דבר אחד שנלמד. למנהל: לטפח תחושת ניהוליות באמצעות משאבים ומידע ברור, לתת מרחב לעיצוב תפקיד, ולתקשר שינויים טכנולוגיים בשקיפות. את חוסר הוודאות לא תמיד אפשר למנוע. את הבהירות, השליטה והמשמעות בתוך התפקיד אפשר לבנות.</a:t>
+              <a:t>‫מכאן ההמלצות היישומיות. לסטודנט: לבחור בכל שבועיים צורך התקרבות אחד ופעולה אחת של עיצוב תפקיד, ללמוד כלי בינה מלאכותית אחד בתחום העיסוק, ולתעד בסוף כל שבוע דבר אחד שנלמד. למנהל: לטפח תחושת ניהוליות באמצעות משאבים ומידע ברור, לתת מרחב לעיצוב תפקיד, ולתקשר שינויים טכנולוגיים בשקיפות. את חוסר הוודאות לא תמיד אפשר למנוע. את הבהירות, השליטה והמשמעות בתוך התפקיד אפשר לבנות.‬</a:t>
             </a:r>
             <a:endParaRPr lang="he-IL" sz="1600" dirty="0"/>
           </a:p>
@@ -5533,7 +5533,7 @@
                 <a:ea typeface="David" pitchFamily="34" charset="-122"/>
                 <a:cs typeface="David" pitchFamily="34" charset="-120"/>
               </a:rPr>
-              <a:t>‏תודה. אשמח לשאלות.</a:t>
+              <a:t>‫תודה. אשמח לשאלות.‬</a:t>
             </a:r>
             <a:endParaRPr lang="he-IL" sz="1600" dirty="0"/>
           </a:p>
@@ -5595,7 +5595,7 @@
                 <a:ea typeface="David" pitchFamily="34" charset="-122"/>
                 <a:cs typeface="David" pitchFamily="34" charset="-120"/>
               </a:rPr>
-              <a:t>‏ניהול קריירה בארגונים, הקריה האקדמית אונו</a:t>
+              <a:t>‫ניהול קריירה בארגונים, הקריה האקדמית אונו‬</a:t>
             </a:r>
             <a:endParaRPr lang="he-IL" sz="1000" dirty="0"/>
           </a:p>
@@ -5634,7 +5634,7 @@
                 <a:ea typeface="David" pitchFamily="34" charset="-122"/>
                 <a:cs typeface="David" pitchFamily="34" charset="-120"/>
               </a:rPr>
-              <a:t>‏15</a:t>
+              <a:t>‫15‬</a:t>
             </a:r>
             <a:endParaRPr lang="he-IL" sz="1100" dirty="0"/>
           </a:p>
@@ -5755,7 +5755,7 @@
                 <a:ea typeface="David" pitchFamily="34" charset="-122"/>
                 <a:cs typeface="David" pitchFamily="34" charset="-120"/>
               </a:rPr>
-              <a:t>‏רשימת מקורות</a:t>
+              <a:t>‫רשימת מקורות‬</a:t>
             </a:r>
             <a:endParaRPr lang="he-IL" sz="2800" dirty="0"/>
           </a:p>
@@ -5797,7 +5797,7 @@
                 <a:ea typeface="David" pitchFamily="34" charset="-122"/>
                 <a:cs typeface="David" pitchFamily="34" charset="-120"/>
               </a:rPr>
-              <a:t>‏בנק ישראל. (2025, 11 במרץ). ההשפעה הצפויה של בינה מלאכותית יוצרת על העובדים: השלכות על המדיניות בשוק העבודה [תיבה מתוך דוח בנק ישראל לשנת 2024].</a:t>
+              <a:t>‫בנק ישראל. (2025, 11 במרץ). ההשפעה הצפויה של בינה מלאכותית יוצרת על העובדים: השלכות על המדיניות בשוק העבודה [תיבה מתוך דוח בנק ישראל לשנת 2024].‬</a:t>
             </a:r>
             <a:endParaRPr lang="he-IL" sz="1300" dirty="0"/>
           </a:p>
@@ -5814,7 +5814,7 @@
                 <a:ea typeface="David" pitchFamily="34" charset="-122"/>
                 <a:cs typeface="David" pitchFamily="34" charset="-120"/>
               </a:rPr>
-              <a:t>‏הקשיים של מנהלי הייטק ב-2026: גיוס עובדים מתאימים והתייעלות AI. (2026, 21 ביוני). TheMarker.</a:t>
+              <a:t>‫הקשיים של מנהלי הייטק ב-2026: גיוס עובדים מתאימים והתייעלות AI. (2026, 21 ביוני). TheMarker.‬</a:t>
             </a:r>
             <a:endParaRPr lang="he-IL" sz="1300" dirty="0"/>
           </a:p>
@@ -5975,7 +5975,7 @@
                 <a:ea typeface="David" pitchFamily="34" charset="-122"/>
                 <a:cs typeface="David" pitchFamily="34" charset="-120"/>
               </a:rPr>
-              <a:t>‏ניהול קריירה בארגונים, הקריה האקדמית אונו</a:t>
+              <a:t>‫ניהול קריירה בארגונים, הקריה האקדמית אונו‬</a:t>
             </a:r>
             <a:endParaRPr lang="he-IL" sz="1000" dirty="0"/>
           </a:p>
@@ -6014,7 +6014,7 @@
                 <a:ea typeface="David" pitchFamily="34" charset="-122"/>
                 <a:cs typeface="David" pitchFamily="34" charset="-120"/>
               </a:rPr>
-              <a:t>‏16</a:t>
+              <a:t>‫16‬</a:t>
             </a:r>
             <a:endParaRPr lang="he-IL" sz="1100" dirty="0"/>
           </a:p>
@@ -6135,7 +6135,7 @@
                 <a:ea typeface="David" pitchFamily="34" charset="-122"/>
                 <a:cs typeface="David" pitchFamily="34" charset="-120"/>
               </a:rPr>
-              <a:t>‏מבוא: הצגת הנושא</a:t>
+              <a:t>‫מבוא: הצגת הנושא‬</a:t>
             </a:r>
             <a:endParaRPr lang="he-IL" sz="2800" dirty="0"/>
           </a:p>
@@ -6177,7 +6177,7 @@
                 <a:ea typeface="David" pitchFamily="34" charset="-122"/>
                 <a:cs typeface="David" pitchFamily="34" charset="-120"/>
               </a:rPr>
-              <a:t>‏עולם העבודה של שנת 2026 מתאפיין באי-ודאות. גלי ההתייעלות בענף ההייטק, כניסת הבינה המלאכותית היוצרת לתפקידי צווארון לבן, המלחמה ושירות המילואים הממושך והמעבר לצורות העסקה גמישות יצרו מציאות שבה גם עובדים בעלי ותק אינם יודעים כיצד ייראה תפקידם בעוד שנה. תיבה בדוח בנק ישראל לשנת 2024 העריכה כי כחמישית מהמועסקים בישראל עובדים במקצועות שבהם הביקוש צפוי לרדת באופן משמעותי עם התרחבות השימוש בבינה מלאכותית (בנק ישראל, 2025), ובעיתונות הכלכלית דווח כי ההתייעלות באמצעות בינה מלאכותית עומדת בראש סדר היום של מנהלי ההייטק ("הקשיים של מנהלי הייטק", 2026). חוסר ביטחון תעסוקתי, החשש לאבד את המשרה או את מאפייניה החשובים, הפך מאירוע חריג לתנאי קבוע (Chung et al., 2025).</a:t>
+              <a:t>‫עולם העבודה של שנת 2026 מתאפיין באי-ודאות. גלי ההתייעלות בענף ההייטק, כניסת הבינה המלאכותית היוצרת לתפקידי צווארון לבן, המלחמה ושירות המילואים הממושך והמעבר לצורות העסקה גמישות יצרו מציאות שבה גם עובדים בעלי ותק אינם יודעים כיצד ייראה תפקידם בעוד שנה. תיבה בדוח בנק ישראל לשנת 2024 העריכה כי כחמישית מהמועסקים בישראל עובדים במקצועות שבהם הביקוש צפוי לרדת באופן משמעותי עם התרחבות השימוש בבינה מלאכותית (בנק ישראל, 2025), ובעיתונות הכלכלית דווח כי ההתייעלות באמצעות בינה מלאכותית עומדת בראש סדר היום של מנהלי ההייטק ("הקשיים של מנהלי הייטק", 2026). חוסר ביטחון תעסוקתי, החשש לאבד את המשרה או את מאפייניה החשובים, הפך מאירוע חריג לתנאי קבוע (Chung et al., 2025).‬</a:t>
             </a:r>
             <a:endParaRPr lang="he-IL" sz="1600" dirty="0"/>
           </a:p>
@@ -6219,7 +6219,7 @@
                 <a:ea typeface="David" pitchFamily="34" charset="-122"/>
                 <a:cs typeface="David" pitchFamily="34" charset="-120"/>
               </a:rPr>
-              <a:t>‏רוב המחקר בתחום שואל מה הנזק שאי-הוודאות גורמת. עבודה זו בוחרת בשאלה ההפוכה, שהציב אהרן אנטונובסקי מאוניברסיטת בן-גוריון: מה מאפשר לעובדים להישאר בריאים ומתפקדים גם כשהסביבה אינה יציבה (Antonovsky, 1987, כפי שמצוטט אצל Cetkovská et al., 2026). המאמר שנבחר מציע תשובה שנמצאת בשליטת העובד עצמו.</a:t>
+              <a:t>‫רוב המחקר בתחום שואל מה הנזק שאי-הוודאות גורמת. עבודה זו בוחרת בשאלה ההפוכה, שהציב אהרן אנטונובסקי מאוניברסיטת בן-גוריון: מה מאפשר לעובדים להישאר בריאים ומתפקדים גם כשהסביבה אינה יציבה (Antonovsky, 1987, כפי שמצוטט אצל Cetkovská et al., 2026). המאמר שנבחר מציע תשובה שנמצאת בשליטת העובד עצמו.‬</a:t>
             </a:r>
             <a:endParaRPr lang="he-IL" sz="1600" dirty="0"/>
           </a:p>
@@ -6281,7 +6281,7 @@
                 <a:ea typeface="David" pitchFamily="34" charset="-122"/>
                 <a:cs typeface="David" pitchFamily="34" charset="-120"/>
               </a:rPr>
-              <a:t>‏ניהול קריירה בארגונים, הקריה האקדמית אונו</a:t>
+              <a:t>‫ניהול קריירה בארגונים, הקריה האקדמית אונו‬</a:t>
             </a:r>
             <a:endParaRPr lang="he-IL" sz="1000" dirty="0"/>
           </a:p>
@@ -6320,7 +6320,7 @@
                 <a:ea typeface="David" pitchFamily="34" charset="-122"/>
                 <a:cs typeface="David" pitchFamily="34" charset="-120"/>
               </a:rPr>
-              <a:t>‏2</a:t>
+              <a:t>‫2‬</a:t>
             </a:r>
             <a:endParaRPr lang="he-IL" sz="1100" dirty="0"/>
           </a:p>
@@ -6441,7 +6441,7 @@
                 <a:ea typeface="David" pitchFamily="34" charset="-122"/>
                 <a:cs typeface="David" pitchFamily="34" charset="-120"/>
               </a:rPr>
-              <a:t>‏מבוא: הצגת המאמר</a:t>
+              <a:t>‫מבוא: הצגת המאמר‬</a:t>
             </a:r>
             <a:endParaRPr lang="he-IL" sz="2800" dirty="0"/>
           </a:p>
@@ -6522,7 +6522,7 @@
                 <a:ea typeface="David" pitchFamily="34" charset="-122"/>
                 <a:cs typeface="David" pitchFamily="34" charset="-120"/>
               </a:rPr>
-              <a:t>‏המאמר שנבחר הוא מחקר אמפירי כמותי במערך אורך, שפורסם בשנת 2026 בכתב העת השפיט Scandinavian Journal of Work and Organizational Psychology, היוצא לאור בהוצאת אוניברסיטת סטוקהולם, בגישה פתוחה מלאה. מחבריו הם קריסטינה צטקובסקה מאוניברסיטת קארל בפראג, וגאורג באואר ומרטין טושל מהמרכז לסלוטוגנזה באוניברסיטת ציריך, והמחקר מומן על ידי הקרן הלאומית השווייצרית למדע (Cetkovská et al., 2026).</a:t>
+              <a:t>‫המאמר שנבחר הוא מחקר אמפירי כמותי במערך אורך, שפורסם בשנת 2026 בכתב העת השפיט Scandinavian Journal of Work and Organizational Psychology, היוצא לאור בהוצאת אוניברסיטת סטוקהולם, בגישה פתוחה מלאה. מחבריו הם קריסטינה צטקובסקה מאוניברסיטת קארל בפראג, וגאורג באואר ומרטין טושל מהמרכז לסלוטוגנזה באוניברסיטת ציריך, והמחקר מומן על ידי הקרן הלאומית השווייצרית למדע (Cetkovská et al., 2026).‬</a:t>
             </a:r>
             <a:endParaRPr lang="he-IL" sz="1600" dirty="0"/>
           </a:p>
@@ -6564,7 +6564,7 @@
                 <a:ea typeface="David" pitchFamily="34" charset="-122"/>
                 <a:cs typeface="David" pitchFamily="34" charset="-120"/>
               </a:rPr>
-              <a:t>‏מדובר במחקר פאנל בשני גלי מדידה בהפרש של שישה חודשים, שבו השתתפו 924 עובדים מגרמניה ומשווייץ. המאמר נבחר משום שהוא שואל מה עוזר לעובדים ולא רק מה מזיק להם, משום שהוא מציע כלי שאינו תלוי בארגון, ומשום שהוא עומד בדרישות המטלה: מאמר שפיט מחמש השנים האחרונות, מקיף ומהימן, הזמין במלואו לכל קורא (Cetkovská et al., 2026).</a:t>
+              <a:t>‫מדובר במחקר פאנל בשני גלי מדידה בהפרש של שישה חודשים, שבו השתתפו 924 עובדים מגרמניה ומשווייץ. המאמר נבחר משום שהוא שואל מה עוזר לעובדים ולא רק מה מזיק להם, משום שהוא מציע כלי שאינו תלוי בארגון, ומשום שהוא עומד בדרישות המטלה: מאמר שפיט מחמש השנים האחרונות, מקיף ומהימן, הזמין במלואו לכל קורא (Cetkovská et al., 2026).‬</a:t>
             </a:r>
             <a:endParaRPr lang="he-IL" sz="1600" dirty="0"/>
           </a:p>
@@ -6626,7 +6626,7 @@
                 <a:ea typeface="David" pitchFamily="34" charset="-122"/>
                 <a:cs typeface="David" pitchFamily="34" charset="-120"/>
               </a:rPr>
-              <a:t>‏ניהול קריירה בארגונים, הקריה האקדמית אונו</a:t>
+              <a:t>‫ניהול קריירה בארגונים, הקריה האקדמית אונו‬</a:t>
             </a:r>
             <a:endParaRPr lang="he-IL" sz="1000" dirty="0"/>
           </a:p>
@@ -6665,7 +6665,7 @@
                 <a:ea typeface="David" pitchFamily="34" charset="-122"/>
                 <a:cs typeface="David" pitchFamily="34" charset="-120"/>
               </a:rPr>
-              <a:t>‏3</a:t>
+              <a:t>‫3‬</a:t>
             </a:r>
             <a:endParaRPr lang="he-IL" sz="1100" dirty="0"/>
           </a:p>
@@ -6786,7 +6786,7 @@
                 <a:ea typeface="David" pitchFamily="34" charset="-122"/>
                 <a:cs typeface="David" pitchFamily="34" charset="-120"/>
               </a:rPr>
-              <a:t>‏תמצית המאמר: הרקע התיאורטי</a:t>
+              <a:t>‫תמצית המאמר: הרקע התיאורטי‬</a:t>
             </a:r>
             <a:endParaRPr lang="he-IL" sz="2800" dirty="0"/>
           </a:p>
@@ -6828,7 +6828,7 @@
                 <a:ea typeface="David" pitchFamily="34" charset="-122"/>
                 <a:cs typeface="David" pitchFamily="34" charset="-120"/>
               </a:rPr>
-              <a:t>‏הגישה הסלוטוגנית הופכת את שאלת המחקר המקובלת: במקום לשאול מדוע אנשים חולים, היא שואלת כיצד הם שומרים על בריאותם למרות גורמי דחק. במרכזה עומדת תחושת הקוהרנטיות, המידה שבה האדם תופס את חייו כמובנים, כניתנים לניהול וכמשמעותיים (Antonovsky, 1987, כפי שמצוטט אצל Cetkovská et al., 2026). על בסיס זה פותח המושג תחושת קוהרנטיות בעבודה, המתייחס למצב העבודה הנוכחי בלבד ומורכב משלושה רכיבים. בניגוד לתחושת הקוהרנטיות הכללית, המתייצבת בבגרות הצעירה, הרכיב התעסוקתי דינמי ומעוצב ללא הרף על ידי תנאי העבודה (Cetkovská et al., 2026).</a:t>
+              <a:t>‫הגישה הסלוטוגנית הופכת את שאלת המחקר המקובלת: במקום לשאול מדוע אנשים חולים, היא שואלת כיצד הם שומרים על בריאותם למרות גורמי דחק. במרכזה עומדת תחושת הקוהרנטיות, המידה שבה האדם תופס את חייו כמובנים, כניתנים לניהול וכמשמעותיים (Antonovsky, 1987, כפי שמצוטט אצל Cetkovská et al., 2026). על בסיס זה פותח המושג תחושת קוהרנטיות בעבודה, המתייחס למצב העבודה הנוכחי בלבד ומורכב משלושה רכיבים. בניגוד לתחושת הקוהרנטיות הכללית, המתייצבת בבגרות הצעירה, הרכיב התעסוקתי דינמי ומעוצב ללא הרף על ידי תנאי העבודה (Cetkovská et al., 2026).‬</a:t>
             </a:r>
             <a:endParaRPr lang="he-IL" sz="1600" dirty="0"/>
           </a:p>
@@ -6942,7 +6942,7 @@
                 <a:ea typeface="David" pitchFamily="34" charset="-122"/>
                 <a:cs typeface="David" pitchFamily="34" charset="-120"/>
               </a:rPr>
-              <a:t>‏מובנות (רכיב קוגניטיבי)</a:t>
+              <a:t>‫מובנות (רכיב קוגניטיבי)‬</a:t>
             </a:r>
             <a:endParaRPr lang="he-IL" sz="1600" dirty="0"/>
           </a:p>
@@ -6984,7 +6984,7 @@
                 <a:ea typeface="David" pitchFamily="34" charset="-122"/>
                 <a:cs typeface="David" pitchFamily="34" charset="-120"/>
               </a:rPr>
-              <a:t>‏מצב העבודה נתפס כמובנה, עקבי וברור. חוסר ודאות פוגע ברכיב זה ראשון: העתיד אינו צפוי.</a:t>
+              <a:t>‫מצב העבודה נתפס כמובנה, עקבי וברור. חוסר ודאות פוגע ברכיב זה ראשון: העתיד אינו צפוי.‬</a:t>
             </a:r>
             <a:endParaRPr lang="he-IL" sz="1300" dirty="0"/>
           </a:p>
@@ -7098,7 +7098,7 @@
                 <a:ea typeface="David" pitchFamily="34" charset="-122"/>
                 <a:cs typeface="David" pitchFamily="34" charset="-120"/>
               </a:rPr>
-              <a:t>‏ניהוליות (רכיב התנהגותי)</a:t>
+              <a:t>‫ניהוליות (רכיב התנהגותי)‬</a:t>
             </a:r>
             <a:endParaRPr lang="he-IL" sz="1600" dirty="0"/>
           </a:p>
@@ -7140,7 +7140,7 @@
                 <a:ea typeface="David" pitchFamily="34" charset="-122"/>
                 <a:cs typeface="David" pitchFamily="34" charset="-120"/>
               </a:rPr>
-              <a:t>‏לעובד יש משאבים מספיקים להתמודד עם הדרישות. בתקופת אי-ודאות המשאבים נראים בלתי מספיקים.</a:t>
+              <a:t>‫לעובד יש משאבים מספיקים להתמודד עם הדרישות. בתקופת אי-ודאות המשאבים נראים בלתי מספיקים.‬</a:t>
             </a:r>
             <a:endParaRPr lang="he-IL" sz="1300" dirty="0"/>
           </a:p>
@@ -7254,7 +7254,7 @@
                 <a:ea typeface="David" pitchFamily="34" charset="-122"/>
                 <a:cs typeface="David" pitchFamily="34" charset="-120"/>
               </a:rPr>
-              <a:t>‏משמעותיות (רכיב מוטיבציוני)</a:t>
+              <a:t>‫משמעותיות (רכיב מוטיבציוני)‬</a:t>
             </a:r>
             <a:endParaRPr lang="he-IL" sz="1600" dirty="0"/>
           </a:p>
@@ -7296,7 +7296,7 @@
                 <a:ea typeface="David" pitchFamily="34" charset="-122"/>
                 <a:cs typeface="David" pitchFamily="34" charset="-120"/>
               </a:rPr>
-              <a:t>‏מצב העבודה נתפס כראוי למחויבות ולמעורבות. קשה להתחייב למה שעלול להיעלם.</a:t>
+              <a:t>‫מצב העבודה נתפס כראוי למחויבות ולמעורבות. קשה להתחייב למה שעלול להיעלם.‬</a:t>
             </a:r>
             <a:endParaRPr lang="he-IL" sz="1300" dirty="0"/>
           </a:p>
@@ -7335,7 +7335,7 @@
                 <a:ea typeface="David" pitchFamily="34" charset="-122"/>
                 <a:cs typeface="David" pitchFamily="34" charset="-120"/>
               </a:rPr>
-              <a:t>‏איור 1: שלושת רכיבי תחושת הקוהרנטיות בעבודה ופגיעתו של חוסר הוודאות בכל אחד מהם (על פי Cetkovská et al., 2026)</a:t>
+              <a:t>‫איור 1: שלושת רכיבי תחושת הקוהרנטיות בעבודה ופגיעתו של חוסר הוודאות בכל אחד מהם (על פי Cetkovská et al., 2026)‬</a:t>
             </a:r>
             <a:endParaRPr lang="he-IL" sz="1100" dirty="0"/>
           </a:p>
@@ -7397,7 +7397,7 @@
                 <a:ea typeface="David" pitchFamily="34" charset="-122"/>
                 <a:cs typeface="David" pitchFamily="34" charset="-120"/>
               </a:rPr>
-              <a:t>‏ניהול קריירה בארגונים, הקריה האקדמית אונו</a:t>
+              <a:t>‫ניהול קריירה בארגונים, הקריה האקדמית אונו‬</a:t>
             </a:r>
             <a:endParaRPr lang="he-IL" sz="1000" dirty="0"/>
           </a:p>
@@ -7436,7 +7436,7 @@
                 <a:ea typeface="David" pitchFamily="34" charset="-122"/>
                 <a:cs typeface="David" pitchFamily="34" charset="-120"/>
               </a:rPr>
-              <a:t>‏4</a:t>
+              <a:t>‫4‬</a:t>
             </a:r>
             <a:endParaRPr lang="he-IL" sz="1100" dirty="0"/>
           </a:p>
@@ -7557,7 +7557,7 @@
                 <a:ea typeface="David" pitchFamily="34" charset="-122"/>
                 <a:cs typeface="David" pitchFamily="34" charset="-120"/>
               </a:rPr>
-              <a:t>‏תמצית המאמר: עיצוב תפקיד מבוסס צרכים והשערות המחקר</a:t>
+              <a:t>‫תמצית המאמר: עיצוב תפקיד מבוסס צרכים והשערות המחקר‬</a:t>
             </a:r>
             <a:endParaRPr lang="he-IL" sz="2800" dirty="0"/>
           </a:p>
@@ -7599,7 +7599,7 @@
                 <a:ea typeface="David" pitchFamily="34" charset="-122"/>
                 <a:cs typeface="David" pitchFamily="34" charset="-120"/>
               </a:rPr>
-              <a:t>‏עיצוב תפקיד הוגדר לראשונה כמאמצים יזומים של עובדים להתאים היבטים של תפקידם לצרכיהם ולכישוריהם, גישה שהעבירה את העובד ממקבל פסיבי של תנאי עבודה לשחקן פעיל בעיצובם (Wrzesniewski &amp; Dutton, 2001, כפי שמצוטט אצל Cetkovská et al., 2026). המאמר משתמש בגרסה המתמקדת בסיפוק שישה צרכים פסיכולוגיים בעבודה, צרכי DRAMMA: ניתוק והרפיה הם צרכי הימנעות שמטרתם להפחית מאמץ ולהשיב אנרגיה, ואילו אוטונומיה, מיומנות, משמעות ושייכות הם צרכי התקרבות שמטרתם לייצר מצבים חיוביים, צמיחה ומשאבים חדשים. פריט לדוגמה: "ארגנתי את עבודתי כך שאשיג תחושת תכלית במה שאני עושה" (Cetkovská et al., 2026).</a:t>
+              <a:t>‫עיצוב תפקיד הוגדר לראשונה כמאמצים יזומים של עובדים להתאים היבטים של תפקידם לצרכיהם ולכישוריהם, גישה שהעבירה את העובד ממקבל פסיבי של תנאי עבודה לשחקן פעיל בעיצובם (Wrzesniewski &amp; Dutton, 2001, כפי שמצוטט אצל Cetkovská et al., 2026). המאמר משתמש בגרסה המתמקדת בסיפוק שישה צרכים פסיכולוגיים בעבודה, צרכי DRAMMA: ניתוק והרפיה הם צרכי הימנעות שמטרתם להפחית מאמץ ולהשיב אנרגיה, ואילו אוטונומיה, מיומנות, משמעות ושייכות הם צרכי התקרבות שמטרתם לייצר מצבים חיוביים, צמיחה ומשאבים חדשים. פריט לדוגמה: "ארגנתי את עבודתי כך שאשיג תחושת תכלית במה שאני עושה" (Cetkovská et al., 2026).‬</a:t>
             </a:r>
             <a:endParaRPr lang="he-IL" sz="1600" dirty="0"/>
           </a:p>
@@ -7641,7 +7641,7 @@
                 <a:ea typeface="David" pitchFamily="34" charset="-122"/>
                 <a:cs typeface="David" pitchFamily="34" charset="-120"/>
               </a:rPr>
-              <a:t>‏על בסיס תיאוריית שימור המשאבים, שלפיה מי שמחזיק במשאבים נוטה לפתח משאבים נוספים (Hobfoll, 2001, כפי שמצוטט אצל Cetkovská et al., 2026), הועלו שתי השערות. ההשערה הראשונה היא שעיצוב תפקיד מבוסס צרכים מנבא באופן חיובי את שלושת רכיבי תחושת הקוהרנטיות חצי שנה מאוחר יותר. ההשערה השנייה היא שתחושת קוהרנטיות בעבודה מנבאת עיצוב תפקיד עתידי. יחד הן מתארות "ספירלת רווח" שבה שני המשתנים מחזקים זה את זה לאורך זמן (Cetkovská et al., 2026).</a:t>
+              <a:t>‫על בסיס תיאוריית שימור המשאבים, שלפיה מי שמחזיק במשאבים נוטה לפתח משאבים נוספים (Hobfoll, 2001, כפי שמצוטט אצל Cetkovská et al., 2026), הועלו שתי השערות. ההשערה הראשונה היא שעיצוב תפקיד מבוסס צרכים מנבא באופן חיובי את שלושת רכיבי תחושת הקוהרנטיות חצי שנה מאוחר יותר. ההשערה השנייה היא שתחושת קוהרנטיות בעבודה מנבאת עיצוב תפקיד עתידי. יחד הן מתארות "ספירלת רווח" שבה שני המשתנים מחזקים זה את זה לאורך זמן (Cetkovská et al., 2026).‬</a:t>
             </a:r>
             <a:endParaRPr lang="he-IL" sz="1600" dirty="0"/>
           </a:p>
@@ -7703,7 +7703,7 @@
                 <a:ea typeface="David" pitchFamily="34" charset="-122"/>
                 <a:cs typeface="David" pitchFamily="34" charset="-120"/>
               </a:rPr>
-              <a:t>‏ניהול קריירה בארגונים, הקריה האקדמית אונו</a:t>
+              <a:t>‫ניהול קריירה בארגונים, הקריה האקדמית אונו‬</a:t>
             </a:r>
             <a:endParaRPr lang="he-IL" sz="1000" dirty="0"/>
           </a:p>
@@ -7742,7 +7742,7 @@
                 <a:ea typeface="David" pitchFamily="34" charset="-122"/>
                 <a:cs typeface="David" pitchFamily="34" charset="-120"/>
               </a:rPr>
-              <a:t>‏5</a:t>
+              <a:t>‫5‬</a:t>
             </a:r>
             <a:endParaRPr lang="he-IL" sz="1100" dirty="0"/>
           </a:p>
@@ -7863,7 +7863,7 @@
                 <a:ea typeface="David" pitchFamily="34" charset="-122"/>
                 <a:cs typeface="David" pitchFamily="34" charset="-120"/>
               </a:rPr>
-              <a:t>‏תמצית המאמר: שיטת המחקר</a:t>
+              <a:t>‫תמצית המאמר: שיטת המחקר‬</a:t>
             </a:r>
             <a:endParaRPr lang="he-IL" sz="2800" dirty="0"/>
           </a:p>
@@ -7905,7 +7905,7 @@
                 <a:ea typeface="David" pitchFamily="34" charset="-122"/>
                 <a:cs typeface="David" pitchFamily="34" charset="-120"/>
               </a:rPr>
-              <a:t>‏המחקר הוא מחקר פאנל בשני גלים בהפרש של שישה חודשים, במסגרת פרויקט Craft4Health. הנתונים נאספו בשאלון מקוון ממדגם מכסות של האוכלוסייה העובדת בגרמניה ובאזור דובר הגרמנית בשווייץ, בדצמבר 2021 עד ינואר 2022 וביוני עד יולי 2022. בגל הראשון השתתפו 924 עובדים, לאחר סינון 53 משיבים רשלניים, ו-740 מהם השלימו את הגל השני, שיעור השתתפות של 80%. במדגם 56% גברים, הגיל הממוצע 48.9, ממוצע שעות העבודה השבועיות 38.1, ו-35% מהמשתתפים בעלי תואר אקדמי (Cetkovská et al., 2026).</a:t>
+              <a:t>‫המחקר הוא מחקר פאנל בשני גלים בהפרש של שישה חודשים, במסגרת פרויקט Craft4Health. הנתונים נאספו בשאלון מקוון ממדגם מכסות של האוכלוסייה העובדת בגרמניה ובאזור דובר הגרמנית בשווייץ, בדצמבר 2021 עד ינואר 2022 וביוני עד יולי 2022. בגל הראשון השתתפו 924 עובדים, לאחר סינון 53 משיבים רשלניים, ו-740 מהם השלימו את הגל השני, שיעור השתתפות של 80%. במדגם 56% גברים, הגיל הממוצע 48.9, ממוצע שעות העבודה השבועיות 38.1, ו-35% מהמשתתפים בעלי תואר אקדמי (Cetkovská et al., 2026).‬</a:t>
             </a:r>
             <a:endParaRPr lang="he-IL" sz="1600" dirty="0"/>
           </a:p>
@@ -7947,7 +7947,7 @@
                 <a:ea typeface="David" pitchFamily="34" charset="-122"/>
                 <a:cs typeface="David" pitchFamily="34" charset="-120"/>
               </a:rPr>
-              <a:t>‏תחושת קוהרנטיות בעבודה נמדדה בסולם של תשעה פריטים, שלושה לכל רכיב, בדיפרנציאל סמנטי בן שבע דרגות, למשל צפוי לעומת בלתי צפוי. עיצוב תפקיד מבוסס צרכים נמדד בסולם של 18 פריטים, שלושה לכל אחד משישה הצרכים, בסולם של חמש דרגות ביחס לשבועיים האחרונים. הניתוח נערך במודל פאנל צולב, לאחר ניתוח גורמים מאשש ובדיקת אי-שונות מדידה בין הגלים, והושוו ארבעה מודלים: יציבות בלבד, שני מודלים חד-כיווניים ומודל הדדי (Cetkovská et al., 2026).</a:t>
+              <a:t>‫תחושת קוהרנטיות בעבודה נמדדה בסולם של תשעה פריטים, שלושה לכל רכיב, בדיפרנציאל סמנטי בן שבע דרגות, למשל צפוי לעומת בלתי צפוי. עיצוב תפקיד מבוסס צרכים נמדד בסולם של 18 פריטים, שלושה לכל אחד משישה הצרכים, בסולם של חמש דרגות ביחס לשבועיים האחרונים. הניתוח נערך במודל פאנל צולב, לאחר ניתוח גורמים מאשש ובדיקת אי-שונות מדידה בין הגלים, והושוו ארבעה מודלים: יציבות בלבד, שני מודלים חד-כיווניים ומודל הדדי (Cetkovská et al., 2026).‬</a:t>
             </a:r>
             <a:endParaRPr lang="he-IL" sz="1600" dirty="0"/>
           </a:p>
@@ -8009,7 +8009,7 @@
                 <a:ea typeface="David" pitchFamily="34" charset="-122"/>
                 <a:cs typeface="David" pitchFamily="34" charset="-120"/>
               </a:rPr>
-              <a:t>‏ניהול קריירה בארגונים, הקריה האקדמית אונו</a:t>
+              <a:t>‫ניהול קריירה בארגונים, הקריה האקדמית אונו‬</a:t>
             </a:r>
             <a:endParaRPr lang="he-IL" sz="1000" dirty="0"/>
           </a:p>
@@ -8048,7 +8048,7 @@
                 <a:ea typeface="David" pitchFamily="34" charset="-122"/>
                 <a:cs typeface="David" pitchFamily="34" charset="-120"/>
               </a:rPr>
-              <a:t>‏6</a:t>
+              <a:t>‫6‬</a:t>
             </a:r>
             <a:endParaRPr lang="he-IL" sz="1100" dirty="0"/>
           </a:p>
@@ -8169,7 +8169,7 @@
                 <a:ea typeface="David" pitchFamily="34" charset="-122"/>
                 <a:cs typeface="David" pitchFamily="34" charset="-120"/>
               </a:rPr>
-              <a:t>‏תמצית המאמר: הממצאים המרכזיים</a:t>
+              <a:t>‫תמצית המאמר: הממצאים המרכזיים‬</a:t>
             </a:r>
             <a:endParaRPr lang="he-IL" sz="2800" dirty="0"/>
           </a:p>
@@ -8211,7 +8211,7 @@
                 <a:ea typeface="David" pitchFamily="34" charset="-122"/>
                 <a:cs typeface="David" pitchFamily="34" charset="-120"/>
               </a:rPr>
-              <a:t>‏המודל ההדדי השיג את ההתאמה הטובה ביותר לנתונים. עיצוב תפקיד לצרכי התקרבות ניבא באופן מובהק את שלושת הרכיבים חצי שנה מאוחר יותר: מובנות (β = 0.142, p = .002), ניהוליות (β = 0.137, p = .003) ומשמעותיות (β = 0.166, p &lt; .001). עיצוב תפקיד לצרכי הימנעות לא ניבא אף אחד מהם (β בין 0.03 ל-0.09, לא מובהק). בכיוון ההפוך, ניהוליות (β = 0.431, p &lt; .001) ומשמעותיות (β = 0.095) ניבאו עיצוב תפקיד עתידי לצרכי התקרבות, ומובנות הראתה מקדם שלילי שהמחברים מייחסים לאפקט דיכוי סטטיסטי. המודל הסביר 56% עד 66% מהשונות ברכיבי תחושת הקוהרנטיות (Cetkovská et al., 2026).</a:t>
+              <a:t>‫המודל ההדדי השיג את ההתאמה הטובה ביותר לנתונים. עיצוב תפקיד לצרכי התקרבות ניבא באופן מובהק את שלושת הרכיבים חצי שנה מאוחר יותר: מובנות (β = 0.142, p = .002), ניהוליות (β = 0.137, p = .003) ומשמעותיות (β = 0.166, p &lt; .001). עיצוב תפקיד לצרכי הימנעות לא ניבא אף אחד מהם (β בין 0.03 ל-0.09, לא מובהק). בכיוון ההפוך, ניהוליות (β = 0.431, p &lt; .001) ומשמעותיות (β = 0.095) ניבאו עיצוב תפקיד עתידי לצרכי התקרבות, ומובנות הראתה מקדם שלילי שהמחברים מייחסים לאפקט דיכוי סטטיסטי. המודל הסביר 56% עד 66% מהשונות ברכיבי תחושת הקוהרנטיות (Cetkovská et al., 2026).‬</a:t>
             </a:r>
             <a:endParaRPr lang="he-IL" sz="1500" dirty="0"/>
           </a:p>
@@ -8266,7 +8266,7 @@
                 <a:ea typeface="David" pitchFamily="34" charset="-122"/>
                 <a:cs typeface="David" pitchFamily="34" charset="-120"/>
               </a:rPr>
-              <a:t>‏תרשים 1: מקדמי ניבוי מתוקננים (β) של שלושת רכיבי תחושת הקוהרנטיות בגל 2 לפי סוג עיצוב התפקיד בגל 1 (Cetkovská et al., 2026, טבלה 4)</a:t>
+              <a:t>‫תרשים 1: מקדמי ניבוי מתוקננים (β) של שלושת רכיבי תחושת הקוהרנטיות בגל 2 לפי סוג עיצוב התפקיד בגל 1 (Cetkovská et al., 2026, טבלה 4)‬</a:t>
             </a:r>
             <a:endParaRPr lang="he-IL" sz="1100" dirty="0"/>
           </a:p>
@@ -8328,7 +8328,7 @@
                 <a:ea typeface="David" pitchFamily="34" charset="-122"/>
                 <a:cs typeface="David" pitchFamily="34" charset="-120"/>
               </a:rPr>
-              <a:t>‏ניהול קריירה בארגונים, הקריה האקדמית אונו</a:t>
+              <a:t>‫ניהול קריירה בארגונים, הקריה האקדמית אונו‬</a:t>
             </a:r>
             <a:endParaRPr lang="he-IL" sz="1000" dirty="0"/>
           </a:p>
@@ -8367,7 +8367,7 @@
                 <a:ea typeface="David" pitchFamily="34" charset="-122"/>
                 <a:cs typeface="David" pitchFamily="34" charset="-120"/>
               </a:rPr>
-              <a:t>‏7</a:t>
+              <a:t>‫7‬</a:t>
             </a:r>
             <a:endParaRPr lang="he-IL" sz="1100" dirty="0"/>
           </a:p>
@@ -8488,7 +8488,7 @@
                 <a:ea typeface="David" pitchFamily="34" charset="-122"/>
                 <a:cs typeface="David" pitchFamily="34" charset="-120"/>
               </a:rPr>
-              <a:t>‏תמצית המאמר: מסקנות המחברים, חוזקות ומגבלות</a:t>
+              <a:t>‫תמצית המאמר: מסקנות המחברים, חוזקות ומגבלות‬</a:t>
             </a:r>
             <a:endParaRPr lang="he-IL" sz="2800" dirty="0"/>
           </a:p>
@@ -8530,7 +8530,7 @@
                 <a:ea typeface="David" pitchFamily="34" charset="-122"/>
                 <a:cs typeface="David" pitchFamily="34" charset="-120"/>
               </a:rPr>
-              <a:t>‏המחברים מסיקים שתחושת הקוהרנטיות בעבודה היא משאב דינמי שמגיב לשינויים שהעובד עצמו יוזם. עובדים שמעצבים את תפקידם כדי לספק את צרכי האוטונומיה, המיומנות, המשמעות והשייכות תופסים את עבודתם, חצי שנה מאוחר יותר, כמובנת יותר, ניתנת לניהול יותר ומשמעותית יותר. עיצוב תפקיד שמכוון רק להתרחק מהעבודה ולנוח תומך בהתאוששות אך אינו משנה את תפיסת העבודה עצמה. לארגונים המסקנה היא שיש לטפח תחושת ניהוליות ולתת מרחב לעיצוב תפקיד, משום שהניהוליות היא המניע החזק ביותר ליוזמה נוספת (Cetkovská et al., 2026).</a:t>
+              <a:t>‫המחברים מסיקים שתחושת הקוהרנטיות בעבודה היא משאב דינמי שמגיב לשינויים שהעובד עצמו יוזם. עובדים שמעצבים את תפקידם כדי לספק את צרכי האוטונומיה, המיומנות, המשמעות והשייכות תופסים את עבודתם, חצי שנה מאוחר יותר, כמובנת יותר, ניתנת לניהול יותר ומשמעותית יותר. עיצוב תפקיד שמכוון רק להתרחק מהעבודה ולנוח תומך בהתאוששות אך אינו משנה את תפיסת העבודה עצמה. לארגונים המסקנה היא שיש לטפח תחושת ניהוליות ולתת מרחב לעיצוב תפקיד, משום שהניהוליות היא המניע החזק ביותר ליוזמה נוספת (Cetkovská et al., 2026).‬</a:t>
             </a:r>
             <a:endParaRPr lang="he-IL" sz="1600" dirty="0"/>
           </a:p>
@@ -8572,7 +8572,7 @@
                 <a:ea typeface="David" pitchFamily="34" charset="-122"/>
                 <a:cs typeface="David" pitchFamily="34" charset="-120"/>
               </a:rPr>
-              <a:t>‏חוזקות המחקר הן מערך האורך המאפשר לבחון כיווניות בזמן, המדגם הגדול והמאוזן, שיעור ההשתתפות הגבוה בגל השני וכלי המדידה המתוקפים. מגבלותיו, שהמחברים עצמם מפרטים, הן מדגם מערבי ולא מייצג לחלוטין, איסוף נתונים בתקופת הקורונה, דיווח עצמי בלבד, הקושי לפרש את המקדם השלילי של המובנות, ומודל פאנל צולב שאינו מפריד בין שונות בין-אישית לתוך-אישית, ולכן יש לפרש את הממצאים כקשרים בזמן ולא כהוכחה סיבתית (Cetkovská et al., 2026).</a:t>
+              <a:t>‫חוזקות המחקר הן מערך האורך המאפשר לבחון כיווניות בזמן, המדגם הגדול והמאוזן, שיעור ההשתתפות הגבוה בגל השני וכלי המדידה המתוקפים. מגבלותיו, שהמחברים עצמם מפרטים, הן מדגם מערבי ולא מייצג לחלוטין, איסוף נתונים בתקופת הקורונה, דיווח עצמי בלבד, הקושי לפרש את המקדם השלילי של המובנות, ומודל פאנל צולב שאינו מפריד בין שונות בין-אישית לתוך-אישית, ולכן יש לפרש את הממצאים כקשרים בזמן ולא כהוכחה סיבתית (Cetkovská et al., 2026).‬</a:t>
             </a:r>
             <a:endParaRPr lang="he-IL" sz="1600" dirty="0"/>
           </a:p>
@@ -8634,7 +8634,7 @@
                 <a:ea typeface="David" pitchFamily="34" charset="-122"/>
                 <a:cs typeface="David" pitchFamily="34" charset="-120"/>
               </a:rPr>
-              <a:t>‏ניהול קריירה בארגונים, הקריה האקדמית אונו</a:t>
+              <a:t>‫ניהול קריירה בארגונים, הקריה האקדמית אונו‬</a:t>
             </a:r>
             <a:endParaRPr lang="he-IL" sz="1000" dirty="0"/>
           </a:p>
@@ -8673,7 +8673,7 @@
                 <a:ea typeface="David" pitchFamily="34" charset="-122"/>
                 <a:cs typeface="David" pitchFamily="34" charset="-120"/>
               </a:rPr>
-              <a:t>‏8</a:t>
+              <a:t>‫8‬</a:t>
             </a:r>
             <a:endParaRPr lang="he-IL" sz="1100" dirty="0"/>
           </a:p>
@@ -8794,7 +8794,7 @@
                 <a:ea typeface="David" pitchFamily="34" charset="-122"/>
                 <a:cs typeface="David" pitchFamily="34" charset="-120"/>
               </a:rPr>
-              <a:t>‏המאמר המשלים: מודעות לבינה מלאכותית, חוסר ביטחון וחוסן קריירה</a:t>
+              <a:t>‫המאמר המשלים: מודעות לבינה מלאכותית, חוסר ביטחון וחוסן קריירה‬</a:t>
             </a:r>
             <a:endParaRPr lang="he-IL" sz="2800" dirty="0"/>
           </a:p>
@@ -8875,7 +8875,7 @@
                 <a:ea typeface="David" pitchFamily="34" charset="-122"/>
                 <a:cs typeface="David" pitchFamily="34" charset="-120"/>
               </a:rPr>
-              <a:t>‏לחיזוק הקשר בין המאמר המרכזי לבין נושא העבודה נבחר מחקר אורך נוסף, שפורסם בגישה פתוחה בכתב עת שפיט. המחברים, מאוניברסיטת סוּוֹן בדרום קוריאה, בחנו את ההשלכות של מודעות לבינה מלאכותית, כלומר תפיסת העובד שטכנולוגיה עלולה להחליף אותו או לשנות את תפקידו, על חוסר ביטחון תעסוקתי, על ביצועי משימה ועל התנהגות סוטה בעבודה. הנתונים נאספו בשלוש נקודות זמן מעובדי משרד במשרה מלאה (Chung et al., 2025).</a:t>
+              <a:t>‫לחיזוק הקשר בין המאמר המרכזי לבין נושא העבודה נבחר מחקר אורך נוסף, שפורסם בגישה פתוחה בכתב עת שפיט. המחברים, מאוניברסיטת סוּוֹן בדרום קוריאה, בחנו את ההשלכות של מודעות לבינה מלאכותית, כלומר תפיסת העובד שטכנולוגיה עלולה להחליף אותו או לשנות את תפקידו, על חוסר ביטחון תעסוקתי, על ביצועי משימה ועל התנהגות סוטה בעבודה. הנתונים נאספו בשלוש נקודות זמן מעובדי משרד במשרה מלאה (Chung et al., 2025).‬</a:t>
             </a:r>
             <a:endParaRPr lang="he-IL" sz="1600" dirty="0"/>
           </a:p>
@@ -8917,7 +8917,7 @@
                 <a:ea typeface="David" pitchFamily="34" charset="-122"/>
                 <a:cs typeface="David" pitchFamily="34" charset="-120"/>
               </a:rPr>
-              <a:t>‏הממצאים מראים שעצם המודעות לבינה מלאכותית, עוד לפני שינוי בפועל, מגבירה חוסר ביטחון תעסוקתי, ושחוסר הביטחון מתווך את הקשר בין המודעות לבין ירידה בביצועי המשימה ועלייה בהתנהגות סוטה. אצל עובדים בעלי חוסן קריירה גבוה הקשר בין המודעות לבין חוסר הביטחון היה חלש יותר (Chung et al., 2025). שני המאמרים משלימים זה את זה: המאמר המשלים מתאר את מקור חוסר הוודאות של שנת 2026 ומראה שמשאב אישי ממתן אותו, והמאמר המרכזי מראה כיצד בונים משאב כזה בפועל, באמצעות עיצוב תפקיד יזום (Cetkovská et al., 2026).</a:t>
+              <a:t>‫הממצאים מראים שעצם המודעות לבינה מלאכותית, עוד לפני שינוי בפועל, מגבירה חוסר ביטחון תעסוקתי, ושחוסר הביטחון מתווך את הקשר בין המודעות לבין ירידה בביצועי המשימה ועלייה בהתנהגות סוטה. אצל עובדים בעלי חוסן קריירה גבוה הקשר בין המודעות לבין חוסר הביטחון היה חלש יותר (Chung et al., 2025). שני המאמרים משלימים זה את זה: המאמר המשלים מתאר את מקור חוסר הוודאות של שנת 2026 ומראה שמשאב אישי ממתן אותו, והמאמר המרכזי מראה כיצד בונים משאב כזה בפועל, באמצעות עיצוב תפקיד יזום (Cetkovská et al., 2026).‬</a:t>
             </a:r>
             <a:endParaRPr lang="he-IL" sz="1600" dirty="0"/>
           </a:p>
@@ -8979,7 +8979,7 @@
                 <a:ea typeface="David" pitchFamily="34" charset="-122"/>
                 <a:cs typeface="David" pitchFamily="34" charset="-120"/>
               </a:rPr>
-              <a:t>‏ניהול קריירה בארגונים, הקריה האקדמית אונו</a:t>
+              <a:t>‫ניהול קריירה בארגונים, הקריה האקדמית אונו‬</a:t>
             </a:r>
             <a:endParaRPr lang="he-IL" sz="1000" dirty="0"/>
           </a:p>
@@ -9018,7 +9018,7 @@
                 <a:ea typeface="David" pitchFamily="34" charset="-122"/>
                 <a:cs typeface="David" pitchFamily="34" charset="-120"/>
               </a:rPr>
-              <a:t>‏9</a:t>
+              <a:t>‫9‬</a:t>
             </a:r>
             <a:endParaRPr lang="he-IL" sz="1100" dirty="0"/>
           </a:p>
